--- a/BeautyScope_발표.pptx
+++ b/BeautyScope_발표.pptx
@@ -15,6 +15,8 @@
     <p:sldId id="263" r:id="rId14"/>
     <p:sldId id="264" r:id="rId15"/>
     <p:sldId id="265" r:id="rId16"/>
+    <p:sldId id="266" r:id="rId17"/>
+    <p:sldId id="267" r:id="rId18"/>
   </p:sldIdLst>
   <p:sldSz cx="12191695" cy="6858000" type="screen4x3"/>
   <p:notesSz cx="6858000" cy="9144000"/>
@@ -249,7 +251,7 @@
               <c:strCache>
                 <c:ptCount val="1"/>
                 <c:pt idx="0">
-                  <c:v>ML (TF-IDF+LogReg)</c:v>
+                  <c:v>accuracy</c:v>
                 </c:pt>
               </c:strCache>
             </c:strRef>
@@ -261,29 +263,45 @@
           </c:spPr>
           <c:cat>
             <c:strRef>
-              <c:f>Sheet1!$A$2:$A$3</c:f>
+              <c:f>Sheet1!$A$2:$A$5</c:f>
               <c:strCache>
-                <c:ptCount val="2"/>
+                <c:ptCount val="4"/>
                 <c:pt idx="0">
-                  <c:v>Accuracy</c:v>
+                  <c:v>ML
+(TF-IDF+LogReg)</c:v>
                 </c:pt>
                 <c:pt idx="1">
-                  <c:v>Macro F1</c:v>
+                  <c:v>DL
+(numpy FFNN)</c:v>
+                </c:pt>
+                <c:pt idx="2">
+                  <c:v>LSTM
+(PyTorch)</c:v>
+                </c:pt>
+                <c:pt idx="3">
+                  <c:v>KoELECTRA
+(파인튜닝)</c:v>
                 </c:pt>
               </c:strCache>
             </c:strRef>
           </c:cat>
           <c:val>
             <c:numRef>
-              <c:f>Sheet1!$B$2:$B$3</c:f>
+              <c:f>Sheet1!$B$2:$B$5</c:f>
               <c:numCache>
                 <c:formatCode>General</c:formatCode>
-                <c:ptCount val="2"/>
+                <c:ptCount val="4"/>
                 <c:pt idx="0">
-                  <c:v>0.738</c:v>
+                  <c:v>0.73</c:v>
                 </c:pt>
                 <c:pt idx="1">
-                  <c:v>0.677</c:v>
+                  <c:v>0.754</c:v>
+                </c:pt>
+                <c:pt idx="2">
+                  <c:v>0.734</c:v>
+                </c:pt>
+                <c:pt idx="3">
+                  <c:v>0.772</c:v>
                 </c:pt>
               </c:numCache>
             </c:numRef>
@@ -298,7 +316,7 @@
               <c:strCache>
                 <c:ptCount val="1"/>
                 <c:pt idx="0">
-                  <c:v>DL (numpy 신경망)</c:v>
+                  <c:v>macro F1</c:v>
                 </c:pt>
               </c:strCache>
             </c:strRef>
@@ -310,29 +328,231 @@
           </c:spPr>
           <c:cat>
             <c:strRef>
-              <c:f>Sheet1!$A$2:$A$3</c:f>
+              <c:f>Sheet1!$A$2:$A$5</c:f>
               <c:strCache>
-                <c:ptCount val="2"/>
+                <c:ptCount val="4"/>
                 <c:pt idx="0">
-                  <c:v>Accuracy</c:v>
+                  <c:v>ML
+(TF-IDF+LogReg)</c:v>
                 </c:pt>
                 <c:pt idx="1">
-                  <c:v>Macro F1</c:v>
+                  <c:v>DL
+(numpy FFNN)</c:v>
+                </c:pt>
+                <c:pt idx="2">
+                  <c:v>LSTM
+(PyTorch)</c:v>
+                </c:pt>
+                <c:pt idx="3">
+                  <c:v>KoELECTRA
+(파인튜닝)</c:v>
                 </c:pt>
               </c:strCache>
             </c:strRef>
           </c:cat>
           <c:val>
             <c:numRef>
-              <c:f>Sheet1!$C$2:$C$3</c:f>
+              <c:f>Sheet1!$C$2:$C$5</c:f>
               <c:numCache>
                 <c:formatCode>General</c:formatCode>
-                <c:ptCount val="2"/>
+                <c:ptCount val="4"/>
                 <c:pt idx="0">
-                  <c:v>0.762</c:v>
+                  <c:v>0.668</c:v>
                 </c:pt>
                 <c:pt idx="1">
-                  <c:v>0.663</c:v>
+                  <c:v>0.664</c:v>
+                </c:pt>
+                <c:pt idx="2">
+                  <c:v>0.671</c:v>
+                </c:pt>
+                <c:pt idx="3">
+                  <c:v>0.66</c:v>
+                </c:pt>
+              </c:numCache>
+            </c:numRef>
+          </c:val>
+        </c:ser>
+        <c:axId val="-2068027336"/>
+        <c:axId val="-2113994440"/>
+      </c:barChart>
+      <c:catAx>
+        <c:axId val="-2068027336"/>
+        <c:scaling>
+          <c:orientation val="minMax"/>
+        </c:scaling>
+        <c:delete val="0"/>
+        <c:axPos val="b"/>
+        <c:majorTickMark val="out"/>
+        <c:minorTickMark val="none"/>
+        <c:tickLblPos val="nextTo"/>
+        <c:crossAx val="-2113994440"/>
+        <c:crosses val="autoZero"/>
+        <c:auto val="1"/>
+        <c:lblAlgn val="ctr"/>
+        <c:lblOffset val="100"/>
+        <c:noMultiLvlLbl val="0"/>
+      </c:catAx>
+      <c:valAx>
+        <c:axId val="-2113994440"/>
+        <c:scaling/>
+        <c:delete val="0"/>
+        <c:axPos val="l"/>
+        <c:majorGridlines/>
+        <c:majorTickMark val="out"/>
+        <c:minorTickMark val="none"/>
+        <c:tickLblPos val="nextTo"/>
+        <c:crossAx val="-2068027336"/>
+        <c:crosses val="autoZero"/>
+      </c:valAx>
+    </c:plotArea>
+    <c:legend>
+      <c:legendPos val="b"/>
+      <c:overlay val="0"/>
+    </c:legend>
+    <c:dispBlanksAs val="gap"/>
+  </c:chart>
+  <c:txPr>
+    <a:bodyPr/>
+    <a:lstStyle/>
+    <a:p>
+      <a:pPr>
+        <a:defRPr sz="1800"/>
+      </a:pPr>
+      <a:endParaRPr lang="en-US"/>
+    </a:p>
+  </c:txPr>
+  <c:externalData r:id="rId1">
+    <c:autoUpdate val="0"/>
+  </c:externalData>
+</c:chartSpace>
+</file>
+
+<file path=ppt/charts/chart3.xml><?xml version="1.0" encoding="utf-8"?>
+<c:chartSpace xmlns:c="http://schemas.openxmlformats.org/drawingml/2006/chart" xmlns:a="http://schemas.openxmlformats.org/drawingml/2006/main" xmlns:r="http://schemas.openxmlformats.org/officeDocument/2006/relationships">
+  <c:date1904 val="0"/>
+  <c:chart>
+    <c:autoTitleDeleted val="0"/>
+    <c:plotArea>
+      <c:barChart>
+        <c:barDir val="col"/>
+        <c:grouping val="clustered"/>
+        <c:ser>
+          <c:idx val="0"/>
+          <c:order val="0"/>
+          <c:tx>
+            <c:strRef>
+              <c:f>Sheet1!$B$1</c:f>
+              <c:strCache>
+                <c:ptCount val="1"/>
+                <c:pt idx="0">
+                  <c:v>보정 전</c:v>
+                </c:pt>
+              </c:strCache>
+            </c:strRef>
+          </c:tx>
+          <c:spPr>
+            <a:solidFill>
+              <a:srgbClr val="555A6E"/>
+            </a:solidFill>
+          </c:spPr>
+          <c:cat>
+            <c:strRef>
+              <c:f>Sheet1!$A$2:$A$5</c:f>
+              <c:strCache>
+                <c:ptCount val="4"/>
+                <c:pt idx="0">
+                  <c:v>ML accuracy</c:v>
+                </c:pt>
+                <c:pt idx="1">
+                  <c:v>ML macro F1</c:v>
+                </c:pt>
+                <c:pt idx="2">
+                  <c:v>DL accuracy</c:v>
+                </c:pt>
+                <c:pt idx="3">
+                  <c:v>DL macro F1</c:v>
+                </c:pt>
+              </c:strCache>
+            </c:strRef>
+          </c:cat>
+          <c:val>
+            <c:numRef>
+              <c:f>Sheet1!$B$2:$B$5</c:f>
+              <c:numCache>
+                <c:formatCode>General</c:formatCode>
+                <c:ptCount val="4"/>
+                <c:pt idx="0">
+                  <c:v>0.806</c:v>
+                </c:pt>
+                <c:pt idx="1">
+                  <c:v>0.626</c:v>
+                </c:pt>
+                <c:pt idx="2">
+                  <c:v>0.89</c:v>
+                </c:pt>
+                <c:pt idx="3">
+                  <c:v>0.712</c:v>
+                </c:pt>
+              </c:numCache>
+            </c:numRef>
+          </c:val>
+        </c:ser>
+        <c:ser>
+          <c:idx val="1"/>
+          <c:order val="1"/>
+          <c:tx>
+            <c:strRef>
+              <c:f>Sheet1!$C$1</c:f>
+              <c:strCache>
+                <c:ptCount val="1"/>
+                <c:pt idx="0">
+                  <c:v>보정 후</c:v>
+                </c:pt>
+              </c:strCache>
+            </c:strRef>
+          </c:tx>
+          <c:spPr>
+            <a:solidFill>
+              <a:srgbClr val="1E2761"/>
+            </a:solidFill>
+          </c:spPr>
+          <c:cat>
+            <c:strRef>
+              <c:f>Sheet1!$A$2:$A$5</c:f>
+              <c:strCache>
+                <c:ptCount val="4"/>
+                <c:pt idx="0">
+                  <c:v>ML accuracy</c:v>
+                </c:pt>
+                <c:pt idx="1">
+                  <c:v>ML macro F1</c:v>
+                </c:pt>
+                <c:pt idx="2">
+                  <c:v>DL accuracy</c:v>
+                </c:pt>
+                <c:pt idx="3">
+                  <c:v>DL macro F1</c:v>
+                </c:pt>
+              </c:strCache>
+            </c:strRef>
+          </c:cat>
+          <c:val>
+            <c:numRef>
+              <c:f>Sheet1!$C$2:$C$5</c:f>
+              <c:numCache>
+                <c:formatCode>General</c:formatCode>
+                <c:ptCount val="4"/>
+                <c:pt idx="0">
+                  <c:v>0.909</c:v>
+                </c:pt>
+                <c:pt idx="1">
+                  <c:v>0.675</c:v>
+                </c:pt>
+                <c:pt idx="2">
+                  <c:v>0.92</c:v>
+                </c:pt>
+                <c:pt idx="3">
+                  <c:v>0.711</c:v>
                 </c:pt>
               </c:numCache>
             </c:numRef>
@@ -3426,7 +3646,7 @@
         </p:nvSpPr>
         <p:spPr>
           <a:xfrm>
-            <a:off x="914400" y="2286000"/>
+            <a:off x="914400" y="2011680"/>
             <a:ext cx="10332720" cy="1097280"/>
           </a:xfrm>
           <a:prstGeom prst="rect">
@@ -3461,7 +3681,7 @@
         </p:nvSpPr>
         <p:spPr>
           <a:xfrm>
-            <a:off x="914400" y="3429000"/>
+            <a:off x="914400" y="3154680"/>
             <a:ext cx="10332720" cy="548640"/>
           </a:xfrm>
           <a:prstGeom prst="rect">
@@ -3477,13 +3697,13 @@
           <a:p>
             <a:pPr algn="l"/>
             <a:r>
-              <a:rPr sz="2000" b="0" i="0">
+              <a:rPr sz="1900" b="0" i="0">
                 <a:solidFill>
                   <a:srgbClr val="CADCFC"/>
                 </a:solidFill>
                 <a:latin typeface="Calibri"/>
               </a:rPr>
-              <a:t>화장품 리뷰 538,774건으로 만든 감성 분석 서비스</a:t>
+              <a:t>화장품 리뷰 538,774건으로 만든 감성 분석 + 속성기반 리포트 서비스</a:t>
             </a:r>
           </a:p>
         </p:txBody>
@@ -3496,7 +3716,7 @@
         </p:nvSpPr>
         <p:spPr>
           <a:xfrm>
-            <a:off x="914400" y="4023360"/>
+            <a:off x="914400" y="3749039"/>
             <a:ext cx="10332720" cy="457200"/>
           </a:xfrm>
           <a:prstGeom prst="rect">
@@ -3512,13 +3732,13 @@
           <a:p>
             <a:pPr algn="l"/>
             <a:r>
-              <a:rPr sz="1400" b="0" i="1">
+              <a:rPr sz="1350" b="0" i="1">
                 <a:solidFill>
                   <a:srgbClr val="CADCFC"/>
                 </a:solidFill>
                 <a:latin typeface="Calibri"/>
               </a:rPr>
-              <a:t>쿠팡 · 무신사 · 올리브영 데이터 통합 → ML/DL 감성 분류 모델 → Streamlit 서비스</a:t>
+              <a:t>쿠팡 → 무신사·올리브영 추가 수집 → ML/DL 감성분류 → 속성분석(ABSA) → Streamlit 배포</a:t>
             </a:r>
           </a:p>
         </p:txBody>
@@ -3531,7 +3751,7 @@
         </p:nvSpPr>
         <p:spPr>
           <a:xfrm>
-            <a:off x="914400" y="5120640"/>
+            <a:off x="914400" y="4937760"/>
             <a:ext cx="1645920" cy="411480"/>
           </a:xfrm>
           <a:prstGeom prst="roundRect">
@@ -3585,7 +3805,7 @@
         </p:nvSpPr>
         <p:spPr>
           <a:xfrm>
-            <a:off x="2697480" y="5120640"/>
+            <a:off x="2697480" y="4937760"/>
             <a:ext cx="2103120" cy="411480"/>
           </a:xfrm>
           <a:prstGeom prst="roundRect">
@@ -3639,7 +3859,61 @@
         </p:nvSpPr>
         <p:spPr>
           <a:xfrm>
-            <a:off x="4937760" y="5120640"/>
+            <a:off x="4937760" y="4937760"/>
+            <a:ext cx="1828800" cy="411480"/>
+          </a:xfrm>
+          <a:prstGeom prst="roundRect">
+            <a:avLst>
+              <a:gd name="adj" fmla="val 50000"/>
+            </a:avLst>
+          </a:prstGeom>
+          <a:solidFill>
+            <a:srgbClr val="F96167"/>
+          </a:solidFill>
+          <a:ln>
+            <a:noFill/>
+          </a:ln>
+          <a:effectLst/>
+        </p:spPr>
+        <p:style>
+          <a:lnRef idx="1">
+            <a:schemeClr val="accent1"/>
+          </a:lnRef>
+          <a:fillRef idx="3">
+            <a:schemeClr val="accent1"/>
+          </a:fillRef>
+          <a:effectRef idx="2">
+            <a:schemeClr val="accent1"/>
+          </a:effectRef>
+          <a:fontRef idx="minor">
+            <a:schemeClr val="lt1"/>
+          </a:fontRef>
+        </p:style>
+        <p:txBody>
+          <a:bodyPr rtlCol="0" anchor="ctr" wrap="none" lIns="45720" rIns="45720" tIns="0" bIns="0"/>
+          <a:lstStyle/>
+          <a:p>
+            <a:pPr algn="ctr"/>
+            <a:r>
+              <a:rPr sz="1200" b="1">
+                <a:solidFill>
+                  <a:srgbClr val="FFFFFF"/>
+                </a:solidFill>
+              </a:rPr>
+              <a:t>속성분석(ABSA)</a:t>
+            </a:r>
+          </a:p>
+        </p:txBody>
+      </p:sp>
+      <p:sp>
+        <p:nvSpPr>
+          <p:cNvPr id="9" name="Rounded Rectangle 8"/>
+          <p:cNvSpPr/>
+          <p:nvPr/>
+        </p:nvSpPr>
+        <p:spPr>
+          <a:xfrm>
+            <a:off x="6903720" y="4937760"/>
             <a:ext cx="1828800" cy="411480"/>
           </a:xfrm>
           <a:prstGeom prst="roundRect">
@@ -3718,6 +3992,223 @@
             <a:avLst/>
           </a:prstGeom>
           <a:solidFill>
+            <a:srgbClr val="FFFFFF"/>
+          </a:solidFill>
+          <a:ln>
+            <a:noFill/>
+          </a:ln>
+          <a:effectLst/>
+        </p:spPr>
+        <p:style>
+          <a:lnRef idx="1">
+            <a:schemeClr val="accent1"/>
+          </a:lnRef>
+          <a:fillRef idx="3">
+            <a:schemeClr val="accent1"/>
+          </a:fillRef>
+          <a:effectRef idx="2">
+            <a:schemeClr val="accent1"/>
+          </a:effectRef>
+          <a:fontRef idx="minor">
+            <a:schemeClr val="lt1"/>
+          </a:fontRef>
+        </p:style>
+        <p:txBody>
+          <a:bodyPr rtlCol="0" anchor="ctr"/>
+          <a:lstStyle/>
+          <a:p>
+            <a:pPr algn="ctr"/>
+          </a:p>
+        </p:txBody>
+      </p:sp>
+      <p:sp>
+        <p:nvSpPr>
+          <p:cNvPr id="3" name="TextBox 2"/>
+          <p:cNvSpPr txBox="1"/>
+          <p:nvPr/>
+        </p:nvSpPr>
+        <p:spPr>
+          <a:xfrm>
+            <a:off x="640080" y="457200"/>
+            <a:ext cx="10515600" cy="731520"/>
+          </a:xfrm>
+          <a:prstGeom prst="rect">
+            <a:avLst/>
+          </a:prstGeom>
+          <a:noFill/>
+        </p:spPr>
+        <p:txBody>
+          <a:bodyPr wrap="square" anchor="t" lIns="0" rIns="0" tIns="0" bIns="0">
+            <a:spAutoFit/>
+          </a:bodyPr>
+          <a:lstStyle/>
+          <a:p>
+            <a:pPr algn="l"/>
+            <a:r>
+              <a:rPr sz="2900" b="1" i="0">
+                <a:solidFill>
+                  <a:srgbClr val="1E2761"/>
+                </a:solidFill>
+                <a:latin typeface="Georgia"/>
+              </a:rPr>
+              <a:t>Streamlit 서비스 — BeautyScope</a:t>
+            </a:r>
+          </a:p>
+        </p:txBody>
+      </p:sp>
+      <p:sp>
+        <p:nvSpPr>
+          <p:cNvPr id="4" name="Rounded Rectangle 3"/>
+          <p:cNvSpPr/>
+          <p:nvPr/>
+        </p:nvSpPr>
+        <p:spPr>
+          <a:xfrm>
+            <a:off x="640080" y="1554480"/>
+            <a:ext cx="3520440" cy="2103120"/>
+          </a:xfrm>
+          <a:prstGeom prst="roundRect">
+            <a:avLst>
+              <a:gd name="adj" fmla="val 8000"/>
+            </a:avLst>
+          </a:prstGeom>
+          <a:solidFill>
+            <a:srgbClr val="F96167"/>
+          </a:solidFill>
+          <a:ln>
+            <a:noFill/>
+          </a:ln>
+          <a:effectLst/>
+        </p:spPr>
+        <p:style>
+          <a:lnRef idx="1">
+            <a:schemeClr val="accent1"/>
+          </a:lnRef>
+          <a:fillRef idx="3">
+            <a:schemeClr val="accent1"/>
+          </a:fillRef>
+          <a:effectRef idx="2">
+            <a:schemeClr val="accent1"/>
+          </a:effectRef>
+          <a:fontRef idx="minor">
+            <a:schemeClr val="lt1"/>
+          </a:fontRef>
+        </p:style>
+        <p:txBody>
+          <a:bodyPr rtlCol="0" anchor="ctr"/>
+          <a:lstStyle/>
+          <a:p>
+            <a:pPr algn="ctr"/>
+          </a:p>
+        </p:txBody>
+      </p:sp>
+      <p:sp>
+        <p:nvSpPr>
+          <p:cNvPr id="5" name="TextBox 4"/>
+          <p:cNvSpPr txBox="1"/>
+          <p:nvPr/>
+        </p:nvSpPr>
+        <p:spPr>
+          <a:xfrm>
+            <a:off x="868680" y="1783080"/>
+            <a:ext cx="3063240" cy="457200"/>
+          </a:xfrm>
+          <a:prstGeom prst="rect">
+            <a:avLst/>
+          </a:prstGeom>
+          <a:noFill/>
+        </p:spPr>
+        <p:txBody>
+          <a:bodyPr wrap="square" anchor="t" lIns="0" rIns="0" tIns="0" bIns="0">
+            <a:spAutoFit/>
+          </a:bodyPr>
+          <a:lstStyle/>
+          <a:p>
+            <a:pPr algn="l"/>
+            <a:r>
+              <a:rPr sz="1500" b="1" i="0">
+                <a:solidFill>
+                  <a:srgbClr val="FFFFFF"/>
+                </a:solidFill>
+                <a:latin typeface="Calibri"/>
+              </a:rPr>
+              <a:t>🛍️ 상품 리포트</a:t>
+            </a:r>
+          </a:p>
+        </p:txBody>
+      </p:sp>
+      <p:sp>
+        <p:nvSpPr>
+          <p:cNvPr id="6" name="TextBox 5"/>
+          <p:cNvSpPr txBox="1"/>
+          <p:nvPr/>
+        </p:nvSpPr>
+        <p:spPr>
+          <a:xfrm>
+            <a:off x="868680" y="2331720"/>
+            <a:ext cx="3063240" cy="1097280"/>
+          </a:xfrm>
+          <a:prstGeom prst="rect">
+            <a:avLst/>
+          </a:prstGeom>
+          <a:noFill/>
+        </p:spPr>
+        <p:txBody>
+          <a:bodyPr wrap="square" anchor="t" lIns="0" rIns="0" tIns="0" bIns="0">
+            <a:spAutoFit/>
+          </a:bodyPr>
+          <a:lstStyle/>
+          <a:p>
+            <a:pPr algn="l">
+              <a:lnSpc>
+                <a:spcPct val="130000"/>
+              </a:lnSpc>
+            </a:pPr>
+            <a:r>
+              <a:rPr sz="1250" b="0" i="0">
+                <a:solidFill>
+                  <a:srgbClr val="CADCFC"/>
+                </a:solidFill>
+                <a:latin typeface="Calibri"/>
+              </a:rPr>
+              <a:t>상품 검색 → 속성별 긍정비율</a:t>
+            </a:r>
+          </a:p>
+          <a:p>
+            <a:pPr algn="l">
+              <a:lnSpc>
+                <a:spcPct val="130000"/>
+              </a:lnSpc>
+            </a:pPr>
+            <a:r>
+              <a:rPr sz="1250" b="0" i="0">
+                <a:solidFill>
+                  <a:srgbClr val="CADCFC"/>
+                </a:solidFill>
+                <a:latin typeface="Calibri"/>
+              </a:rPr>
+              <a:t>+ 대표 긍정/부정 리뷰</a:t>
+            </a:r>
+          </a:p>
+        </p:txBody>
+      </p:sp>
+      <p:sp>
+        <p:nvSpPr>
+          <p:cNvPr id="7" name="Rounded Rectangle 6"/>
+          <p:cNvSpPr/>
+          <p:nvPr/>
+        </p:nvSpPr>
+        <p:spPr>
+          <a:xfrm>
+            <a:off x="4343400" y="1554480"/>
+            <a:ext cx="3520440" cy="2103120"/>
+          </a:xfrm>
+          <a:prstGeom prst="roundRect">
+            <a:avLst>
+              <a:gd name="adj" fmla="val 8000"/>
+            </a:avLst>
+          </a:prstGeom>
+          <a:solidFill>
             <a:srgbClr val="1E2761"/>
           </a:solidFill>
           <a:ln>
@@ -3749,14 +4240,14 @@
       </p:sp>
       <p:sp>
         <p:nvSpPr>
-          <p:cNvPr id="3" name="TextBox 2"/>
+          <p:cNvPr id="8" name="TextBox 7"/>
           <p:cNvSpPr txBox="1"/>
           <p:nvPr/>
         </p:nvSpPr>
         <p:spPr>
           <a:xfrm>
-            <a:off x="914400" y="1188720"/>
-            <a:ext cx="10332720" cy="731520"/>
+            <a:off x="4572000" y="1783080"/>
+            <a:ext cx="3063240" cy="457200"/>
           </a:xfrm>
           <a:prstGeom prst="rect">
             <a:avLst/>
@@ -3771,27 +4262,253 @@
           <a:p>
             <a:pPr algn="l"/>
             <a:r>
-              <a:rPr sz="3600" b="1" i="0">
+              <a:rPr sz="1500" b="1" i="0">
                 <a:solidFill>
                   <a:srgbClr val="FFFFFF"/>
                 </a:solidFill>
-                <a:latin typeface="Georgia"/>
-              </a:rPr>
-              <a:t>정리</a:t>
-            </a:r>
-          </a:p>
-        </p:txBody>
-      </p:sp>
-      <p:sp>
-        <p:nvSpPr>
-          <p:cNvPr id="4" name="TextBox 3"/>
+                <a:latin typeface="Calibri"/>
+              </a:rPr>
+              <a:t>🔍 리뷰 텍스트 분석</a:t>
+            </a:r>
+          </a:p>
+        </p:txBody>
+      </p:sp>
+      <p:sp>
+        <p:nvSpPr>
+          <p:cNvPr id="9" name="TextBox 8"/>
           <p:cNvSpPr txBox="1"/>
           <p:nvPr/>
         </p:nvSpPr>
         <p:spPr>
           <a:xfrm>
-            <a:off x="914400" y="2194560"/>
-            <a:ext cx="10058400" cy="3200400"/>
+            <a:off x="4572000" y="2331720"/>
+            <a:ext cx="3063240" cy="1097280"/>
+          </a:xfrm>
+          <a:prstGeom prst="rect">
+            <a:avLst/>
+          </a:prstGeom>
+          <a:noFill/>
+        </p:spPr>
+        <p:txBody>
+          <a:bodyPr wrap="square" anchor="t" lIns="0" rIns="0" tIns="0" bIns="0">
+            <a:spAutoFit/>
+          </a:bodyPr>
+          <a:lstStyle/>
+          <a:p>
+            <a:pPr algn="l">
+              <a:lnSpc>
+                <a:spcPct val="130000"/>
+              </a:lnSpc>
+            </a:pPr>
+            <a:r>
+              <a:rPr sz="1250" b="0" i="0">
+                <a:solidFill>
+                  <a:srgbClr val="CADCFC"/>
+                </a:solidFill>
+                <a:latin typeface="Calibri"/>
+              </a:rPr>
+              <a:t>텍스트 입력 → ML/DL 동시</a:t>
+            </a:r>
+          </a:p>
+          <a:p>
+            <a:pPr algn="l">
+              <a:lnSpc>
+                <a:spcPct val="130000"/>
+              </a:lnSpc>
+            </a:pPr>
+            <a:r>
+              <a:rPr sz="1250" b="0" i="0">
+                <a:solidFill>
+                  <a:srgbClr val="CADCFC"/>
+                </a:solidFill>
+                <a:latin typeface="Calibri"/>
+              </a:rPr>
+              <a:t>예측 + 확률 시각화</a:t>
+            </a:r>
+          </a:p>
+        </p:txBody>
+      </p:sp>
+      <p:sp>
+        <p:nvSpPr>
+          <p:cNvPr id="10" name="Rounded Rectangle 9"/>
+          <p:cNvSpPr/>
+          <p:nvPr/>
+        </p:nvSpPr>
+        <p:spPr>
+          <a:xfrm>
+            <a:off x="8046719" y="1554480"/>
+            <a:ext cx="3520440" cy="2103120"/>
+          </a:xfrm>
+          <a:prstGeom prst="roundRect">
+            <a:avLst>
+              <a:gd name="adj" fmla="val 8000"/>
+            </a:avLst>
+          </a:prstGeom>
+          <a:solidFill>
+            <a:srgbClr val="1E2761"/>
+          </a:solidFill>
+          <a:ln>
+            <a:noFill/>
+          </a:ln>
+          <a:effectLst/>
+        </p:spPr>
+        <p:style>
+          <a:lnRef idx="1">
+            <a:schemeClr val="accent1"/>
+          </a:lnRef>
+          <a:fillRef idx="3">
+            <a:schemeClr val="accent1"/>
+          </a:fillRef>
+          <a:effectRef idx="2">
+            <a:schemeClr val="accent1"/>
+          </a:effectRef>
+          <a:fontRef idx="minor">
+            <a:schemeClr val="lt1"/>
+          </a:fontRef>
+        </p:style>
+        <p:txBody>
+          <a:bodyPr rtlCol="0" anchor="ctr"/>
+          <a:lstStyle/>
+          <a:p>
+            <a:pPr algn="ctr"/>
+          </a:p>
+        </p:txBody>
+      </p:sp>
+      <p:sp>
+        <p:nvSpPr>
+          <p:cNvPr id="11" name="TextBox 10"/>
+          <p:cNvSpPr txBox="1"/>
+          <p:nvPr/>
+        </p:nvSpPr>
+        <p:spPr>
+          <a:xfrm>
+            <a:off x="8275319" y="1783080"/>
+            <a:ext cx="3063240" cy="457200"/>
+          </a:xfrm>
+          <a:prstGeom prst="rect">
+            <a:avLst/>
+          </a:prstGeom>
+          <a:noFill/>
+        </p:spPr>
+        <p:txBody>
+          <a:bodyPr wrap="square" anchor="t" lIns="0" rIns="0" tIns="0" bIns="0">
+            <a:spAutoFit/>
+          </a:bodyPr>
+          <a:lstStyle/>
+          <a:p>
+            <a:pPr algn="l"/>
+            <a:r>
+              <a:rPr sz="1500" b="1" i="0">
+                <a:solidFill>
+                  <a:srgbClr val="FFFFFF"/>
+                </a:solidFill>
+                <a:latin typeface="Calibri"/>
+              </a:rPr>
+              <a:t>📊 데이터 대시보드</a:t>
+            </a:r>
+          </a:p>
+        </p:txBody>
+      </p:sp>
+      <p:sp>
+        <p:nvSpPr>
+          <p:cNvPr id="12" name="TextBox 11"/>
+          <p:cNvSpPr txBox="1"/>
+          <p:nvPr/>
+        </p:nvSpPr>
+        <p:spPr>
+          <a:xfrm>
+            <a:off x="8275319" y="2331720"/>
+            <a:ext cx="3063240" cy="1097280"/>
+          </a:xfrm>
+          <a:prstGeom prst="rect">
+            <a:avLst/>
+          </a:prstGeom>
+          <a:noFill/>
+        </p:spPr>
+        <p:txBody>
+          <a:bodyPr wrap="square" anchor="t" lIns="0" rIns="0" tIns="0" bIns="0">
+            <a:spAutoFit/>
+          </a:bodyPr>
+          <a:lstStyle/>
+          <a:p>
+            <a:pPr algn="l">
+              <a:lnSpc>
+                <a:spcPct val="130000"/>
+              </a:lnSpc>
+            </a:pPr>
+            <a:r>
+              <a:rPr sz="1250" b="0" i="0">
+                <a:solidFill>
+                  <a:srgbClr val="CADCFC"/>
+                </a:solidFill>
+                <a:latin typeface="Calibri"/>
+              </a:rPr>
+              <a:t>플랫폼/별점/트렌드/카테고리</a:t>
+            </a:r>
+          </a:p>
+          <a:p>
+            <a:pPr algn="l">
+              <a:lnSpc>
+                <a:spcPct val="130000"/>
+              </a:lnSpc>
+            </a:pPr>
+            <a:r>
+              <a:rPr sz="1250" b="0" i="0">
+                <a:solidFill>
+                  <a:srgbClr val="CADCFC"/>
+                </a:solidFill>
+                <a:latin typeface="Calibri"/>
+              </a:rPr>
+              <a:t>분포, 형태소 기반 키워드</a:t>
+            </a:r>
+          </a:p>
+        </p:txBody>
+      </p:sp>
+      <p:sp>
+        <p:nvSpPr>
+          <p:cNvPr id="13" name="TextBox 12"/>
+          <p:cNvSpPr txBox="1"/>
+          <p:nvPr/>
+        </p:nvSpPr>
+        <p:spPr>
+          <a:xfrm>
+            <a:off x="640080" y="3931920"/>
+            <a:ext cx="10515600" cy="365760"/>
+          </a:xfrm>
+          <a:prstGeom prst="rect">
+            <a:avLst/>
+          </a:prstGeom>
+          <a:noFill/>
+        </p:spPr>
+        <p:txBody>
+          <a:bodyPr wrap="square" anchor="t" lIns="0" rIns="0" tIns="0" bIns="0">
+            <a:spAutoFit/>
+          </a:bodyPr>
+          <a:lstStyle/>
+          <a:p>
+            <a:pPr algn="l"/>
+            <a:r>
+              <a:rPr sz="1600" b="1" i="0">
+                <a:solidFill>
+                  <a:srgbClr val="1E2761"/>
+                </a:solidFill>
+                <a:latin typeface="Calibri"/>
+              </a:rPr>
+              <a:t>동작 확인</a:t>
+            </a:r>
+          </a:p>
+        </p:txBody>
+      </p:sp>
+      <p:sp>
+        <p:nvSpPr>
+          <p:cNvPr id="14" name="TextBox 13"/>
+          <p:cNvSpPr txBox="1"/>
+          <p:nvPr/>
+        </p:nvSpPr>
+        <p:spPr>
+          <a:xfrm>
+            <a:off x="640080" y="4389120"/>
+            <a:ext cx="10515600" cy="1645920"/>
           </a:xfrm>
           <a:prstGeom prst="rect">
             <a:avLst/>
@@ -3810,13 +4527,13 @@
               </a:spcAft>
             </a:pPr>
             <a:r>
-              <a:rPr sz="1800">
-                <a:solidFill>
-                  <a:srgbClr val="FFFFFF"/>
-                </a:solidFill>
-                <a:latin typeface="Calibri"/>
-              </a:rPr>
-              <a:t>•  3개 플랫폼 538,774건 데이터를 통일된 기준으로 통합 (가장 큰 난관: 라벨 기준 불일치)</a:t>
+              <a:rPr sz="1400">
+                <a:solidFill>
+                  <a:srgbClr val="21295C"/>
+                </a:solidFill>
+                <a:latin typeface="Calibri"/>
+              </a:rPr>
+              <a:t>•  로컬 환경에서 streamlit run app.py 실행 → HTTP 200 응답 확인</a:t>
             </a:r>
           </a:p>
           <a:p>
@@ -3826,13 +4543,13 @@
               </a:spcAft>
             </a:pPr>
             <a:r>
-              <a:rPr sz="1800">
-                <a:solidFill>
-                  <a:srgbClr val="FFFFFF"/>
-                </a:solidFill>
-                <a:latin typeface="Calibri"/>
-              </a:rPr>
-              <a:t>•  환경 제약(PyTorch 미설치)에 막혔지만 numpy로 신경망을 직접 구현해 ML/DL을 비교</a:t>
+              <a:rPr sz="1400">
+                <a:solidFill>
+                  <a:srgbClr val="21295C"/>
+                </a:solidFill>
+                <a:latin typeface="Calibri"/>
+              </a:rPr>
+              <a:t>•  상품 검색 → 속성별 긍정비율/대표리뷰 정상 출력 확인</a:t>
             </a:r>
           </a:p>
           <a:p>
@@ -3842,15 +4559,135 @@
               </a:spcAft>
             </a:pPr>
             <a:r>
-              <a:rPr sz="1800">
-                <a:solidFill>
-                  <a:srgbClr val="FFFFFF"/>
-                </a:solidFill>
-                <a:latin typeface="Calibri"/>
-              </a:rPr>
-              <a:t>•  ML accuracy 0.738 / DL accuracy 0.762 — 모델보다 데이터 라벨 품질이 핵심이었다는 결론</a:t>
-            </a:r>
-          </a:p>
+              <a:rPr sz="1400">
+                <a:solidFill>
+                  <a:srgbClr val="21295C"/>
+                </a:solidFill>
+                <a:latin typeface="Calibri"/>
+              </a:rPr>
+              <a:t>•  리뷰 텍스트 입력 → ML/DL 예측 일치 확인 (긍정/부정 예시 모두 정답)</a:t>
+            </a:r>
+          </a:p>
+        </p:txBody>
+      </p:sp>
+    </p:spTree>
+  </p:cSld>
+  <p:clrMapOvr>
+    <a:masterClrMapping/>
+  </p:clrMapOvr>
+</p:sld>
+</file>
+
+<file path=ppt/slides/slide11.xml><?xml version="1.0" encoding="utf-8"?>
+<p:sld xmlns:a="http://schemas.openxmlformats.org/drawingml/2006/main" xmlns:p="http://schemas.openxmlformats.org/presentationml/2006/main" xmlns:r="http://schemas.openxmlformats.org/officeDocument/2006/relationships">
+  <p:cSld>
+    <p:spTree>
+      <p:nvGrpSpPr>
+        <p:cNvPr id="1" name=""/>
+        <p:cNvGrpSpPr/>
+        <p:nvPr/>
+      </p:nvGrpSpPr>
+      <p:grpSpPr/>
+      <p:sp>
+        <p:nvSpPr>
+          <p:cNvPr id="2" name="Rectangle 1"/>
+          <p:cNvSpPr/>
+          <p:nvPr/>
+        </p:nvSpPr>
+        <p:spPr>
+          <a:xfrm>
+            <a:off x="0" y="0"/>
+            <a:ext cx="12191695" cy="6858000"/>
+          </a:xfrm>
+          <a:prstGeom prst="rect">
+            <a:avLst/>
+          </a:prstGeom>
+          <a:solidFill>
+            <a:srgbClr val="FFFFFF"/>
+          </a:solidFill>
+          <a:ln>
+            <a:noFill/>
+          </a:ln>
+          <a:effectLst/>
+        </p:spPr>
+        <p:style>
+          <a:lnRef idx="1">
+            <a:schemeClr val="accent1"/>
+          </a:lnRef>
+          <a:fillRef idx="3">
+            <a:schemeClr val="accent1"/>
+          </a:fillRef>
+          <a:effectRef idx="2">
+            <a:schemeClr val="accent1"/>
+          </a:effectRef>
+          <a:fontRef idx="minor">
+            <a:schemeClr val="lt1"/>
+          </a:fontRef>
+        </p:style>
+        <p:txBody>
+          <a:bodyPr rtlCol="0" anchor="ctr"/>
+          <a:lstStyle/>
+          <a:p>
+            <a:pPr algn="ctr"/>
+          </a:p>
+        </p:txBody>
+      </p:sp>
+      <p:sp>
+        <p:nvSpPr>
+          <p:cNvPr id="3" name="TextBox 2"/>
+          <p:cNvSpPr txBox="1"/>
+          <p:nvPr/>
+        </p:nvSpPr>
+        <p:spPr>
+          <a:xfrm>
+            <a:off x="640080" y="457200"/>
+            <a:ext cx="7315200" cy="731520"/>
+          </a:xfrm>
+          <a:prstGeom prst="rect">
+            <a:avLst/>
+          </a:prstGeom>
+          <a:noFill/>
+        </p:spPr>
+        <p:txBody>
+          <a:bodyPr wrap="square" anchor="t" lIns="0" rIns="0" tIns="0" bIns="0">
+            <a:spAutoFit/>
+          </a:bodyPr>
+          <a:lstStyle/>
+          <a:p>
+            <a:pPr algn="l"/>
+            <a:r>
+              <a:rPr sz="3200" b="1" i="0">
+                <a:solidFill>
+                  <a:srgbClr val="1E2761"/>
+                </a:solidFill>
+                <a:latin typeface="Georgia"/>
+              </a:rPr>
+              <a:t>배포 준비</a:t>
+            </a:r>
+          </a:p>
+        </p:txBody>
+      </p:sp>
+      <p:sp>
+        <p:nvSpPr>
+          <p:cNvPr id="4" name="TextBox 3"/>
+          <p:cNvSpPr txBox="1"/>
+          <p:nvPr/>
+        </p:nvSpPr>
+        <p:spPr>
+          <a:xfrm>
+            <a:off x="640080" y="1554480"/>
+            <a:ext cx="10515600" cy="3200400"/>
+          </a:xfrm>
+          <a:prstGeom prst="rect">
+            <a:avLst/>
+          </a:prstGeom>
+          <a:noFill/>
+        </p:spPr>
+        <p:txBody>
+          <a:bodyPr wrap="square">
+            <a:spAutoFit/>
+          </a:bodyPr>
+          <a:lstStyle/>
           <a:p>
             <a:pPr>
               <a:spcAft>
@@ -3858,13 +4695,362 @@
               </a:spcAft>
             </a:pPr>
             <a:r>
-              <a:rPr sz="1800">
+              <a:rPr sz="1600">
+                <a:solidFill>
+                  <a:srgbClr val="21295C"/>
+                </a:solidFill>
+                <a:latin typeface="Calibri"/>
+              </a:rPr>
+              <a:t>•  requirements.txt로 의존성 고정 (scikit-learn, streamlit, pandas, numpy, scipy, joblib, konlpy)</a:t>
+            </a:r>
+          </a:p>
+          <a:p>
+            <a:pPr>
+              <a:spcAft>
+                <a:spcPts val="800"/>
+              </a:spcAft>
+            </a:pPr>
+            <a:r>
+              <a:rPr sz="1600">
+                <a:solidFill>
+                  <a:srgbClr val="21295C"/>
+                </a:solidFill>
+                <a:latin typeface="Calibri"/>
+              </a:rPr>
+              <a:t>•  학습된 모델 + 집계 데이터를 models/에 포함 → 재학습 없이 바로 서비스 구동 가능</a:t>
+            </a:r>
+          </a:p>
+          <a:p>
+            <a:pPr>
+              <a:spcAft>
+                <a:spcPts val="800"/>
+              </a:spcAft>
+            </a:pPr>
+            <a:r>
+              <a:rPr sz="1600">
+                <a:solidFill>
+                  <a:srgbClr val="21295C"/>
+                </a:solidFill>
+                <a:latin typeface="Calibri"/>
+              </a:rPr>
+              <a:t>•  538,774건 원본 대신 사전 집계 CSV(대시보드/상품리포트용)를 서비스가 읽도록 분리</a:t>
+            </a:r>
+          </a:p>
+          <a:p>
+            <a:pPr>
+              <a:spcAft>
+                <a:spcPts val="800"/>
+              </a:spcAft>
+            </a:pPr>
+            <a:r>
+              <a:rPr sz="1600">
+                <a:solidFill>
+                  <a:srgbClr val="21295C"/>
+                </a:solidFill>
+                <a:latin typeface="Calibri"/>
+              </a:rPr>
+              <a:t>•  대용량 원본 크롤링 CSV는 .gitignore 처리, 정제된 데이터/모델/집계 파일만 추적</a:t>
+            </a:r>
+          </a:p>
+        </p:txBody>
+      </p:sp>
+      <p:sp>
+        <p:nvSpPr>
+          <p:cNvPr id="5" name="Rounded Rectangle 4"/>
+          <p:cNvSpPr/>
+          <p:nvPr/>
+        </p:nvSpPr>
+        <p:spPr>
+          <a:xfrm>
+            <a:off x="640080" y="5029200"/>
+            <a:ext cx="10881360" cy="1188720"/>
+          </a:xfrm>
+          <a:prstGeom prst="roundRect">
+            <a:avLst>
+              <a:gd name="adj" fmla="val 8000"/>
+            </a:avLst>
+          </a:prstGeom>
+          <a:solidFill>
+            <a:srgbClr val="F4F6FC"/>
+          </a:solidFill>
+          <a:ln>
+            <a:noFill/>
+          </a:ln>
+          <a:effectLst/>
+        </p:spPr>
+        <p:style>
+          <a:lnRef idx="1">
+            <a:schemeClr val="accent1"/>
+          </a:lnRef>
+          <a:fillRef idx="3">
+            <a:schemeClr val="accent1"/>
+          </a:fillRef>
+          <a:effectRef idx="2">
+            <a:schemeClr val="accent1"/>
+          </a:effectRef>
+          <a:fontRef idx="minor">
+            <a:schemeClr val="lt1"/>
+          </a:fontRef>
+        </p:style>
+        <p:txBody>
+          <a:bodyPr rtlCol="0" anchor="ctr"/>
+          <a:lstStyle/>
+          <a:p>
+            <a:pPr algn="ctr"/>
+          </a:p>
+        </p:txBody>
+      </p:sp>
+      <p:sp>
+        <p:nvSpPr>
+          <p:cNvPr id="6" name="TextBox 5"/>
+          <p:cNvSpPr txBox="1"/>
+          <p:nvPr/>
+        </p:nvSpPr>
+        <p:spPr>
+          <a:xfrm>
+            <a:off x="914400" y="5257800"/>
+            <a:ext cx="10332720" cy="822960"/>
+          </a:xfrm>
+          <a:prstGeom prst="rect">
+            <a:avLst/>
+          </a:prstGeom>
+          <a:noFill/>
+        </p:spPr>
+        <p:txBody>
+          <a:bodyPr wrap="square" anchor="t" lIns="0" rIns="0" tIns="0" bIns="0">
+            <a:spAutoFit/>
+          </a:bodyPr>
+          <a:lstStyle/>
+          <a:p>
+            <a:pPr algn="l">
+              <a:lnSpc>
+                <a:spcPct val="130000"/>
+              </a:lnSpc>
+            </a:pPr>
+            <a:r>
+              <a:rPr sz="1400" b="0" i="0">
+                <a:solidFill>
+                  <a:srgbClr val="555A6E"/>
+                </a:solidFill>
+                <a:latin typeface="Calibri"/>
+              </a:rPr>
+              <a:t>다음 과제: 대용량 데이터 Git LFS/외부 스토리지 연동, ABSA 정확도를 ML 분류기로</a:t>
+            </a:r>
+          </a:p>
+          <a:p>
+            <a:pPr algn="l">
+              <a:lnSpc>
+                <a:spcPct val="130000"/>
+              </a:lnSpc>
+            </a:pPr>
+            <a:r>
+              <a:rPr sz="1400" b="0" i="0">
+                <a:solidFill>
+                  <a:srgbClr val="555A6E"/>
+                </a:solidFill>
+                <a:latin typeface="Calibri"/>
+              </a:rPr>
+              <a:t>고도화(현재는 규칙 기반), GPU 환경에서 KoELECTRA 전체 데이터 파인튜닝</a:t>
+            </a:r>
+          </a:p>
+        </p:txBody>
+      </p:sp>
+    </p:spTree>
+  </p:cSld>
+  <p:clrMapOvr>
+    <a:masterClrMapping/>
+  </p:clrMapOvr>
+</p:sld>
+</file>
+
+<file path=ppt/slides/slide12.xml><?xml version="1.0" encoding="utf-8"?>
+<p:sld xmlns:a="http://schemas.openxmlformats.org/drawingml/2006/main" xmlns:p="http://schemas.openxmlformats.org/presentationml/2006/main" xmlns:r="http://schemas.openxmlformats.org/officeDocument/2006/relationships">
+  <p:cSld>
+    <p:spTree>
+      <p:nvGrpSpPr>
+        <p:cNvPr id="1" name=""/>
+        <p:cNvGrpSpPr/>
+        <p:nvPr/>
+      </p:nvGrpSpPr>
+      <p:grpSpPr/>
+      <p:sp>
+        <p:nvSpPr>
+          <p:cNvPr id="2" name="Rectangle 1"/>
+          <p:cNvSpPr/>
+          <p:nvPr/>
+        </p:nvSpPr>
+        <p:spPr>
+          <a:xfrm>
+            <a:off x="0" y="0"/>
+            <a:ext cx="12191695" cy="6858000"/>
+          </a:xfrm>
+          <a:prstGeom prst="rect">
+            <a:avLst/>
+          </a:prstGeom>
+          <a:solidFill>
+            <a:srgbClr val="1E2761"/>
+          </a:solidFill>
+          <a:ln>
+            <a:noFill/>
+          </a:ln>
+          <a:effectLst/>
+        </p:spPr>
+        <p:style>
+          <a:lnRef idx="1">
+            <a:schemeClr val="accent1"/>
+          </a:lnRef>
+          <a:fillRef idx="3">
+            <a:schemeClr val="accent1"/>
+          </a:fillRef>
+          <a:effectRef idx="2">
+            <a:schemeClr val="accent1"/>
+          </a:effectRef>
+          <a:fontRef idx="minor">
+            <a:schemeClr val="lt1"/>
+          </a:fontRef>
+        </p:style>
+        <p:txBody>
+          <a:bodyPr rtlCol="0" anchor="ctr"/>
+          <a:lstStyle/>
+          <a:p>
+            <a:pPr algn="ctr"/>
+          </a:p>
+        </p:txBody>
+      </p:sp>
+      <p:sp>
+        <p:nvSpPr>
+          <p:cNvPr id="3" name="TextBox 2"/>
+          <p:cNvSpPr txBox="1"/>
+          <p:nvPr/>
+        </p:nvSpPr>
+        <p:spPr>
+          <a:xfrm>
+            <a:off x="914400" y="914400"/>
+            <a:ext cx="10332720" cy="731520"/>
+          </a:xfrm>
+          <a:prstGeom prst="rect">
+            <a:avLst/>
+          </a:prstGeom>
+          <a:noFill/>
+        </p:spPr>
+        <p:txBody>
+          <a:bodyPr wrap="square" anchor="t" lIns="0" rIns="0" tIns="0" bIns="0">
+            <a:spAutoFit/>
+          </a:bodyPr>
+          <a:lstStyle/>
+          <a:p>
+            <a:pPr algn="l"/>
+            <a:r>
+              <a:rPr sz="3600" b="1" i="0">
                 <a:solidFill>
                   <a:srgbClr val="FFFFFF"/>
                 </a:solidFill>
-                <a:latin typeface="Calibri"/>
-              </a:rPr>
-              <a:t>•  Streamlit으로 감성 분석 데모 + 데이터 대시보드를 구현하고 동작까지 검증</a:t>
+                <a:latin typeface="Georgia"/>
+              </a:rPr>
+              <a:t>정리</a:t>
+            </a:r>
+          </a:p>
+        </p:txBody>
+      </p:sp>
+      <p:sp>
+        <p:nvSpPr>
+          <p:cNvPr id="4" name="TextBox 3"/>
+          <p:cNvSpPr txBox="1"/>
+          <p:nvPr/>
+        </p:nvSpPr>
+        <p:spPr>
+          <a:xfrm>
+            <a:off x="914400" y="1828800"/>
+            <a:ext cx="10058400" cy="3840480"/>
+          </a:xfrm>
+          <a:prstGeom prst="rect">
+            <a:avLst/>
+          </a:prstGeom>
+          <a:noFill/>
+        </p:spPr>
+        <p:txBody>
+          <a:bodyPr wrap="square">
+            <a:spAutoFit/>
+          </a:bodyPr>
+          <a:lstStyle/>
+          <a:p>
+            <a:pPr>
+              <a:spcAft>
+                <a:spcPts val="800"/>
+              </a:spcAft>
+            </a:pPr>
+            <a:r>
+              <a:rPr sz="1650">
+                <a:solidFill>
+                  <a:srgbClr val="FFFFFF"/>
+                </a:solidFill>
+                <a:latin typeface="Calibri"/>
+              </a:rPr>
+              <a:t>•  3개 플랫폼 538,774건 데이터를 통일된 기준으로 통합 (가장 큰 난관: 라벨 기준 불일치)</a:t>
+            </a:r>
+          </a:p>
+          <a:p>
+            <a:pPr>
+              <a:spcAft>
+                <a:spcPts val="800"/>
+              </a:spcAft>
+            </a:pPr>
+            <a:r>
+              <a:rPr sz="1650">
+                <a:solidFill>
+                  <a:srgbClr val="FFFFFF"/>
+                </a:solidFill>
+                <a:latin typeface="Calibri"/>
+              </a:rPr>
+              <a:t>•  환경 제약(PyTorch 미설치)을 numpy 구현 → 별도 venv 구성으로 2단계에 걸쳐 해결</a:t>
+            </a:r>
+          </a:p>
+          <a:p>
+            <a:pPr>
+              <a:spcAft>
+                <a:spcPts val="800"/>
+              </a:spcAft>
+            </a:pPr>
+            <a:r>
+              <a:rPr sz="1650">
+                <a:solidFill>
+                  <a:srgbClr val="FFFFFF"/>
+                </a:solidFill>
+                <a:latin typeface="Calibri"/>
+              </a:rPr>
+              <a:t>•  ML/DL/LSTM/Transformer 4개 모델을 비교하고, 실제 분포 재평가로 숨은 문제(label shift)를 찾아 보정</a:t>
+            </a:r>
+          </a:p>
+          <a:p>
+            <a:pPr>
+              <a:spcAft>
+                <a:spcPts val="800"/>
+              </a:spcAft>
+            </a:pPr>
+            <a:r>
+              <a:rPr sz="1650">
+                <a:solidFill>
+                  <a:srgbClr val="FFFFFF"/>
+                </a:solidFill>
+                <a:latin typeface="Calibri"/>
+              </a:rPr>
+              <a:t>•  "실용성 없다"는 피드백을 받고 텍스트 데모 → 속성기반 상품 리포트로 서비스 자체를 전환</a:t>
+            </a:r>
+          </a:p>
+          <a:p>
+            <a:pPr>
+              <a:spcAft>
+                <a:spcPts val="800"/>
+              </a:spcAft>
+            </a:pPr>
+            <a:r>
+              <a:rPr sz="1650">
+                <a:solidFill>
+                  <a:srgbClr val="FFFFFF"/>
+                </a:solidFill>
+                <a:latin typeface="Calibri"/>
+              </a:rPr>
+              <a:t>•  Streamlit으로 서비스를 구현하고 동작까지 검증</a:t>
             </a:r>
           </a:p>
         </p:txBody>
@@ -3877,7 +5063,7 @@
         </p:nvSpPr>
         <p:spPr>
           <a:xfrm>
-            <a:off x="914400" y="5760720"/>
+            <a:off x="914400" y="5943600"/>
             <a:ext cx="10332720" cy="548640"/>
           </a:xfrm>
           <a:prstGeom prst="rect">
@@ -3975,7 +5161,7 @@
         <p:spPr>
           <a:xfrm>
             <a:off x="640080" y="457200"/>
-            <a:ext cx="5486400" cy="731520"/>
+            <a:ext cx="10515600" cy="731520"/>
           </a:xfrm>
           <a:prstGeom prst="rect">
             <a:avLst/>
@@ -3990,13 +5176,13 @@
           <a:p>
             <a:pPr algn="l"/>
             <a:r>
-              <a:rPr sz="3200" b="1" i="0">
+              <a:rPr sz="3000" b="1" i="0">
                 <a:solidFill>
                   <a:srgbClr val="1E2761"/>
                 </a:solidFill>
                 <a:latin typeface="Georgia"/>
               </a:rPr>
-              <a:t>문제 정의</a:t>
+              <a:t>어떤 문제를 ML/DL로 풀었나</a:t>
             </a:r>
           </a:p>
         </p:txBody>
@@ -4009,8 +5195,8 @@
         </p:nvSpPr>
         <p:spPr>
           <a:xfrm>
-            <a:off x="640080" y="1554480"/>
-            <a:ext cx="5486400" cy="3200400"/>
+            <a:off x="640080" y="1463040"/>
+            <a:ext cx="5394960" cy="1645920"/>
           </a:xfrm>
           <a:prstGeom prst="rect">
             <a:avLst/>
@@ -4029,13 +5215,13 @@
               </a:spcAft>
             </a:pPr>
             <a:r>
-              <a:rPr sz="1700">
+              <a:rPr sz="1600">
                 <a:solidFill>
                   <a:srgbClr val="21295C"/>
                 </a:solidFill>
                 <a:latin typeface="Calibri"/>
               </a:rPr>
-              <a:t>•  화장품 리뷰는 플랫폼마다 수만~수십만 건 — 사람이 다 읽고 판단하기 어렵다</a:t>
+              <a:t>•  리뷰가 상품당 수백~수천 건 — 사람이 다 읽고 판단하기 어렵다</a:t>
             </a:r>
           </a:p>
           <a:p>
@@ -4045,106 +5231,35 @@
               </a:spcAft>
             </a:pPr>
             <a:r>
-              <a:rPr sz="1700">
+              <a:rPr sz="1600">
                 <a:solidFill>
                   <a:srgbClr val="21295C"/>
                 </a:solidFill>
                 <a:latin typeface="Calibri"/>
               </a:rPr>
-              <a:t>•  별점만으로는 "왜" 좋고 나쁜지 알 수 없다 (텍스트 안에 진짜 정보가 있음)</a:t>
-            </a:r>
-          </a:p>
-          <a:p>
-            <a:pPr>
-              <a:spcAft>
-                <a:spcPts val="800"/>
-              </a:spcAft>
-            </a:pPr>
-            <a:r>
-              <a:rPr sz="1700">
-                <a:solidFill>
-                  <a:srgbClr val="21295C"/>
-                </a:solidFill>
-                <a:latin typeface="Calibri"/>
-              </a:rPr>
-              <a:t>•  여러 플랫폼(쿠팡/무신사/올리브영) 리뷰를 한 기준으로 비교하기 어렵다</a:t>
-            </a:r>
-          </a:p>
-        </p:txBody>
-      </p:sp>
-      <p:sp>
-        <p:nvSpPr>
-          <p:cNvPr id="5" name="TextBox 4"/>
-          <p:cNvSpPr txBox="1"/>
-          <p:nvPr/>
-        </p:nvSpPr>
-        <p:spPr>
-          <a:xfrm>
-            <a:off x="640080" y="4846320"/>
-            <a:ext cx="5486400" cy="1371600"/>
-          </a:xfrm>
-          <a:prstGeom prst="rect">
-            <a:avLst/>
-          </a:prstGeom>
-          <a:noFill/>
-        </p:spPr>
-        <p:txBody>
-          <a:bodyPr wrap="square" anchor="t" lIns="0" rIns="0" tIns="0" bIns="0">
-            <a:spAutoFit/>
-          </a:bodyPr>
-          <a:lstStyle/>
-          <a:p>
-            <a:pPr algn="l">
-              <a:lnSpc>
-                <a:spcPct val="130000"/>
-              </a:lnSpc>
-            </a:pPr>
-            <a:r>
-              <a:rPr sz="1600" b="1" i="0">
-                <a:solidFill>
-                  <a:srgbClr val="F96167"/>
-                </a:solidFill>
-                <a:latin typeface="Calibri"/>
-              </a:rPr>
-              <a:t>그래서: 리뷰 텍스트를 긍정/중립/부정으로 자동 분류하고,</a:t>
-            </a:r>
-          </a:p>
-          <a:p>
-            <a:pPr algn="l">
-              <a:lnSpc>
-                <a:spcPct val="130000"/>
-              </a:lnSpc>
-            </a:pPr>
-            <a:r>
-              <a:rPr sz="1600" b="1" i="0">
-                <a:solidFill>
-                  <a:srgbClr val="F96167"/>
-                </a:solidFill>
-                <a:latin typeface="Calibri"/>
-              </a:rPr>
-              <a:t>플랫폼 통합 대시보드로 한눈에 보여주는 서비스를 만든다</a:t>
-            </a:r>
-          </a:p>
-        </p:txBody>
-      </p:sp>
-      <p:sp>
-        <p:nvSpPr>
-          <p:cNvPr id="6" name="Rounded Rectangle 5"/>
+              <a:t>•  별점만 봐서는 "왜" 좋고 나쁜지, 속성별로(보습/향/트러블) 어떤지 알 수 없다</a:t>
+            </a:r>
+          </a:p>
+        </p:txBody>
+      </p:sp>
+      <p:sp>
+        <p:nvSpPr>
+          <p:cNvPr id="5" name="Rounded Rectangle 4"/>
           <p:cNvSpPr/>
           <p:nvPr/>
         </p:nvSpPr>
         <p:spPr>
           <a:xfrm>
-            <a:off x="6492240" y="1463040"/>
-            <a:ext cx="5120640" cy="4846320"/>
+            <a:off x="640080" y="3200400"/>
+            <a:ext cx="5394960" cy="2926080"/>
           </a:xfrm>
           <a:prstGeom prst="roundRect">
             <a:avLst>
-              <a:gd name="adj" fmla="val 4000"/>
+              <a:gd name="adj" fmla="val 6000"/>
             </a:avLst>
           </a:prstGeom>
           <a:solidFill>
-            <a:srgbClr val="F4F6FC"/>
+            <a:srgbClr val="1E2761"/>
           </a:solidFill>
           <a:ln>
             <a:noFill/>
@@ -4175,14 +5290,14 @@
       </p:sp>
       <p:sp>
         <p:nvSpPr>
-          <p:cNvPr id="7" name="TextBox 6"/>
+          <p:cNvPr id="6" name="TextBox 5"/>
           <p:cNvSpPr txBox="1"/>
           <p:nvPr/>
         </p:nvSpPr>
         <p:spPr>
           <a:xfrm>
-            <a:off x="6858000" y="1783080"/>
-            <a:ext cx="4389120" cy="457200"/>
+            <a:off x="914400" y="3429000"/>
+            <a:ext cx="4846320" cy="457200"/>
           </a:xfrm>
           <a:prstGeom prst="rect">
             <a:avLst/>
@@ -4197,27 +5312,27 @@
           <a:p>
             <a:pPr algn="l"/>
             <a:r>
-              <a:rPr sz="1600" b="1" i="0">
-                <a:solidFill>
-                  <a:srgbClr val="1E2761"/>
-                </a:solidFill>
-                <a:latin typeface="Calibri"/>
-              </a:rPr>
-              <a:t>별점만 본다면?</a:t>
-            </a:r>
-          </a:p>
-        </p:txBody>
-      </p:sp>
-      <p:sp>
-        <p:nvSpPr>
-          <p:cNvPr id="8" name="TextBox 7"/>
+              <a:rPr sz="1700" b="1" i="0">
+                <a:solidFill>
+                  <a:srgbClr val="FFFFFF"/>
+                </a:solidFill>
+                <a:latin typeface="Calibri"/>
+              </a:rPr>
+              <a:t>① 감성 분류 (ML+DL)</a:t>
+            </a:r>
+          </a:p>
+        </p:txBody>
+      </p:sp>
+      <p:sp>
+        <p:nvSpPr>
+          <p:cNvPr id="7" name="TextBox 6"/>
           <p:cNvSpPr txBox="1"/>
           <p:nvPr/>
         </p:nvSpPr>
         <p:spPr>
           <a:xfrm>
-            <a:off x="6858000" y="2377440"/>
-            <a:ext cx="4389120" cy="3657600"/>
+            <a:off x="914400" y="3931920"/>
+            <a:ext cx="4846320" cy="2011680"/>
           </a:xfrm>
           <a:prstGeom prst="rect">
             <a:avLst/>
@@ -4232,97 +5347,233 @@
           <a:p>
             <a:pPr algn="l">
               <a:lnSpc>
-                <a:spcPct val="135000"/>
+                <a:spcPct val="140000"/>
               </a:lnSpc>
             </a:pPr>
             <a:r>
-              <a:rPr sz="1450" b="0" i="0">
-                <a:solidFill>
-                  <a:srgbClr val="555A6E"/>
-                </a:solidFill>
-                <a:latin typeface="Calibri"/>
-              </a:rPr>
-              <a:t>★★★★★</a:t>
+              <a:rPr sz="1400" b="0" i="0">
+                <a:solidFill>
+                  <a:srgbClr val="CADCFC"/>
+                </a:solidFill>
+                <a:latin typeface="Calibri"/>
+              </a:rPr>
+              <a:t>리뷰 텍스트 → 긍정/중립/부정</a:t>
             </a:r>
           </a:p>
           <a:p>
             <a:pPr algn="l">
               <a:lnSpc>
-                <a:spcPct val="135000"/>
+                <a:spcPct val="140000"/>
               </a:lnSpc>
             </a:pPr>
             <a:r>
-              <a:rPr sz="1450" b="0" i="0">
-                <a:solidFill>
-                  <a:srgbClr val="555A6E"/>
-                </a:solidFill>
-                <a:latin typeface="Calibri"/>
-              </a:rPr>
-              <a:t>"보습력은 좋은데 향이 너무 강해서</a:t>
+              <a:rPr sz="1400" b="0" i="0">
+                <a:solidFill>
+                  <a:srgbClr val="CADCFC"/>
+                </a:solidFill>
+                <a:latin typeface="Calibri"/>
+              </a:rPr>
+              <a:t>ML: TF-IDF+로지스틱회귀</a:t>
             </a:r>
           </a:p>
           <a:p>
             <a:pPr algn="l">
               <a:lnSpc>
-                <a:spcPct val="135000"/>
+                <a:spcPct val="140000"/>
               </a:lnSpc>
             </a:pPr>
             <a:r>
-              <a:rPr sz="1450" b="0" i="0">
-                <a:solidFill>
-                  <a:srgbClr val="555A6E"/>
-                </a:solidFill>
-                <a:latin typeface="Calibri"/>
-              </a:rPr>
-              <a:t>다시는 안 살 것 같아요"</a:t>
+              <a:rPr sz="1400" b="0" i="0">
+                <a:solidFill>
+                  <a:srgbClr val="CADCFC"/>
+                </a:solidFill>
+                <a:latin typeface="Calibri"/>
+              </a:rPr>
+              <a:t>DL: numpy 직접구현 신경망</a:t>
             </a:r>
           </a:p>
           <a:p>
             <a:pPr algn="l">
               <a:lnSpc>
-                <a:spcPct val="135000"/>
+                <a:spcPct val="140000"/>
               </a:lnSpc>
             </a:pPr>
             <a:r>
-              <a:rPr sz="1450" b="0" i="0">
-                <a:solidFill>
-                  <a:srgbClr val="555A6E"/>
-                </a:solidFill>
-                <a:latin typeface="Calibri"/>
-              </a:rPr>
-              <a:t/>
-            </a:r>
-          </a:p>
+              <a:rPr sz="1400" b="0" i="0">
+                <a:solidFill>
+                  <a:srgbClr val="CADCFC"/>
+                </a:solidFill>
+                <a:latin typeface="Calibri"/>
+              </a:rPr>
+              <a:t>(+LSTM/Transformer 비교실험)</a:t>
+            </a:r>
+          </a:p>
+        </p:txBody>
+      </p:sp>
+      <p:sp>
+        <p:nvSpPr>
+          <p:cNvPr id="8" name="Rounded Rectangle 7"/>
+          <p:cNvSpPr/>
+          <p:nvPr/>
+        </p:nvSpPr>
+        <p:spPr>
+          <a:xfrm>
+            <a:off x="6309360" y="3200400"/>
+            <a:ext cx="5212080" cy="2926080"/>
+          </a:xfrm>
+          <a:prstGeom prst="roundRect">
+            <a:avLst>
+              <a:gd name="adj" fmla="val 6000"/>
+            </a:avLst>
+          </a:prstGeom>
+          <a:solidFill>
+            <a:srgbClr val="F96167"/>
+          </a:solidFill>
+          <a:ln>
+            <a:noFill/>
+          </a:ln>
+          <a:effectLst/>
+        </p:spPr>
+        <p:style>
+          <a:lnRef idx="1">
+            <a:schemeClr val="accent1"/>
+          </a:lnRef>
+          <a:fillRef idx="3">
+            <a:schemeClr val="accent1"/>
+          </a:fillRef>
+          <a:effectRef idx="2">
+            <a:schemeClr val="accent1"/>
+          </a:effectRef>
+          <a:fontRef idx="minor">
+            <a:schemeClr val="lt1"/>
+          </a:fontRef>
+        </p:style>
+        <p:txBody>
+          <a:bodyPr rtlCol="0" anchor="ctr"/>
+          <a:lstStyle/>
+          <a:p>
+            <a:pPr algn="ctr"/>
+          </a:p>
+        </p:txBody>
+      </p:sp>
+      <p:sp>
+        <p:nvSpPr>
+          <p:cNvPr id="9" name="TextBox 8"/>
+          <p:cNvSpPr txBox="1"/>
+          <p:nvPr/>
+        </p:nvSpPr>
+        <p:spPr>
+          <a:xfrm>
+            <a:off x="6583680" y="3429000"/>
+            <a:ext cx="4663440" cy="457200"/>
+          </a:xfrm>
+          <a:prstGeom prst="rect">
+            <a:avLst/>
+          </a:prstGeom>
+          <a:noFill/>
+        </p:spPr>
+        <p:txBody>
+          <a:bodyPr wrap="square" anchor="t" lIns="0" rIns="0" tIns="0" bIns="0">
+            <a:spAutoFit/>
+          </a:bodyPr>
+          <a:lstStyle/>
+          <a:p>
+            <a:pPr algn="l"/>
+            <a:r>
+              <a:rPr sz="1700" b="1" i="0">
+                <a:solidFill>
+                  <a:srgbClr val="FFFFFF"/>
+                </a:solidFill>
+                <a:latin typeface="Calibri"/>
+              </a:rPr>
+              <a:t>② 속성기반 감성분석 (ABSA)</a:t>
+            </a:r>
+          </a:p>
+        </p:txBody>
+      </p:sp>
+      <p:sp>
+        <p:nvSpPr>
+          <p:cNvPr id="10" name="TextBox 9"/>
+          <p:cNvSpPr txBox="1"/>
+          <p:nvPr/>
+        </p:nvSpPr>
+        <p:spPr>
+          <a:xfrm>
+            <a:off x="6583680" y="3931920"/>
+            <a:ext cx="4663440" cy="2011680"/>
+          </a:xfrm>
+          <a:prstGeom prst="rect">
+            <a:avLst/>
+          </a:prstGeom>
+          <a:noFill/>
+        </p:spPr>
+        <p:txBody>
+          <a:bodyPr wrap="square" anchor="t" lIns="0" rIns="0" tIns="0" bIns="0">
+            <a:spAutoFit/>
+          </a:bodyPr>
+          <a:lstStyle/>
           <a:p>
             <a:pPr algn="l">
               <a:lnSpc>
-                <a:spcPct val="135000"/>
+                <a:spcPct val="140000"/>
               </a:lnSpc>
             </a:pPr>
             <a:r>
-              <a:rPr sz="1450" b="0" i="0">
-                <a:solidFill>
-                  <a:srgbClr val="555A6E"/>
-                </a:solidFill>
-                <a:latin typeface="Calibri"/>
-              </a:rPr>
-              <a:t>→ 별점은 5점, 하지만 텍스트는 단점(향)을 말하고 있다.</a:t>
+              <a:rPr sz="1400" b="0" i="0">
+                <a:solidFill>
+                  <a:srgbClr val="FFFFFF"/>
+                </a:solidFill>
+                <a:latin typeface="Calibri"/>
+              </a:rPr>
+              <a:t>리뷰를 속성별로 쪼개서 분석</a:t>
             </a:r>
           </a:p>
           <a:p>
             <a:pPr algn="l">
               <a:lnSpc>
-                <a:spcPct val="135000"/>
+                <a:spcPct val="140000"/>
               </a:lnSpc>
             </a:pPr>
             <a:r>
-              <a:rPr sz="1450" b="0" i="0">
-                <a:solidFill>
-                  <a:srgbClr val="555A6E"/>
-                </a:solidFill>
-                <a:latin typeface="Calibri"/>
-              </a:rPr>
-              <a:t>감성 분류 모델은 이런 "숨은 신호"를 텍스트에서 직접 잡아낸다.</a:t>
+              <a:rPr sz="1400" b="0" i="0">
+                <a:solidFill>
+                  <a:srgbClr val="FFFFFF"/>
+                </a:solidFill>
+                <a:latin typeface="Calibri"/>
+              </a:rPr>
+              <a:t>"보습력은 좋은데 향은 별로다"</a:t>
+            </a:r>
+          </a:p>
+          <a:p>
+            <a:pPr algn="l">
+              <a:lnSpc>
+                <a:spcPct val="140000"/>
+              </a:lnSpc>
+            </a:pPr>
+            <a:r>
+              <a:rPr sz="1400" b="0" i="0">
+                <a:solidFill>
+                  <a:srgbClr val="FFFFFF"/>
+                </a:solidFill>
+                <a:latin typeface="Calibri"/>
+              </a:rPr>
+              <a:t>같은 세부 정보를 추출해</a:t>
+            </a:r>
+          </a:p>
+          <a:p>
+            <a:pPr algn="l">
+              <a:lnSpc>
+                <a:spcPct val="140000"/>
+              </a:lnSpc>
+            </a:pPr>
+            <a:r>
+              <a:rPr sz="1400" b="0" i="0">
+                <a:solidFill>
+                  <a:srgbClr val="FFFFFF"/>
+                </a:solidFill>
+                <a:latin typeface="Calibri"/>
+              </a:rPr>
+              <a:t>구매 의사결정을 지원</a:t>
             </a:r>
           </a:p>
         </p:txBody>
@@ -4398,7 +5649,7 @@
         <p:spPr>
           <a:xfrm>
             <a:off x="640080" y="457200"/>
-            <a:ext cx="7315200" cy="731520"/>
+            <a:ext cx="10515600" cy="731520"/>
           </a:xfrm>
           <a:prstGeom prst="rect">
             <a:avLst/>
@@ -4413,27 +5664,73 @@
           <a:p>
             <a:pPr algn="l"/>
             <a:r>
-              <a:rPr sz="3200" b="1" i="0">
+              <a:rPr sz="2800" b="1" i="0">
                 <a:solidFill>
                   <a:srgbClr val="1E2761"/>
                 </a:solidFill>
                 <a:latin typeface="Georgia"/>
               </a:rPr>
-              <a:t>데이터 수집 현황</a:t>
-            </a:r>
-          </a:p>
-        </p:txBody>
-      </p:sp>
-      <p:sp>
-        <p:nvSpPr>
-          <p:cNvPr id="4" name="TextBox 3"/>
+              <a:t>데이터 수집 — 처음엔 쿠팡만, 더 모았다</a:t>
+            </a:r>
+          </a:p>
+        </p:txBody>
+      </p:sp>
+      <p:sp>
+        <p:nvSpPr>
+          <p:cNvPr id="4" name="Rounded Rectangle 3"/>
+          <p:cNvSpPr/>
+          <p:nvPr/>
+        </p:nvSpPr>
+        <p:spPr>
+          <a:xfrm>
+            <a:off x="640080" y="1554480"/>
+            <a:ext cx="2606040" cy="2377440"/>
+          </a:xfrm>
+          <a:prstGeom prst="roundRect">
+            <a:avLst>
+              <a:gd name="adj" fmla="val 8000"/>
+            </a:avLst>
+          </a:prstGeom>
+          <a:solidFill>
+            <a:srgbClr val="1E2761"/>
+          </a:solidFill>
+          <a:ln>
+            <a:noFill/>
+          </a:ln>
+          <a:effectLst/>
+        </p:spPr>
+        <p:style>
+          <a:lnRef idx="1">
+            <a:schemeClr val="accent1"/>
+          </a:lnRef>
+          <a:fillRef idx="3">
+            <a:schemeClr val="accent1"/>
+          </a:fillRef>
+          <a:effectRef idx="2">
+            <a:schemeClr val="accent1"/>
+          </a:effectRef>
+          <a:fontRef idx="minor">
+            <a:schemeClr val="lt1"/>
+          </a:fontRef>
+        </p:style>
+        <p:txBody>
+          <a:bodyPr rtlCol="0" anchor="ctr"/>
+          <a:lstStyle/>
+          <a:p>
+            <a:pPr algn="ctr"/>
+          </a:p>
+        </p:txBody>
+      </p:sp>
+      <p:sp>
+        <p:nvSpPr>
+          <p:cNvPr id="5" name="TextBox 4"/>
           <p:cNvSpPr txBox="1"/>
           <p:nvPr/>
         </p:nvSpPr>
         <p:spPr>
           <a:xfrm>
-            <a:off x="640080" y="1143000"/>
-            <a:ext cx="7315200" cy="457200"/>
+            <a:off x="822959" y="1783080"/>
+            <a:ext cx="2240280" cy="365760"/>
           </a:xfrm>
           <a:prstGeom prst="rect">
             <a:avLst/>
@@ -4448,48 +5745,13 @@
           <a:p>
             <a:pPr algn="l"/>
             <a:r>
-              <a:rPr sz="1500" b="0" i="0">
-                <a:solidFill>
-                  <a:srgbClr val="555A6E"/>
-                </a:solidFill>
-                <a:latin typeface="Calibri"/>
-              </a:rPr>
-              <a:t>3개 플랫폼 통합 538,774건</a:t>
-            </a:r>
-          </a:p>
-        </p:txBody>
-      </p:sp>
-      <p:sp>
-        <p:nvSpPr>
-          <p:cNvPr id="5" name="TextBox 4"/>
-          <p:cNvSpPr txBox="1"/>
-          <p:nvPr/>
-        </p:nvSpPr>
-        <p:spPr>
-          <a:xfrm>
-            <a:off x="640080" y="1920240"/>
-            <a:ext cx="2606040" cy="963777"/>
-          </a:xfrm>
-          <a:prstGeom prst="rect">
-            <a:avLst/>
-          </a:prstGeom>
-          <a:noFill/>
-        </p:spPr>
-        <p:txBody>
-          <a:bodyPr wrap="square" anchor="b" lIns="0" rIns="0" tIns="0" bIns="0">
-            <a:spAutoFit/>
-          </a:bodyPr>
-          <a:lstStyle/>
-          <a:p>
-            <a:pPr algn="ctr"/>
-            <a:r>
-              <a:rPr sz="4000" b="1" i="0">
-                <a:solidFill>
-                  <a:srgbClr val="F96167"/>
-                </a:solidFill>
-                <a:latin typeface="Calibri"/>
-              </a:rPr>
-              <a:t>86,379</a:t>
+              <a:rPr sz="1300" b="1" i="0">
+                <a:solidFill>
+                  <a:srgbClr val="CADCFC"/>
+                </a:solidFill>
+                <a:latin typeface="Calibri"/>
+              </a:rPr>
+              <a:t>1차</a:t>
             </a:r>
           </a:p>
         </p:txBody>
@@ -4502,8 +5764,8 @@
         </p:nvSpPr>
         <p:spPr>
           <a:xfrm>
-            <a:off x="640080" y="2884017"/>
-            <a:ext cx="2606040" cy="590702"/>
+            <a:off x="822959" y="2194560"/>
+            <a:ext cx="2240280" cy="914400"/>
           </a:xfrm>
           <a:prstGeom prst="rect">
             <a:avLst/>
@@ -4516,15 +5778,35 @@
           </a:bodyPr>
           <a:lstStyle/>
           <a:p>
-            <a:pPr algn="ctr"/>
-            <a:r>
-              <a:rPr sz="1300" b="0" i="0">
-                <a:solidFill>
-                  <a:srgbClr val="555A6E"/>
-                </a:solidFill>
-                <a:latin typeface="Calibri"/>
-              </a:rPr>
-              <a:t>쿠팡</a:t>
+            <a:pPr algn="l">
+              <a:lnSpc>
+                <a:spcPct val="125000"/>
+              </a:lnSpc>
+            </a:pPr>
+            <a:r>
+              <a:rPr sz="1400" b="1" i="0">
+                <a:solidFill>
+                  <a:srgbClr val="FFFFFF"/>
+                </a:solidFill>
+                <a:latin typeface="Calibri"/>
+              </a:rPr>
+              <a:t>쿠팡 크롤링</a:t>
+            </a:r>
+          </a:p>
+          <a:p>
+            <a:pPr algn="l">
+              <a:lnSpc>
+                <a:spcPct val="125000"/>
+              </a:lnSpc>
+            </a:pPr>
+            <a:r>
+              <a:rPr sz="1400" b="1" i="0">
+                <a:solidFill>
+                  <a:srgbClr val="FFFFFF"/>
+                </a:solidFill>
+                <a:latin typeface="Calibri"/>
+              </a:rPr>
+              <a:t>(20개 키워드)</a:t>
             </a:r>
           </a:p>
         </p:txBody>
@@ -4537,43 +5819,8 @@
         </p:nvSpPr>
         <p:spPr>
           <a:xfrm>
-            <a:off x="3383280" y="1920240"/>
-            <a:ext cx="2606040" cy="963777"/>
-          </a:xfrm>
-          <a:prstGeom prst="rect">
-            <a:avLst/>
-          </a:prstGeom>
-          <a:noFill/>
-        </p:spPr>
-        <p:txBody>
-          <a:bodyPr wrap="square" anchor="b" lIns="0" rIns="0" tIns="0" bIns="0">
-            <a:spAutoFit/>
-          </a:bodyPr>
-          <a:lstStyle/>
-          <a:p>
-            <a:pPr algn="ctr"/>
-            <a:r>
-              <a:rPr sz="4000" b="1" i="0">
-                <a:solidFill>
-                  <a:srgbClr val="1E2761"/>
-                </a:solidFill>
-                <a:latin typeface="Calibri"/>
-              </a:rPr>
-              <a:t>230,870</a:t>
-            </a:r>
-          </a:p>
-        </p:txBody>
-      </p:sp>
-      <p:sp>
-        <p:nvSpPr>
-          <p:cNvPr id="8" name="TextBox 7"/>
-          <p:cNvSpPr txBox="1"/>
-          <p:nvPr/>
-        </p:nvSpPr>
-        <p:spPr>
-          <a:xfrm>
-            <a:off x="3383280" y="2884017"/>
-            <a:ext cx="2606040" cy="590702"/>
+            <a:off x="822959" y="3246120"/>
+            <a:ext cx="2240280" cy="548640"/>
           </a:xfrm>
           <a:prstGeom prst="rect">
             <a:avLst/>
@@ -4586,51 +5833,106 @@
           </a:bodyPr>
           <a:lstStyle/>
           <a:p>
+            <a:pPr algn="l"/>
+            <a:r>
+              <a:rPr sz="2000" b="1" i="0">
+                <a:solidFill>
+                  <a:srgbClr val="FFFFFF"/>
+                </a:solidFill>
+                <a:latin typeface="Calibri"/>
+              </a:rPr>
+              <a:t>86,379건</a:t>
+            </a:r>
+          </a:p>
+        </p:txBody>
+      </p:sp>
+      <p:sp>
+        <p:nvSpPr>
+          <p:cNvPr id="8" name="Right Arrow 7"/>
+          <p:cNvSpPr/>
+          <p:nvPr/>
+        </p:nvSpPr>
+        <p:spPr>
+          <a:xfrm>
+            <a:off x="3255263" y="2606040"/>
+            <a:ext cx="118872" cy="274320"/>
+          </a:xfrm>
+          <a:prstGeom prst="rightArrow">
+            <a:avLst/>
+          </a:prstGeom>
+          <a:solidFill>
+            <a:srgbClr val="555A6E"/>
+          </a:solidFill>
+          <a:ln>
+            <a:noFill/>
+          </a:ln>
+          <a:effectLst/>
+        </p:spPr>
+        <p:style>
+          <a:lnRef idx="1">
+            <a:schemeClr val="accent1"/>
+          </a:lnRef>
+          <a:fillRef idx="3">
+            <a:schemeClr val="accent1"/>
+          </a:fillRef>
+          <a:effectRef idx="2">
+            <a:schemeClr val="accent1"/>
+          </a:effectRef>
+          <a:fontRef idx="minor">
+            <a:schemeClr val="lt1"/>
+          </a:fontRef>
+        </p:style>
+        <p:txBody>
+          <a:bodyPr rtlCol="0" anchor="ctr"/>
+          <a:lstStyle/>
+          <a:p>
             <a:pPr algn="ctr"/>
-            <a:r>
-              <a:rPr sz="1300" b="0" i="0">
-                <a:solidFill>
-                  <a:srgbClr val="555A6E"/>
-                </a:solidFill>
-                <a:latin typeface="Calibri"/>
-              </a:rPr>
-              <a:t>무신사</a:t>
-            </a:r>
-          </a:p>
-        </p:txBody>
-      </p:sp>
-      <p:sp>
-        <p:nvSpPr>
-          <p:cNvPr id="9" name="TextBox 8"/>
-          <p:cNvSpPr txBox="1"/>
-          <p:nvPr/>
-        </p:nvSpPr>
-        <p:spPr>
-          <a:xfrm>
-            <a:off x="6126480" y="1920240"/>
-            <a:ext cx="2606040" cy="963777"/>
-          </a:xfrm>
-          <a:prstGeom prst="rect">
-            <a:avLst/>
-          </a:prstGeom>
-          <a:noFill/>
-        </p:spPr>
-        <p:txBody>
-          <a:bodyPr wrap="square" anchor="b" lIns="0" rIns="0" tIns="0" bIns="0">
-            <a:spAutoFit/>
-          </a:bodyPr>
+          </a:p>
+        </p:txBody>
+      </p:sp>
+      <p:sp>
+        <p:nvSpPr>
+          <p:cNvPr id="9" name="Rounded Rectangle 8"/>
+          <p:cNvSpPr/>
+          <p:nvPr/>
+        </p:nvSpPr>
+        <p:spPr>
+          <a:xfrm>
+            <a:off x="3383280" y="1554480"/>
+            <a:ext cx="2606040" cy="2377440"/>
+          </a:xfrm>
+          <a:prstGeom prst="roundRect">
+            <a:avLst>
+              <a:gd name="adj" fmla="val 8000"/>
+            </a:avLst>
+          </a:prstGeom>
+          <a:solidFill>
+            <a:srgbClr val="1E2761"/>
+          </a:solidFill>
+          <a:ln>
+            <a:noFill/>
+          </a:ln>
+          <a:effectLst/>
+        </p:spPr>
+        <p:style>
+          <a:lnRef idx="1">
+            <a:schemeClr val="accent1"/>
+          </a:lnRef>
+          <a:fillRef idx="3">
+            <a:schemeClr val="accent1"/>
+          </a:fillRef>
+          <a:effectRef idx="2">
+            <a:schemeClr val="accent1"/>
+          </a:effectRef>
+          <a:fontRef idx="minor">
+            <a:schemeClr val="lt1"/>
+          </a:fontRef>
+        </p:style>
+        <p:txBody>
+          <a:bodyPr rtlCol="0" anchor="ctr"/>
           <a:lstStyle/>
           <a:p>
             <a:pPr algn="ctr"/>
-            <a:r>
-              <a:rPr sz="4000" b="1" i="0">
-                <a:solidFill>
-                  <a:srgbClr val="1E2761"/>
-                </a:solidFill>
-                <a:latin typeface="Calibri"/>
-              </a:rPr>
-              <a:t>221,525</a:t>
-            </a:r>
           </a:p>
         </p:txBody>
       </p:sp>
@@ -4642,8 +5944,8 @@
         </p:nvSpPr>
         <p:spPr>
           <a:xfrm>
-            <a:off x="6126480" y="2884017"/>
-            <a:ext cx="2606040" cy="590702"/>
+            <a:off x="3566160" y="1783080"/>
+            <a:ext cx="2240280" cy="365760"/>
           </a:xfrm>
           <a:prstGeom prst="rect">
             <a:avLst/>
@@ -4656,15 +5958,15 @@
           </a:bodyPr>
           <a:lstStyle/>
           <a:p>
-            <a:pPr algn="ctr"/>
-            <a:r>
-              <a:rPr sz="1300" b="0" i="0">
-                <a:solidFill>
-                  <a:srgbClr val="555A6E"/>
-                </a:solidFill>
-                <a:latin typeface="Calibri"/>
-              </a:rPr>
-              <a:t>올리브영</a:t>
+            <a:pPr algn="l"/>
+            <a:r>
+              <a:rPr sz="1300" b="1" i="0">
+                <a:solidFill>
+                  <a:srgbClr val="CADCFC"/>
+                </a:solidFill>
+                <a:latin typeface="Calibri"/>
+              </a:rPr>
+              <a:t>2차</a:t>
             </a:r>
           </a:p>
         </p:txBody>
@@ -4677,43 +5979,8 @@
         </p:nvSpPr>
         <p:spPr>
           <a:xfrm>
-            <a:off x="8869680" y="1920240"/>
-            <a:ext cx="2606040" cy="963777"/>
-          </a:xfrm>
-          <a:prstGeom prst="rect">
-            <a:avLst/>
-          </a:prstGeom>
-          <a:noFill/>
-        </p:spPr>
-        <p:txBody>
-          <a:bodyPr wrap="square" anchor="b" lIns="0" rIns="0" tIns="0" bIns="0">
-            <a:spAutoFit/>
-          </a:bodyPr>
-          <a:lstStyle/>
-          <a:p>
-            <a:pPr algn="ctr"/>
-            <a:r>
-              <a:rPr sz="4000" b="1" i="0">
-                <a:solidFill>
-                  <a:srgbClr val="1E2761"/>
-                </a:solidFill>
-                <a:latin typeface="Calibri"/>
-              </a:rPr>
-              <a:t>538,774</a:t>
-            </a:r>
-          </a:p>
-        </p:txBody>
-      </p:sp>
-      <p:sp>
-        <p:nvSpPr>
-          <p:cNvPr id="12" name="TextBox 11"/>
-          <p:cNvSpPr txBox="1"/>
-          <p:nvPr/>
-        </p:nvSpPr>
-        <p:spPr>
-          <a:xfrm>
-            <a:off x="8869680" y="2884017"/>
-            <a:ext cx="2606040" cy="590702"/>
+            <a:off x="3566160" y="2194560"/>
+            <a:ext cx="2240280" cy="914400"/>
           </a:xfrm>
           <a:prstGeom prst="rect">
             <a:avLst/>
@@ -4726,30 +5993,656 @@
           </a:bodyPr>
           <a:lstStyle/>
           <a:p>
+            <a:pPr algn="l">
+              <a:lnSpc>
+                <a:spcPct val="125000"/>
+              </a:lnSpc>
+            </a:pPr>
+            <a:r>
+              <a:rPr sz="1400" b="1" i="0">
+                <a:solidFill>
+                  <a:srgbClr val="FFFFFF"/>
+                </a:solidFill>
+                <a:latin typeface="Calibri"/>
+              </a:rPr>
+              <a:t>+ 무신사</a:t>
+            </a:r>
+          </a:p>
+          <a:p>
+            <a:pPr algn="l">
+              <a:lnSpc>
+                <a:spcPct val="125000"/>
+              </a:lnSpc>
+            </a:pPr>
+            <a:r>
+              <a:rPr sz="1400" b="1" i="0">
+                <a:solidFill>
+                  <a:srgbClr val="FFFFFF"/>
+                </a:solidFill>
+                <a:latin typeface="Calibri"/>
+              </a:rPr>
+              <a:t>(동료 크롤링 데이터)</a:t>
+            </a:r>
+          </a:p>
+        </p:txBody>
+      </p:sp>
+      <p:sp>
+        <p:nvSpPr>
+          <p:cNvPr id="12" name="TextBox 11"/>
+          <p:cNvSpPr txBox="1"/>
+          <p:nvPr/>
+        </p:nvSpPr>
+        <p:spPr>
+          <a:xfrm>
+            <a:off x="3566160" y="3246120"/>
+            <a:ext cx="2240280" cy="548640"/>
+          </a:xfrm>
+          <a:prstGeom prst="rect">
+            <a:avLst/>
+          </a:prstGeom>
+          <a:noFill/>
+        </p:spPr>
+        <p:txBody>
+          <a:bodyPr wrap="square" anchor="t" lIns="0" rIns="0" tIns="0" bIns="0">
+            <a:spAutoFit/>
+          </a:bodyPr>
+          <a:lstStyle/>
+          <a:p>
+            <a:pPr algn="l"/>
+            <a:r>
+              <a:rPr sz="2000" b="1" i="0">
+                <a:solidFill>
+                  <a:srgbClr val="FFFFFF"/>
+                </a:solidFill>
+                <a:latin typeface="Calibri"/>
+              </a:rPr>
+              <a:t>230,870건</a:t>
+            </a:r>
+          </a:p>
+        </p:txBody>
+      </p:sp>
+      <p:sp>
+        <p:nvSpPr>
+          <p:cNvPr id="13" name="Right Arrow 12"/>
+          <p:cNvSpPr/>
+          <p:nvPr/>
+        </p:nvSpPr>
+        <p:spPr>
+          <a:xfrm>
+            <a:off x="5998464" y="2606040"/>
+            <a:ext cx="118872" cy="274320"/>
+          </a:xfrm>
+          <a:prstGeom prst="rightArrow">
+            <a:avLst/>
+          </a:prstGeom>
+          <a:solidFill>
+            <a:srgbClr val="555A6E"/>
+          </a:solidFill>
+          <a:ln>
+            <a:noFill/>
+          </a:ln>
+          <a:effectLst/>
+        </p:spPr>
+        <p:style>
+          <a:lnRef idx="1">
+            <a:schemeClr val="accent1"/>
+          </a:lnRef>
+          <a:fillRef idx="3">
+            <a:schemeClr val="accent1"/>
+          </a:fillRef>
+          <a:effectRef idx="2">
+            <a:schemeClr val="accent1"/>
+          </a:effectRef>
+          <a:fontRef idx="minor">
+            <a:schemeClr val="lt1"/>
+          </a:fontRef>
+        </p:style>
+        <p:txBody>
+          <a:bodyPr rtlCol="0" anchor="ctr"/>
+          <a:lstStyle/>
+          <a:p>
             <a:pPr algn="ctr"/>
-            <a:r>
-              <a:rPr sz="1300" b="0" i="0">
-                <a:solidFill>
-                  <a:srgbClr val="555A6E"/>
-                </a:solidFill>
-                <a:latin typeface="Calibri"/>
-              </a:rPr>
-              <a:t>통합 전체</a:t>
+          </a:p>
+        </p:txBody>
+      </p:sp>
+      <p:sp>
+        <p:nvSpPr>
+          <p:cNvPr id="14" name="Rounded Rectangle 13"/>
+          <p:cNvSpPr/>
+          <p:nvPr/>
+        </p:nvSpPr>
+        <p:spPr>
+          <a:xfrm>
+            <a:off x="6126480" y="1554480"/>
+            <a:ext cx="2606040" cy="2377440"/>
+          </a:xfrm>
+          <a:prstGeom prst="roundRect">
+            <a:avLst>
+              <a:gd name="adj" fmla="val 8000"/>
+            </a:avLst>
+          </a:prstGeom>
+          <a:solidFill>
+            <a:srgbClr val="1E2761"/>
+          </a:solidFill>
+          <a:ln>
+            <a:noFill/>
+          </a:ln>
+          <a:effectLst/>
+        </p:spPr>
+        <p:style>
+          <a:lnRef idx="1">
+            <a:schemeClr val="accent1"/>
+          </a:lnRef>
+          <a:fillRef idx="3">
+            <a:schemeClr val="accent1"/>
+          </a:fillRef>
+          <a:effectRef idx="2">
+            <a:schemeClr val="accent1"/>
+          </a:effectRef>
+          <a:fontRef idx="minor">
+            <a:schemeClr val="lt1"/>
+          </a:fontRef>
+        </p:style>
+        <p:txBody>
+          <a:bodyPr rtlCol="0" anchor="ctr"/>
+          <a:lstStyle/>
+          <a:p>
+            <a:pPr algn="ctr"/>
+          </a:p>
+        </p:txBody>
+      </p:sp>
+      <p:sp>
+        <p:nvSpPr>
+          <p:cNvPr id="15" name="TextBox 14"/>
+          <p:cNvSpPr txBox="1"/>
+          <p:nvPr/>
+        </p:nvSpPr>
+        <p:spPr>
+          <a:xfrm>
+            <a:off x="6309360" y="1783080"/>
+            <a:ext cx="2240280" cy="365760"/>
+          </a:xfrm>
+          <a:prstGeom prst="rect">
+            <a:avLst/>
+          </a:prstGeom>
+          <a:noFill/>
+        </p:spPr>
+        <p:txBody>
+          <a:bodyPr wrap="square" anchor="t" lIns="0" rIns="0" tIns="0" bIns="0">
+            <a:spAutoFit/>
+          </a:bodyPr>
+          <a:lstStyle/>
+          <a:p>
+            <a:pPr algn="l"/>
+            <a:r>
+              <a:rPr sz="1300" b="1" i="0">
+                <a:solidFill>
+                  <a:srgbClr val="CADCFC"/>
+                </a:solidFill>
+                <a:latin typeface="Calibri"/>
+              </a:rPr>
+              <a:t>2차</a:t>
+            </a:r>
+          </a:p>
+        </p:txBody>
+      </p:sp>
+      <p:sp>
+        <p:nvSpPr>
+          <p:cNvPr id="16" name="TextBox 15"/>
+          <p:cNvSpPr txBox="1"/>
+          <p:nvPr/>
+        </p:nvSpPr>
+        <p:spPr>
+          <a:xfrm>
+            <a:off x="6309360" y="2194560"/>
+            <a:ext cx="2240280" cy="914400"/>
+          </a:xfrm>
+          <a:prstGeom prst="rect">
+            <a:avLst/>
+          </a:prstGeom>
+          <a:noFill/>
+        </p:spPr>
+        <p:txBody>
+          <a:bodyPr wrap="square" anchor="t" lIns="0" rIns="0" tIns="0" bIns="0">
+            <a:spAutoFit/>
+          </a:bodyPr>
+          <a:lstStyle/>
+          <a:p>
+            <a:pPr algn="l">
+              <a:lnSpc>
+                <a:spcPct val="125000"/>
+              </a:lnSpc>
+            </a:pPr>
+            <a:r>
+              <a:rPr sz="1400" b="1" i="0">
+                <a:solidFill>
+                  <a:srgbClr val="FFFFFF"/>
+                </a:solidFill>
+                <a:latin typeface="Calibri"/>
+              </a:rPr>
+              <a:t>+ 올리브영</a:t>
+            </a:r>
+          </a:p>
+          <a:p>
+            <a:pPr algn="l">
+              <a:lnSpc>
+                <a:spcPct val="125000"/>
+              </a:lnSpc>
+            </a:pPr>
+            <a:r>
+              <a:rPr sz="1400" b="1" i="0">
+                <a:solidFill>
+                  <a:srgbClr val="FFFFFF"/>
+                </a:solidFill>
+                <a:latin typeface="Calibri"/>
+              </a:rPr>
+              <a:t>(JSONL 4개 파일)</a:t>
+            </a:r>
+          </a:p>
+        </p:txBody>
+      </p:sp>
+      <p:sp>
+        <p:nvSpPr>
+          <p:cNvPr id="17" name="TextBox 16"/>
+          <p:cNvSpPr txBox="1"/>
+          <p:nvPr/>
+        </p:nvSpPr>
+        <p:spPr>
+          <a:xfrm>
+            <a:off x="6309360" y="3246120"/>
+            <a:ext cx="2240280" cy="548640"/>
+          </a:xfrm>
+          <a:prstGeom prst="rect">
+            <a:avLst/>
+          </a:prstGeom>
+          <a:noFill/>
+        </p:spPr>
+        <p:txBody>
+          <a:bodyPr wrap="square" anchor="t" lIns="0" rIns="0" tIns="0" bIns="0">
+            <a:spAutoFit/>
+          </a:bodyPr>
+          <a:lstStyle/>
+          <a:p>
+            <a:pPr algn="l"/>
+            <a:r>
+              <a:rPr sz="2000" b="1" i="0">
+                <a:solidFill>
+                  <a:srgbClr val="FFFFFF"/>
+                </a:solidFill>
+                <a:latin typeface="Calibri"/>
+              </a:rPr>
+              <a:t>221,525건</a:t>
+            </a:r>
+          </a:p>
+        </p:txBody>
+      </p:sp>
+      <p:sp>
+        <p:nvSpPr>
+          <p:cNvPr id="18" name="Right Arrow 17"/>
+          <p:cNvSpPr/>
+          <p:nvPr/>
+        </p:nvSpPr>
+        <p:spPr>
+          <a:xfrm>
+            <a:off x="8741664" y="2606040"/>
+            <a:ext cx="118872" cy="274320"/>
+          </a:xfrm>
+          <a:prstGeom prst="rightArrow">
+            <a:avLst/>
+          </a:prstGeom>
+          <a:solidFill>
+            <a:srgbClr val="555A6E"/>
+          </a:solidFill>
+          <a:ln>
+            <a:noFill/>
+          </a:ln>
+          <a:effectLst/>
+        </p:spPr>
+        <p:style>
+          <a:lnRef idx="1">
+            <a:schemeClr val="accent1"/>
+          </a:lnRef>
+          <a:fillRef idx="3">
+            <a:schemeClr val="accent1"/>
+          </a:fillRef>
+          <a:effectRef idx="2">
+            <a:schemeClr val="accent1"/>
+          </a:effectRef>
+          <a:fontRef idx="minor">
+            <a:schemeClr val="lt1"/>
+          </a:fontRef>
+        </p:style>
+        <p:txBody>
+          <a:bodyPr rtlCol="0" anchor="ctr"/>
+          <a:lstStyle/>
+          <a:p>
+            <a:pPr algn="ctr"/>
+          </a:p>
+        </p:txBody>
+      </p:sp>
+      <p:sp>
+        <p:nvSpPr>
+          <p:cNvPr id="19" name="Rounded Rectangle 18"/>
+          <p:cNvSpPr/>
+          <p:nvPr/>
+        </p:nvSpPr>
+        <p:spPr>
+          <a:xfrm>
+            <a:off x="8869680" y="1554480"/>
+            <a:ext cx="2606040" cy="2377440"/>
+          </a:xfrm>
+          <a:prstGeom prst="roundRect">
+            <a:avLst>
+              <a:gd name="adj" fmla="val 8000"/>
+            </a:avLst>
+          </a:prstGeom>
+          <a:solidFill>
+            <a:srgbClr val="F96167"/>
+          </a:solidFill>
+          <a:ln>
+            <a:noFill/>
+          </a:ln>
+          <a:effectLst/>
+        </p:spPr>
+        <p:style>
+          <a:lnRef idx="1">
+            <a:schemeClr val="accent1"/>
+          </a:lnRef>
+          <a:fillRef idx="3">
+            <a:schemeClr val="accent1"/>
+          </a:fillRef>
+          <a:effectRef idx="2">
+            <a:schemeClr val="accent1"/>
+          </a:effectRef>
+          <a:fontRef idx="minor">
+            <a:schemeClr val="lt1"/>
+          </a:fontRef>
+        </p:style>
+        <p:txBody>
+          <a:bodyPr rtlCol="0" anchor="ctr"/>
+          <a:lstStyle/>
+          <a:p>
+            <a:pPr algn="ctr"/>
+          </a:p>
+        </p:txBody>
+      </p:sp>
+      <p:sp>
+        <p:nvSpPr>
+          <p:cNvPr id="20" name="TextBox 19"/>
+          <p:cNvSpPr txBox="1"/>
+          <p:nvPr/>
+        </p:nvSpPr>
+        <p:spPr>
+          <a:xfrm>
+            <a:off x="9052559" y="1783080"/>
+            <a:ext cx="2240280" cy="365760"/>
+          </a:xfrm>
+          <a:prstGeom prst="rect">
+            <a:avLst/>
+          </a:prstGeom>
+          <a:noFill/>
+        </p:spPr>
+        <p:txBody>
+          <a:bodyPr wrap="square" anchor="t" lIns="0" rIns="0" tIns="0" bIns="0">
+            <a:spAutoFit/>
+          </a:bodyPr>
+          <a:lstStyle/>
+          <a:p>
+            <a:pPr algn="l"/>
+            <a:r>
+              <a:rPr sz="1300" b="1" i="0">
+                <a:solidFill>
+                  <a:srgbClr val="CADCFC"/>
+                </a:solidFill>
+                <a:latin typeface="Calibri"/>
+              </a:rPr>
+              <a:t>최종</a:t>
+            </a:r>
+          </a:p>
+        </p:txBody>
+      </p:sp>
+      <p:sp>
+        <p:nvSpPr>
+          <p:cNvPr id="21" name="TextBox 20"/>
+          <p:cNvSpPr txBox="1"/>
+          <p:nvPr/>
+        </p:nvSpPr>
+        <p:spPr>
+          <a:xfrm>
+            <a:off x="9052559" y="2194560"/>
+            <a:ext cx="2240280" cy="914400"/>
+          </a:xfrm>
+          <a:prstGeom prst="rect">
+            <a:avLst/>
+          </a:prstGeom>
+          <a:noFill/>
+        </p:spPr>
+        <p:txBody>
+          <a:bodyPr wrap="square" anchor="t" lIns="0" rIns="0" tIns="0" bIns="0">
+            <a:spAutoFit/>
+          </a:bodyPr>
+          <a:lstStyle/>
+          <a:p>
+            <a:pPr algn="l">
+              <a:lnSpc>
+                <a:spcPct val="125000"/>
+              </a:lnSpc>
+            </a:pPr>
+            <a:r>
+              <a:rPr sz="1400" b="1" i="0">
+                <a:solidFill>
+                  <a:srgbClr val="FFFFFF"/>
+                </a:solidFill>
+                <a:latin typeface="Calibri"/>
+              </a:rPr>
+              <a:t>스키마/라벨 통일</a:t>
+            </a:r>
+          </a:p>
+          <a:p>
+            <a:pPr algn="l">
+              <a:lnSpc>
+                <a:spcPct val="125000"/>
+              </a:lnSpc>
+            </a:pPr>
+            <a:r>
+              <a:rPr sz="1400" b="1" i="0">
+                <a:solidFill>
+                  <a:srgbClr val="FFFFFF"/>
+                </a:solidFill>
+                <a:latin typeface="Calibri"/>
+              </a:rPr>
+              <a:t>+ 중복 제거</a:t>
+            </a:r>
+          </a:p>
+        </p:txBody>
+      </p:sp>
+      <p:sp>
+        <p:nvSpPr>
+          <p:cNvPr id="22" name="TextBox 21"/>
+          <p:cNvSpPr txBox="1"/>
+          <p:nvPr/>
+        </p:nvSpPr>
+        <p:spPr>
+          <a:xfrm>
+            <a:off x="9052559" y="3246120"/>
+            <a:ext cx="2240280" cy="548640"/>
+          </a:xfrm>
+          <a:prstGeom prst="rect">
+            <a:avLst/>
+          </a:prstGeom>
+          <a:noFill/>
+        </p:spPr>
+        <p:txBody>
+          <a:bodyPr wrap="square" anchor="t" lIns="0" rIns="0" tIns="0" bIns="0">
+            <a:spAutoFit/>
+          </a:bodyPr>
+          <a:lstStyle/>
+          <a:p>
+            <a:pPr algn="l"/>
+            <a:r>
+              <a:rPr sz="2000" b="1" i="0">
+                <a:solidFill>
+                  <a:srgbClr val="FFFFFF"/>
+                </a:solidFill>
+                <a:latin typeface="Calibri"/>
+              </a:rPr>
+              <a:t>538,774건</a:t>
+            </a:r>
+          </a:p>
+        </p:txBody>
+      </p:sp>
+      <p:sp>
+        <p:nvSpPr>
+          <p:cNvPr id="23" name="TextBox 22"/>
+          <p:cNvSpPr txBox="1"/>
+          <p:nvPr/>
+        </p:nvSpPr>
+        <p:spPr>
+          <a:xfrm>
+            <a:off x="640080" y="4297680"/>
+            <a:ext cx="5120640" cy="365760"/>
+          </a:xfrm>
+          <a:prstGeom prst="rect">
+            <a:avLst/>
+          </a:prstGeom>
+          <a:noFill/>
+        </p:spPr>
+        <p:txBody>
+          <a:bodyPr wrap="square" anchor="t" lIns="0" rIns="0" tIns="0" bIns="0">
+            <a:spAutoFit/>
+          </a:bodyPr>
+          <a:lstStyle/>
+          <a:p>
+            <a:pPr algn="l"/>
+            <a:r>
+              <a:rPr sz="1600" b="1" i="0">
+                <a:solidFill>
+                  <a:srgbClr val="1E2761"/>
+                </a:solidFill>
+                <a:latin typeface="Calibri"/>
+              </a:rPr>
+              <a:t>데이터 장점</a:t>
+            </a:r>
+          </a:p>
+        </p:txBody>
+      </p:sp>
+      <p:sp>
+        <p:nvSpPr>
+          <p:cNvPr id="24" name="TextBox 23"/>
+          <p:cNvSpPr txBox="1"/>
+          <p:nvPr/>
+        </p:nvSpPr>
+        <p:spPr>
+          <a:xfrm>
+            <a:off x="640080" y="4754880"/>
+            <a:ext cx="5120640" cy="1645920"/>
+          </a:xfrm>
+          <a:prstGeom prst="rect">
+            <a:avLst/>
+          </a:prstGeom>
+          <a:noFill/>
+        </p:spPr>
+        <p:txBody>
+          <a:bodyPr wrap="square">
+            <a:spAutoFit/>
+          </a:bodyPr>
+          <a:lstStyle/>
+          <a:p>
+            <a:pPr>
+              <a:spcAft>
+                <a:spcPts val="800"/>
+              </a:spcAft>
+            </a:pPr>
+            <a:r>
+              <a:rPr sz="1350">
+                <a:solidFill>
+                  <a:srgbClr val="21295C"/>
+                </a:solidFill>
+                <a:latin typeface="Calibri"/>
+              </a:rPr>
+              <a:t>•  별점 기반 라벨이 이미 존재 → 별도 수작업 레이블링 불필요</a:t>
+            </a:r>
+          </a:p>
+          <a:p>
+            <a:pPr>
+              <a:spcAft>
+                <a:spcPts val="800"/>
+              </a:spcAft>
+            </a:pPr>
+            <a:r>
+              <a:rPr sz="1350">
+                <a:solidFill>
+                  <a:srgbClr val="21295C"/>
+                </a:solidFill>
+                <a:latin typeface="Calibri"/>
+              </a:rPr>
+              <a:t>•  화장품 도메인 특화, 2015~2026년 10년치 데이터</a:t>
+            </a:r>
+          </a:p>
+          <a:p>
+            <a:pPr>
+              <a:spcAft>
+                <a:spcPts val="800"/>
+              </a:spcAft>
+            </a:pPr>
+            <a:r>
+              <a:rPr sz="1350">
+                <a:solidFill>
+                  <a:srgbClr val="21295C"/>
+                </a:solidFill>
+                <a:latin typeface="Calibri"/>
+              </a:rPr>
+              <a:t>•  20개+ 카테고리로 비교 분석 용이</a:t>
+            </a:r>
+          </a:p>
+        </p:txBody>
+      </p:sp>
+      <p:sp>
+        <p:nvSpPr>
+          <p:cNvPr id="25" name="TextBox 24"/>
+          <p:cNvSpPr txBox="1"/>
+          <p:nvPr/>
+        </p:nvSpPr>
+        <p:spPr>
+          <a:xfrm>
+            <a:off x="6217920" y="4297680"/>
+            <a:ext cx="5394960" cy="365760"/>
+          </a:xfrm>
+          <a:prstGeom prst="rect">
+            <a:avLst/>
+          </a:prstGeom>
+          <a:noFill/>
+        </p:spPr>
+        <p:txBody>
+          <a:bodyPr wrap="square" anchor="t" lIns="0" rIns="0" tIns="0" bIns="0">
+            <a:spAutoFit/>
+          </a:bodyPr>
+          <a:lstStyle/>
+          <a:p>
+            <a:pPr algn="l"/>
+            <a:r>
+              <a:rPr sz="1600" b="1" i="0">
+                <a:solidFill>
+                  <a:srgbClr val="1E2761"/>
+                </a:solidFill>
+                <a:latin typeface="Calibri"/>
+              </a:rPr>
+              <a:t>최종 분포</a:t>
             </a:r>
           </a:p>
         </p:txBody>
       </p:sp>
       <p:graphicFrame>
         <p:nvGraphicFramePr>
-          <p:cNvPr id="13" name="Chart 12"/>
+          <p:cNvPr id="26" name="Chart 25"/>
           <p:cNvGraphicFramePr>
             <a:graphicFrameLocks noGrp="1"/>
           </p:cNvGraphicFramePr>
           <p:nvPr/>
         </p:nvGraphicFramePr>
         <p:xfrm>
-          <a:off x="640080" y="3840480"/>
-          <a:ext cx="5120640" cy="2651760"/>
+          <a:off x="6217920" y="4663440"/>
+          <a:ext cx="5394960" cy="1737360"/>
         </p:xfrm>
         <a:graphic>
           <a:graphicData uri="http://schemas.openxmlformats.org/drawingml/2006/chart">
@@ -4757,128 +6650,6 @@
           </a:graphicData>
         </a:graphic>
       </p:graphicFrame>
-      <p:sp>
-        <p:nvSpPr>
-          <p:cNvPr id="14" name="TextBox 13"/>
-          <p:cNvSpPr txBox="1"/>
-          <p:nvPr/>
-        </p:nvSpPr>
-        <p:spPr>
-          <a:xfrm>
-            <a:off x="6217920" y="3840480"/>
-            <a:ext cx="5394960" cy="365760"/>
-          </a:xfrm>
-          <a:prstGeom prst="rect">
-            <a:avLst/>
-          </a:prstGeom>
-          <a:noFill/>
-        </p:spPr>
-        <p:txBody>
-          <a:bodyPr wrap="square" anchor="t" lIns="0" rIns="0" tIns="0" bIns="0">
-            <a:spAutoFit/>
-          </a:bodyPr>
-          <a:lstStyle/>
-          <a:p>
-            <a:pPr algn="l"/>
-            <a:r>
-              <a:rPr sz="1600" b="1" i="0">
-                <a:solidFill>
-                  <a:srgbClr val="1E2761"/>
-                </a:solidFill>
-                <a:latin typeface="Calibri"/>
-              </a:rPr>
-              <a:t>데이터 장점</a:t>
-            </a:r>
-          </a:p>
-        </p:txBody>
-      </p:sp>
-      <p:sp>
-        <p:nvSpPr>
-          <p:cNvPr id="15" name="TextBox 14"/>
-          <p:cNvSpPr txBox="1"/>
-          <p:nvPr/>
-        </p:nvSpPr>
-        <p:spPr>
-          <a:xfrm>
-            <a:off x="6217920" y="4297680"/>
-            <a:ext cx="5394960" cy="2194560"/>
-          </a:xfrm>
-          <a:prstGeom prst="rect">
-            <a:avLst/>
-          </a:prstGeom>
-          <a:noFill/>
-        </p:spPr>
-        <p:txBody>
-          <a:bodyPr wrap="square">
-            <a:spAutoFit/>
-          </a:bodyPr>
-          <a:lstStyle/>
-          <a:p>
-            <a:pPr>
-              <a:spcAft>
-                <a:spcPts val="800"/>
-              </a:spcAft>
-            </a:pPr>
-            <a:r>
-              <a:rPr sz="1350">
-                <a:solidFill>
-                  <a:srgbClr val="21295C"/>
-                </a:solidFill>
-                <a:latin typeface="Calibri"/>
-              </a:rPr>
-              <a:t>•  별점 기반 라벨이 이미 존재 → 별도 수작업 레이블링 불필요</a:t>
-            </a:r>
-          </a:p>
-          <a:p>
-            <a:pPr>
-              <a:spcAft>
-                <a:spcPts val="800"/>
-              </a:spcAft>
-            </a:pPr>
-            <a:r>
-              <a:rPr sz="1350">
-                <a:solidFill>
-                  <a:srgbClr val="21295C"/>
-                </a:solidFill>
-                <a:latin typeface="Calibri"/>
-              </a:rPr>
-              <a:t>•  화장품 도메인 특화 (성분/지속력/자극 등 표현이 풍부)</a:t>
-            </a:r>
-          </a:p>
-          <a:p>
-            <a:pPr>
-              <a:spcAft>
-                <a:spcPts val="800"/>
-              </a:spcAft>
-            </a:pPr>
-            <a:r>
-              <a:rPr sz="1350">
-                <a:solidFill>
-                  <a:srgbClr val="21295C"/>
-                </a:solidFill>
-                <a:latin typeface="Calibri"/>
-              </a:rPr>
-              <a:t>•  2015~2026년 10년치 데이터로 트렌드 분석 가능</a:t>
-            </a:r>
-          </a:p>
-          <a:p>
-            <a:pPr>
-              <a:spcAft>
-                <a:spcPts val="800"/>
-              </a:spcAft>
-            </a:pPr>
-            <a:r>
-              <a:rPr sz="1350">
-                <a:solidFill>
-                  <a:srgbClr val="21295C"/>
-                </a:solidFill>
-                <a:latin typeface="Calibri"/>
-              </a:rPr>
-              <a:t>•  20개+ 카테고리로 비교 분석 용이</a:t>
-            </a:r>
-          </a:p>
-        </p:txBody>
-      </p:sp>
     </p:spTree>
   </p:cSld>
   <p:clrMapOvr>
@@ -4965,13 +6736,13 @@
           <a:p>
             <a:pPr algn="l"/>
             <a:r>
-              <a:rPr sz="3000" b="1" i="0">
+              <a:rPr sz="2800" b="1" i="0">
                 <a:solidFill>
                   <a:srgbClr val="1E2761"/>
                 </a:solidFill>
                 <a:latin typeface="Georgia"/>
               </a:rPr>
-              <a:t>데이터 준비 — 가장 어려웠던 단계</a:t>
+              <a:t>데이터 준비 — 가장 까다로웠던 단계</a:t>
             </a:r>
           </a:p>
         </p:txBody>
@@ -4984,12 +6755,12 @@
         </p:nvSpPr>
         <p:spPr>
           <a:xfrm>
-            <a:off x="640080" y="1417320"/>
-            <a:ext cx="10881360" cy="1170432"/>
+            <a:off x="640080" y="1371600"/>
+            <a:ext cx="10881360" cy="950976"/>
           </a:xfrm>
           <a:prstGeom prst="roundRect">
             <a:avLst>
-              <a:gd name="adj" fmla="val 6000"/>
+              <a:gd name="adj" fmla="val 8000"/>
             </a:avLst>
           </a:prstGeom>
           <a:solidFill>
@@ -5030,8 +6801,8 @@
         </p:nvSpPr>
         <p:spPr>
           <a:xfrm>
-            <a:off x="868680" y="1581912"/>
-            <a:ext cx="2331720" cy="411480"/>
+            <a:off x="841248" y="1508760"/>
+            <a:ext cx="2423160" cy="384048"/>
           </a:xfrm>
           <a:prstGeom prst="roundRect">
             <a:avLst>
@@ -5066,7 +6837,7 @@
           <a:p>
             <a:pPr algn="ctr"/>
             <a:r>
-              <a:rPr sz="1250" b="1">
+              <a:rPr sz="1150" b="1">
                 <a:solidFill>
                   <a:srgbClr val="FFFFFF"/>
                 </a:solidFill>
@@ -5084,8 +6855,8 @@
         </p:nvSpPr>
         <p:spPr>
           <a:xfrm>
-            <a:off x="3429000" y="1508760"/>
-            <a:ext cx="3749039" cy="960120"/>
+            <a:off x="3429000" y="1444752"/>
+            <a:ext cx="3657600" cy="804672"/>
           </a:xfrm>
           <a:prstGeom prst="rect">
             <a:avLst/>
@@ -5104,7 +6875,7 @@
               </a:lnSpc>
             </a:pPr>
             <a:r>
-              <a:rPr sz="1200" b="0" i="0">
+              <a:rPr sz="1150" b="0" i="0">
                 <a:solidFill>
                   <a:srgbClr val="555A6E"/>
                 </a:solidFill>
@@ -5113,6 +6884,29 @@
               <a:t>쿠팡/무신사/올리브영 컬럼명이 전부 다름</a:t>
             </a:r>
           </a:p>
+        </p:txBody>
+      </p:sp>
+      <p:sp>
+        <p:nvSpPr>
+          <p:cNvPr id="7" name="TextBox 6"/>
+          <p:cNvSpPr txBox="1"/>
+          <p:nvPr/>
+        </p:nvSpPr>
+        <p:spPr>
+          <a:xfrm>
+            <a:off x="7223760" y="1444752"/>
+            <a:ext cx="4160520" cy="804672"/>
+          </a:xfrm>
+          <a:prstGeom prst="rect">
+            <a:avLst/>
+          </a:prstGeom>
+          <a:noFill/>
+        </p:spPr>
+        <p:txBody>
+          <a:bodyPr wrap="square" anchor="t" lIns="0" rIns="0" tIns="0" bIns="0">
+            <a:spAutoFit/>
+          </a:bodyPr>
+          <a:lstStyle/>
           <a:p>
             <a:pPr algn="l">
               <a:lnSpc>
@@ -5120,52 +6914,13 @@
               </a:lnSpc>
             </a:pPr>
             <a:r>
-              <a:rPr sz="1200" b="0" i="0">
-                <a:solidFill>
-                  <a:srgbClr val="555A6E"/>
-                </a:solidFill>
-                <a:latin typeface="Calibri"/>
-              </a:rPr>
-              <a:t>(CSV 2종 + JSONL 4파일)</a:t>
-            </a:r>
-          </a:p>
-        </p:txBody>
-      </p:sp>
-      <p:sp>
-        <p:nvSpPr>
-          <p:cNvPr id="7" name="TextBox 6"/>
-          <p:cNvSpPr txBox="1"/>
-          <p:nvPr/>
-        </p:nvSpPr>
-        <p:spPr>
-          <a:xfrm>
-            <a:off x="7315200" y="1508760"/>
-            <a:ext cx="4069080" cy="960120"/>
-          </a:xfrm>
-          <a:prstGeom prst="rect">
-            <a:avLst/>
-          </a:prstGeom>
-          <a:noFill/>
-        </p:spPr>
-        <p:txBody>
-          <a:bodyPr wrap="square" anchor="t" lIns="0" rIns="0" tIns="0" bIns="0">
-            <a:spAutoFit/>
-          </a:bodyPr>
-          <a:lstStyle/>
-          <a:p>
-            <a:pPr algn="l">
-              <a:lnSpc>
-                <a:spcPct val="115000"/>
-              </a:lnSpc>
-            </a:pPr>
-            <a:r>
-              <a:rPr sz="1200" b="1" i="0">
+              <a:rPr sz="1150" b="1" i="0">
                 <a:solidFill>
                   <a:srgbClr val="1E2761"/>
                 </a:solidFill>
                 <a:latin typeface="Calibri"/>
               </a:rPr>
-              <a:t>해결 → 공통 스키마로 변환하는 로더 3개 작성 후 concat</a:t>
+              <a:t>해결 → 플랫폼별 로더로 공통 스키마 변환 후 병합</a:t>
             </a:r>
           </a:p>
         </p:txBody>
@@ -5178,12 +6933,12 @@
         </p:nvSpPr>
         <p:spPr>
           <a:xfrm>
-            <a:off x="640080" y="2697480"/>
-            <a:ext cx="10881360" cy="1170432"/>
+            <a:off x="640080" y="2414015"/>
+            <a:ext cx="10881360" cy="950976"/>
           </a:xfrm>
           <a:prstGeom prst="roundRect">
             <a:avLst>
-              <a:gd name="adj" fmla="val 6000"/>
+              <a:gd name="adj" fmla="val 8000"/>
             </a:avLst>
           </a:prstGeom>
           <a:solidFill>
@@ -5224,8 +6979,8 @@
         </p:nvSpPr>
         <p:spPr>
           <a:xfrm>
-            <a:off x="868680" y="2862072"/>
-            <a:ext cx="2331720" cy="411480"/>
+            <a:off x="841248" y="2551175"/>
+            <a:ext cx="2423160" cy="384048"/>
           </a:xfrm>
           <a:prstGeom prst="roundRect">
             <a:avLst>
@@ -5260,7 +7015,7 @@
           <a:p>
             <a:pPr algn="ctr"/>
             <a:r>
-              <a:rPr sz="1250" b="1">
+              <a:rPr sz="1150" b="1">
                 <a:solidFill>
                   <a:srgbClr val="FFFFFF"/>
                 </a:solidFill>
@@ -5278,8 +7033,8 @@
         </p:nvSpPr>
         <p:spPr>
           <a:xfrm>
-            <a:off x="3429000" y="2788920"/>
-            <a:ext cx="3749039" cy="960120"/>
+            <a:off x="3429000" y="2487168"/>
+            <a:ext cx="3657600" cy="804672"/>
           </a:xfrm>
           <a:prstGeom prst="rect">
             <a:avLst/>
@@ -5298,15 +7053,38 @@
               </a:lnSpc>
             </a:pPr>
             <a:r>
-              <a:rPr sz="1200" b="0" i="0">
+              <a:rPr sz="1150" b="0" i="0">
                 <a:solidFill>
                   <a:srgbClr val="555A6E"/>
                 </a:solidFill>
                 <a:latin typeface="Calibri"/>
               </a:rPr>
-              <a:t>무신사 sentiment는 별점 기반이 아니라 텍스트 분석 기반</a:t>
-            </a:r>
-          </a:p>
+              <a:t>무신사 sentiment가 별점 아닌 텍스트분석 기반 → 5점 리뷰의 21%가 '부정'</a:t>
+            </a:r>
+          </a:p>
+        </p:txBody>
+      </p:sp>
+      <p:sp>
+        <p:nvSpPr>
+          <p:cNvPr id="11" name="TextBox 10"/>
+          <p:cNvSpPr txBox="1"/>
+          <p:nvPr/>
+        </p:nvSpPr>
+        <p:spPr>
+          <a:xfrm>
+            <a:off x="7223760" y="2487168"/>
+            <a:ext cx="4160520" cy="804672"/>
+          </a:xfrm>
+          <a:prstGeom prst="rect">
+            <a:avLst/>
+          </a:prstGeom>
+          <a:noFill/>
+        </p:spPr>
+        <p:txBody>
+          <a:bodyPr wrap="square" anchor="t" lIns="0" rIns="0" tIns="0" bIns="0">
+            <a:spAutoFit/>
+          </a:bodyPr>
+          <a:lstStyle/>
           <a:p>
             <a:pPr algn="l">
               <a:lnSpc>
@@ -5314,52 +7092,13 @@
               </a:lnSpc>
             </a:pPr>
             <a:r>
-              <a:rPr sz="1200" b="0" i="0">
-                <a:solidFill>
-                  <a:srgbClr val="555A6E"/>
-                </a:solidFill>
-                <a:latin typeface="Calibri"/>
-              </a:rPr>
-              <a:t>→ 5점 리뷰의 21%가 '부정'으로 라벨링되어 있었음</a:t>
-            </a:r>
-          </a:p>
-        </p:txBody>
-      </p:sp>
-      <p:sp>
-        <p:nvSpPr>
-          <p:cNvPr id="11" name="TextBox 10"/>
-          <p:cNvSpPr txBox="1"/>
-          <p:nvPr/>
-        </p:nvSpPr>
-        <p:spPr>
-          <a:xfrm>
-            <a:off x="7315200" y="2788920"/>
-            <a:ext cx="4069080" cy="960120"/>
-          </a:xfrm>
-          <a:prstGeom prst="rect">
-            <a:avLst/>
-          </a:prstGeom>
-          <a:noFill/>
-        </p:spPr>
-        <p:txBody>
-          <a:bodyPr wrap="square" anchor="t" lIns="0" rIns="0" tIns="0" bIns="0">
-            <a:spAutoFit/>
-          </a:bodyPr>
-          <a:lstStyle/>
-          <a:p>
-            <a:pPr algn="l">
-              <a:lnSpc>
-                <a:spcPct val="115000"/>
-              </a:lnSpc>
-            </a:pPr>
-            <a:r>
-              <a:rPr sz="1200" b="1" i="0">
+              <a:rPr sz="1150" b="1" i="0">
                 <a:solidFill>
                   <a:srgbClr val="1E2761"/>
                 </a:solidFill>
                 <a:latin typeface="Calibri"/>
               </a:rPr>
-              <a:t>해결 → 전체 데이터의 sentiment를 별점에서 일괄 재계산해 기준 통일</a:t>
+              <a:t>해결 → 전체 데이터의 sentiment를 별점에서 일괄 재계산</a:t>
             </a:r>
           </a:p>
         </p:txBody>
@@ -5372,12 +7111,12 @@
         </p:nvSpPr>
         <p:spPr>
           <a:xfrm>
-            <a:off x="640080" y="3977639"/>
-            <a:ext cx="10881360" cy="1170432"/>
+            <a:off x="640080" y="3456431"/>
+            <a:ext cx="10881360" cy="950976"/>
           </a:xfrm>
           <a:prstGeom prst="roundRect">
             <a:avLst>
-              <a:gd name="adj" fmla="val 6000"/>
+              <a:gd name="adj" fmla="val 8000"/>
             </a:avLst>
           </a:prstGeom>
           <a:solidFill>
@@ -5418,8 +7157,8 @@
         </p:nvSpPr>
         <p:spPr>
           <a:xfrm>
-            <a:off x="868680" y="4142231"/>
-            <a:ext cx="2331720" cy="411480"/>
+            <a:off x="841248" y="3593591"/>
+            <a:ext cx="2423160" cy="384048"/>
           </a:xfrm>
           <a:prstGeom prst="roundRect">
             <a:avLst>
@@ -5454,7 +7193,7 @@
           <a:p>
             <a:pPr algn="ctr"/>
             <a:r>
-              <a:rPr sz="1250" b="1">
+              <a:rPr sz="1150" b="1">
                 <a:solidFill>
                   <a:srgbClr val="FFFFFF"/>
                 </a:solidFill>
@@ -5472,8 +7211,8 @@
         </p:nvSpPr>
         <p:spPr>
           <a:xfrm>
-            <a:off x="3429000" y="4069079"/>
-            <a:ext cx="3749039" cy="960120"/>
+            <a:off x="3429000" y="3529583"/>
+            <a:ext cx="3657600" cy="804672"/>
           </a:xfrm>
           <a:prstGeom prst="rect">
             <a:avLst/>
@@ -5492,15 +7231,38 @@
               </a:lnSpc>
             </a:pPr>
             <a:r>
-              <a:rPr sz="1200" b="0" i="0">
+              <a:rPr sz="1150" b="0" i="0">
                 <a:solidFill>
                   <a:srgbClr val="555A6E"/>
                 </a:solidFill>
                 <a:latin typeface="Calibri"/>
               </a:rPr>
-              <a:t>무신사 CSV를 기본 인코딩으로 읽으면</a:t>
-            </a:r>
-          </a:p>
+              <a:t>무신사 CSV 기본 인코딩으로 읽으면 한글 깨짐</a:t>
+            </a:r>
+          </a:p>
+        </p:txBody>
+      </p:sp>
+      <p:sp>
+        <p:nvSpPr>
+          <p:cNvPr id="15" name="TextBox 14"/>
+          <p:cNvSpPr txBox="1"/>
+          <p:nvPr/>
+        </p:nvSpPr>
+        <p:spPr>
+          <a:xfrm>
+            <a:off x="7223760" y="3529583"/>
+            <a:ext cx="4160520" cy="804672"/>
+          </a:xfrm>
+          <a:prstGeom prst="rect">
+            <a:avLst/>
+          </a:prstGeom>
+          <a:noFill/>
+        </p:spPr>
+        <p:txBody>
+          <a:bodyPr wrap="square" anchor="t" lIns="0" rIns="0" tIns="0" bIns="0">
+            <a:spAutoFit/>
+          </a:bodyPr>
+          <a:lstStyle/>
           <a:p>
             <a:pPr algn="l">
               <a:lnSpc>
@@ -5508,46 +7270,7 @@
               </a:lnSpc>
             </a:pPr>
             <a:r>
-              <a:rPr sz="1200" b="0" i="0">
-                <a:solidFill>
-                  <a:srgbClr val="555A6E"/>
-                </a:solidFill>
-                <a:latin typeface="Calibri"/>
-              </a:rPr>
-              <a:t>한글이 깨짐 (mojibake)</a:t>
-            </a:r>
-          </a:p>
-        </p:txBody>
-      </p:sp>
-      <p:sp>
-        <p:nvSpPr>
-          <p:cNvPr id="15" name="TextBox 14"/>
-          <p:cNvSpPr txBox="1"/>
-          <p:nvPr/>
-        </p:nvSpPr>
-        <p:spPr>
-          <a:xfrm>
-            <a:off x="7315200" y="4069079"/>
-            <a:ext cx="4069080" cy="960120"/>
-          </a:xfrm>
-          <a:prstGeom prst="rect">
-            <a:avLst/>
-          </a:prstGeom>
-          <a:noFill/>
-        </p:spPr>
-        <p:txBody>
-          <a:bodyPr wrap="square" anchor="t" lIns="0" rIns="0" tIns="0" bIns="0">
-            <a:spAutoFit/>
-          </a:bodyPr>
-          <a:lstStyle/>
-          <a:p>
-            <a:pPr algn="l">
-              <a:lnSpc>
-                <a:spcPct val="115000"/>
-              </a:lnSpc>
-            </a:pPr>
-            <a:r>
-              <a:rPr sz="1200" b="1" i="0">
+              <a:rPr sz="1150" b="1" i="0">
                 <a:solidFill>
                   <a:srgbClr val="1E2761"/>
                 </a:solidFill>
@@ -5566,12 +7289,12 @@
         </p:nvSpPr>
         <p:spPr>
           <a:xfrm>
-            <a:off x="640080" y="5257800"/>
-            <a:ext cx="10881360" cy="1170432"/>
+            <a:off x="640080" y="4498847"/>
+            <a:ext cx="10881360" cy="950976"/>
           </a:xfrm>
           <a:prstGeom prst="roundRect">
             <a:avLst>
-              <a:gd name="adj" fmla="val 6000"/>
+              <a:gd name="adj" fmla="val 8000"/>
             </a:avLst>
           </a:prstGeom>
           <a:solidFill>
@@ -5612,8 +7335,8 @@
         </p:nvSpPr>
         <p:spPr>
           <a:xfrm>
-            <a:off x="868680" y="5422392"/>
-            <a:ext cx="2331720" cy="411480"/>
+            <a:off x="841248" y="4636007"/>
+            <a:ext cx="2423160" cy="384048"/>
           </a:xfrm>
           <a:prstGeom prst="roundRect">
             <a:avLst>
@@ -5648,7 +7371,7 @@
           <a:p>
             <a:pPr algn="ctr"/>
             <a:r>
-              <a:rPr sz="1250" b="1">
+              <a:rPr sz="1150" b="1">
                 <a:solidFill>
                   <a:srgbClr val="FFFFFF"/>
                 </a:solidFill>
@@ -5666,8 +7389,8 @@
         </p:nvSpPr>
         <p:spPr>
           <a:xfrm>
-            <a:off x="3429000" y="5349240"/>
-            <a:ext cx="3749039" cy="960120"/>
+            <a:off x="3429000" y="4571999"/>
+            <a:ext cx="3657600" cy="804672"/>
           </a:xfrm>
           <a:prstGeom prst="rect">
             <a:avLst/>
@@ -5686,15 +7409,38 @@
               </a:lnSpc>
             </a:pPr>
             <a:r>
-              <a:rPr sz="1200" b="0" i="0">
+              <a:rPr sz="1150" b="0" i="0">
                 <a:solidFill>
                   <a:srgbClr val="555A6E"/>
                 </a:solidFill>
                 <a:latin typeface="Calibri"/>
               </a:rPr>
-              <a:t>긍정 86.7% vs 부정 8.2% vs 중립 5.1%</a:t>
-            </a:r>
-          </a:p>
+              <a:t>긍정 86.7% — 그대로 학습하면 다 긍정 찍어도 86%</a:t>
+            </a:r>
+          </a:p>
+        </p:txBody>
+      </p:sp>
+      <p:sp>
+        <p:nvSpPr>
+          <p:cNvPr id="19" name="TextBox 18"/>
+          <p:cNvSpPr txBox="1"/>
+          <p:nvPr/>
+        </p:nvSpPr>
+        <p:spPr>
+          <a:xfrm>
+            <a:off x="7223760" y="4571999"/>
+            <a:ext cx="4160520" cy="804672"/>
+          </a:xfrm>
+          <a:prstGeom prst="rect">
+            <a:avLst/>
+          </a:prstGeom>
+          <a:noFill/>
+        </p:spPr>
+        <p:txBody>
+          <a:bodyPr wrap="square" anchor="t" lIns="0" rIns="0" tIns="0" bIns="0">
+            <a:spAutoFit/>
+          </a:bodyPr>
+          <a:lstStyle/>
           <a:p>
             <a:pPr algn="l">
               <a:lnSpc>
@@ -5702,27 +7448,127 @@
               </a:lnSpc>
             </a:pPr>
             <a:r>
-              <a:rPr sz="1200" b="0" i="0">
-                <a:solidFill>
-                  <a:srgbClr val="555A6E"/>
-                </a:solidFill>
-                <a:latin typeface="Calibri"/>
-              </a:rPr>
-              <a:t>→ 그냥 다 긍정 찍어도 86% 정확도</a:t>
-            </a:r>
-          </a:p>
-        </p:txBody>
-      </p:sp>
-      <p:sp>
-        <p:nvSpPr>
-          <p:cNvPr id="19" name="TextBox 18"/>
+              <a:rPr sz="1150" b="1" i="0">
+                <a:solidFill>
+                  <a:srgbClr val="1E2761"/>
+                </a:solidFill>
+                <a:latin typeface="Calibri"/>
+              </a:rPr>
+              <a:t>해결 → 부정/중립 전량 + 긍정은 2배 규모로만 다운샘플링</a:t>
+            </a:r>
+          </a:p>
+        </p:txBody>
+      </p:sp>
+      <p:sp>
+        <p:nvSpPr>
+          <p:cNvPr id="20" name="Rounded Rectangle 19"/>
+          <p:cNvSpPr/>
+          <p:nvPr/>
+        </p:nvSpPr>
+        <p:spPr>
+          <a:xfrm>
+            <a:off x="640080" y="5541263"/>
+            <a:ext cx="10881360" cy="950976"/>
+          </a:xfrm>
+          <a:prstGeom prst="roundRect">
+            <a:avLst>
+              <a:gd name="adj" fmla="val 8000"/>
+            </a:avLst>
+          </a:prstGeom>
+          <a:solidFill>
+            <a:srgbClr val="F4F6FC"/>
+          </a:solidFill>
+          <a:ln>
+            <a:noFill/>
+          </a:ln>
+          <a:effectLst/>
+        </p:spPr>
+        <p:style>
+          <a:lnRef idx="1">
+            <a:schemeClr val="accent1"/>
+          </a:lnRef>
+          <a:fillRef idx="3">
+            <a:schemeClr val="accent1"/>
+          </a:fillRef>
+          <a:effectRef idx="2">
+            <a:schemeClr val="accent1"/>
+          </a:effectRef>
+          <a:fontRef idx="minor">
+            <a:schemeClr val="lt1"/>
+          </a:fontRef>
+        </p:style>
+        <p:txBody>
+          <a:bodyPr rtlCol="0" anchor="ctr"/>
+          <a:lstStyle/>
+          <a:p>
+            <a:pPr algn="ctr"/>
+          </a:p>
+        </p:txBody>
+      </p:sp>
+      <p:sp>
+        <p:nvSpPr>
+          <p:cNvPr id="21" name="Rounded Rectangle 20"/>
+          <p:cNvSpPr/>
+          <p:nvPr/>
+        </p:nvSpPr>
+        <p:spPr>
+          <a:xfrm>
+            <a:off x="841248" y="5678423"/>
+            <a:ext cx="2423160" cy="384048"/>
+          </a:xfrm>
+          <a:prstGeom prst="roundRect">
+            <a:avLst>
+              <a:gd name="adj" fmla="val 50000"/>
+            </a:avLst>
+          </a:prstGeom>
+          <a:solidFill>
+            <a:srgbClr val="F96167"/>
+          </a:solidFill>
+          <a:ln>
+            <a:noFill/>
+          </a:ln>
+          <a:effectLst/>
+        </p:spPr>
+        <p:style>
+          <a:lnRef idx="1">
+            <a:schemeClr val="accent1"/>
+          </a:lnRef>
+          <a:fillRef idx="3">
+            <a:schemeClr val="accent1"/>
+          </a:fillRef>
+          <a:effectRef idx="2">
+            <a:schemeClr val="accent1"/>
+          </a:effectRef>
+          <a:fontRef idx="minor">
+            <a:schemeClr val="lt1"/>
+          </a:fontRef>
+        </p:style>
+        <p:txBody>
+          <a:bodyPr rtlCol="0" anchor="ctr" wrap="none" lIns="45720" rIns="45720" tIns="0" bIns="0"/>
+          <a:lstStyle/>
+          <a:p>
+            <a:pPr algn="ctr"/>
+            <a:r>
+              <a:rPr sz="1150" b="1">
+                <a:solidFill>
+                  <a:srgbClr val="FFFFFF"/>
+                </a:solidFill>
+              </a:rPr>
+              <a:t>불용어/형태소 미처리</a:t>
+            </a:r>
+          </a:p>
+        </p:txBody>
+      </p:sp>
+      <p:sp>
+        <p:nvSpPr>
+          <p:cNvPr id="22" name="TextBox 21"/>
           <p:cNvSpPr txBox="1"/>
           <p:nvPr/>
         </p:nvSpPr>
         <p:spPr>
           <a:xfrm>
-            <a:off x="7315200" y="5349240"/>
-            <a:ext cx="4069080" cy="960120"/>
+            <a:off x="3429000" y="5614415"/>
+            <a:ext cx="3657600" cy="804672"/>
           </a:xfrm>
           <a:prstGeom prst="rect">
             <a:avLst/>
@@ -5741,13 +7587,52 @@
               </a:lnSpc>
             </a:pPr>
             <a:r>
-              <a:rPr sz="1200" b="1" i="0">
+              <a:rPr sz="1150" b="0" i="0">
+                <a:solidFill>
+                  <a:srgbClr val="555A6E"/>
+                </a:solidFill>
+                <a:latin typeface="Calibri"/>
+              </a:rPr>
+              <a:t>정규식으로만 잘라서 조사가 토큰에 섞임</a:t>
+            </a:r>
+          </a:p>
+        </p:txBody>
+      </p:sp>
+      <p:sp>
+        <p:nvSpPr>
+          <p:cNvPr id="23" name="TextBox 22"/>
+          <p:cNvSpPr txBox="1"/>
+          <p:nvPr/>
+        </p:nvSpPr>
+        <p:spPr>
+          <a:xfrm>
+            <a:off x="7223760" y="5614415"/>
+            <a:ext cx="4160520" cy="804672"/>
+          </a:xfrm>
+          <a:prstGeom prst="rect">
+            <a:avLst/>
+          </a:prstGeom>
+          <a:noFill/>
+        </p:spPr>
+        <p:txBody>
+          <a:bodyPr wrap="square" anchor="t" lIns="0" rIns="0" tIns="0" bIns="0">
+            <a:spAutoFit/>
+          </a:bodyPr>
+          <a:lstStyle/>
+          <a:p>
+            <a:pPr algn="l">
+              <a:lnSpc>
+                <a:spcPct val="115000"/>
+              </a:lnSpc>
+            </a:pPr>
+            <a:r>
+              <a:rPr sz="1150" b="1" i="0">
                 <a:solidFill>
                   <a:srgbClr val="1E2761"/>
                 </a:solidFill>
                 <a:latin typeface="Calibri"/>
               </a:rPr>
-              <a:t>해결 → 부정/중립 전량 + 긍정은 2배 규모로만 다운샘플링</a:t>
+              <a:t>해결 → Okt 형태소분석 + 어간정규화 + 불용어 제거</a:t>
             </a:r>
           </a:p>
         </p:txBody>
@@ -5838,13 +7723,13 @@
           <a:p>
             <a:pPr algn="l"/>
             <a:r>
-              <a:rPr sz="3000" b="1" i="0">
+              <a:rPr sz="2800" b="1" i="0">
                 <a:solidFill>
                   <a:srgbClr val="FFFFFF"/>
                 </a:solidFill>
                 <a:latin typeface="Georgia"/>
               </a:rPr>
-              <a:t>구현하며 AI를 어떻게 활용했나</a:t>
+              <a:t>AI(Claude Code)로 어떻게 구현했나</a:t>
             </a:r>
           </a:p>
         </p:txBody>
@@ -5858,7 +7743,7 @@
         <p:spPr>
           <a:xfrm>
             <a:off x="640080" y="1463040"/>
-            <a:ext cx="5577840" cy="2743200"/>
+            <a:ext cx="5577840" cy="3017520"/>
           </a:xfrm>
           <a:prstGeom prst="rect">
             <a:avLst/>
@@ -5883,7 +7768,7 @@
                 </a:solidFill>
                 <a:latin typeface="Calibri"/>
               </a:rPr>
-              <a:t>•  Claude Code로 전처리 스크립트·모델 코드·Streamlit 앱을 페어 프로그래밍 방식으로 작성</a:t>
+              <a:t>•  전처리·모델·Streamlit 앱 코드를 페어 프로그래밍 방식으로 작성</a:t>
             </a:r>
           </a:p>
           <a:p>
@@ -5899,7 +7784,7 @@
                 </a:solidFill>
                 <a:latin typeface="Calibri"/>
               </a:rPr>
-              <a:t>•  데이터 검증(rating vs sentiment 크로스탭)을 코드로 직접 돌려 라벨 불일치를 수치로 확인</a:t>
+              <a:t>•  라벨 불일치를 "느낌"이 아니라 crosstab 코드를 직접 돌려 수치로 진단</a:t>
             </a:r>
           </a:p>
           <a:p>
@@ -5915,7 +7800,23 @@
                 </a:solidFill>
                 <a:latin typeface="Calibri"/>
               </a:rPr>
-              <a:t>•  환경 제약(PyTorch 미설치)을 만났을 때 대체 구현 방향을 같이 설계</a:t>
+              <a:t>•  막힐 때마다(PyTorch 미설치 등) 대안을 같이 설계하고 바로 실행</a:t>
+            </a:r>
+          </a:p>
+          <a:p>
+            <a:pPr>
+              <a:spcAft>
+                <a:spcPts val="800"/>
+              </a:spcAft>
+            </a:pPr>
+            <a:r>
+              <a:rPr sz="1550">
+                <a:solidFill>
+                  <a:srgbClr val="FFFFFF"/>
+                </a:solidFill>
+                <a:latin typeface="Calibri"/>
+              </a:rPr>
+              <a:t>•  모델을 만들고 끝내지 않고, 실제 분포로 재평가해서 숨은 문제를 찾아냄</a:t>
             </a:r>
           </a:p>
         </p:txBody>
@@ -6029,7 +7930,7 @@
               </a:lnSpc>
             </a:pPr>
             <a:r>
-              <a:rPr sz="1400" b="0" i="0">
+              <a:rPr sz="1350" b="0" i="0">
                 <a:solidFill>
                   <a:srgbClr val="FFFFFF"/>
                 </a:solidFill>
@@ -6045,7 +7946,7 @@
               </a:lnSpc>
             </a:pPr>
             <a:r>
-              <a:rPr sz="1400" b="0" i="0">
+              <a:rPr sz="1350" b="0" i="0">
                 <a:solidFill>
                   <a:srgbClr val="FFFFFF"/>
                 </a:solidFill>
@@ -6061,7 +7962,7 @@
               </a:lnSpc>
             </a:pPr>
             <a:r>
-              <a:rPr sz="1400" b="0" i="0">
+              <a:rPr sz="1350" b="0" i="0">
                 <a:solidFill>
                   <a:srgbClr val="FFFFFF"/>
                 </a:solidFill>
@@ -6077,7 +7978,7 @@
               </a:lnSpc>
             </a:pPr>
             <a:r>
-              <a:rPr sz="1400" b="0" i="0">
+              <a:rPr sz="1350" b="0" i="0">
                 <a:solidFill>
                   <a:srgbClr val="FFFFFF"/>
                 </a:solidFill>
@@ -6093,13 +7994,13 @@
               </a:lnSpc>
             </a:pPr>
             <a:r>
-              <a:rPr sz="1400" b="0" i="0">
+              <a:rPr sz="1350" b="0" i="0">
                 <a:solidFill>
                   <a:srgbClr val="FFFFFF"/>
                 </a:solidFill>
                 <a:latin typeface="Calibri"/>
               </a:rPr>
-              <a:t>해결: 신경망 프레임워크 없이 numpy로</a:t>
+              <a:t>1단계 해결: numpy로 신경망 직접 구현</a:t>
             </a:r>
           </a:p>
           <a:p>
@@ -6109,13 +8010,13 @@
               </a:lnSpc>
             </a:pPr>
             <a:r>
-              <a:rPr sz="1400" b="0" i="0">
+              <a:rPr sz="1350" b="0" i="0">
                 <a:solidFill>
                   <a:srgbClr val="FFFFFF"/>
                 </a:solidFill>
                 <a:latin typeface="Calibri"/>
               </a:rPr>
-              <a:t>순전파·역전파를 직접 구현</a:t>
+              <a:t>2단계 해결: winget으로 Python 3.11을 따로</a:t>
             </a:r>
           </a:p>
           <a:p>
@@ -6125,13 +8026,13 @@
               </a:lnSpc>
             </a:pPr>
             <a:r>
-              <a:rPr sz="1400" b="0" i="0">
+              <a:rPr sz="1350" b="0" i="0">
                 <a:solidFill>
                   <a:srgbClr val="FFFFFF"/>
                 </a:solidFill>
                 <a:latin typeface="Calibri"/>
               </a:rPr>
-              <a:t/>
+              <a:t>설치해 별도 venv 구성 → 실제 PyTorch</a:t>
             </a:r>
           </a:p>
           <a:p>
@@ -6141,29 +8042,13 @@
               </a:lnSpc>
             </a:pPr>
             <a:r>
-              <a:rPr sz="1400" b="0" i="0">
+              <a:rPr sz="1350" b="0" i="0">
                 <a:solidFill>
                   <a:srgbClr val="FFFFFF"/>
                 </a:solidFill>
                 <a:latin typeface="Calibri"/>
               </a:rPr>
-              <a:t>결과적으로 "신경망이 어떻게 학습되는지"를</a:t>
-            </a:r>
-          </a:p>
-          <a:p>
-            <a:pPr algn="l">
-              <a:lnSpc>
-                <a:spcPct val="140000"/>
-              </a:lnSpc>
-            </a:pPr>
-            <a:r>
-              <a:rPr sz="1400" b="0" i="0">
-                <a:solidFill>
-                  <a:srgbClr val="FFFFFF"/>
-                </a:solidFill>
-                <a:latin typeface="Calibri"/>
-              </a:rPr>
-              <a:t>더 명확하게 설명할 수 있는 발표 소재가 됨</a:t>
+              <a:t>LSTM/Transformer까지 검증</a:t>
             </a:r>
           </a:p>
         </p:txBody>
@@ -6254,7 +8139,7 @@
           <a:p>
             <a:pPr algn="l"/>
             <a:r>
-              <a:rPr sz="2800" b="1" i="0">
+              <a:rPr sz="2600" b="1" i="0">
                 <a:solidFill>
                   <a:srgbClr val="1E2761"/>
                 </a:solidFill>
@@ -6273,8 +8158,8 @@
         </p:nvSpPr>
         <p:spPr>
           <a:xfrm>
-            <a:off x="822960" y="1554480"/>
-            <a:ext cx="2331720" cy="1554480"/>
+            <a:off x="822960" y="1463040"/>
+            <a:ext cx="2331720" cy="1463040"/>
           </a:xfrm>
           <a:prstGeom prst="roundRect">
             <a:avLst>
@@ -6309,7 +8194,7 @@
           <a:p>
             <a:pPr algn="ctr"/>
             <a:r>
-              <a:rPr sz="1400" b="1">
+              <a:rPr sz="1300" b="1">
                 <a:solidFill>
                   <a:srgbClr val="1E2761"/>
                 </a:solidFill>
@@ -6320,23 +8205,23 @@
           <a:p>
             <a:pPr algn="ctr"/>
             <a:r>
-              <a:rPr sz="1400" b="1">
+              <a:rPr sz="1300" b="1">
                 <a:solidFill>
                   <a:srgbClr val="1E2761"/>
                 </a:solidFill>
               </a:rPr>
-              <a:t>TF-IDF</a:t>
+              <a:t>TF-IDF(형태소)</a:t>
             </a:r>
           </a:p>
           <a:p>
             <a:pPr algn="ctr"/>
             <a:r>
-              <a:rPr sz="1400" b="1">
+              <a:rPr sz="1300" b="1">
                 <a:solidFill>
                   <a:srgbClr val="1E2761"/>
                 </a:solidFill>
               </a:rPr>
-              <a:t>20,000차원</a:t>
+              <a:t>15,000차원</a:t>
             </a:r>
           </a:p>
         </p:txBody>
@@ -6349,7 +8234,7 @@
         </p:nvSpPr>
         <p:spPr>
           <a:xfrm>
-            <a:off x="3172968" y="2221991"/>
+            <a:off x="3172968" y="2084832"/>
             <a:ext cx="329184" cy="219456"/>
           </a:xfrm>
           <a:prstGeom prst="rightArrow">
@@ -6393,8 +8278,8 @@
         </p:nvSpPr>
         <p:spPr>
           <a:xfrm>
-            <a:off x="3520439" y="1554480"/>
-            <a:ext cx="2331720" cy="1554480"/>
+            <a:off x="3520439" y="1463040"/>
+            <a:ext cx="2331720" cy="1463040"/>
           </a:xfrm>
           <a:prstGeom prst="roundRect">
             <a:avLst>
@@ -6429,7 +8314,7 @@
           <a:p>
             <a:pPr algn="ctr"/>
             <a:r>
-              <a:rPr sz="1400" b="1">
+              <a:rPr sz="1300" b="1">
                 <a:solidFill>
                   <a:srgbClr val="FFFFFF"/>
                 </a:solidFill>
@@ -6440,7 +8325,7 @@
           <a:p>
             <a:pPr algn="ctr"/>
             <a:r>
-              <a:rPr sz="1400" b="1">
+              <a:rPr sz="1300" b="1">
                 <a:solidFill>
                   <a:srgbClr val="FFFFFF"/>
                 </a:solidFill>
@@ -6458,7 +8343,7 @@
         </p:nvSpPr>
         <p:spPr>
           <a:xfrm>
-            <a:off x="5870447" y="2221991"/>
+            <a:off x="5870447" y="2084832"/>
             <a:ext cx="329184" cy="219456"/>
           </a:xfrm>
           <a:prstGeom prst="rightArrow">
@@ -6502,8 +8387,8 @@
         </p:nvSpPr>
         <p:spPr>
           <a:xfrm>
-            <a:off x="6217920" y="1554480"/>
-            <a:ext cx="2331720" cy="1554480"/>
+            <a:off x="6217920" y="1463040"/>
+            <a:ext cx="2331720" cy="1463040"/>
           </a:xfrm>
           <a:prstGeom prst="roundRect">
             <a:avLst>
@@ -6538,7 +8423,7 @@
           <a:p>
             <a:pPr algn="ctr"/>
             <a:r>
-              <a:rPr sz="1400" b="1">
+              <a:rPr sz="1300" b="1">
                 <a:solidFill>
                   <a:srgbClr val="FFFFFF"/>
                 </a:solidFill>
@@ -6549,7 +8434,7 @@
           <a:p>
             <a:pPr algn="ctr"/>
             <a:r>
-              <a:rPr sz="1400" b="1">
+              <a:rPr sz="1300" b="1">
                 <a:solidFill>
                   <a:srgbClr val="FFFFFF"/>
                 </a:solidFill>
@@ -6567,7 +8452,7 @@
         </p:nvSpPr>
         <p:spPr>
           <a:xfrm>
-            <a:off x="8567928" y="2221991"/>
+            <a:off x="8567928" y="2084832"/>
             <a:ext cx="329184" cy="219456"/>
           </a:xfrm>
           <a:prstGeom prst="rightArrow">
@@ -6611,8 +8496,8 @@
         </p:nvSpPr>
         <p:spPr>
           <a:xfrm>
-            <a:off x="8915400" y="1554480"/>
-            <a:ext cx="2331720" cy="1554480"/>
+            <a:off x="8915400" y="1463040"/>
+            <a:ext cx="2331720" cy="1463040"/>
           </a:xfrm>
           <a:prstGeom prst="roundRect">
             <a:avLst>
@@ -6647,7 +8532,7 @@
           <a:p>
             <a:pPr algn="ctr"/>
             <a:r>
-              <a:rPr sz="1400" b="1">
+              <a:rPr sz="1300" b="1">
                 <a:solidFill>
                   <a:srgbClr val="FFFFFF"/>
                 </a:solidFill>
@@ -6658,7 +8543,7 @@
           <a:p>
             <a:pPr algn="ctr"/>
             <a:r>
-              <a:rPr sz="1400" b="1">
+              <a:rPr sz="1300" b="1">
                 <a:solidFill>
                   <a:srgbClr val="FFFFFF"/>
                 </a:solidFill>
@@ -6676,7 +8561,7 @@
         </p:nvSpPr>
         <p:spPr>
           <a:xfrm>
-            <a:off x="822960" y="3474720"/>
+            <a:off x="822960" y="3291840"/>
             <a:ext cx="5120640" cy="365760"/>
           </a:xfrm>
           <a:prstGeom prst="rect">
@@ -6711,7 +8596,7 @@
         </p:nvSpPr>
         <p:spPr>
           <a:xfrm>
-            <a:off x="822960" y="3886200"/>
+            <a:off x="822960" y="3703320"/>
             <a:ext cx="5120640" cy="2560320"/>
           </a:xfrm>
           <a:prstGeom prst="rect">
@@ -6731,7 +8616,7 @@
               </a:spcAft>
             </a:pPr>
             <a:r>
-              <a:rPr sz="1350">
+              <a:rPr sz="1300">
                 <a:solidFill>
                   <a:srgbClr val="21295C"/>
                 </a:solidFill>
@@ -6747,7 +8632,7 @@
               </a:spcAft>
             </a:pPr>
             <a:r>
-              <a:rPr sz="1350">
+              <a:rPr sz="1300">
                 <a:solidFill>
                   <a:srgbClr val="21295C"/>
                 </a:solidFill>
@@ -6763,13 +8648,13 @@
               </a:spcAft>
             </a:pPr>
             <a:r>
-              <a:rPr sz="1350">
+              <a:rPr sz="1300">
                 <a:solidFill>
                   <a:srgbClr val="21295C"/>
                 </a:solidFill>
                 <a:latin typeface="Calibri"/>
               </a:rPr>
-              <a:t>•  batch size 256, 15 epoch, 학습시간 약 132초</a:t>
+              <a:t>•  batch size 256, 15 epoch</a:t>
             </a:r>
           </a:p>
           <a:p>
@@ -6779,7 +8664,7 @@
               </a:spcAft>
             </a:pPr>
             <a:r>
-              <a:rPr sz="1350">
+              <a:rPr sz="1300">
                 <a:solidFill>
                   <a:srgbClr val="21295C"/>
                 </a:solidFill>
@@ -6799,7 +8684,7 @@
         </p:nvSpPr>
         <p:spPr>
           <a:xfrm>
-            <a:off x="6309360" y="3474720"/>
+            <a:off x="6309360" y="3291840"/>
             <a:ext cx="5120640" cy="365760"/>
           </a:xfrm>
           <a:prstGeom prst="rect">
@@ -6821,7 +8706,7 @@
                 </a:solidFill>
                 <a:latin typeface="Calibri"/>
               </a:rPr>
-              <a:t>데이터 규모</a:t>
+              <a:t>추가 실험 (별도 venv, PyTorch)</a:t>
             </a:r>
           </a:p>
         </p:txBody>
@@ -6834,8 +8719,8 @@
         </p:nvSpPr>
         <p:spPr>
           <a:xfrm>
-            <a:off x="6309360" y="3886200"/>
-            <a:ext cx="5120640" cy="1463040"/>
+            <a:off x="6309360" y="3703320"/>
+            <a:ext cx="5120640" cy="1645920"/>
           </a:xfrm>
           <a:prstGeom prst="rect">
             <a:avLst/>
@@ -6854,13 +8739,13 @@
               </a:spcAft>
             </a:pPr>
             <a:r>
-              <a:rPr sz="1350">
+              <a:rPr sz="1300">
                 <a:solidFill>
                   <a:srgbClr val="21295C"/>
                 </a:solidFill>
                 <a:latin typeface="Calibri"/>
               </a:rPr>
-              <a:t>•  학습 데이터: 136,150건 (밸런싱 후)</a:t>
+              <a:t>•  LSTM: Embedding → BiLSTM(128) → Dense(3)</a:t>
             </a:r>
           </a:p>
           <a:p>
@@ -6870,13 +8755,13 @@
               </a:spcAft>
             </a:pPr>
             <a:r>
-              <a:rPr sz="1350">
+              <a:rPr sz="1300">
                 <a:solidFill>
                   <a:srgbClr val="21295C"/>
                 </a:solidFill>
                 <a:latin typeface="Calibri"/>
               </a:rPr>
-              <a:t>•  검증 데이터: 24,026건</a:t>
+              <a:t>•  KoELECTRA-small 파인튜닝 (사전학습 모델)</a:t>
             </a:r>
           </a:p>
           <a:p>
@@ -6886,13 +8771,13 @@
               </a:spcAft>
             </a:pPr>
             <a:r>
-              <a:rPr sz="1350">
+              <a:rPr sz="1300">
                 <a:solidFill>
                   <a:srgbClr val="21295C"/>
                 </a:solidFill>
                 <a:latin typeface="Calibri"/>
               </a:rPr>
-              <a:t>•  원본 통합 데이터: 538,774건</a:t>
+              <a:t>•  winget으로 Python 3.11 별도 설치 후 venv 구성</a:t>
             </a:r>
           </a:p>
         </p:txBody>
@@ -6905,8 +8790,8 @@
         </p:nvSpPr>
         <p:spPr>
           <a:xfrm>
-            <a:off x="6309360" y="5120640"/>
-            <a:ext cx="5120640" cy="1280160"/>
+            <a:off x="6309360" y="5029200"/>
+            <a:ext cx="5120640" cy="1371600"/>
           </a:xfrm>
           <a:prstGeom prst="roundRect">
             <a:avLst>
@@ -6951,8 +8836,8 @@
         </p:nvSpPr>
         <p:spPr>
           <a:xfrm>
-            <a:off x="6492240" y="5212080"/>
-            <a:ext cx="4754880" cy="1097280"/>
+            <a:off x="6492240" y="5166360"/>
+            <a:ext cx="4754880" cy="1188720"/>
           </a:xfrm>
           <a:prstGeom prst="rect">
             <a:avLst/>
@@ -6971,13 +8856,13 @@
               </a:lnSpc>
             </a:pPr>
             <a:r>
-              <a:rPr sz="1250" b="0" i="0">
+              <a:rPr sz="1200" b="0" i="0">
                 <a:solidFill>
                   <a:srgbClr val="555A6E"/>
                 </a:solidFill>
                 <a:latin typeface="Calibri"/>
               </a:rPr>
-              <a:t>관찰: epoch 4 근처(acc 0.781) 이후</a:t>
+              <a:t>관찰: LSTM이 순서 정보를 학습할 수 있는데도</a:t>
             </a:r>
           </a:p>
           <a:p>
@@ -6987,13 +8872,13 @@
               </a:lnSpc>
             </a:pPr>
             <a:r>
-              <a:rPr sz="1250" b="0" i="0">
+              <a:rPr sz="1200" b="0" i="0">
                 <a:solidFill>
                   <a:srgbClr val="555A6E"/>
                 </a:solidFill>
                 <a:latin typeface="Calibri"/>
               </a:rPr>
-              <a:t>train loss는 계속 감소하지만 test acc는</a:t>
+              <a:t>TF-IDF 기반 모델과 성능이 비슷함 — 짧은 리뷰는</a:t>
             </a:r>
           </a:p>
           <a:p>
@@ -7003,13 +8888,13 @@
               </a:lnSpc>
             </a:pPr>
             <a:r>
-              <a:rPr sz="1250" b="0" i="0">
+              <a:rPr sz="1200" b="0" i="0">
                 <a:solidFill>
                   <a:srgbClr val="555A6E"/>
                 </a:solidFill>
                 <a:latin typeface="Calibri"/>
               </a:rPr>
-              <a:t>진동/하락 → 과적합 신호를 직접 확인</a:t>
+              <a:t>어휘 자체가 이미 강한 신호였다는 뜻</a:t>
             </a:r>
           </a:p>
         </p:txBody>
@@ -7106,7 +8991,7 @@
                 </a:solidFill>
                 <a:latin typeface="Georgia"/>
               </a:rPr>
-              <a:t>ML vs DL 결과 비교</a:t>
+              <a:t>4개 모델 비교</a:t>
             </a:r>
           </a:p>
         </p:txBody>
@@ -7121,7 +9006,7 @@
         </p:nvGraphicFramePr>
         <p:xfrm>
           <a:off x="640080" y="1463040"/>
-          <a:ext cx="5852160" cy="3657600"/>
+          <a:ext cx="6949440" cy="3931920"/>
         </p:xfrm>
         <a:graphic>
           <a:graphicData uri="http://schemas.openxmlformats.org/drawingml/2006/chart">
@@ -7137,8 +9022,8 @@
         </p:nvSpPr>
         <p:spPr>
           <a:xfrm>
-            <a:off x="6858000" y="1554480"/>
-            <a:ext cx="4846320" cy="365760"/>
+            <a:off x="7863840" y="1554480"/>
+            <a:ext cx="3840480" cy="365760"/>
           </a:xfrm>
           <a:prstGeom prst="rect">
             <a:avLst/>
@@ -7159,7 +9044,7 @@
                 </a:solidFill>
                 <a:latin typeface="Calibri"/>
               </a:rPr>
-              <a:t>공통적으로 어려운 클래스: 중립</a:t>
+              <a:t>결론</a:t>
             </a:r>
           </a:p>
         </p:txBody>
@@ -7172,8 +9057,8 @@
         </p:nvSpPr>
         <p:spPr>
           <a:xfrm>
-            <a:off x="6858000" y="2057400"/>
-            <a:ext cx="4846320" cy="2926080"/>
+            <a:off x="7863840" y="2011680"/>
+            <a:ext cx="3840480" cy="2926080"/>
           </a:xfrm>
           <a:prstGeom prst="rect">
             <a:avLst/>
@@ -7192,13 +9077,14 @@
               </a:spcAft>
             </a:pPr>
             <a:r>
-              <a:rPr sz="1350">
+              <a:rPr sz="1300">
                 <a:solidFill>
                   <a:srgbClr val="21295C"/>
                 </a:solidFill>
                 <a:latin typeface="Calibri"/>
               </a:rPr>
-              <a:t>•  ML neutral F1: 0.45  /  DL neutral F1: 0.37</a:t>
+              <a:t>•  KoELECTRA가 데이터 1/7만 쓰고도
+최고 accuracy → 사전학습 효과 확인</a:t>
             </a:r>
           </a:p>
           <a:p>
@@ -7208,14 +9094,14 @@
               </a:spcAft>
             </a:pPr>
             <a:r>
-              <a:rPr sz="1350">
+              <a:rPr sz="1300">
                 <a:solidFill>
                   <a:srgbClr val="21295C"/>
                 </a:solidFill>
                 <a:latin typeface="Calibri"/>
               </a:rPr>
-              <a:t>•  중립(별점 3점)은 텍스트 신호 자체가 모호한
-근본적으로 어려운 라벨</a:t>
+              <a:t>•  LSTM은 순서 정보 활용 기대했으나
+차이 없음 (학습 데이터 규모 한계)</a:t>
             </a:r>
           </a:p>
           <a:p>
@@ -7225,29 +9111,14 @@
               </a:spcAft>
             </a:pPr>
             <a:r>
-              <a:rPr sz="1350">
+              <a:rPr sz="1300">
                 <a:solidFill>
                   <a:srgbClr val="21295C"/>
                 </a:solidFill>
                 <a:latin typeface="Calibri"/>
               </a:rPr>
-              <a:t>•  가벼운 ML이 매크로 F1 기준 더 안정적</a:t>
-            </a:r>
-          </a:p>
-          <a:p>
-            <a:pPr>
-              <a:spcAft>
-                <a:spcPts val="800"/>
-              </a:spcAft>
-            </a:pPr>
-            <a:r>
-              <a:rPr sz="1350">
-                <a:solidFill>
-                  <a:srgbClr val="21295C"/>
-                </a:solidFill>
-                <a:latin typeface="Calibri"/>
-              </a:rPr>
-              <a:t>•  신경망은 정확도는 약간 높지만 과적합 경향</a:t>
+              <a:t>•  구조보다 어휘 신호 자체가 강한
+도메인이라는 결론</a:t>
             </a:r>
           </a:p>
         </p:txBody>
@@ -7260,8 +9131,8 @@
         </p:nvSpPr>
         <p:spPr>
           <a:xfrm>
-            <a:off x="640080" y="5303520"/>
-            <a:ext cx="10881360" cy="914400"/>
+            <a:off x="640080" y="5577840"/>
+            <a:ext cx="10881360" cy="731520"/>
           </a:xfrm>
           <a:prstGeom prst="roundRect">
             <a:avLst>
@@ -7306,8 +9177,8 @@
         </p:nvSpPr>
         <p:spPr>
           <a:xfrm>
-            <a:off x="914400" y="5532120"/>
-            <a:ext cx="10332720" cy="457200"/>
+            <a:off x="914400" y="5760720"/>
+            <a:ext cx="10332720" cy="365760"/>
           </a:xfrm>
           <a:prstGeom prst="rect">
             <a:avLst/>
@@ -7322,13 +9193,13 @@
           <a:p>
             <a:pPr algn="ctr"/>
             <a:r>
-              <a:rPr sz="1450" b="1" i="0">
-                <a:solidFill>
-                  <a:srgbClr val="F96167"/>
-                </a:solidFill>
-                <a:latin typeface="Calibri"/>
-              </a:rPr>
-              <a:t>결론: 단순 TF-IDF 특징에서는 모델 복잡도보다 데이터 라벨 품질이 성능을 더 좌우했다</a:t>
+              <a:rPr sz="1250" b="0" i="0">
+                <a:solidFill>
+                  <a:srgbClr val="555A6E"/>
+                </a:solidFill>
+                <a:latin typeface="Calibri"/>
+              </a:rPr>
+              <a:t>KoELECTRA: 20,000건 서브샘플 · 2 epoch (CPU 환경 시간 제약, GPU면 격차 더 벌어질 것으로 예상)</a:t>
             </a:r>
           </a:p>
         </p:txBody>
@@ -7419,167 +9290,102 @@
           <a:p>
             <a:pPr algn="l"/>
             <a:r>
-              <a:rPr sz="3000" b="1" i="0">
+              <a:rPr sz="2800" b="1" i="0">
                 <a:solidFill>
                   <a:srgbClr val="1E2761"/>
                 </a:solidFill>
                 <a:latin typeface="Georgia"/>
               </a:rPr>
-              <a:t>Streamlit 서비스 — BeautyScope</a:t>
-            </a:r>
-          </a:p>
-        </p:txBody>
-      </p:sp>
-      <p:sp>
-        <p:nvSpPr>
-          <p:cNvPr id="4" name="Rounded Rectangle 3"/>
+              <a:t>모델 문제점 발견 — 실제 분포로 재평가</a:t>
+            </a:r>
+          </a:p>
+        </p:txBody>
+      </p:sp>
+      <p:sp>
+        <p:nvSpPr>
+          <p:cNvPr id="4" name="TextBox 3"/>
+          <p:cNvSpPr txBox="1"/>
+          <p:nvPr/>
+        </p:nvSpPr>
+        <p:spPr>
+          <a:xfrm>
+            <a:off x="640080" y="1463040"/>
+            <a:ext cx="10515600" cy="1828800"/>
+          </a:xfrm>
+          <a:prstGeom prst="rect">
+            <a:avLst/>
+          </a:prstGeom>
+          <a:noFill/>
+        </p:spPr>
+        <p:txBody>
+          <a:bodyPr wrap="square">
+            <a:spAutoFit/>
+          </a:bodyPr>
+          <a:lstStyle/>
+          <a:p>
+            <a:pPr>
+              <a:spcAft>
+                <a:spcPts val="800"/>
+              </a:spcAft>
+            </a:pPr>
+            <a:r>
+              <a:rPr sz="1550">
+                <a:solidFill>
+                  <a:srgbClr val="21295C"/>
+                </a:solidFill>
+                <a:latin typeface="Calibri"/>
+              </a:rPr>
+              <a:t>•  학습 시 클래스 밸런싱(다운샘플링)을 했는데, 실제 운영 비율(positive 86.7%)과 다름</a:t>
+            </a:r>
+          </a:p>
+          <a:p>
+            <a:pPr>
+              <a:spcAft>
+                <a:spcPts val="800"/>
+              </a:spcAft>
+            </a:pPr>
+            <a:r>
+              <a:rPr sz="1550">
+                <a:solidFill>
+                  <a:srgbClr val="21295C"/>
+                </a:solidFill>
+                <a:latin typeface="Calibri"/>
+              </a:rPr>
+              <a:t>•  실제 분포 샘플로 재평가하니 neutral precision이 0.20까지 떨어짐</a:t>
+            </a:r>
+          </a:p>
+          <a:p>
+            <a:pPr>
+              <a:spcAft>
+                <a:spcPts val="800"/>
+              </a:spcAft>
+            </a:pPr>
+            <a:r>
+              <a:rPr sz="1550">
+                <a:solidFill>
+                  <a:srgbClr val="21295C"/>
+                </a:solidFill>
+                <a:latin typeface="Calibri"/>
+              </a:rPr>
+              <a:t>•  = 모델이 "중립"이라고 예측한 것 중 80%가 틀림 (label shift 문제)</a:t>
+            </a:r>
+          </a:p>
+        </p:txBody>
+      </p:sp>
+      <p:sp>
+        <p:nvSpPr>
+          <p:cNvPr id="5" name="Rounded Rectangle 4"/>
           <p:cNvSpPr/>
           <p:nvPr/>
         </p:nvSpPr>
         <p:spPr>
           <a:xfrm>
-            <a:off x="640080" y="1554480"/>
-            <a:ext cx="3520440" cy="2103120"/>
+            <a:off x="640080" y="3200400"/>
+            <a:ext cx="10881360" cy="822960"/>
           </a:xfrm>
           <a:prstGeom prst="roundRect">
             <a:avLst>
-              <a:gd name="adj" fmla="val 8000"/>
-            </a:avLst>
-          </a:prstGeom>
-          <a:solidFill>
-            <a:srgbClr val="1E2761"/>
-          </a:solidFill>
-          <a:ln>
-            <a:noFill/>
-          </a:ln>
-          <a:effectLst/>
-        </p:spPr>
-        <p:style>
-          <a:lnRef idx="1">
-            <a:schemeClr val="accent1"/>
-          </a:lnRef>
-          <a:fillRef idx="3">
-            <a:schemeClr val="accent1"/>
-          </a:fillRef>
-          <a:effectRef idx="2">
-            <a:schemeClr val="accent1"/>
-          </a:effectRef>
-          <a:fontRef idx="minor">
-            <a:schemeClr val="lt1"/>
-          </a:fontRef>
-        </p:style>
-        <p:txBody>
-          <a:bodyPr rtlCol="0" anchor="ctr"/>
-          <a:lstStyle/>
-          <a:p>
-            <a:pPr algn="ctr"/>
-          </a:p>
-        </p:txBody>
-      </p:sp>
-      <p:sp>
-        <p:nvSpPr>
-          <p:cNvPr id="5" name="TextBox 4"/>
-          <p:cNvSpPr txBox="1"/>
-          <p:nvPr/>
-        </p:nvSpPr>
-        <p:spPr>
-          <a:xfrm>
-            <a:off x="868680" y="1783080"/>
-            <a:ext cx="3063240" cy="457200"/>
-          </a:xfrm>
-          <a:prstGeom prst="rect">
-            <a:avLst/>
-          </a:prstGeom>
-          <a:noFill/>
-        </p:spPr>
-        <p:txBody>
-          <a:bodyPr wrap="square" anchor="t" lIns="0" rIns="0" tIns="0" bIns="0">
-            <a:spAutoFit/>
-          </a:bodyPr>
-          <a:lstStyle/>
-          <a:p>
-            <a:pPr algn="l"/>
-            <a:r>
-              <a:rPr sz="1600" b="1" i="0">
-                <a:solidFill>
-                  <a:srgbClr val="FFFFFF"/>
-                </a:solidFill>
-                <a:latin typeface="Calibri"/>
-              </a:rPr>
-              <a:t>🔍 감성 분석 데모</a:t>
-            </a:r>
-          </a:p>
-        </p:txBody>
-      </p:sp>
-      <p:sp>
-        <p:nvSpPr>
-          <p:cNvPr id="6" name="TextBox 5"/>
-          <p:cNvSpPr txBox="1"/>
-          <p:nvPr/>
-        </p:nvSpPr>
-        <p:spPr>
-          <a:xfrm>
-            <a:off x="868680" y="2331720"/>
-            <a:ext cx="3063240" cy="1097280"/>
-          </a:xfrm>
-          <a:prstGeom prst="rect">
-            <a:avLst/>
-          </a:prstGeom>
-          <a:noFill/>
-        </p:spPr>
-        <p:txBody>
-          <a:bodyPr wrap="square" anchor="t" lIns="0" rIns="0" tIns="0" bIns="0">
-            <a:spAutoFit/>
-          </a:bodyPr>
-          <a:lstStyle/>
-          <a:p>
-            <a:pPr algn="l">
-              <a:lnSpc>
-                <a:spcPct val="130000"/>
-              </a:lnSpc>
-            </a:pPr>
-            <a:r>
-              <a:rPr sz="1300" b="0" i="0">
-                <a:solidFill>
-                  <a:srgbClr val="CADCFC"/>
-                </a:solidFill>
-                <a:latin typeface="Calibri"/>
-              </a:rPr>
-              <a:t>리뷰 텍스트 입력 → ML/DL</a:t>
-            </a:r>
-          </a:p>
-          <a:p>
-            <a:pPr algn="l">
-              <a:lnSpc>
-                <a:spcPct val="130000"/>
-              </a:lnSpc>
-            </a:pPr>
-            <a:r>
-              <a:rPr sz="1300" b="0" i="0">
-                <a:solidFill>
-                  <a:srgbClr val="CADCFC"/>
-                </a:solidFill>
-                <a:latin typeface="Calibri"/>
-              </a:rPr>
-              <a:t>동시 예측 + 확률 시각화</a:t>
-            </a:r>
-          </a:p>
-        </p:txBody>
-      </p:sp>
-      <p:sp>
-        <p:nvSpPr>
-          <p:cNvPr id="7" name="Rounded Rectangle 6"/>
-          <p:cNvSpPr/>
-          <p:nvPr/>
-        </p:nvSpPr>
-        <p:spPr>
-          <a:xfrm>
-            <a:off x="4343400" y="1554480"/>
-            <a:ext cx="3520440" cy="2103120"/>
-          </a:xfrm>
-          <a:prstGeom prst="roundRect">
-            <a:avLst>
-              <a:gd name="adj" fmla="val 8000"/>
+              <a:gd name="adj" fmla="val 10000"/>
             </a:avLst>
           </a:prstGeom>
           <a:solidFill>
@@ -7614,14 +9420,14 @@
       </p:sp>
       <p:sp>
         <p:nvSpPr>
-          <p:cNvPr id="8" name="TextBox 7"/>
+          <p:cNvPr id="6" name="TextBox 5"/>
           <p:cNvSpPr txBox="1"/>
           <p:nvPr/>
         </p:nvSpPr>
         <p:spPr>
           <a:xfrm>
-            <a:off x="4572000" y="1783080"/>
-            <a:ext cx="3063240" cy="457200"/>
+            <a:off x="914400" y="3429000"/>
+            <a:ext cx="10332720" cy="457200"/>
           </a:xfrm>
           <a:prstGeom prst="rect">
             <a:avLst/>
@@ -7634,316 +9440,37 @@
           </a:bodyPr>
           <a:lstStyle/>
           <a:p>
-            <a:pPr algn="l"/>
-            <a:r>
-              <a:rPr sz="1600" b="1" i="0">
+            <a:pPr algn="ctr"/>
+            <a:r>
+              <a:rPr sz="1400" b="1" i="0">
                 <a:solidFill>
                   <a:srgbClr val="FFFFFF"/>
                 </a:solidFill>
                 <a:latin typeface="Calibri"/>
               </a:rPr>
-              <a:t>📊 데이터 대시보드</a:t>
-            </a:r>
-          </a:p>
-        </p:txBody>
-      </p:sp>
-      <p:sp>
-        <p:nvSpPr>
-          <p:cNvPr id="9" name="TextBox 8"/>
-          <p:cNvSpPr txBox="1"/>
-          <p:nvPr/>
-        </p:nvSpPr>
-        <p:spPr>
-          <a:xfrm>
-            <a:off x="4572000" y="2331720"/>
-            <a:ext cx="3063240" cy="1097280"/>
-          </a:xfrm>
-          <a:prstGeom prst="rect">
-            <a:avLst/>
-          </a:prstGeom>
-          <a:noFill/>
-        </p:spPr>
-        <p:txBody>
-          <a:bodyPr wrap="square" anchor="t" lIns="0" rIns="0" tIns="0" bIns="0">
-            <a:spAutoFit/>
-          </a:bodyPr>
-          <a:lstStyle/>
-          <a:p>
-            <a:pPr algn="l">
-              <a:lnSpc>
-                <a:spcPct val="130000"/>
-              </a:lnSpc>
-            </a:pPr>
-            <a:r>
-              <a:rPr sz="1300" b="0" i="0">
-                <a:solidFill>
-                  <a:srgbClr val="CADCFC"/>
-                </a:solidFill>
-                <a:latin typeface="Calibri"/>
-              </a:rPr>
-              <a:t>플랫폼/별점/트렌드/카테고리별</a:t>
-            </a:r>
-          </a:p>
-          <a:p>
-            <a:pPr algn="l">
-              <a:lnSpc>
-                <a:spcPct val="130000"/>
-              </a:lnSpc>
-            </a:pPr>
-            <a:r>
-              <a:rPr sz="1300" b="0" i="0">
-                <a:solidFill>
-                  <a:srgbClr val="CADCFC"/>
-                </a:solidFill>
-                <a:latin typeface="Calibri"/>
-              </a:rPr>
-              <a:t>분포, 부정·긍정 다빈도 키워드</a:t>
-            </a:r>
-          </a:p>
-        </p:txBody>
-      </p:sp>
-      <p:sp>
-        <p:nvSpPr>
-          <p:cNvPr id="10" name="Rounded Rectangle 9"/>
-          <p:cNvSpPr/>
-          <p:nvPr/>
-        </p:nvSpPr>
-        <p:spPr>
-          <a:xfrm>
-            <a:off x="8046719" y="1554480"/>
-            <a:ext cx="3520440" cy="2103120"/>
-          </a:xfrm>
-          <a:prstGeom prst="roundRect">
-            <a:avLst>
-              <a:gd name="adj" fmla="val 8000"/>
-            </a:avLst>
-          </a:prstGeom>
-          <a:solidFill>
-            <a:srgbClr val="1E2761"/>
-          </a:solidFill>
-          <a:ln>
-            <a:noFill/>
-          </a:ln>
-          <a:effectLst/>
-        </p:spPr>
-        <p:style>
-          <a:lnRef idx="1">
-            <a:schemeClr val="accent1"/>
-          </a:lnRef>
-          <a:fillRef idx="3">
-            <a:schemeClr val="accent1"/>
-          </a:fillRef>
-          <a:effectRef idx="2">
-            <a:schemeClr val="accent1"/>
-          </a:effectRef>
-          <a:fontRef idx="minor">
-            <a:schemeClr val="lt1"/>
-          </a:fontRef>
-        </p:style>
-        <p:txBody>
-          <a:bodyPr rtlCol="0" anchor="ctr"/>
-          <a:lstStyle/>
-          <a:p>
-            <a:pPr algn="ctr"/>
-          </a:p>
-        </p:txBody>
-      </p:sp>
-      <p:sp>
-        <p:nvSpPr>
-          <p:cNvPr id="11" name="TextBox 10"/>
-          <p:cNvSpPr txBox="1"/>
-          <p:nvPr/>
-        </p:nvSpPr>
-        <p:spPr>
-          <a:xfrm>
-            <a:off x="8275319" y="1783080"/>
-            <a:ext cx="3063240" cy="457200"/>
-          </a:xfrm>
-          <a:prstGeom prst="rect">
-            <a:avLst/>
-          </a:prstGeom>
-          <a:noFill/>
-        </p:spPr>
-        <p:txBody>
-          <a:bodyPr wrap="square" anchor="t" lIns="0" rIns="0" tIns="0" bIns="0">
-            <a:spAutoFit/>
-          </a:bodyPr>
-          <a:lstStyle/>
-          <a:p>
-            <a:pPr algn="l"/>
-            <a:r>
-              <a:rPr sz="1600" b="1" i="0">
-                <a:solidFill>
-                  <a:srgbClr val="FFFFFF"/>
-                </a:solidFill>
-                <a:latin typeface="Calibri"/>
-              </a:rPr>
-              <a:t>ℹ️ 프로젝트 소개</a:t>
-            </a:r>
-          </a:p>
-        </p:txBody>
-      </p:sp>
-      <p:sp>
-        <p:nvSpPr>
-          <p:cNvPr id="12" name="TextBox 11"/>
-          <p:cNvSpPr txBox="1"/>
-          <p:nvPr/>
-        </p:nvSpPr>
-        <p:spPr>
-          <a:xfrm>
-            <a:off x="8275319" y="2331720"/>
-            <a:ext cx="3063240" cy="1097280"/>
-          </a:xfrm>
-          <a:prstGeom prst="rect">
-            <a:avLst/>
-          </a:prstGeom>
-          <a:noFill/>
-        </p:spPr>
-        <p:txBody>
-          <a:bodyPr wrap="square" anchor="t" lIns="0" rIns="0" tIns="0" bIns="0">
-            <a:spAutoFit/>
-          </a:bodyPr>
-          <a:lstStyle/>
-          <a:p>
-            <a:pPr algn="l">
-              <a:lnSpc>
-                <a:spcPct val="130000"/>
-              </a:lnSpc>
-            </a:pPr>
-            <a:r>
-              <a:rPr sz="1300" b="0" i="0">
-                <a:solidFill>
-                  <a:srgbClr val="CADCFC"/>
-                </a:solidFill>
-                <a:latin typeface="Calibri"/>
-              </a:rPr>
-              <a:t>데이터 규모, 모델 성능,</a:t>
-            </a:r>
-          </a:p>
-          <a:p>
-            <a:pPr algn="l">
-              <a:lnSpc>
-                <a:spcPct val="130000"/>
-              </a:lnSpc>
-            </a:pPr>
-            <a:r>
-              <a:rPr sz="1300" b="0" i="0">
-                <a:solidFill>
-                  <a:srgbClr val="CADCFC"/>
-                </a:solidFill>
-                <a:latin typeface="Calibri"/>
-              </a:rPr>
-              <a:t>DEVLOG 링크</a:t>
-            </a:r>
-          </a:p>
-        </p:txBody>
-      </p:sp>
-      <p:sp>
-        <p:nvSpPr>
-          <p:cNvPr id="13" name="TextBox 12"/>
-          <p:cNvSpPr txBox="1"/>
-          <p:nvPr/>
-        </p:nvSpPr>
-        <p:spPr>
-          <a:xfrm>
-            <a:off x="640080" y="3931920"/>
-            <a:ext cx="10515600" cy="365760"/>
-          </a:xfrm>
-          <a:prstGeom prst="rect">
-            <a:avLst/>
-          </a:prstGeom>
-          <a:noFill/>
-        </p:spPr>
-        <p:txBody>
-          <a:bodyPr wrap="square" anchor="t" lIns="0" rIns="0" tIns="0" bIns="0">
-            <a:spAutoFit/>
-          </a:bodyPr>
-          <a:lstStyle/>
-          <a:p>
-            <a:pPr algn="l"/>
-            <a:r>
-              <a:rPr sz="1600" b="1" i="0">
-                <a:solidFill>
-                  <a:srgbClr val="1E2761"/>
-                </a:solidFill>
-                <a:latin typeface="Calibri"/>
-              </a:rPr>
-              <a:t>동작 확인</a:t>
-            </a:r>
-          </a:p>
-        </p:txBody>
-      </p:sp>
-      <p:sp>
-        <p:nvSpPr>
-          <p:cNvPr id="14" name="TextBox 13"/>
-          <p:cNvSpPr txBox="1"/>
-          <p:nvPr/>
-        </p:nvSpPr>
-        <p:spPr>
-          <a:xfrm>
-            <a:off x="640080" y="4389120"/>
-            <a:ext cx="10515600" cy="1645920"/>
-          </a:xfrm>
-          <a:prstGeom prst="rect">
-            <a:avLst/>
-          </a:prstGeom>
-          <a:noFill/>
-        </p:spPr>
-        <p:txBody>
-          <a:bodyPr wrap="square">
-            <a:spAutoFit/>
-          </a:bodyPr>
-          <a:lstStyle/>
-          <a:p>
-            <a:pPr>
-              <a:spcAft>
-                <a:spcPts val="800"/>
-              </a:spcAft>
-            </a:pPr>
-            <a:r>
-              <a:rPr sz="1400">
-                <a:solidFill>
-                  <a:srgbClr val="21295C"/>
-                </a:solidFill>
-                <a:latin typeface="Calibri"/>
-              </a:rPr>
-              <a:t>•  로컬 환경에서 streamlit run app.py 실행 → HTTP 200 응답 확인</a:t>
-            </a:r>
-          </a:p>
-          <a:p>
-            <a:pPr>
-              <a:spcAft>
-                <a:spcPts val="800"/>
-              </a:spcAft>
-            </a:pPr>
-            <a:r>
-              <a:rPr sz="1400">
-                <a:solidFill>
-                  <a:srgbClr val="21295C"/>
-                </a:solidFill>
-                <a:latin typeface="Calibri"/>
-              </a:rPr>
-              <a:t>•  예시 리뷰 "향이 너무 강하고 트러블 났어요" 입력 → ML/DL 모두 negative(부정) 예측 일치</a:t>
-            </a:r>
-          </a:p>
-          <a:p>
-            <a:pPr>
-              <a:spcAft>
-                <a:spcPts val="800"/>
-              </a:spcAft>
-            </a:pPr>
-            <a:r>
-              <a:rPr sz="1400">
-                <a:solidFill>
-                  <a:srgbClr val="21295C"/>
-                </a:solidFill>
-                <a:latin typeface="Calibri"/>
-              </a:rPr>
-              <a:t>•  예시 리뷰 "촉촉하고 흡수도 잘 되고 좋아요" 입력 → ML/DL 모두 positive(긍정) 예측 일치</a:t>
-            </a:r>
-          </a:p>
-        </p:txBody>
-      </p:sp>
+              <a:t>해결: p_real(y|x) ∝ p_model(y|x) × (실제 클래스 비율 / 학습 클래스 비율) — 재학습 없이 추론 단계에서 확률 보정</a:t>
+            </a:r>
+          </a:p>
+        </p:txBody>
+      </p:sp>
+      <p:graphicFrame>
+        <p:nvGraphicFramePr>
+          <p:cNvPr id="7" name="Chart 6"/>
+          <p:cNvGraphicFramePr>
+            <a:graphicFrameLocks noGrp="1"/>
+          </p:cNvGraphicFramePr>
+          <p:nvPr/>
+        </p:nvGraphicFramePr>
+        <p:xfrm>
+          <a:off x="1371600" y="4297680"/>
+          <a:ext cx="9418320" cy="2286000"/>
+        </p:xfrm>
+        <a:graphic>
+          <a:graphicData uri="http://schemas.openxmlformats.org/drawingml/2006/chart">
+            <c:chart xmlns:c="http://schemas.openxmlformats.org/drawingml/2006/chart" r:id="rId2"/>
+          </a:graphicData>
+        </a:graphic>
+      </p:graphicFrame>
     </p:spTree>
   </p:cSld>
   <p:clrMapOvr>
@@ -7977,7 +9504,7 @@
             <a:avLst/>
           </a:prstGeom>
           <a:solidFill>
-            <a:srgbClr val="FFFFFF"/>
+            <a:srgbClr val="1E2761"/>
           </a:solidFill>
           <a:ln>
             <a:noFill/>
@@ -8015,7 +9542,7 @@
         <p:spPr>
           <a:xfrm>
             <a:off x="640080" y="457200"/>
-            <a:ext cx="7315200" cy="731520"/>
+            <a:ext cx="10515600" cy="731520"/>
           </a:xfrm>
           <a:prstGeom prst="rect">
             <a:avLst/>
@@ -8030,13 +9557,13 @@
           <a:p>
             <a:pPr algn="l"/>
             <a:r>
-              <a:rPr sz="3200" b="1" i="0">
-                <a:solidFill>
-                  <a:srgbClr val="1E2761"/>
+              <a:rPr sz="2700" b="1" i="0">
+                <a:solidFill>
+                  <a:srgbClr val="FFFFFF"/>
                 </a:solidFill>
                 <a:latin typeface="Georgia"/>
               </a:rPr>
-              <a:t>배포 준비</a:t>
+              <a:t>"서비스가 실용성이 없다" — 피드백과 전환</a:t>
             </a:r>
           </a:p>
         </p:txBody>
@@ -8049,8 +9576,8 @@
         </p:nvSpPr>
         <p:spPr>
           <a:xfrm>
-            <a:off x="640080" y="1554480"/>
-            <a:ext cx="10515600" cy="3200400"/>
+            <a:off x="640080" y="1463040"/>
+            <a:ext cx="5577840" cy="2377440"/>
           </a:xfrm>
           <a:prstGeom prst="rect">
             <a:avLst/>
@@ -8069,13 +9596,13 @@
               </a:spcAft>
             </a:pPr>
             <a:r>
-              <a:rPr sz="1600">
-                <a:solidFill>
-                  <a:srgbClr val="21295C"/>
-                </a:solidFill>
-                <a:latin typeface="Calibri"/>
-              </a:rPr>
-              <a:t>•  requirements.txt로 의존성 고정 (scikit-learn, streamlit, pandas, numpy, scipy, joblib)</a:t>
+              <a:rPr sz="1550">
+                <a:solidFill>
+                  <a:srgbClr val="FFFFFF"/>
+                </a:solidFill>
+                <a:latin typeface="Calibri"/>
+              </a:rPr>
+              <a:t>•  기존: 리뷰 텍스트를 입력하면 감성을 알려주는 데모</a:t>
             </a:r>
           </a:p>
           <a:p>
@@ -8085,14 +9612,13 @@
               </a:spcAft>
             </a:pPr>
             <a:r>
-              <a:rPr sz="1600">
-                <a:solidFill>
-                  <a:srgbClr val="21295C"/>
-                </a:solidFill>
-                <a:latin typeface="Calibri"/>
-              </a:rPr>
-              <a:t>•  학습된 모델(tfidf_vectorizer.joblib, ml_logreg.joblib, dl_ffnn.npz) 리포에 포함
-→ 재학습 없이 바로 서비스 구동 가능</a:t>
+              <a:rPr sz="1550">
+                <a:solidFill>
+                  <a:srgbClr val="FFFFFF"/>
+                </a:solidFill>
+                <a:latin typeface="Calibri"/>
+              </a:rPr>
+              <a:t>•  문제: 이미 써본 리뷰를 사람이 직접 타이핑할 이유가 없음 — 실용성 없음</a:t>
             </a:r>
           </a:p>
           <a:p>
@@ -8102,29 +9628,13 @@
               </a:spcAft>
             </a:pPr>
             <a:r>
-              <a:rPr sz="1600">
-                <a:solidFill>
-                  <a:srgbClr val="21295C"/>
-                </a:solidFill>
-                <a:latin typeface="Calibri"/>
-              </a:rPr>
-              <a:t>•  538,774건 원본 대신 사전 집계 CSV(agg_*.csv)를 대시보드가 읽도록 분리 → 로딩 속도 개선</a:t>
-            </a:r>
-          </a:p>
-          <a:p>
-            <a:pPr>
-              <a:spcAft>
-                <a:spcPts val="800"/>
-              </a:spcAft>
-            </a:pPr>
-            <a:r>
-              <a:rPr sz="1600">
-                <a:solidFill>
-                  <a:srgbClr val="21295C"/>
-                </a:solidFill>
-                <a:latin typeface="Calibri"/>
-              </a:rPr>
-              <a:t>•  대용량 원본 크롤링 CSV는 .gitignore 처리, 정제된 merged_reviews_all.csv만 추적</a:t>
+              <a:rPr sz="1550">
+                <a:solidFill>
+                  <a:srgbClr val="FFFFFF"/>
+                </a:solidFill>
+                <a:latin typeface="Calibri"/>
+              </a:rPr>
+              <a:t>•  전환: "상품 리포트" — 상품 검색 → 속성별(8개) 장단점 + 대표 리뷰</a:t>
             </a:r>
           </a:p>
         </p:txBody>
@@ -8137,16 +9647,16 @@
         </p:nvSpPr>
         <p:spPr>
           <a:xfrm>
-            <a:off x="640080" y="5029200"/>
-            <a:ext cx="10881360" cy="1188720"/>
+            <a:off x="6492240" y="1371600"/>
+            <a:ext cx="5120640" cy="4846320"/>
           </a:xfrm>
           <a:prstGeom prst="roundRect">
             <a:avLst>
-              <a:gd name="adj" fmla="val 8000"/>
+              <a:gd name="adj" fmla="val 4000"/>
             </a:avLst>
           </a:prstGeom>
           <a:solidFill>
-            <a:srgbClr val="F4F6FC"/>
+            <a:srgbClr val="283370"/>
           </a:solidFill>
           <a:ln>
             <a:noFill/>
@@ -8183,8 +9693,8 @@
         </p:nvSpPr>
         <p:spPr>
           <a:xfrm>
-            <a:off x="914400" y="5257800"/>
-            <a:ext cx="10332720" cy="822960"/>
+            <a:off x="6858000" y="1645920"/>
+            <a:ext cx="4389120" cy="457200"/>
           </a:xfrm>
           <a:prstGeom prst="rect">
             <a:avLst/>
@@ -8197,35 +9707,205 @@
           </a:bodyPr>
           <a:lstStyle/>
           <a:p>
+            <a:pPr algn="l"/>
+            <a:r>
+              <a:rPr sz="1600" b="1" i="0">
+                <a:solidFill>
+                  <a:srgbClr val="F96167"/>
+                </a:solidFill>
+                <a:latin typeface="Calibri"/>
+              </a:rPr>
+              <a:t>실제 발견한 예시</a:t>
+            </a:r>
+          </a:p>
+        </p:txBody>
+      </p:sp>
+      <p:sp>
+        <p:nvSpPr>
+          <p:cNvPr id="7" name="TextBox 6"/>
+          <p:cNvSpPr txBox="1"/>
+          <p:nvPr/>
+        </p:nvSpPr>
+        <p:spPr>
+          <a:xfrm>
+            <a:off x="6858000" y="2286000"/>
+            <a:ext cx="4389120" cy="3657600"/>
+          </a:xfrm>
+          <a:prstGeom prst="rect">
+            <a:avLst/>
+          </a:prstGeom>
+          <a:noFill/>
+        </p:spPr>
+        <p:txBody>
+          <a:bodyPr wrap="square" anchor="t" lIns="0" rIns="0" tIns="0" bIns="0">
+            <a:spAutoFit/>
+          </a:bodyPr>
+          <a:lstStyle/>
+          <a:p>
             <a:pPr algn="l">
               <a:lnSpc>
-                <a:spcPct val="130000"/>
+                <a:spcPct val="150000"/>
               </a:lnSpc>
             </a:pPr>
             <a:r>
-              <a:rPr sz="1400" b="0" i="0">
-                <a:solidFill>
-                  <a:srgbClr val="555A6E"/>
-                </a:solidFill>
-                <a:latin typeface="Calibri"/>
-              </a:rPr>
-              <a:t>다음 과제: 대용량 데이터 Git LFS/외부 스토리지 연동, early stopping으로</a:t>
+              <a:rPr sz="1450" b="0" i="0">
+                <a:solidFill>
+                  <a:srgbClr val="FFFFFF"/>
+                </a:solidFill>
+                <a:latin typeface="Calibri"/>
+              </a:rPr>
+              <a:t>어떤 토너의 전체 평점: 4.9 / 5 (거의 만점)</a:t>
             </a:r>
           </a:p>
           <a:p>
             <a:pPr algn="l">
               <a:lnSpc>
-                <a:spcPct val="130000"/>
+                <a:spcPct val="150000"/>
               </a:lnSpc>
             </a:pPr>
             <a:r>
-              <a:rPr sz="1400" b="0" i="0">
-                <a:solidFill>
-                  <a:srgbClr val="555A6E"/>
-                </a:solidFill>
-                <a:latin typeface="Calibri"/>
-              </a:rPr>
-              <a:t>DL 과적합 개선, klue/bert 등 사전학습 모델 파인튜닝(GPU/호환 Python 환경 확보 시)</a:t>
+              <a:rPr sz="1450" b="0" i="0">
+                <a:solidFill>
+                  <a:srgbClr val="FFFFFF"/>
+                </a:solidFill>
+                <a:latin typeface="Calibri"/>
+              </a:rPr>
+              <a:t/>
+            </a:r>
+          </a:p>
+          <a:p>
+            <a:pPr algn="l">
+              <a:lnSpc>
+                <a:spcPct val="150000"/>
+              </a:lnSpc>
+            </a:pPr>
+            <a:r>
+              <a:rPr sz="1450" b="0" i="0">
+                <a:solidFill>
+                  <a:srgbClr val="FFFFFF"/>
+                </a:solidFill>
+                <a:latin typeface="Calibri"/>
+              </a:rPr>
+              <a:t>하지만 속성별로 쪼개보면—</a:t>
+            </a:r>
+          </a:p>
+          <a:p>
+            <a:pPr algn="l">
+              <a:lnSpc>
+                <a:spcPct val="150000"/>
+              </a:lnSpc>
+            </a:pPr>
+            <a:r>
+              <a:rPr sz="1450" b="0" i="0">
+                <a:solidFill>
+                  <a:srgbClr val="FFFFFF"/>
+                </a:solidFill>
+                <a:latin typeface="Calibri"/>
+              </a:rPr>
+              <a:t>보습/수분: 긍정 85%</a:t>
+            </a:r>
+          </a:p>
+          <a:p>
+            <a:pPr algn="l">
+              <a:lnSpc>
+                <a:spcPct val="150000"/>
+              </a:lnSpc>
+            </a:pPr>
+            <a:r>
+              <a:rPr sz="1450" b="0" i="0">
+                <a:solidFill>
+                  <a:srgbClr val="FFFFFF"/>
+                </a:solidFill>
+                <a:latin typeface="Calibri"/>
+              </a:rPr>
+              <a:t>가격/가성비: 긍정 96%</a:t>
+            </a:r>
+          </a:p>
+          <a:p>
+            <a:pPr algn="l">
+              <a:lnSpc>
+                <a:spcPct val="150000"/>
+              </a:lnSpc>
+            </a:pPr>
+            <a:r>
+              <a:rPr sz="1450" b="0" i="0">
+                <a:solidFill>
+                  <a:srgbClr val="FFFFFF"/>
+                </a:solidFill>
+                <a:latin typeface="Calibri"/>
+              </a:rPr>
+              <a:t>트러블/자극: 긍정 33% (부정 67%)</a:t>
+            </a:r>
+          </a:p>
+          <a:p>
+            <a:pPr algn="l">
+              <a:lnSpc>
+                <a:spcPct val="150000"/>
+              </a:lnSpc>
+            </a:pPr>
+            <a:r>
+              <a:rPr sz="1450" b="0" i="0">
+                <a:solidFill>
+                  <a:srgbClr val="FFFFFF"/>
+                </a:solidFill>
+                <a:latin typeface="Calibri"/>
+              </a:rPr>
+              <a:t/>
+            </a:r>
+          </a:p>
+          <a:p>
+            <a:pPr algn="l">
+              <a:lnSpc>
+                <a:spcPct val="150000"/>
+              </a:lnSpc>
+            </a:pPr>
+            <a:r>
+              <a:rPr sz="1450" b="0" i="0">
+                <a:solidFill>
+                  <a:srgbClr val="FFFFFF"/>
+                </a:solidFill>
+                <a:latin typeface="Calibri"/>
+              </a:rPr>
+              <a:t>→ 평점만 봐서는 절대 알 수 없는 정보</a:t>
+            </a:r>
+          </a:p>
+        </p:txBody>
+      </p:sp>
+      <p:sp>
+        <p:nvSpPr>
+          <p:cNvPr id="8" name="TextBox 7"/>
+          <p:cNvSpPr txBox="1"/>
+          <p:nvPr/>
+        </p:nvSpPr>
+        <p:spPr>
+          <a:xfrm>
+            <a:off x="640080" y="4114800"/>
+            <a:ext cx="5577840" cy="1645920"/>
+          </a:xfrm>
+          <a:prstGeom prst="rect">
+            <a:avLst/>
+          </a:prstGeom>
+          <a:noFill/>
+        </p:spPr>
+        <p:txBody>
+          <a:bodyPr wrap="square" anchor="t" lIns="0" rIns="0" tIns="0" bIns="0">
+            <a:spAutoFit/>
+          </a:bodyPr>
+          <a:lstStyle/>
+          <a:p>
+            <a:pPr algn="l">
+              <a:lnSpc>
+                <a:spcPct val="140000"/>
+              </a:lnSpc>
+            </a:pPr>
+            <a:r>
+              <a:rPr sz="1250" b="0" i="0">
+                <a:solidFill>
+                  <a:srgbClr val="CADCFC"/>
+                </a:solidFill>
+                <a:latin typeface="Calibri"/>
+              </a:rPr>
+              <a:t>538,774건 전체를 52초에 처리 (규칙 기반 속성분석, absa.py — ML 전체 적용은 Okt 병목으로 비용이 너무 커서 정규식 매칭으로 대체)</a:t>
             </a:r>
           </a:p>
         </p:txBody>

--- a/BeautyScope_발표.pptx
+++ b/BeautyScope_발표.pptx
@@ -11,12 +11,6 @@
     <p:sldId id="259" r:id="rId10"/>
     <p:sldId id="260" r:id="rId11"/>
     <p:sldId id="261" r:id="rId12"/>
-    <p:sldId id="262" r:id="rId13"/>
-    <p:sldId id="263" r:id="rId14"/>
-    <p:sldId id="264" r:id="rId15"/>
-    <p:sldId id="265" r:id="rId16"/>
-    <p:sldId id="266" r:id="rId17"/>
-    <p:sldId id="267" r:id="rId18"/>
   </p:sldIdLst>
   <p:sldSz cx="12191695" cy="6858000" type="screen4x3"/>
   <p:notesSz cx="6858000" cy="9144000"/>
@@ -119,121 +113,6 @@
 </file>
 
 <file path=ppt/charts/chart1.xml><?xml version="1.0" encoding="utf-8"?>
-<c:chartSpace xmlns:c="http://schemas.openxmlformats.org/drawingml/2006/chart" xmlns:a="http://schemas.openxmlformats.org/drawingml/2006/main" xmlns:r="http://schemas.openxmlformats.org/officeDocument/2006/relationships">
-  <c:date1904 val="0"/>
-  <c:chart>
-    <c:autoTitleDeleted val="0"/>
-    <c:plotArea>
-      <c:barChart>
-        <c:barDir val="col"/>
-        <c:grouping val="clustered"/>
-        <c:ser>
-          <c:idx val="0"/>
-          <c:order val="0"/>
-          <c:tx>
-            <c:strRef>
-              <c:f>Sheet1!$B$1</c:f>
-              <c:strCache>
-                <c:ptCount val="1"/>
-                <c:pt idx="0">
-                  <c:v>건수</c:v>
-                </c:pt>
-              </c:strCache>
-            </c:strRef>
-          </c:tx>
-          <c:spPr>
-            <a:solidFill>
-              <a:srgbClr val="1E2761"/>
-            </a:solidFill>
-          </c:spPr>
-          <c:cat>
-            <c:strRef>
-              <c:f>Sheet1!$A$2:$A$4</c:f>
-              <c:strCache>
-                <c:ptCount val="3"/>
-                <c:pt idx="0">
-                  <c:v>쿠팡</c:v>
-                </c:pt>
-                <c:pt idx="1">
-                  <c:v>무신사</c:v>
-                </c:pt>
-                <c:pt idx="2">
-                  <c:v>올리브영</c:v>
-                </c:pt>
-              </c:strCache>
-            </c:strRef>
-          </c:cat>
-          <c:val>
-            <c:numRef>
-              <c:f>Sheet1!$B$2:$B$4</c:f>
-              <c:numCache>
-                <c:formatCode>General</c:formatCode>
-                <c:ptCount val="3"/>
-                <c:pt idx="0">
-                  <c:v>86379</c:v>
-                </c:pt>
-                <c:pt idx="1">
-                  <c:v>230870</c:v>
-                </c:pt>
-                <c:pt idx="2">
-                  <c:v>221525</c:v>
-                </c:pt>
-              </c:numCache>
-            </c:numRef>
-          </c:val>
-        </c:ser>
-        <c:axId val="-2068027336"/>
-        <c:axId val="-2113994440"/>
-      </c:barChart>
-      <c:catAx>
-        <c:axId val="-2068027336"/>
-        <c:scaling>
-          <c:orientation val="minMax"/>
-        </c:scaling>
-        <c:delete val="0"/>
-        <c:axPos val="b"/>
-        <c:majorTickMark val="out"/>
-        <c:minorTickMark val="none"/>
-        <c:tickLblPos val="nextTo"/>
-        <c:crossAx val="-2113994440"/>
-        <c:crosses val="autoZero"/>
-        <c:auto val="1"/>
-        <c:lblAlgn val="ctr"/>
-        <c:lblOffset val="100"/>
-        <c:noMultiLvlLbl val="0"/>
-      </c:catAx>
-      <c:valAx>
-        <c:axId val="-2113994440"/>
-        <c:scaling/>
-        <c:delete val="0"/>
-        <c:axPos val="l"/>
-        <c:majorGridlines/>
-        <c:majorTickMark val="out"/>
-        <c:minorTickMark val="none"/>
-        <c:tickLblPos val="nextTo"/>
-        <c:crossAx val="-2068027336"/>
-        <c:crosses val="autoZero"/>
-      </c:valAx>
-    </c:plotArea>
-    <c:dispBlanksAs val="gap"/>
-  </c:chart>
-  <c:txPr>
-    <a:bodyPr/>
-    <a:lstStyle/>
-    <a:p>
-      <a:pPr>
-        <a:defRPr sz="1800"/>
-      </a:pPr>
-      <a:endParaRPr lang="en-US"/>
-    </a:p>
-  </c:txPr>
-  <c:externalData r:id="rId1">
-    <c:autoUpdate val="0"/>
-  </c:externalData>
-</c:chartSpace>
-</file>
-
-<file path=ppt/charts/chart2.xml><?xml version="1.0" encoding="utf-8"?>
 <c:chartSpace xmlns:c="http://schemas.openxmlformats.org/drawingml/2006/chart" xmlns:a="http://schemas.openxmlformats.org/drawingml/2006/main" xmlns:r="http://schemas.openxmlformats.org/officeDocument/2006/relationships">
   <c:date1904 val="0"/>
   <c:chart>
@@ -367,192 +246,6 @@
                 </c:pt>
                 <c:pt idx="3">
                   <c:v>0.66</c:v>
-                </c:pt>
-              </c:numCache>
-            </c:numRef>
-          </c:val>
-        </c:ser>
-        <c:axId val="-2068027336"/>
-        <c:axId val="-2113994440"/>
-      </c:barChart>
-      <c:catAx>
-        <c:axId val="-2068027336"/>
-        <c:scaling>
-          <c:orientation val="minMax"/>
-        </c:scaling>
-        <c:delete val="0"/>
-        <c:axPos val="b"/>
-        <c:majorTickMark val="out"/>
-        <c:minorTickMark val="none"/>
-        <c:tickLblPos val="nextTo"/>
-        <c:crossAx val="-2113994440"/>
-        <c:crosses val="autoZero"/>
-        <c:auto val="1"/>
-        <c:lblAlgn val="ctr"/>
-        <c:lblOffset val="100"/>
-        <c:noMultiLvlLbl val="0"/>
-      </c:catAx>
-      <c:valAx>
-        <c:axId val="-2113994440"/>
-        <c:scaling/>
-        <c:delete val="0"/>
-        <c:axPos val="l"/>
-        <c:majorGridlines/>
-        <c:majorTickMark val="out"/>
-        <c:minorTickMark val="none"/>
-        <c:tickLblPos val="nextTo"/>
-        <c:crossAx val="-2068027336"/>
-        <c:crosses val="autoZero"/>
-      </c:valAx>
-    </c:plotArea>
-    <c:legend>
-      <c:legendPos val="b"/>
-      <c:overlay val="0"/>
-    </c:legend>
-    <c:dispBlanksAs val="gap"/>
-  </c:chart>
-  <c:txPr>
-    <a:bodyPr/>
-    <a:lstStyle/>
-    <a:p>
-      <a:pPr>
-        <a:defRPr sz="1800"/>
-      </a:pPr>
-      <a:endParaRPr lang="en-US"/>
-    </a:p>
-  </c:txPr>
-  <c:externalData r:id="rId1">
-    <c:autoUpdate val="0"/>
-  </c:externalData>
-</c:chartSpace>
-</file>
-
-<file path=ppt/charts/chart3.xml><?xml version="1.0" encoding="utf-8"?>
-<c:chartSpace xmlns:c="http://schemas.openxmlformats.org/drawingml/2006/chart" xmlns:a="http://schemas.openxmlformats.org/drawingml/2006/main" xmlns:r="http://schemas.openxmlformats.org/officeDocument/2006/relationships">
-  <c:date1904 val="0"/>
-  <c:chart>
-    <c:autoTitleDeleted val="0"/>
-    <c:plotArea>
-      <c:barChart>
-        <c:barDir val="col"/>
-        <c:grouping val="clustered"/>
-        <c:ser>
-          <c:idx val="0"/>
-          <c:order val="0"/>
-          <c:tx>
-            <c:strRef>
-              <c:f>Sheet1!$B$1</c:f>
-              <c:strCache>
-                <c:ptCount val="1"/>
-                <c:pt idx="0">
-                  <c:v>보정 전</c:v>
-                </c:pt>
-              </c:strCache>
-            </c:strRef>
-          </c:tx>
-          <c:spPr>
-            <a:solidFill>
-              <a:srgbClr val="555A6E"/>
-            </a:solidFill>
-          </c:spPr>
-          <c:cat>
-            <c:strRef>
-              <c:f>Sheet1!$A$2:$A$5</c:f>
-              <c:strCache>
-                <c:ptCount val="4"/>
-                <c:pt idx="0">
-                  <c:v>ML accuracy</c:v>
-                </c:pt>
-                <c:pt idx="1">
-                  <c:v>ML macro F1</c:v>
-                </c:pt>
-                <c:pt idx="2">
-                  <c:v>DL accuracy</c:v>
-                </c:pt>
-                <c:pt idx="3">
-                  <c:v>DL macro F1</c:v>
-                </c:pt>
-              </c:strCache>
-            </c:strRef>
-          </c:cat>
-          <c:val>
-            <c:numRef>
-              <c:f>Sheet1!$B$2:$B$5</c:f>
-              <c:numCache>
-                <c:formatCode>General</c:formatCode>
-                <c:ptCount val="4"/>
-                <c:pt idx="0">
-                  <c:v>0.806</c:v>
-                </c:pt>
-                <c:pt idx="1">
-                  <c:v>0.626</c:v>
-                </c:pt>
-                <c:pt idx="2">
-                  <c:v>0.89</c:v>
-                </c:pt>
-                <c:pt idx="3">
-                  <c:v>0.712</c:v>
-                </c:pt>
-              </c:numCache>
-            </c:numRef>
-          </c:val>
-        </c:ser>
-        <c:ser>
-          <c:idx val="1"/>
-          <c:order val="1"/>
-          <c:tx>
-            <c:strRef>
-              <c:f>Sheet1!$C$1</c:f>
-              <c:strCache>
-                <c:ptCount val="1"/>
-                <c:pt idx="0">
-                  <c:v>보정 후</c:v>
-                </c:pt>
-              </c:strCache>
-            </c:strRef>
-          </c:tx>
-          <c:spPr>
-            <a:solidFill>
-              <a:srgbClr val="1E2761"/>
-            </a:solidFill>
-          </c:spPr>
-          <c:cat>
-            <c:strRef>
-              <c:f>Sheet1!$A$2:$A$5</c:f>
-              <c:strCache>
-                <c:ptCount val="4"/>
-                <c:pt idx="0">
-                  <c:v>ML accuracy</c:v>
-                </c:pt>
-                <c:pt idx="1">
-                  <c:v>ML macro F1</c:v>
-                </c:pt>
-                <c:pt idx="2">
-                  <c:v>DL accuracy</c:v>
-                </c:pt>
-                <c:pt idx="3">
-                  <c:v>DL macro F1</c:v>
-                </c:pt>
-              </c:strCache>
-            </c:strRef>
-          </c:cat>
-          <c:val>
-            <c:numRef>
-              <c:f>Sheet1!$C$2:$C$5</c:f>
-              <c:numCache>
-                <c:formatCode>General</c:formatCode>
-                <c:ptCount val="4"/>
-                <c:pt idx="0">
-                  <c:v>0.909</c:v>
-                </c:pt>
-                <c:pt idx="1">
-                  <c:v>0.675</c:v>
-                </c:pt>
-                <c:pt idx="2">
-                  <c:v>0.92</c:v>
-                </c:pt>
-                <c:pt idx="3">
-                  <c:v>0.711</c:v>
                 </c:pt>
               </c:numCache>
             </c:numRef>
@@ -3967,1137 +3660,6 @@
 </p:sld>
 </file>
 
-<file path=ppt/slides/slide10.xml><?xml version="1.0" encoding="utf-8"?>
-<p:sld xmlns:a="http://schemas.openxmlformats.org/drawingml/2006/main" xmlns:p="http://schemas.openxmlformats.org/presentationml/2006/main" xmlns:r="http://schemas.openxmlformats.org/officeDocument/2006/relationships">
-  <p:cSld>
-    <p:spTree>
-      <p:nvGrpSpPr>
-        <p:cNvPr id="1" name=""/>
-        <p:cNvGrpSpPr/>
-        <p:nvPr/>
-      </p:nvGrpSpPr>
-      <p:grpSpPr/>
-      <p:sp>
-        <p:nvSpPr>
-          <p:cNvPr id="2" name="Rectangle 1"/>
-          <p:cNvSpPr/>
-          <p:nvPr/>
-        </p:nvSpPr>
-        <p:spPr>
-          <a:xfrm>
-            <a:off x="0" y="0"/>
-            <a:ext cx="12191695" cy="6858000"/>
-          </a:xfrm>
-          <a:prstGeom prst="rect">
-            <a:avLst/>
-          </a:prstGeom>
-          <a:solidFill>
-            <a:srgbClr val="FFFFFF"/>
-          </a:solidFill>
-          <a:ln>
-            <a:noFill/>
-          </a:ln>
-          <a:effectLst/>
-        </p:spPr>
-        <p:style>
-          <a:lnRef idx="1">
-            <a:schemeClr val="accent1"/>
-          </a:lnRef>
-          <a:fillRef idx="3">
-            <a:schemeClr val="accent1"/>
-          </a:fillRef>
-          <a:effectRef idx="2">
-            <a:schemeClr val="accent1"/>
-          </a:effectRef>
-          <a:fontRef idx="minor">
-            <a:schemeClr val="lt1"/>
-          </a:fontRef>
-        </p:style>
-        <p:txBody>
-          <a:bodyPr rtlCol="0" anchor="ctr"/>
-          <a:lstStyle/>
-          <a:p>
-            <a:pPr algn="ctr"/>
-          </a:p>
-        </p:txBody>
-      </p:sp>
-      <p:sp>
-        <p:nvSpPr>
-          <p:cNvPr id="3" name="TextBox 2"/>
-          <p:cNvSpPr txBox="1"/>
-          <p:nvPr/>
-        </p:nvSpPr>
-        <p:spPr>
-          <a:xfrm>
-            <a:off x="640080" y="457200"/>
-            <a:ext cx="10515600" cy="731520"/>
-          </a:xfrm>
-          <a:prstGeom prst="rect">
-            <a:avLst/>
-          </a:prstGeom>
-          <a:noFill/>
-        </p:spPr>
-        <p:txBody>
-          <a:bodyPr wrap="square" anchor="t" lIns="0" rIns="0" tIns="0" bIns="0">
-            <a:spAutoFit/>
-          </a:bodyPr>
-          <a:lstStyle/>
-          <a:p>
-            <a:pPr algn="l"/>
-            <a:r>
-              <a:rPr sz="2900" b="1" i="0">
-                <a:solidFill>
-                  <a:srgbClr val="1E2761"/>
-                </a:solidFill>
-                <a:latin typeface="Georgia"/>
-              </a:rPr>
-              <a:t>Streamlit 서비스 — BeautyScope</a:t>
-            </a:r>
-          </a:p>
-        </p:txBody>
-      </p:sp>
-      <p:sp>
-        <p:nvSpPr>
-          <p:cNvPr id="4" name="Rounded Rectangle 3"/>
-          <p:cNvSpPr/>
-          <p:nvPr/>
-        </p:nvSpPr>
-        <p:spPr>
-          <a:xfrm>
-            <a:off x="640080" y="1554480"/>
-            <a:ext cx="3520440" cy="2103120"/>
-          </a:xfrm>
-          <a:prstGeom prst="roundRect">
-            <a:avLst>
-              <a:gd name="adj" fmla="val 8000"/>
-            </a:avLst>
-          </a:prstGeom>
-          <a:solidFill>
-            <a:srgbClr val="F96167"/>
-          </a:solidFill>
-          <a:ln>
-            <a:noFill/>
-          </a:ln>
-          <a:effectLst/>
-        </p:spPr>
-        <p:style>
-          <a:lnRef idx="1">
-            <a:schemeClr val="accent1"/>
-          </a:lnRef>
-          <a:fillRef idx="3">
-            <a:schemeClr val="accent1"/>
-          </a:fillRef>
-          <a:effectRef idx="2">
-            <a:schemeClr val="accent1"/>
-          </a:effectRef>
-          <a:fontRef idx="minor">
-            <a:schemeClr val="lt1"/>
-          </a:fontRef>
-        </p:style>
-        <p:txBody>
-          <a:bodyPr rtlCol="0" anchor="ctr"/>
-          <a:lstStyle/>
-          <a:p>
-            <a:pPr algn="ctr"/>
-          </a:p>
-        </p:txBody>
-      </p:sp>
-      <p:sp>
-        <p:nvSpPr>
-          <p:cNvPr id="5" name="TextBox 4"/>
-          <p:cNvSpPr txBox="1"/>
-          <p:nvPr/>
-        </p:nvSpPr>
-        <p:spPr>
-          <a:xfrm>
-            <a:off x="868680" y="1783080"/>
-            <a:ext cx="3063240" cy="457200"/>
-          </a:xfrm>
-          <a:prstGeom prst="rect">
-            <a:avLst/>
-          </a:prstGeom>
-          <a:noFill/>
-        </p:spPr>
-        <p:txBody>
-          <a:bodyPr wrap="square" anchor="t" lIns="0" rIns="0" tIns="0" bIns="0">
-            <a:spAutoFit/>
-          </a:bodyPr>
-          <a:lstStyle/>
-          <a:p>
-            <a:pPr algn="l"/>
-            <a:r>
-              <a:rPr sz="1500" b="1" i="0">
-                <a:solidFill>
-                  <a:srgbClr val="FFFFFF"/>
-                </a:solidFill>
-                <a:latin typeface="Calibri"/>
-              </a:rPr>
-              <a:t>🛍️ 상품 리포트</a:t>
-            </a:r>
-          </a:p>
-        </p:txBody>
-      </p:sp>
-      <p:sp>
-        <p:nvSpPr>
-          <p:cNvPr id="6" name="TextBox 5"/>
-          <p:cNvSpPr txBox="1"/>
-          <p:nvPr/>
-        </p:nvSpPr>
-        <p:spPr>
-          <a:xfrm>
-            <a:off x="868680" y="2331720"/>
-            <a:ext cx="3063240" cy="1097280"/>
-          </a:xfrm>
-          <a:prstGeom prst="rect">
-            <a:avLst/>
-          </a:prstGeom>
-          <a:noFill/>
-        </p:spPr>
-        <p:txBody>
-          <a:bodyPr wrap="square" anchor="t" lIns="0" rIns="0" tIns="0" bIns="0">
-            <a:spAutoFit/>
-          </a:bodyPr>
-          <a:lstStyle/>
-          <a:p>
-            <a:pPr algn="l">
-              <a:lnSpc>
-                <a:spcPct val="130000"/>
-              </a:lnSpc>
-            </a:pPr>
-            <a:r>
-              <a:rPr sz="1250" b="0" i="0">
-                <a:solidFill>
-                  <a:srgbClr val="CADCFC"/>
-                </a:solidFill>
-                <a:latin typeface="Calibri"/>
-              </a:rPr>
-              <a:t>상품 검색 → 속성별 긍정비율</a:t>
-            </a:r>
-          </a:p>
-          <a:p>
-            <a:pPr algn="l">
-              <a:lnSpc>
-                <a:spcPct val="130000"/>
-              </a:lnSpc>
-            </a:pPr>
-            <a:r>
-              <a:rPr sz="1250" b="0" i="0">
-                <a:solidFill>
-                  <a:srgbClr val="CADCFC"/>
-                </a:solidFill>
-                <a:latin typeface="Calibri"/>
-              </a:rPr>
-              <a:t>+ 대표 긍정/부정 리뷰</a:t>
-            </a:r>
-          </a:p>
-        </p:txBody>
-      </p:sp>
-      <p:sp>
-        <p:nvSpPr>
-          <p:cNvPr id="7" name="Rounded Rectangle 6"/>
-          <p:cNvSpPr/>
-          <p:nvPr/>
-        </p:nvSpPr>
-        <p:spPr>
-          <a:xfrm>
-            <a:off x="4343400" y="1554480"/>
-            <a:ext cx="3520440" cy="2103120"/>
-          </a:xfrm>
-          <a:prstGeom prst="roundRect">
-            <a:avLst>
-              <a:gd name="adj" fmla="val 8000"/>
-            </a:avLst>
-          </a:prstGeom>
-          <a:solidFill>
-            <a:srgbClr val="1E2761"/>
-          </a:solidFill>
-          <a:ln>
-            <a:noFill/>
-          </a:ln>
-          <a:effectLst/>
-        </p:spPr>
-        <p:style>
-          <a:lnRef idx="1">
-            <a:schemeClr val="accent1"/>
-          </a:lnRef>
-          <a:fillRef idx="3">
-            <a:schemeClr val="accent1"/>
-          </a:fillRef>
-          <a:effectRef idx="2">
-            <a:schemeClr val="accent1"/>
-          </a:effectRef>
-          <a:fontRef idx="minor">
-            <a:schemeClr val="lt1"/>
-          </a:fontRef>
-        </p:style>
-        <p:txBody>
-          <a:bodyPr rtlCol="0" anchor="ctr"/>
-          <a:lstStyle/>
-          <a:p>
-            <a:pPr algn="ctr"/>
-          </a:p>
-        </p:txBody>
-      </p:sp>
-      <p:sp>
-        <p:nvSpPr>
-          <p:cNvPr id="8" name="TextBox 7"/>
-          <p:cNvSpPr txBox="1"/>
-          <p:nvPr/>
-        </p:nvSpPr>
-        <p:spPr>
-          <a:xfrm>
-            <a:off x="4572000" y="1783080"/>
-            <a:ext cx="3063240" cy="457200"/>
-          </a:xfrm>
-          <a:prstGeom prst="rect">
-            <a:avLst/>
-          </a:prstGeom>
-          <a:noFill/>
-        </p:spPr>
-        <p:txBody>
-          <a:bodyPr wrap="square" anchor="t" lIns="0" rIns="0" tIns="0" bIns="0">
-            <a:spAutoFit/>
-          </a:bodyPr>
-          <a:lstStyle/>
-          <a:p>
-            <a:pPr algn="l"/>
-            <a:r>
-              <a:rPr sz="1500" b="1" i="0">
-                <a:solidFill>
-                  <a:srgbClr val="FFFFFF"/>
-                </a:solidFill>
-                <a:latin typeface="Calibri"/>
-              </a:rPr>
-              <a:t>🔍 리뷰 텍스트 분석</a:t>
-            </a:r>
-          </a:p>
-        </p:txBody>
-      </p:sp>
-      <p:sp>
-        <p:nvSpPr>
-          <p:cNvPr id="9" name="TextBox 8"/>
-          <p:cNvSpPr txBox="1"/>
-          <p:nvPr/>
-        </p:nvSpPr>
-        <p:spPr>
-          <a:xfrm>
-            <a:off x="4572000" y="2331720"/>
-            <a:ext cx="3063240" cy="1097280"/>
-          </a:xfrm>
-          <a:prstGeom prst="rect">
-            <a:avLst/>
-          </a:prstGeom>
-          <a:noFill/>
-        </p:spPr>
-        <p:txBody>
-          <a:bodyPr wrap="square" anchor="t" lIns="0" rIns="0" tIns="0" bIns="0">
-            <a:spAutoFit/>
-          </a:bodyPr>
-          <a:lstStyle/>
-          <a:p>
-            <a:pPr algn="l">
-              <a:lnSpc>
-                <a:spcPct val="130000"/>
-              </a:lnSpc>
-            </a:pPr>
-            <a:r>
-              <a:rPr sz="1250" b="0" i="0">
-                <a:solidFill>
-                  <a:srgbClr val="CADCFC"/>
-                </a:solidFill>
-                <a:latin typeface="Calibri"/>
-              </a:rPr>
-              <a:t>텍스트 입력 → ML/DL 동시</a:t>
-            </a:r>
-          </a:p>
-          <a:p>
-            <a:pPr algn="l">
-              <a:lnSpc>
-                <a:spcPct val="130000"/>
-              </a:lnSpc>
-            </a:pPr>
-            <a:r>
-              <a:rPr sz="1250" b="0" i="0">
-                <a:solidFill>
-                  <a:srgbClr val="CADCFC"/>
-                </a:solidFill>
-                <a:latin typeface="Calibri"/>
-              </a:rPr>
-              <a:t>예측 + 확률 시각화</a:t>
-            </a:r>
-          </a:p>
-        </p:txBody>
-      </p:sp>
-      <p:sp>
-        <p:nvSpPr>
-          <p:cNvPr id="10" name="Rounded Rectangle 9"/>
-          <p:cNvSpPr/>
-          <p:nvPr/>
-        </p:nvSpPr>
-        <p:spPr>
-          <a:xfrm>
-            <a:off x="8046719" y="1554480"/>
-            <a:ext cx="3520440" cy="2103120"/>
-          </a:xfrm>
-          <a:prstGeom prst="roundRect">
-            <a:avLst>
-              <a:gd name="adj" fmla="val 8000"/>
-            </a:avLst>
-          </a:prstGeom>
-          <a:solidFill>
-            <a:srgbClr val="1E2761"/>
-          </a:solidFill>
-          <a:ln>
-            <a:noFill/>
-          </a:ln>
-          <a:effectLst/>
-        </p:spPr>
-        <p:style>
-          <a:lnRef idx="1">
-            <a:schemeClr val="accent1"/>
-          </a:lnRef>
-          <a:fillRef idx="3">
-            <a:schemeClr val="accent1"/>
-          </a:fillRef>
-          <a:effectRef idx="2">
-            <a:schemeClr val="accent1"/>
-          </a:effectRef>
-          <a:fontRef idx="minor">
-            <a:schemeClr val="lt1"/>
-          </a:fontRef>
-        </p:style>
-        <p:txBody>
-          <a:bodyPr rtlCol="0" anchor="ctr"/>
-          <a:lstStyle/>
-          <a:p>
-            <a:pPr algn="ctr"/>
-          </a:p>
-        </p:txBody>
-      </p:sp>
-      <p:sp>
-        <p:nvSpPr>
-          <p:cNvPr id="11" name="TextBox 10"/>
-          <p:cNvSpPr txBox="1"/>
-          <p:nvPr/>
-        </p:nvSpPr>
-        <p:spPr>
-          <a:xfrm>
-            <a:off x="8275319" y="1783080"/>
-            <a:ext cx="3063240" cy="457200"/>
-          </a:xfrm>
-          <a:prstGeom prst="rect">
-            <a:avLst/>
-          </a:prstGeom>
-          <a:noFill/>
-        </p:spPr>
-        <p:txBody>
-          <a:bodyPr wrap="square" anchor="t" lIns="0" rIns="0" tIns="0" bIns="0">
-            <a:spAutoFit/>
-          </a:bodyPr>
-          <a:lstStyle/>
-          <a:p>
-            <a:pPr algn="l"/>
-            <a:r>
-              <a:rPr sz="1500" b="1" i="0">
-                <a:solidFill>
-                  <a:srgbClr val="FFFFFF"/>
-                </a:solidFill>
-                <a:latin typeface="Calibri"/>
-              </a:rPr>
-              <a:t>📊 데이터 대시보드</a:t>
-            </a:r>
-          </a:p>
-        </p:txBody>
-      </p:sp>
-      <p:sp>
-        <p:nvSpPr>
-          <p:cNvPr id="12" name="TextBox 11"/>
-          <p:cNvSpPr txBox="1"/>
-          <p:nvPr/>
-        </p:nvSpPr>
-        <p:spPr>
-          <a:xfrm>
-            <a:off x="8275319" y="2331720"/>
-            <a:ext cx="3063240" cy="1097280"/>
-          </a:xfrm>
-          <a:prstGeom prst="rect">
-            <a:avLst/>
-          </a:prstGeom>
-          <a:noFill/>
-        </p:spPr>
-        <p:txBody>
-          <a:bodyPr wrap="square" anchor="t" lIns="0" rIns="0" tIns="0" bIns="0">
-            <a:spAutoFit/>
-          </a:bodyPr>
-          <a:lstStyle/>
-          <a:p>
-            <a:pPr algn="l">
-              <a:lnSpc>
-                <a:spcPct val="130000"/>
-              </a:lnSpc>
-            </a:pPr>
-            <a:r>
-              <a:rPr sz="1250" b="0" i="0">
-                <a:solidFill>
-                  <a:srgbClr val="CADCFC"/>
-                </a:solidFill>
-                <a:latin typeface="Calibri"/>
-              </a:rPr>
-              <a:t>플랫폼/별점/트렌드/카테고리</a:t>
-            </a:r>
-          </a:p>
-          <a:p>
-            <a:pPr algn="l">
-              <a:lnSpc>
-                <a:spcPct val="130000"/>
-              </a:lnSpc>
-            </a:pPr>
-            <a:r>
-              <a:rPr sz="1250" b="0" i="0">
-                <a:solidFill>
-                  <a:srgbClr val="CADCFC"/>
-                </a:solidFill>
-                <a:latin typeface="Calibri"/>
-              </a:rPr>
-              <a:t>분포, 형태소 기반 키워드</a:t>
-            </a:r>
-          </a:p>
-        </p:txBody>
-      </p:sp>
-      <p:sp>
-        <p:nvSpPr>
-          <p:cNvPr id="13" name="TextBox 12"/>
-          <p:cNvSpPr txBox="1"/>
-          <p:nvPr/>
-        </p:nvSpPr>
-        <p:spPr>
-          <a:xfrm>
-            <a:off x="640080" y="3931920"/>
-            <a:ext cx="10515600" cy="365760"/>
-          </a:xfrm>
-          <a:prstGeom prst="rect">
-            <a:avLst/>
-          </a:prstGeom>
-          <a:noFill/>
-        </p:spPr>
-        <p:txBody>
-          <a:bodyPr wrap="square" anchor="t" lIns="0" rIns="0" tIns="0" bIns="0">
-            <a:spAutoFit/>
-          </a:bodyPr>
-          <a:lstStyle/>
-          <a:p>
-            <a:pPr algn="l"/>
-            <a:r>
-              <a:rPr sz="1600" b="1" i="0">
-                <a:solidFill>
-                  <a:srgbClr val="1E2761"/>
-                </a:solidFill>
-                <a:latin typeface="Calibri"/>
-              </a:rPr>
-              <a:t>동작 확인</a:t>
-            </a:r>
-          </a:p>
-        </p:txBody>
-      </p:sp>
-      <p:sp>
-        <p:nvSpPr>
-          <p:cNvPr id="14" name="TextBox 13"/>
-          <p:cNvSpPr txBox="1"/>
-          <p:nvPr/>
-        </p:nvSpPr>
-        <p:spPr>
-          <a:xfrm>
-            <a:off x="640080" y="4389120"/>
-            <a:ext cx="10515600" cy="1645920"/>
-          </a:xfrm>
-          <a:prstGeom prst="rect">
-            <a:avLst/>
-          </a:prstGeom>
-          <a:noFill/>
-        </p:spPr>
-        <p:txBody>
-          <a:bodyPr wrap="square">
-            <a:spAutoFit/>
-          </a:bodyPr>
-          <a:lstStyle/>
-          <a:p>
-            <a:pPr>
-              <a:spcAft>
-                <a:spcPts val="800"/>
-              </a:spcAft>
-            </a:pPr>
-            <a:r>
-              <a:rPr sz="1400">
-                <a:solidFill>
-                  <a:srgbClr val="21295C"/>
-                </a:solidFill>
-                <a:latin typeface="Calibri"/>
-              </a:rPr>
-              <a:t>•  로컬 환경에서 streamlit run app.py 실행 → HTTP 200 응답 확인</a:t>
-            </a:r>
-          </a:p>
-          <a:p>
-            <a:pPr>
-              <a:spcAft>
-                <a:spcPts val="800"/>
-              </a:spcAft>
-            </a:pPr>
-            <a:r>
-              <a:rPr sz="1400">
-                <a:solidFill>
-                  <a:srgbClr val="21295C"/>
-                </a:solidFill>
-                <a:latin typeface="Calibri"/>
-              </a:rPr>
-              <a:t>•  상품 검색 → 속성별 긍정비율/대표리뷰 정상 출력 확인</a:t>
-            </a:r>
-          </a:p>
-          <a:p>
-            <a:pPr>
-              <a:spcAft>
-                <a:spcPts val="800"/>
-              </a:spcAft>
-            </a:pPr>
-            <a:r>
-              <a:rPr sz="1400">
-                <a:solidFill>
-                  <a:srgbClr val="21295C"/>
-                </a:solidFill>
-                <a:latin typeface="Calibri"/>
-              </a:rPr>
-              <a:t>•  리뷰 텍스트 입력 → ML/DL 예측 일치 확인 (긍정/부정 예시 모두 정답)</a:t>
-            </a:r>
-          </a:p>
-        </p:txBody>
-      </p:sp>
-    </p:spTree>
-  </p:cSld>
-  <p:clrMapOvr>
-    <a:masterClrMapping/>
-  </p:clrMapOvr>
-</p:sld>
-</file>
-
-<file path=ppt/slides/slide11.xml><?xml version="1.0" encoding="utf-8"?>
-<p:sld xmlns:a="http://schemas.openxmlformats.org/drawingml/2006/main" xmlns:p="http://schemas.openxmlformats.org/presentationml/2006/main" xmlns:r="http://schemas.openxmlformats.org/officeDocument/2006/relationships">
-  <p:cSld>
-    <p:spTree>
-      <p:nvGrpSpPr>
-        <p:cNvPr id="1" name=""/>
-        <p:cNvGrpSpPr/>
-        <p:nvPr/>
-      </p:nvGrpSpPr>
-      <p:grpSpPr/>
-      <p:sp>
-        <p:nvSpPr>
-          <p:cNvPr id="2" name="Rectangle 1"/>
-          <p:cNvSpPr/>
-          <p:nvPr/>
-        </p:nvSpPr>
-        <p:spPr>
-          <a:xfrm>
-            <a:off x="0" y="0"/>
-            <a:ext cx="12191695" cy="6858000"/>
-          </a:xfrm>
-          <a:prstGeom prst="rect">
-            <a:avLst/>
-          </a:prstGeom>
-          <a:solidFill>
-            <a:srgbClr val="FFFFFF"/>
-          </a:solidFill>
-          <a:ln>
-            <a:noFill/>
-          </a:ln>
-          <a:effectLst/>
-        </p:spPr>
-        <p:style>
-          <a:lnRef idx="1">
-            <a:schemeClr val="accent1"/>
-          </a:lnRef>
-          <a:fillRef idx="3">
-            <a:schemeClr val="accent1"/>
-          </a:fillRef>
-          <a:effectRef idx="2">
-            <a:schemeClr val="accent1"/>
-          </a:effectRef>
-          <a:fontRef idx="minor">
-            <a:schemeClr val="lt1"/>
-          </a:fontRef>
-        </p:style>
-        <p:txBody>
-          <a:bodyPr rtlCol="0" anchor="ctr"/>
-          <a:lstStyle/>
-          <a:p>
-            <a:pPr algn="ctr"/>
-          </a:p>
-        </p:txBody>
-      </p:sp>
-      <p:sp>
-        <p:nvSpPr>
-          <p:cNvPr id="3" name="TextBox 2"/>
-          <p:cNvSpPr txBox="1"/>
-          <p:nvPr/>
-        </p:nvSpPr>
-        <p:spPr>
-          <a:xfrm>
-            <a:off x="640080" y="457200"/>
-            <a:ext cx="7315200" cy="731520"/>
-          </a:xfrm>
-          <a:prstGeom prst="rect">
-            <a:avLst/>
-          </a:prstGeom>
-          <a:noFill/>
-        </p:spPr>
-        <p:txBody>
-          <a:bodyPr wrap="square" anchor="t" lIns="0" rIns="0" tIns="0" bIns="0">
-            <a:spAutoFit/>
-          </a:bodyPr>
-          <a:lstStyle/>
-          <a:p>
-            <a:pPr algn="l"/>
-            <a:r>
-              <a:rPr sz="3200" b="1" i="0">
-                <a:solidFill>
-                  <a:srgbClr val="1E2761"/>
-                </a:solidFill>
-                <a:latin typeface="Georgia"/>
-              </a:rPr>
-              <a:t>배포 준비</a:t>
-            </a:r>
-          </a:p>
-        </p:txBody>
-      </p:sp>
-      <p:sp>
-        <p:nvSpPr>
-          <p:cNvPr id="4" name="TextBox 3"/>
-          <p:cNvSpPr txBox="1"/>
-          <p:nvPr/>
-        </p:nvSpPr>
-        <p:spPr>
-          <a:xfrm>
-            <a:off x="640080" y="1554480"/>
-            <a:ext cx="10515600" cy="3200400"/>
-          </a:xfrm>
-          <a:prstGeom prst="rect">
-            <a:avLst/>
-          </a:prstGeom>
-          <a:noFill/>
-        </p:spPr>
-        <p:txBody>
-          <a:bodyPr wrap="square">
-            <a:spAutoFit/>
-          </a:bodyPr>
-          <a:lstStyle/>
-          <a:p>
-            <a:pPr>
-              <a:spcAft>
-                <a:spcPts val="800"/>
-              </a:spcAft>
-            </a:pPr>
-            <a:r>
-              <a:rPr sz="1600">
-                <a:solidFill>
-                  <a:srgbClr val="21295C"/>
-                </a:solidFill>
-                <a:latin typeface="Calibri"/>
-              </a:rPr>
-              <a:t>•  requirements.txt로 의존성 고정 (scikit-learn, streamlit, pandas, numpy, scipy, joblib, konlpy)</a:t>
-            </a:r>
-          </a:p>
-          <a:p>
-            <a:pPr>
-              <a:spcAft>
-                <a:spcPts val="800"/>
-              </a:spcAft>
-            </a:pPr>
-            <a:r>
-              <a:rPr sz="1600">
-                <a:solidFill>
-                  <a:srgbClr val="21295C"/>
-                </a:solidFill>
-                <a:latin typeface="Calibri"/>
-              </a:rPr>
-              <a:t>•  학습된 모델 + 집계 데이터를 models/에 포함 → 재학습 없이 바로 서비스 구동 가능</a:t>
-            </a:r>
-          </a:p>
-          <a:p>
-            <a:pPr>
-              <a:spcAft>
-                <a:spcPts val="800"/>
-              </a:spcAft>
-            </a:pPr>
-            <a:r>
-              <a:rPr sz="1600">
-                <a:solidFill>
-                  <a:srgbClr val="21295C"/>
-                </a:solidFill>
-                <a:latin typeface="Calibri"/>
-              </a:rPr>
-              <a:t>•  538,774건 원본 대신 사전 집계 CSV(대시보드/상품리포트용)를 서비스가 읽도록 분리</a:t>
-            </a:r>
-          </a:p>
-          <a:p>
-            <a:pPr>
-              <a:spcAft>
-                <a:spcPts val="800"/>
-              </a:spcAft>
-            </a:pPr>
-            <a:r>
-              <a:rPr sz="1600">
-                <a:solidFill>
-                  <a:srgbClr val="21295C"/>
-                </a:solidFill>
-                <a:latin typeface="Calibri"/>
-              </a:rPr>
-              <a:t>•  대용량 원본 크롤링 CSV는 .gitignore 처리, 정제된 데이터/모델/집계 파일만 추적</a:t>
-            </a:r>
-          </a:p>
-        </p:txBody>
-      </p:sp>
-      <p:sp>
-        <p:nvSpPr>
-          <p:cNvPr id="5" name="Rounded Rectangle 4"/>
-          <p:cNvSpPr/>
-          <p:nvPr/>
-        </p:nvSpPr>
-        <p:spPr>
-          <a:xfrm>
-            <a:off x="640080" y="5029200"/>
-            <a:ext cx="10881360" cy="1188720"/>
-          </a:xfrm>
-          <a:prstGeom prst="roundRect">
-            <a:avLst>
-              <a:gd name="adj" fmla="val 8000"/>
-            </a:avLst>
-          </a:prstGeom>
-          <a:solidFill>
-            <a:srgbClr val="F4F6FC"/>
-          </a:solidFill>
-          <a:ln>
-            <a:noFill/>
-          </a:ln>
-          <a:effectLst/>
-        </p:spPr>
-        <p:style>
-          <a:lnRef idx="1">
-            <a:schemeClr val="accent1"/>
-          </a:lnRef>
-          <a:fillRef idx="3">
-            <a:schemeClr val="accent1"/>
-          </a:fillRef>
-          <a:effectRef idx="2">
-            <a:schemeClr val="accent1"/>
-          </a:effectRef>
-          <a:fontRef idx="minor">
-            <a:schemeClr val="lt1"/>
-          </a:fontRef>
-        </p:style>
-        <p:txBody>
-          <a:bodyPr rtlCol="0" anchor="ctr"/>
-          <a:lstStyle/>
-          <a:p>
-            <a:pPr algn="ctr"/>
-          </a:p>
-        </p:txBody>
-      </p:sp>
-      <p:sp>
-        <p:nvSpPr>
-          <p:cNvPr id="6" name="TextBox 5"/>
-          <p:cNvSpPr txBox="1"/>
-          <p:nvPr/>
-        </p:nvSpPr>
-        <p:spPr>
-          <a:xfrm>
-            <a:off x="914400" y="5257800"/>
-            <a:ext cx="10332720" cy="822960"/>
-          </a:xfrm>
-          <a:prstGeom prst="rect">
-            <a:avLst/>
-          </a:prstGeom>
-          <a:noFill/>
-        </p:spPr>
-        <p:txBody>
-          <a:bodyPr wrap="square" anchor="t" lIns="0" rIns="0" tIns="0" bIns="0">
-            <a:spAutoFit/>
-          </a:bodyPr>
-          <a:lstStyle/>
-          <a:p>
-            <a:pPr algn="l">
-              <a:lnSpc>
-                <a:spcPct val="130000"/>
-              </a:lnSpc>
-            </a:pPr>
-            <a:r>
-              <a:rPr sz="1400" b="0" i="0">
-                <a:solidFill>
-                  <a:srgbClr val="555A6E"/>
-                </a:solidFill>
-                <a:latin typeface="Calibri"/>
-              </a:rPr>
-              <a:t>다음 과제: 대용량 데이터 Git LFS/외부 스토리지 연동, ABSA 정확도를 ML 분류기로</a:t>
-            </a:r>
-          </a:p>
-          <a:p>
-            <a:pPr algn="l">
-              <a:lnSpc>
-                <a:spcPct val="130000"/>
-              </a:lnSpc>
-            </a:pPr>
-            <a:r>
-              <a:rPr sz="1400" b="0" i="0">
-                <a:solidFill>
-                  <a:srgbClr val="555A6E"/>
-                </a:solidFill>
-                <a:latin typeface="Calibri"/>
-              </a:rPr>
-              <a:t>고도화(현재는 규칙 기반), GPU 환경에서 KoELECTRA 전체 데이터 파인튜닝</a:t>
-            </a:r>
-          </a:p>
-        </p:txBody>
-      </p:sp>
-    </p:spTree>
-  </p:cSld>
-  <p:clrMapOvr>
-    <a:masterClrMapping/>
-  </p:clrMapOvr>
-</p:sld>
-</file>
-
-<file path=ppt/slides/slide12.xml><?xml version="1.0" encoding="utf-8"?>
-<p:sld xmlns:a="http://schemas.openxmlformats.org/drawingml/2006/main" xmlns:p="http://schemas.openxmlformats.org/presentationml/2006/main" xmlns:r="http://schemas.openxmlformats.org/officeDocument/2006/relationships">
-  <p:cSld>
-    <p:spTree>
-      <p:nvGrpSpPr>
-        <p:cNvPr id="1" name=""/>
-        <p:cNvGrpSpPr/>
-        <p:nvPr/>
-      </p:nvGrpSpPr>
-      <p:grpSpPr/>
-      <p:sp>
-        <p:nvSpPr>
-          <p:cNvPr id="2" name="Rectangle 1"/>
-          <p:cNvSpPr/>
-          <p:nvPr/>
-        </p:nvSpPr>
-        <p:spPr>
-          <a:xfrm>
-            <a:off x="0" y="0"/>
-            <a:ext cx="12191695" cy="6858000"/>
-          </a:xfrm>
-          <a:prstGeom prst="rect">
-            <a:avLst/>
-          </a:prstGeom>
-          <a:solidFill>
-            <a:srgbClr val="1E2761"/>
-          </a:solidFill>
-          <a:ln>
-            <a:noFill/>
-          </a:ln>
-          <a:effectLst/>
-        </p:spPr>
-        <p:style>
-          <a:lnRef idx="1">
-            <a:schemeClr val="accent1"/>
-          </a:lnRef>
-          <a:fillRef idx="3">
-            <a:schemeClr val="accent1"/>
-          </a:fillRef>
-          <a:effectRef idx="2">
-            <a:schemeClr val="accent1"/>
-          </a:effectRef>
-          <a:fontRef idx="minor">
-            <a:schemeClr val="lt1"/>
-          </a:fontRef>
-        </p:style>
-        <p:txBody>
-          <a:bodyPr rtlCol="0" anchor="ctr"/>
-          <a:lstStyle/>
-          <a:p>
-            <a:pPr algn="ctr"/>
-          </a:p>
-        </p:txBody>
-      </p:sp>
-      <p:sp>
-        <p:nvSpPr>
-          <p:cNvPr id="3" name="TextBox 2"/>
-          <p:cNvSpPr txBox="1"/>
-          <p:nvPr/>
-        </p:nvSpPr>
-        <p:spPr>
-          <a:xfrm>
-            <a:off x="914400" y="914400"/>
-            <a:ext cx="10332720" cy="731520"/>
-          </a:xfrm>
-          <a:prstGeom prst="rect">
-            <a:avLst/>
-          </a:prstGeom>
-          <a:noFill/>
-        </p:spPr>
-        <p:txBody>
-          <a:bodyPr wrap="square" anchor="t" lIns="0" rIns="0" tIns="0" bIns="0">
-            <a:spAutoFit/>
-          </a:bodyPr>
-          <a:lstStyle/>
-          <a:p>
-            <a:pPr algn="l"/>
-            <a:r>
-              <a:rPr sz="3600" b="1" i="0">
-                <a:solidFill>
-                  <a:srgbClr val="FFFFFF"/>
-                </a:solidFill>
-                <a:latin typeface="Georgia"/>
-              </a:rPr>
-              <a:t>정리</a:t>
-            </a:r>
-          </a:p>
-        </p:txBody>
-      </p:sp>
-      <p:sp>
-        <p:nvSpPr>
-          <p:cNvPr id="4" name="TextBox 3"/>
-          <p:cNvSpPr txBox="1"/>
-          <p:nvPr/>
-        </p:nvSpPr>
-        <p:spPr>
-          <a:xfrm>
-            <a:off x="914400" y="1828800"/>
-            <a:ext cx="10058400" cy="3840480"/>
-          </a:xfrm>
-          <a:prstGeom prst="rect">
-            <a:avLst/>
-          </a:prstGeom>
-          <a:noFill/>
-        </p:spPr>
-        <p:txBody>
-          <a:bodyPr wrap="square">
-            <a:spAutoFit/>
-          </a:bodyPr>
-          <a:lstStyle/>
-          <a:p>
-            <a:pPr>
-              <a:spcAft>
-                <a:spcPts val="800"/>
-              </a:spcAft>
-            </a:pPr>
-            <a:r>
-              <a:rPr sz="1650">
-                <a:solidFill>
-                  <a:srgbClr val="FFFFFF"/>
-                </a:solidFill>
-                <a:latin typeface="Calibri"/>
-              </a:rPr>
-              <a:t>•  3개 플랫폼 538,774건 데이터를 통일된 기준으로 통합 (가장 큰 난관: 라벨 기준 불일치)</a:t>
-            </a:r>
-          </a:p>
-          <a:p>
-            <a:pPr>
-              <a:spcAft>
-                <a:spcPts val="800"/>
-              </a:spcAft>
-            </a:pPr>
-            <a:r>
-              <a:rPr sz="1650">
-                <a:solidFill>
-                  <a:srgbClr val="FFFFFF"/>
-                </a:solidFill>
-                <a:latin typeface="Calibri"/>
-              </a:rPr>
-              <a:t>•  환경 제약(PyTorch 미설치)을 numpy 구현 → 별도 venv 구성으로 2단계에 걸쳐 해결</a:t>
-            </a:r>
-          </a:p>
-          <a:p>
-            <a:pPr>
-              <a:spcAft>
-                <a:spcPts val="800"/>
-              </a:spcAft>
-            </a:pPr>
-            <a:r>
-              <a:rPr sz="1650">
-                <a:solidFill>
-                  <a:srgbClr val="FFFFFF"/>
-                </a:solidFill>
-                <a:latin typeface="Calibri"/>
-              </a:rPr>
-              <a:t>•  ML/DL/LSTM/Transformer 4개 모델을 비교하고, 실제 분포 재평가로 숨은 문제(label shift)를 찾아 보정</a:t>
-            </a:r>
-          </a:p>
-          <a:p>
-            <a:pPr>
-              <a:spcAft>
-                <a:spcPts val="800"/>
-              </a:spcAft>
-            </a:pPr>
-            <a:r>
-              <a:rPr sz="1650">
-                <a:solidFill>
-                  <a:srgbClr val="FFFFFF"/>
-                </a:solidFill>
-                <a:latin typeface="Calibri"/>
-              </a:rPr>
-              <a:t>•  "실용성 없다"는 피드백을 받고 텍스트 데모 → 속성기반 상품 리포트로 서비스 자체를 전환</a:t>
-            </a:r>
-          </a:p>
-          <a:p>
-            <a:pPr>
-              <a:spcAft>
-                <a:spcPts val="800"/>
-              </a:spcAft>
-            </a:pPr>
-            <a:r>
-              <a:rPr sz="1650">
-                <a:solidFill>
-                  <a:srgbClr val="FFFFFF"/>
-                </a:solidFill>
-                <a:latin typeface="Calibri"/>
-              </a:rPr>
-              <a:t>•  Streamlit으로 서비스를 구현하고 동작까지 검증</a:t>
-            </a:r>
-          </a:p>
-        </p:txBody>
-      </p:sp>
-      <p:sp>
-        <p:nvSpPr>
-          <p:cNvPr id="5" name="TextBox 4"/>
-          <p:cNvSpPr txBox="1"/>
-          <p:nvPr/>
-        </p:nvSpPr>
-        <p:spPr>
-          <a:xfrm>
-            <a:off x="914400" y="5943600"/>
-            <a:ext cx="10332720" cy="548640"/>
-          </a:xfrm>
-          <a:prstGeom prst="rect">
-            <a:avLst/>
-          </a:prstGeom>
-          <a:noFill/>
-        </p:spPr>
-        <p:txBody>
-          <a:bodyPr wrap="square" anchor="t" lIns="0" rIns="0" tIns="0" bIns="0">
-            <a:spAutoFit/>
-          </a:bodyPr>
-          <a:lstStyle/>
-          <a:p>
-            <a:pPr algn="l"/>
-            <a:r>
-              <a:rPr sz="2000" b="1" i="0">
-                <a:solidFill>
-                  <a:srgbClr val="F96167"/>
-                </a:solidFill>
-                <a:latin typeface="Georgia"/>
-              </a:rPr>
-              <a:t>BeautyScope</a:t>
-            </a:r>
-          </a:p>
-        </p:txBody>
-      </p:sp>
-    </p:spTree>
-  </p:cSld>
-  <p:clrMapOvr>
-    <a:masterClrMapping/>
-  </p:clrMapOvr>
-</p:sld>
-</file>
-
 <file path=ppt/slides/slide2.xml><?xml version="1.0" encoding="utf-8"?>
 <p:sld xmlns:a="http://schemas.openxmlformats.org/drawingml/2006/main" xmlns:p="http://schemas.openxmlformats.org/presentationml/2006/main" xmlns:r="http://schemas.openxmlformats.org/officeDocument/2006/relationships">
   <p:cSld>
@@ -5182,7 +3744,7 @@
                 </a:solidFill>
                 <a:latin typeface="Georgia"/>
               </a:rPr>
-              <a:t>어떤 문제를 ML/DL로 풀었나</a:t>
+              <a:t>문제정의 &amp; 데이터 수집</a:t>
             </a:r>
           </a:p>
         </p:txBody>
@@ -5195,8 +3757,8 @@
         </p:nvSpPr>
         <p:spPr>
           <a:xfrm>
-            <a:off x="640080" y="1463040"/>
-            <a:ext cx="5394960" cy="1645920"/>
+            <a:off x="640080" y="1371600"/>
+            <a:ext cx="10515600" cy="1645920"/>
           </a:xfrm>
           <a:prstGeom prst="rect">
             <a:avLst/>
@@ -5215,7 +3777,7 @@
               </a:spcAft>
             </a:pPr>
             <a:r>
-              <a:rPr sz="1600">
+              <a:rPr sz="1550">
                 <a:solidFill>
                   <a:srgbClr val="21295C"/>
                 </a:solidFill>
@@ -5231,13 +3793,29 @@
               </a:spcAft>
             </a:pPr>
             <a:r>
-              <a:rPr sz="1600">
+              <a:rPr sz="1550">
                 <a:solidFill>
                   <a:srgbClr val="21295C"/>
                 </a:solidFill>
                 <a:latin typeface="Calibri"/>
               </a:rPr>
               <a:t>•  별점만 봐서는 "왜" 좋고 나쁜지, 속성별로(보습/향/트러블) 어떤지 알 수 없다</a:t>
+            </a:r>
+          </a:p>
+          <a:p>
+            <a:pPr>
+              <a:spcAft>
+                <a:spcPts val="800"/>
+              </a:spcAft>
+            </a:pPr>
+            <a:r>
+              <a:rPr sz="1550">
+                <a:solidFill>
+                  <a:srgbClr val="21295C"/>
+                </a:solidFill>
+                <a:latin typeface="Calibri"/>
+              </a:rPr>
+              <a:t>•  → ML/DL로 감성 분류 + 속성기반 감성분석(ABSA)으로 해결</a:t>
             </a:r>
           </a:p>
         </p:txBody>
@@ -5250,12 +3828,12 @@
         </p:nvSpPr>
         <p:spPr>
           <a:xfrm>
-            <a:off x="640080" y="3200400"/>
-            <a:ext cx="5394960" cy="2926080"/>
+            <a:off x="640080" y="3291840"/>
+            <a:ext cx="3520440" cy="2468880"/>
           </a:xfrm>
           <a:prstGeom prst="roundRect">
             <a:avLst>
-              <a:gd name="adj" fmla="val 6000"/>
+              <a:gd name="adj" fmla="val 8000"/>
             </a:avLst>
           </a:prstGeom>
           <a:solidFill>
@@ -5296,8 +3874,8 @@
         </p:nvSpPr>
         <p:spPr>
           <a:xfrm>
-            <a:off x="914400" y="3429000"/>
-            <a:ext cx="4846320" cy="457200"/>
+            <a:off x="868680" y="3520440"/>
+            <a:ext cx="3063240" cy="365760"/>
           </a:xfrm>
           <a:prstGeom prst="rect">
             <a:avLst/>
@@ -5312,13 +3890,13 @@
           <a:p>
             <a:pPr algn="l"/>
             <a:r>
-              <a:rPr sz="1700" b="1" i="0">
-                <a:solidFill>
-                  <a:srgbClr val="FFFFFF"/>
+              <a:rPr sz="1400" b="1" i="0">
+                <a:solidFill>
+                  <a:srgbClr val="CADCFC"/>
                 </a:solidFill>
                 <a:latin typeface="Calibri"/>
               </a:rPr>
-              <a:t>① 감성 분류 (ML+DL)</a:t>
+              <a:t>1차</a:t>
             </a:r>
           </a:p>
         </p:txBody>
@@ -5331,8 +3909,8 @@
         </p:nvSpPr>
         <p:spPr>
           <a:xfrm>
-            <a:off x="914400" y="3931920"/>
-            <a:ext cx="4846320" cy="2011680"/>
+            <a:off x="868680" y="3931920"/>
+            <a:ext cx="3063240" cy="914400"/>
           </a:xfrm>
           <a:prstGeom prst="rect">
             <a:avLst/>
@@ -5347,83 +3925,345 @@
           <a:p>
             <a:pPr algn="l">
               <a:lnSpc>
-                <a:spcPct val="140000"/>
+                <a:spcPct val="125000"/>
               </a:lnSpc>
             </a:pPr>
             <a:r>
-              <a:rPr sz="1400" b="0" i="0">
-                <a:solidFill>
-                  <a:srgbClr val="CADCFC"/>
+              <a:rPr sz="1500" b="1" i="0">
+                <a:solidFill>
+                  <a:srgbClr val="FFFFFF"/>
                 </a:solidFill>
                 <a:latin typeface="Calibri"/>
               </a:rPr>
-              <a:t>리뷰 텍스트 → 긍정/중립/부정</a:t>
+              <a:t>쿠팡 크롤링</a:t>
             </a:r>
           </a:p>
           <a:p>
             <a:pPr algn="l">
               <a:lnSpc>
-                <a:spcPct val="140000"/>
+                <a:spcPct val="125000"/>
               </a:lnSpc>
             </a:pPr>
             <a:r>
-              <a:rPr sz="1400" b="0" i="0">
+              <a:rPr sz="1500" b="1" i="0">
+                <a:solidFill>
+                  <a:srgbClr val="FFFFFF"/>
+                </a:solidFill>
+                <a:latin typeface="Calibri"/>
+              </a:rPr>
+              <a:t>(20개 키워드)</a:t>
+            </a:r>
+          </a:p>
+        </p:txBody>
+      </p:sp>
+      <p:sp>
+        <p:nvSpPr>
+          <p:cNvPr id="8" name="TextBox 7"/>
+          <p:cNvSpPr txBox="1"/>
+          <p:nvPr/>
+        </p:nvSpPr>
+        <p:spPr>
+          <a:xfrm>
+            <a:off x="868680" y="5029200"/>
+            <a:ext cx="3063240" cy="548640"/>
+          </a:xfrm>
+          <a:prstGeom prst="rect">
+            <a:avLst/>
+          </a:prstGeom>
+          <a:noFill/>
+        </p:spPr>
+        <p:txBody>
+          <a:bodyPr wrap="square" anchor="t" lIns="0" rIns="0" tIns="0" bIns="0">
+            <a:spAutoFit/>
+          </a:bodyPr>
+          <a:lstStyle/>
+          <a:p>
+            <a:pPr algn="l"/>
+            <a:r>
+              <a:rPr sz="2400" b="1" i="0">
+                <a:solidFill>
+                  <a:srgbClr val="FFFFFF"/>
+                </a:solidFill>
+                <a:latin typeface="Calibri"/>
+              </a:rPr>
+              <a:t>86,379건</a:t>
+            </a:r>
+          </a:p>
+        </p:txBody>
+      </p:sp>
+      <p:sp>
+        <p:nvSpPr>
+          <p:cNvPr id="9" name="Right Arrow 8"/>
+          <p:cNvSpPr/>
+          <p:nvPr/>
+        </p:nvSpPr>
+        <p:spPr>
+          <a:xfrm>
+            <a:off x="4178807" y="4389120"/>
+            <a:ext cx="146304" cy="320040"/>
+          </a:xfrm>
+          <a:prstGeom prst="rightArrow">
+            <a:avLst/>
+          </a:prstGeom>
+          <a:solidFill>
+            <a:srgbClr val="555A6E"/>
+          </a:solidFill>
+          <a:ln>
+            <a:noFill/>
+          </a:ln>
+          <a:effectLst/>
+        </p:spPr>
+        <p:style>
+          <a:lnRef idx="1">
+            <a:schemeClr val="accent1"/>
+          </a:lnRef>
+          <a:fillRef idx="3">
+            <a:schemeClr val="accent1"/>
+          </a:fillRef>
+          <a:effectRef idx="2">
+            <a:schemeClr val="accent1"/>
+          </a:effectRef>
+          <a:fontRef idx="minor">
+            <a:schemeClr val="lt1"/>
+          </a:fontRef>
+        </p:style>
+        <p:txBody>
+          <a:bodyPr rtlCol="0" anchor="ctr"/>
+          <a:lstStyle/>
+          <a:p>
+            <a:pPr algn="ctr"/>
+          </a:p>
+        </p:txBody>
+      </p:sp>
+      <p:sp>
+        <p:nvSpPr>
+          <p:cNvPr id="10" name="Rounded Rectangle 9"/>
+          <p:cNvSpPr/>
+          <p:nvPr/>
+        </p:nvSpPr>
+        <p:spPr>
+          <a:xfrm>
+            <a:off x="4343400" y="3291840"/>
+            <a:ext cx="3520440" cy="2468880"/>
+          </a:xfrm>
+          <a:prstGeom prst="roundRect">
+            <a:avLst>
+              <a:gd name="adj" fmla="val 8000"/>
+            </a:avLst>
+          </a:prstGeom>
+          <a:solidFill>
+            <a:srgbClr val="1E2761"/>
+          </a:solidFill>
+          <a:ln>
+            <a:noFill/>
+          </a:ln>
+          <a:effectLst/>
+        </p:spPr>
+        <p:style>
+          <a:lnRef idx="1">
+            <a:schemeClr val="accent1"/>
+          </a:lnRef>
+          <a:fillRef idx="3">
+            <a:schemeClr val="accent1"/>
+          </a:fillRef>
+          <a:effectRef idx="2">
+            <a:schemeClr val="accent1"/>
+          </a:effectRef>
+          <a:fontRef idx="minor">
+            <a:schemeClr val="lt1"/>
+          </a:fontRef>
+        </p:style>
+        <p:txBody>
+          <a:bodyPr rtlCol="0" anchor="ctr"/>
+          <a:lstStyle/>
+          <a:p>
+            <a:pPr algn="ctr"/>
+          </a:p>
+        </p:txBody>
+      </p:sp>
+      <p:sp>
+        <p:nvSpPr>
+          <p:cNvPr id="11" name="TextBox 10"/>
+          <p:cNvSpPr txBox="1"/>
+          <p:nvPr/>
+        </p:nvSpPr>
+        <p:spPr>
+          <a:xfrm>
+            <a:off x="4572000" y="3520440"/>
+            <a:ext cx="3063240" cy="365760"/>
+          </a:xfrm>
+          <a:prstGeom prst="rect">
+            <a:avLst/>
+          </a:prstGeom>
+          <a:noFill/>
+        </p:spPr>
+        <p:txBody>
+          <a:bodyPr wrap="square" anchor="t" lIns="0" rIns="0" tIns="0" bIns="0">
+            <a:spAutoFit/>
+          </a:bodyPr>
+          <a:lstStyle/>
+          <a:p>
+            <a:pPr algn="l"/>
+            <a:r>
+              <a:rPr sz="1400" b="1" i="0">
                 <a:solidFill>
                   <a:srgbClr val="CADCFC"/>
                 </a:solidFill>
                 <a:latin typeface="Calibri"/>
               </a:rPr>
-              <a:t>ML: TF-IDF+로지스틱회귀</a:t>
-            </a:r>
-          </a:p>
+              <a:t>2차</a:t>
+            </a:r>
+          </a:p>
+        </p:txBody>
+      </p:sp>
+      <p:sp>
+        <p:nvSpPr>
+          <p:cNvPr id="12" name="TextBox 11"/>
+          <p:cNvSpPr txBox="1"/>
+          <p:nvPr/>
+        </p:nvSpPr>
+        <p:spPr>
+          <a:xfrm>
+            <a:off x="4572000" y="3931920"/>
+            <a:ext cx="3063240" cy="914400"/>
+          </a:xfrm>
+          <a:prstGeom prst="rect">
+            <a:avLst/>
+          </a:prstGeom>
+          <a:noFill/>
+        </p:spPr>
+        <p:txBody>
+          <a:bodyPr wrap="square" anchor="t" lIns="0" rIns="0" tIns="0" bIns="0">
+            <a:spAutoFit/>
+          </a:bodyPr>
+          <a:lstStyle/>
           <a:p>
             <a:pPr algn="l">
               <a:lnSpc>
-                <a:spcPct val="140000"/>
+                <a:spcPct val="125000"/>
               </a:lnSpc>
             </a:pPr>
             <a:r>
-              <a:rPr sz="1400" b="0" i="0">
-                <a:solidFill>
-                  <a:srgbClr val="CADCFC"/>
+              <a:rPr sz="1500" b="1" i="0">
+                <a:solidFill>
+                  <a:srgbClr val="FFFFFF"/>
                 </a:solidFill>
                 <a:latin typeface="Calibri"/>
               </a:rPr>
-              <a:t>DL: numpy 직접구현 신경망</a:t>
+              <a:t>+ 무신사·올리브영</a:t>
             </a:r>
           </a:p>
           <a:p>
             <a:pPr algn="l">
               <a:lnSpc>
-                <a:spcPct val="140000"/>
+                <a:spcPct val="125000"/>
               </a:lnSpc>
             </a:pPr>
             <a:r>
-              <a:rPr sz="1400" b="0" i="0">
-                <a:solidFill>
-                  <a:srgbClr val="CADCFC"/>
+              <a:rPr sz="1500" b="1" i="0">
+                <a:solidFill>
+                  <a:srgbClr val="FFFFFF"/>
                 </a:solidFill>
                 <a:latin typeface="Calibri"/>
               </a:rPr>
-              <a:t>(+LSTM/Transformer 비교실험)</a:t>
-            </a:r>
-          </a:p>
-        </p:txBody>
-      </p:sp>
-      <p:sp>
-        <p:nvSpPr>
-          <p:cNvPr id="8" name="Rounded Rectangle 7"/>
+              <a:t>(동료 크롤링 데이터 추가)</a:t>
+            </a:r>
+          </a:p>
+        </p:txBody>
+      </p:sp>
+      <p:sp>
+        <p:nvSpPr>
+          <p:cNvPr id="13" name="TextBox 12"/>
+          <p:cNvSpPr txBox="1"/>
+          <p:nvPr/>
+        </p:nvSpPr>
+        <p:spPr>
+          <a:xfrm>
+            <a:off x="4572000" y="5029200"/>
+            <a:ext cx="3063240" cy="548640"/>
+          </a:xfrm>
+          <a:prstGeom prst="rect">
+            <a:avLst/>
+          </a:prstGeom>
+          <a:noFill/>
+        </p:spPr>
+        <p:txBody>
+          <a:bodyPr wrap="square" anchor="t" lIns="0" rIns="0" tIns="0" bIns="0">
+            <a:spAutoFit/>
+          </a:bodyPr>
+          <a:lstStyle/>
+          <a:p>
+            <a:pPr algn="l"/>
+            <a:r>
+              <a:rPr sz="2400" b="1" i="0">
+                <a:solidFill>
+                  <a:srgbClr val="FFFFFF"/>
+                </a:solidFill>
+                <a:latin typeface="Calibri"/>
+              </a:rPr>
+              <a:t>452,395건</a:t>
+            </a:r>
+          </a:p>
+        </p:txBody>
+      </p:sp>
+      <p:sp>
+        <p:nvSpPr>
+          <p:cNvPr id="14" name="Right Arrow 13"/>
           <p:cNvSpPr/>
           <p:nvPr/>
         </p:nvSpPr>
         <p:spPr>
           <a:xfrm>
-            <a:off x="6309360" y="3200400"/>
-            <a:ext cx="5212080" cy="2926080"/>
+            <a:off x="7882127" y="4389120"/>
+            <a:ext cx="146304" cy="320040"/>
+          </a:xfrm>
+          <a:prstGeom prst="rightArrow">
+            <a:avLst/>
+          </a:prstGeom>
+          <a:solidFill>
+            <a:srgbClr val="555A6E"/>
+          </a:solidFill>
+          <a:ln>
+            <a:noFill/>
+          </a:ln>
+          <a:effectLst/>
+        </p:spPr>
+        <p:style>
+          <a:lnRef idx="1">
+            <a:schemeClr val="accent1"/>
+          </a:lnRef>
+          <a:fillRef idx="3">
+            <a:schemeClr val="accent1"/>
+          </a:fillRef>
+          <a:effectRef idx="2">
+            <a:schemeClr val="accent1"/>
+          </a:effectRef>
+          <a:fontRef idx="minor">
+            <a:schemeClr val="lt1"/>
+          </a:fontRef>
+        </p:style>
+        <p:txBody>
+          <a:bodyPr rtlCol="0" anchor="ctr"/>
+          <a:lstStyle/>
+          <a:p>
+            <a:pPr algn="ctr"/>
+          </a:p>
+        </p:txBody>
+      </p:sp>
+      <p:sp>
+        <p:nvSpPr>
+          <p:cNvPr id="15" name="Rounded Rectangle 14"/>
+          <p:cNvSpPr/>
+          <p:nvPr/>
+        </p:nvSpPr>
+        <p:spPr>
+          <a:xfrm>
+            <a:off x="8046719" y="3291840"/>
+            <a:ext cx="3520440" cy="2468880"/>
           </a:xfrm>
           <a:prstGeom prst="roundRect">
             <a:avLst>
-              <a:gd name="adj" fmla="val 6000"/>
+              <a:gd name="adj" fmla="val 8000"/>
             </a:avLst>
           </a:prstGeom>
           <a:solidFill>
@@ -5458,14 +4298,14 @@
       </p:sp>
       <p:sp>
         <p:nvSpPr>
-          <p:cNvPr id="9" name="TextBox 8"/>
+          <p:cNvPr id="16" name="TextBox 15"/>
           <p:cNvSpPr txBox="1"/>
           <p:nvPr/>
         </p:nvSpPr>
         <p:spPr>
           <a:xfrm>
-            <a:off x="6583680" y="3429000"/>
-            <a:ext cx="4663440" cy="457200"/>
+            <a:off x="8275319" y="3520440"/>
+            <a:ext cx="3063240" cy="365760"/>
           </a:xfrm>
           <a:prstGeom prst="rect">
             <a:avLst/>
@@ -5480,27 +4320,27 @@
           <a:p>
             <a:pPr algn="l"/>
             <a:r>
-              <a:rPr sz="1700" b="1" i="0">
-                <a:solidFill>
-                  <a:srgbClr val="FFFFFF"/>
+              <a:rPr sz="1400" b="1" i="0">
+                <a:solidFill>
+                  <a:srgbClr val="CADCFC"/>
                 </a:solidFill>
                 <a:latin typeface="Calibri"/>
               </a:rPr>
-              <a:t>② 속성기반 감성분석 (ABSA)</a:t>
-            </a:r>
-          </a:p>
-        </p:txBody>
-      </p:sp>
-      <p:sp>
-        <p:nvSpPr>
-          <p:cNvPr id="10" name="TextBox 9"/>
+              <a:t>최종</a:t>
+            </a:r>
+          </a:p>
+        </p:txBody>
+      </p:sp>
+      <p:sp>
+        <p:nvSpPr>
+          <p:cNvPr id="17" name="TextBox 16"/>
           <p:cNvSpPr txBox="1"/>
           <p:nvPr/>
         </p:nvSpPr>
         <p:spPr>
           <a:xfrm>
-            <a:off x="6583680" y="3931920"/>
-            <a:ext cx="4663440" cy="2011680"/>
+            <a:off x="8275319" y="3931920"/>
+            <a:ext cx="3063240" cy="914400"/>
           </a:xfrm>
           <a:prstGeom prst="rect">
             <a:avLst/>
@@ -5515,65 +4355,68 @@
           <a:p>
             <a:pPr algn="l">
               <a:lnSpc>
-                <a:spcPct val="140000"/>
+                <a:spcPct val="125000"/>
               </a:lnSpc>
             </a:pPr>
             <a:r>
-              <a:rPr sz="1400" b="0" i="0">
+              <a:rPr sz="1500" b="1" i="0">
                 <a:solidFill>
                   <a:srgbClr val="FFFFFF"/>
                 </a:solidFill>
                 <a:latin typeface="Calibri"/>
               </a:rPr>
-              <a:t>리뷰를 속성별로 쪼개서 분석</a:t>
+              <a:t>스키마/라벨 통일</a:t>
             </a:r>
           </a:p>
           <a:p>
             <a:pPr algn="l">
               <a:lnSpc>
-                <a:spcPct val="140000"/>
+                <a:spcPct val="125000"/>
               </a:lnSpc>
             </a:pPr>
             <a:r>
-              <a:rPr sz="1400" b="0" i="0">
+              <a:rPr sz="1500" b="1" i="0">
                 <a:solidFill>
                   <a:srgbClr val="FFFFFF"/>
                 </a:solidFill>
                 <a:latin typeface="Calibri"/>
               </a:rPr>
-              <a:t>"보습력은 좋은데 향은 별로다"</a:t>
-            </a:r>
-          </a:p>
-          <a:p>
-            <a:pPr algn="l">
-              <a:lnSpc>
-                <a:spcPct val="140000"/>
-              </a:lnSpc>
-            </a:pPr>
-            <a:r>
-              <a:rPr sz="1400" b="0" i="0">
+              <a:t>+ 중복 제거</a:t>
+            </a:r>
+          </a:p>
+        </p:txBody>
+      </p:sp>
+      <p:sp>
+        <p:nvSpPr>
+          <p:cNvPr id="18" name="TextBox 17"/>
+          <p:cNvSpPr txBox="1"/>
+          <p:nvPr/>
+        </p:nvSpPr>
+        <p:spPr>
+          <a:xfrm>
+            <a:off x="8275319" y="5029200"/>
+            <a:ext cx="3063240" cy="548640"/>
+          </a:xfrm>
+          <a:prstGeom prst="rect">
+            <a:avLst/>
+          </a:prstGeom>
+          <a:noFill/>
+        </p:spPr>
+        <p:txBody>
+          <a:bodyPr wrap="square" anchor="t" lIns="0" rIns="0" tIns="0" bIns="0">
+            <a:spAutoFit/>
+          </a:bodyPr>
+          <a:lstStyle/>
+          <a:p>
+            <a:pPr algn="l"/>
+            <a:r>
+              <a:rPr sz="2400" b="1" i="0">
                 <a:solidFill>
                   <a:srgbClr val="FFFFFF"/>
                 </a:solidFill>
                 <a:latin typeface="Calibri"/>
               </a:rPr>
-              <a:t>같은 세부 정보를 추출해</a:t>
-            </a:r>
-          </a:p>
-          <a:p>
-            <a:pPr algn="l">
-              <a:lnSpc>
-                <a:spcPct val="140000"/>
-              </a:lnSpc>
-            </a:pPr>
-            <a:r>
-              <a:rPr sz="1400" b="0" i="0">
-                <a:solidFill>
-                  <a:srgbClr val="FFFFFF"/>
-                </a:solidFill>
-                <a:latin typeface="Calibri"/>
-              </a:rPr>
-              <a:t>구매 의사결정을 지원</a:t>
+              <a:t>538,774건</a:t>
             </a:r>
           </a:p>
         </p:txBody>
@@ -5670,7 +4513,7 @@
                 </a:solidFill>
                 <a:latin typeface="Georgia"/>
               </a:rPr>
-              <a:t>데이터 수집 — 처음엔 쿠팡만, 더 모았다</a:t>
+              <a:t>데이터 준비 — 가장 까다로웠던 단계</a:t>
             </a:r>
           </a:p>
         </p:txBody>
@@ -5684,15 +4527,15 @@
         <p:spPr>
           <a:xfrm>
             <a:off x="640080" y="1554480"/>
-            <a:ext cx="2606040" cy="2377440"/>
+            <a:ext cx="10881360" cy="1417320"/>
           </a:xfrm>
           <a:prstGeom prst="roundRect">
             <a:avLst>
-              <a:gd name="adj" fmla="val 8000"/>
+              <a:gd name="adj" fmla="val 6000"/>
             </a:avLst>
           </a:prstGeom>
           <a:solidFill>
-            <a:srgbClr val="1E2761"/>
+            <a:srgbClr val="F4F6FC"/>
           </a:solidFill>
           <a:ln>
             <a:noFill/>
@@ -5723,617 +4566,18 @@
       </p:sp>
       <p:sp>
         <p:nvSpPr>
-          <p:cNvPr id="5" name="TextBox 4"/>
-          <p:cNvSpPr txBox="1"/>
-          <p:nvPr/>
-        </p:nvSpPr>
-        <p:spPr>
-          <a:xfrm>
-            <a:off x="822959" y="1783080"/>
-            <a:ext cx="2240280" cy="365760"/>
-          </a:xfrm>
-          <a:prstGeom prst="rect">
-            <a:avLst/>
-          </a:prstGeom>
-          <a:noFill/>
-        </p:spPr>
-        <p:txBody>
-          <a:bodyPr wrap="square" anchor="t" lIns="0" rIns="0" tIns="0" bIns="0">
-            <a:spAutoFit/>
-          </a:bodyPr>
-          <a:lstStyle/>
-          <a:p>
-            <a:pPr algn="l"/>
-            <a:r>
-              <a:rPr sz="1300" b="1" i="0">
-                <a:solidFill>
-                  <a:srgbClr val="CADCFC"/>
-                </a:solidFill>
-                <a:latin typeface="Calibri"/>
-              </a:rPr>
-              <a:t>1차</a:t>
-            </a:r>
-          </a:p>
-        </p:txBody>
-      </p:sp>
-      <p:sp>
-        <p:nvSpPr>
-          <p:cNvPr id="6" name="TextBox 5"/>
-          <p:cNvSpPr txBox="1"/>
-          <p:nvPr/>
-        </p:nvSpPr>
-        <p:spPr>
-          <a:xfrm>
-            <a:off x="822959" y="2194560"/>
-            <a:ext cx="2240280" cy="914400"/>
-          </a:xfrm>
-          <a:prstGeom prst="rect">
-            <a:avLst/>
-          </a:prstGeom>
-          <a:noFill/>
-        </p:spPr>
-        <p:txBody>
-          <a:bodyPr wrap="square" anchor="t" lIns="0" rIns="0" tIns="0" bIns="0">
-            <a:spAutoFit/>
-          </a:bodyPr>
-          <a:lstStyle/>
-          <a:p>
-            <a:pPr algn="l">
-              <a:lnSpc>
-                <a:spcPct val="125000"/>
-              </a:lnSpc>
-            </a:pPr>
-            <a:r>
-              <a:rPr sz="1400" b="1" i="0">
-                <a:solidFill>
-                  <a:srgbClr val="FFFFFF"/>
-                </a:solidFill>
-                <a:latin typeface="Calibri"/>
-              </a:rPr>
-              <a:t>쿠팡 크롤링</a:t>
-            </a:r>
-          </a:p>
-          <a:p>
-            <a:pPr algn="l">
-              <a:lnSpc>
-                <a:spcPct val="125000"/>
-              </a:lnSpc>
-            </a:pPr>
-            <a:r>
-              <a:rPr sz="1400" b="1" i="0">
-                <a:solidFill>
-                  <a:srgbClr val="FFFFFF"/>
-                </a:solidFill>
-                <a:latin typeface="Calibri"/>
-              </a:rPr>
-              <a:t>(20개 키워드)</a:t>
-            </a:r>
-          </a:p>
-        </p:txBody>
-      </p:sp>
-      <p:sp>
-        <p:nvSpPr>
-          <p:cNvPr id="7" name="TextBox 6"/>
-          <p:cNvSpPr txBox="1"/>
-          <p:nvPr/>
-        </p:nvSpPr>
-        <p:spPr>
-          <a:xfrm>
-            <a:off x="822959" y="3246120"/>
-            <a:ext cx="2240280" cy="548640"/>
-          </a:xfrm>
-          <a:prstGeom prst="rect">
-            <a:avLst/>
-          </a:prstGeom>
-          <a:noFill/>
-        </p:spPr>
-        <p:txBody>
-          <a:bodyPr wrap="square" anchor="t" lIns="0" rIns="0" tIns="0" bIns="0">
-            <a:spAutoFit/>
-          </a:bodyPr>
-          <a:lstStyle/>
-          <a:p>
-            <a:pPr algn="l"/>
-            <a:r>
-              <a:rPr sz="2000" b="1" i="0">
-                <a:solidFill>
-                  <a:srgbClr val="FFFFFF"/>
-                </a:solidFill>
-                <a:latin typeface="Calibri"/>
-              </a:rPr>
-              <a:t>86,379건</a:t>
-            </a:r>
-          </a:p>
-        </p:txBody>
-      </p:sp>
-      <p:sp>
-        <p:nvSpPr>
-          <p:cNvPr id="8" name="Right Arrow 7"/>
+          <p:cNvPr id="5" name="Rounded Rectangle 4"/>
           <p:cNvSpPr/>
           <p:nvPr/>
         </p:nvSpPr>
         <p:spPr>
           <a:xfrm>
-            <a:off x="3255263" y="2606040"/>
-            <a:ext cx="118872" cy="274320"/>
-          </a:xfrm>
-          <a:prstGeom prst="rightArrow">
-            <a:avLst/>
-          </a:prstGeom>
-          <a:solidFill>
-            <a:srgbClr val="555A6E"/>
-          </a:solidFill>
-          <a:ln>
-            <a:noFill/>
-          </a:ln>
-          <a:effectLst/>
-        </p:spPr>
-        <p:style>
-          <a:lnRef idx="1">
-            <a:schemeClr val="accent1"/>
-          </a:lnRef>
-          <a:fillRef idx="3">
-            <a:schemeClr val="accent1"/>
-          </a:fillRef>
-          <a:effectRef idx="2">
-            <a:schemeClr val="accent1"/>
-          </a:effectRef>
-          <a:fontRef idx="minor">
-            <a:schemeClr val="lt1"/>
-          </a:fontRef>
-        </p:style>
-        <p:txBody>
-          <a:bodyPr rtlCol="0" anchor="ctr"/>
-          <a:lstStyle/>
-          <a:p>
-            <a:pPr algn="ctr"/>
-          </a:p>
-        </p:txBody>
-      </p:sp>
-      <p:sp>
-        <p:nvSpPr>
-          <p:cNvPr id="9" name="Rounded Rectangle 8"/>
-          <p:cNvSpPr/>
-          <p:nvPr/>
-        </p:nvSpPr>
-        <p:spPr>
-          <a:xfrm>
-            <a:off x="3383280" y="1554480"/>
-            <a:ext cx="2606040" cy="2377440"/>
+            <a:off x="868680" y="1755648"/>
+            <a:ext cx="2743200" cy="438912"/>
           </a:xfrm>
           <a:prstGeom prst="roundRect">
             <a:avLst>
-              <a:gd name="adj" fmla="val 8000"/>
-            </a:avLst>
-          </a:prstGeom>
-          <a:solidFill>
-            <a:srgbClr val="1E2761"/>
-          </a:solidFill>
-          <a:ln>
-            <a:noFill/>
-          </a:ln>
-          <a:effectLst/>
-        </p:spPr>
-        <p:style>
-          <a:lnRef idx="1">
-            <a:schemeClr val="accent1"/>
-          </a:lnRef>
-          <a:fillRef idx="3">
-            <a:schemeClr val="accent1"/>
-          </a:fillRef>
-          <a:effectRef idx="2">
-            <a:schemeClr val="accent1"/>
-          </a:effectRef>
-          <a:fontRef idx="minor">
-            <a:schemeClr val="lt1"/>
-          </a:fontRef>
-        </p:style>
-        <p:txBody>
-          <a:bodyPr rtlCol="0" anchor="ctr"/>
-          <a:lstStyle/>
-          <a:p>
-            <a:pPr algn="ctr"/>
-          </a:p>
-        </p:txBody>
-      </p:sp>
-      <p:sp>
-        <p:nvSpPr>
-          <p:cNvPr id="10" name="TextBox 9"/>
-          <p:cNvSpPr txBox="1"/>
-          <p:nvPr/>
-        </p:nvSpPr>
-        <p:spPr>
-          <a:xfrm>
-            <a:off x="3566160" y="1783080"/>
-            <a:ext cx="2240280" cy="365760"/>
-          </a:xfrm>
-          <a:prstGeom prst="rect">
-            <a:avLst/>
-          </a:prstGeom>
-          <a:noFill/>
-        </p:spPr>
-        <p:txBody>
-          <a:bodyPr wrap="square" anchor="t" lIns="0" rIns="0" tIns="0" bIns="0">
-            <a:spAutoFit/>
-          </a:bodyPr>
-          <a:lstStyle/>
-          <a:p>
-            <a:pPr algn="l"/>
-            <a:r>
-              <a:rPr sz="1300" b="1" i="0">
-                <a:solidFill>
-                  <a:srgbClr val="CADCFC"/>
-                </a:solidFill>
-                <a:latin typeface="Calibri"/>
-              </a:rPr>
-              <a:t>2차</a:t>
-            </a:r>
-          </a:p>
-        </p:txBody>
-      </p:sp>
-      <p:sp>
-        <p:nvSpPr>
-          <p:cNvPr id="11" name="TextBox 10"/>
-          <p:cNvSpPr txBox="1"/>
-          <p:nvPr/>
-        </p:nvSpPr>
-        <p:spPr>
-          <a:xfrm>
-            <a:off x="3566160" y="2194560"/>
-            <a:ext cx="2240280" cy="914400"/>
-          </a:xfrm>
-          <a:prstGeom prst="rect">
-            <a:avLst/>
-          </a:prstGeom>
-          <a:noFill/>
-        </p:spPr>
-        <p:txBody>
-          <a:bodyPr wrap="square" anchor="t" lIns="0" rIns="0" tIns="0" bIns="0">
-            <a:spAutoFit/>
-          </a:bodyPr>
-          <a:lstStyle/>
-          <a:p>
-            <a:pPr algn="l">
-              <a:lnSpc>
-                <a:spcPct val="125000"/>
-              </a:lnSpc>
-            </a:pPr>
-            <a:r>
-              <a:rPr sz="1400" b="1" i="0">
-                <a:solidFill>
-                  <a:srgbClr val="FFFFFF"/>
-                </a:solidFill>
-                <a:latin typeface="Calibri"/>
-              </a:rPr>
-              <a:t>+ 무신사</a:t>
-            </a:r>
-          </a:p>
-          <a:p>
-            <a:pPr algn="l">
-              <a:lnSpc>
-                <a:spcPct val="125000"/>
-              </a:lnSpc>
-            </a:pPr>
-            <a:r>
-              <a:rPr sz="1400" b="1" i="0">
-                <a:solidFill>
-                  <a:srgbClr val="FFFFFF"/>
-                </a:solidFill>
-                <a:latin typeface="Calibri"/>
-              </a:rPr>
-              <a:t>(동료 크롤링 데이터)</a:t>
-            </a:r>
-          </a:p>
-        </p:txBody>
-      </p:sp>
-      <p:sp>
-        <p:nvSpPr>
-          <p:cNvPr id="12" name="TextBox 11"/>
-          <p:cNvSpPr txBox="1"/>
-          <p:nvPr/>
-        </p:nvSpPr>
-        <p:spPr>
-          <a:xfrm>
-            <a:off x="3566160" y="3246120"/>
-            <a:ext cx="2240280" cy="548640"/>
-          </a:xfrm>
-          <a:prstGeom prst="rect">
-            <a:avLst/>
-          </a:prstGeom>
-          <a:noFill/>
-        </p:spPr>
-        <p:txBody>
-          <a:bodyPr wrap="square" anchor="t" lIns="0" rIns="0" tIns="0" bIns="0">
-            <a:spAutoFit/>
-          </a:bodyPr>
-          <a:lstStyle/>
-          <a:p>
-            <a:pPr algn="l"/>
-            <a:r>
-              <a:rPr sz="2000" b="1" i="0">
-                <a:solidFill>
-                  <a:srgbClr val="FFFFFF"/>
-                </a:solidFill>
-                <a:latin typeface="Calibri"/>
-              </a:rPr>
-              <a:t>230,870건</a:t>
-            </a:r>
-          </a:p>
-        </p:txBody>
-      </p:sp>
-      <p:sp>
-        <p:nvSpPr>
-          <p:cNvPr id="13" name="Right Arrow 12"/>
-          <p:cNvSpPr/>
-          <p:nvPr/>
-        </p:nvSpPr>
-        <p:spPr>
-          <a:xfrm>
-            <a:off x="5998464" y="2606040"/>
-            <a:ext cx="118872" cy="274320"/>
-          </a:xfrm>
-          <a:prstGeom prst="rightArrow">
-            <a:avLst/>
-          </a:prstGeom>
-          <a:solidFill>
-            <a:srgbClr val="555A6E"/>
-          </a:solidFill>
-          <a:ln>
-            <a:noFill/>
-          </a:ln>
-          <a:effectLst/>
-        </p:spPr>
-        <p:style>
-          <a:lnRef idx="1">
-            <a:schemeClr val="accent1"/>
-          </a:lnRef>
-          <a:fillRef idx="3">
-            <a:schemeClr val="accent1"/>
-          </a:fillRef>
-          <a:effectRef idx="2">
-            <a:schemeClr val="accent1"/>
-          </a:effectRef>
-          <a:fontRef idx="minor">
-            <a:schemeClr val="lt1"/>
-          </a:fontRef>
-        </p:style>
-        <p:txBody>
-          <a:bodyPr rtlCol="0" anchor="ctr"/>
-          <a:lstStyle/>
-          <a:p>
-            <a:pPr algn="ctr"/>
-          </a:p>
-        </p:txBody>
-      </p:sp>
-      <p:sp>
-        <p:nvSpPr>
-          <p:cNvPr id="14" name="Rounded Rectangle 13"/>
-          <p:cNvSpPr/>
-          <p:nvPr/>
-        </p:nvSpPr>
-        <p:spPr>
-          <a:xfrm>
-            <a:off x="6126480" y="1554480"/>
-            <a:ext cx="2606040" cy="2377440"/>
-          </a:xfrm>
-          <a:prstGeom prst="roundRect">
-            <a:avLst>
-              <a:gd name="adj" fmla="val 8000"/>
-            </a:avLst>
-          </a:prstGeom>
-          <a:solidFill>
-            <a:srgbClr val="1E2761"/>
-          </a:solidFill>
-          <a:ln>
-            <a:noFill/>
-          </a:ln>
-          <a:effectLst/>
-        </p:spPr>
-        <p:style>
-          <a:lnRef idx="1">
-            <a:schemeClr val="accent1"/>
-          </a:lnRef>
-          <a:fillRef idx="3">
-            <a:schemeClr val="accent1"/>
-          </a:fillRef>
-          <a:effectRef idx="2">
-            <a:schemeClr val="accent1"/>
-          </a:effectRef>
-          <a:fontRef idx="minor">
-            <a:schemeClr val="lt1"/>
-          </a:fontRef>
-        </p:style>
-        <p:txBody>
-          <a:bodyPr rtlCol="0" anchor="ctr"/>
-          <a:lstStyle/>
-          <a:p>
-            <a:pPr algn="ctr"/>
-          </a:p>
-        </p:txBody>
-      </p:sp>
-      <p:sp>
-        <p:nvSpPr>
-          <p:cNvPr id="15" name="TextBox 14"/>
-          <p:cNvSpPr txBox="1"/>
-          <p:nvPr/>
-        </p:nvSpPr>
-        <p:spPr>
-          <a:xfrm>
-            <a:off x="6309360" y="1783080"/>
-            <a:ext cx="2240280" cy="365760"/>
-          </a:xfrm>
-          <a:prstGeom prst="rect">
-            <a:avLst/>
-          </a:prstGeom>
-          <a:noFill/>
-        </p:spPr>
-        <p:txBody>
-          <a:bodyPr wrap="square" anchor="t" lIns="0" rIns="0" tIns="0" bIns="0">
-            <a:spAutoFit/>
-          </a:bodyPr>
-          <a:lstStyle/>
-          <a:p>
-            <a:pPr algn="l"/>
-            <a:r>
-              <a:rPr sz="1300" b="1" i="0">
-                <a:solidFill>
-                  <a:srgbClr val="CADCFC"/>
-                </a:solidFill>
-                <a:latin typeface="Calibri"/>
-              </a:rPr>
-              <a:t>2차</a:t>
-            </a:r>
-          </a:p>
-        </p:txBody>
-      </p:sp>
-      <p:sp>
-        <p:nvSpPr>
-          <p:cNvPr id="16" name="TextBox 15"/>
-          <p:cNvSpPr txBox="1"/>
-          <p:nvPr/>
-        </p:nvSpPr>
-        <p:spPr>
-          <a:xfrm>
-            <a:off x="6309360" y="2194560"/>
-            <a:ext cx="2240280" cy="914400"/>
-          </a:xfrm>
-          <a:prstGeom prst="rect">
-            <a:avLst/>
-          </a:prstGeom>
-          <a:noFill/>
-        </p:spPr>
-        <p:txBody>
-          <a:bodyPr wrap="square" anchor="t" lIns="0" rIns="0" tIns="0" bIns="0">
-            <a:spAutoFit/>
-          </a:bodyPr>
-          <a:lstStyle/>
-          <a:p>
-            <a:pPr algn="l">
-              <a:lnSpc>
-                <a:spcPct val="125000"/>
-              </a:lnSpc>
-            </a:pPr>
-            <a:r>
-              <a:rPr sz="1400" b="1" i="0">
-                <a:solidFill>
-                  <a:srgbClr val="FFFFFF"/>
-                </a:solidFill>
-                <a:latin typeface="Calibri"/>
-              </a:rPr>
-              <a:t>+ 올리브영</a:t>
-            </a:r>
-          </a:p>
-          <a:p>
-            <a:pPr algn="l">
-              <a:lnSpc>
-                <a:spcPct val="125000"/>
-              </a:lnSpc>
-            </a:pPr>
-            <a:r>
-              <a:rPr sz="1400" b="1" i="0">
-                <a:solidFill>
-                  <a:srgbClr val="FFFFFF"/>
-                </a:solidFill>
-                <a:latin typeface="Calibri"/>
-              </a:rPr>
-              <a:t>(JSONL 4개 파일)</a:t>
-            </a:r>
-          </a:p>
-        </p:txBody>
-      </p:sp>
-      <p:sp>
-        <p:nvSpPr>
-          <p:cNvPr id="17" name="TextBox 16"/>
-          <p:cNvSpPr txBox="1"/>
-          <p:nvPr/>
-        </p:nvSpPr>
-        <p:spPr>
-          <a:xfrm>
-            <a:off x="6309360" y="3246120"/>
-            <a:ext cx="2240280" cy="548640"/>
-          </a:xfrm>
-          <a:prstGeom prst="rect">
-            <a:avLst/>
-          </a:prstGeom>
-          <a:noFill/>
-        </p:spPr>
-        <p:txBody>
-          <a:bodyPr wrap="square" anchor="t" lIns="0" rIns="0" tIns="0" bIns="0">
-            <a:spAutoFit/>
-          </a:bodyPr>
-          <a:lstStyle/>
-          <a:p>
-            <a:pPr algn="l"/>
-            <a:r>
-              <a:rPr sz="2000" b="1" i="0">
-                <a:solidFill>
-                  <a:srgbClr val="FFFFFF"/>
-                </a:solidFill>
-                <a:latin typeface="Calibri"/>
-              </a:rPr>
-              <a:t>221,525건</a:t>
-            </a:r>
-          </a:p>
-        </p:txBody>
-      </p:sp>
-      <p:sp>
-        <p:nvSpPr>
-          <p:cNvPr id="18" name="Right Arrow 17"/>
-          <p:cNvSpPr/>
-          <p:nvPr/>
-        </p:nvSpPr>
-        <p:spPr>
-          <a:xfrm>
-            <a:off x="8741664" y="2606040"/>
-            <a:ext cx="118872" cy="274320"/>
-          </a:xfrm>
-          <a:prstGeom prst="rightArrow">
-            <a:avLst/>
-          </a:prstGeom>
-          <a:solidFill>
-            <a:srgbClr val="555A6E"/>
-          </a:solidFill>
-          <a:ln>
-            <a:noFill/>
-          </a:ln>
-          <a:effectLst/>
-        </p:spPr>
-        <p:style>
-          <a:lnRef idx="1">
-            <a:schemeClr val="accent1"/>
-          </a:lnRef>
-          <a:fillRef idx="3">
-            <a:schemeClr val="accent1"/>
-          </a:fillRef>
-          <a:effectRef idx="2">
-            <a:schemeClr val="accent1"/>
-          </a:effectRef>
-          <a:fontRef idx="minor">
-            <a:schemeClr val="lt1"/>
-          </a:fontRef>
-        </p:style>
-        <p:txBody>
-          <a:bodyPr rtlCol="0" anchor="ctr"/>
-          <a:lstStyle/>
-          <a:p>
-            <a:pPr algn="ctr"/>
-          </a:p>
-        </p:txBody>
-      </p:sp>
-      <p:sp>
-        <p:nvSpPr>
-          <p:cNvPr id="19" name="Rounded Rectangle 18"/>
-          <p:cNvSpPr/>
-          <p:nvPr/>
-        </p:nvSpPr>
-        <p:spPr>
-          <a:xfrm>
-            <a:off x="8869680" y="1554480"/>
-            <a:ext cx="2606040" cy="2377440"/>
-          </a:xfrm>
-          <a:prstGeom prst="roundRect">
-            <a:avLst>
-              <a:gd name="adj" fmla="val 8000"/>
+              <a:gd name="adj" fmla="val 50000"/>
             </a:avLst>
           </a:prstGeom>
           <a:solidFill>
@@ -6359,58 +4603,31 @@
           </a:fontRef>
         </p:style>
         <p:txBody>
-          <a:bodyPr rtlCol="0" anchor="ctr"/>
+          <a:bodyPr rtlCol="0" anchor="ctr" wrap="none" lIns="45720" rIns="45720" tIns="0" bIns="0"/>
           <a:lstStyle/>
           <a:p>
             <a:pPr algn="ctr"/>
-          </a:p>
-        </p:txBody>
-      </p:sp>
-      <p:sp>
-        <p:nvSpPr>
-          <p:cNvPr id="20" name="TextBox 19"/>
+            <a:r>
+              <a:rPr sz="1300" b="1">
+                <a:solidFill>
+                  <a:srgbClr val="FFFFFF"/>
+                </a:solidFill>
+              </a:rPr>
+              <a:t>라벨 기준 불일치 (핵심)</a:t>
+            </a:r>
+          </a:p>
+        </p:txBody>
+      </p:sp>
+      <p:sp>
+        <p:nvSpPr>
+          <p:cNvPr id="6" name="TextBox 5"/>
           <p:cNvSpPr txBox="1"/>
           <p:nvPr/>
         </p:nvSpPr>
         <p:spPr>
           <a:xfrm>
-            <a:off x="9052559" y="1783080"/>
-            <a:ext cx="2240280" cy="365760"/>
-          </a:xfrm>
-          <a:prstGeom prst="rect">
-            <a:avLst/>
-          </a:prstGeom>
-          <a:noFill/>
-        </p:spPr>
-        <p:txBody>
-          <a:bodyPr wrap="square" anchor="t" lIns="0" rIns="0" tIns="0" bIns="0">
-            <a:spAutoFit/>
-          </a:bodyPr>
-          <a:lstStyle/>
-          <a:p>
-            <a:pPr algn="l"/>
-            <a:r>
-              <a:rPr sz="1300" b="1" i="0">
-                <a:solidFill>
-                  <a:srgbClr val="CADCFC"/>
-                </a:solidFill>
-                <a:latin typeface="Calibri"/>
-              </a:rPr>
-              <a:t>최종</a:t>
-            </a:r>
-          </a:p>
-        </p:txBody>
-      </p:sp>
-      <p:sp>
-        <p:nvSpPr>
-          <p:cNvPr id="21" name="TextBox 20"/>
-          <p:cNvSpPr txBox="1"/>
-          <p:nvPr/>
-        </p:nvSpPr>
-        <p:spPr>
-          <a:xfrm>
-            <a:off x="9052559" y="2194560"/>
-            <a:ext cx="2240280" cy="914400"/>
+            <a:off x="3794760" y="1691639"/>
+            <a:ext cx="3520440" cy="1143000"/>
           </a:xfrm>
           <a:prstGeom prst="rect">
             <a:avLst/>
@@ -6429,15 +4646,38 @@
               </a:lnSpc>
             </a:pPr>
             <a:r>
-              <a:rPr sz="1400" b="1" i="0">
-                <a:solidFill>
-                  <a:srgbClr val="FFFFFF"/>
+              <a:rPr sz="1300" b="0" i="0">
+                <a:solidFill>
+                  <a:srgbClr val="555A6E"/>
                 </a:solidFill>
                 <a:latin typeface="Calibri"/>
               </a:rPr>
-              <a:t>스키마/라벨 통일</a:t>
-            </a:r>
-          </a:p>
+              <a:t>무신사 sentiment가 별점 아닌 텍스트분석 기반 → 5점 리뷰의 21%가 '부정'</a:t>
+            </a:r>
+          </a:p>
+        </p:txBody>
+      </p:sp>
+      <p:sp>
+        <p:nvSpPr>
+          <p:cNvPr id="7" name="TextBox 6"/>
+          <p:cNvSpPr txBox="1"/>
+          <p:nvPr/>
+        </p:nvSpPr>
+        <p:spPr>
+          <a:xfrm>
+            <a:off x="7452360" y="1691639"/>
+            <a:ext cx="3931920" cy="1143000"/>
+          </a:xfrm>
+          <a:prstGeom prst="rect">
+            <a:avLst/>
+          </a:prstGeom>
+          <a:noFill/>
+        </p:spPr>
+        <p:txBody>
+          <a:bodyPr wrap="square" anchor="t" lIns="0" rIns="0" tIns="0" bIns="0">
+            <a:spAutoFit/>
+          </a:bodyPr>
+          <a:lstStyle/>
           <a:p>
             <a:pPr algn="l">
               <a:lnSpc>
@@ -6445,27 +4685,127 @@
               </a:lnSpc>
             </a:pPr>
             <a:r>
-              <a:rPr sz="1400" b="1" i="0">
+              <a:rPr sz="1300" b="1" i="0">
+                <a:solidFill>
+                  <a:srgbClr val="1E2761"/>
+                </a:solidFill>
+                <a:latin typeface="Calibri"/>
+              </a:rPr>
+              <a:t>해결 → 전체 데이터의 sentiment를 별점에서 일괄 재계산</a:t>
+            </a:r>
+          </a:p>
+        </p:txBody>
+      </p:sp>
+      <p:sp>
+        <p:nvSpPr>
+          <p:cNvPr id="8" name="Rounded Rectangle 7"/>
+          <p:cNvSpPr/>
+          <p:nvPr/>
+        </p:nvSpPr>
+        <p:spPr>
+          <a:xfrm>
+            <a:off x="640080" y="3154680"/>
+            <a:ext cx="10881360" cy="1417320"/>
+          </a:xfrm>
+          <a:prstGeom prst="roundRect">
+            <a:avLst>
+              <a:gd name="adj" fmla="val 6000"/>
+            </a:avLst>
+          </a:prstGeom>
+          <a:solidFill>
+            <a:srgbClr val="F4F6FC"/>
+          </a:solidFill>
+          <a:ln>
+            <a:noFill/>
+          </a:ln>
+          <a:effectLst/>
+        </p:spPr>
+        <p:style>
+          <a:lnRef idx="1">
+            <a:schemeClr val="accent1"/>
+          </a:lnRef>
+          <a:fillRef idx="3">
+            <a:schemeClr val="accent1"/>
+          </a:fillRef>
+          <a:effectRef idx="2">
+            <a:schemeClr val="accent1"/>
+          </a:effectRef>
+          <a:fontRef idx="minor">
+            <a:schemeClr val="lt1"/>
+          </a:fontRef>
+        </p:style>
+        <p:txBody>
+          <a:bodyPr rtlCol="0" anchor="ctr"/>
+          <a:lstStyle/>
+          <a:p>
+            <a:pPr algn="ctr"/>
+          </a:p>
+        </p:txBody>
+      </p:sp>
+      <p:sp>
+        <p:nvSpPr>
+          <p:cNvPr id="9" name="Rounded Rectangle 8"/>
+          <p:cNvSpPr/>
+          <p:nvPr/>
+        </p:nvSpPr>
+        <p:spPr>
+          <a:xfrm>
+            <a:off x="868680" y="3355848"/>
+            <a:ext cx="2743200" cy="438912"/>
+          </a:xfrm>
+          <a:prstGeom prst="roundRect">
+            <a:avLst>
+              <a:gd name="adj" fmla="val 50000"/>
+            </a:avLst>
+          </a:prstGeom>
+          <a:solidFill>
+            <a:srgbClr val="F96167"/>
+          </a:solidFill>
+          <a:ln>
+            <a:noFill/>
+          </a:ln>
+          <a:effectLst/>
+        </p:spPr>
+        <p:style>
+          <a:lnRef idx="1">
+            <a:schemeClr val="accent1"/>
+          </a:lnRef>
+          <a:fillRef idx="3">
+            <a:schemeClr val="accent1"/>
+          </a:fillRef>
+          <a:effectRef idx="2">
+            <a:schemeClr val="accent1"/>
+          </a:effectRef>
+          <a:fontRef idx="minor">
+            <a:schemeClr val="lt1"/>
+          </a:fontRef>
+        </p:style>
+        <p:txBody>
+          <a:bodyPr rtlCol="0" anchor="ctr" wrap="none" lIns="45720" rIns="45720" tIns="0" bIns="0"/>
+          <a:lstStyle/>
+          <a:p>
+            <a:pPr algn="ctr"/>
+            <a:r>
+              <a:rPr sz="1300" b="1">
                 <a:solidFill>
                   <a:srgbClr val="FFFFFF"/>
                 </a:solidFill>
-                <a:latin typeface="Calibri"/>
-              </a:rPr>
-              <a:t>+ 중복 제거</a:t>
-            </a:r>
-          </a:p>
-        </p:txBody>
-      </p:sp>
-      <p:sp>
-        <p:nvSpPr>
-          <p:cNvPr id="22" name="TextBox 21"/>
+              </a:rPr>
+              <a:t>클래스 불균형</a:t>
+            </a:r>
+          </a:p>
+        </p:txBody>
+      </p:sp>
+      <p:sp>
+        <p:nvSpPr>
+          <p:cNvPr id="10" name="TextBox 9"/>
           <p:cNvSpPr txBox="1"/>
           <p:nvPr/>
         </p:nvSpPr>
         <p:spPr>
           <a:xfrm>
-            <a:off x="9052559" y="3246120"/>
-            <a:ext cx="2240280" cy="548640"/>
+            <a:off x="3794760" y="3291840"/>
+            <a:ext cx="3520440" cy="1143000"/>
           </a:xfrm>
           <a:prstGeom prst="rect">
             <a:avLst/>
@@ -6478,29 +4818,33 @@
           </a:bodyPr>
           <a:lstStyle/>
           <a:p>
-            <a:pPr algn="l"/>
-            <a:r>
-              <a:rPr sz="2000" b="1" i="0">
-                <a:solidFill>
-                  <a:srgbClr val="FFFFFF"/>
+            <a:pPr algn="l">
+              <a:lnSpc>
+                <a:spcPct val="125000"/>
+              </a:lnSpc>
+            </a:pPr>
+            <a:r>
+              <a:rPr sz="1300" b="0" i="0">
+                <a:solidFill>
+                  <a:srgbClr val="555A6E"/>
                 </a:solidFill>
                 <a:latin typeface="Calibri"/>
               </a:rPr>
-              <a:t>538,774건</a:t>
-            </a:r>
-          </a:p>
-        </p:txBody>
-      </p:sp>
-      <p:sp>
-        <p:nvSpPr>
-          <p:cNvPr id="23" name="TextBox 22"/>
+              <a:t>긍정 86.7% — 그대로 학습하면 다 긍정 찍어도 86% 정확도</a:t>
+            </a:r>
+          </a:p>
+        </p:txBody>
+      </p:sp>
+      <p:sp>
+        <p:nvSpPr>
+          <p:cNvPr id="11" name="TextBox 10"/>
           <p:cNvSpPr txBox="1"/>
           <p:nvPr/>
         </p:nvSpPr>
         <p:spPr>
           <a:xfrm>
-            <a:off x="640080" y="4297680"/>
-            <a:ext cx="5120640" cy="365760"/>
+            <a:off x="7452360" y="3291840"/>
+            <a:ext cx="3931920" cy="1143000"/>
           </a:xfrm>
           <a:prstGeom prst="rect">
             <a:avLst/>
@@ -6513,100 +4857,133 @@
           </a:bodyPr>
           <a:lstStyle/>
           <a:p>
-            <a:pPr algn="l"/>
-            <a:r>
-              <a:rPr sz="1600" b="1" i="0">
+            <a:pPr algn="l">
+              <a:lnSpc>
+                <a:spcPct val="125000"/>
+              </a:lnSpc>
+            </a:pPr>
+            <a:r>
+              <a:rPr sz="1300" b="1" i="0">
                 <a:solidFill>
                   <a:srgbClr val="1E2761"/>
                 </a:solidFill>
                 <a:latin typeface="Calibri"/>
               </a:rPr>
-              <a:t>데이터 장점</a:t>
-            </a:r>
-          </a:p>
-        </p:txBody>
-      </p:sp>
-      <p:sp>
-        <p:nvSpPr>
-          <p:cNvPr id="24" name="TextBox 23"/>
+              <a:t>해결 → 부정/중립 전량 + 긍정은 2배 규모로만 다운샘플링</a:t>
+            </a:r>
+          </a:p>
+        </p:txBody>
+      </p:sp>
+      <p:sp>
+        <p:nvSpPr>
+          <p:cNvPr id="12" name="Rounded Rectangle 11"/>
+          <p:cNvSpPr/>
+          <p:nvPr/>
+        </p:nvSpPr>
+        <p:spPr>
+          <a:xfrm>
+            <a:off x="640080" y="4754880"/>
+            <a:ext cx="10881360" cy="1417320"/>
+          </a:xfrm>
+          <a:prstGeom prst="roundRect">
+            <a:avLst>
+              <a:gd name="adj" fmla="val 6000"/>
+            </a:avLst>
+          </a:prstGeom>
+          <a:solidFill>
+            <a:srgbClr val="F4F6FC"/>
+          </a:solidFill>
+          <a:ln>
+            <a:noFill/>
+          </a:ln>
+          <a:effectLst/>
+        </p:spPr>
+        <p:style>
+          <a:lnRef idx="1">
+            <a:schemeClr val="accent1"/>
+          </a:lnRef>
+          <a:fillRef idx="3">
+            <a:schemeClr val="accent1"/>
+          </a:fillRef>
+          <a:effectRef idx="2">
+            <a:schemeClr val="accent1"/>
+          </a:effectRef>
+          <a:fontRef idx="minor">
+            <a:schemeClr val="lt1"/>
+          </a:fontRef>
+        </p:style>
+        <p:txBody>
+          <a:bodyPr rtlCol="0" anchor="ctr"/>
+          <a:lstStyle/>
+          <a:p>
+            <a:pPr algn="ctr"/>
+          </a:p>
+        </p:txBody>
+      </p:sp>
+      <p:sp>
+        <p:nvSpPr>
+          <p:cNvPr id="13" name="Rounded Rectangle 12"/>
+          <p:cNvSpPr/>
+          <p:nvPr/>
+        </p:nvSpPr>
+        <p:spPr>
+          <a:xfrm>
+            <a:off x="868680" y="4956048"/>
+            <a:ext cx="2743200" cy="438912"/>
+          </a:xfrm>
+          <a:prstGeom prst="roundRect">
+            <a:avLst>
+              <a:gd name="adj" fmla="val 50000"/>
+            </a:avLst>
+          </a:prstGeom>
+          <a:solidFill>
+            <a:srgbClr val="F96167"/>
+          </a:solidFill>
+          <a:ln>
+            <a:noFill/>
+          </a:ln>
+          <a:effectLst/>
+        </p:spPr>
+        <p:style>
+          <a:lnRef idx="1">
+            <a:schemeClr val="accent1"/>
+          </a:lnRef>
+          <a:fillRef idx="3">
+            <a:schemeClr val="accent1"/>
+          </a:fillRef>
+          <a:effectRef idx="2">
+            <a:schemeClr val="accent1"/>
+          </a:effectRef>
+          <a:fontRef idx="minor">
+            <a:schemeClr val="lt1"/>
+          </a:fontRef>
+        </p:style>
+        <p:txBody>
+          <a:bodyPr rtlCol="0" anchor="ctr" wrap="none" lIns="45720" rIns="45720" tIns="0" bIns="0"/>
+          <a:lstStyle/>
+          <a:p>
+            <a:pPr algn="ctr"/>
+            <a:r>
+              <a:rPr sz="1300" b="1">
+                <a:solidFill>
+                  <a:srgbClr val="FFFFFF"/>
+                </a:solidFill>
+              </a:rPr>
+              <a:t>불용어/형태소 미처리</a:t>
+            </a:r>
+          </a:p>
+        </p:txBody>
+      </p:sp>
+      <p:sp>
+        <p:nvSpPr>
+          <p:cNvPr id="14" name="TextBox 13"/>
           <p:cNvSpPr txBox="1"/>
           <p:nvPr/>
         </p:nvSpPr>
         <p:spPr>
           <a:xfrm>
-            <a:off x="640080" y="4754880"/>
-            <a:ext cx="5120640" cy="1645920"/>
-          </a:xfrm>
-          <a:prstGeom prst="rect">
-            <a:avLst/>
-          </a:prstGeom>
-          <a:noFill/>
-        </p:spPr>
-        <p:txBody>
-          <a:bodyPr wrap="square">
-            <a:spAutoFit/>
-          </a:bodyPr>
-          <a:lstStyle/>
-          <a:p>
-            <a:pPr>
-              <a:spcAft>
-                <a:spcPts val="800"/>
-              </a:spcAft>
-            </a:pPr>
-            <a:r>
-              <a:rPr sz="1350">
-                <a:solidFill>
-                  <a:srgbClr val="21295C"/>
-                </a:solidFill>
-                <a:latin typeface="Calibri"/>
-              </a:rPr>
-              <a:t>•  별점 기반 라벨이 이미 존재 → 별도 수작업 레이블링 불필요</a:t>
-            </a:r>
-          </a:p>
-          <a:p>
-            <a:pPr>
-              <a:spcAft>
-                <a:spcPts val="800"/>
-              </a:spcAft>
-            </a:pPr>
-            <a:r>
-              <a:rPr sz="1350">
-                <a:solidFill>
-                  <a:srgbClr val="21295C"/>
-                </a:solidFill>
-                <a:latin typeface="Calibri"/>
-              </a:rPr>
-              <a:t>•  화장품 도메인 특화, 2015~2026년 10년치 데이터</a:t>
-            </a:r>
-          </a:p>
-          <a:p>
-            <a:pPr>
-              <a:spcAft>
-                <a:spcPts val="800"/>
-              </a:spcAft>
-            </a:pPr>
-            <a:r>
-              <a:rPr sz="1350">
-                <a:solidFill>
-                  <a:srgbClr val="21295C"/>
-                </a:solidFill>
-                <a:latin typeface="Calibri"/>
-              </a:rPr>
-              <a:t>•  20개+ 카테고리로 비교 분석 용이</a:t>
-            </a:r>
-          </a:p>
-        </p:txBody>
-      </p:sp>
-      <p:sp>
-        <p:nvSpPr>
-          <p:cNvPr id="25" name="TextBox 24"/>
-          <p:cNvSpPr txBox="1"/>
-          <p:nvPr/>
-        </p:nvSpPr>
-        <p:spPr>
-          <a:xfrm>
-            <a:off x="6217920" y="4297680"/>
-            <a:ext cx="5394960" cy="365760"/>
+            <a:off x="3794760" y="4892040"/>
+            <a:ext cx="3520440" cy="1143000"/>
           </a:xfrm>
           <a:prstGeom prst="rect">
             <a:avLst/>
@@ -6619,37 +4996,62 @@
           </a:bodyPr>
           <a:lstStyle/>
           <a:p>
-            <a:pPr algn="l"/>
-            <a:r>
-              <a:rPr sz="1600" b="1" i="0">
+            <a:pPr algn="l">
+              <a:lnSpc>
+                <a:spcPct val="125000"/>
+              </a:lnSpc>
+            </a:pPr>
+            <a:r>
+              <a:rPr sz="1300" b="0" i="0">
+                <a:solidFill>
+                  <a:srgbClr val="555A6E"/>
+                </a:solidFill>
+                <a:latin typeface="Calibri"/>
+              </a:rPr>
+              <a:t>정규식으로만 잘라서 조사가 토큰에 섞임 ("좋아요"≠"좋아서")</a:t>
+            </a:r>
+          </a:p>
+        </p:txBody>
+      </p:sp>
+      <p:sp>
+        <p:nvSpPr>
+          <p:cNvPr id="15" name="TextBox 14"/>
+          <p:cNvSpPr txBox="1"/>
+          <p:nvPr/>
+        </p:nvSpPr>
+        <p:spPr>
+          <a:xfrm>
+            <a:off x="7452360" y="4892040"/>
+            <a:ext cx="3931920" cy="1143000"/>
+          </a:xfrm>
+          <a:prstGeom prst="rect">
+            <a:avLst/>
+          </a:prstGeom>
+          <a:noFill/>
+        </p:spPr>
+        <p:txBody>
+          <a:bodyPr wrap="square" anchor="t" lIns="0" rIns="0" tIns="0" bIns="0">
+            <a:spAutoFit/>
+          </a:bodyPr>
+          <a:lstStyle/>
+          <a:p>
+            <a:pPr algn="l">
+              <a:lnSpc>
+                <a:spcPct val="125000"/>
+              </a:lnSpc>
+            </a:pPr>
+            <a:r>
+              <a:rPr sz="1300" b="1" i="0">
                 <a:solidFill>
                   <a:srgbClr val="1E2761"/>
                 </a:solidFill>
                 <a:latin typeface="Calibri"/>
               </a:rPr>
-              <a:t>최종 분포</a:t>
-            </a:r>
-          </a:p>
-        </p:txBody>
-      </p:sp>
-      <p:graphicFrame>
-        <p:nvGraphicFramePr>
-          <p:cNvPr id="26" name="Chart 25"/>
-          <p:cNvGraphicFramePr>
-            <a:graphicFrameLocks noGrp="1"/>
-          </p:cNvGraphicFramePr>
-          <p:nvPr/>
-        </p:nvGraphicFramePr>
-        <p:xfrm>
-          <a:off x="6217920" y="4663440"/>
-          <a:ext cx="5394960" cy="1737360"/>
-        </p:xfrm>
-        <a:graphic>
-          <a:graphicData uri="http://schemas.openxmlformats.org/drawingml/2006/chart">
-            <c:chart xmlns:c="http://schemas.openxmlformats.org/drawingml/2006/chart" r:id="rId2"/>
-          </a:graphicData>
-        </a:graphic>
-      </p:graphicFrame>
+              <a:t>해결 → Okt 형태소분석 + 어간정규화 + 불용어 제거</a:t>
+            </a:r>
+          </a:p>
+        </p:txBody>
+      </p:sp>
     </p:spTree>
   </p:cSld>
   <p:clrMapOvr>
@@ -6736,117 +5138,106 @@
           <a:p>
             <a:pPr algn="l"/>
             <a:r>
-              <a:rPr sz="2800" b="1" i="0">
+              <a:rPr sz="2400" b="1" i="0">
                 <a:solidFill>
                   <a:srgbClr val="1E2761"/>
                 </a:solidFill>
                 <a:latin typeface="Georgia"/>
               </a:rPr>
-              <a:t>데이터 준비 — 가장 까다로웠던 단계</a:t>
-            </a:r>
-          </a:p>
-        </p:txBody>
-      </p:sp>
-      <p:sp>
-        <p:nvSpPr>
-          <p:cNvPr id="4" name="Rounded Rectangle 3"/>
-          <p:cNvSpPr/>
+              <a:t>AI 활용 &amp; 모델 — ML/DL/LSTM/Transformer 비교</a:t>
+            </a:r>
+          </a:p>
+        </p:txBody>
+      </p:sp>
+      <p:sp>
+        <p:nvSpPr>
+          <p:cNvPr id="4" name="TextBox 3"/>
+          <p:cNvSpPr txBox="1"/>
           <p:nvPr/>
         </p:nvSpPr>
         <p:spPr>
           <a:xfrm>
             <a:off x="640080" y="1371600"/>
-            <a:ext cx="10881360" cy="950976"/>
-          </a:xfrm>
-          <a:prstGeom prst="roundRect">
-            <a:avLst>
-              <a:gd name="adj" fmla="val 8000"/>
-            </a:avLst>
-          </a:prstGeom>
-          <a:solidFill>
-            <a:srgbClr val="F4F6FC"/>
-          </a:solidFill>
-          <a:ln>
-            <a:noFill/>
-          </a:ln>
-          <a:effectLst/>
-        </p:spPr>
-        <p:style>
-          <a:lnRef idx="1">
-            <a:schemeClr val="accent1"/>
-          </a:lnRef>
-          <a:fillRef idx="3">
-            <a:schemeClr val="accent1"/>
-          </a:fillRef>
-          <a:effectRef idx="2">
-            <a:schemeClr val="accent1"/>
-          </a:effectRef>
-          <a:fontRef idx="minor">
-            <a:schemeClr val="lt1"/>
-          </a:fontRef>
-        </p:style>
-        <p:txBody>
-          <a:bodyPr rtlCol="0" anchor="ctr"/>
-          <a:lstStyle/>
-          <a:p>
-            <a:pPr algn="ctr"/>
-          </a:p>
-        </p:txBody>
-      </p:sp>
-      <p:sp>
-        <p:nvSpPr>
-          <p:cNvPr id="5" name="Rounded Rectangle 4"/>
-          <p:cNvSpPr/>
+            <a:ext cx="10515600" cy="1554480"/>
+          </a:xfrm>
+          <a:prstGeom prst="rect">
+            <a:avLst/>
+          </a:prstGeom>
+          <a:noFill/>
+        </p:spPr>
+        <p:txBody>
+          <a:bodyPr wrap="square">
+            <a:spAutoFit/>
+          </a:bodyPr>
+          <a:lstStyle/>
+          <a:p>
+            <a:pPr>
+              <a:spcAft>
+                <a:spcPts val="800"/>
+              </a:spcAft>
+            </a:pPr>
+            <a:r>
+              <a:rPr sz="1450">
+                <a:solidFill>
+                  <a:srgbClr val="21295C"/>
+                </a:solidFill>
+                <a:latin typeface="Calibri"/>
+              </a:rPr>
+              <a:t>•  Claude Code와 페어 프로그래밍 — crosstab으로 라벨 불일치를 수치로 진단</a:t>
+            </a:r>
+          </a:p>
+          <a:p>
+            <a:pPr>
+              <a:spcAft>
+                <a:spcPts val="800"/>
+              </a:spcAft>
+            </a:pPr>
+            <a:r>
+              <a:rPr sz="1450">
+                <a:solidFill>
+                  <a:srgbClr val="21295C"/>
+                </a:solidFill>
+                <a:latin typeface="Calibri"/>
+              </a:rPr>
+              <a:t>•  환경 제약(Python 3.14, PyTorch 미설치) → numpy로 신경망 직접 구현,</a:t>
+            </a:r>
+          </a:p>
+          <a:p>
+            <a:pPr>
+              <a:spcAft>
+                <a:spcPts val="800"/>
+              </a:spcAft>
+            </a:pPr>
+            <a:r>
+              <a:rPr sz="1450">
+                <a:solidFill>
+                  <a:srgbClr val="21295C"/>
+                </a:solidFill>
+                <a:latin typeface="Calibri"/>
+              </a:rPr>
+              <a:t>•  이후 Python 3.11 별도 venv 구성해서 실제 LSTM·Transformer까지 검증</a:t>
+            </a:r>
+          </a:p>
+        </p:txBody>
+      </p:sp>
+      <p:graphicFrame>
+        <p:nvGraphicFramePr>
+          <p:cNvPr id="5" name="Chart 4"/>
+          <p:cNvGraphicFramePr>
+            <a:graphicFrameLocks noGrp="1"/>
+          </p:cNvGraphicFramePr>
           <p:nvPr/>
-        </p:nvSpPr>
-        <p:spPr>
-          <a:xfrm>
-            <a:off x="841248" y="1508760"/>
-            <a:ext cx="2423160" cy="384048"/>
-          </a:xfrm>
-          <a:prstGeom prst="roundRect">
-            <a:avLst>
-              <a:gd name="adj" fmla="val 50000"/>
-            </a:avLst>
-          </a:prstGeom>
-          <a:solidFill>
-            <a:srgbClr val="F96167"/>
-          </a:solidFill>
-          <a:ln>
-            <a:noFill/>
-          </a:ln>
-          <a:effectLst/>
-        </p:spPr>
-        <p:style>
-          <a:lnRef idx="1">
-            <a:schemeClr val="accent1"/>
-          </a:lnRef>
-          <a:fillRef idx="3">
-            <a:schemeClr val="accent1"/>
-          </a:fillRef>
-          <a:effectRef idx="2">
-            <a:schemeClr val="accent1"/>
-          </a:effectRef>
-          <a:fontRef idx="minor">
-            <a:schemeClr val="lt1"/>
-          </a:fontRef>
-        </p:style>
-        <p:txBody>
-          <a:bodyPr rtlCol="0" anchor="ctr" wrap="none" lIns="45720" rIns="45720" tIns="0" bIns="0"/>
-          <a:lstStyle/>
-          <a:p>
-            <a:pPr algn="ctr"/>
-            <a:r>
-              <a:rPr sz="1150" b="1">
-                <a:solidFill>
-                  <a:srgbClr val="FFFFFF"/>
-                </a:solidFill>
-              </a:rPr>
-              <a:t>스키마 불일치</a:t>
-            </a:r>
-          </a:p>
-        </p:txBody>
-      </p:sp>
+        </p:nvGraphicFramePr>
+        <p:xfrm>
+          <a:off x="640080" y="3017520"/>
+          <a:ext cx="6949440" cy="3383280"/>
+        </p:xfrm>
+        <a:graphic>
+          <a:graphicData uri="http://schemas.openxmlformats.org/drawingml/2006/chart">
+            <c:chart xmlns:c="http://schemas.openxmlformats.org/drawingml/2006/chart" r:id="rId2"/>
+          </a:graphicData>
+        </a:graphic>
+      </p:graphicFrame>
       <p:sp>
         <p:nvSpPr>
           <p:cNvPr id="6" name="TextBox 5"/>
@@ -6855,8 +5246,8 @@
         </p:nvSpPr>
         <p:spPr>
           <a:xfrm>
-            <a:off x="3429000" y="1444752"/>
-            <a:ext cx="3657600" cy="804672"/>
+            <a:off x="7863840" y="3108960"/>
+            <a:ext cx="3840480" cy="365760"/>
           </a:xfrm>
           <a:prstGeom prst="rect">
             <a:avLst/>
@@ -6869,19 +5260,15 @@
           </a:bodyPr>
           <a:lstStyle/>
           <a:p>
-            <a:pPr algn="l">
-              <a:lnSpc>
-                <a:spcPct val="115000"/>
-              </a:lnSpc>
-            </a:pPr>
-            <a:r>
-              <a:rPr sz="1150" b="0" i="0">
-                <a:solidFill>
-                  <a:srgbClr val="555A6E"/>
+            <a:pPr algn="l"/>
+            <a:r>
+              <a:rPr sz="1500" b="1" i="0">
+                <a:solidFill>
+                  <a:srgbClr val="1E2761"/>
                 </a:solidFill>
                 <a:latin typeface="Calibri"/>
               </a:rPr>
-              <a:t>쿠팡/무신사/올리브영 컬럼명이 전부 다름</a:t>
+              <a:t>결론</a:t>
             </a:r>
           </a:p>
         </p:txBody>
@@ -6894,8 +5281,8 @@
         </p:nvSpPr>
         <p:spPr>
           <a:xfrm>
-            <a:off x="7223760" y="1444752"/>
-            <a:ext cx="4160520" cy="804672"/>
+            <a:off x="7863840" y="3566160"/>
+            <a:ext cx="3840480" cy="2560320"/>
           </a:xfrm>
           <a:prstGeom prst="rect">
             <a:avLst/>
@@ -6903,736 +5290,42 @@
           <a:noFill/>
         </p:spPr>
         <p:txBody>
-          <a:bodyPr wrap="square" anchor="t" lIns="0" rIns="0" tIns="0" bIns="0">
+          <a:bodyPr wrap="square">
             <a:spAutoFit/>
           </a:bodyPr>
           <a:lstStyle/>
           <a:p>
-            <a:pPr algn="l">
-              <a:lnSpc>
-                <a:spcPct val="115000"/>
-              </a:lnSpc>
+            <a:pPr>
+              <a:spcAft>
+                <a:spcPts val="800"/>
+              </a:spcAft>
             </a:pPr>
             <a:r>
-              <a:rPr sz="1150" b="1" i="0">
-                <a:solidFill>
-                  <a:srgbClr val="1E2761"/>
+              <a:rPr sz="1250">
+                <a:solidFill>
+                  <a:srgbClr val="21295C"/>
                 </a:solidFill>
                 <a:latin typeface="Calibri"/>
               </a:rPr>
-              <a:t>해결 → 플랫폼별 로더로 공통 스키마 변환 후 병합</a:t>
-            </a:r>
-          </a:p>
-        </p:txBody>
-      </p:sp>
-      <p:sp>
-        <p:nvSpPr>
-          <p:cNvPr id="8" name="Rounded Rectangle 7"/>
-          <p:cNvSpPr/>
-          <p:nvPr/>
-        </p:nvSpPr>
-        <p:spPr>
-          <a:xfrm>
-            <a:off x="640080" y="2414015"/>
-            <a:ext cx="10881360" cy="950976"/>
-          </a:xfrm>
-          <a:prstGeom prst="roundRect">
-            <a:avLst>
-              <a:gd name="adj" fmla="val 8000"/>
-            </a:avLst>
-          </a:prstGeom>
-          <a:solidFill>
-            <a:srgbClr val="F4F6FC"/>
-          </a:solidFill>
-          <a:ln>
-            <a:noFill/>
-          </a:ln>
-          <a:effectLst/>
-        </p:spPr>
-        <p:style>
-          <a:lnRef idx="1">
-            <a:schemeClr val="accent1"/>
-          </a:lnRef>
-          <a:fillRef idx="3">
-            <a:schemeClr val="accent1"/>
-          </a:fillRef>
-          <a:effectRef idx="2">
-            <a:schemeClr val="accent1"/>
-          </a:effectRef>
-          <a:fontRef idx="minor">
-            <a:schemeClr val="lt1"/>
-          </a:fontRef>
-        </p:style>
-        <p:txBody>
-          <a:bodyPr rtlCol="0" anchor="ctr"/>
-          <a:lstStyle/>
-          <a:p>
-            <a:pPr algn="ctr"/>
-          </a:p>
-        </p:txBody>
-      </p:sp>
-      <p:sp>
-        <p:nvSpPr>
-          <p:cNvPr id="9" name="Rounded Rectangle 8"/>
-          <p:cNvSpPr/>
-          <p:nvPr/>
-        </p:nvSpPr>
-        <p:spPr>
-          <a:xfrm>
-            <a:off x="841248" y="2551175"/>
-            <a:ext cx="2423160" cy="384048"/>
-          </a:xfrm>
-          <a:prstGeom prst="roundRect">
-            <a:avLst>
-              <a:gd name="adj" fmla="val 50000"/>
-            </a:avLst>
-          </a:prstGeom>
-          <a:solidFill>
-            <a:srgbClr val="F96167"/>
-          </a:solidFill>
-          <a:ln>
-            <a:noFill/>
-          </a:ln>
-          <a:effectLst/>
-        </p:spPr>
-        <p:style>
-          <a:lnRef idx="1">
-            <a:schemeClr val="accent1"/>
-          </a:lnRef>
-          <a:fillRef idx="3">
-            <a:schemeClr val="accent1"/>
-          </a:fillRef>
-          <a:effectRef idx="2">
-            <a:schemeClr val="accent1"/>
-          </a:effectRef>
-          <a:fontRef idx="minor">
-            <a:schemeClr val="lt1"/>
-          </a:fontRef>
-        </p:style>
-        <p:txBody>
-          <a:bodyPr rtlCol="0" anchor="ctr" wrap="none" lIns="45720" rIns="45720" tIns="0" bIns="0"/>
-          <a:lstStyle/>
-          <a:p>
-            <a:pPr algn="ctr"/>
-            <a:r>
-              <a:rPr sz="1150" b="1">
-                <a:solidFill>
-                  <a:srgbClr val="FFFFFF"/>
-                </a:solidFill>
-              </a:rPr>
-              <a:t>라벨 기준 불일치 (핵심)</a:t>
-            </a:r>
-          </a:p>
-        </p:txBody>
-      </p:sp>
-      <p:sp>
-        <p:nvSpPr>
-          <p:cNvPr id="10" name="TextBox 9"/>
-          <p:cNvSpPr txBox="1"/>
-          <p:nvPr/>
-        </p:nvSpPr>
-        <p:spPr>
-          <a:xfrm>
-            <a:off x="3429000" y="2487168"/>
-            <a:ext cx="3657600" cy="804672"/>
-          </a:xfrm>
-          <a:prstGeom prst="rect">
-            <a:avLst/>
-          </a:prstGeom>
-          <a:noFill/>
-        </p:spPr>
-        <p:txBody>
-          <a:bodyPr wrap="square" anchor="t" lIns="0" rIns="0" tIns="0" bIns="0">
-            <a:spAutoFit/>
-          </a:bodyPr>
-          <a:lstStyle/>
-          <a:p>
-            <a:pPr algn="l">
-              <a:lnSpc>
-                <a:spcPct val="115000"/>
-              </a:lnSpc>
+              <a:t>•  KoELECTRA가 데이터 1/7만 쓰고도
+최고 accuracy → 사전학습 효과 확인</a:t>
+            </a:r>
+          </a:p>
+          <a:p>
+            <a:pPr>
+              <a:spcAft>
+                <a:spcPts val="800"/>
+              </a:spcAft>
             </a:pPr>
             <a:r>
-              <a:rPr sz="1150" b="0" i="0">
-                <a:solidFill>
-                  <a:srgbClr val="555A6E"/>
+              <a:rPr sz="1250">
+                <a:solidFill>
+                  <a:srgbClr val="21295C"/>
                 </a:solidFill>
                 <a:latin typeface="Calibri"/>
               </a:rPr>
-              <a:t>무신사 sentiment가 별점 아닌 텍스트분석 기반 → 5점 리뷰의 21%가 '부정'</a:t>
-            </a:r>
-          </a:p>
-        </p:txBody>
-      </p:sp>
-      <p:sp>
-        <p:nvSpPr>
-          <p:cNvPr id="11" name="TextBox 10"/>
-          <p:cNvSpPr txBox="1"/>
-          <p:nvPr/>
-        </p:nvSpPr>
-        <p:spPr>
-          <a:xfrm>
-            <a:off x="7223760" y="2487168"/>
-            <a:ext cx="4160520" cy="804672"/>
-          </a:xfrm>
-          <a:prstGeom prst="rect">
-            <a:avLst/>
-          </a:prstGeom>
-          <a:noFill/>
-        </p:spPr>
-        <p:txBody>
-          <a:bodyPr wrap="square" anchor="t" lIns="0" rIns="0" tIns="0" bIns="0">
-            <a:spAutoFit/>
-          </a:bodyPr>
-          <a:lstStyle/>
-          <a:p>
-            <a:pPr algn="l">
-              <a:lnSpc>
-                <a:spcPct val="115000"/>
-              </a:lnSpc>
-            </a:pPr>
-            <a:r>
-              <a:rPr sz="1150" b="1" i="0">
-                <a:solidFill>
-                  <a:srgbClr val="1E2761"/>
-                </a:solidFill>
-                <a:latin typeface="Calibri"/>
-              </a:rPr>
-              <a:t>해결 → 전체 데이터의 sentiment를 별점에서 일괄 재계산</a:t>
-            </a:r>
-          </a:p>
-        </p:txBody>
-      </p:sp>
-      <p:sp>
-        <p:nvSpPr>
-          <p:cNvPr id="12" name="Rounded Rectangle 11"/>
-          <p:cNvSpPr/>
-          <p:nvPr/>
-        </p:nvSpPr>
-        <p:spPr>
-          <a:xfrm>
-            <a:off x="640080" y="3456431"/>
-            <a:ext cx="10881360" cy="950976"/>
-          </a:xfrm>
-          <a:prstGeom prst="roundRect">
-            <a:avLst>
-              <a:gd name="adj" fmla="val 8000"/>
-            </a:avLst>
-          </a:prstGeom>
-          <a:solidFill>
-            <a:srgbClr val="F4F6FC"/>
-          </a:solidFill>
-          <a:ln>
-            <a:noFill/>
-          </a:ln>
-          <a:effectLst/>
-        </p:spPr>
-        <p:style>
-          <a:lnRef idx="1">
-            <a:schemeClr val="accent1"/>
-          </a:lnRef>
-          <a:fillRef idx="3">
-            <a:schemeClr val="accent1"/>
-          </a:fillRef>
-          <a:effectRef idx="2">
-            <a:schemeClr val="accent1"/>
-          </a:effectRef>
-          <a:fontRef idx="minor">
-            <a:schemeClr val="lt1"/>
-          </a:fontRef>
-        </p:style>
-        <p:txBody>
-          <a:bodyPr rtlCol="0" anchor="ctr"/>
-          <a:lstStyle/>
-          <a:p>
-            <a:pPr algn="ctr"/>
-          </a:p>
-        </p:txBody>
-      </p:sp>
-      <p:sp>
-        <p:nvSpPr>
-          <p:cNvPr id="13" name="Rounded Rectangle 12"/>
-          <p:cNvSpPr/>
-          <p:nvPr/>
-        </p:nvSpPr>
-        <p:spPr>
-          <a:xfrm>
-            <a:off x="841248" y="3593591"/>
-            <a:ext cx="2423160" cy="384048"/>
-          </a:xfrm>
-          <a:prstGeom prst="roundRect">
-            <a:avLst>
-              <a:gd name="adj" fmla="val 50000"/>
-            </a:avLst>
-          </a:prstGeom>
-          <a:solidFill>
-            <a:srgbClr val="F96167"/>
-          </a:solidFill>
-          <a:ln>
-            <a:noFill/>
-          </a:ln>
-          <a:effectLst/>
-        </p:spPr>
-        <p:style>
-          <a:lnRef idx="1">
-            <a:schemeClr val="accent1"/>
-          </a:lnRef>
-          <a:fillRef idx="3">
-            <a:schemeClr val="accent1"/>
-          </a:fillRef>
-          <a:effectRef idx="2">
-            <a:schemeClr val="accent1"/>
-          </a:effectRef>
-          <a:fontRef idx="minor">
-            <a:schemeClr val="lt1"/>
-          </a:fontRef>
-        </p:style>
-        <p:txBody>
-          <a:bodyPr rtlCol="0" anchor="ctr" wrap="none" lIns="45720" rIns="45720" tIns="0" bIns="0"/>
-          <a:lstStyle/>
-          <a:p>
-            <a:pPr algn="ctr"/>
-            <a:r>
-              <a:rPr sz="1150" b="1">
-                <a:solidFill>
-                  <a:srgbClr val="FFFFFF"/>
-                </a:solidFill>
-              </a:rPr>
-              <a:t>인코딩 깨짐</a:t>
-            </a:r>
-          </a:p>
-        </p:txBody>
-      </p:sp>
-      <p:sp>
-        <p:nvSpPr>
-          <p:cNvPr id="14" name="TextBox 13"/>
-          <p:cNvSpPr txBox="1"/>
-          <p:nvPr/>
-        </p:nvSpPr>
-        <p:spPr>
-          <a:xfrm>
-            <a:off x="3429000" y="3529583"/>
-            <a:ext cx="3657600" cy="804672"/>
-          </a:xfrm>
-          <a:prstGeom prst="rect">
-            <a:avLst/>
-          </a:prstGeom>
-          <a:noFill/>
-        </p:spPr>
-        <p:txBody>
-          <a:bodyPr wrap="square" anchor="t" lIns="0" rIns="0" tIns="0" bIns="0">
-            <a:spAutoFit/>
-          </a:bodyPr>
-          <a:lstStyle/>
-          <a:p>
-            <a:pPr algn="l">
-              <a:lnSpc>
-                <a:spcPct val="115000"/>
-              </a:lnSpc>
-            </a:pPr>
-            <a:r>
-              <a:rPr sz="1150" b="0" i="0">
-                <a:solidFill>
-                  <a:srgbClr val="555A6E"/>
-                </a:solidFill>
-                <a:latin typeface="Calibri"/>
-              </a:rPr>
-              <a:t>무신사 CSV 기본 인코딩으로 읽으면 한글 깨짐</a:t>
-            </a:r>
-          </a:p>
-        </p:txBody>
-      </p:sp>
-      <p:sp>
-        <p:nvSpPr>
-          <p:cNvPr id="15" name="TextBox 14"/>
-          <p:cNvSpPr txBox="1"/>
-          <p:nvPr/>
-        </p:nvSpPr>
-        <p:spPr>
-          <a:xfrm>
-            <a:off x="7223760" y="3529583"/>
-            <a:ext cx="4160520" cy="804672"/>
-          </a:xfrm>
-          <a:prstGeom prst="rect">
-            <a:avLst/>
-          </a:prstGeom>
-          <a:noFill/>
-        </p:spPr>
-        <p:txBody>
-          <a:bodyPr wrap="square" anchor="t" lIns="0" rIns="0" tIns="0" bIns="0">
-            <a:spAutoFit/>
-          </a:bodyPr>
-          <a:lstStyle/>
-          <a:p>
-            <a:pPr algn="l">
-              <a:lnSpc>
-                <a:spcPct val="115000"/>
-              </a:lnSpc>
-            </a:pPr>
-            <a:r>
-              <a:rPr sz="1150" b="1" i="0">
-                <a:solidFill>
-                  <a:srgbClr val="1E2761"/>
-                </a:solidFill>
-                <a:latin typeface="Calibri"/>
-              </a:rPr>
-              <a:t>해결 → encoding='utf-8-sig' 명시</a:t>
-            </a:r>
-          </a:p>
-        </p:txBody>
-      </p:sp>
-      <p:sp>
-        <p:nvSpPr>
-          <p:cNvPr id="16" name="Rounded Rectangle 15"/>
-          <p:cNvSpPr/>
-          <p:nvPr/>
-        </p:nvSpPr>
-        <p:spPr>
-          <a:xfrm>
-            <a:off x="640080" y="4498847"/>
-            <a:ext cx="10881360" cy="950976"/>
-          </a:xfrm>
-          <a:prstGeom prst="roundRect">
-            <a:avLst>
-              <a:gd name="adj" fmla="val 8000"/>
-            </a:avLst>
-          </a:prstGeom>
-          <a:solidFill>
-            <a:srgbClr val="F4F6FC"/>
-          </a:solidFill>
-          <a:ln>
-            <a:noFill/>
-          </a:ln>
-          <a:effectLst/>
-        </p:spPr>
-        <p:style>
-          <a:lnRef idx="1">
-            <a:schemeClr val="accent1"/>
-          </a:lnRef>
-          <a:fillRef idx="3">
-            <a:schemeClr val="accent1"/>
-          </a:fillRef>
-          <a:effectRef idx="2">
-            <a:schemeClr val="accent1"/>
-          </a:effectRef>
-          <a:fontRef idx="minor">
-            <a:schemeClr val="lt1"/>
-          </a:fontRef>
-        </p:style>
-        <p:txBody>
-          <a:bodyPr rtlCol="0" anchor="ctr"/>
-          <a:lstStyle/>
-          <a:p>
-            <a:pPr algn="ctr"/>
-          </a:p>
-        </p:txBody>
-      </p:sp>
-      <p:sp>
-        <p:nvSpPr>
-          <p:cNvPr id="17" name="Rounded Rectangle 16"/>
-          <p:cNvSpPr/>
-          <p:nvPr/>
-        </p:nvSpPr>
-        <p:spPr>
-          <a:xfrm>
-            <a:off x="841248" y="4636007"/>
-            <a:ext cx="2423160" cy="384048"/>
-          </a:xfrm>
-          <a:prstGeom prst="roundRect">
-            <a:avLst>
-              <a:gd name="adj" fmla="val 50000"/>
-            </a:avLst>
-          </a:prstGeom>
-          <a:solidFill>
-            <a:srgbClr val="F96167"/>
-          </a:solidFill>
-          <a:ln>
-            <a:noFill/>
-          </a:ln>
-          <a:effectLst/>
-        </p:spPr>
-        <p:style>
-          <a:lnRef idx="1">
-            <a:schemeClr val="accent1"/>
-          </a:lnRef>
-          <a:fillRef idx="3">
-            <a:schemeClr val="accent1"/>
-          </a:fillRef>
-          <a:effectRef idx="2">
-            <a:schemeClr val="accent1"/>
-          </a:effectRef>
-          <a:fontRef idx="minor">
-            <a:schemeClr val="lt1"/>
-          </a:fontRef>
-        </p:style>
-        <p:txBody>
-          <a:bodyPr rtlCol="0" anchor="ctr" wrap="none" lIns="45720" rIns="45720" tIns="0" bIns="0"/>
-          <a:lstStyle/>
-          <a:p>
-            <a:pPr algn="ctr"/>
-            <a:r>
-              <a:rPr sz="1150" b="1">
-                <a:solidFill>
-                  <a:srgbClr val="FFFFFF"/>
-                </a:solidFill>
-              </a:rPr>
-              <a:t>클래스 불균형</a:t>
-            </a:r>
-          </a:p>
-        </p:txBody>
-      </p:sp>
-      <p:sp>
-        <p:nvSpPr>
-          <p:cNvPr id="18" name="TextBox 17"/>
-          <p:cNvSpPr txBox="1"/>
-          <p:nvPr/>
-        </p:nvSpPr>
-        <p:spPr>
-          <a:xfrm>
-            <a:off x="3429000" y="4571999"/>
-            <a:ext cx="3657600" cy="804672"/>
-          </a:xfrm>
-          <a:prstGeom prst="rect">
-            <a:avLst/>
-          </a:prstGeom>
-          <a:noFill/>
-        </p:spPr>
-        <p:txBody>
-          <a:bodyPr wrap="square" anchor="t" lIns="0" rIns="0" tIns="0" bIns="0">
-            <a:spAutoFit/>
-          </a:bodyPr>
-          <a:lstStyle/>
-          <a:p>
-            <a:pPr algn="l">
-              <a:lnSpc>
-                <a:spcPct val="115000"/>
-              </a:lnSpc>
-            </a:pPr>
-            <a:r>
-              <a:rPr sz="1150" b="0" i="0">
-                <a:solidFill>
-                  <a:srgbClr val="555A6E"/>
-                </a:solidFill>
-                <a:latin typeface="Calibri"/>
-              </a:rPr>
-              <a:t>긍정 86.7% — 그대로 학습하면 다 긍정 찍어도 86%</a:t>
-            </a:r>
-          </a:p>
-        </p:txBody>
-      </p:sp>
-      <p:sp>
-        <p:nvSpPr>
-          <p:cNvPr id="19" name="TextBox 18"/>
-          <p:cNvSpPr txBox="1"/>
-          <p:nvPr/>
-        </p:nvSpPr>
-        <p:spPr>
-          <a:xfrm>
-            <a:off x="7223760" y="4571999"/>
-            <a:ext cx="4160520" cy="804672"/>
-          </a:xfrm>
-          <a:prstGeom prst="rect">
-            <a:avLst/>
-          </a:prstGeom>
-          <a:noFill/>
-        </p:spPr>
-        <p:txBody>
-          <a:bodyPr wrap="square" anchor="t" lIns="0" rIns="0" tIns="0" bIns="0">
-            <a:spAutoFit/>
-          </a:bodyPr>
-          <a:lstStyle/>
-          <a:p>
-            <a:pPr algn="l">
-              <a:lnSpc>
-                <a:spcPct val="115000"/>
-              </a:lnSpc>
-            </a:pPr>
-            <a:r>
-              <a:rPr sz="1150" b="1" i="0">
-                <a:solidFill>
-                  <a:srgbClr val="1E2761"/>
-                </a:solidFill>
-                <a:latin typeface="Calibri"/>
-              </a:rPr>
-              <a:t>해결 → 부정/중립 전량 + 긍정은 2배 규모로만 다운샘플링</a:t>
-            </a:r>
-          </a:p>
-        </p:txBody>
-      </p:sp>
-      <p:sp>
-        <p:nvSpPr>
-          <p:cNvPr id="20" name="Rounded Rectangle 19"/>
-          <p:cNvSpPr/>
-          <p:nvPr/>
-        </p:nvSpPr>
-        <p:spPr>
-          <a:xfrm>
-            <a:off x="640080" y="5541263"/>
-            <a:ext cx="10881360" cy="950976"/>
-          </a:xfrm>
-          <a:prstGeom prst="roundRect">
-            <a:avLst>
-              <a:gd name="adj" fmla="val 8000"/>
-            </a:avLst>
-          </a:prstGeom>
-          <a:solidFill>
-            <a:srgbClr val="F4F6FC"/>
-          </a:solidFill>
-          <a:ln>
-            <a:noFill/>
-          </a:ln>
-          <a:effectLst/>
-        </p:spPr>
-        <p:style>
-          <a:lnRef idx="1">
-            <a:schemeClr val="accent1"/>
-          </a:lnRef>
-          <a:fillRef idx="3">
-            <a:schemeClr val="accent1"/>
-          </a:fillRef>
-          <a:effectRef idx="2">
-            <a:schemeClr val="accent1"/>
-          </a:effectRef>
-          <a:fontRef idx="minor">
-            <a:schemeClr val="lt1"/>
-          </a:fontRef>
-        </p:style>
-        <p:txBody>
-          <a:bodyPr rtlCol="0" anchor="ctr"/>
-          <a:lstStyle/>
-          <a:p>
-            <a:pPr algn="ctr"/>
-          </a:p>
-        </p:txBody>
-      </p:sp>
-      <p:sp>
-        <p:nvSpPr>
-          <p:cNvPr id="21" name="Rounded Rectangle 20"/>
-          <p:cNvSpPr/>
-          <p:nvPr/>
-        </p:nvSpPr>
-        <p:spPr>
-          <a:xfrm>
-            <a:off x="841248" y="5678423"/>
-            <a:ext cx="2423160" cy="384048"/>
-          </a:xfrm>
-          <a:prstGeom prst="roundRect">
-            <a:avLst>
-              <a:gd name="adj" fmla="val 50000"/>
-            </a:avLst>
-          </a:prstGeom>
-          <a:solidFill>
-            <a:srgbClr val="F96167"/>
-          </a:solidFill>
-          <a:ln>
-            <a:noFill/>
-          </a:ln>
-          <a:effectLst/>
-        </p:spPr>
-        <p:style>
-          <a:lnRef idx="1">
-            <a:schemeClr val="accent1"/>
-          </a:lnRef>
-          <a:fillRef idx="3">
-            <a:schemeClr val="accent1"/>
-          </a:fillRef>
-          <a:effectRef idx="2">
-            <a:schemeClr val="accent1"/>
-          </a:effectRef>
-          <a:fontRef idx="minor">
-            <a:schemeClr val="lt1"/>
-          </a:fontRef>
-        </p:style>
-        <p:txBody>
-          <a:bodyPr rtlCol="0" anchor="ctr" wrap="none" lIns="45720" rIns="45720" tIns="0" bIns="0"/>
-          <a:lstStyle/>
-          <a:p>
-            <a:pPr algn="ctr"/>
-            <a:r>
-              <a:rPr sz="1150" b="1">
-                <a:solidFill>
-                  <a:srgbClr val="FFFFFF"/>
-                </a:solidFill>
-              </a:rPr>
-              <a:t>불용어/형태소 미처리</a:t>
-            </a:r>
-          </a:p>
-        </p:txBody>
-      </p:sp>
-      <p:sp>
-        <p:nvSpPr>
-          <p:cNvPr id="22" name="TextBox 21"/>
-          <p:cNvSpPr txBox="1"/>
-          <p:nvPr/>
-        </p:nvSpPr>
-        <p:spPr>
-          <a:xfrm>
-            <a:off x="3429000" y="5614415"/>
-            <a:ext cx="3657600" cy="804672"/>
-          </a:xfrm>
-          <a:prstGeom prst="rect">
-            <a:avLst/>
-          </a:prstGeom>
-          <a:noFill/>
-        </p:spPr>
-        <p:txBody>
-          <a:bodyPr wrap="square" anchor="t" lIns="0" rIns="0" tIns="0" bIns="0">
-            <a:spAutoFit/>
-          </a:bodyPr>
-          <a:lstStyle/>
-          <a:p>
-            <a:pPr algn="l">
-              <a:lnSpc>
-                <a:spcPct val="115000"/>
-              </a:lnSpc>
-            </a:pPr>
-            <a:r>
-              <a:rPr sz="1150" b="0" i="0">
-                <a:solidFill>
-                  <a:srgbClr val="555A6E"/>
-                </a:solidFill>
-                <a:latin typeface="Calibri"/>
-              </a:rPr>
-              <a:t>정규식으로만 잘라서 조사가 토큰에 섞임</a:t>
-            </a:r>
-          </a:p>
-        </p:txBody>
-      </p:sp>
-      <p:sp>
-        <p:nvSpPr>
-          <p:cNvPr id="23" name="TextBox 22"/>
-          <p:cNvSpPr txBox="1"/>
-          <p:nvPr/>
-        </p:nvSpPr>
-        <p:spPr>
-          <a:xfrm>
-            <a:off x="7223760" y="5614415"/>
-            <a:ext cx="4160520" cy="804672"/>
-          </a:xfrm>
-          <a:prstGeom prst="rect">
-            <a:avLst/>
-          </a:prstGeom>
-          <a:noFill/>
-        </p:spPr>
-        <p:txBody>
-          <a:bodyPr wrap="square" anchor="t" lIns="0" rIns="0" tIns="0" bIns="0">
-            <a:spAutoFit/>
-          </a:bodyPr>
-          <a:lstStyle/>
-          <a:p>
-            <a:pPr algn="l">
-              <a:lnSpc>
-                <a:spcPct val="115000"/>
-              </a:lnSpc>
-            </a:pPr>
-            <a:r>
-              <a:rPr sz="1150" b="1" i="0">
-                <a:solidFill>
-                  <a:srgbClr val="1E2761"/>
-                </a:solidFill>
-                <a:latin typeface="Calibri"/>
-              </a:rPr>
-              <a:t>해결 → Okt 형태소분석 + 어간정규화 + 불용어 제거</a:t>
+              <a:t>•  LSTM은 순서 정보 기대했으나 차이 없음
+→ 짧은 리뷰는 어휘 자체가 강한 신호</a:t>
             </a:r>
           </a:p>
         </p:txBody>
@@ -7723,118 +5416,31 @@
           <a:p>
             <a:pPr algn="l"/>
             <a:r>
-              <a:rPr sz="2800" b="1" i="0">
+              <a:rPr sz="2500" b="1" i="0">
                 <a:solidFill>
                   <a:srgbClr val="FFFFFF"/>
                 </a:solidFill>
                 <a:latin typeface="Georgia"/>
               </a:rPr>
-              <a:t>AI(Claude Code)로 어떻게 구현했나</a:t>
-            </a:r>
-          </a:p>
-        </p:txBody>
-      </p:sp>
-      <p:sp>
-        <p:nvSpPr>
-          <p:cNvPr id="4" name="TextBox 3"/>
-          <p:cNvSpPr txBox="1"/>
-          <p:nvPr/>
-        </p:nvSpPr>
-        <p:spPr>
-          <a:xfrm>
-            <a:off x="640080" y="1463040"/>
-            <a:ext cx="5577840" cy="3017520"/>
-          </a:xfrm>
-          <a:prstGeom prst="rect">
-            <a:avLst/>
-          </a:prstGeom>
-          <a:noFill/>
-        </p:spPr>
-        <p:txBody>
-          <a:bodyPr wrap="square">
-            <a:spAutoFit/>
-          </a:bodyPr>
-          <a:lstStyle/>
-          <a:p>
-            <a:pPr>
-              <a:spcAft>
-                <a:spcPts val="800"/>
-              </a:spcAft>
-            </a:pPr>
-            <a:r>
-              <a:rPr sz="1550">
-                <a:solidFill>
-                  <a:srgbClr val="FFFFFF"/>
-                </a:solidFill>
-                <a:latin typeface="Calibri"/>
-              </a:rPr>
-              <a:t>•  전처리·모델·Streamlit 앱 코드를 페어 프로그래밍 방식으로 작성</a:t>
-            </a:r>
-          </a:p>
-          <a:p>
-            <a:pPr>
-              <a:spcAft>
-                <a:spcPts val="800"/>
-              </a:spcAft>
-            </a:pPr>
-            <a:r>
-              <a:rPr sz="1550">
-                <a:solidFill>
-                  <a:srgbClr val="FFFFFF"/>
-                </a:solidFill>
-                <a:latin typeface="Calibri"/>
-              </a:rPr>
-              <a:t>•  라벨 불일치를 "느낌"이 아니라 crosstab 코드를 직접 돌려 수치로 진단</a:t>
-            </a:r>
-          </a:p>
-          <a:p>
-            <a:pPr>
-              <a:spcAft>
-                <a:spcPts val="800"/>
-              </a:spcAft>
-            </a:pPr>
-            <a:r>
-              <a:rPr sz="1550">
-                <a:solidFill>
-                  <a:srgbClr val="FFFFFF"/>
-                </a:solidFill>
-                <a:latin typeface="Calibri"/>
-              </a:rPr>
-              <a:t>•  막힐 때마다(PyTorch 미설치 등) 대안을 같이 설계하고 바로 실행</a:t>
-            </a:r>
-          </a:p>
-          <a:p>
-            <a:pPr>
-              <a:spcAft>
-                <a:spcPts val="800"/>
-              </a:spcAft>
-            </a:pPr>
-            <a:r>
-              <a:rPr sz="1550">
-                <a:solidFill>
-                  <a:srgbClr val="FFFFFF"/>
-                </a:solidFill>
-                <a:latin typeface="Calibri"/>
-              </a:rPr>
-              <a:t>•  모델을 만들고 끝내지 않고, 실제 분포로 재평가해서 숨은 문제를 찾아냄</a:t>
-            </a:r>
-          </a:p>
-        </p:txBody>
-      </p:sp>
-      <p:sp>
-        <p:nvSpPr>
-          <p:cNvPr id="5" name="Rounded Rectangle 4"/>
+              <a:t>모델 보정 &amp; "실용성 없다" 피드백 반영</a:t>
+            </a:r>
+          </a:p>
+        </p:txBody>
+      </p:sp>
+      <p:sp>
+        <p:nvSpPr>
+          <p:cNvPr id="4" name="Rounded Rectangle 3"/>
           <p:cNvSpPr/>
           <p:nvPr/>
         </p:nvSpPr>
         <p:spPr>
           <a:xfrm>
-            <a:off x="6492240" y="1371600"/>
-            <a:ext cx="5120640" cy="4846320"/>
+            <a:off x="640080" y="1371600"/>
+            <a:ext cx="5303520" cy="4846320"/>
           </a:xfrm>
           <a:prstGeom prst="roundRect">
             <a:avLst>
-              <a:gd name="adj" fmla="val 4000"/>
+              <a:gd name="adj" fmla="val 5000"/>
             </a:avLst>
           </a:prstGeom>
           <a:solidFill>
@@ -7869,49 +5475,49 @@
       </p:sp>
       <p:sp>
         <p:nvSpPr>
+          <p:cNvPr id="5" name="TextBox 4"/>
+          <p:cNvSpPr txBox="1"/>
+          <p:nvPr/>
+        </p:nvSpPr>
+        <p:spPr>
+          <a:xfrm>
+            <a:off x="914400" y="1645920"/>
+            <a:ext cx="4663440" cy="457200"/>
+          </a:xfrm>
+          <a:prstGeom prst="rect">
+            <a:avLst/>
+          </a:prstGeom>
+          <a:noFill/>
+        </p:spPr>
+        <p:txBody>
+          <a:bodyPr wrap="square" anchor="t" lIns="0" rIns="0" tIns="0" bIns="0">
+            <a:spAutoFit/>
+          </a:bodyPr>
+          <a:lstStyle/>
+          <a:p>
+            <a:pPr algn="l"/>
+            <a:r>
+              <a:rPr sz="1600" b="1" i="0">
+                <a:solidFill>
+                  <a:srgbClr val="F96167"/>
+                </a:solidFill>
+                <a:latin typeface="Calibri"/>
+              </a:rPr>
+              <a:t>모델 문제 발견 → 보정</a:t>
+            </a:r>
+          </a:p>
+        </p:txBody>
+      </p:sp>
+      <p:sp>
+        <p:nvSpPr>
           <p:cNvPr id="6" name="TextBox 5"/>
           <p:cNvSpPr txBox="1"/>
           <p:nvPr/>
         </p:nvSpPr>
         <p:spPr>
           <a:xfrm>
-            <a:off x="6858000" y="1645920"/>
-            <a:ext cx="4389120" cy="548640"/>
-          </a:xfrm>
-          <a:prstGeom prst="rect">
-            <a:avLst/>
-          </a:prstGeom>
-          <a:noFill/>
-        </p:spPr>
-        <p:txBody>
-          <a:bodyPr wrap="square" anchor="t" lIns="0" rIns="0" tIns="0" bIns="0">
-            <a:spAutoFit/>
-          </a:bodyPr>
-          <a:lstStyle/>
-          <a:p>
-            <a:pPr algn="l"/>
-            <a:r>
-              <a:rPr sz="1600" b="1" i="0">
-                <a:solidFill>
-                  <a:srgbClr val="F96167"/>
-                </a:solidFill>
-                <a:latin typeface="Calibri"/>
-              </a:rPr>
-              <a:t>예상치 못한 벽: PyTorch 설치 실패</a:t>
-            </a:r>
-          </a:p>
-        </p:txBody>
-      </p:sp>
-      <p:sp>
-        <p:nvSpPr>
-          <p:cNvPr id="7" name="TextBox 6"/>
-          <p:cNvSpPr txBox="1"/>
-          <p:nvPr/>
-        </p:nvSpPr>
-        <p:spPr>
-          <a:xfrm>
-            <a:off x="6858000" y="2286000"/>
-            <a:ext cx="4389120" cy="3657600"/>
+            <a:off x="914400" y="2194560"/>
+            <a:ext cx="4663440" cy="3657600"/>
           </a:xfrm>
           <a:prstGeom prst="rect">
             <a:avLst/>
@@ -7930,13 +5536,13 @@
               </a:lnSpc>
             </a:pPr>
             <a:r>
-              <a:rPr sz="1350" b="0" i="0">
+              <a:rPr sz="1400" b="0" i="0">
                 <a:solidFill>
                   <a:srgbClr val="FFFFFF"/>
                 </a:solidFill>
                 <a:latin typeface="Calibri"/>
               </a:rPr>
-              <a:t>환경의 Python이 3.14라서 PyTorch/TensorFlow</a:t>
+              <a:t>학습셋과 실제 운영 비율이 달라</a:t>
             </a:r>
           </a:p>
           <a:p>
@@ -7946,13 +5552,13 @@
               </a:lnSpc>
             </a:pPr>
             <a:r>
-              <a:rPr sz="1350" b="0" i="0">
+              <a:rPr sz="1400" b="0" i="0">
                 <a:solidFill>
                   <a:srgbClr val="FFFFFF"/>
                 </a:solidFill>
                 <a:latin typeface="Calibri"/>
               </a:rPr>
-              <a:t>휠이 아직 배포되지 않음</a:t>
+              <a:t>neutral precision이 0.20까지 하락</a:t>
             </a:r>
           </a:p>
           <a:p>
@@ -7962,13 +5568,13 @@
               </a:lnSpc>
             </a:pPr>
             <a:r>
-              <a:rPr sz="1350" b="0" i="0">
+              <a:rPr sz="1400" b="0" i="0">
                 <a:solidFill>
                   <a:srgbClr val="FFFFFF"/>
                 </a:solidFill>
                 <a:latin typeface="Calibri"/>
               </a:rPr>
-              <a:t>→ pip install torch: No matching distribution</a:t>
+              <a:t>(label shift)</a:t>
             </a:r>
           </a:p>
           <a:p>
@@ -7978,7 +5584,7 @@
               </a:lnSpc>
             </a:pPr>
             <a:r>
-              <a:rPr sz="1350" b="0" i="0">
+              <a:rPr sz="1400" b="0" i="0">
                 <a:solidFill>
                   <a:srgbClr val="FFFFFF"/>
                 </a:solidFill>
@@ -7994,13 +5600,13 @@
               </a:lnSpc>
             </a:pPr>
             <a:r>
-              <a:rPr sz="1350" b="0" i="0">
+              <a:rPr sz="1400" b="0" i="0">
                 <a:solidFill>
                   <a:srgbClr val="FFFFFF"/>
                 </a:solidFill>
                 <a:latin typeface="Calibri"/>
               </a:rPr>
-              <a:t>1단계 해결: numpy로 신경망 직접 구현</a:t>
+              <a:t>→ 추론 단계에서 확률 보정 추가</a:t>
             </a:r>
           </a:p>
           <a:p>
@@ -8010,13 +5616,13 @@
               </a:lnSpc>
             </a:pPr>
             <a:r>
-              <a:rPr sz="1350" b="0" i="0">
+              <a:rPr sz="1400" b="0" i="0">
                 <a:solidFill>
                   <a:srgbClr val="FFFFFF"/>
                 </a:solidFill>
                 <a:latin typeface="Calibri"/>
               </a:rPr>
-              <a:t>2단계 해결: winget으로 Python 3.11을 따로</a:t>
+              <a:t>(재학습 없이)</a:t>
             </a:r>
           </a:p>
           <a:p>
@@ -8026,13 +5632,13 @@
               </a:lnSpc>
             </a:pPr>
             <a:r>
-              <a:rPr sz="1350" b="0" i="0">
+              <a:rPr sz="1400" b="0" i="0">
                 <a:solidFill>
                   <a:srgbClr val="FFFFFF"/>
                 </a:solidFill>
                 <a:latin typeface="Calibri"/>
               </a:rPr>
-              <a:t>설치해 별도 venv 구성 → 실제 PyTorch</a:t>
+              <a:t/>
             </a:r>
           </a:p>
           <a:p>
@@ -8042,13 +5648,261 @@
               </a:lnSpc>
             </a:pPr>
             <a:r>
-              <a:rPr sz="1350" b="0" i="0">
+              <a:rPr sz="1400" b="0" i="0">
                 <a:solidFill>
                   <a:srgbClr val="FFFFFF"/>
                 </a:solidFill>
                 <a:latin typeface="Calibri"/>
               </a:rPr>
-              <a:t>LSTM/Transformer까지 검증</a:t>
+              <a:t>ML accuracy: 0.806 → 0.909</a:t>
+            </a:r>
+          </a:p>
+          <a:p>
+            <a:pPr algn="l">
+              <a:lnSpc>
+                <a:spcPct val="140000"/>
+              </a:lnSpc>
+            </a:pPr>
+            <a:r>
+              <a:rPr sz="1400" b="0" i="0">
+                <a:solidFill>
+                  <a:srgbClr val="FFFFFF"/>
+                </a:solidFill>
+                <a:latin typeface="Calibri"/>
+              </a:rPr>
+              <a:t>DL accuracy: 0.890 → 0.920</a:t>
+            </a:r>
+          </a:p>
+        </p:txBody>
+      </p:sp>
+      <p:sp>
+        <p:nvSpPr>
+          <p:cNvPr id="7" name="Rounded Rectangle 6"/>
+          <p:cNvSpPr/>
+          <p:nvPr/>
+        </p:nvSpPr>
+        <p:spPr>
+          <a:xfrm>
+            <a:off x="6217920" y="1371600"/>
+            <a:ext cx="5303520" cy="4846320"/>
+          </a:xfrm>
+          <a:prstGeom prst="roundRect">
+            <a:avLst>
+              <a:gd name="adj" fmla="val 5000"/>
+            </a:avLst>
+          </a:prstGeom>
+          <a:solidFill>
+            <a:srgbClr val="F96167"/>
+          </a:solidFill>
+          <a:ln>
+            <a:noFill/>
+          </a:ln>
+          <a:effectLst/>
+        </p:spPr>
+        <p:style>
+          <a:lnRef idx="1">
+            <a:schemeClr val="accent1"/>
+          </a:lnRef>
+          <a:fillRef idx="3">
+            <a:schemeClr val="accent1"/>
+          </a:fillRef>
+          <a:effectRef idx="2">
+            <a:schemeClr val="accent1"/>
+          </a:effectRef>
+          <a:fontRef idx="minor">
+            <a:schemeClr val="lt1"/>
+          </a:fontRef>
+        </p:style>
+        <p:txBody>
+          <a:bodyPr rtlCol="0" anchor="ctr"/>
+          <a:lstStyle/>
+          <a:p>
+            <a:pPr algn="ctr"/>
+          </a:p>
+        </p:txBody>
+      </p:sp>
+      <p:sp>
+        <p:nvSpPr>
+          <p:cNvPr id="8" name="TextBox 7"/>
+          <p:cNvSpPr txBox="1"/>
+          <p:nvPr/>
+        </p:nvSpPr>
+        <p:spPr>
+          <a:xfrm>
+            <a:off x="6492240" y="1645920"/>
+            <a:ext cx="4754880" cy="640080"/>
+          </a:xfrm>
+          <a:prstGeom prst="rect">
+            <a:avLst/>
+          </a:prstGeom>
+          <a:noFill/>
+        </p:spPr>
+        <p:txBody>
+          <a:bodyPr wrap="square" anchor="t" lIns="0" rIns="0" tIns="0" bIns="0">
+            <a:spAutoFit/>
+          </a:bodyPr>
+          <a:lstStyle/>
+          <a:p>
+            <a:pPr algn="l"/>
+            <a:r>
+              <a:rPr sz="1600" b="1" i="0">
+                <a:solidFill>
+                  <a:srgbClr val="FFFFFF"/>
+                </a:solidFill>
+                <a:latin typeface="Calibri"/>
+              </a:rPr>
+              <a:t>서비스 전환: 텍스트 데모 → 상품 리포트</a:t>
+            </a:r>
+          </a:p>
+        </p:txBody>
+      </p:sp>
+      <p:sp>
+        <p:nvSpPr>
+          <p:cNvPr id="9" name="TextBox 8"/>
+          <p:cNvSpPr txBox="1"/>
+          <p:nvPr/>
+        </p:nvSpPr>
+        <p:spPr>
+          <a:xfrm>
+            <a:off x="6492240" y="2286000"/>
+            <a:ext cx="4754880" cy="3657600"/>
+          </a:xfrm>
+          <a:prstGeom prst="rect">
+            <a:avLst/>
+          </a:prstGeom>
+          <a:noFill/>
+        </p:spPr>
+        <p:txBody>
+          <a:bodyPr wrap="square" anchor="t" lIns="0" rIns="0" tIns="0" bIns="0">
+            <a:spAutoFit/>
+          </a:bodyPr>
+          <a:lstStyle/>
+          <a:p>
+            <a:pPr algn="l">
+              <a:lnSpc>
+                <a:spcPct val="140000"/>
+              </a:lnSpc>
+            </a:pPr>
+            <a:r>
+              <a:rPr sz="1400" b="0" i="0">
+                <a:solidFill>
+                  <a:srgbClr val="FFFFFF"/>
+                </a:solidFill>
+                <a:latin typeface="Calibri"/>
+              </a:rPr>
+              <a:t>기존: 리뷰를 직접 타이핑해야 하는 데모</a:t>
+            </a:r>
+          </a:p>
+          <a:p>
+            <a:pPr algn="l">
+              <a:lnSpc>
+                <a:spcPct val="140000"/>
+              </a:lnSpc>
+            </a:pPr>
+            <a:r>
+              <a:rPr sz="1400" b="0" i="0">
+                <a:solidFill>
+                  <a:srgbClr val="FFFFFF"/>
+                </a:solidFill>
+                <a:latin typeface="Calibri"/>
+              </a:rPr>
+              <a:t>→ 실용성 없다는 피드백</a:t>
+            </a:r>
+          </a:p>
+          <a:p>
+            <a:pPr algn="l">
+              <a:lnSpc>
+                <a:spcPct val="140000"/>
+              </a:lnSpc>
+            </a:pPr>
+            <a:r>
+              <a:rPr sz="1400" b="0" i="0">
+                <a:solidFill>
+                  <a:srgbClr val="FFFFFF"/>
+                </a:solidFill>
+                <a:latin typeface="Calibri"/>
+              </a:rPr>
+              <a:t/>
+            </a:r>
+          </a:p>
+          <a:p>
+            <a:pPr algn="l">
+              <a:lnSpc>
+                <a:spcPct val="140000"/>
+              </a:lnSpc>
+            </a:pPr>
+            <a:r>
+              <a:rPr sz="1400" b="0" i="0">
+                <a:solidFill>
+                  <a:srgbClr val="FFFFFF"/>
+                </a:solidFill>
+                <a:latin typeface="Calibri"/>
+              </a:rPr>
+              <a:t>전환: 상품 검색 → 속성별(8개) 장단점</a:t>
+            </a:r>
+          </a:p>
+          <a:p>
+            <a:pPr algn="l">
+              <a:lnSpc>
+                <a:spcPct val="140000"/>
+              </a:lnSpc>
+            </a:pPr>
+            <a:r>
+              <a:rPr sz="1400" b="0" i="0">
+                <a:solidFill>
+                  <a:srgbClr val="FFFFFF"/>
+                </a:solidFill>
+                <a:latin typeface="Calibri"/>
+              </a:rPr>
+              <a:t/>
+            </a:r>
+          </a:p>
+          <a:p>
+            <a:pPr algn="l">
+              <a:lnSpc>
+                <a:spcPct val="140000"/>
+              </a:lnSpc>
+            </a:pPr>
+            <a:r>
+              <a:rPr sz="1400" b="0" i="0">
+                <a:solidFill>
+                  <a:srgbClr val="FFFFFF"/>
+                </a:solidFill>
+                <a:latin typeface="Calibri"/>
+              </a:rPr>
+              <a:t>예시 — 어떤 토너 평점 4.9/5인데</a:t>
+            </a:r>
+          </a:p>
+          <a:p>
+            <a:pPr algn="l">
+              <a:lnSpc>
+                <a:spcPct val="140000"/>
+              </a:lnSpc>
+            </a:pPr>
+            <a:r>
+              <a:rPr sz="1400" b="0" i="0">
+                <a:solidFill>
+                  <a:srgbClr val="FFFFFF"/>
+                </a:solidFill>
+                <a:latin typeface="Calibri"/>
+              </a:rPr>
+              <a:t>트러블/자극 속성만 보면 부정 67%</a:t>
+            </a:r>
+          </a:p>
+          <a:p>
+            <a:pPr algn="l">
+              <a:lnSpc>
+                <a:spcPct val="140000"/>
+              </a:lnSpc>
+            </a:pPr>
+            <a:r>
+              <a:rPr sz="1400" b="0" i="0">
+                <a:solidFill>
+                  <a:srgbClr val="FFFFFF"/>
+                </a:solidFill>
+                <a:latin typeface="Calibri"/>
+              </a:rPr>
+              <a:t>→ 평점만 봐서는 알 수 없는 정보</a:t>
             </a:r>
           </a:p>
         </p:txBody>
@@ -8139,13 +5993,13 @@
           <a:p>
             <a:pPr algn="l"/>
             <a:r>
-              <a:rPr sz="2600" b="1" i="0">
+              <a:rPr sz="3000" b="1" i="0">
                 <a:solidFill>
                   <a:srgbClr val="1E2761"/>
                 </a:solidFill>
                 <a:latin typeface="Georgia"/>
               </a:rPr>
-              <a:t>DL 모델 — numpy로 직접 구현한 신경망</a:t>
+              <a:t>서비스 구성 &amp; 마무리</a:t>
             </a:r>
           </a:p>
         </p:txBody>
@@ -8158,8 +6012,8 @@
         </p:nvSpPr>
         <p:spPr>
           <a:xfrm>
-            <a:off x="822960" y="1463040"/>
-            <a:ext cx="2331720" cy="1463040"/>
+            <a:off x="640080" y="1463040"/>
+            <a:ext cx="3520440" cy="1828800"/>
           </a:xfrm>
           <a:prstGeom prst="roundRect">
             <a:avLst>
@@ -8167,7 +6021,7 @@
             </a:avLst>
           </a:prstGeom>
           <a:solidFill>
-            <a:srgbClr val="CADCFC"/>
+            <a:srgbClr val="F96167"/>
           </a:solidFill>
           <a:ln>
             <a:noFill/>
@@ -8189,97 +6043,113 @@
           </a:fontRef>
         </p:style>
         <p:txBody>
-          <a:bodyPr rtlCol="0" anchor="ctr" wrap="square"/>
+          <a:bodyPr rtlCol="0" anchor="ctr"/>
           <a:lstStyle/>
           <a:p>
             <a:pPr algn="ctr"/>
-            <a:r>
-              <a:rPr sz="1300" b="1">
-                <a:solidFill>
-                  <a:srgbClr val="1E2761"/>
-                </a:solidFill>
-              </a:rPr>
-              <a:t>입력</a:t>
-            </a:r>
-          </a:p>
-          <a:p>
-            <a:pPr algn="ctr"/>
-            <a:r>
-              <a:rPr sz="1300" b="1">
-                <a:solidFill>
-                  <a:srgbClr val="1E2761"/>
-                </a:solidFill>
-              </a:rPr>
-              <a:t>TF-IDF(형태소)</a:t>
-            </a:r>
-          </a:p>
-          <a:p>
-            <a:pPr algn="ctr"/>
-            <a:r>
-              <a:rPr sz="1300" b="1">
-                <a:solidFill>
-                  <a:srgbClr val="1E2761"/>
-                </a:solidFill>
-              </a:rPr>
-              <a:t>15,000차원</a:t>
-            </a:r>
-          </a:p>
-        </p:txBody>
-      </p:sp>
-      <p:sp>
-        <p:nvSpPr>
-          <p:cNvPr id="5" name="Right Arrow 4"/>
+          </a:p>
+        </p:txBody>
+      </p:sp>
+      <p:sp>
+        <p:nvSpPr>
+          <p:cNvPr id="5" name="TextBox 4"/>
+          <p:cNvSpPr txBox="1"/>
+          <p:nvPr/>
+        </p:nvSpPr>
+        <p:spPr>
+          <a:xfrm>
+            <a:off x="868680" y="1664208"/>
+            <a:ext cx="3063240" cy="457200"/>
+          </a:xfrm>
+          <a:prstGeom prst="rect">
+            <a:avLst/>
+          </a:prstGeom>
+          <a:noFill/>
+        </p:spPr>
+        <p:txBody>
+          <a:bodyPr wrap="square" anchor="t" lIns="0" rIns="0" tIns="0" bIns="0">
+            <a:spAutoFit/>
+          </a:bodyPr>
+          <a:lstStyle/>
+          <a:p>
+            <a:pPr algn="l"/>
+            <a:r>
+              <a:rPr sz="1450" b="1" i="0">
+                <a:solidFill>
+                  <a:srgbClr val="FFFFFF"/>
+                </a:solidFill>
+                <a:latin typeface="Calibri"/>
+              </a:rPr>
+              <a:t>🛍️ 상품 리포트</a:t>
+            </a:r>
+          </a:p>
+        </p:txBody>
+      </p:sp>
+      <p:sp>
+        <p:nvSpPr>
+          <p:cNvPr id="6" name="TextBox 5"/>
+          <p:cNvSpPr txBox="1"/>
+          <p:nvPr/>
+        </p:nvSpPr>
+        <p:spPr>
+          <a:xfrm>
+            <a:off x="868680" y="2148840"/>
+            <a:ext cx="3063240" cy="1005840"/>
+          </a:xfrm>
+          <a:prstGeom prst="rect">
+            <a:avLst/>
+          </a:prstGeom>
+          <a:noFill/>
+        </p:spPr>
+        <p:txBody>
+          <a:bodyPr wrap="square" anchor="t" lIns="0" rIns="0" tIns="0" bIns="0">
+            <a:spAutoFit/>
+          </a:bodyPr>
+          <a:lstStyle/>
+          <a:p>
+            <a:pPr algn="l">
+              <a:lnSpc>
+                <a:spcPct val="130000"/>
+              </a:lnSpc>
+            </a:pPr>
+            <a:r>
+              <a:rPr sz="1200" b="0" i="0">
+                <a:solidFill>
+                  <a:srgbClr val="CADCFC"/>
+                </a:solidFill>
+                <a:latin typeface="Calibri"/>
+              </a:rPr>
+              <a:t>상품 검색 → 속성별 긍정비율</a:t>
+            </a:r>
+          </a:p>
+          <a:p>
+            <a:pPr algn="l">
+              <a:lnSpc>
+                <a:spcPct val="130000"/>
+              </a:lnSpc>
+            </a:pPr>
+            <a:r>
+              <a:rPr sz="1200" b="0" i="0">
+                <a:solidFill>
+                  <a:srgbClr val="CADCFC"/>
+                </a:solidFill>
+                <a:latin typeface="Calibri"/>
+              </a:rPr>
+              <a:t>+ 대표 긍정/부정 리뷰</a:t>
+            </a:r>
+          </a:p>
+        </p:txBody>
+      </p:sp>
+      <p:sp>
+        <p:nvSpPr>
+          <p:cNvPr id="7" name="Rounded Rectangle 6"/>
           <p:cNvSpPr/>
           <p:nvPr/>
         </p:nvSpPr>
         <p:spPr>
           <a:xfrm>
-            <a:off x="3172968" y="2084832"/>
-            <a:ext cx="329184" cy="219456"/>
-          </a:xfrm>
-          <a:prstGeom prst="rightArrow">
-            <a:avLst/>
-          </a:prstGeom>
-          <a:solidFill>
-            <a:srgbClr val="555A6E"/>
-          </a:solidFill>
-          <a:ln>
-            <a:noFill/>
-          </a:ln>
-          <a:effectLst/>
-        </p:spPr>
-        <p:style>
-          <a:lnRef idx="1">
-            <a:schemeClr val="accent1"/>
-          </a:lnRef>
-          <a:fillRef idx="3">
-            <a:schemeClr val="accent1"/>
-          </a:fillRef>
-          <a:effectRef idx="2">
-            <a:schemeClr val="accent1"/>
-          </a:effectRef>
-          <a:fontRef idx="minor">
-            <a:schemeClr val="lt1"/>
-          </a:fontRef>
-        </p:style>
-        <p:txBody>
-          <a:bodyPr rtlCol="0" anchor="ctr"/>
-          <a:lstStyle/>
-          <a:p>
-            <a:pPr algn="ctr"/>
-          </a:p>
-        </p:txBody>
-      </p:sp>
-      <p:sp>
-        <p:nvSpPr>
-          <p:cNvPr id="6" name="Rounded Rectangle 5"/>
-          <p:cNvSpPr/>
-          <p:nvPr/>
-        </p:nvSpPr>
-        <p:spPr>
-          <a:xfrm>
-            <a:off x="3520439" y="1463040"/>
-            <a:ext cx="2331720" cy="1463040"/>
+            <a:off x="4343400" y="1463040"/>
+            <a:ext cx="3520440" cy="1828800"/>
           </a:xfrm>
           <a:prstGeom prst="roundRect">
             <a:avLst>
@@ -8309,86 +6179,113 @@
           </a:fontRef>
         </p:style>
         <p:txBody>
-          <a:bodyPr rtlCol="0" anchor="ctr" wrap="square"/>
+          <a:bodyPr rtlCol="0" anchor="ctr"/>
           <a:lstStyle/>
           <a:p>
             <a:pPr algn="ctr"/>
-            <a:r>
-              <a:rPr sz="1300" b="1">
+          </a:p>
+        </p:txBody>
+      </p:sp>
+      <p:sp>
+        <p:nvSpPr>
+          <p:cNvPr id="8" name="TextBox 7"/>
+          <p:cNvSpPr txBox="1"/>
+          <p:nvPr/>
+        </p:nvSpPr>
+        <p:spPr>
+          <a:xfrm>
+            <a:off x="4572000" y="1664208"/>
+            <a:ext cx="3063240" cy="457200"/>
+          </a:xfrm>
+          <a:prstGeom prst="rect">
+            <a:avLst/>
+          </a:prstGeom>
+          <a:noFill/>
+        </p:spPr>
+        <p:txBody>
+          <a:bodyPr wrap="square" anchor="t" lIns="0" rIns="0" tIns="0" bIns="0">
+            <a:spAutoFit/>
+          </a:bodyPr>
+          <a:lstStyle/>
+          <a:p>
+            <a:pPr algn="l"/>
+            <a:r>
+              <a:rPr sz="1450" b="1" i="0">
                 <a:solidFill>
                   <a:srgbClr val="FFFFFF"/>
                 </a:solidFill>
-              </a:rPr>
-              <a:t>Dense 128</a:t>
-            </a:r>
-          </a:p>
-          <a:p>
-            <a:pPr algn="ctr"/>
-            <a:r>
-              <a:rPr sz="1300" b="1">
-                <a:solidFill>
-                  <a:srgbClr val="FFFFFF"/>
-                </a:solidFill>
-              </a:rPr>
-              <a:t>ReLU</a:t>
-            </a:r>
-          </a:p>
-        </p:txBody>
-      </p:sp>
-      <p:sp>
-        <p:nvSpPr>
-          <p:cNvPr id="7" name="Right Arrow 6"/>
+                <a:latin typeface="Calibri"/>
+              </a:rPr>
+              <a:t>🔍 리뷰 텍스트 분석</a:t>
+            </a:r>
+          </a:p>
+        </p:txBody>
+      </p:sp>
+      <p:sp>
+        <p:nvSpPr>
+          <p:cNvPr id="9" name="TextBox 8"/>
+          <p:cNvSpPr txBox="1"/>
+          <p:nvPr/>
+        </p:nvSpPr>
+        <p:spPr>
+          <a:xfrm>
+            <a:off x="4572000" y="2148840"/>
+            <a:ext cx="3063240" cy="1005840"/>
+          </a:xfrm>
+          <a:prstGeom prst="rect">
+            <a:avLst/>
+          </a:prstGeom>
+          <a:noFill/>
+        </p:spPr>
+        <p:txBody>
+          <a:bodyPr wrap="square" anchor="t" lIns="0" rIns="0" tIns="0" bIns="0">
+            <a:spAutoFit/>
+          </a:bodyPr>
+          <a:lstStyle/>
+          <a:p>
+            <a:pPr algn="l">
+              <a:lnSpc>
+                <a:spcPct val="130000"/>
+              </a:lnSpc>
+            </a:pPr>
+            <a:r>
+              <a:rPr sz="1200" b="0" i="0">
+                <a:solidFill>
+                  <a:srgbClr val="CADCFC"/>
+                </a:solidFill>
+                <a:latin typeface="Calibri"/>
+              </a:rPr>
+              <a:t>텍스트 입력 → ML/DL 동시</a:t>
+            </a:r>
+          </a:p>
+          <a:p>
+            <a:pPr algn="l">
+              <a:lnSpc>
+                <a:spcPct val="130000"/>
+              </a:lnSpc>
+            </a:pPr>
+            <a:r>
+              <a:rPr sz="1200" b="0" i="0">
+                <a:solidFill>
+                  <a:srgbClr val="CADCFC"/>
+                </a:solidFill>
+                <a:latin typeface="Calibri"/>
+              </a:rPr>
+              <a:t>예측 + 확률 시각화</a:t>
+            </a:r>
+          </a:p>
+        </p:txBody>
+      </p:sp>
+      <p:sp>
+        <p:nvSpPr>
+          <p:cNvPr id="10" name="Rounded Rectangle 9"/>
           <p:cNvSpPr/>
           <p:nvPr/>
         </p:nvSpPr>
         <p:spPr>
           <a:xfrm>
-            <a:off x="5870447" y="2084832"/>
-            <a:ext cx="329184" cy="219456"/>
-          </a:xfrm>
-          <a:prstGeom prst="rightArrow">
-            <a:avLst/>
-          </a:prstGeom>
-          <a:solidFill>
-            <a:srgbClr val="555A6E"/>
-          </a:solidFill>
-          <a:ln>
-            <a:noFill/>
-          </a:ln>
-          <a:effectLst/>
-        </p:spPr>
-        <p:style>
-          <a:lnRef idx="1">
-            <a:schemeClr val="accent1"/>
-          </a:lnRef>
-          <a:fillRef idx="3">
-            <a:schemeClr val="accent1"/>
-          </a:fillRef>
-          <a:effectRef idx="2">
-            <a:schemeClr val="accent1"/>
-          </a:effectRef>
-          <a:fontRef idx="minor">
-            <a:schemeClr val="lt1"/>
-          </a:fontRef>
-        </p:style>
-        <p:txBody>
-          <a:bodyPr rtlCol="0" anchor="ctr"/>
-          <a:lstStyle/>
-          <a:p>
-            <a:pPr algn="ctr"/>
-          </a:p>
-        </p:txBody>
-      </p:sp>
-      <p:sp>
-        <p:nvSpPr>
-          <p:cNvPr id="8" name="Rounded Rectangle 7"/>
-          <p:cNvSpPr/>
-          <p:nvPr/>
-        </p:nvSpPr>
-        <p:spPr>
-          <a:xfrm>
-            <a:off x="6217920" y="1463040"/>
-            <a:ext cx="2331720" cy="1463040"/>
+            <a:off x="8046719" y="1463040"/>
+            <a:ext cx="3520440" cy="1828800"/>
           </a:xfrm>
           <a:prstGeom prst="roundRect">
             <a:avLst>
@@ -8418,138 +6315,10 @@
           </a:fontRef>
         </p:style>
         <p:txBody>
-          <a:bodyPr rtlCol="0" anchor="ctr" wrap="square"/>
+          <a:bodyPr rtlCol="0" anchor="ctr"/>
           <a:lstStyle/>
           <a:p>
             <a:pPr algn="ctr"/>
-            <a:r>
-              <a:rPr sz="1300" b="1">
-                <a:solidFill>
-                  <a:srgbClr val="FFFFFF"/>
-                </a:solidFill>
-              </a:rPr>
-              <a:t>Dense 64</a:t>
-            </a:r>
-          </a:p>
-          <a:p>
-            <a:pPr algn="ctr"/>
-            <a:r>
-              <a:rPr sz="1300" b="1">
-                <a:solidFill>
-                  <a:srgbClr val="FFFFFF"/>
-                </a:solidFill>
-              </a:rPr>
-              <a:t>ReLU</a:t>
-            </a:r>
-          </a:p>
-        </p:txBody>
-      </p:sp>
-      <p:sp>
-        <p:nvSpPr>
-          <p:cNvPr id="9" name="Right Arrow 8"/>
-          <p:cNvSpPr/>
-          <p:nvPr/>
-        </p:nvSpPr>
-        <p:spPr>
-          <a:xfrm>
-            <a:off x="8567928" y="2084832"/>
-            <a:ext cx="329184" cy="219456"/>
-          </a:xfrm>
-          <a:prstGeom prst="rightArrow">
-            <a:avLst/>
-          </a:prstGeom>
-          <a:solidFill>
-            <a:srgbClr val="555A6E"/>
-          </a:solidFill>
-          <a:ln>
-            <a:noFill/>
-          </a:ln>
-          <a:effectLst/>
-        </p:spPr>
-        <p:style>
-          <a:lnRef idx="1">
-            <a:schemeClr val="accent1"/>
-          </a:lnRef>
-          <a:fillRef idx="3">
-            <a:schemeClr val="accent1"/>
-          </a:fillRef>
-          <a:effectRef idx="2">
-            <a:schemeClr val="accent1"/>
-          </a:effectRef>
-          <a:fontRef idx="minor">
-            <a:schemeClr val="lt1"/>
-          </a:fontRef>
-        </p:style>
-        <p:txBody>
-          <a:bodyPr rtlCol="0" anchor="ctr"/>
-          <a:lstStyle/>
-          <a:p>
-            <a:pPr algn="ctr"/>
-          </a:p>
-        </p:txBody>
-      </p:sp>
-      <p:sp>
-        <p:nvSpPr>
-          <p:cNvPr id="10" name="Rounded Rectangle 9"/>
-          <p:cNvSpPr/>
-          <p:nvPr/>
-        </p:nvSpPr>
-        <p:spPr>
-          <a:xfrm>
-            <a:off x="8915400" y="1463040"/>
-            <a:ext cx="2331720" cy="1463040"/>
-          </a:xfrm>
-          <a:prstGeom prst="roundRect">
-            <a:avLst>
-              <a:gd name="adj" fmla="val 8000"/>
-            </a:avLst>
-          </a:prstGeom>
-          <a:solidFill>
-            <a:srgbClr val="F96167"/>
-          </a:solidFill>
-          <a:ln>
-            <a:noFill/>
-          </a:ln>
-          <a:effectLst/>
-        </p:spPr>
-        <p:style>
-          <a:lnRef idx="1">
-            <a:schemeClr val="accent1"/>
-          </a:lnRef>
-          <a:fillRef idx="3">
-            <a:schemeClr val="accent1"/>
-          </a:fillRef>
-          <a:effectRef idx="2">
-            <a:schemeClr val="accent1"/>
-          </a:effectRef>
-          <a:fontRef idx="minor">
-            <a:schemeClr val="lt1"/>
-          </a:fontRef>
-        </p:style>
-        <p:txBody>
-          <a:bodyPr rtlCol="0" anchor="ctr" wrap="square"/>
-          <a:lstStyle/>
-          <a:p>
-            <a:pPr algn="ctr"/>
-            <a:r>
-              <a:rPr sz="1300" b="1">
-                <a:solidFill>
-                  <a:srgbClr val="FFFFFF"/>
-                </a:solidFill>
-              </a:rPr>
-              <a:t>Dense 3</a:t>
-            </a:r>
-          </a:p>
-          <a:p>
-            <a:pPr algn="ctr"/>
-            <a:r>
-              <a:rPr sz="1300" b="1">
-                <a:solidFill>
-                  <a:srgbClr val="FFFFFF"/>
-                </a:solidFill>
-              </a:rPr>
-              <a:t>Softmax</a:t>
-            </a:r>
           </a:p>
         </p:txBody>
       </p:sp>
@@ -8561,8 +6330,8 @@
         </p:nvSpPr>
         <p:spPr>
           <a:xfrm>
-            <a:off x="822960" y="3291840"/>
-            <a:ext cx="5120640" cy="365760"/>
+            <a:off x="8275319" y="1664208"/>
+            <a:ext cx="3063240" cy="457200"/>
           </a:xfrm>
           <a:prstGeom prst="rect">
             <a:avLst/>
@@ -8577,13 +6346,13 @@
           <a:p>
             <a:pPr algn="l"/>
             <a:r>
-              <a:rPr sz="1500" b="1" i="0">
-                <a:solidFill>
-                  <a:srgbClr val="1E2761"/>
+              <a:rPr sz="1450" b="1" i="0">
+                <a:solidFill>
+                  <a:srgbClr val="FFFFFF"/>
                 </a:solidFill>
                 <a:latin typeface="Calibri"/>
               </a:rPr>
-              <a:t>학습 방식</a:t>
+              <a:t>📊 데이터 대시보드</a:t>
             </a:r>
           </a:p>
         </p:txBody>
@@ -8596,8 +6365,98 @@
         </p:nvSpPr>
         <p:spPr>
           <a:xfrm>
-            <a:off x="822960" y="3703320"/>
-            <a:ext cx="5120640" cy="2560320"/>
+            <a:off x="8275319" y="2148840"/>
+            <a:ext cx="3063240" cy="1005840"/>
+          </a:xfrm>
+          <a:prstGeom prst="rect">
+            <a:avLst/>
+          </a:prstGeom>
+          <a:noFill/>
+        </p:spPr>
+        <p:txBody>
+          <a:bodyPr wrap="square" anchor="t" lIns="0" rIns="0" tIns="0" bIns="0">
+            <a:spAutoFit/>
+          </a:bodyPr>
+          <a:lstStyle/>
+          <a:p>
+            <a:pPr algn="l">
+              <a:lnSpc>
+                <a:spcPct val="130000"/>
+              </a:lnSpc>
+            </a:pPr>
+            <a:r>
+              <a:rPr sz="1200" b="0" i="0">
+                <a:solidFill>
+                  <a:srgbClr val="CADCFC"/>
+                </a:solidFill>
+                <a:latin typeface="Calibri"/>
+              </a:rPr>
+              <a:t>플랫폼/별점/트렌드/카테고리</a:t>
+            </a:r>
+          </a:p>
+          <a:p>
+            <a:pPr algn="l">
+              <a:lnSpc>
+                <a:spcPct val="130000"/>
+              </a:lnSpc>
+            </a:pPr>
+            <a:r>
+              <a:rPr sz="1200" b="0" i="0">
+                <a:solidFill>
+                  <a:srgbClr val="CADCFC"/>
+                </a:solidFill>
+                <a:latin typeface="Calibri"/>
+              </a:rPr>
+              <a:t>분포, 형태소 기반 키워드</a:t>
+            </a:r>
+          </a:p>
+        </p:txBody>
+      </p:sp>
+      <p:sp>
+        <p:nvSpPr>
+          <p:cNvPr id="13" name="TextBox 12"/>
+          <p:cNvSpPr txBox="1"/>
+          <p:nvPr/>
+        </p:nvSpPr>
+        <p:spPr>
+          <a:xfrm>
+            <a:off x="640080" y="3566160"/>
+            <a:ext cx="10515600" cy="365760"/>
+          </a:xfrm>
+          <a:prstGeom prst="rect">
+            <a:avLst/>
+          </a:prstGeom>
+          <a:noFill/>
+        </p:spPr>
+        <p:txBody>
+          <a:bodyPr wrap="square" anchor="t" lIns="0" rIns="0" tIns="0" bIns="0">
+            <a:spAutoFit/>
+          </a:bodyPr>
+          <a:lstStyle/>
+          <a:p>
+            <a:pPr algn="l"/>
+            <a:r>
+              <a:rPr sz="1600" b="1" i="0">
+                <a:solidFill>
+                  <a:srgbClr val="1E2761"/>
+                </a:solidFill>
+                <a:latin typeface="Calibri"/>
+              </a:rPr>
+              <a:t>정리</a:t>
+            </a:r>
+          </a:p>
+        </p:txBody>
+      </p:sp>
+      <p:sp>
+        <p:nvSpPr>
+          <p:cNvPr id="14" name="TextBox 13"/>
+          <p:cNvSpPr txBox="1"/>
+          <p:nvPr/>
+        </p:nvSpPr>
+        <p:spPr>
+          <a:xfrm>
+            <a:off x="640080" y="4023360"/>
+            <a:ext cx="10515600" cy="2377440"/>
           </a:xfrm>
           <a:prstGeom prst="rect">
             <a:avLst/>
@@ -8616,13 +6475,13 @@
               </a:spcAft>
             </a:pPr>
             <a:r>
-              <a:rPr sz="1300">
+              <a:rPr sz="1450">
                 <a:solidFill>
                   <a:srgbClr val="21295C"/>
                 </a:solidFill>
                 <a:latin typeface="Calibri"/>
               </a:rPr>
-              <a:t>•  Mini-batch SGD + Momentum(0.9), L2 정규화</a:t>
+              <a:t>•  538,774건 데이터를 통일된 기준으로 통합 (가장 큰 난관: 라벨 기준 불일치)</a:t>
             </a:r>
           </a:p>
           <a:p>
@@ -8632,13 +6491,13 @@
               </a:spcAft>
             </a:pPr>
             <a:r>
-              <a:rPr sz="1300">
+              <a:rPr sz="1450">
                 <a:solidFill>
                   <a:srgbClr val="21295C"/>
                 </a:solidFill>
                 <a:latin typeface="Calibri"/>
               </a:rPr>
-              <a:t>•  learning rate 0.08 → epoch마다 0.92배 감소</a:t>
+              <a:t>•  환경 제약을 numpy 구현 → 별도 venv 구성으로 단계적으로 해결, 4개 모델 비교</a:t>
             </a:r>
           </a:p>
           <a:p>
@@ -8648,13 +6507,13 @@
               </a:spcAft>
             </a:pPr>
             <a:r>
-              <a:rPr sz="1300">
+              <a:rPr sz="1450">
                 <a:solidFill>
                   <a:srgbClr val="21295C"/>
                 </a:solidFill>
                 <a:latin typeface="Calibri"/>
               </a:rPr>
-              <a:t>•  batch size 256, 15 epoch</a:t>
+              <a:t>•  실제 분포 재평가로 숨은 문제(label shift)를 찾아 보정, ABSA로 서비스를 실용적으로 전환</a:t>
             </a:r>
           </a:p>
           <a:p>
@@ -8664,1248 +6523,13 @@
               </a:spcAft>
             </a:pPr>
             <a:r>
-              <a:rPr sz="1300">
+              <a:rPr sz="1450">
                 <a:solidFill>
                   <a:srgbClr val="21295C"/>
                 </a:solidFill>
                 <a:latin typeface="Calibri"/>
               </a:rPr>
-              <a:t>•  scipy sparse(TF-IDF) × dense 가중치 행렬곱을
-backprop 수식에 맞춰 직접 구현</a:t>
-            </a:r>
-          </a:p>
-        </p:txBody>
-      </p:sp>
-      <p:sp>
-        <p:nvSpPr>
-          <p:cNvPr id="13" name="TextBox 12"/>
-          <p:cNvSpPr txBox="1"/>
-          <p:nvPr/>
-        </p:nvSpPr>
-        <p:spPr>
-          <a:xfrm>
-            <a:off x="6309360" y="3291840"/>
-            <a:ext cx="5120640" cy="365760"/>
-          </a:xfrm>
-          <a:prstGeom prst="rect">
-            <a:avLst/>
-          </a:prstGeom>
-          <a:noFill/>
-        </p:spPr>
-        <p:txBody>
-          <a:bodyPr wrap="square" anchor="t" lIns="0" rIns="0" tIns="0" bIns="0">
-            <a:spAutoFit/>
-          </a:bodyPr>
-          <a:lstStyle/>
-          <a:p>
-            <a:pPr algn="l"/>
-            <a:r>
-              <a:rPr sz="1500" b="1" i="0">
-                <a:solidFill>
-                  <a:srgbClr val="1E2761"/>
-                </a:solidFill>
-                <a:latin typeface="Calibri"/>
-              </a:rPr>
-              <a:t>추가 실험 (별도 venv, PyTorch)</a:t>
-            </a:r>
-          </a:p>
-        </p:txBody>
-      </p:sp>
-      <p:sp>
-        <p:nvSpPr>
-          <p:cNvPr id="14" name="TextBox 13"/>
-          <p:cNvSpPr txBox="1"/>
-          <p:nvPr/>
-        </p:nvSpPr>
-        <p:spPr>
-          <a:xfrm>
-            <a:off x="6309360" y="3703320"/>
-            <a:ext cx="5120640" cy="1645920"/>
-          </a:xfrm>
-          <a:prstGeom prst="rect">
-            <a:avLst/>
-          </a:prstGeom>
-          <a:noFill/>
-        </p:spPr>
-        <p:txBody>
-          <a:bodyPr wrap="square">
-            <a:spAutoFit/>
-          </a:bodyPr>
-          <a:lstStyle/>
-          <a:p>
-            <a:pPr>
-              <a:spcAft>
-                <a:spcPts val="800"/>
-              </a:spcAft>
-            </a:pPr>
-            <a:r>
-              <a:rPr sz="1300">
-                <a:solidFill>
-                  <a:srgbClr val="21295C"/>
-                </a:solidFill>
-                <a:latin typeface="Calibri"/>
-              </a:rPr>
-              <a:t>•  LSTM: Embedding → BiLSTM(128) → Dense(3)</a:t>
-            </a:r>
-          </a:p>
-          <a:p>
-            <a:pPr>
-              <a:spcAft>
-                <a:spcPts val="800"/>
-              </a:spcAft>
-            </a:pPr>
-            <a:r>
-              <a:rPr sz="1300">
-                <a:solidFill>
-                  <a:srgbClr val="21295C"/>
-                </a:solidFill>
-                <a:latin typeface="Calibri"/>
-              </a:rPr>
-              <a:t>•  KoELECTRA-small 파인튜닝 (사전학습 모델)</a:t>
-            </a:r>
-          </a:p>
-          <a:p>
-            <a:pPr>
-              <a:spcAft>
-                <a:spcPts val="800"/>
-              </a:spcAft>
-            </a:pPr>
-            <a:r>
-              <a:rPr sz="1300">
-                <a:solidFill>
-                  <a:srgbClr val="21295C"/>
-                </a:solidFill>
-                <a:latin typeface="Calibri"/>
-              </a:rPr>
-              <a:t>•  winget으로 Python 3.11 별도 설치 후 venv 구성</a:t>
-            </a:r>
-          </a:p>
-        </p:txBody>
-      </p:sp>
-      <p:sp>
-        <p:nvSpPr>
-          <p:cNvPr id="15" name="Rounded Rectangle 14"/>
-          <p:cNvSpPr/>
-          <p:nvPr/>
-        </p:nvSpPr>
-        <p:spPr>
-          <a:xfrm>
-            <a:off x="6309360" y="5029200"/>
-            <a:ext cx="5120640" cy="1371600"/>
-          </a:xfrm>
-          <a:prstGeom prst="roundRect">
-            <a:avLst>
-              <a:gd name="adj" fmla="val 8000"/>
-            </a:avLst>
-          </a:prstGeom>
-          <a:solidFill>
-            <a:srgbClr val="F4F6FC"/>
-          </a:solidFill>
-          <a:ln>
-            <a:noFill/>
-          </a:ln>
-          <a:effectLst/>
-        </p:spPr>
-        <p:style>
-          <a:lnRef idx="1">
-            <a:schemeClr val="accent1"/>
-          </a:lnRef>
-          <a:fillRef idx="3">
-            <a:schemeClr val="accent1"/>
-          </a:fillRef>
-          <a:effectRef idx="2">
-            <a:schemeClr val="accent1"/>
-          </a:effectRef>
-          <a:fontRef idx="minor">
-            <a:schemeClr val="lt1"/>
-          </a:fontRef>
-        </p:style>
-        <p:txBody>
-          <a:bodyPr rtlCol="0" anchor="ctr"/>
-          <a:lstStyle/>
-          <a:p>
-            <a:pPr algn="ctr"/>
-          </a:p>
-        </p:txBody>
-      </p:sp>
-      <p:sp>
-        <p:nvSpPr>
-          <p:cNvPr id="16" name="TextBox 15"/>
-          <p:cNvSpPr txBox="1"/>
-          <p:nvPr/>
-        </p:nvSpPr>
-        <p:spPr>
-          <a:xfrm>
-            <a:off x="6492240" y="5166360"/>
-            <a:ext cx="4754880" cy="1188720"/>
-          </a:xfrm>
-          <a:prstGeom prst="rect">
-            <a:avLst/>
-          </a:prstGeom>
-          <a:noFill/>
-        </p:spPr>
-        <p:txBody>
-          <a:bodyPr wrap="square" anchor="t" lIns="0" rIns="0" tIns="0" bIns="0">
-            <a:spAutoFit/>
-          </a:bodyPr>
-          <a:lstStyle/>
-          <a:p>
-            <a:pPr algn="l">
-              <a:lnSpc>
-                <a:spcPct val="125000"/>
-              </a:lnSpc>
-            </a:pPr>
-            <a:r>
-              <a:rPr sz="1200" b="0" i="0">
-                <a:solidFill>
-                  <a:srgbClr val="555A6E"/>
-                </a:solidFill>
-                <a:latin typeface="Calibri"/>
-              </a:rPr>
-              <a:t>관찰: LSTM이 순서 정보를 학습할 수 있는데도</a:t>
-            </a:r>
-          </a:p>
-          <a:p>
-            <a:pPr algn="l">
-              <a:lnSpc>
-                <a:spcPct val="125000"/>
-              </a:lnSpc>
-            </a:pPr>
-            <a:r>
-              <a:rPr sz="1200" b="0" i="0">
-                <a:solidFill>
-                  <a:srgbClr val="555A6E"/>
-                </a:solidFill>
-                <a:latin typeface="Calibri"/>
-              </a:rPr>
-              <a:t>TF-IDF 기반 모델과 성능이 비슷함 — 짧은 리뷰는</a:t>
-            </a:r>
-          </a:p>
-          <a:p>
-            <a:pPr algn="l">
-              <a:lnSpc>
-                <a:spcPct val="125000"/>
-              </a:lnSpc>
-            </a:pPr>
-            <a:r>
-              <a:rPr sz="1200" b="0" i="0">
-                <a:solidFill>
-                  <a:srgbClr val="555A6E"/>
-                </a:solidFill>
-                <a:latin typeface="Calibri"/>
-              </a:rPr>
-              <a:t>어휘 자체가 이미 강한 신호였다는 뜻</a:t>
-            </a:r>
-          </a:p>
-        </p:txBody>
-      </p:sp>
-    </p:spTree>
-  </p:cSld>
-  <p:clrMapOvr>
-    <a:masterClrMapping/>
-  </p:clrMapOvr>
-</p:sld>
-</file>
-
-<file path=ppt/slides/slide7.xml><?xml version="1.0" encoding="utf-8"?>
-<p:sld xmlns:a="http://schemas.openxmlformats.org/drawingml/2006/main" xmlns:p="http://schemas.openxmlformats.org/presentationml/2006/main" xmlns:r="http://schemas.openxmlformats.org/officeDocument/2006/relationships">
-  <p:cSld>
-    <p:spTree>
-      <p:nvGrpSpPr>
-        <p:cNvPr id="1" name=""/>
-        <p:cNvGrpSpPr/>
-        <p:nvPr/>
-      </p:nvGrpSpPr>
-      <p:grpSpPr/>
-      <p:sp>
-        <p:nvSpPr>
-          <p:cNvPr id="2" name="Rectangle 1"/>
-          <p:cNvSpPr/>
-          <p:nvPr/>
-        </p:nvSpPr>
-        <p:spPr>
-          <a:xfrm>
-            <a:off x="0" y="0"/>
-            <a:ext cx="12191695" cy="6858000"/>
-          </a:xfrm>
-          <a:prstGeom prst="rect">
-            <a:avLst/>
-          </a:prstGeom>
-          <a:solidFill>
-            <a:srgbClr val="FFFFFF"/>
-          </a:solidFill>
-          <a:ln>
-            <a:noFill/>
-          </a:ln>
-          <a:effectLst/>
-        </p:spPr>
-        <p:style>
-          <a:lnRef idx="1">
-            <a:schemeClr val="accent1"/>
-          </a:lnRef>
-          <a:fillRef idx="3">
-            <a:schemeClr val="accent1"/>
-          </a:fillRef>
-          <a:effectRef idx="2">
-            <a:schemeClr val="accent1"/>
-          </a:effectRef>
-          <a:fontRef idx="minor">
-            <a:schemeClr val="lt1"/>
-          </a:fontRef>
-        </p:style>
-        <p:txBody>
-          <a:bodyPr rtlCol="0" anchor="ctr"/>
-          <a:lstStyle/>
-          <a:p>
-            <a:pPr algn="ctr"/>
-          </a:p>
-        </p:txBody>
-      </p:sp>
-      <p:sp>
-        <p:nvSpPr>
-          <p:cNvPr id="3" name="TextBox 2"/>
-          <p:cNvSpPr txBox="1"/>
-          <p:nvPr/>
-        </p:nvSpPr>
-        <p:spPr>
-          <a:xfrm>
-            <a:off x="640080" y="457200"/>
-            <a:ext cx="7315200" cy="731520"/>
-          </a:xfrm>
-          <a:prstGeom prst="rect">
-            <a:avLst/>
-          </a:prstGeom>
-          <a:noFill/>
-        </p:spPr>
-        <p:txBody>
-          <a:bodyPr wrap="square" anchor="t" lIns="0" rIns="0" tIns="0" bIns="0">
-            <a:spAutoFit/>
-          </a:bodyPr>
-          <a:lstStyle/>
-          <a:p>
-            <a:pPr algn="l"/>
-            <a:r>
-              <a:rPr sz="3000" b="1" i="0">
-                <a:solidFill>
-                  <a:srgbClr val="1E2761"/>
-                </a:solidFill>
-                <a:latin typeface="Georgia"/>
-              </a:rPr>
-              <a:t>4개 모델 비교</a:t>
-            </a:r>
-          </a:p>
-        </p:txBody>
-      </p:sp>
-      <p:graphicFrame>
-        <p:nvGraphicFramePr>
-          <p:cNvPr id="4" name="Chart 3"/>
-          <p:cNvGraphicFramePr>
-            <a:graphicFrameLocks noGrp="1"/>
-          </p:cNvGraphicFramePr>
-          <p:nvPr/>
-        </p:nvGraphicFramePr>
-        <p:xfrm>
-          <a:off x="640080" y="1463040"/>
-          <a:ext cx="6949440" cy="3931920"/>
-        </p:xfrm>
-        <a:graphic>
-          <a:graphicData uri="http://schemas.openxmlformats.org/drawingml/2006/chart">
-            <c:chart xmlns:c="http://schemas.openxmlformats.org/drawingml/2006/chart" r:id="rId2"/>
-          </a:graphicData>
-        </a:graphic>
-      </p:graphicFrame>
-      <p:sp>
-        <p:nvSpPr>
-          <p:cNvPr id="5" name="TextBox 4"/>
-          <p:cNvSpPr txBox="1"/>
-          <p:nvPr/>
-        </p:nvSpPr>
-        <p:spPr>
-          <a:xfrm>
-            <a:off x="7863840" y="1554480"/>
-            <a:ext cx="3840480" cy="365760"/>
-          </a:xfrm>
-          <a:prstGeom prst="rect">
-            <a:avLst/>
-          </a:prstGeom>
-          <a:noFill/>
-        </p:spPr>
-        <p:txBody>
-          <a:bodyPr wrap="square" anchor="t" lIns="0" rIns="0" tIns="0" bIns="0">
-            <a:spAutoFit/>
-          </a:bodyPr>
-          <a:lstStyle/>
-          <a:p>
-            <a:pPr algn="l"/>
-            <a:r>
-              <a:rPr sz="1600" b="1" i="0">
-                <a:solidFill>
-                  <a:srgbClr val="1E2761"/>
-                </a:solidFill>
-                <a:latin typeface="Calibri"/>
-              </a:rPr>
-              <a:t>결론</a:t>
-            </a:r>
-          </a:p>
-        </p:txBody>
-      </p:sp>
-      <p:sp>
-        <p:nvSpPr>
-          <p:cNvPr id="6" name="TextBox 5"/>
-          <p:cNvSpPr txBox="1"/>
-          <p:nvPr/>
-        </p:nvSpPr>
-        <p:spPr>
-          <a:xfrm>
-            <a:off x="7863840" y="2011680"/>
-            <a:ext cx="3840480" cy="2926080"/>
-          </a:xfrm>
-          <a:prstGeom prst="rect">
-            <a:avLst/>
-          </a:prstGeom>
-          <a:noFill/>
-        </p:spPr>
-        <p:txBody>
-          <a:bodyPr wrap="square">
-            <a:spAutoFit/>
-          </a:bodyPr>
-          <a:lstStyle/>
-          <a:p>
-            <a:pPr>
-              <a:spcAft>
-                <a:spcPts val="800"/>
-              </a:spcAft>
-            </a:pPr>
-            <a:r>
-              <a:rPr sz="1300">
-                <a:solidFill>
-                  <a:srgbClr val="21295C"/>
-                </a:solidFill>
-                <a:latin typeface="Calibri"/>
-              </a:rPr>
-              <a:t>•  KoELECTRA가 데이터 1/7만 쓰고도
-최고 accuracy → 사전학습 효과 확인</a:t>
-            </a:r>
-          </a:p>
-          <a:p>
-            <a:pPr>
-              <a:spcAft>
-                <a:spcPts val="800"/>
-              </a:spcAft>
-            </a:pPr>
-            <a:r>
-              <a:rPr sz="1300">
-                <a:solidFill>
-                  <a:srgbClr val="21295C"/>
-                </a:solidFill>
-                <a:latin typeface="Calibri"/>
-              </a:rPr>
-              <a:t>•  LSTM은 순서 정보 활용 기대했으나
-차이 없음 (학습 데이터 규모 한계)</a:t>
-            </a:r>
-          </a:p>
-          <a:p>
-            <a:pPr>
-              <a:spcAft>
-                <a:spcPts val="800"/>
-              </a:spcAft>
-            </a:pPr>
-            <a:r>
-              <a:rPr sz="1300">
-                <a:solidFill>
-                  <a:srgbClr val="21295C"/>
-                </a:solidFill>
-                <a:latin typeface="Calibri"/>
-              </a:rPr>
-              <a:t>•  구조보다 어휘 신호 자체가 강한
-도메인이라는 결론</a:t>
-            </a:r>
-          </a:p>
-        </p:txBody>
-      </p:sp>
-      <p:sp>
-        <p:nvSpPr>
-          <p:cNvPr id="7" name="Rounded Rectangle 6"/>
-          <p:cNvSpPr/>
-          <p:nvPr/>
-        </p:nvSpPr>
-        <p:spPr>
-          <a:xfrm>
-            <a:off x="640080" y="5577840"/>
-            <a:ext cx="10881360" cy="731520"/>
-          </a:xfrm>
-          <a:prstGeom prst="roundRect">
-            <a:avLst>
-              <a:gd name="adj" fmla="val 10000"/>
-            </a:avLst>
-          </a:prstGeom>
-          <a:solidFill>
-            <a:srgbClr val="F4F6FC"/>
-          </a:solidFill>
-          <a:ln>
-            <a:noFill/>
-          </a:ln>
-          <a:effectLst/>
-        </p:spPr>
-        <p:style>
-          <a:lnRef idx="1">
-            <a:schemeClr val="accent1"/>
-          </a:lnRef>
-          <a:fillRef idx="3">
-            <a:schemeClr val="accent1"/>
-          </a:fillRef>
-          <a:effectRef idx="2">
-            <a:schemeClr val="accent1"/>
-          </a:effectRef>
-          <a:fontRef idx="minor">
-            <a:schemeClr val="lt1"/>
-          </a:fontRef>
-        </p:style>
-        <p:txBody>
-          <a:bodyPr rtlCol="0" anchor="ctr"/>
-          <a:lstStyle/>
-          <a:p>
-            <a:pPr algn="ctr"/>
-          </a:p>
-        </p:txBody>
-      </p:sp>
-      <p:sp>
-        <p:nvSpPr>
-          <p:cNvPr id="8" name="TextBox 7"/>
-          <p:cNvSpPr txBox="1"/>
-          <p:nvPr/>
-        </p:nvSpPr>
-        <p:spPr>
-          <a:xfrm>
-            <a:off x="914400" y="5760720"/>
-            <a:ext cx="10332720" cy="365760"/>
-          </a:xfrm>
-          <a:prstGeom prst="rect">
-            <a:avLst/>
-          </a:prstGeom>
-          <a:noFill/>
-        </p:spPr>
-        <p:txBody>
-          <a:bodyPr wrap="square" anchor="t" lIns="0" rIns="0" tIns="0" bIns="0">
-            <a:spAutoFit/>
-          </a:bodyPr>
-          <a:lstStyle/>
-          <a:p>
-            <a:pPr algn="ctr"/>
-            <a:r>
-              <a:rPr sz="1250" b="0" i="0">
-                <a:solidFill>
-                  <a:srgbClr val="555A6E"/>
-                </a:solidFill>
-                <a:latin typeface="Calibri"/>
-              </a:rPr>
-              <a:t>KoELECTRA: 20,000건 서브샘플 · 2 epoch (CPU 환경 시간 제약, GPU면 격차 더 벌어질 것으로 예상)</a:t>
-            </a:r>
-          </a:p>
-        </p:txBody>
-      </p:sp>
-    </p:spTree>
-  </p:cSld>
-  <p:clrMapOvr>
-    <a:masterClrMapping/>
-  </p:clrMapOvr>
-</p:sld>
-</file>
-
-<file path=ppt/slides/slide8.xml><?xml version="1.0" encoding="utf-8"?>
-<p:sld xmlns:a="http://schemas.openxmlformats.org/drawingml/2006/main" xmlns:p="http://schemas.openxmlformats.org/presentationml/2006/main" xmlns:r="http://schemas.openxmlformats.org/officeDocument/2006/relationships">
-  <p:cSld>
-    <p:spTree>
-      <p:nvGrpSpPr>
-        <p:cNvPr id="1" name=""/>
-        <p:cNvGrpSpPr/>
-        <p:nvPr/>
-      </p:nvGrpSpPr>
-      <p:grpSpPr/>
-      <p:sp>
-        <p:nvSpPr>
-          <p:cNvPr id="2" name="Rectangle 1"/>
-          <p:cNvSpPr/>
-          <p:nvPr/>
-        </p:nvSpPr>
-        <p:spPr>
-          <a:xfrm>
-            <a:off x="0" y="0"/>
-            <a:ext cx="12191695" cy="6858000"/>
-          </a:xfrm>
-          <a:prstGeom prst="rect">
-            <a:avLst/>
-          </a:prstGeom>
-          <a:solidFill>
-            <a:srgbClr val="FFFFFF"/>
-          </a:solidFill>
-          <a:ln>
-            <a:noFill/>
-          </a:ln>
-          <a:effectLst/>
-        </p:spPr>
-        <p:style>
-          <a:lnRef idx="1">
-            <a:schemeClr val="accent1"/>
-          </a:lnRef>
-          <a:fillRef idx="3">
-            <a:schemeClr val="accent1"/>
-          </a:fillRef>
-          <a:effectRef idx="2">
-            <a:schemeClr val="accent1"/>
-          </a:effectRef>
-          <a:fontRef idx="minor">
-            <a:schemeClr val="lt1"/>
-          </a:fontRef>
-        </p:style>
-        <p:txBody>
-          <a:bodyPr rtlCol="0" anchor="ctr"/>
-          <a:lstStyle/>
-          <a:p>
-            <a:pPr algn="ctr"/>
-          </a:p>
-        </p:txBody>
-      </p:sp>
-      <p:sp>
-        <p:nvSpPr>
-          <p:cNvPr id="3" name="TextBox 2"/>
-          <p:cNvSpPr txBox="1"/>
-          <p:nvPr/>
-        </p:nvSpPr>
-        <p:spPr>
-          <a:xfrm>
-            <a:off x="640080" y="457200"/>
-            <a:ext cx="10515600" cy="731520"/>
-          </a:xfrm>
-          <a:prstGeom prst="rect">
-            <a:avLst/>
-          </a:prstGeom>
-          <a:noFill/>
-        </p:spPr>
-        <p:txBody>
-          <a:bodyPr wrap="square" anchor="t" lIns="0" rIns="0" tIns="0" bIns="0">
-            <a:spAutoFit/>
-          </a:bodyPr>
-          <a:lstStyle/>
-          <a:p>
-            <a:pPr algn="l"/>
-            <a:r>
-              <a:rPr sz="2800" b="1" i="0">
-                <a:solidFill>
-                  <a:srgbClr val="1E2761"/>
-                </a:solidFill>
-                <a:latin typeface="Georgia"/>
-              </a:rPr>
-              <a:t>모델 문제점 발견 — 실제 분포로 재평가</a:t>
-            </a:r>
-          </a:p>
-        </p:txBody>
-      </p:sp>
-      <p:sp>
-        <p:nvSpPr>
-          <p:cNvPr id="4" name="TextBox 3"/>
-          <p:cNvSpPr txBox="1"/>
-          <p:nvPr/>
-        </p:nvSpPr>
-        <p:spPr>
-          <a:xfrm>
-            <a:off x="640080" y="1463040"/>
-            <a:ext cx="10515600" cy="1828800"/>
-          </a:xfrm>
-          <a:prstGeom prst="rect">
-            <a:avLst/>
-          </a:prstGeom>
-          <a:noFill/>
-        </p:spPr>
-        <p:txBody>
-          <a:bodyPr wrap="square">
-            <a:spAutoFit/>
-          </a:bodyPr>
-          <a:lstStyle/>
-          <a:p>
-            <a:pPr>
-              <a:spcAft>
-                <a:spcPts val="800"/>
-              </a:spcAft>
-            </a:pPr>
-            <a:r>
-              <a:rPr sz="1550">
-                <a:solidFill>
-                  <a:srgbClr val="21295C"/>
-                </a:solidFill>
-                <a:latin typeface="Calibri"/>
-              </a:rPr>
-              <a:t>•  학습 시 클래스 밸런싱(다운샘플링)을 했는데, 실제 운영 비율(positive 86.7%)과 다름</a:t>
-            </a:r>
-          </a:p>
-          <a:p>
-            <a:pPr>
-              <a:spcAft>
-                <a:spcPts val="800"/>
-              </a:spcAft>
-            </a:pPr>
-            <a:r>
-              <a:rPr sz="1550">
-                <a:solidFill>
-                  <a:srgbClr val="21295C"/>
-                </a:solidFill>
-                <a:latin typeface="Calibri"/>
-              </a:rPr>
-              <a:t>•  실제 분포 샘플로 재평가하니 neutral precision이 0.20까지 떨어짐</a:t>
-            </a:r>
-          </a:p>
-          <a:p>
-            <a:pPr>
-              <a:spcAft>
-                <a:spcPts val="800"/>
-              </a:spcAft>
-            </a:pPr>
-            <a:r>
-              <a:rPr sz="1550">
-                <a:solidFill>
-                  <a:srgbClr val="21295C"/>
-                </a:solidFill>
-                <a:latin typeface="Calibri"/>
-              </a:rPr>
-              <a:t>•  = 모델이 "중립"이라고 예측한 것 중 80%가 틀림 (label shift 문제)</a:t>
-            </a:r>
-          </a:p>
-        </p:txBody>
-      </p:sp>
-      <p:sp>
-        <p:nvSpPr>
-          <p:cNvPr id="5" name="Rounded Rectangle 4"/>
-          <p:cNvSpPr/>
-          <p:nvPr/>
-        </p:nvSpPr>
-        <p:spPr>
-          <a:xfrm>
-            <a:off x="640080" y="3200400"/>
-            <a:ext cx="10881360" cy="822960"/>
-          </a:xfrm>
-          <a:prstGeom prst="roundRect">
-            <a:avLst>
-              <a:gd name="adj" fmla="val 10000"/>
-            </a:avLst>
-          </a:prstGeom>
-          <a:solidFill>
-            <a:srgbClr val="F96167"/>
-          </a:solidFill>
-          <a:ln>
-            <a:noFill/>
-          </a:ln>
-          <a:effectLst/>
-        </p:spPr>
-        <p:style>
-          <a:lnRef idx="1">
-            <a:schemeClr val="accent1"/>
-          </a:lnRef>
-          <a:fillRef idx="3">
-            <a:schemeClr val="accent1"/>
-          </a:fillRef>
-          <a:effectRef idx="2">
-            <a:schemeClr val="accent1"/>
-          </a:effectRef>
-          <a:fontRef idx="minor">
-            <a:schemeClr val="lt1"/>
-          </a:fontRef>
-        </p:style>
-        <p:txBody>
-          <a:bodyPr rtlCol="0" anchor="ctr"/>
-          <a:lstStyle/>
-          <a:p>
-            <a:pPr algn="ctr"/>
-          </a:p>
-        </p:txBody>
-      </p:sp>
-      <p:sp>
-        <p:nvSpPr>
-          <p:cNvPr id="6" name="TextBox 5"/>
-          <p:cNvSpPr txBox="1"/>
-          <p:nvPr/>
-        </p:nvSpPr>
-        <p:spPr>
-          <a:xfrm>
-            <a:off x="914400" y="3429000"/>
-            <a:ext cx="10332720" cy="457200"/>
-          </a:xfrm>
-          <a:prstGeom prst="rect">
-            <a:avLst/>
-          </a:prstGeom>
-          <a:noFill/>
-        </p:spPr>
-        <p:txBody>
-          <a:bodyPr wrap="square" anchor="t" lIns="0" rIns="0" tIns="0" bIns="0">
-            <a:spAutoFit/>
-          </a:bodyPr>
-          <a:lstStyle/>
-          <a:p>
-            <a:pPr algn="ctr"/>
-            <a:r>
-              <a:rPr sz="1400" b="1" i="0">
-                <a:solidFill>
-                  <a:srgbClr val="FFFFFF"/>
-                </a:solidFill>
-                <a:latin typeface="Calibri"/>
-              </a:rPr>
-              <a:t>해결: p_real(y|x) ∝ p_model(y|x) × (실제 클래스 비율 / 학습 클래스 비율) — 재학습 없이 추론 단계에서 확률 보정</a:t>
-            </a:r>
-          </a:p>
-        </p:txBody>
-      </p:sp>
-      <p:graphicFrame>
-        <p:nvGraphicFramePr>
-          <p:cNvPr id="7" name="Chart 6"/>
-          <p:cNvGraphicFramePr>
-            <a:graphicFrameLocks noGrp="1"/>
-          </p:cNvGraphicFramePr>
-          <p:nvPr/>
-        </p:nvGraphicFramePr>
-        <p:xfrm>
-          <a:off x="1371600" y="4297680"/>
-          <a:ext cx="9418320" cy="2286000"/>
-        </p:xfrm>
-        <a:graphic>
-          <a:graphicData uri="http://schemas.openxmlformats.org/drawingml/2006/chart">
-            <c:chart xmlns:c="http://schemas.openxmlformats.org/drawingml/2006/chart" r:id="rId2"/>
-          </a:graphicData>
-        </a:graphic>
-      </p:graphicFrame>
-    </p:spTree>
-  </p:cSld>
-  <p:clrMapOvr>
-    <a:masterClrMapping/>
-  </p:clrMapOvr>
-</p:sld>
-</file>
-
-<file path=ppt/slides/slide9.xml><?xml version="1.0" encoding="utf-8"?>
-<p:sld xmlns:a="http://schemas.openxmlformats.org/drawingml/2006/main" xmlns:p="http://schemas.openxmlformats.org/presentationml/2006/main" xmlns:r="http://schemas.openxmlformats.org/officeDocument/2006/relationships">
-  <p:cSld>
-    <p:spTree>
-      <p:nvGrpSpPr>
-        <p:cNvPr id="1" name=""/>
-        <p:cNvGrpSpPr/>
-        <p:nvPr/>
-      </p:nvGrpSpPr>
-      <p:grpSpPr/>
-      <p:sp>
-        <p:nvSpPr>
-          <p:cNvPr id="2" name="Rectangle 1"/>
-          <p:cNvSpPr/>
-          <p:nvPr/>
-        </p:nvSpPr>
-        <p:spPr>
-          <a:xfrm>
-            <a:off x="0" y="0"/>
-            <a:ext cx="12191695" cy="6858000"/>
-          </a:xfrm>
-          <a:prstGeom prst="rect">
-            <a:avLst/>
-          </a:prstGeom>
-          <a:solidFill>
-            <a:srgbClr val="1E2761"/>
-          </a:solidFill>
-          <a:ln>
-            <a:noFill/>
-          </a:ln>
-          <a:effectLst/>
-        </p:spPr>
-        <p:style>
-          <a:lnRef idx="1">
-            <a:schemeClr val="accent1"/>
-          </a:lnRef>
-          <a:fillRef idx="3">
-            <a:schemeClr val="accent1"/>
-          </a:fillRef>
-          <a:effectRef idx="2">
-            <a:schemeClr val="accent1"/>
-          </a:effectRef>
-          <a:fontRef idx="minor">
-            <a:schemeClr val="lt1"/>
-          </a:fontRef>
-        </p:style>
-        <p:txBody>
-          <a:bodyPr rtlCol="0" anchor="ctr"/>
-          <a:lstStyle/>
-          <a:p>
-            <a:pPr algn="ctr"/>
-          </a:p>
-        </p:txBody>
-      </p:sp>
-      <p:sp>
-        <p:nvSpPr>
-          <p:cNvPr id="3" name="TextBox 2"/>
-          <p:cNvSpPr txBox="1"/>
-          <p:nvPr/>
-        </p:nvSpPr>
-        <p:spPr>
-          <a:xfrm>
-            <a:off x="640080" y="457200"/>
-            <a:ext cx="10515600" cy="731520"/>
-          </a:xfrm>
-          <a:prstGeom prst="rect">
-            <a:avLst/>
-          </a:prstGeom>
-          <a:noFill/>
-        </p:spPr>
-        <p:txBody>
-          <a:bodyPr wrap="square" anchor="t" lIns="0" rIns="0" tIns="0" bIns="0">
-            <a:spAutoFit/>
-          </a:bodyPr>
-          <a:lstStyle/>
-          <a:p>
-            <a:pPr algn="l"/>
-            <a:r>
-              <a:rPr sz="2700" b="1" i="0">
-                <a:solidFill>
-                  <a:srgbClr val="FFFFFF"/>
-                </a:solidFill>
-                <a:latin typeface="Georgia"/>
-              </a:rPr>
-              <a:t>"서비스가 실용성이 없다" — 피드백과 전환</a:t>
-            </a:r>
-          </a:p>
-        </p:txBody>
-      </p:sp>
-      <p:sp>
-        <p:nvSpPr>
-          <p:cNvPr id="4" name="TextBox 3"/>
-          <p:cNvSpPr txBox="1"/>
-          <p:nvPr/>
-        </p:nvSpPr>
-        <p:spPr>
-          <a:xfrm>
-            <a:off x="640080" y="1463040"/>
-            <a:ext cx="5577840" cy="2377440"/>
-          </a:xfrm>
-          <a:prstGeom prst="rect">
-            <a:avLst/>
-          </a:prstGeom>
-          <a:noFill/>
-        </p:spPr>
-        <p:txBody>
-          <a:bodyPr wrap="square">
-            <a:spAutoFit/>
-          </a:bodyPr>
-          <a:lstStyle/>
-          <a:p>
-            <a:pPr>
-              <a:spcAft>
-                <a:spcPts val="800"/>
-              </a:spcAft>
-            </a:pPr>
-            <a:r>
-              <a:rPr sz="1550">
-                <a:solidFill>
-                  <a:srgbClr val="FFFFFF"/>
-                </a:solidFill>
-                <a:latin typeface="Calibri"/>
-              </a:rPr>
-              <a:t>•  기존: 리뷰 텍스트를 입력하면 감성을 알려주는 데모</a:t>
-            </a:r>
-          </a:p>
-          <a:p>
-            <a:pPr>
-              <a:spcAft>
-                <a:spcPts val="800"/>
-              </a:spcAft>
-            </a:pPr>
-            <a:r>
-              <a:rPr sz="1550">
-                <a:solidFill>
-                  <a:srgbClr val="FFFFFF"/>
-                </a:solidFill>
-                <a:latin typeface="Calibri"/>
-              </a:rPr>
-              <a:t>•  문제: 이미 써본 리뷰를 사람이 직접 타이핑할 이유가 없음 — 실용성 없음</a:t>
-            </a:r>
-          </a:p>
-          <a:p>
-            <a:pPr>
-              <a:spcAft>
-                <a:spcPts val="800"/>
-              </a:spcAft>
-            </a:pPr>
-            <a:r>
-              <a:rPr sz="1550">
-                <a:solidFill>
-                  <a:srgbClr val="FFFFFF"/>
-                </a:solidFill>
-                <a:latin typeface="Calibri"/>
-              </a:rPr>
-              <a:t>•  전환: "상품 리포트" — 상품 검색 → 속성별(8개) 장단점 + 대표 리뷰</a:t>
-            </a:r>
-          </a:p>
-        </p:txBody>
-      </p:sp>
-      <p:sp>
-        <p:nvSpPr>
-          <p:cNvPr id="5" name="Rounded Rectangle 4"/>
-          <p:cNvSpPr/>
-          <p:nvPr/>
-        </p:nvSpPr>
-        <p:spPr>
-          <a:xfrm>
-            <a:off x="6492240" y="1371600"/>
-            <a:ext cx="5120640" cy="4846320"/>
-          </a:xfrm>
-          <a:prstGeom prst="roundRect">
-            <a:avLst>
-              <a:gd name="adj" fmla="val 4000"/>
-            </a:avLst>
-          </a:prstGeom>
-          <a:solidFill>
-            <a:srgbClr val="283370"/>
-          </a:solidFill>
-          <a:ln>
-            <a:noFill/>
-          </a:ln>
-          <a:effectLst/>
-        </p:spPr>
-        <p:style>
-          <a:lnRef idx="1">
-            <a:schemeClr val="accent1"/>
-          </a:lnRef>
-          <a:fillRef idx="3">
-            <a:schemeClr val="accent1"/>
-          </a:fillRef>
-          <a:effectRef idx="2">
-            <a:schemeClr val="accent1"/>
-          </a:effectRef>
-          <a:fontRef idx="minor">
-            <a:schemeClr val="lt1"/>
-          </a:fontRef>
-        </p:style>
-        <p:txBody>
-          <a:bodyPr rtlCol="0" anchor="ctr"/>
-          <a:lstStyle/>
-          <a:p>
-            <a:pPr algn="ctr"/>
-          </a:p>
-        </p:txBody>
-      </p:sp>
-      <p:sp>
-        <p:nvSpPr>
-          <p:cNvPr id="6" name="TextBox 5"/>
-          <p:cNvSpPr txBox="1"/>
-          <p:nvPr/>
-        </p:nvSpPr>
-        <p:spPr>
-          <a:xfrm>
-            <a:off x="6858000" y="1645920"/>
-            <a:ext cx="4389120" cy="457200"/>
-          </a:xfrm>
-          <a:prstGeom prst="rect">
-            <a:avLst/>
-          </a:prstGeom>
-          <a:noFill/>
-        </p:spPr>
-        <p:txBody>
-          <a:bodyPr wrap="square" anchor="t" lIns="0" rIns="0" tIns="0" bIns="0">
-            <a:spAutoFit/>
-          </a:bodyPr>
-          <a:lstStyle/>
-          <a:p>
-            <a:pPr algn="l"/>
-            <a:r>
-              <a:rPr sz="1600" b="1" i="0">
-                <a:solidFill>
-                  <a:srgbClr val="F96167"/>
-                </a:solidFill>
-                <a:latin typeface="Calibri"/>
-              </a:rPr>
-              <a:t>실제 발견한 예시</a:t>
-            </a:r>
-          </a:p>
-        </p:txBody>
-      </p:sp>
-      <p:sp>
-        <p:nvSpPr>
-          <p:cNvPr id="7" name="TextBox 6"/>
-          <p:cNvSpPr txBox="1"/>
-          <p:nvPr/>
-        </p:nvSpPr>
-        <p:spPr>
-          <a:xfrm>
-            <a:off x="6858000" y="2286000"/>
-            <a:ext cx="4389120" cy="3657600"/>
-          </a:xfrm>
-          <a:prstGeom prst="rect">
-            <a:avLst/>
-          </a:prstGeom>
-          <a:noFill/>
-        </p:spPr>
-        <p:txBody>
-          <a:bodyPr wrap="square" anchor="t" lIns="0" rIns="0" tIns="0" bIns="0">
-            <a:spAutoFit/>
-          </a:bodyPr>
-          <a:lstStyle/>
-          <a:p>
-            <a:pPr algn="l">
-              <a:lnSpc>
-                <a:spcPct val="150000"/>
-              </a:lnSpc>
-            </a:pPr>
-            <a:r>
-              <a:rPr sz="1450" b="0" i="0">
-                <a:solidFill>
-                  <a:srgbClr val="FFFFFF"/>
-                </a:solidFill>
-                <a:latin typeface="Calibri"/>
-              </a:rPr>
-              <a:t>어떤 토너의 전체 평점: 4.9 / 5 (거의 만점)</a:t>
-            </a:r>
-          </a:p>
-          <a:p>
-            <a:pPr algn="l">
-              <a:lnSpc>
-                <a:spcPct val="150000"/>
-              </a:lnSpc>
-            </a:pPr>
-            <a:r>
-              <a:rPr sz="1450" b="0" i="0">
-                <a:solidFill>
-                  <a:srgbClr val="FFFFFF"/>
-                </a:solidFill>
-                <a:latin typeface="Calibri"/>
-              </a:rPr>
-              <a:t/>
-            </a:r>
-          </a:p>
-          <a:p>
-            <a:pPr algn="l">
-              <a:lnSpc>
-                <a:spcPct val="150000"/>
-              </a:lnSpc>
-            </a:pPr>
-            <a:r>
-              <a:rPr sz="1450" b="0" i="0">
-                <a:solidFill>
-                  <a:srgbClr val="FFFFFF"/>
-                </a:solidFill>
-                <a:latin typeface="Calibri"/>
-              </a:rPr>
-              <a:t>하지만 속성별로 쪼개보면—</a:t>
-            </a:r>
-          </a:p>
-          <a:p>
-            <a:pPr algn="l">
-              <a:lnSpc>
-                <a:spcPct val="150000"/>
-              </a:lnSpc>
-            </a:pPr>
-            <a:r>
-              <a:rPr sz="1450" b="0" i="0">
-                <a:solidFill>
-                  <a:srgbClr val="FFFFFF"/>
-                </a:solidFill>
-                <a:latin typeface="Calibri"/>
-              </a:rPr>
-              <a:t>보습/수분: 긍정 85%</a:t>
-            </a:r>
-          </a:p>
-          <a:p>
-            <a:pPr algn="l">
-              <a:lnSpc>
-                <a:spcPct val="150000"/>
-              </a:lnSpc>
-            </a:pPr>
-            <a:r>
-              <a:rPr sz="1450" b="0" i="0">
-                <a:solidFill>
-                  <a:srgbClr val="FFFFFF"/>
-                </a:solidFill>
-                <a:latin typeface="Calibri"/>
-              </a:rPr>
-              <a:t>가격/가성비: 긍정 96%</a:t>
-            </a:r>
-          </a:p>
-          <a:p>
-            <a:pPr algn="l">
-              <a:lnSpc>
-                <a:spcPct val="150000"/>
-              </a:lnSpc>
-            </a:pPr>
-            <a:r>
-              <a:rPr sz="1450" b="0" i="0">
-                <a:solidFill>
-                  <a:srgbClr val="FFFFFF"/>
-                </a:solidFill>
-                <a:latin typeface="Calibri"/>
-              </a:rPr>
-              <a:t>트러블/자극: 긍정 33% (부정 67%)</a:t>
-            </a:r>
-          </a:p>
-          <a:p>
-            <a:pPr algn="l">
-              <a:lnSpc>
-                <a:spcPct val="150000"/>
-              </a:lnSpc>
-            </a:pPr>
-            <a:r>
-              <a:rPr sz="1450" b="0" i="0">
-                <a:solidFill>
-                  <a:srgbClr val="FFFFFF"/>
-                </a:solidFill>
-                <a:latin typeface="Calibri"/>
-              </a:rPr>
-              <a:t/>
-            </a:r>
-          </a:p>
-          <a:p>
-            <a:pPr algn="l">
-              <a:lnSpc>
-                <a:spcPct val="150000"/>
-              </a:lnSpc>
-            </a:pPr>
-            <a:r>
-              <a:rPr sz="1450" b="0" i="0">
-                <a:solidFill>
-                  <a:srgbClr val="FFFFFF"/>
-                </a:solidFill>
-                <a:latin typeface="Calibri"/>
-              </a:rPr>
-              <a:t>→ 평점만 봐서는 절대 알 수 없는 정보</a:t>
-            </a:r>
-          </a:p>
-        </p:txBody>
-      </p:sp>
-      <p:sp>
-        <p:nvSpPr>
-          <p:cNvPr id="8" name="TextBox 7"/>
-          <p:cNvSpPr txBox="1"/>
-          <p:nvPr/>
-        </p:nvSpPr>
-        <p:spPr>
-          <a:xfrm>
-            <a:off x="640080" y="4114800"/>
-            <a:ext cx="5577840" cy="1645920"/>
-          </a:xfrm>
-          <a:prstGeom prst="rect">
-            <a:avLst/>
-          </a:prstGeom>
-          <a:noFill/>
-        </p:spPr>
-        <p:txBody>
-          <a:bodyPr wrap="square" anchor="t" lIns="0" rIns="0" tIns="0" bIns="0">
-            <a:spAutoFit/>
-          </a:bodyPr>
-          <a:lstStyle/>
-          <a:p>
-            <a:pPr algn="l">
-              <a:lnSpc>
-                <a:spcPct val="140000"/>
-              </a:lnSpc>
-            </a:pPr>
-            <a:r>
-              <a:rPr sz="1250" b="0" i="0">
-                <a:solidFill>
-                  <a:srgbClr val="CADCFC"/>
-                </a:solidFill>
-                <a:latin typeface="Calibri"/>
-              </a:rPr>
-              <a:t>538,774건 전체를 52초에 처리 (규칙 기반 속성분석, absa.py — ML 전체 적용은 Okt 병목으로 비용이 너무 커서 정규식 매칭으로 대체)</a:t>
+              <a:t>•  requirements.txt·사전 집계 데이터 포함으로 재학습 없이 바로 배포 가능하게 구성</a:t>
             </a:r>
           </a:p>
         </p:txBody>

--- a/BeautyScope_발표.pptx
+++ b/BeautyScope_발표.pptx
@@ -306,6 +306,192 @@
 </c:chartSpace>
 </file>
 
+<file path=ppt/charts/chart2.xml><?xml version="1.0" encoding="utf-8"?>
+<c:chartSpace xmlns:c="http://schemas.openxmlformats.org/drawingml/2006/chart" xmlns:a="http://schemas.openxmlformats.org/drawingml/2006/main" xmlns:r="http://schemas.openxmlformats.org/officeDocument/2006/relationships">
+  <c:date1904 val="0"/>
+  <c:chart>
+    <c:autoTitleDeleted val="0"/>
+    <c:plotArea>
+      <c:barChart>
+        <c:barDir val="col"/>
+        <c:grouping val="clustered"/>
+        <c:ser>
+          <c:idx val="0"/>
+          <c:order val="0"/>
+          <c:tx>
+            <c:strRef>
+              <c:f>Sheet1!$B$1</c:f>
+              <c:strCache>
+                <c:ptCount val="1"/>
+                <c:pt idx="0">
+                  <c:v>보정 전</c:v>
+                </c:pt>
+              </c:strCache>
+            </c:strRef>
+          </c:tx>
+          <c:spPr>
+            <a:solidFill>
+              <a:srgbClr val="8A90A8"/>
+            </a:solidFill>
+          </c:spPr>
+          <c:cat>
+            <c:strRef>
+              <c:f>Sheet1!$A$2:$A$5</c:f>
+              <c:strCache>
+                <c:ptCount val="4"/>
+                <c:pt idx="0">
+                  <c:v>ML accuracy</c:v>
+                </c:pt>
+                <c:pt idx="1">
+                  <c:v>ML macro F1</c:v>
+                </c:pt>
+                <c:pt idx="2">
+                  <c:v>DL accuracy</c:v>
+                </c:pt>
+                <c:pt idx="3">
+                  <c:v>DL macro F1</c:v>
+                </c:pt>
+              </c:strCache>
+            </c:strRef>
+          </c:cat>
+          <c:val>
+            <c:numRef>
+              <c:f>Sheet1!$B$2:$B$5</c:f>
+              <c:numCache>
+                <c:formatCode>General</c:formatCode>
+                <c:ptCount val="4"/>
+                <c:pt idx="0">
+                  <c:v>0.806</c:v>
+                </c:pt>
+                <c:pt idx="1">
+                  <c:v>0.626</c:v>
+                </c:pt>
+                <c:pt idx="2">
+                  <c:v>0.89</c:v>
+                </c:pt>
+                <c:pt idx="3">
+                  <c:v>0.712</c:v>
+                </c:pt>
+              </c:numCache>
+            </c:numRef>
+          </c:val>
+        </c:ser>
+        <c:ser>
+          <c:idx val="1"/>
+          <c:order val="1"/>
+          <c:tx>
+            <c:strRef>
+              <c:f>Sheet1!$C$1</c:f>
+              <c:strCache>
+                <c:ptCount val="1"/>
+                <c:pt idx="0">
+                  <c:v>보정 후</c:v>
+                </c:pt>
+              </c:strCache>
+            </c:strRef>
+          </c:tx>
+          <c:spPr>
+            <a:solidFill>
+              <a:srgbClr val="F96167"/>
+            </a:solidFill>
+          </c:spPr>
+          <c:cat>
+            <c:strRef>
+              <c:f>Sheet1!$A$2:$A$5</c:f>
+              <c:strCache>
+                <c:ptCount val="4"/>
+                <c:pt idx="0">
+                  <c:v>ML accuracy</c:v>
+                </c:pt>
+                <c:pt idx="1">
+                  <c:v>ML macro F1</c:v>
+                </c:pt>
+                <c:pt idx="2">
+                  <c:v>DL accuracy</c:v>
+                </c:pt>
+                <c:pt idx="3">
+                  <c:v>DL macro F1</c:v>
+                </c:pt>
+              </c:strCache>
+            </c:strRef>
+          </c:cat>
+          <c:val>
+            <c:numRef>
+              <c:f>Sheet1!$C$2:$C$5</c:f>
+              <c:numCache>
+                <c:formatCode>General</c:formatCode>
+                <c:ptCount val="4"/>
+                <c:pt idx="0">
+                  <c:v>0.909</c:v>
+                </c:pt>
+                <c:pt idx="1">
+                  <c:v>0.675</c:v>
+                </c:pt>
+                <c:pt idx="2">
+                  <c:v>0.92</c:v>
+                </c:pt>
+                <c:pt idx="3">
+                  <c:v>0.711</c:v>
+                </c:pt>
+              </c:numCache>
+            </c:numRef>
+          </c:val>
+        </c:ser>
+        <c:axId val="-2068027336"/>
+        <c:axId val="-2113994440"/>
+      </c:barChart>
+      <c:catAx>
+        <c:axId val="-2068027336"/>
+        <c:scaling>
+          <c:orientation val="minMax"/>
+        </c:scaling>
+        <c:delete val="0"/>
+        <c:axPos val="b"/>
+        <c:majorTickMark val="out"/>
+        <c:minorTickMark val="none"/>
+        <c:tickLblPos val="nextTo"/>
+        <c:crossAx val="-2113994440"/>
+        <c:crosses val="autoZero"/>
+        <c:auto val="1"/>
+        <c:lblAlgn val="ctr"/>
+        <c:lblOffset val="100"/>
+        <c:noMultiLvlLbl val="0"/>
+      </c:catAx>
+      <c:valAx>
+        <c:axId val="-2113994440"/>
+        <c:scaling/>
+        <c:delete val="0"/>
+        <c:axPos val="l"/>
+        <c:majorGridlines/>
+        <c:majorTickMark val="out"/>
+        <c:minorTickMark val="none"/>
+        <c:tickLblPos val="nextTo"/>
+        <c:crossAx val="-2068027336"/>
+        <c:crosses val="autoZero"/>
+      </c:valAx>
+    </c:plotArea>
+    <c:legend>
+      <c:legendPos val="b"/>
+      <c:overlay val="0"/>
+    </c:legend>
+    <c:dispBlanksAs val="gap"/>
+  </c:chart>
+  <c:txPr>
+    <a:bodyPr/>
+    <a:lstStyle/>
+    <a:p>
+      <a:pPr>
+        <a:defRPr sz="1800"/>
+      </a:pPr>
+      <a:endParaRPr lang="en-US"/>
+    </a:p>
+  </c:txPr>
+  <c:externalData r:id="rId1">
+    <c:autoUpdate val="0"/>
+  </c:externalData>
+</c:chartSpace>
+</file>
+
 <file path=ppt/slideLayouts/slideLayout1.xml><?xml version="1.0" encoding="utf-8"?>
 <p:sldLayout xmlns:a="http://schemas.openxmlformats.org/drawingml/2006/main" xmlns:r="http://schemas.openxmlformats.org/officeDocument/2006/relationships" xmlns:p="http://schemas.openxmlformats.org/presentationml/2006/main" type="title" preserve="1">
   <p:cSld name="Title Slide">
@@ -5416,279 +5602,102 @@
           <a:p>
             <a:pPr algn="l"/>
             <a:r>
-              <a:rPr sz="2500" b="1" i="0">
+              <a:rPr sz="2700" b="1" i="0">
                 <a:solidFill>
                   <a:srgbClr val="FFFFFF"/>
                 </a:solidFill>
                 <a:latin typeface="Georgia"/>
               </a:rPr>
-              <a:t>모델 보정 &amp; "실용성 없다" 피드백 반영</a:t>
-            </a:r>
-          </a:p>
-        </p:txBody>
-      </p:sp>
-      <p:sp>
-        <p:nvSpPr>
-          <p:cNvPr id="4" name="Rounded Rectangle 3"/>
+              <a:t>모델 문제 발견 — 실제 분포로 재평가</a:t>
+            </a:r>
+          </a:p>
+        </p:txBody>
+      </p:sp>
+      <p:sp>
+        <p:nvSpPr>
+          <p:cNvPr id="4" name="TextBox 3"/>
+          <p:cNvSpPr txBox="1"/>
+          <p:nvPr/>
+        </p:nvSpPr>
+        <p:spPr>
+          <a:xfrm>
+            <a:off x="640080" y="1554480"/>
+            <a:ext cx="10515600" cy="1828800"/>
+          </a:xfrm>
+          <a:prstGeom prst="rect">
+            <a:avLst/>
+          </a:prstGeom>
+          <a:noFill/>
+        </p:spPr>
+        <p:txBody>
+          <a:bodyPr wrap="square">
+            <a:spAutoFit/>
+          </a:bodyPr>
+          <a:lstStyle/>
+          <a:p>
+            <a:pPr>
+              <a:spcAft>
+                <a:spcPts val="800"/>
+              </a:spcAft>
+            </a:pPr>
+            <a:r>
+              <a:rPr sz="1600">
+                <a:solidFill>
+                  <a:srgbClr val="FFFFFF"/>
+                </a:solidFill>
+                <a:latin typeface="Calibri"/>
+              </a:rPr>
+              <a:t>•  학습 시 클래스 밸런싱(다운샘플링)을 했는데, 실제 운영 비율(positive 86.7%)과 다름</a:t>
+            </a:r>
+          </a:p>
+          <a:p>
+            <a:pPr>
+              <a:spcAft>
+                <a:spcPts val="800"/>
+              </a:spcAft>
+            </a:pPr>
+            <a:r>
+              <a:rPr sz="1600">
+                <a:solidFill>
+                  <a:srgbClr val="FFFFFF"/>
+                </a:solidFill>
+                <a:latin typeface="Calibri"/>
+              </a:rPr>
+              <a:t>•  실제 분포 샘플로 재평가하니 neutral precision이 0.20까지 하락 (label shift)</a:t>
+            </a:r>
+          </a:p>
+          <a:p>
+            <a:pPr>
+              <a:spcAft>
+                <a:spcPts val="800"/>
+              </a:spcAft>
+            </a:pPr>
+            <a:r>
+              <a:rPr sz="1600">
+                <a:solidFill>
+                  <a:srgbClr val="FFFFFF"/>
+                </a:solidFill>
+                <a:latin typeface="Calibri"/>
+              </a:rPr>
+              <a:t>•  = 모델이 "중립"이라고 예측한 것 중 80%가 틀림</a:t>
+            </a:r>
+          </a:p>
+        </p:txBody>
+      </p:sp>
+      <p:sp>
+        <p:nvSpPr>
+          <p:cNvPr id="5" name="Rounded Rectangle 4"/>
           <p:cNvSpPr/>
           <p:nvPr/>
         </p:nvSpPr>
         <p:spPr>
           <a:xfrm>
-            <a:off x="640080" y="1371600"/>
-            <a:ext cx="5303520" cy="4846320"/>
+            <a:off x="640080" y="3291840"/>
+            <a:ext cx="10881360" cy="822960"/>
           </a:xfrm>
           <a:prstGeom prst="roundRect">
             <a:avLst>
-              <a:gd name="adj" fmla="val 5000"/>
-            </a:avLst>
-          </a:prstGeom>
-          <a:solidFill>
-            <a:srgbClr val="283370"/>
-          </a:solidFill>
-          <a:ln>
-            <a:noFill/>
-          </a:ln>
-          <a:effectLst/>
-        </p:spPr>
-        <p:style>
-          <a:lnRef idx="1">
-            <a:schemeClr val="accent1"/>
-          </a:lnRef>
-          <a:fillRef idx="3">
-            <a:schemeClr val="accent1"/>
-          </a:fillRef>
-          <a:effectRef idx="2">
-            <a:schemeClr val="accent1"/>
-          </a:effectRef>
-          <a:fontRef idx="minor">
-            <a:schemeClr val="lt1"/>
-          </a:fontRef>
-        </p:style>
-        <p:txBody>
-          <a:bodyPr rtlCol="0" anchor="ctr"/>
-          <a:lstStyle/>
-          <a:p>
-            <a:pPr algn="ctr"/>
-          </a:p>
-        </p:txBody>
-      </p:sp>
-      <p:sp>
-        <p:nvSpPr>
-          <p:cNvPr id="5" name="TextBox 4"/>
-          <p:cNvSpPr txBox="1"/>
-          <p:nvPr/>
-        </p:nvSpPr>
-        <p:spPr>
-          <a:xfrm>
-            <a:off x="914400" y="1645920"/>
-            <a:ext cx="4663440" cy="457200"/>
-          </a:xfrm>
-          <a:prstGeom prst="rect">
-            <a:avLst/>
-          </a:prstGeom>
-          <a:noFill/>
-        </p:spPr>
-        <p:txBody>
-          <a:bodyPr wrap="square" anchor="t" lIns="0" rIns="0" tIns="0" bIns="0">
-            <a:spAutoFit/>
-          </a:bodyPr>
-          <a:lstStyle/>
-          <a:p>
-            <a:pPr algn="l"/>
-            <a:r>
-              <a:rPr sz="1600" b="1" i="0">
-                <a:solidFill>
-                  <a:srgbClr val="F96167"/>
-                </a:solidFill>
-                <a:latin typeface="Calibri"/>
-              </a:rPr>
-              <a:t>모델 문제 발견 → 보정</a:t>
-            </a:r>
-          </a:p>
-        </p:txBody>
-      </p:sp>
-      <p:sp>
-        <p:nvSpPr>
-          <p:cNvPr id="6" name="TextBox 5"/>
-          <p:cNvSpPr txBox="1"/>
-          <p:nvPr/>
-        </p:nvSpPr>
-        <p:spPr>
-          <a:xfrm>
-            <a:off x="914400" y="2194560"/>
-            <a:ext cx="4663440" cy="3657600"/>
-          </a:xfrm>
-          <a:prstGeom prst="rect">
-            <a:avLst/>
-          </a:prstGeom>
-          <a:noFill/>
-        </p:spPr>
-        <p:txBody>
-          <a:bodyPr wrap="square" anchor="t" lIns="0" rIns="0" tIns="0" bIns="0">
-            <a:spAutoFit/>
-          </a:bodyPr>
-          <a:lstStyle/>
-          <a:p>
-            <a:pPr algn="l">
-              <a:lnSpc>
-                <a:spcPct val="140000"/>
-              </a:lnSpc>
-            </a:pPr>
-            <a:r>
-              <a:rPr sz="1400" b="0" i="0">
-                <a:solidFill>
-                  <a:srgbClr val="FFFFFF"/>
-                </a:solidFill>
-                <a:latin typeface="Calibri"/>
-              </a:rPr>
-              <a:t>학습셋과 실제 운영 비율이 달라</a:t>
-            </a:r>
-          </a:p>
-          <a:p>
-            <a:pPr algn="l">
-              <a:lnSpc>
-                <a:spcPct val="140000"/>
-              </a:lnSpc>
-            </a:pPr>
-            <a:r>
-              <a:rPr sz="1400" b="0" i="0">
-                <a:solidFill>
-                  <a:srgbClr val="FFFFFF"/>
-                </a:solidFill>
-                <a:latin typeface="Calibri"/>
-              </a:rPr>
-              <a:t>neutral precision이 0.20까지 하락</a:t>
-            </a:r>
-          </a:p>
-          <a:p>
-            <a:pPr algn="l">
-              <a:lnSpc>
-                <a:spcPct val="140000"/>
-              </a:lnSpc>
-            </a:pPr>
-            <a:r>
-              <a:rPr sz="1400" b="0" i="0">
-                <a:solidFill>
-                  <a:srgbClr val="FFFFFF"/>
-                </a:solidFill>
-                <a:latin typeface="Calibri"/>
-              </a:rPr>
-              <a:t>(label shift)</a:t>
-            </a:r>
-          </a:p>
-          <a:p>
-            <a:pPr algn="l">
-              <a:lnSpc>
-                <a:spcPct val="140000"/>
-              </a:lnSpc>
-            </a:pPr>
-            <a:r>
-              <a:rPr sz="1400" b="0" i="0">
-                <a:solidFill>
-                  <a:srgbClr val="FFFFFF"/>
-                </a:solidFill>
-                <a:latin typeface="Calibri"/>
-              </a:rPr>
-              <a:t/>
-            </a:r>
-          </a:p>
-          <a:p>
-            <a:pPr algn="l">
-              <a:lnSpc>
-                <a:spcPct val="140000"/>
-              </a:lnSpc>
-            </a:pPr>
-            <a:r>
-              <a:rPr sz="1400" b="0" i="0">
-                <a:solidFill>
-                  <a:srgbClr val="FFFFFF"/>
-                </a:solidFill>
-                <a:latin typeface="Calibri"/>
-              </a:rPr>
-              <a:t>→ 추론 단계에서 확률 보정 추가</a:t>
-            </a:r>
-          </a:p>
-          <a:p>
-            <a:pPr algn="l">
-              <a:lnSpc>
-                <a:spcPct val="140000"/>
-              </a:lnSpc>
-            </a:pPr>
-            <a:r>
-              <a:rPr sz="1400" b="0" i="0">
-                <a:solidFill>
-                  <a:srgbClr val="FFFFFF"/>
-                </a:solidFill>
-                <a:latin typeface="Calibri"/>
-              </a:rPr>
-              <a:t>(재학습 없이)</a:t>
-            </a:r>
-          </a:p>
-          <a:p>
-            <a:pPr algn="l">
-              <a:lnSpc>
-                <a:spcPct val="140000"/>
-              </a:lnSpc>
-            </a:pPr>
-            <a:r>
-              <a:rPr sz="1400" b="0" i="0">
-                <a:solidFill>
-                  <a:srgbClr val="FFFFFF"/>
-                </a:solidFill>
-                <a:latin typeface="Calibri"/>
-              </a:rPr>
-              <a:t/>
-            </a:r>
-          </a:p>
-          <a:p>
-            <a:pPr algn="l">
-              <a:lnSpc>
-                <a:spcPct val="140000"/>
-              </a:lnSpc>
-            </a:pPr>
-            <a:r>
-              <a:rPr sz="1400" b="0" i="0">
-                <a:solidFill>
-                  <a:srgbClr val="FFFFFF"/>
-                </a:solidFill>
-                <a:latin typeface="Calibri"/>
-              </a:rPr>
-              <a:t>ML accuracy: 0.806 → 0.909</a:t>
-            </a:r>
-          </a:p>
-          <a:p>
-            <a:pPr algn="l">
-              <a:lnSpc>
-                <a:spcPct val="140000"/>
-              </a:lnSpc>
-            </a:pPr>
-            <a:r>
-              <a:rPr sz="1400" b="0" i="0">
-                <a:solidFill>
-                  <a:srgbClr val="FFFFFF"/>
-                </a:solidFill>
-                <a:latin typeface="Calibri"/>
-              </a:rPr>
-              <a:t>DL accuracy: 0.890 → 0.920</a:t>
-            </a:r>
-          </a:p>
-        </p:txBody>
-      </p:sp>
-      <p:sp>
-        <p:nvSpPr>
-          <p:cNvPr id="7" name="Rounded Rectangle 6"/>
-          <p:cNvSpPr/>
-          <p:nvPr/>
-        </p:nvSpPr>
-        <p:spPr>
-          <a:xfrm>
-            <a:off x="6217920" y="1371600"/>
-            <a:ext cx="5303520" cy="4846320"/>
-          </a:xfrm>
-          <a:prstGeom prst="roundRect">
-            <a:avLst>
-              <a:gd name="adj" fmla="val 5000"/>
+              <a:gd name="adj" fmla="val 10000"/>
             </a:avLst>
           </a:prstGeom>
           <a:solidFill>
@@ -5723,14 +5732,14 @@
       </p:sp>
       <p:sp>
         <p:nvSpPr>
-          <p:cNvPr id="8" name="TextBox 7"/>
+          <p:cNvPr id="6" name="TextBox 5"/>
           <p:cNvSpPr txBox="1"/>
           <p:nvPr/>
         </p:nvSpPr>
         <p:spPr>
           <a:xfrm>
-            <a:off x="6492240" y="1645920"/>
-            <a:ext cx="4754880" cy="640080"/>
+            <a:off x="914400" y="3520440"/>
+            <a:ext cx="10332720" cy="457200"/>
           </a:xfrm>
           <a:prstGeom prst="rect">
             <a:avLst/>
@@ -5743,170 +5752,37 @@
           </a:bodyPr>
           <a:lstStyle/>
           <a:p>
-            <a:pPr algn="l"/>
-            <a:r>
-              <a:rPr sz="1600" b="1" i="0">
+            <a:pPr algn="ctr"/>
+            <a:r>
+              <a:rPr sz="1500" b="1" i="0">
                 <a:solidFill>
                   <a:srgbClr val="FFFFFF"/>
                 </a:solidFill>
                 <a:latin typeface="Calibri"/>
               </a:rPr>
-              <a:t>서비스 전환: 텍스트 데모 → 상품 리포트</a:t>
-            </a:r>
-          </a:p>
-        </p:txBody>
-      </p:sp>
-      <p:sp>
-        <p:nvSpPr>
-          <p:cNvPr id="9" name="TextBox 8"/>
-          <p:cNvSpPr txBox="1"/>
+              <a:t>해결: 재학습 없이 추론 단계에서 확률 보정 (학습 비율 ↔ 실제 비율 차이로 보정)</a:t>
+            </a:r>
+          </a:p>
+        </p:txBody>
+      </p:sp>
+      <p:graphicFrame>
+        <p:nvGraphicFramePr>
+          <p:cNvPr id="7" name="Chart 6"/>
+          <p:cNvGraphicFramePr>
+            <a:graphicFrameLocks noGrp="1"/>
+          </p:cNvGraphicFramePr>
           <p:nvPr/>
-        </p:nvSpPr>
-        <p:spPr>
-          <a:xfrm>
-            <a:off x="6492240" y="2286000"/>
-            <a:ext cx="4754880" cy="3657600"/>
-          </a:xfrm>
-          <a:prstGeom prst="rect">
-            <a:avLst/>
-          </a:prstGeom>
-          <a:noFill/>
-        </p:spPr>
-        <p:txBody>
-          <a:bodyPr wrap="square" anchor="t" lIns="0" rIns="0" tIns="0" bIns="0">
-            <a:spAutoFit/>
-          </a:bodyPr>
-          <a:lstStyle/>
-          <a:p>
-            <a:pPr algn="l">
-              <a:lnSpc>
-                <a:spcPct val="140000"/>
-              </a:lnSpc>
-            </a:pPr>
-            <a:r>
-              <a:rPr sz="1400" b="0" i="0">
-                <a:solidFill>
-                  <a:srgbClr val="FFFFFF"/>
-                </a:solidFill>
-                <a:latin typeface="Calibri"/>
-              </a:rPr>
-              <a:t>기존: 리뷰를 직접 타이핑해야 하는 데모</a:t>
-            </a:r>
-          </a:p>
-          <a:p>
-            <a:pPr algn="l">
-              <a:lnSpc>
-                <a:spcPct val="140000"/>
-              </a:lnSpc>
-            </a:pPr>
-            <a:r>
-              <a:rPr sz="1400" b="0" i="0">
-                <a:solidFill>
-                  <a:srgbClr val="FFFFFF"/>
-                </a:solidFill>
-                <a:latin typeface="Calibri"/>
-              </a:rPr>
-              <a:t>→ 실용성 없다는 피드백</a:t>
-            </a:r>
-          </a:p>
-          <a:p>
-            <a:pPr algn="l">
-              <a:lnSpc>
-                <a:spcPct val="140000"/>
-              </a:lnSpc>
-            </a:pPr>
-            <a:r>
-              <a:rPr sz="1400" b="0" i="0">
-                <a:solidFill>
-                  <a:srgbClr val="FFFFFF"/>
-                </a:solidFill>
-                <a:latin typeface="Calibri"/>
-              </a:rPr>
-              <a:t/>
-            </a:r>
-          </a:p>
-          <a:p>
-            <a:pPr algn="l">
-              <a:lnSpc>
-                <a:spcPct val="140000"/>
-              </a:lnSpc>
-            </a:pPr>
-            <a:r>
-              <a:rPr sz="1400" b="0" i="0">
-                <a:solidFill>
-                  <a:srgbClr val="FFFFFF"/>
-                </a:solidFill>
-                <a:latin typeface="Calibri"/>
-              </a:rPr>
-              <a:t>전환: 상품 검색 → 속성별(8개) 장단점</a:t>
-            </a:r>
-          </a:p>
-          <a:p>
-            <a:pPr algn="l">
-              <a:lnSpc>
-                <a:spcPct val="140000"/>
-              </a:lnSpc>
-            </a:pPr>
-            <a:r>
-              <a:rPr sz="1400" b="0" i="0">
-                <a:solidFill>
-                  <a:srgbClr val="FFFFFF"/>
-                </a:solidFill>
-                <a:latin typeface="Calibri"/>
-              </a:rPr>
-              <a:t/>
-            </a:r>
-          </a:p>
-          <a:p>
-            <a:pPr algn="l">
-              <a:lnSpc>
-                <a:spcPct val="140000"/>
-              </a:lnSpc>
-            </a:pPr>
-            <a:r>
-              <a:rPr sz="1400" b="0" i="0">
-                <a:solidFill>
-                  <a:srgbClr val="FFFFFF"/>
-                </a:solidFill>
-                <a:latin typeface="Calibri"/>
-              </a:rPr>
-              <a:t>예시 — 어떤 토너 평점 4.9/5인데</a:t>
-            </a:r>
-          </a:p>
-          <a:p>
-            <a:pPr algn="l">
-              <a:lnSpc>
-                <a:spcPct val="140000"/>
-              </a:lnSpc>
-            </a:pPr>
-            <a:r>
-              <a:rPr sz="1400" b="0" i="0">
-                <a:solidFill>
-                  <a:srgbClr val="FFFFFF"/>
-                </a:solidFill>
-                <a:latin typeface="Calibri"/>
-              </a:rPr>
-              <a:t>트러블/자극 속성만 보면 부정 67%</a:t>
-            </a:r>
-          </a:p>
-          <a:p>
-            <a:pPr algn="l">
-              <a:lnSpc>
-                <a:spcPct val="140000"/>
-              </a:lnSpc>
-            </a:pPr>
-            <a:r>
-              <a:rPr sz="1400" b="0" i="0">
-                <a:solidFill>
-                  <a:srgbClr val="FFFFFF"/>
-                </a:solidFill>
-                <a:latin typeface="Calibri"/>
-              </a:rPr>
-              <a:t>→ 평점만 봐서는 알 수 없는 정보</a:t>
-            </a:r>
-          </a:p>
-        </p:txBody>
-      </p:sp>
+        </p:nvGraphicFramePr>
+        <p:xfrm>
+          <a:off x="1645920" y="4297680"/>
+          <a:ext cx="8869680" cy="2194560"/>
+        </p:xfrm>
+        <a:graphic>
+          <a:graphicData uri="http://schemas.openxmlformats.org/drawingml/2006/chart">
+            <c:chart xmlns:c="http://schemas.openxmlformats.org/drawingml/2006/chart" r:id="rId2"/>
+          </a:graphicData>
+        </a:graphic>
+      </p:graphicFrame>
     </p:spTree>
   </p:cSld>
   <p:clrMapOvr>
@@ -5993,13 +5869,13 @@
           <a:p>
             <a:pPr algn="l"/>
             <a:r>
-              <a:rPr sz="3000" b="1" i="0">
+              <a:rPr sz="2400" b="1" i="0">
                 <a:solidFill>
                   <a:srgbClr val="1E2761"/>
                 </a:solidFill>
                 <a:latin typeface="Georgia"/>
               </a:rPr>
-              <a:t>서비스 구성 &amp; 마무리</a:t>
+              <a:t>서비스 진화 — 텍스트 데모에서 실용적 리포트로</a:t>
             </a:r>
           </a:p>
         </p:txBody>
@@ -6013,11 +5889,449 @@
         <p:spPr>
           <a:xfrm>
             <a:off x="640080" y="1463040"/>
-            <a:ext cx="3520440" cy="1828800"/>
+            <a:ext cx="3520440" cy="2468880"/>
           </a:xfrm>
           <a:prstGeom prst="roundRect">
             <a:avLst>
-              <a:gd name="adj" fmla="val 8000"/>
+              <a:gd name="adj" fmla="val 7000"/>
+            </a:avLst>
+          </a:prstGeom>
+          <a:solidFill>
+            <a:srgbClr val="555A6E"/>
+          </a:solidFill>
+          <a:ln>
+            <a:noFill/>
+          </a:ln>
+          <a:effectLst/>
+        </p:spPr>
+        <p:style>
+          <a:lnRef idx="1">
+            <a:schemeClr val="accent1"/>
+          </a:lnRef>
+          <a:fillRef idx="3">
+            <a:schemeClr val="accent1"/>
+          </a:fillRef>
+          <a:effectRef idx="2">
+            <a:schemeClr val="accent1"/>
+          </a:effectRef>
+          <a:fontRef idx="minor">
+            <a:schemeClr val="lt1"/>
+          </a:fontRef>
+        </p:style>
+        <p:txBody>
+          <a:bodyPr rtlCol="0" anchor="ctr"/>
+          <a:lstStyle/>
+          <a:p>
+            <a:pPr algn="ctr"/>
+          </a:p>
+        </p:txBody>
+      </p:sp>
+      <p:sp>
+        <p:nvSpPr>
+          <p:cNvPr id="5" name="TextBox 4"/>
+          <p:cNvSpPr txBox="1"/>
+          <p:nvPr/>
+        </p:nvSpPr>
+        <p:spPr>
+          <a:xfrm>
+            <a:off x="868680" y="1645920"/>
+            <a:ext cx="3063240" cy="365760"/>
+          </a:xfrm>
+          <a:prstGeom prst="rect">
+            <a:avLst/>
+          </a:prstGeom>
+          <a:noFill/>
+        </p:spPr>
+        <p:txBody>
+          <a:bodyPr wrap="square" anchor="t" lIns="0" rIns="0" tIns="0" bIns="0">
+            <a:spAutoFit/>
+          </a:bodyPr>
+          <a:lstStyle/>
+          <a:p>
+            <a:pPr algn="l"/>
+            <a:r>
+              <a:rPr sz="1300" b="1" i="0">
+                <a:solidFill>
+                  <a:srgbClr val="CADCFC"/>
+                </a:solidFill>
+                <a:latin typeface="Calibri"/>
+              </a:rPr>
+              <a:t>1차</a:t>
+            </a:r>
+          </a:p>
+        </p:txBody>
+      </p:sp>
+      <p:sp>
+        <p:nvSpPr>
+          <p:cNvPr id="6" name="TextBox 5"/>
+          <p:cNvSpPr txBox="1"/>
+          <p:nvPr/>
+        </p:nvSpPr>
+        <p:spPr>
+          <a:xfrm>
+            <a:off x="868680" y="2057400"/>
+            <a:ext cx="3063240" cy="1188720"/>
+          </a:xfrm>
+          <a:prstGeom prst="rect">
+            <a:avLst/>
+          </a:prstGeom>
+          <a:noFill/>
+        </p:spPr>
+        <p:txBody>
+          <a:bodyPr wrap="square" anchor="t" lIns="0" rIns="0" tIns="0" bIns="0">
+            <a:spAutoFit/>
+          </a:bodyPr>
+          <a:lstStyle/>
+          <a:p>
+            <a:pPr algn="l">
+              <a:lnSpc>
+                <a:spcPct val="130000"/>
+              </a:lnSpc>
+            </a:pPr>
+            <a:r>
+              <a:rPr sz="1300" b="1" i="0">
+                <a:solidFill>
+                  <a:srgbClr val="FFFFFF"/>
+                </a:solidFill>
+                <a:latin typeface="Calibri"/>
+              </a:rPr>
+              <a:t>리뷰 텍스트를 직접</a:t>
+            </a:r>
+          </a:p>
+          <a:p>
+            <a:pPr algn="l">
+              <a:lnSpc>
+                <a:spcPct val="130000"/>
+              </a:lnSpc>
+            </a:pPr>
+            <a:r>
+              <a:rPr sz="1300" b="1" i="0">
+                <a:solidFill>
+                  <a:srgbClr val="FFFFFF"/>
+                </a:solidFill>
+                <a:latin typeface="Calibri"/>
+              </a:rPr>
+              <a:t>타이핑하는 데모</a:t>
+            </a:r>
+          </a:p>
+        </p:txBody>
+      </p:sp>
+      <p:sp>
+        <p:nvSpPr>
+          <p:cNvPr id="7" name="TextBox 6"/>
+          <p:cNvSpPr txBox="1"/>
+          <p:nvPr/>
+        </p:nvSpPr>
+        <p:spPr>
+          <a:xfrm>
+            <a:off x="868680" y="3337560"/>
+            <a:ext cx="3063240" cy="502920"/>
+          </a:xfrm>
+          <a:prstGeom prst="rect">
+            <a:avLst/>
+          </a:prstGeom>
+          <a:noFill/>
+        </p:spPr>
+        <p:txBody>
+          <a:bodyPr wrap="square" anchor="t" lIns="0" rIns="0" tIns="0" bIns="0">
+            <a:spAutoFit/>
+          </a:bodyPr>
+          <a:lstStyle/>
+          <a:p>
+            <a:pPr algn="l">
+              <a:lnSpc>
+                <a:spcPct val="120000"/>
+              </a:lnSpc>
+            </a:pPr>
+            <a:r>
+              <a:rPr sz="1150" b="0" i="1">
+                <a:solidFill>
+                  <a:srgbClr val="CADCFC"/>
+                </a:solidFill>
+                <a:latin typeface="Calibri"/>
+              </a:rPr>
+              <a:t>→ "실용성 없다" 피드백</a:t>
+            </a:r>
+          </a:p>
+        </p:txBody>
+      </p:sp>
+      <p:sp>
+        <p:nvSpPr>
+          <p:cNvPr id="8" name="Right Arrow 7"/>
+          <p:cNvSpPr/>
+          <p:nvPr/>
+        </p:nvSpPr>
+        <p:spPr>
+          <a:xfrm>
+            <a:off x="4178807" y="2560320"/>
+            <a:ext cx="146304" cy="320040"/>
+          </a:xfrm>
+          <a:prstGeom prst="rightArrow">
+            <a:avLst/>
+          </a:prstGeom>
+          <a:solidFill>
+            <a:srgbClr val="555A6E"/>
+          </a:solidFill>
+          <a:ln>
+            <a:noFill/>
+          </a:ln>
+          <a:effectLst/>
+        </p:spPr>
+        <p:style>
+          <a:lnRef idx="1">
+            <a:schemeClr val="accent1"/>
+          </a:lnRef>
+          <a:fillRef idx="3">
+            <a:schemeClr val="accent1"/>
+          </a:fillRef>
+          <a:effectRef idx="2">
+            <a:schemeClr val="accent1"/>
+          </a:effectRef>
+          <a:fontRef idx="minor">
+            <a:schemeClr val="lt1"/>
+          </a:fontRef>
+        </p:style>
+        <p:txBody>
+          <a:bodyPr rtlCol="0" anchor="ctr"/>
+          <a:lstStyle/>
+          <a:p>
+            <a:pPr algn="ctr"/>
+          </a:p>
+        </p:txBody>
+      </p:sp>
+      <p:sp>
+        <p:nvSpPr>
+          <p:cNvPr id="9" name="Rounded Rectangle 8"/>
+          <p:cNvSpPr/>
+          <p:nvPr/>
+        </p:nvSpPr>
+        <p:spPr>
+          <a:xfrm>
+            <a:off x="4343400" y="1463040"/>
+            <a:ext cx="3520440" cy="2468880"/>
+          </a:xfrm>
+          <a:prstGeom prst="roundRect">
+            <a:avLst>
+              <a:gd name="adj" fmla="val 7000"/>
+            </a:avLst>
+          </a:prstGeom>
+          <a:solidFill>
+            <a:srgbClr val="1E2761"/>
+          </a:solidFill>
+          <a:ln>
+            <a:noFill/>
+          </a:ln>
+          <a:effectLst/>
+        </p:spPr>
+        <p:style>
+          <a:lnRef idx="1">
+            <a:schemeClr val="accent1"/>
+          </a:lnRef>
+          <a:fillRef idx="3">
+            <a:schemeClr val="accent1"/>
+          </a:fillRef>
+          <a:effectRef idx="2">
+            <a:schemeClr val="accent1"/>
+          </a:effectRef>
+          <a:fontRef idx="minor">
+            <a:schemeClr val="lt1"/>
+          </a:fontRef>
+        </p:style>
+        <p:txBody>
+          <a:bodyPr rtlCol="0" anchor="ctr"/>
+          <a:lstStyle/>
+          <a:p>
+            <a:pPr algn="ctr"/>
+          </a:p>
+        </p:txBody>
+      </p:sp>
+      <p:sp>
+        <p:nvSpPr>
+          <p:cNvPr id="10" name="TextBox 9"/>
+          <p:cNvSpPr txBox="1"/>
+          <p:nvPr/>
+        </p:nvSpPr>
+        <p:spPr>
+          <a:xfrm>
+            <a:off x="4572000" y="1645920"/>
+            <a:ext cx="3063240" cy="365760"/>
+          </a:xfrm>
+          <a:prstGeom prst="rect">
+            <a:avLst/>
+          </a:prstGeom>
+          <a:noFill/>
+        </p:spPr>
+        <p:txBody>
+          <a:bodyPr wrap="square" anchor="t" lIns="0" rIns="0" tIns="0" bIns="0">
+            <a:spAutoFit/>
+          </a:bodyPr>
+          <a:lstStyle/>
+          <a:p>
+            <a:pPr algn="l"/>
+            <a:r>
+              <a:rPr sz="1300" b="1" i="0">
+                <a:solidFill>
+                  <a:srgbClr val="CADCFC"/>
+                </a:solidFill>
+                <a:latin typeface="Calibri"/>
+              </a:rPr>
+              <a:t>2차</a:t>
+            </a:r>
+          </a:p>
+        </p:txBody>
+      </p:sp>
+      <p:sp>
+        <p:nvSpPr>
+          <p:cNvPr id="11" name="TextBox 10"/>
+          <p:cNvSpPr txBox="1"/>
+          <p:nvPr/>
+        </p:nvSpPr>
+        <p:spPr>
+          <a:xfrm>
+            <a:off x="4572000" y="2057400"/>
+            <a:ext cx="3063240" cy="1188720"/>
+          </a:xfrm>
+          <a:prstGeom prst="rect">
+            <a:avLst/>
+          </a:prstGeom>
+          <a:noFill/>
+        </p:spPr>
+        <p:txBody>
+          <a:bodyPr wrap="square" anchor="t" lIns="0" rIns="0" tIns="0" bIns="0">
+            <a:spAutoFit/>
+          </a:bodyPr>
+          <a:lstStyle/>
+          <a:p>
+            <a:pPr algn="l">
+              <a:lnSpc>
+                <a:spcPct val="130000"/>
+              </a:lnSpc>
+            </a:pPr>
+            <a:r>
+              <a:rPr sz="1300" b="1" i="0">
+                <a:solidFill>
+                  <a:srgbClr val="FFFFFF"/>
+                </a:solidFill>
+                <a:latin typeface="Calibri"/>
+              </a:rPr>
+              <a:t>상품 검색 → 8개 속성별</a:t>
+            </a:r>
+          </a:p>
+          <a:p>
+            <a:pPr algn="l">
+              <a:lnSpc>
+                <a:spcPct val="130000"/>
+              </a:lnSpc>
+            </a:pPr>
+            <a:r>
+              <a:rPr sz="1300" b="1" i="0">
+                <a:solidFill>
+                  <a:srgbClr val="FFFFFF"/>
+                </a:solidFill>
+                <a:latin typeface="Calibri"/>
+              </a:rPr>
+              <a:t>긍정비율 + 대표리뷰</a:t>
+            </a:r>
+          </a:p>
+        </p:txBody>
+      </p:sp>
+      <p:sp>
+        <p:nvSpPr>
+          <p:cNvPr id="12" name="TextBox 11"/>
+          <p:cNvSpPr txBox="1"/>
+          <p:nvPr/>
+        </p:nvSpPr>
+        <p:spPr>
+          <a:xfrm>
+            <a:off x="4572000" y="3337560"/>
+            <a:ext cx="3063240" cy="502920"/>
+          </a:xfrm>
+          <a:prstGeom prst="rect">
+            <a:avLst/>
+          </a:prstGeom>
+          <a:noFill/>
+        </p:spPr>
+        <p:txBody>
+          <a:bodyPr wrap="square" anchor="t" lIns="0" rIns="0" tIns="0" bIns="0">
+            <a:spAutoFit/>
+          </a:bodyPr>
+          <a:lstStyle/>
+          <a:p>
+            <a:pPr algn="l">
+              <a:lnSpc>
+                <a:spcPct val="120000"/>
+              </a:lnSpc>
+            </a:pPr>
+            <a:r>
+              <a:rPr sz="1150" b="0" i="1">
+                <a:solidFill>
+                  <a:srgbClr val="CADCFC"/>
+                </a:solidFill>
+                <a:latin typeface="Calibri"/>
+              </a:rPr>
+              <a:t>→ "더 구체적이면 좋겠다"</a:t>
+            </a:r>
+          </a:p>
+        </p:txBody>
+      </p:sp>
+      <p:sp>
+        <p:nvSpPr>
+          <p:cNvPr id="13" name="Right Arrow 12"/>
+          <p:cNvSpPr/>
+          <p:nvPr/>
+        </p:nvSpPr>
+        <p:spPr>
+          <a:xfrm>
+            <a:off x="7882127" y="2560320"/>
+            <a:ext cx="146304" cy="320040"/>
+          </a:xfrm>
+          <a:prstGeom prst="rightArrow">
+            <a:avLst/>
+          </a:prstGeom>
+          <a:solidFill>
+            <a:srgbClr val="555A6E"/>
+          </a:solidFill>
+          <a:ln>
+            <a:noFill/>
+          </a:ln>
+          <a:effectLst/>
+        </p:spPr>
+        <p:style>
+          <a:lnRef idx="1">
+            <a:schemeClr val="accent1"/>
+          </a:lnRef>
+          <a:fillRef idx="3">
+            <a:schemeClr val="accent1"/>
+          </a:fillRef>
+          <a:effectRef idx="2">
+            <a:schemeClr val="accent1"/>
+          </a:effectRef>
+          <a:fontRef idx="minor">
+            <a:schemeClr val="lt1"/>
+          </a:fontRef>
+        </p:style>
+        <p:txBody>
+          <a:bodyPr rtlCol="0" anchor="ctr"/>
+          <a:lstStyle/>
+          <a:p>
+            <a:pPr algn="ctr"/>
+          </a:p>
+        </p:txBody>
+      </p:sp>
+      <p:sp>
+        <p:nvSpPr>
+          <p:cNvPr id="14" name="Rounded Rectangle 13"/>
+          <p:cNvSpPr/>
+          <p:nvPr/>
+        </p:nvSpPr>
+        <p:spPr>
+          <a:xfrm>
+            <a:off x="8046719" y="1463040"/>
+            <a:ext cx="3520440" cy="2468880"/>
+          </a:xfrm>
+          <a:prstGeom prst="roundRect">
+            <a:avLst>
+              <a:gd name="adj" fmla="val 7000"/>
             </a:avLst>
           </a:prstGeom>
           <a:solidFill>
@@ -6052,14 +6366,14 @@
       </p:sp>
       <p:sp>
         <p:nvSpPr>
-          <p:cNvPr id="5" name="TextBox 4"/>
+          <p:cNvPr id="15" name="TextBox 14"/>
           <p:cNvSpPr txBox="1"/>
           <p:nvPr/>
         </p:nvSpPr>
         <p:spPr>
           <a:xfrm>
-            <a:off x="868680" y="1664208"/>
-            <a:ext cx="3063240" cy="457200"/>
+            <a:off x="8275319" y="1645920"/>
+            <a:ext cx="3063240" cy="365760"/>
           </a:xfrm>
           <a:prstGeom prst="rect">
             <a:avLst/>
@@ -6074,27 +6388,39 @@
           <a:p>
             <a:pPr algn="l"/>
             <a:r>
-              <a:rPr sz="1450" b="1" i="0">
-                <a:solidFill>
-                  <a:srgbClr val="FFFFFF"/>
+              <a:rPr sz="1300" b="1" i="0">
+                <a:solidFill>
+                  <a:srgbClr val="CADCFC"/>
                 </a:solidFill>
                 <a:latin typeface="Calibri"/>
               </a:rPr>
-              <a:t>🛍️ 상품 리포트</a:t>
-            </a:r>
-          </a:p>
-        </p:txBody>
-      </p:sp>
-      <p:sp>
-        <p:nvSpPr>
-          <p:cNvPr id="6" name="TextBox 5"/>
+              <a:t>3차</a:t>
+            </a:r>
+          </a:p>
+          <a:p>
+            <a:pPr algn="l"/>
+            <a:r>
+              <a:rPr sz="1300" b="1" i="0">
+                <a:solidFill>
+                  <a:srgbClr val="CADCFC"/>
+                </a:solidFill>
+                <a:latin typeface="Calibri"/>
+              </a:rPr>
+              <a:t>(현재)</a:t>
+            </a:r>
+          </a:p>
+        </p:txBody>
+      </p:sp>
+      <p:sp>
+        <p:nvSpPr>
+          <p:cNvPr id="16" name="TextBox 15"/>
           <p:cNvSpPr txBox="1"/>
           <p:nvPr/>
         </p:nvSpPr>
         <p:spPr>
           <a:xfrm>
-            <a:off x="868680" y="2148840"/>
-            <a:ext cx="3063240" cy="1005840"/>
+            <a:off x="8275319" y="2057400"/>
+            <a:ext cx="3063240" cy="1188720"/>
           </a:xfrm>
           <a:prstGeom prst="rect">
             <a:avLst/>
@@ -6113,13 +6439,13 @@
               </a:lnSpc>
             </a:pPr>
             <a:r>
-              <a:rPr sz="1200" b="0" i="0">
-                <a:solidFill>
-                  <a:srgbClr val="CADCFC"/>
+              <a:rPr sz="1300" b="1" i="0">
+                <a:solidFill>
+                  <a:srgbClr val="FFFFFF"/>
                 </a:solidFill>
                 <a:latin typeface="Calibri"/>
               </a:rPr>
-              <a:t>상품 검색 → 속성별 긍정비율</a:t>
+              <a:t>+ 속성별 랭킹</a:t>
             </a:r>
           </a:p>
           <a:p>
@@ -6129,119 +6455,15 @@
               </a:lnSpc>
             </a:pPr>
             <a:r>
-              <a:rPr sz="1200" b="0" i="0">
-                <a:solidFill>
-                  <a:srgbClr val="CADCFC"/>
+              <a:rPr sz="1300" b="1" i="0">
+                <a:solidFill>
+                  <a:srgbClr val="FFFFFF"/>
                 </a:solidFill>
                 <a:latin typeface="Calibri"/>
               </a:rPr>
-              <a:t>+ 대표 긍정/부정 리뷰</a:t>
-            </a:r>
-          </a:p>
-        </p:txBody>
-      </p:sp>
-      <p:sp>
-        <p:nvSpPr>
-          <p:cNvPr id="7" name="Rounded Rectangle 6"/>
-          <p:cNvSpPr/>
-          <p:nvPr/>
-        </p:nvSpPr>
-        <p:spPr>
-          <a:xfrm>
-            <a:off x="4343400" y="1463040"/>
-            <a:ext cx="3520440" cy="1828800"/>
-          </a:xfrm>
-          <a:prstGeom prst="roundRect">
-            <a:avLst>
-              <a:gd name="adj" fmla="val 8000"/>
-            </a:avLst>
-          </a:prstGeom>
-          <a:solidFill>
-            <a:srgbClr val="1E2761"/>
-          </a:solidFill>
-          <a:ln>
-            <a:noFill/>
-          </a:ln>
-          <a:effectLst/>
-        </p:spPr>
-        <p:style>
-          <a:lnRef idx="1">
-            <a:schemeClr val="accent1"/>
-          </a:lnRef>
-          <a:fillRef idx="3">
-            <a:schemeClr val="accent1"/>
-          </a:fillRef>
-          <a:effectRef idx="2">
-            <a:schemeClr val="accent1"/>
-          </a:effectRef>
-          <a:fontRef idx="minor">
-            <a:schemeClr val="lt1"/>
-          </a:fontRef>
-        </p:style>
-        <p:txBody>
-          <a:bodyPr rtlCol="0" anchor="ctr"/>
-          <a:lstStyle/>
-          <a:p>
-            <a:pPr algn="ctr"/>
-          </a:p>
-        </p:txBody>
-      </p:sp>
-      <p:sp>
-        <p:nvSpPr>
-          <p:cNvPr id="8" name="TextBox 7"/>
-          <p:cNvSpPr txBox="1"/>
-          <p:nvPr/>
-        </p:nvSpPr>
-        <p:spPr>
-          <a:xfrm>
-            <a:off x="4572000" y="1664208"/>
-            <a:ext cx="3063240" cy="457200"/>
-          </a:xfrm>
-          <a:prstGeom prst="rect">
-            <a:avLst/>
-          </a:prstGeom>
-          <a:noFill/>
-        </p:spPr>
-        <p:txBody>
-          <a:bodyPr wrap="square" anchor="t" lIns="0" rIns="0" tIns="0" bIns="0">
-            <a:spAutoFit/>
-          </a:bodyPr>
-          <a:lstStyle/>
-          <a:p>
-            <a:pPr algn="l"/>
-            <a:r>
-              <a:rPr sz="1450" b="1" i="0">
-                <a:solidFill>
-                  <a:srgbClr val="FFFFFF"/>
-                </a:solidFill>
-                <a:latin typeface="Calibri"/>
-              </a:rPr>
-              <a:t>🔍 리뷰 텍스트 분석</a:t>
-            </a:r>
-          </a:p>
-        </p:txBody>
-      </p:sp>
-      <p:sp>
-        <p:nvSpPr>
-          <p:cNvPr id="9" name="TextBox 8"/>
-          <p:cNvSpPr txBox="1"/>
-          <p:nvPr/>
-        </p:nvSpPr>
-        <p:spPr>
-          <a:xfrm>
-            <a:off x="4572000" y="2148840"/>
-            <a:ext cx="3063240" cy="1005840"/>
-          </a:xfrm>
-          <a:prstGeom prst="rect">
-            <a:avLst/>
-          </a:prstGeom>
-          <a:noFill/>
-        </p:spPr>
-        <p:txBody>
-          <a:bodyPr wrap="square" anchor="t" lIns="0" rIns="0" tIns="0" bIns="0">
-            <a:spAutoFit/>
-          </a:bodyPr>
-          <a:lstStyle/>
+              <a:t>+ 대안 상품 추천</a:t>
+            </a:r>
+          </a:p>
           <a:p>
             <a:pPr algn="l">
               <a:lnSpc>
@@ -6249,89 +6471,27 @@
               </a:lnSpc>
             </a:pPr>
             <a:r>
-              <a:rPr sz="1200" b="0" i="0">
-                <a:solidFill>
-                  <a:srgbClr val="CADCFC"/>
+              <a:rPr sz="1300" b="1" i="0">
+                <a:solidFill>
+                  <a:srgbClr val="FFFFFF"/>
                 </a:solidFill>
                 <a:latin typeface="Calibri"/>
               </a:rPr>
-              <a:t>텍스트 입력 → ML/DL 동시</a:t>
-            </a:r>
-          </a:p>
-          <a:p>
-            <a:pPr algn="l">
-              <a:lnSpc>
-                <a:spcPct val="130000"/>
-              </a:lnSpc>
-            </a:pPr>
-            <a:r>
-              <a:rPr sz="1200" b="0" i="0">
-                <a:solidFill>
-                  <a:srgbClr val="CADCFC"/>
-                </a:solidFill>
-                <a:latin typeface="Calibri"/>
-              </a:rPr>
-              <a:t>예측 + 확률 시각화</a:t>
-            </a:r>
-          </a:p>
-        </p:txBody>
-      </p:sp>
-      <p:sp>
-        <p:nvSpPr>
-          <p:cNvPr id="10" name="Rounded Rectangle 9"/>
-          <p:cNvSpPr/>
-          <p:nvPr/>
-        </p:nvSpPr>
-        <p:spPr>
-          <a:xfrm>
-            <a:off x="8046719" y="1463040"/>
-            <a:ext cx="3520440" cy="1828800"/>
-          </a:xfrm>
-          <a:prstGeom prst="roundRect">
-            <a:avLst>
-              <a:gd name="adj" fmla="val 8000"/>
-            </a:avLst>
-          </a:prstGeom>
-          <a:solidFill>
-            <a:srgbClr val="1E2761"/>
-          </a:solidFill>
-          <a:ln>
-            <a:noFill/>
-          </a:ln>
-          <a:effectLst/>
-        </p:spPr>
-        <p:style>
-          <a:lnRef idx="1">
-            <a:schemeClr val="accent1"/>
-          </a:lnRef>
-          <a:fillRef idx="3">
-            <a:schemeClr val="accent1"/>
-          </a:fillRef>
-          <a:effectRef idx="2">
-            <a:schemeClr val="accent1"/>
-          </a:effectRef>
-          <a:fontRef idx="minor">
-            <a:schemeClr val="lt1"/>
-          </a:fontRef>
-        </p:style>
-        <p:txBody>
-          <a:bodyPr rtlCol="0" anchor="ctr"/>
-          <a:lstStyle/>
-          <a:p>
-            <a:pPr algn="ctr"/>
-          </a:p>
-        </p:txBody>
-      </p:sp>
-      <p:sp>
-        <p:nvSpPr>
-          <p:cNvPr id="11" name="TextBox 10"/>
+              <a:t>+ 피부타입별 세그먼트</a:t>
+            </a:r>
+          </a:p>
+        </p:txBody>
+      </p:sp>
+      <p:sp>
+        <p:nvSpPr>
+          <p:cNvPr id="17" name="TextBox 16"/>
           <p:cNvSpPr txBox="1"/>
           <p:nvPr/>
         </p:nvSpPr>
         <p:spPr>
           <a:xfrm>
-            <a:off x="8275319" y="1664208"/>
-            <a:ext cx="3063240" cy="457200"/>
+            <a:off x="8275319" y="3337560"/>
+            <a:ext cx="3063240" cy="502920"/>
           </a:xfrm>
           <a:prstGeom prst="rect">
             <a:avLst/>
@@ -6344,29 +6504,33 @@
           </a:bodyPr>
           <a:lstStyle/>
           <a:p>
-            <a:pPr algn="l"/>
-            <a:r>
-              <a:rPr sz="1450" b="1" i="0">
-                <a:solidFill>
-                  <a:srgbClr val="FFFFFF"/>
+            <a:pPr algn="l">
+              <a:lnSpc>
+                <a:spcPct val="120000"/>
+              </a:lnSpc>
+            </a:pPr>
+            <a:r>
+              <a:rPr sz="1150" b="0" i="1">
+                <a:solidFill>
+                  <a:srgbClr val="CADCFC"/>
                 </a:solidFill>
                 <a:latin typeface="Calibri"/>
               </a:rPr>
-              <a:t>📊 데이터 대시보드</a:t>
-            </a:r>
-          </a:p>
-        </p:txBody>
-      </p:sp>
-      <p:sp>
-        <p:nvSpPr>
-          <p:cNvPr id="12" name="TextBox 11"/>
+              <a:t>구매 의사결정까지 지원</a:t>
+            </a:r>
+          </a:p>
+        </p:txBody>
+      </p:sp>
+      <p:sp>
+        <p:nvSpPr>
+          <p:cNvPr id="18" name="TextBox 17"/>
           <p:cNvSpPr txBox="1"/>
           <p:nvPr/>
         </p:nvSpPr>
         <p:spPr>
           <a:xfrm>
-            <a:off x="8275319" y="2148840"/>
-            <a:ext cx="3063240" cy="1005840"/>
+            <a:off x="640080" y="4160520"/>
+            <a:ext cx="10881360" cy="548640"/>
           </a:xfrm>
           <a:prstGeom prst="rect">
             <a:avLst/>
@@ -6379,48 +6543,28 @@
           </a:bodyPr>
           <a:lstStyle/>
           <a:p>
-            <a:pPr algn="l">
-              <a:lnSpc>
-                <a:spcPct val="130000"/>
-              </a:lnSpc>
-            </a:pPr>
-            <a:r>
-              <a:rPr sz="1200" b="0" i="0">
-                <a:solidFill>
-                  <a:srgbClr val="CADCFC"/>
+            <a:pPr algn="l"/>
+            <a:r>
+              <a:rPr sz="1250" b="0" i="1">
+                <a:solidFill>
+                  <a:srgbClr val="555A6E"/>
                 </a:solidFill>
                 <a:latin typeface="Calibri"/>
               </a:rPr>
-              <a:t>플랫폼/별점/트렌드/카테고리</a:t>
-            </a:r>
-          </a:p>
-          <a:p>
-            <a:pPr algn="l">
-              <a:lnSpc>
-                <a:spcPct val="130000"/>
-              </a:lnSpc>
-            </a:pPr>
-            <a:r>
-              <a:rPr sz="1200" b="0" i="0">
-                <a:solidFill>
-                  <a:srgbClr val="CADCFC"/>
-                </a:solidFill>
-                <a:latin typeface="Calibri"/>
-              </a:rPr>
-              <a:t>분포, 형태소 기반 키워드</a:t>
-            </a:r>
-          </a:p>
-        </p:txBody>
-      </p:sp>
-      <p:sp>
-        <p:nvSpPr>
-          <p:cNvPr id="13" name="TextBox 12"/>
+              <a:t>예: 트러블 잘 올라오는 상품 → 같은 카테고리에서 트러블 평가 좋은 대안을 바로 추천 / 건성·지성·복합성·민감성 피부별로 평가가 따로 보임</a:t>
+            </a:r>
+          </a:p>
+        </p:txBody>
+      </p:sp>
+      <p:sp>
+        <p:nvSpPr>
+          <p:cNvPr id="19" name="TextBox 18"/>
           <p:cNvSpPr txBox="1"/>
           <p:nvPr/>
         </p:nvSpPr>
         <p:spPr>
           <a:xfrm>
-            <a:off x="640080" y="3566160"/>
+            <a:off x="640080" y="4846320"/>
             <a:ext cx="10515600" cy="365760"/>
           </a:xfrm>
           <a:prstGeom prst="rect">
@@ -6449,14 +6593,14 @@
       </p:sp>
       <p:sp>
         <p:nvSpPr>
-          <p:cNvPr id="14" name="TextBox 13"/>
+          <p:cNvPr id="20" name="TextBox 19"/>
           <p:cNvSpPr txBox="1"/>
           <p:nvPr/>
         </p:nvSpPr>
         <p:spPr>
           <a:xfrm>
-            <a:off x="640080" y="4023360"/>
-            <a:ext cx="10515600" cy="2377440"/>
+            <a:off x="640080" y="5303520"/>
+            <a:ext cx="10515600" cy="1188720"/>
           </a:xfrm>
           <a:prstGeom prst="rect">
             <a:avLst/>
@@ -6475,13 +6619,13 @@
               </a:spcAft>
             </a:pPr>
             <a:r>
-              <a:rPr sz="1450">
+              <a:rPr sz="1400">
                 <a:solidFill>
                   <a:srgbClr val="21295C"/>
                 </a:solidFill>
                 <a:latin typeface="Calibri"/>
               </a:rPr>
-              <a:t>•  538,774건 데이터를 통일된 기준으로 통합 (가장 큰 난관: 라벨 기준 불일치)</a:t>
+              <a:t>•  538,774건 데이터를 통일된 기준으로 통합, 4개 모델(ML/DL/LSTM/Transformer)을 비교 학습</a:t>
             </a:r>
           </a:p>
           <a:p>
@@ -6491,45 +6635,13 @@
               </a:spcAft>
             </a:pPr>
             <a:r>
-              <a:rPr sz="1450">
+              <a:rPr sz="1400">
                 <a:solidFill>
                   <a:srgbClr val="21295C"/>
                 </a:solidFill>
                 <a:latin typeface="Calibri"/>
               </a:rPr>
-              <a:t>•  환경 제약을 numpy 구현 → 별도 venv 구성으로 단계적으로 해결, 4개 모델 비교</a:t>
-            </a:r>
-          </a:p>
-          <a:p>
-            <a:pPr>
-              <a:spcAft>
-                <a:spcPts val="800"/>
-              </a:spcAft>
-            </a:pPr>
-            <a:r>
-              <a:rPr sz="1450">
-                <a:solidFill>
-                  <a:srgbClr val="21295C"/>
-                </a:solidFill>
-                <a:latin typeface="Calibri"/>
-              </a:rPr>
-              <a:t>•  실제 분포 재평가로 숨은 문제(label shift)를 찾아 보정, ABSA로 서비스를 실용적으로 전환</a:t>
-            </a:r>
-          </a:p>
-          <a:p>
-            <a:pPr>
-              <a:spcAft>
-                <a:spcPts val="800"/>
-              </a:spcAft>
-            </a:pPr>
-            <a:r>
-              <a:rPr sz="1450">
-                <a:solidFill>
-                  <a:srgbClr val="21295C"/>
-                </a:solidFill>
-                <a:latin typeface="Calibri"/>
-              </a:rPr>
-              <a:t>•  requirements.txt·사전 집계 데이터 포함으로 재학습 없이 바로 배포 가능하게 구성</a:t>
+              <a:t>•  실제 분포 재평가로 숨은 문제(label shift)를 찾아 보정, 두 차례 피드백으로 서비스를 실용적으로 발전</a:t>
             </a:r>
           </a:p>
         </p:txBody>

--- a/BeautyScope_발표.pptx
+++ b/BeautyScope_발표.pptx
@@ -11,6 +11,7 @@
     <p:sldId id="259" r:id="rId10"/>
     <p:sldId id="260" r:id="rId11"/>
     <p:sldId id="261" r:id="rId12"/>
+    <p:sldId id="262" r:id="rId13"/>
   </p:sldIdLst>
   <p:sldSz cx="12191695" cy="6858000" type="screen4x3"/>
   <p:notesSz cx="6858000" cy="9144000"/>
@@ -4640,7 +4641,7 @@
             <a:avLst/>
           </a:prstGeom>
           <a:solidFill>
-            <a:srgbClr val="FFFFFF"/>
+            <a:srgbClr val="1E2761"/>
           </a:solidFill>
           <a:ln>
             <a:noFill/>
@@ -4693,35 +4694,70 @@
           <a:p>
             <a:pPr algn="l"/>
             <a:r>
-              <a:rPr sz="2800" b="1" i="0">
-                <a:solidFill>
-                  <a:srgbClr val="1E2761"/>
+              <a:rPr sz="2700" b="1" i="0">
+                <a:solidFill>
+                  <a:srgbClr val="FFFFFF"/>
                 </a:solidFill>
                 <a:latin typeface="Georgia"/>
               </a:rPr>
-              <a:t>데이터 준비 — 가장 까다로웠던 단계</a:t>
-            </a:r>
-          </a:p>
-        </p:txBody>
-      </p:sp>
-      <p:sp>
-        <p:nvSpPr>
-          <p:cNvPr id="4" name="Rounded Rectangle 3"/>
+              <a:t>쿠팡 크롤링 — 봇 탐지를 어떻게 뚫었나</a:t>
+            </a:r>
+          </a:p>
+        </p:txBody>
+      </p:sp>
+      <p:sp>
+        <p:nvSpPr>
+          <p:cNvPr id="4" name="TextBox 3"/>
+          <p:cNvSpPr txBox="1"/>
+          <p:nvPr/>
+        </p:nvSpPr>
+        <p:spPr>
+          <a:xfrm>
+            <a:off x="640080" y="1234440"/>
+            <a:ext cx="10515600" cy="457200"/>
+          </a:xfrm>
+          <a:prstGeom prst="rect">
+            <a:avLst/>
+          </a:prstGeom>
+          <a:noFill/>
+        </p:spPr>
+        <p:txBody>
+          <a:bodyPr wrap="square" anchor="t" lIns="0" rIns="0" tIns="0" bIns="0">
+            <a:spAutoFit/>
+          </a:bodyPr>
+          <a:lstStyle/>
+          <a:p>
+            <a:pPr algn="l"/>
+            <a:r>
+              <a:rPr sz="1450" b="0" i="1">
+                <a:solidFill>
+                  <a:srgbClr val="CADCFC"/>
+                </a:solidFill>
+                <a:latin typeface="Calibri"/>
+              </a:rPr>
+              <a:t>쿠팡은 문지기(Akamai)가 "이 손님이 사람인지 로봇인지" 5단계로 검사한다</a:t>
+            </a:r>
+          </a:p>
+        </p:txBody>
+      </p:sp>
+      <p:sp>
+        <p:nvSpPr>
+          <p:cNvPr id="5" name="Rounded Rectangle 4"/>
           <p:cNvSpPr/>
           <p:nvPr/>
         </p:nvSpPr>
         <p:spPr>
           <a:xfrm>
-            <a:off x="640080" y="1554480"/>
-            <a:ext cx="10881360" cy="1417320"/>
+            <a:off x="640080" y="1828800"/>
+            <a:ext cx="5303520" cy="4206240"/>
           </a:xfrm>
           <a:prstGeom prst="roundRect">
             <a:avLst>
-              <a:gd name="adj" fmla="val 6000"/>
+              <a:gd name="adj" fmla="val 5000"/>
             </a:avLst>
           </a:prstGeom>
           <a:solidFill>
-            <a:srgbClr val="F4F6FC"/>
+            <a:srgbClr val="283370"/>
           </a:solidFill>
           <a:ln>
             <a:noFill/>
@@ -4752,18 +4788,126 @@
       </p:sp>
       <p:sp>
         <p:nvSpPr>
-          <p:cNvPr id="5" name="Rounded Rectangle 4"/>
+          <p:cNvPr id="6" name="TextBox 5"/>
+          <p:cNvSpPr txBox="1"/>
+          <p:nvPr/>
+        </p:nvSpPr>
+        <p:spPr>
+          <a:xfrm>
+            <a:off x="914400" y="2103120"/>
+            <a:ext cx="4663440" cy="457200"/>
+          </a:xfrm>
+          <a:prstGeom prst="rect">
+            <a:avLst/>
+          </a:prstGeom>
+          <a:noFill/>
+        </p:spPr>
+        <p:txBody>
+          <a:bodyPr wrap="square" anchor="t" lIns="0" rIns="0" tIns="0" bIns="0">
+            <a:spAutoFit/>
+          </a:bodyPr>
+          <a:lstStyle/>
+          <a:p>
+            <a:pPr algn="l"/>
+            <a:r>
+              <a:rPr sz="1700" b="1" i="0">
+                <a:solidFill>
+                  <a:srgbClr val="F96167"/>
+                </a:solidFill>
+                <a:latin typeface="Calibri"/>
+              </a:rPr>
+              <a:t>왜 막혔나</a:t>
+            </a:r>
+          </a:p>
+        </p:txBody>
+      </p:sp>
+      <p:sp>
+        <p:nvSpPr>
+          <p:cNvPr id="7" name="TextBox 6"/>
+          <p:cNvSpPr txBox="1"/>
+          <p:nvPr/>
+        </p:nvSpPr>
+        <p:spPr>
+          <a:xfrm>
+            <a:off x="914400" y="2651760"/>
+            <a:ext cx="4754880" cy="3200400"/>
+          </a:xfrm>
+          <a:prstGeom prst="rect">
+            <a:avLst/>
+          </a:prstGeom>
+          <a:noFill/>
+        </p:spPr>
+        <p:txBody>
+          <a:bodyPr wrap="square">
+            <a:spAutoFit/>
+          </a:bodyPr>
+          <a:lstStyle/>
+          <a:p>
+            <a:pPr>
+              <a:spcAft>
+                <a:spcPts val="1400"/>
+              </a:spcAft>
+            </a:pPr>
+            <a:r>
+              <a:rPr sz="1400">
+                <a:solidFill>
+                  <a:srgbClr val="FFFFFF"/>
+                </a:solidFill>
+                <a:latin typeface="Calibri"/>
+              </a:rPr>
+              <a:t>•  requests로 접속 → 헤더만 보고 1단계에서 바로 차단</a:t>
+            </a:r>
+          </a:p>
+          <a:p>
+            <a:pPr>
+              <a:spcAft>
+                <a:spcPts val="1400"/>
+              </a:spcAft>
+            </a:pPr>
+            <a:r>
+              <a:rPr sz="1400">
+                <a:solidFill>
+                  <a:srgbClr val="FFFFFF"/>
+                </a:solidFill>
+                <a:latin typeface="Calibri"/>
+              </a:rPr>
+              <a:t>•  Selenium으로 접속 → "자동화 도구" 흔적이 들켜서
+3단계에서 차단</a:t>
+            </a:r>
+          </a:p>
+          <a:p>
+            <a:pPr>
+              <a:spcAft>
+                <a:spcPts val="1400"/>
+              </a:spcAft>
+            </a:pPr>
+            <a:r>
+              <a:rPr sz="1400">
+                <a:solidFill>
+                  <a:srgbClr val="FFFFFF"/>
+                </a:solidFill>
+                <a:latin typeface="Calibri"/>
+              </a:rPr>
+              <a:t>•  마우스·스크롤 없이 너무 빠르게 요청하면
+행동 패턴에서 차단</a:t>
+            </a:r>
+          </a:p>
+        </p:txBody>
+      </p:sp>
+      <p:sp>
+        <p:nvSpPr>
+          <p:cNvPr id="8" name="Rounded Rectangle 7"/>
           <p:cNvSpPr/>
           <p:nvPr/>
         </p:nvSpPr>
         <p:spPr>
           <a:xfrm>
-            <a:off x="868680" y="1755648"/>
-            <a:ext cx="2743200" cy="438912"/>
+            <a:off x="6217920" y="1828800"/>
+            <a:ext cx="5303520" cy="4206240"/>
           </a:xfrm>
           <a:prstGeom prst="roundRect">
             <a:avLst>
-              <a:gd name="adj" fmla="val 50000"/>
+              <a:gd name="adj" fmla="val 5000"/>
             </a:avLst>
           </a:prstGeom>
           <a:solidFill>
@@ -4789,31 +4933,23 @@
           </a:fontRef>
         </p:style>
         <p:txBody>
-          <a:bodyPr rtlCol="0" anchor="ctr" wrap="none" lIns="45720" rIns="45720" tIns="0" bIns="0"/>
+          <a:bodyPr rtlCol="0" anchor="ctr"/>
           <a:lstStyle/>
           <a:p>
             <a:pPr algn="ctr"/>
-            <a:r>
-              <a:rPr sz="1300" b="1">
-                <a:solidFill>
-                  <a:srgbClr val="FFFFFF"/>
-                </a:solidFill>
-              </a:rPr>
-              <a:t>라벨 기준 불일치 (핵심)</a:t>
-            </a:r>
-          </a:p>
-        </p:txBody>
-      </p:sp>
-      <p:sp>
-        <p:nvSpPr>
-          <p:cNvPr id="6" name="TextBox 5"/>
+          </a:p>
+        </p:txBody>
+      </p:sp>
+      <p:sp>
+        <p:nvSpPr>
+          <p:cNvPr id="9" name="TextBox 8"/>
           <p:cNvSpPr txBox="1"/>
           <p:nvPr/>
         </p:nvSpPr>
         <p:spPr>
           <a:xfrm>
-            <a:off x="3794760" y="1691639"/>
-            <a:ext cx="3520440" cy="1143000"/>
+            <a:off x="6492240" y="2103120"/>
+            <a:ext cx="4754880" cy="457200"/>
           </a:xfrm>
           <a:prstGeom prst="rect">
             <a:avLst/>
@@ -4826,33 +4962,103 @@
           </a:bodyPr>
           <a:lstStyle/>
           <a:p>
-            <a:pPr algn="l">
-              <a:lnSpc>
-                <a:spcPct val="125000"/>
-              </a:lnSpc>
-            </a:pPr>
-            <a:r>
-              <a:rPr sz="1300" b="0" i="0">
-                <a:solidFill>
-                  <a:srgbClr val="555A6E"/>
+            <a:pPr algn="l"/>
+            <a:r>
+              <a:rPr sz="1700" b="1" i="0">
+                <a:solidFill>
+                  <a:srgbClr val="FFFFFF"/>
                 </a:solidFill>
                 <a:latin typeface="Calibri"/>
               </a:rPr>
-              <a:t>무신사 sentiment가 별점 아닌 텍스트분석 기반 → 5점 리뷰의 21%가 '부정'</a:t>
-            </a:r>
-          </a:p>
-        </p:txBody>
-      </p:sp>
-      <p:sp>
-        <p:nvSpPr>
-          <p:cNvPr id="7" name="TextBox 6"/>
+              <a:t>어떻게 뚫었나 — "진짜 손님" 행세</a:t>
+            </a:r>
+          </a:p>
+        </p:txBody>
+      </p:sp>
+      <p:sp>
+        <p:nvSpPr>
+          <p:cNvPr id="10" name="TextBox 9"/>
           <p:cNvSpPr txBox="1"/>
           <p:nvPr/>
         </p:nvSpPr>
         <p:spPr>
           <a:xfrm>
-            <a:off x="7452360" y="1691639"/>
-            <a:ext cx="3931920" cy="1143000"/>
+            <a:off x="6492240" y="2651760"/>
+            <a:ext cx="4754880" cy="3200400"/>
+          </a:xfrm>
+          <a:prstGeom prst="rect">
+            <a:avLst/>
+          </a:prstGeom>
+          <a:noFill/>
+        </p:spPr>
+        <p:txBody>
+          <a:bodyPr wrap="square">
+            <a:spAutoFit/>
+          </a:bodyPr>
+          <a:lstStyle/>
+          <a:p>
+            <a:pPr>
+              <a:spcAft>
+                <a:spcPts val="1400"/>
+              </a:spcAft>
+            </a:pPr>
+            <a:r>
+              <a:rPr sz="1400">
+                <a:solidFill>
+                  <a:srgbClr val="FFFFFF"/>
+                </a:solidFill>
+                <a:latin typeface="Calibri"/>
+              </a:rPr>
+              <a:t>•  가짜 브라우저 대신, 내 컴퓨터의 실제 Chrome을
+그대로 원격 연결해서 사용 (Playwright + CDP)</a:t>
+            </a:r>
+          </a:p>
+          <a:p>
+            <a:pPr>
+              <a:spcAft>
+                <a:spcPts val="1400"/>
+              </a:spcAft>
+            </a:pPr>
+            <a:r>
+              <a:rPr sz="1400">
+                <a:solidFill>
+                  <a:srgbClr val="FFFFFF"/>
+                </a:solidFill>
+                <a:latin typeface="Calibri"/>
+              </a:rPr>
+              <a:t>•  검색창에 키워드를 한 글자씩 타이핑
+(URL로 바로 안 들어감)</a:t>
+            </a:r>
+          </a:p>
+          <a:p>
+            <a:pPr>
+              <a:spcAft>
+                <a:spcPts val="1400"/>
+              </a:spcAft>
+            </a:pPr>
+            <a:r>
+              <a:rPr sz="1400">
+                <a:solidFill>
+                  <a:srgbClr val="FFFFFF"/>
+                </a:solidFill>
+                <a:latin typeface="Calibri"/>
+              </a:rPr>
+              <a:t>•  상품 사이 랜덤 대기, 가끔 쿠팡 홈으로 돌아가
+쉬기 — 사람처럼 행동</a:t>
+            </a:r>
+          </a:p>
+        </p:txBody>
+      </p:sp>
+      <p:sp>
+        <p:nvSpPr>
+          <p:cNvPr id="11" name="TextBox 10"/>
+          <p:cNvSpPr txBox="1"/>
+          <p:nvPr/>
+        </p:nvSpPr>
+        <p:spPr>
+          <a:xfrm>
+            <a:off x="640080" y="6172200"/>
+            <a:ext cx="10881360" cy="457200"/>
           </a:xfrm>
           <a:prstGeom prst="rect">
             <a:avLst/>
@@ -4865,375 +5071,15 @@
           </a:bodyPr>
           <a:lstStyle/>
           <a:p>
-            <a:pPr algn="l">
-              <a:lnSpc>
-                <a:spcPct val="125000"/>
-              </a:lnSpc>
-            </a:pPr>
-            <a:r>
-              <a:rPr sz="1300" b="1" i="0">
-                <a:solidFill>
-                  <a:srgbClr val="1E2761"/>
+            <a:pPr algn="ctr"/>
+            <a:r>
+              <a:rPr sz="1250" b="0" i="1">
+                <a:solidFill>
+                  <a:srgbClr val="CADCFC"/>
                 </a:solidFill>
                 <a:latin typeface="Calibri"/>
               </a:rPr>
-              <a:t>해결 → 전체 데이터의 sentiment를 별점에서 일괄 재계산</a:t>
-            </a:r>
-          </a:p>
-        </p:txBody>
-      </p:sp>
-      <p:sp>
-        <p:nvSpPr>
-          <p:cNvPr id="8" name="Rounded Rectangle 7"/>
-          <p:cNvSpPr/>
-          <p:nvPr/>
-        </p:nvSpPr>
-        <p:spPr>
-          <a:xfrm>
-            <a:off x="640080" y="3154680"/>
-            <a:ext cx="10881360" cy="1417320"/>
-          </a:xfrm>
-          <a:prstGeom prst="roundRect">
-            <a:avLst>
-              <a:gd name="adj" fmla="val 6000"/>
-            </a:avLst>
-          </a:prstGeom>
-          <a:solidFill>
-            <a:srgbClr val="F4F6FC"/>
-          </a:solidFill>
-          <a:ln>
-            <a:noFill/>
-          </a:ln>
-          <a:effectLst/>
-        </p:spPr>
-        <p:style>
-          <a:lnRef idx="1">
-            <a:schemeClr val="accent1"/>
-          </a:lnRef>
-          <a:fillRef idx="3">
-            <a:schemeClr val="accent1"/>
-          </a:fillRef>
-          <a:effectRef idx="2">
-            <a:schemeClr val="accent1"/>
-          </a:effectRef>
-          <a:fontRef idx="minor">
-            <a:schemeClr val="lt1"/>
-          </a:fontRef>
-        </p:style>
-        <p:txBody>
-          <a:bodyPr rtlCol="0" anchor="ctr"/>
-          <a:lstStyle/>
-          <a:p>
-            <a:pPr algn="ctr"/>
-          </a:p>
-        </p:txBody>
-      </p:sp>
-      <p:sp>
-        <p:nvSpPr>
-          <p:cNvPr id="9" name="Rounded Rectangle 8"/>
-          <p:cNvSpPr/>
-          <p:nvPr/>
-        </p:nvSpPr>
-        <p:spPr>
-          <a:xfrm>
-            <a:off x="868680" y="3355848"/>
-            <a:ext cx="2743200" cy="438912"/>
-          </a:xfrm>
-          <a:prstGeom prst="roundRect">
-            <a:avLst>
-              <a:gd name="adj" fmla="val 50000"/>
-            </a:avLst>
-          </a:prstGeom>
-          <a:solidFill>
-            <a:srgbClr val="F96167"/>
-          </a:solidFill>
-          <a:ln>
-            <a:noFill/>
-          </a:ln>
-          <a:effectLst/>
-        </p:spPr>
-        <p:style>
-          <a:lnRef idx="1">
-            <a:schemeClr val="accent1"/>
-          </a:lnRef>
-          <a:fillRef idx="3">
-            <a:schemeClr val="accent1"/>
-          </a:fillRef>
-          <a:effectRef idx="2">
-            <a:schemeClr val="accent1"/>
-          </a:effectRef>
-          <a:fontRef idx="minor">
-            <a:schemeClr val="lt1"/>
-          </a:fontRef>
-        </p:style>
-        <p:txBody>
-          <a:bodyPr rtlCol="0" anchor="ctr" wrap="none" lIns="45720" rIns="45720" tIns="0" bIns="0"/>
-          <a:lstStyle/>
-          <a:p>
-            <a:pPr algn="ctr"/>
-            <a:r>
-              <a:rPr sz="1300" b="1">
-                <a:solidFill>
-                  <a:srgbClr val="FFFFFF"/>
-                </a:solidFill>
-              </a:rPr>
-              <a:t>클래스 불균형</a:t>
-            </a:r>
-          </a:p>
-        </p:txBody>
-      </p:sp>
-      <p:sp>
-        <p:nvSpPr>
-          <p:cNvPr id="10" name="TextBox 9"/>
-          <p:cNvSpPr txBox="1"/>
-          <p:nvPr/>
-        </p:nvSpPr>
-        <p:spPr>
-          <a:xfrm>
-            <a:off x="3794760" y="3291840"/>
-            <a:ext cx="3520440" cy="1143000"/>
-          </a:xfrm>
-          <a:prstGeom prst="rect">
-            <a:avLst/>
-          </a:prstGeom>
-          <a:noFill/>
-        </p:spPr>
-        <p:txBody>
-          <a:bodyPr wrap="square" anchor="t" lIns="0" rIns="0" tIns="0" bIns="0">
-            <a:spAutoFit/>
-          </a:bodyPr>
-          <a:lstStyle/>
-          <a:p>
-            <a:pPr algn="l">
-              <a:lnSpc>
-                <a:spcPct val="125000"/>
-              </a:lnSpc>
-            </a:pPr>
-            <a:r>
-              <a:rPr sz="1300" b="0" i="0">
-                <a:solidFill>
-                  <a:srgbClr val="555A6E"/>
-                </a:solidFill>
-                <a:latin typeface="Calibri"/>
-              </a:rPr>
-              <a:t>긍정 86.7% — 그대로 학습하면 다 긍정 찍어도 86% 정확도</a:t>
-            </a:r>
-          </a:p>
-        </p:txBody>
-      </p:sp>
-      <p:sp>
-        <p:nvSpPr>
-          <p:cNvPr id="11" name="TextBox 10"/>
-          <p:cNvSpPr txBox="1"/>
-          <p:nvPr/>
-        </p:nvSpPr>
-        <p:spPr>
-          <a:xfrm>
-            <a:off x="7452360" y="3291840"/>
-            <a:ext cx="3931920" cy="1143000"/>
-          </a:xfrm>
-          <a:prstGeom prst="rect">
-            <a:avLst/>
-          </a:prstGeom>
-          <a:noFill/>
-        </p:spPr>
-        <p:txBody>
-          <a:bodyPr wrap="square" anchor="t" lIns="0" rIns="0" tIns="0" bIns="0">
-            <a:spAutoFit/>
-          </a:bodyPr>
-          <a:lstStyle/>
-          <a:p>
-            <a:pPr algn="l">
-              <a:lnSpc>
-                <a:spcPct val="125000"/>
-              </a:lnSpc>
-            </a:pPr>
-            <a:r>
-              <a:rPr sz="1300" b="1" i="0">
-                <a:solidFill>
-                  <a:srgbClr val="1E2761"/>
-                </a:solidFill>
-                <a:latin typeface="Calibri"/>
-              </a:rPr>
-              <a:t>해결 → 부정/중립 전량 + 긍정은 2배 규모로만 다운샘플링</a:t>
-            </a:r>
-          </a:p>
-        </p:txBody>
-      </p:sp>
-      <p:sp>
-        <p:nvSpPr>
-          <p:cNvPr id="12" name="Rounded Rectangle 11"/>
-          <p:cNvSpPr/>
-          <p:nvPr/>
-        </p:nvSpPr>
-        <p:spPr>
-          <a:xfrm>
-            <a:off x="640080" y="4754880"/>
-            <a:ext cx="10881360" cy="1417320"/>
-          </a:xfrm>
-          <a:prstGeom prst="roundRect">
-            <a:avLst>
-              <a:gd name="adj" fmla="val 6000"/>
-            </a:avLst>
-          </a:prstGeom>
-          <a:solidFill>
-            <a:srgbClr val="F4F6FC"/>
-          </a:solidFill>
-          <a:ln>
-            <a:noFill/>
-          </a:ln>
-          <a:effectLst/>
-        </p:spPr>
-        <p:style>
-          <a:lnRef idx="1">
-            <a:schemeClr val="accent1"/>
-          </a:lnRef>
-          <a:fillRef idx="3">
-            <a:schemeClr val="accent1"/>
-          </a:fillRef>
-          <a:effectRef idx="2">
-            <a:schemeClr val="accent1"/>
-          </a:effectRef>
-          <a:fontRef idx="minor">
-            <a:schemeClr val="lt1"/>
-          </a:fontRef>
-        </p:style>
-        <p:txBody>
-          <a:bodyPr rtlCol="0" anchor="ctr"/>
-          <a:lstStyle/>
-          <a:p>
-            <a:pPr algn="ctr"/>
-          </a:p>
-        </p:txBody>
-      </p:sp>
-      <p:sp>
-        <p:nvSpPr>
-          <p:cNvPr id="13" name="Rounded Rectangle 12"/>
-          <p:cNvSpPr/>
-          <p:nvPr/>
-        </p:nvSpPr>
-        <p:spPr>
-          <a:xfrm>
-            <a:off x="868680" y="4956048"/>
-            <a:ext cx="2743200" cy="438912"/>
-          </a:xfrm>
-          <a:prstGeom prst="roundRect">
-            <a:avLst>
-              <a:gd name="adj" fmla="val 50000"/>
-            </a:avLst>
-          </a:prstGeom>
-          <a:solidFill>
-            <a:srgbClr val="F96167"/>
-          </a:solidFill>
-          <a:ln>
-            <a:noFill/>
-          </a:ln>
-          <a:effectLst/>
-        </p:spPr>
-        <p:style>
-          <a:lnRef idx="1">
-            <a:schemeClr val="accent1"/>
-          </a:lnRef>
-          <a:fillRef idx="3">
-            <a:schemeClr val="accent1"/>
-          </a:fillRef>
-          <a:effectRef idx="2">
-            <a:schemeClr val="accent1"/>
-          </a:effectRef>
-          <a:fontRef idx="minor">
-            <a:schemeClr val="lt1"/>
-          </a:fontRef>
-        </p:style>
-        <p:txBody>
-          <a:bodyPr rtlCol="0" anchor="ctr" wrap="none" lIns="45720" rIns="45720" tIns="0" bIns="0"/>
-          <a:lstStyle/>
-          <a:p>
-            <a:pPr algn="ctr"/>
-            <a:r>
-              <a:rPr sz="1300" b="1">
-                <a:solidFill>
-                  <a:srgbClr val="FFFFFF"/>
-                </a:solidFill>
-              </a:rPr>
-              <a:t>불용어/형태소 미처리</a:t>
-            </a:r>
-          </a:p>
-        </p:txBody>
-      </p:sp>
-      <p:sp>
-        <p:nvSpPr>
-          <p:cNvPr id="14" name="TextBox 13"/>
-          <p:cNvSpPr txBox="1"/>
-          <p:nvPr/>
-        </p:nvSpPr>
-        <p:spPr>
-          <a:xfrm>
-            <a:off x="3794760" y="4892040"/>
-            <a:ext cx="3520440" cy="1143000"/>
-          </a:xfrm>
-          <a:prstGeom prst="rect">
-            <a:avLst/>
-          </a:prstGeom>
-          <a:noFill/>
-        </p:spPr>
-        <p:txBody>
-          <a:bodyPr wrap="square" anchor="t" lIns="0" rIns="0" tIns="0" bIns="0">
-            <a:spAutoFit/>
-          </a:bodyPr>
-          <a:lstStyle/>
-          <a:p>
-            <a:pPr algn="l">
-              <a:lnSpc>
-                <a:spcPct val="125000"/>
-              </a:lnSpc>
-            </a:pPr>
-            <a:r>
-              <a:rPr sz="1300" b="0" i="0">
-                <a:solidFill>
-                  <a:srgbClr val="555A6E"/>
-                </a:solidFill>
-                <a:latin typeface="Calibri"/>
-              </a:rPr>
-              <a:t>정규식으로만 잘라서 조사가 토큰에 섞임 ("좋아요"≠"좋아서")</a:t>
-            </a:r>
-          </a:p>
-        </p:txBody>
-      </p:sp>
-      <p:sp>
-        <p:nvSpPr>
-          <p:cNvPr id="15" name="TextBox 14"/>
-          <p:cNvSpPr txBox="1"/>
-          <p:nvPr/>
-        </p:nvSpPr>
-        <p:spPr>
-          <a:xfrm>
-            <a:off x="7452360" y="4892040"/>
-            <a:ext cx="3931920" cy="1143000"/>
-          </a:xfrm>
-          <a:prstGeom prst="rect">
-            <a:avLst/>
-          </a:prstGeom>
-          <a:noFill/>
-        </p:spPr>
-        <p:txBody>
-          <a:bodyPr wrap="square" anchor="t" lIns="0" rIns="0" tIns="0" bIns="0">
-            <a:spAutoFit/>
-          </a:bodyPr>
-          <a:lstStyle/>
-          <a:p>
-            <a:pPr algn="l">
-              <a:lnSpc>
-                <a:spcPct val="125000"/>
-              </a:lnSpc>
-            </a:pPr>
-            <a:r>
-              <a:rPr sz="1300" b="1" i="0">
-                <a:solidFill>
-                  <a:srgbClr val="1E2761"/>
-                </a:solidFill>
-                <a:latin typeface="Calibri"/>
-              </a:rPr>
-              <a:t>해결 → Okt 형태소분석 + 어간정규화 + 불용어 제거</a:t>
+              <a:t>핵심: 자동화 도구를 "새로 띄우는" 게 아니라, 이미 로그인된 실제 브라우저에 "숟가락만 얹는" 방식이라 자동화 흔적 자체가 없다</a:t>
             </a:r>
           </a:p>
         </p:txBody>
@@ -5324,6 +5170,637 @@
           <a:p>
             <a:pPr algn="l"/>
             <a:r>
+              <a:rPr sz="2800" b="1" i="0">
+                <a:solidFill>
+                  <a:srgbClr val="1E2761"/>
+                </a:solidFill>
+                <a:latin typeface="Georgia"/>
+              </a:rPr>
+              <a:t>데이터 준비 — 가장 까다로웠던 단계</a:t>
+            </a:r>
+          </a:p>
+        </p:txBody>
+      </p:sp>
+      <p:sp>
+        <p:nvSpPr>
+          <p:cNvPr id="4" name="Rounded Rectangle 3"/>
+          <p:cNvSpPr/>
+          <p:nvPr/>
+        </p:nvSpPr>
+        <p:spPr>
+          <a:xfrm>
+            <a:off x="640080" y="1554480"/>
+            <a:ext cx="10881360" cy="1417320"/>
+          </a:xfrm>
+          <a:prstGeom prst="roundRect">
+            <a:avLst>
+              <a:gd name="adj" fmla="val 6000"/>
+            </a:avLst>
+          </a:prstGeom>
+          <a:solidFill>
+            <a:srgbClr val="F4F6FC"/>
+          </a:solidFill>
+          <a:ln>
+            <a:noFill/>
+          </a:ln>
+          <a:effectLst/>
+        </p:spPr>
+        <p:style>
+          <a:lnRef idx="1">
+            <a:schemeClr val="accent1"/>
+          </a:lnRef>
+          <a:fillRef idx="3">
+            <a:schemeClr val="accent1"/>
+          </a:fillRef>
+          <a:effectRef idx="2">
+            <a:schemeClr val="accent1"/>
+          </a:effectRef>
+          <a:fontRef idx="minor">
+            <a:schemeClr val="lt1"/>
+          </a:fontRef>
+        </p:style>
+        <p:txBody>
+          <a:bodyPr rtlCol="0" anchor="ctr"/>
+          <a:lstStyle/>
+          <a:p>
+            <a:pPr algn="ctr"/>
+          </a:p>
+        </p:txBody>
+      </p:sp>
+      <p:sp>
+        <p:nvSpPr>
+          <p:cNvPr id="5" name="Rounded Rectangle 4"/>
+          <p:cNvSpPr/>
+          <p:nvPr/>
+        </p:nvSpPr>
+        <p:spPr>
+          <a:xfrm>
+            <a:off x="868680" y="1755648"/>
+            <a:ext cx="2743200" cy="438912"/>
+          </a:xfrm>
+          <a:prstGeom prst="roundRect">
+            <a:avLst>
+              <a:gd name="adj" fmla="val 50000"/>
+            </a:avLst>
+          </a:prstGeom>
+          <a:solidFill>
+            <a:srgbClr val="F96167"/>
+          </a:solidFill>
+          <a:ln>
+            <a:noFill/>
+          </a:ln>
+          <a:effectLst/>
+        </p:spPr>
+        <p:style>
+          <a:lnRef idx="1">
+            <a:schemeClr val="accent1"/>
+          </a:lnRef>
+          <a:fillRef idx="3">
+            <a:schemeClr val="accent1"/>
+          </a:fillRef>
+          <a:effectRef idx="2">
+            <a:schemeClr val="accent1"/>
+          </a:effectRef>
+          <a:fontRef idx="minor">
+            <a:schemeClr val="lt1"/>
+          </a:fontRef>
+        </p:style>
+        <p:txBody>
+          <a:bodyPr rtlCol="0" anchor="ctr" wrap="none" lIns="45720" rIns="45720" tIns="0" bIns="0"/>
+          <a:lstStyle/>
+          <a:p>
+            <a:pPr algn="ctr"/>
+            <a:r>
+              <a:rPr sz="1300" b="1">
+                <a:solidFill>
+                  <a:srgbClr val="FFFFFF"/>
+                </a:solidFill>
+              </a:rPr>
+              <a:t>라벨 기준 불일치 (핵심)</a:t>
+            </a:r>
+          </a:p>
+        </p:txBody>
+      </p:sp>
+      <p:sp>
+        <p:nvSpPr>
+          <p:cNvPr id="6" name="TextBox 5"/>
+          <p:cNvSpPr txBox="1"/>
+          <p:nvPr/>
+        </p:nvSpPr>
+        <p:spPr>
+          <a:xfrm>
+            <a:off x="3794760" y="1691639"/>
+            <a:ext cx="3520440" cy="1143000"/>
+          </a:xfrm>
+          <a:prstGeom prst="rect">
+            <a:avLst/>
+          </a:prstGeom>
+          <a:noFill/>
+        </p:spPr>
+        <p:txBody>
+          <a:bodyPr wrap="square" anchor="t" lIns="0" rIns="0" tIns="0" bIns="0">
+            <a:spAutoFit/>
+          </a:bodyPr>
+          <a:lstStyle/>
+          <a:p>
+            <a:pPr algn="l">
+              <a:lnSpc>
+                <a:spcPct val="125000"/>
+              </a:lnSpc>
+            </a:pPr>
+            <a:r>
+              <a:rPr sz="1300" b="0" i="0">
+                <a:solidFill>
+                  <a:srgbClr val="555A6E"/>
+                </a:solidFill>
+                <a:latin typeface="Calibri"/>
+              </a:rPr>
+              <a:t>무신사 sentiment가 별점 아닌 텍스트분석 기반 → 5점 리뷰의 21%가 '부정'</a:t>
+            </a:r>
+          </a:p>
+        </p:txBody>
+      </p:sp>
+      <p:sp>
+        <p:nvSpPr>
+          <p:cNvPr id="7" name="TextBox 6"/>
+          <p:cNvSpPr txBox="1"/>
+          <p:nvPr/>
+        </p:nvSpPr>
+        <p:spPr>
+          <a:xfrm>
+            <a:off x="7452360" y="1691639"/>
+            <a:ext cx="3931920" cy="1143000"/>
+          </a:xfrm>
+          <a:prstGeom prst="rect">
+            <a:avLst/>
+          </a:prstGeom>
+          <a:noFill/>
+        </p:spPr>
+        <p:txBody>
+          <a:bodyPr wrap="square" anchor="t" lIns="0" rIns="0" tIns="0" bIns="0">
+            <a:spAutoFit/>
+          </a:bodyPr>
+          <a:lstStyle/>
+          <a:p>
+            <a:pPr algn="l">
+              <a:lnSpc>
+                <a:spcPct val="125000"/>
+              </a:lnSpc>
+            </a:pPr>
+            <a:r>
+              <a:rPr sz="1300" b="1" i="0">
+                <a:solidFill>
+                  <a:srgbClr val="1E2761"/>
+                </a:solidFill>
+                <a:latin typeface="Calibri"/>
+              </a:rPr>
+              <a:t>해결 → 전체 데이터의 sentiment를 별점에서 일괄 재계산</a:t>
+            </a:r>
+          </a:p>
+        </p:txBody>
+      </p:sp>
+      <p:sp>
+        <p:nvSpPr>
+          <p:cNvPr id="8" name="Rounded Rectangle 7"/>
+          <p:cNvSpPr/>
+          <p:nvPr/>
+        </p:nvSpPr>
+        <p:spPr>
+          <a:xfrm>
+            <a:off x="640080" y="3154680"/>
+            <a:ext cx="10881360" cy="1417320"/>
+          </a:xfrm>
+          <a:prstGeom prst="roundRect">
+            <a:avLst>
+              <a:gd name="adj" fmla="val 6000"/>
+            </a:avLst>
+          </a:prstGeom>
+          <a:solidFill>
+            <a:srgbClr val="F4F6FC"/>
+          </a:solidFill>
+          <a:ln>
+            <a:noFill/>
+          </a:ln>
+          <a:effectLst/>
+        </p:spPr>
+        <p:style>
+          <a:lnRef idx="1">
+            <a:schemeClr val="accent1"/>
+          </a:lnRef>
+          <a:fillRef idx="3">
+            <a:schemeClr val="accent1"/>
+          </a:fillRef>
+          <a:effectRef idx="2">
+            <a:schemeClr val="accent1"/>
+          </a:effectRef>
+          <a:fontRef idx="minor">
+            <a:schemeClr val="lt1"/>
+          </a:fontRef>
+        </p:style>
+        <p:txBody>
+          <a:bodyPr rtlCol="0" anchor="ctr"/>
+          <a:lstStyle/>
+          <a:p>
+            <a:pPr algn="ctr"/>
+          </a:p>
+        </p:txBody>
+      </p:sp>
+      <p:sp>
+        <p:nvSpPr>
+          <p:cNvPr id="9" name="Rounded Rectangle 8"/>
+          <p:cNvSpPr/>
+          <p:nvPr/>
+        </p:nvSpPr>
+        <p:spPr>
+          <a:xfrm>
+            <a:off x="868680" y="3355848"/>
+            <a:ext cx="2743200" cy="438912"/>
+          </a:xfrm>
+          <a:prstGeom prst="roundRect">
+            <a:avLst>
+              <a:gd name="adj" fmla="val 50000"/>
+            </a:avLst>
+          </a:prstGeom>
+          <a:solidFill>
+            <a:srgbClr val="F96167"/>
+          </a:solidFill>
+          <a:ln>
+            <a:noFill/>
+          </a:ln>
+          <a:effectLst/>
+        </p:spPr>
+        <p:style>
+          <a:lnRef idx="1">
+            <a:schemeClr val="accent1"/>
+          </a:lnRef>
+          <a:fillRef idx="3">
+            <a:schemeClr val="accent1"/>
+          </a:fillRef>
+          <a:effectRef idx="2">
+            <a:schemeClr val="accent1"/>
+          </a:effectRef>
+          <a:fontRef idx="minor">
+            <a:schemeClr val="lt1"/>
+          </a:fontRef>
+        </p:style>
+        <p:txBody>
+          <a:bodyPr rtlCol="0" anchor="ctr" wrap="none" lIns="45720" rIns="45720" tIns="0" bIns="0"/>
+          <a:lstStyle/>
+          <a:p>
+            <a:pPr algn="ctr"/>
+            <a:r>
+              <a:rPr sz="1300" b="1">
+                <a:solidFill>
+                  <a:srgbClr val="FFFFFF"/>
+                </a:solidFill>
+              </a:rPr>
+              <a:t>클래스 불균형</a:t>
+            </a:r>
+          </a:p>
+        </p:txBody>
+      </p:sp>
+      <p:sp>
+        <p:nvSpPr>
+          <p:cNvPr id="10" name="TextBox 9"/>
+          <p:cNvSpPr txBox="1"/>
+          <p:nvPr/>
+        </p:nvSpPr>
+        <p:spPr>
+          <a:xfrm>
+            <a:off x="3794760" y="3291840"/>
+            <a:ext cx="3520440" cy="1143000"/>
+          </a:xfrm>
+          <a:prstGeom prst="rect">
+            <a:avLst/>
+          </a:prstGeom>
+          <a:noFill/>
+        </p:spPr>
+        <p:txBody>
+          <a:bodyPr wrap="square" anchor="t" lIns="0" rIns="0" tIns="0" bIns="0">
+            <a:spAutoFit/>
+          </a:bodyPr>
+          <a:lstStyle/>
+          <a:p>
+            <a:pPr algn="l">
+              <a:lnSpc>
+                <a:spcPct val="125000"/>
+              </a:lnSpc>
+            </a:pPr>
+            <a:r>
+              <a:rPr sz="1300" b="0" i="0">
+                <a:solidFill>
+                  <a:srgbClr val="555A6E"/>
+                </a:solidFill>
+                <a:latin typeface="Calibri"/>
+              </a:rPr>
+              <a:t>긍정 86.7% — 그대로 학습하면 다 긍정 찍어도 86% 정확도</a:t>
+            </a:r>
+          </a:p>
+        </p:txBody>
+      </p:sp>
+      <p:sp>
+        <p:nvSpPr>
+          <p:cNvPr id="11" name="TextBox 10"/>
+          <p:cNvSpPr txBox="1"/>
+          <p:nvPr/>
+        </p:nvSpPr>
+        <p:spPr>
+          <a:xfrm>
+            <a:off x="7452360" y="3291840"/>
+            <a:ext cx="3931920" cy="1143000"/>
+          </a:xfrm>
+          <a:prstGeom prst="rect">
+            <a:avLst/>
+          </a:prstGeom>
+          <a:noFill/>
+        </p:spPr>
+        <p:txBody>
+          <a:bodyPr wrap="square" anchor="t" lIns="0" rIns="0" tIns="0" bIns="0">
+            <a:spAutoFit/>
+          </a:bodyPr>
+          <a:lstStyle/>
+          <a:p>
+            <a:pPr algn="l">
+              <a:lnSpc>
+                <a:spcPct val="125000"/>
+              </a:lnSpc>
+            </a:pPr>
+            <a:r>
+              <a:rPr sz="1300" b="1" i="0">
+                <a:solidFill>
+                  <a:srgbClr val="1E2761"/>
+                </a:solidFill>
+                <a:latin typeface="Calibri"/>
+              </a:rPr>
+              <a:t>해결 → 부정/중립 전량 + 긍정은 2배 규모로만 다운샘플링</a:t>
+            </a:r>
+          </a:p>
+        </p:txBody>
+      </p:sp>
+      <p:sp>
+        <p:nvSpPr>
+          <p:cNvPr id="12" name="Rounded Rectangle 11"/>
+          <p:cNvSpPr/>
+          <p:nvPr/>
+        </p:nvSpPr>
+        <p:spPr>
+          <a:xfrm>
+            <a:off x="640080" y="4754880"/>
+            <a:ext cx="10881360" cy="1417320"/>
+          </a:xfrm>
+          <a:prstGeom prst="roundRect">
+            <a:avLst>
+              <a:gd name="adj" fmla="val 6000"/>
+            </a:avLst>
+          </a:prstGeom>
+          <a:solidFill>
+            <a:srgbClr val="F4F6FC"/>
+          </a:solidFill>
+          <a:ln>
+            <a:noFill/>
+          </a:ln>
+          <a:effectLst/>
+        </p:spPr>
+        <p:style>
+          <a:lnRef idx="1">
+            <a:schemeClr val="accent1"/>
+          </a:lnRef>
+          <a:fillRef idx="3">
+            <a:schemeClr val="accent1"/>
+          </a:fillRef>
+          <a:effectRef idx="2">
+            <a:schemeClr val="accent1"/>
+          </a:effectRef>
+          <a:fontRef idx="minor">
+            <a:schemeClr val="lt1"/>
+          </a:fontRef>
+        </p:style>
+        <p:txBody>
+          <a:bodyPr rtlCol="0" anchor="ctr"/>
+          <a:lstStyle/>
+          <a:p>
+            <a:pPr algn="ctr"/>
+          </a:p>
+        </p:txBody>
+      </p:sp>
+      <p:sp>
+        <p:nvSpPr>
+          <p:cNvPr id="13" name="Rounded Rectangle 12"/>
+          <p:cNvSpPr/>
+          <p:nvPr/>
+        </p:nvSpPr>
+        <p:spPr>
+          <a:xfrm>
+            <a:off x="868680" y="4956048"/>
+            <a:ext cx="2743200" cy="438912"/>
+          </a:xfrm>
+          <a:prstGeom prst="roundRect">
+            <a:avLst>
+              <a:gd name="adj" fmla="val 50000"/>
+            </a:avLst>
+          </a:prstGeom>
+          <a:solidFill>
+            <a:srgbClr val="F96167"/>
+          </a:solidFill>
+          <a:ln>
+            <a:noFill/>
+          </a:ln>
+          <a:effectLst/>
+        </p:spPr>
+        <p:style>
+          <a:lnRef idx="1">
+            <a:schemeClr val="accent1"/>
+          </a:lnRef>
+          <a:fillRef idx="3">
+            <a:schemeClr val="accent1"/>
+          </a:fillRef>
+          <a:effectRef idx="2">
+            <a:schemeClr val="accent1"/>
+          </a:effectRef>
+          <a:fontRef idx="minor">
+            <a:schemeClr val="lt1"/>
+          </a:fontRef>
+        </p:style>
+        <p:txBody>
+          <a:bodyPr rtlCol="0" anchor="ctr" wrap="none" lIns="45720" rIns="45720" tIns="0" bIns="0"/>
+          <a:lstStyle/>
+          <a:p>
+            <a:pPr algn="ctr"/>
+            <a:r>
+              <a:rPr sz="1300" b="1">
+                <a:solidFill>
+                  <a:srgbClr val="FFFFFF"/>
+                </a:solidFill>
+              </a:rPr>
+              <a:t>불용어/형태소 미처리</a:t>
+            </a:r>
+          </a:p>
+        </p:txBody>
+      </p:sp>
+      <p:sp>
+        <p:nvSpPr>
+          <p:cNvPr id="14" name="TextBox 13"/>
+          <p:cNvSpPr txBox="1"/>
+          <p:nvPr/>
+        </p:nvSpPr>
+        <p:spPr>
+          <a:xfrm>
+            <a:off x="3794760" y="4892040"/>
+            <a:ext cx="3520440" cy="1143000"/>
+          </a:xfrm>
+          <a:prstGeom prst="rect">
+            <a:avLst/>
+          </a:prstGeom>
+          <a:noFill/>
+        </p:spPr>
+        <p:txBody>
+          <a:bodyPr wrap="square" anchor="t" lIns="0" rIns="0" tIns="0" bIns="0">
+            <a:spAutoFit/>
+          </a:bodyPr>
+          <a:lstStyle/>
+          <a:p>
+            <a:pPr algn="l">
+              <a:lnSpc>
+                <a:spcPct val="125000"/>
+              </a:lnSpc>
+            </a:pPr>
+            <a:r>
+              <a:rPr sz="1300" b="0" i="0">
+                <a:solidFill>
+                  <a:srgbClr val="555A6E"/>
+                </a:solidFill>
+                <a:latin typeface="Calibri"/>
+              </a:rPr>
+              <a:t>정규식으로만 잘라서 조사가 토큰에 섞임 ("좋아요"≠"좋아서")</a:t>
+            </a:r>
+          </a:p>
+        </p:txBody>
+      </p:sp>
+      <p:sp>
+        <p:nvSpPr>
+          <p:cNvPr id="15" name="TextBox 14"/>
+          <p:cNvSpPr txBox="1"/>
+          <p:nvPr/>
+        </p:nvSpPr>
+        <p:spPr>
+          <a:xfrm>
+            <a:off x="7452360" y="4892040"/>
+            <a:ext cx="3931920" cy="1143000"/>
+          </a:xfrm>
+          <a:prstGeom prst="rect">
+            <a:avLst/>
+          </a:prstGeom>
+          <a:noFill/>
+        </p:spPr>
+        <p:txBody>
+          <a:bodyPr wrap="square" anchor="t" lIns="0" rIns="0" tIns="0" bIns="0">
+            <a:spAutoFit/>
+          </a:bodyPr>
+          <a:lstStyle/>
+          <a:p>
+            <a:pPr algn="l">
+              <a:lnSpc>
+                <a:spcPct val="125000"/>
+              </a:lnSpc>
+            </a:pPr>
+            <a:r>
+              <a:rPr sz="1300" b="1" i="0">
+                <a:solidFill>
+                  <a:srgbClr val="1E2761"/>
+                </a:solidFill>
+                <a:latin typeface="Calibri"/>
+              </a:rPr>
+              <a:t>해결 → Okt 형태소분석 + 어간정규화 + 불용어 제거</a:t>
+            </a:r>
+          </a:p>
+        </p:txBody>
+      </p:sp>
+    </p:spTree>
+  </p:cSld>
+  <p:clrMapOvr>
+    <a:masterClrMapping/>
+  </p:clrMapOvr>
+</p:sld>
+</file>
+
+<file path=ppt/slides/slide5.xml><?xml version="1.0" encoding="utf-8"?>
+<p:sld xmlns:a="http://schemas.openxmlformats.org/drawingml/2006/main" xmlns:p="http://schemas.openxmlformats.org/presentationml/2006/main" xmlns:r="http://schemas.openxmlformats.org/officeDocument/2006/relationships">
+  <p:cSld>
+    <p:spTree>
+      <p:nvGrpSpPr>
+        <p:cNvPr id="1" name=""/>
+        <p:cNvGrpSpPr/>
+        <p:nvPr/>
+      </p:nvGrpSpPr>
+      <p:grpSpPr/>
+      <p:sp>
+        <p:nvSpPr>
+          <p:cNvPr id="2" name="Rectangle 1"/>
+          <p:cNvSpPr/>
+          <p:nvPr/>
+        </p:nvSpPr>
+        <p:spPr>
+          <a:xfrm>
+            <a:off x="0" y="0"/>
+            <a:ext cx="12191695" cy="6858000"/>
+          </a:xfrm>
+          <a:prstGeom prst="rect">
+            <a:avLst/>
+          </a:prstGeom>
+          <a:solidFill>
+            <a:srgbClr val="FFFFFF"/>
+          </a:solidFill>
+          <a:ln>
+            <a:noFill/>
+          </a:ln>
+          <a:effectLst/>
+        </p:spPr>
+        <p:style>
+          <a:lnRef idx="1">
+            <a:schemeClr val="accent1"/>
+          </a:lnRef>
+          <a:fillRef idx="3">
+            <a:schemeClr val="accent1"/>
+          </a:fillRef>
+          <a:effectRef idx="2">
+            <a:schemeClr val="accent1"/>
+          </a:effectRef>
+          <a:fontRef idx="minor">
+            <a:schemeClr val="lt1"/>
+          </a:fontRef>
+        </p:style>
+        <p:txBody>
+          <a:bodyPr rtlCol="0" anchor="ctr"/>
+          <a:lstStyle/>
+          <a:p>
+            <a:pPr algn="ctr"/>
+          </a:p>
+        </p:txBody>
+      </p:sp>
+      <p:sp>
+        <p:nvSpPr>
+          <p:cNvPr id="3" name="TextBox 2"/>
+          <p:cNvSpPr txBox="1"/>
+          <p:nvPr/>
+        </p:nvSpPr>
+        <p:spPr>
+          <a:xfrm>
+            <a:off x="640080" y="457200"/>
+            <a:ext cx="10515600" cy="731520"/>
+          </a:xfrm>
+          <a:prstGeom prst="rect">
+            <a:avLst/>
+          </a:prstGeom>
+          <a:noFill/>
+        </p:spPr>
+        <p:txBody>
+          <a:bodyPr wrap="square" anchor="t" lIns="0" rIns="0" tIns="0" bIns="0">
+            <a:spAutoFit/>
+          </a:bodyPr>
+          <a:lstStyle/>
+          <a:p>
+            <a:pPr algn="l"/>
+            <a:r>
               <a:rPr sz="2400" b="1" i="0">
                 <a:solidFill>
                   <a:srgbClr val="1E2761"/>
@@ -5524,7 +6001,7 @@
 </p:sld>
 </file>
 
-<file path=ppt/slides/slide5.xml><?xml version="1.0" encoding="utf-8"?>
+<file path=ppt/slides/slide6.xml><?xml version="1.0" encoding="utf-8"?>
 <p:sld xmlns:a="http://schemas.openxmlformats.org/drawingml/2006/main" xmlns:p="http://schemas.openxmlformats.org/presentationml/2006/main" xmlns:r="http://schemas.openxmlformats.org/officeDocument/2006/relationships">
   <p:cSld>
     <p:spTree>
@@ -5791,7 +6268,7 @@
 </p:sld>
 </file>
 
-<file path=ppt/slides/slide6.xml><?xml version="1.0" encoding="utf-8"?>
+<file path=ppt/slides/slide7.xml><?xml version="1.0" encoding="utf-8"?>
 <p:sld xmlns:a="http://schemas.openxmlformats.org/drawingml/2006/main" xmlns:p="http://schemas.openxmlformats.org/presentationml/2006/main" xmlns:r="http://schemas.openxmlformats.org/officeDocument/2006/relationships">
   <p:cSld>
     <p:spTree>

--- a/BeautyScope_발표.pptx
+++ b/BeautyScope_발표.pptx
@@ -12,6 +12,7 @@
     <p:sldId id="260" r:id="rId11"/>
     <p:sldId id="261" r:id="rId12"/>
     <p:sldId id="262" r:id="rId13"/>
+    <p:sldId id="263" r:id="rId14"/>
   </p:sldIdLst>
   <p:sldSz cx="12191695" cy="6858000" type="screen4x3"/>
   <p:notesSz cx="6858000" cy="9144000"/>
@@ -3526,7 +3527,7 @@
         </p:nvSpPr>
         <p:spPr>
           <a:xfrm>
-            <a:off x="914400" y="2011680"/>
+            <a:off x="914400" y="1737360"/>
             <a:ext cx="10332720" cy="1097280"/>
           </a:xfrm>
           <a:prstGeom prst="rect">
@@ -3561,7 +3562,7 @@
         </p:nvSpPr>
         <p:spPr>
           <a:xfrm>
-            <a:off x="914400" y="3154680"/>
+            <a:off x="914400" y="2880360"/>
             <a:ext cx="10332720" cy="548640"/>
           </a:xfrm>
           <a:prstGeom prst="rect">
@@ -3596,7 +3597,7 @@
         </p:nvSpPr>
         <p:spPr>
           <a:xfrm>
-            <a:off x="914400" y="3749039"/>
+            <a:off x="914400" y="3474720"/>
             <a:ext cx="10332720" cy="457200"/>
           </a:xfrm>
           <a:prstGeom prst="rect">
@@ -3612,13 +3613,13 @@
           <a:p>
             <a:pPr algn="l"/>
             <a:r>
-              <a:rPr sz="1350" b="0" i="1">
+              <a:rPr sz="1300" b="0" i="1">
                 <a:solidFill>
                   <a:srgbClr val="CADCFC"/>
                 </a:solidFill>
                 <a:latin typeface="Calibri"/>
               </a:rPr>
-              <a:t>쿠팡 → 무신사·올리브영 추가 수집 → ML/DL 감성분류 → 속성분석(ABSA) → Streamlit 배포</a:t>
+              <a:t>데이터 1차→2차, 모델 1세대→4종 비교, 서비스 1차→2차→3차 — 피드백을 받을 때마다 한 단계씩 성장한 프로젝트</a:t>
             </a:r>
           </a:p>
         </p:txBody>
@@ -3631,7 +3632,7 @@
         </p:nvSpPr>
         <p:spPr>
           <a:xfrm>
-            <a:off x="914400" y="4937760"/>
+            <a:off x="914400" y="4572000"/>
             <a:ext cx="1645920" cy="411480"/>
           </a:xfrm>
           <a:prstGeom prst="roundRect">
@@ -3685,7 +3686,7 @@
         </p:nvSpPr>
         <p:spPr>
           <a:xfrm>
-            <a:off x="2697480" y="4937760"/>
+            <a:off x="2697480" y="4572000"/>
             <a:ext cx="2103120" cy="411480"/>
           </a:xfrm>
           <a:prstGeom prst="roundRect">
@@ -3739,7 +3740,7 @@
         </p:nvSpPr>
         <p:spPr>
           <a:xfrm>
-            <a:off x="4937760" y="4937760"/>
+            <a:off x="4937760" y="4572000"/>
             <a:ext cx="1828800" cy="411480"/>
           </a:xfrm>
           <a:prstGeom prst="roundRect">
@@ -3793,7 +3794,7 @@
         </p:nvSpPr>
         <p:spPr>
           <a:xfrm>
-            <a:off x="6903720" y="4937760"/>
+            <a:off x="6903720" y="4572000"/>
             <a:ext cx="1828800" cy="411480"/>
           </a:xfrm>
           <a:prstGeom prst="roundRect">
@@ -3835,6 +3836,41 @@
                 </a:solidFill>
               </a:rPr>
               <a:t>Streamlit 배포</a:t>
+            </a:r>
+          </a:p>
+        </p:txBody>
+      </p:sp>
+      <p:sp>
+        <p:nvSpPr>
+          <p:cNvPr id="10" name="TextBox 9"/>
+          <p:cNvSpPr txBox="1"/>
+          <p:nvPr/>
+        </p:nvSpPr>
+        <p:spPr>
+          <a:xfrm>
+            <a:off x="914400" y="5303520"/>
+            <a:ext cx="10332720" cy="457200"/>
+          </a:xfrm>
+          <a:prstGeom prst="rect">
+            <a:avLst/>
+          </a:prstGeom>
+          <a:noFill/>
+        </p:spPr>
+        <p:txBody>
+          <a:bodyPr wrap="square" anchor="t" lIns="0" rIns="0" tIns="0" bIns="0">
+            <a:spAutoFit/>
+          </a:bodyPr>
+          <a:lstStyle/>
+          <a:p>
+            <a:pPr algn="l"/>
+            <a:r>
+              <a:rPr sz="1250" b="0" i="1">
+                <a:solidFill>
+                  <a:srgbClr val="555A6E"/>
+                </a:solidFill>
+                <a:latin typeface="Calibri"/>
+              </a:rPr>
+              <a:t>Lv.1 데이터 수집  →  Lv.2 모델 학습  →  Lv.3 속성 분석  →  Lv.4 추천/매칭</a:t>
             </a:r>
           </a:p>
         </p:txBody>
@@ -3931,7 +3967,7 @@
                 </a:solidFill>
                 <a:latin typeface="Georgia"/>
               </a:rPr>
-              <a:t>문제정의 &amp; 데이터 수집</a:t>
+              <a:t>왜 이 서비스가 필요한가</a:t>
             </a:r>
           </a:p>
         </p:txBody>
@@ -3944,8 +3980,8 @@
         </p:nvSpPr>
         <p:spPr>
           <a:xfrm>
-            <a:off x="640080" y="1371600"/>
-            <a:ext cx="10515600" cy="1645920"/>
+            <a:off x="640080" y="1234440"/>
+            <a:ext cx="10515600" cy="457200"/>
           </a:xfrm>
           <a:prstGeom prst="rect">
             <a:avLst/>
@@ -3953,56 +3989,20 @@
           <a:noFill/>
         </p:spPr>
         <p:txBody>
-          <a:bodyPr wrap="square">
+          <a:bodyPr wrap="square" anchor="t" lIns="0" rIns="0" tIns="0" bIns="0">
             <a:spAutoFit/>
           </a:bodyPr>
           <a:lstStyle/>
           <a:p>
-            <a:pPr>
-              <a:spcAft>
-                <a:spcPts val="800"/>
-              </a:spcAft>
-            </a:pPr>
-            <a:r>
-              <a:rPr sz="1550">
-                <a:solidFill>
-                  <a:srgbClr val="21295C"/>
+            <a:pPr algn="l"/>
+            <a:r>
+              <a:rPr sz="1500" b="0" i="1">
+                <a:solidFill>
+                  <a:srgbClr val="555A6E"/>
                 </a:solidFill>
                 <a:latin typeface="Calibri"/>
               </a:rPr>
-              <a:t>•  리뷰가 상품당 수백~수천 건 — 사람이 다 읽고 판단하기 어렵다</a:t>
-            </a:r>
-          </a:p>
-          <a:p>
-            <a:pPr>
-              <a:spcAft>
-                <a:spcPts val="800"/>
-              </a:spcAft>
-            </a:pPr>
-            <a:r>
-              <a:rPr sz="1550">
-                <a:solidFill>
-                  <a:srgbClr val="21295C"/>
-                </a:solidFill>
-                <a:latin typeface="Calibri"/>
-              </a:rPr>
-              <a:t>•  별점만 봐서는 "왜" 좋고 나쁜지, 속성별로(보습/향/트러블) 어떤지 알 수 없다</a:t>
-            </a:r>
-          </a:p>
-          <a:p>
-            <a:pPr>
-              <a:spcAft>
-                <a:spcPts val="800"/>
-              </a:spcAft>
-            </a:pPr>
-            <a:r>
-              <a:rPr sz="1550">
-                <a:solidFill>
-                  <a:srgbClr val="21295C"/>
-                </a:solidFill>
-                <a:latin typeface="Calibri"/>
-              </a:rPr>
-              <a:t>•  → ML/DL로 감성 분류 + 속성기반 감성분석(ABSA)으로 해결</a:t>
+              <a:t>모든 화장품이 모든 면에서 좋을 수는 없다 — 평점은 비슷해도 "강점"은 다르다</a:t>
             </a:r>
           </a:p>
         </p:txBody>
@@ -4015,12 +4015,12 @@
         </p:nvSpPr>
         <p:spPr>
           <a:xfrm>
-            <a:off x="640080" y="3291840"/>
-            <a:ext cx="3520440" cy="2468880"/>
+            <a:off x="640080" y="1874519"/>
+            <a:ext cx="5212080" cy="2697480"/>
           </a:xfrm>
           <a:prstGeom prst="roundRect">
             <a:avLst>
-              <a:gd name="adj" fmla="val 8000"/>
+              <a:gd name="adj" fmla="val 6000"/>
             </a:avLst>
           </a:prstGeom>
           <a:solidFill>
@@ -4061,8 +4061,8 @@
         </p:nvSpPr>
         <p:spPr>
           <a:xfrm>
-            <a:off x="868680" y="3520440"/>
-            <a:ext cx="3063240" cy="365760"/>
+            <a:off x="914400" y="2103120"/>
+            <a:ext cx="4663440" cy="548640"/>
           </a:xfrm>
           <a:prstGeom prst="rect">
             <a:avLst/>
@@ -4077,13 +4077,13 @@
           <a:p>
             <a:pPr algn="l"/>
             <a:r>
-              <a:rPr sz="1400" b="1" i="0">
-                <a:solidFill>
-                  <a:srgbClr val="CADCFC"/>
+              <a:rPr sz="1550" b="1" i="0">
+                <a:solidFill>
+                  <a:srgbClr val="FFFFFF"/>
                 </a:solidFill>
                 <a:latin typeface="Calibri"/>
               </a:rPr>
-              <a:t>1차</a:t>
+              <a:t>크리스마 더마랩 토너</a:t>
             </a:r>
           </a:p>
         </p:txBody>
@@ -4096,8 +4096,8 @@
         </p:nvSpPr>
         <p:spPr>
           <a:xfrm>
-            <a:off x="868680" y="3931920"/>
-            <a:ext cx="3063240" cy="914400"/>
+            <a:off x="914400" y="2606040"/>
+            <a:ext cx="4663440" cy="365760"/>
           </a:xfrm>
           <a:prstGeom prst="rect">
             <a:avLst/>
@@ -4110,35 +4110,15 @@
           </a:bodyPr>
           <a:lstStyle/>
           <a:p>
-            <a:pPr algn="l">
-              <a:lnSpc>
-                <a:spcPct val="125000"/>
-              </a:lnSpc>
-            </a:pPr>
-            <a:r>
-              <a:rPr sz="1500" b="1" i="0">
-                <a:solidFill>
-                  <a:srgbClr val="FFFFFF"/>
+            <a:pPr algn="l"/>
+            <a:r>
+              <a:rPr sz="1300" b="0" i="0">
+                <a:solidFill>
+                  <a:srgbClr val="CADCFC"/>
                 </a:solidFill>
                 <a:latin typeface="Calibri"/>
               </a:rPr>
-              <a:t>쿠팡 크롤링</a:t>
-            </a:r>
-          </a:p>
-          <a:p>
-            <a:pPr algn="l">
-              <a:lnSpc>
-                <a:spcPct val="125000"/>
-              </a:lnSpc>
-            </a:pPr>
-            <a:r>
-              <a:rPr sz="1500" b="1" i="0">
-                <a:solidFill>
-                  <a:srgbClr val="FFFFFF"/>
-                </a:solidFill>
-                <a:latin typeface="Calibri"/>
-              </a:rPr>
-              <a:t>(20개 키워드)</a:t>
+              <a:t>평점 4.55 / 5</a:t>
             </a:r>
           </a:p>
         </p:txBody>
@@ -4151,8 +4131,8 @@
         </p:nvSpPr>
         <p:spPr>
           <a:xfrm>
-            <a:off x="868680" y="5029200"/>
-            <a:ext cx="3063240" cy="548640"/>
+            <a:off x="914400" y="3063240"/>
+            <a:ext cx="4663440" cy="365760"/>
           </a:xfrm>
           <a:prstGeom prst="rect">
             <a:avLst/>
@@ -4167,117 +4147,27 @@
           <a:p>
             <a:pPr algn="l"/>
             <a:r>
-              <a:rPr sz="2400" b="1" i="0">
+              <a:rPr sz="1400" b="1" i="0">
                 <a:solidFill>
                   <a:srgbClr val="FFFFFF"/>
                 </a:solidFill>
                 <a:latin typeface="Calibri"/>
               </a:rPr>
-              <a:t>86,379건</a:t>
-            </a:r>
-          </a:p>
-        </p:txBody>
-      </p:sp>
-      <p:sp>
-        <p:nvSpPr>
-          <p:cNvPr id="9" name="Right Arrow 8"/>
-          <p:cNvSpPr/>
-          <p:nvPr/>
-        </p:nvSpPr>
-        <p:spPr>
-          <a:xfrm>
-            <a:off x="4178807" y="4389120"/>
-            <a:ext cx="146304" cy="320040"/>
-          </a:xfrm>
-          <a:prstGeom prst="rightArrow">
-            <a:avLst/>
-          </a:prstGeom>
-          <a:solidFill>
-            <a:srgbClr val="555A6E"/>
-          </a:solidFill>
-          <a:ln>
-            <a:noFill/>
-          </a:ln>
-          <a:effectLst/>
-        </p:spPr>
-        <p:style>
-          <a:lnRef idx="1">
-            <a:schemeClr val="accent1"/>
-          </a:lnRef>
-          <a:fillRef idx="3">
-            <a:schemeClr val="accent1"/>
-          </a:fillRef>
-          <a:effectRef idx="2">
-            <a:schemeClr val="accent1"/>
-          </a:effectRef>
-          <a:fontRef idx="minor">
-            <a:schemeClr val="lt1"/>
-          </a:fontRef>
-        </p:style>
-        <p:txBody>
-          <a:bodyPr rtlCol="0" anchor="ctr"/>
-          <a:lstStyle/>
-          <a:p>
-            <a:pPr algn="ctr"/>
-          </a:p>
-        </p:txBody>
-      </p:sp>
-      <p:sp>
-        <p:nvSpPr>
-          <p:cNvPr id="10" name="Rounded Rectangle 9"/>
-          <p:cNvSpPr/>
-          <p:nvPr/>
-        </p:nvSpPr>
-        <p:spPr>
-          <a:xfrm>
-            <a:off x="4343400" y="3291840"/>
-            <a:ext cx="3520440" cy="2468880"/>
-          </a:xfrm>
-          <a:prstGeom prst="roundRect">
-            <a:avLst>
-              <a:gd name="adj" fmla="val 8000"/>
-            </a:avLst>
-          </a:prstGeom>
-          <a:solidFill>
-            <a:srgbClr val="1E2761"/>
-          </a:solidFill>
-          <a:ln>
-            <a:noFill/>
-          </a:ln>
-          <a:effectLst/>
-        </p:spPr>
-        <p:style>
-          <a:lnRef idx="1">
-            <a:schemeClr val="accent1"/>
-          </a:lnRef>
-          <a:fillRef idx="3">
-            <a:schemeClr val="accent1"/>
-          </a:fillRef>
-          <a:effectRef idx="2">
-            <a:schemeClr val="accent1"/>
-          </a:effectRef>
-          <a:fontRef idx="minor">
-            <a:schemeClr val="lt1"/>
-          </a:fontRef>
-        </p:style>
-        <p:txBody>
-          <a:bodyPr rtlCol="0" anchor="ctr"/>
-          <a:lstStyle/>
-          <a:p>
-            <a:pPr algn="ctr"/>
-          </a:p>
-        </p:txBody>
-      </p:sp>
-      <p:sp>
-        <p:nvSpPr>
-          <p:cNvPr id="11" name="TextBox 10"/>
+              <a:t>보습/수분  긍정 80.5%</a:t>
+            </a:r>
+          </a:p>
+        </p:txBody>
+      </p:sp>
+      <p:sp>
+        <p:nvSpPr>
+          <p:cNvPr id="9" name="TextBox 8"/>
           <p:cNvSpPr txBox="1"/>
           <p:nvPr/>
         </p:nvSpPr>
         <p:spPr>
           <a:xfrm>
-            <a:off x="4572000" y="3520440"/>
-            <a:ext cx="3063240" cy="365760"/>
+            <a:off x="914400" y="3520440"/>
+            <a:ext cx="4663440" cy="365760"/>
           </a:xfrm>
           <a:prstGeom prst="rect">
             <a:avLst/>
@@ -4294,163 +4184,29 @@
             <a:r>
               <a:rPr sz="1400" b="1" i="0">
                 <a:solidFill>
-                  <a:srgbClr val="CADCFC"/>
+                  <a:srgbClr val="FFFFFF"/>
                 </a:solidFill>
                 <a:latin typeface="Calibri"/>
               </a:rPr>
-              <a:t>2차</a:t>
-            </a:r>
-          </a:p>
-        </p:txBody>
-      </p:sp>
-      <p:sp>
-        <p:nvSpPr>
-          <p:cNvPr id="12" name="TextBox 11"/>
-          <p:cNvSpPr txBox="1"/>
-          <p:nvPr/>
-        </p:nvSpPr>
-        <p:spPr>
-          <a:xfrm>
-            <a:off x="4572000" y="3931920"/>
-            <a:ext cx="3063240" cy="914400"/>
-          </a:xfrm>
-          <a:prstGeom prst="rect">
-            <a:avLst/>
-          </a:prstGeom>
-          <a:noFill/>
-        </p:spPr>
-        <p:txBody>
-          <a:bodyPr wrap="square" anchor="t" lIns="0" rIns="0" tIns="0" bIns="0">
-            <a:spAutoFit/>
-          </a:bodyPr>
-          <a:lstStyle/>
-          <a:p>
-            <a:pPr algn="l">
-              <a:lnSpc>
-                <a:spcPct val="125000"/>
-              </a:lnSpc>
-            </a:pPr>
-            <a:r>
-              <a:rPr sz="1500" b="1" i="0">
-                <a:solidFill>
-                  <a:srgbClr val="FFFFFF"/>
-                </a:solidFill>
-                <a:latin typeface="Calibri"/>
-              </a:rPr>
-              <a:t>+ 무신사·올리브영</a:t>
-            </a:r>
-          </a:p>
-          <a:p>
-            <a:pPr algn="l">
-              <a:lnSpc>
-                <a:spcPct val="125000"/>
-              </a:lnSpc>
-            </a:pPr>
-            <a:r>
-              <a:rPr sz="1500" b="1" i="0">
-                <a:solidFill>
-                  <a:srgbClr val="FFFFFF"/>
-                </a:solidFill>
-                <a:latin typeface="Calibri"/>
-              </a:rPr>
-              <a:t>(동료 크롤링 데이터 추가)</a:t>
-            </a:r>
-          </a:p>
-        </p:txBody>
-      </p:sp>
-      <p:sp>
-        <p:nvSpPr>
-          <p:cNvPr id="13" name="TextBox 12"/>
-          <p:cNvSpPr txBox="1"/>
-          <p:nvPr/>
-        </p:nvSpPr>
-        <p:spPr>
-          <a:xfrm>
-            <a:off x="4572000" y="5029200"/>
-            <a:ext cx="3063240" cy="548640"/>
-          </a:xfrm>
-          <a:prstGeom prst="rect">
-            <a:avLst/>
-          </a:prstGeom>
-          <a:noFill/>
-        </p:spPr>
-        <p:txBody>
-          <a:bodyPr wrap="square" anchor="t" lIns="0" rIns="0" tIns="0" bIns="0">
-            <a:spAutoFit/>
-          </a:bodyPr>
-          <a:lstStyle/>
-          <a:p>
-            <a:pPr algn="l"/>
-            <a:r>
-              <a:rPr sz="2400" b="1" i="0">
-                <a:solidFill>
-                  <a:srgbClr val="FFFFFF"/>
-                </a:solidFill>
-                <a:latin typeface="Calibri"/>
-              </a:rPr>
-              <a:t>452,395건</a:t>
-            </a:r>
-          </a:p>
-        </p:txBody>
-      </p:sp>
-      <p:sp>
-        <p:nvSpPr>
-          <p:cNvPr id="14" name="Right Arrow 13"/>
+              <a:t>트러블/자극  긍정 23.3%</a:t>
+            </a:r>
+          </a:p>
+        </p:txBody>
+      </p:sp>
+      <p:sp>
+        <p:nvSpPr>
+          <p:cNvPr id="10" name="Rounded Rectangle 9"/>
           <p:cNvSpPr/>
           <p:nvPr/>
         </p:nvSpPr>
         <p:spPr>
           <a:xfrm>
-            <a:off x="7882127" y="4389120"/>
-            <a:ext cx="146304" cy="320040"/>
-          </a:xfrm>
-          <a:prstGeom prst="rightArrow">
-            <a:avLst/>
-          </a:prstGeom>
-          <a:solidFill>
-            <a:srgbClr val="555A6E"/>
-          </a:solidFill>
-          <a:ln>
-            <a:noFill/>
-          </a:ln>
-          <a:effectLst/>
-        </p:spPr>
-        <p:style>
-          <a:lnRef idx="1">
-            <a:schemeClr val="accent1"/>
-          </a:lnRef>
-          <a:fillRef idx="3">
-            <a:schemeClr val="accent1"/>
-          </a:fillRef>
-          <a:effectRef idx="2">
-            <a:schemeClr val="accent1"/>
-          </a:effectRef>
-          <a:fontRef idx="minor">
-            <a:schemeClr val="lt1"/>
-          </a:fontRef>
-        </p:style>
-        <p:txBody>
-          <a:bodyPr rtlCol="0" anchor="ctr"/>
-          <a:lstStyle/>
-          <a:p>
-            <a:pPr algn="ctr"/>
-          </a:p>
-        </p:txBody>
-      </p:sp>
-      <p:sp>
-        <p:nvSpPr>
-          <p:cNvPr id="15" name="Rounded Rectangle 14"/>
-          <p:cNvSpPr/>
-          <p:nvPr/>
-        </p:nvSpPr>
-        <p:spPr>
-          <a:xfrm>
-            <a:off x="8046719" y="3291840"/>
-            <a:ext cx="3520440" cy="2468880"/>
+            <a:off x="6217920" y="1874519"/>
+            <a:ext cx="5212080" cy="2697480"/>
           </a:xfrm>
           <a:prstGeom prst="roundRect">
             <a:avLst>
-              <a:gd name="adj" fmla="val 8000"/>
+              <a:gd name="adj" fmla="val 6000"/>
             </a:avLst>
           </a:prstGeom>
           <a:solidFill>
@@ -4485,14 +4241,14 @@
       </p:sp>
       <p:sp>
         <p:nvSpPr>
-          <p:cNvPr id="16" name="TextBox 15"/>
+          <p:cNvPr id="11" name="TextBox 10"/>
           <p:cNvSpPr txBox="1"/>
           <p:nvPr/>
         </p:nvSpPr>
         <p:spPr>
           <a:xfrm>
-            <a:off x="8275319" y="3520440"/>
-            <a:ext cx="3063240" cy="365760"/>
+            <a:off x="6492240" y="2103120"/>
+            <a:ext cx="4663440" cy="548640"/>
           </a:xfrm>
           <a:prstGeom prst="rect">
             <a:avLst/>
@@ -4507,27 +4263,27 @@
           <a:p>
             <a:pPr algn="l"/>
             <a:r>
-              <a:rPr sz="1400" b="1" i="0">
-                <a:solidFill>
-                  <a:srgbClr val="CADCFC"/>
+              <a:rPr sz="1550" b="1" i="0">
+                <a:solidFill>
+                  <a:srgbClr val="FFFFFF"/>
                 </a:solidFill>
                 <a:latin typeface="Calibri"/>
               </a:rPr>
-              <a:t>최종</a:t>
-            </a:r>
-          </a:p>
-        </p:txBody>
-      </p:sp>
-      <p:sp>
-        <p:nvSpPr>
-          <p:cNvPr id="17" name="TextBox 16"/>
+              <a:t>닥터지 에이클리어 밸런싱 토너</a:t>
+            </a:r>
+          </a:p>
+        </p:txBody>
+      </p:sp>
+      <p:sp>
+        <p:nvSpPr>
+          <p:cNvPr id="12" name="TextBox 11"/>
           <p:cNvSpPr txBox="1"/>
           <p:nvPr/>
         </p:nvSpPr>
         <p:spPr>
           <a:xfrm>
-            <a:off x="8275319" y="3931920"/>
-            <a:ext cx="3063240" cy="914400"/>
+            <a:off x="6492240" y="2606040"/>
+            <a:ext cx="4663440" cy="365760"/>
           </a:xfrm>
           <a:prstGeom prst="rect">
             <a:avLst/>
@@ -4540,49 +4296,29 @@
           </a:bodyPr>
           <a:lstStyle/>
           <a:p>
-            <a:pPr algn="l">
-              <a:lnSpc>
-                <a:spcPct val="125000"/>
-              </a:lnSpc>
-            </a:pPr>
-            <a:r>
-              <a:rPr sz="1500" b="1" i="0">
-                <a:solidFill>
-                  <a:srgbClr val="FFFFFF"/>
+            <a:pPr algn="l"/>
+            <a:r>
+              <a:rPr sz="1300" b="0" i="0">
+                <a:solidFill>
+                  <a:srgbClr val="CADCFC"/>
                 </a:solidFill>
                 <a:latin typeface="Calibri"/>
               </a:rPr>
-              <a:t>스키마/라벨 통일</a:t>
-            </a:r>
-          </a:p>
-          <a:p>
-            <a:pPr algn="l">
-              <a:lnSpc>
-                <a:spcPct val="125000"/>
-              </a:lnSpc>
-            </a:pPr>
-            <a:r>
-              <a:rPr sz="1500" b="1" i="0">
-                <a:solidFill>
-                  <a:srgbClr val="FFFFFF"/>
-                </a:solidFill>
-                <a:latin typeface="Calibri"/>
-              </a:rPr>
-              <a:t>+ 중복 제거</a:t>
-            </a:r>
-          </a:p>
-        </p:txBody>
-      </p:sp>
-      <p:sp>
-        <p:nvSpPr>
-          <p:cNvPr id="18" name="TextBox 17"/>
+              <a:t>평점 4.78 / 5</a:t>
+            </a:r>
+          </a:p>
+        </p:txBody>
+      </p:sp>
+      <p:sp>
+        <p:nvSpPr>
+          <p:cNvPr id="13" name="TextBox 12"/>
           <p:cNvSpPr txBox="1"/>
           <p:nvPr/>
         </p:nvSpPr>
         <p:spPr>
           <a:xfrm>
-            <a:off x="8275319" y="5029200"/>
-            <a:ext cx="3063240" cy="548640"/>
+            <a:off x="6492240" y="3063240"/>
+            <a:ext cx="4663440" cy="365760"/>
           </a:xfrm>
           <a:prstGeom prst="rect">
             <a:avLst/>
@@ -4597,13 +4333,138 @@
           <a:p>
             <a:pPr algn="l"/>
             <a:r>
-              <a:rPr sz="2400" b="1" i="0">
+              <a:rPr sz="1400" b="1" i="0">
                 <a:solidFill>
                   <a:srgbClr val="FFFFFF"/>
                 </a:solidFill>
                 <a:latin typeface="Calibri"/>
               </a:rPr>
-              <a:t>538,774건</a:t>
+              <a:t>보습/수분  긍정 81.5%</a:t>
+            </a:r>
+          </a:p>
+        </p:txBody>
+      </p:sp>
+      <p:sp>
+        <p:nvSpPr>
+          <p:cNvPr id="14" name="TextBox 13"/>
+          <p:cNvSpPr txBox="1"/>
+          <p:nvPr/>
+        </p:nvSpPr>
+        <p:spPr>
+          <a:xfrm>
+            <a:off x="6492240" y="3520440"/>
+            <a:ext cx="4663440" cy="365760"/>
+          </a:xfrm>
+          <a:prstGeom prst="rect">
+            <a:avLst/>
+          </a:prstGeom>
+          <a:noFill/>
+        </p:spPr>
+        <p:txBody>
+          <a:bodyPr wrap="square" anchor="t" lIns="0" rIns="0" tIns="0" bIns="0">
+            <a:spAutoFit/>
+          </a:bodyPr>
+          <a:lstStyle/>
+          <a:p>
+            <a:pPr algn="l"/>
+            <a:r>
+              <a:rPr sz="1400" b="1" i="0">
+                <a:solidFill>
+                  <a:srgbClr val="FFFFFF"/>
+                </a:solidFill>
+                <a:latin typeface="Calibri"/>
+              </a:rPr>
+              <a:t>트러블/자극  긍정 40.5%</a:t>
+            </a:r>
+          </a:p>
+        </p:txBody>
+      </p:sp>
+      <p:sp>
+        <p:nvSpPr>
+          <p:cNvPr id="15" name="TextBox 14"/>
+          <p:cNvSpPr txBox="1"/>
+          <p:nvPr/>
+        </p:nvSpPr>
+        <p:spPr>
+          <a:xfrm>
+            <a:off x="640080" y="4754880"/>
+            <a:ext cx="10515600" cy="457200"/>
+          </a:xfrm>
+          <a:prstGeom prst="rect">
+            <a:avLst/>
+          </a:prstGeom>
+          <a:noFill/>
+        </p:spPr>
+        <p:txBody>
+          <a:bodyPr wrap="square" anchor="t" lIns="0" rIns="0" tIns="0" bIns="0">
+            <a:spAutoFit/>
+          </a:bodyPr>
+          <a:lstStyle/>
+          <a:p>
+            <a:pPr algn="l"/>
+            <a:r>
+              <a:rPr sz="1400" b="1" i="0">
+                <a:solidFill>
+                  <a:srgbClr val="1E2761"/>
+                </a:solidFill>
+                <a:latin typeface="Calibri"/>
+              </a:rPr>
+              <a:t>→ 평점은 0.2점밖에 안 차이나는데, 트러블/자극 긍정비율은 23.3% vs 40.5%로 거의 2배 차이</a:t>
+            </a:r>
+          </a:p>
+        </p:txBody>
+      </p:sp>
+      <p:sp>
+        <p:nvSpPr>
+          <p:cNvPr id="16" name="TextBox 15"/>
+          <p:cNvSpPr txBox="1"/>
+          <p:nvPr/>
+        </p:nvSpPr>
+        <p:spPr>
+          <a:xfrm>
+            <a:off x="640080" y="5303520"/>
+            <a:ext cx="10515600" cy="1280160"/>
+          </a:xfrm>
+          <a:prstGeom prst="rect">
+            <a:avLst/>
+          </a:prstGeom>
+          <a:noFill/>
+        </p:spPr>
+        <p:txBody>
+          <a:bodyPr wrap="square">
+            <a:spAutoFit/>
+          </a:bodyPr>
+          <a:lstStyle/>
+          <a:p>
+            <a:pPr>
+              <a:spcAft>
+                <a:spcPts val="800"/>
+              </a:spcAft>
+            </a:pPr>
+            <a:r>
+              <a:rPr sz="1350">
+                <a:solidFill>
+                  <a:srgbClr val="21295C"/>
+                </a:solidFill>
+                <a:latin typeface="Calibri"/>
+              </a:rPr>
+              <a:t>•  사람마다 화장품을 고를 때 중요하게 보는 속성이 다르다 (트러블 잘 나는 사람은 자극에, 건조한 사람은 보습에 민감)</a:t>
+            </a:r>
+          </a:p>
+          <a:p>
+            <a:pPr>
+              <a:spcAft>
+                <a:spcPts val="800"/>
+              </a:spcAft>
+            </a:pPr>
+            <a:r>
+              <a:rPr sz="1350">
+                <a:solidFill>
+                  <a:srgbClr val="21295C"/>
+                </a:solidFill>
+                <a:latin typeface="Calibri"/>
+              </a:rPr>
+              <a:t>•  평점 하나로는 "나에게 맞는" 제품을 찾을 수 없다 → 속성별로 쪼개서 봐야 진짜 정보가 보인다</a:t>
             </a:r>
           </a:p>
         </p:txBody>
@@ -4641,6 +4502,87 @@
             <a:avLst/>
           </a:prstGeom>
           <a:solidFill>
+            <a:srgbClr val="FFFFFF"/>
+          </a:solidFill>
+          <a:ln>
+            <a:noFill/>
+          </a:ln>
+          <a:effectLst/>
+        </p:spPr>
+        <p:style>
+          <a:lnRef idx="1">
+            <a:schemeClr val="accent1"/>
+          </a:lnRef>
+          <a:fillRef idx="3">
+            <a:schemeClr val="accent1"/>
+          </a:fillRef>
+          <a:effectRef idx="2">
+            <a:schemeClr val="accent1"/>
+          </a:effectRef>
+          <a:fontRef idx="minor">
+            <a:schemeClr val="lt1"/>
+          </a:fontRef>
+        </p:style>
+        <p:txBody>
+          <a:bodyPr rtlCol="0" anchor="ctr"/>
+          <a:lstStyle/>
+          <a:p>
+            <a:pPr algn="ctr"/>
+          </a:p>
+        </p:txBody>
+      </p:sp>
+      <p:sp>
+        <p:nvSpPr>
+          <p:cNvPr id="3" name="TextBox 2"/>
+          <p:cNvSpPr txBox="1"/>
+          <p:nvPr/>
+        </p:nvSpPr>
+        <p:spPr>
+          <a:xfrm>
+            <a:off x="640080" y="457200"/>
+            <a:ext cx="10515600" cy="731520"/>
+          </a:xfrm>
+          <a:prstGeom prst="rect">
+            <a:avLst/>
+          </a:prstGeom>
+          <a:noFill/>
+        </p:spPr>
+        <p:txBody>
+          <a:bodyPr wrap="square" anchor="t" lIns="0" rIns="0" tIns="0" bIns="0">
+            <a:spAutoFit/>
+          </a:bodyPr>
+          <a:lstStyle/>
+          <a:p>
+            <a:pPr algn="l"/>
+            <a:r>
+              <a:rPr sz="2800" b="1" i="0">
+                <a:solidFill>
+                  <a:srgbClr val="1E2761"/>
+                </a:solidFill>
+                <a:latin typeface="Georgia"/>
+              </a:rPr>
+              <a:t>데이터 수집 — 처음엔 쿠팡만, 더 모았다</a:t>
+            </a:r>
+          </a:p>
+        </p:txBody>
+      </p:sp>
+      <p:sp>
+        <p:nvSpPr>
+          <p:cNvPr id="4" name="Rounded Rectangle 3"/>
+          <p:cNvSpPr/>
+          <p:nvPr/>
+        </p:nvSpPr>
+        <p:spPr>
+          <a:xfrm>
+            <a:off x="640080" y="1554480"/>
+            <a:ext cx="3520440" cy="2468880"/>
+          </a:xfrm>
+          <a:prstGeom prst="roundRect">
+            <a:avLst>
+              <a:gd name="adj" fmla="val 8000"/>
+            </a:avLst>
+          </a:prstGeom>
+          <a:solidFill>
             <a:srgbClr val="1E2761"/>
           </a:solidFill>
           <a:ln>
@@ -4672,14 +4614,14 @@
       </p:sp>
       <p:sp>
         <p:nvSpPr>
-          <p:cNvPr id="3" name="TextBox 2"/>
+          <p:cNvPr id="5" name="TextBox 4"/>
           <p:cNvSpPr txBox="1"/>
           <p:nvPr/>
         </p:nvSpPr>
         <p:spPr>
           <a:xfrm>
-            <a:off x="640080" y="457200"/>
-            <a:ext cx="10515600" cy="731520"/>
+            <a:off x="868680" y="1783080"/>
+            <a:ext cx="3063240" cy="365760"/>
           </a:xfrm>
           <a:prstGeom prst="rect">
             <a:avLst/>
@@ -4694,27 +4636,27 @@
           <a:p>
             <a:pPr algn="l"/>
             <a:r>
-              <a:rPr sz="2700" b="1" i="0">
-                <a:solidFill>
-                  <a:srgbClr val="FFFFFF"/>
-                </a:solidFill>
-                <a:latin typeface="Georgia"/>
-              </a:rPr>
-              <a:t>쿠팡 크롤링 — 봇 탐지를 어떻게 뚫었나</a:t>
-            </a:r>
-          </a:p>
-        </p:txBody>
-      </p:sp>
-      <p:sp>
-        <p:nvSpPr>
-          <p:cNvPr id="4" name="TextBox 3"/>
+              <a:rPr sz="1400" b="1" i="0">
+                <a:solidFill>
+                  <a:srgbClr val="CADCFC"/>
+                </a:solidFill>
+                <a:latin typeface="Calibri"/>
+              </a:rPr>
+              <a:t>1차</a:t>
+            </a:r>
+          </a:p>
+        </p:txBody>
+      </p:sp>
+      <p:sp>
+        <p:nvSpPr>
+          <p:cNvPr id="6" name="TextBox 5"/>
           <p:cNvSpPr txBox="1"/>
           <p:nvPr/>
         </p:nvSpPr>
         <p:spPr>
           <a:xfrm>
-            <a:off x="640080" y="1234440"/>
-            <a:ext cx="10515600" cy="457200"/>
+            <a:off x="868680" y="2194560"/>
+            <a:ext cx="3063240" cy="914400"/>
           </a:xfrm>
           <a:prstGeom prst="rect">
             <a:avLst/>
@@ -4727,37 +4669,90 @@
           </a:bodyPr>
           <a:lstStyle/>
           <a:p>
+            <a:pPr algn="l">
+              <a:lnSpc>
+                <a:spcPct val="125000"/>
+              </a:lnSpc>
+            </a:pPr>
+            <a:r>
+              <a:rPr sz="1500" b="1" i="0">
+                <a:solidFill>
+                  <a:srgbClr val="FFFFFF"/>
+                </a:solidFill>
+                <a:latin typeface="Calibri"/>
+              </a:rPr>
+              <a:t>쿠팡 크롤링</a:t>
+            </a:r>
+          </a:p>
+          <a:p>
+            <a:pPr algn="l">
+              <a:lnSpc>
+                <a:spcPct val="125000"/>
+              </a:lnSpc>
+            </a:pPr>
+            <a:r>
+              <a:rPr sz="1500" b="1" i="0">
+                <a:solidFill>
+                  <a:srgbClr val="FFFFFF"/>
+                </a:solidFill>
+                <a:latin typeface="Calibri"/>
+              </a:rPr>
+              <a:t>(20개 키워드)</a:t>
+            </a:r>
+          </a:p>
+        </p:txBody>
+      </p:sp>
+      <p:sp>
+        <p:nvSpPr>
+          <p:cNvPr id="7" name="TextBox 6"/>
+          <p:cNvSpPr txBox="1"/>
+          <p:nvPr/>
+        </p:nvSpPr>
+        <p:spPr>
+          <a:xfrm>
+            <a:off x="868680" y="3291840"/>
+            <a:ext cx="3063240" cy="548640"/>
+          </a:xfrm>
+          <a:prstGeom prst="rect">
+            <a:avLst/>
+          </a:prstGeom>
+          <a:noFill/>
+        </p:spPr>
+        <p:txBody>
+          <a:bodyPr wrap="square" anchor="t" lIns="0" rIns="0" tIns="0" bIns="0">
+            <a:spAutoFit/>
+          </a:bodyPr>
+          <a:lstStyle/>
+          <a:p>
             <a:pPr algn="l"/>
             <a:r>
-              <a:rPr sz="1450" b="0" i="1">
-                <a:solidFill>
-                  <a:srgbClr val="CADCFC"/>
+              <a:rPr sz="2400" b="1" i="0">
+                <a:solidFill>
+                  <a:srgbClr val="FFFFFF"/>
                 </a:solidFill>
                 <a:latin typeface="Calibri"/>
               </a:rPr>
-              <a:t>쿠팡은 문지기(Akamai)가 "이 손님이 사람인지 로봇인지" 5단계로 검사한다</a:t>
-            </a:r>
-          </a:p>
-        </p:txBody>
-      </p:sp>
-      <p:sp>
-        <p:nvSpPr>
-          <p:cNvPr id="5" name="Rounded Rectangle 4"/>
+              <a:t>86,379건</a:t>
+            </a:r>
+          </a:p>
+        </p:txBody>
+      </p:sp>
+      <p:sp>
+        <p:nvSpPr>
+          <p:cNvPr id="8" name="Right Arrow 7"/>
           <p:cNvSpPr/>
           <p:nvPr/>
         </p:nvSpPr>
         <p:spPr>
           <a:xfrm>
-            <a:off x="640080" y="1828800"/>
-            <a:ext cx="5303520" cy="4206240"/>
-          </a:xfrm>
-          <a:prstGeom prst="roundRect">
-            <a:avLst>
-              <a:gd name="adj" fmla="val 5000"/>
-            </a:avLst>
+            <a:off x="4178807" y="2651760"/>
+            <a:ext cx="146304" cy="320040"/>
+          </a:xfrm>
+          <a:prstGeom prst="rightArrow">
+            <a:avLst/>
           </a:prstGeom>
           <a:solidFill>
-            <a:srgbClr val="283370"/>
+            <a:srgbClr val="555A6E"/>
           </a:solidFill>
           <a:ln>
             <a:noFill/>
@@ -4788,14 +4783,60 @@
       </p:sp>
       <p:sp>
         <p:nvSpPr>
-          <p:cNvPr id="6" name="TextBox 5"/>
+          <p:cNvPr id="9" name="Rounded Rectangle 8"/>
+          <p:cNvSpPr/>
+          <p:nvPr/>
+        </p:nvSpPr>
+        <p:spPr>
+          <a:xfrm>
+            <a:off x="4343400" y="1554480"/>
+            <a:ext cx="3520440" cy="2468880"/>
+          </a:xfrm>
+          <a:prstGeom prst="roundRect">
+            <a:avLst>
+              <a:gd name="adj" fmla="val 8000"/>
+            </a:avLst>
+          </a:prstGeom>
+          <a:solidFill>
+            <a:srgbClr val="1E2761"/>
+          </a:solidFill>
+          <a:ln>
+            <a:noFill/>
+          </a:ln>
+          <a:effectLst/>
+        </p:spPr>
+        <p:style>
+          <a:lnRef idx="1">
+            <a:schemeClr val="accent1"/>
+          </a:lnRef>
+          <a:fillRef idx="3">
+            <a:schemeClr val="accent1"/>
+          </a:fillRef>
+          <a:effectRef idx="2">
+            <a:schemeClr val="accent1"/>
+          </a:effectRef>
+          <a:fontRef idx="minor">
+            <a:schemeClr val="lt1"/>
+          </a:fontRef>
+        </p:style>
+        <p:txBody>
+          <a:bodyPr rtlCol="0" anchor="ctr"/>
+          <a:lstStyle/>
+          <a:p>
+            <a:pPr algn="ctr"/>
+          </a:p>
+        </p:txBody>
+      </p:sp>
+      <p:sp>
+        <p:nvSpPr>
+          <p:cNvPr id="10" name="TextBox 9"/>
           <p:cNvSpPr txBox="1"/>
           <p:nvPr/>
         </p:nvSpPr>
         <p:spPr>
           <a:xfrm>
-            <a:off x="914400" y="2103120"/>
-            <a:ext cx="4663440" cy="457200"/>
+            <a:off x="4572000" y="1783080"/>
+            <a:ext cx="3063240" cy="365760"/>
           </a:xfrm>
           <a:prstGeom prst="rect">
             <a:avLst/>
@@ -4810,27 +4851,27 @@
           <a:p>
             <a:pPr algn="l"/>
             <a:r>
-              <a:rPr sz="1700" b="1" i="0">
-                <a:solidFill>
-                  <a:srgbClr val="F96167"/>
+              <a:rPr sz="1400" b="1" i="0">
+                <a:solidFill>
+                  <a:srgbClr val="CADCFC"/>
                 </a:solidFill>
                 <a:latin typeface="Calibri"/>
               </a:rPr>
-              <a:t>왜 막혔나</a:t>
-            </a:r>
-          </a:p>
-        </p:txBody>
-      </p:sp>
-      <p:sp>
-        <p:nvSpPr>
-          <p:cNvPr id="7" name="TextBox 6"/>
+              <a:t>2차</a:t>
+            </a:r>
+          </a:p>
+        </p:txBody>
+      </p:sp>
+      <p:sp>
+        <p:nvSpPr>
+          <p:cNvPr id="11" name="TextBox 10"/>
           <p:cNvSpPr txBox="1"/>
           <p:nvPr/>
         </p:nvSpPr>
         <p:spPr>
           <a:xfrm>
-            <a:off x="914400" y="2651760"/>
-            <a:ext cx="4754880" cy="3200400"/>
+            <a:off x="4572000" y="2194560"/>
+            <a:ext cx="3063240" cy="914400"/>
           </a:xfrm>
           <a:prstGeom prst="rect">
             <a:avLst/>
@@ -4838,76 +4879,137 @@
           <a:noFill/>
         </p:spPr>
         <p:txBody>
-          <a:bodyPr wrap="square">
+          <a:bodyPr wrap="square" anchor="t" lIns="0" rIns="0" tIns="0" bIns="0">
             <a:spAutoFit/>
           </a:bodyPr>
           <a:lstStyle/>
           <a:p>
-            <a:pPr>
-              <a:spcAft>
-                <a:spcPts val="1400"/>
-              </a:spcAft>
+            <a:pPr algn="l">
+              <a:lnSpc>
+                <a:spcPct val="125000"/>
+              </a:lnSpc>
             </a:pPr>
             <a:r>
-              <a:rPr sz="1400">
+              <a:rPr sz="1500" b="1" i="0">
                 <a:solidFill>
                   <a:srgbClr val="FFFFFF"/>
                 </a:solidFill>
                 <a:latin typeface="Calibri"/>
               </a:rPr>
-              <a:t>•  requests로 접속 → 헤더만 보고 1단계에서 바로 차단</a:t>
-            </a:r>
-          </a:p>
-          <a:p>
-            <a:pPr>
-              <a:spcAft>
-                <a:spcPts val="1400"/>
-              </a:spcAft>
+              <a:t>+ 무신사·올리브영</a:t>
+            </a:r>
+          </a:p>
+          <a:p>
+            <a:pPr algn="l">
+              <a:lnSpc>
+                <a:spcPct val="125000"/>
+              </a:lnSpc>
             </a:pPr>
             <a:r>
-              <a:rPr sz="1400">
+              <a:rPr sz="1500" b="1" i="0">
                 <a:solidFill>
                   <a:srgbClr val="FFFFFF"/>
                 </a:solidFill>
                 <a:latin typeface="Calibri"/>
               </a:rPr>
-              <a:t>•  Selenium으로 접속 → "자동화 도구" 흔적이 들켜서
-3단계에서 차단</a:t>
-            </a:r>
-          </a:p>
-          <a:p>
-            <a:pPr>
-              <a:spcAft>
-                <a:spcPts val="1400"/>
-              </a:spcAft>
-            </a:pPr>
-            <a:r>
-              <a:rPr sz="1400">
+              <a:t>(동료 크롤링 데이터 추가)</a:t>
+            </a:r>
+          </a:p>
+        </p:txBody>
+      </p:sp>
+      <p:sp>
+        <p:nvSpPr>
+          <p:cNvPr id="12" name="TextBox 11"/>
+          <p:cNvSpPr txBox="1"/>
+          <p:nvPr/>
+        </p:nvSpPr>
+        <p:spPr>
+          <a:xfrm>
+            <a:off x="4572000" y="3291840"/>
+            <a:ext cx="3063240" cy="548640"/>
+          </a:xfrm>
+          <a:prstGeom prst="rect">
+            <a:avLst/>
+          </a:prstGeom>
+          <a:noFill/>
+        </p:spPr>
+        <p:txBody>
+          <a:bodyPr wrap="square" anchor="t" lIns="0" rIns="0" tIns="0" bIns="0">
+            <a:spAutoFit/>
+          </a:bodyPr>
+          <a:lstStyle/>
+          <a:p>
+            <a:pPr algn="l"/>
+            <a:r>
+              <a:rPr sz="2400" b="1" i="0">
                 <a:solidFill>
                   <a:srgbClr val="FFFFFF"/>
                 </a:solidFill>
                 <a:latin typeface="Calibri"/>
               </a:rPr>
-              <a:t>•  마우스·스크롤 없이 너무 빠르게 요청하면
-행동 패턴에서 차단</a:t>
-            </a:r>
-          </a:p>
-        </p:txBody>
-      </p:sp>
-      <p:sp>
-        <p:nvSpPr>
-          <p:cNvPr id="8" name="Rounded Rectangle 7"/>
+              <a:t>452,395건</a:t>
+            </a:r>
+          </a:p>
+        </p:txBody>
+      </p:sp>
+      <p:sp>
+        <p:nvSpPr>
+          <p:cNvPr id="13" name="Right Arrow 12"/>
           <p:cNvSpPr/>
           <p:nvPr/>
         </p:nvSpPr>
         <p:spPr>
           <a:xfrm>
-            <a:off x="6217920" y="1828800"/>
-            <a:ext cx="5303520" cy="4206240"/>
+            <a:off x="7882127" y="2651760"/>
+            <a:ext cx="146304" cy="320040"/>
+          </a:xfrm>
+          <a:prstGeom prst="rightArrow">
+            <a:avLst/>
+          </a:prstGeom>
+          <a:solidFill>
+            <a:srgbClr val="555A6E"/>
+          </a:solidFill>
+          <a:ln>
+            <a:noFill/>
+          </a:ln>
+          <a:effectLst/>
+        </p:spPr>
+        <p:style>
+          <a:lnRef idx="1">
+            <a:schemeClr val="accent1"/>
+          </a:lnRef>
+          <a:fillRef idx="3">
+            <a:schemeClr val="accent1"/>
+          </a:fillRef>
+          <a:effectRef idx="2">
+            <a:schemeClr val="accent1"/>
+          </a:effectRef>
+          <a:fontRef idx="minor">
+            <a:schemeClr val="lt1"/>
+          </a:fontRef>
+        </p:style>
+        <p:txBody>
+          <a:bodyPr rtlCol="0" anchor="ctr"/>
+          <a:lstStyle/>
+          <a:p>
+            <a:pPr algn="ctr"/>
+          </a:p>
+        </p:txBody>
+      </p:sp>
+      <p:sp>
+        <p:nvSpPr>
+          <p:cNvPr id="14" name="Rounded Rectangle 13"/>
+          <p:cNvSpPr/>
+          <p:nvPr/>
+        </p:nvSpPr>
+        <p:spPr>
+          <a:xfrm>
+            <a:off x="8046719" y="1554480"/>
+            <a:ext cx="3520440" cy="2468880"/>
           </a:xfrm>
           <a:prstGeom prst="roundRect">
             <a:avLst>
-              <a:gd name="adj" fmla="val 5000"/>
+              <a:gd name="adj" fmla="val 8000"/>
             </a:avLst>
           </a:prstGeom>
           <a:solidFill>
@@ -4942,14 +5044,14 @@
       </p:sp>
       <p:sp>
         <p:nvSpPr>
-          <p:cNvPr id="9" name="TextBox 8"/>
+          <p:cNvPr id="15" name="TextBox 14"/>
           <p:cNvSpPr txBox="1"/>
           <p:nvPr/>
         </p:nvSpPr>
         <p:spPr>
           <a:xfrm>
-            <a:off x="6492240" y="2103120"/>
-            <a:ext cx="4754880" cy="457200"/>
+            <a:off x="8275319" y="1783080"/>
+            <a:ext cx="3063240" cy="365760"/>
           </a:xfrm>
           <a:prstGeom prst="rect">
             <a:avLst/>
@@ -4964,27 +5066,152 @@
           <a:p>
             <a:pPr algn="l"/>
             <a:r>
-              <a:rPr sz="1700" b="1" i="0">
+              <a:rPr sz="1400" b="1" i="0">
+                <a:solidFill>
+                  <a:srgbClr val="CADCFC"/>
+                </a:solidFill>
+                <a:latin typeface="Calibri"/>
+              </a:rPr>
+              <a:t>최종</a:t>
+            </a:r>
+          </a:p>
+        </p:txBody>
+      </p:sp>
+      <p:sp>
+        <p:nvSpPr>
+          <p:cNvPr id="16" name="TextBox 15"/>
+          <p:cNvSpPr txBox="1"/>
+          <p:nvPr/>
+        </p:nvSpPr>
+        <p:spPr>
+          <a:xfrm>
+            <a:off x="8275319" y="2194560"/>
+            <a:ext cx="3063240" cy="914400"/>
+          </a:xfrm>
+          <a:prstGeom prst="rect">
+            <a:avLst/>
+          </a:prstGeom>
+          <a:noFill/>
+        </p:spPr>
+        <p:txBody>
+          <a:bodyPr wrap="square" anchor="t" lIns="0" rIns="0" tIns="0" bIns="0">
+            <a:spAutoFit/>
+          </a:bodyPr>
+          <a:lstStyle/>
+          <a:p>
+            <a:pPr algn="l">
+              <a:lnSpc>
+                <a:spcPct val="125000"/>
+              </a:lnSpc>
+            </a:pPr>
+            <a:r>
+              <a:rPr sz="1500" b="1" i="0">
                 <a:solidFill>
                   <a:srgbClr val="FFFFFF"/>
                 </a:solidFill>
                 <a:latin typeface="Calibri"/>
               </a:rPr>
-              <a:t>어떻게 뚫었나 — "진짜 손님" 행세</a:t>
-            </a:r>
-          </a:p>
-        </p:txBody>
-      </p:sp>
-      <p:sp>
-        <p:nvSpPr>
-          <p:cNvPr id="10" name="TextBox 9"/>
+              <a:t>스키마/라벨 통일</a:t>
+            </a:r>
+          </a:p>
+          <a:p>
+            <a:pPr algn="l">
+              <a:lnSpc>
+                <a:spcPct val="125000"/>
+              </a:lnSpc>
+            </a:pPr>
+            <a:r>
+              <a:rPr sz="1500" b="1" i="0">
+                <a:solidFill>
+                  <a:srgbClr val="FFFFFF"/>
+                </a:solidFill>
+                <a:latin typeface="Calibri"/>
+              </a:rPr>
+              <a:t>+ 중복 제거</a:t>
+            </a:r>
+          </a:p>
+        </p:txBody>
+      </p:sp>
+      <p:sp>
+        <p:nvSpPr>
+          <p:cNvPr id="17" name="TextBox 16"/>
           <p:cNvSpPr txBox="1"/>
           <p:nvPr/>
         </p:nvSpPr>
         <p:spPr>
           <a:xfrm>
-            <a:off x="6492240" y="2651760"/>
-            <a:ext cx="4754880" cy="3200400"/>
+            <a:off x="8275319" y="3291840"/>
+            <a:ext cx="3063240" cy="548640"/>
+          </a:xfrm>
+          <a:prstGeom prst="rect">
+            <a:avLst/>
+          </a:prstGeom>
+          <a:noFill/>
+        </p:spPr>
+        <p:txBody>
+          <a:bodyPr wrap="square" anchor="t" lIns="0" rIns="0" tIns="0" bIns="0">
+            <a:spAutoFit/>
+          </a:bodyPr>
+          <a:lstStyle/>
+          <a:p>
+            <a:pPr algn="l"/>
+            <a:r>
+              <a:rPr sz="2400" b="1" i="0">
+                <a:solidFill>
+                  <a:srgbClr val="FFFFFF"/>
+                </a:solidFill>
+                <a:latin typeface="Calibri"/>
+              </a:rPr>
+              <a:t>538,774건</a:t>
+            </a:r>
+          </a:p>
+        </p:txBody>
+      </p:sp>
+      <p:sp>
+        <p:nvSpPr>
+          <p:cNvPr id="18" name="TextBox 17"/>
+          <p:cNvSpPr txBox="1"/>
+          <p:nvPr/>
+        </p:nvSpPr>
+        <p:spPr>
+          <a:xfrm>
+            <a:off x="640080" y="4389120"/>
+            <a:ext cx="10881360" cy="365760"/>
+          </a:xfrm>
+          <a:prstGeom prst="rect">
+            <a:avLst/>
+          </a:prstGeom>
+          <a:noFill/>
+        </p:spPr>
+        <p:txBody>
+          <a:bodyPr wrap="square" anchor="t" lIns="0" rIns="0" tIns="0" bIns="0">
+            <a:spAutoFit/>
+          </a:bodyPr>
+          <a:lstStyle/>
+          <a:p>
+            <a:pPr algn="l"/>
+            <a:r>
+              <a:rPr sz="1600" b="1" i="0">
+                <a:solidFill>
+                  <a:srgbClr val="1E2761"/>
+                </a:solidFill>
+                <a:latin typeface="Calibri"/>
+              </a:rPr>
+              <a:t>데이터 장점</a:t>
+            </a:r>
+          </a:p>
+        </p:txBody>
+      </p:sp>
+      <p:sp>
+        <p:nvSpPr>
+          <p:cNvPr id="19" name="TextBox 18"/>
+          <p:cNvSpPr txBox="1"/>
+          <p:nvPr/>
+        </p:nvSpPr>
+        <p:spPr>
+          <a:xfrm>
+            <a:off x="640080" y="4846320"/>
+            <a:ext cx="10881360" cy="1645920"/>
           </a:xfrm>
           <a:prstGeom prst="rect">
             <a:avLst/>
@@ -4999,87 +5226,49 @@
           <a:p>
             <a:pPr>
               <a:spcAft>
-                <a:spcPts val="1400"/>
+                <a:spcPts val="800"/>
               </a:spcAft>
             </a:pPr>
             <a:r>
               <a:rPr sz="1400">
                 <a:solidFill>
-                  <a:srgbClr val="FFFFFF"/>
+                  <a:srgbClr val="21295C"/>
                 </a:solidFill>
                 <a:latin typeface="Calibri"/>
               </a:rPr>
-              <a:t>•  가짜 브라우저 대신, 내 컴퓨터의 실제 Chrome을
-그대로 원격 연결해서 사용 (Playwright + CDP)</a:t>
+              <a:t>•  별점 기반 라벨이 이미 존재 → 별도 수작업 레이블링 불필요</a:t>
             </a:r>
           </a:p>
           <a:p>
             <a:pPr>
               <a:spcAft>
-                <a:spcPts val="1400"/>
+                <a:spcPts val="800"/>
               </a:spcAft>
             </a:pPr>
             <a:r>
               <a:rPr sz="1400">
                 <a:solidFill>
-                  <a:srgbClr val="FFFFFF"/>
+                  <a:srgbClr val="21295C"/>
                 </a:solidFill>
                 <a:latin typeface="Calibri"/>
               </a:rPr>
-              <a:t>•  검색창에 키워드를 한 글자씩 타이핑
-(URL로 바로 안 들어감)</a:t>
+              <a:t>•  화장품 도메인 특화, 2015~2026년 10년치 데이터로 트렌드 분석도 가능</a:t>
             </a:r>
           </a:p>
           <a:p>
             <a:pPr>
               <a:spcAft>
-                <a:spcPts val="1400"/>
+                <a:spcPts val="800"/>
               </a:spcAft>
             </a:pPr>
             <a:r>
               <a:rPr sz="1400">
                 <a:solidFill>
-                  <a:srgbClr val="FFFFFF"/>
+                  <a:srgbClr val="21295C"/>
                 </a:solidFill>
                 <a:latin typeface="Calibri"/>
               </a:rPr>
-              <a:t>•  상품 사이 랜덤 대기, 가끔 쿠팡 홈으로 돌아가
-쉬기 — 사람처럼 행동</a:t>
-            </a:r>
-          </a:p>
-        </p:txBody>
-      </p:sp>
-      <p:sp>
-        <p:nvSpPr>
-          <p:cNvPr id="11" name="TextBox 10"/>
-          <p:cNvSpPr txBox="1"/>
-          <p:nvPr/>
-        </p:nvSpPr>
-        <p:spPr>
-          <a:xfrm>
-            <a:off x="640080" y="6172200"/>
-            <a:ext cx="10881360" cy="457200"/>
-          </a:xfrm>
-          <a:prstGeom prst="rect">
-            <a:avLst/>
-          </a:prstGeom>
-          <a:noFill/>
-        </p:spPr>
-        <p:txBody>
-          <a:bodyPr wrap="square" anchor="t" lIns="0" rIns="0" tIns="0" bIns="0">
-            <a:spAutoFit/>
-          </a:bodyPr>
-          <a:lstStyle/>
-          <a:p>
-            <a:pPr algn="ctr"/>
-            <a:r>
-              <a:rPr sz="1250" b="0" i="1">
-                <a:solidFill>
-                  <a:srgbClr val="CADCFC"/>
-                </a:solidFill>
-                <a:latin typeface="Calibri"/>
-              </a:rPr>
-              <a:t>핵심: 자동화 도구를 "새로 띄우는" 게 아니라, 이미 로그인된 실제 브라우저에 "숟가락만 얹는" 방식이라 자동화 흔적 자체가 없다</a:t>
+              <a:t>•  20개+ 카테고리 × 8개 속성으로 비교 분석 용이</a:t>
             </a:r>
           </a:p>
         </p:txBody>
@@ -5117,7 +5306,7 @@
             <a:avLst/>
           </a:prstGeom>
           <a:solidFill>
-            <a:srgbClr val="FFFFFF"/>
+            <a:srgbClr val="1E2761"/>
           </a:solidFill>
           <a:ln>
             <a:noFill/>
@@ -5170,35 +5359,70 @@
           <a:p>
             <a:pPr algn="l"/>
             <a:r>
-              <a:rPr sz="2800" b="1" i="0">
-                <a:solidFill>
-                  <a:srgbClr val="1E2761"/>
+              <a:rPr sz="2700" b="1" i="0">
+                <a:solidFill>
+                  <a:srgbClr val="FFFFFF"/>
                 </a:solidFill>
                 <a:latin typeface="Georgia"/>
               </a:rPr>
-              <a:t>데이터 준비 — 가장 까다로웠던 단계</a:t>
-            </a:r>
-          </a:p>
-        </p:txBody>
-      </p:sp>
-      <p:sp>
-        <p:nvSpPr>
-          <p:cNvPr id="4" name="Rounded Rectangle 3"/>
+              <a:t>쿠팡 크롤링 — 봇 탐지를 어떻게 뚫었나</a:t>
+            </a:r>
+          </a:p>
+        </p:txBody>
+      </p:sp>
+      <p:sp>
+        <p:nvSpPr>
+          <p:cNvPr id="4" name="TextBox 3"/>
+          <p:cNvSpPr txBox="1"/>
+          <p:nvPr/>
+        </p:nvSpPr>
+        <p:spPr>
+          <a:xfrm>
+            <a:off x="640080" y="1234440"/>
+            <a:ext cx="10515600" cy="457200"/>
+          </a:xfrm>
+          <a:prstGeom prst="rect">
+            <a:avLst/>
+          </a:prstGeom>
+          <a:noFill/>
+        </p:spPr>
+        <p:txBody>
+          <a:bodyPr wrap="square" anchor="t" lIns="0" rIns="0" tIns="0" bIns="0">
+            <a:spAutoFit/>
+          </a:bodyPr>
+          <a:lstStyle/>
+          <a:p>
+            <a:pPr algn="l"/>
+            <a:r>
+              <a:rPr sz="1450" b="0" i="1">
+                <a:solidFill>
+                  <a:srgbClr val="CADCFC"/>
+                </a:solidFill>
+                <a:latin typeface="Calibri"/>
+              </a:rPr>
+              <a:t>쿠팡은 문지기(Akamai)가 "이 손님이 사람인지 로봇인지" 5단계로 검사한다</a:t>
+            </a:r>
+          </a:p>
+        </p:txBody>
+      </p:sp>
+      <p:sp>
+        <p:nvSpPr>
+          <p:cNvPr id="5" name="Rounded Rectangle 4"/>
           <p:cNvSpPr/>
           <p:nvPr/>
         </p:nvSpPr>
         <p:spPr>
           <a:xfrm>
-            <a:off x="640080" y="1554480"/>
-            <a:ext cx="10881360" cy="1417320"/>
+            <a:off x="640080" y="1828800"/>
+            <a:ext cx="5303520" cy="4206240"/>
           </a:xfrm>
           <a:prstGeom prst="roundRect">
             <a:avLst>
-              <a:gd name="adj" fmla="val 6000"/>
+              <a:gd name="adj" fmla="val 5000"/>
             </a:avLst>
           </a:prstGeom>
           <a:solidFill>
-            <a:srgbClr val="F4F6FC"/>
+            <a:srgbClr val="283370"/>
           </a:solidFill>
           <a:ln>
             <a:noFill/>
@@ -5229,18 +5453,126 @@
       </p:sp>
       <p:sp>
         <p:nvSpPr>
-          <p:cNvPr id="5" name="Rounded Rectangle 4"/>
+          <p:cNvPr id="6" name="TextBox 5"/>
+          <p:cNvSpPr txBox="1"/>
+          <p:nvPr/>
+        </p:nvSpPr>
+        <p:spPr>
+          <a:xfrm>
+            <a:off x="914400" y="2103120"/>
+            <a:ext cx="4663440" cy="457200"/>
+          </a:xfrm>
+          <a:prstGeom prst="rect">
+            <a:avLst/>
+          </a:prstGeom>
+          <a:noFill/>
+        </p:spPr>
+        <p:txBody>
+          <a:bodyPr wrap="square" anchor="t" lIns="0" rIns="0" tIns="0" bIns="0">
+            <a:spAutoFit/>
+          </a:bodyPr>
+          <a:lstStyle/>
+          <a:p>
+            <a:pPr algn="l"/>
+            <a:r>
+              <a:rPr sz="1700" b="1" i="0">
+                <a:solidFill>
+                  <a:srgbClr val="F96167"/>
+                </a:solidFill>
+                <a:latin typeface="Calibri"/>
+              </a:rPr>
+              <a:t>왜 막혔나</a:t>
+            </a:r>
+          </a:p>
+        </p:txBody>
+      </p:sp>
+      <p:sp>
+        <p:nvSpPr>
+          <p:cNvPr id="7" name="TextBox 6"/>
+          <p:cNvSpPr txBox="1"/>
+          <p:nvPr/>
+        </p:nvSpPr>
+        <p:spPr>
+          <a:xfrm>
+            <a:off x="914400" y="2651760"/>
+            <a:ext cx="4754880" cy="3200400"/>
+          </a:xfrm>
+          <a:prstGeom prst="rect">
+            <a:avLst/>
+          </a:prstGeom>
+          <a:noFill/>
+        </p:spPr>
+        <p:txBody>
+          <a:bodyPr wrap="square">
+            <a:spAutoFit/>
+          </a:bodyPr>
+          <a:lstStyle/>
+          <a:p>
+            <a:pPr>
+              <a:spcAft>
+                <a:spcPts val="1400"/>
+              </a:spcAft>
+            </a:pPr>
+            <a:r>
+              <a:rPr sz="1400">
+                <a:solidFill>
+                  <a:srgbClr val="FFFFFF"/>
+                </a:solidFill>
+                <a:latin typeface="Calibri"/>
+              </a:rPr>
+              <a:t>•  requests로 접속 → 헤더만 보고 1단계에서 바로 차단</a:t>
+            </a:r>
+          </a:p>
+          <a:p>
+            <a:pPr>
+              <a:spcAft>
+                <a:spcPts val="1400"/>
+              </a:spcAft>
+            </a:pPr>
+            <a:r>
+              <a:rPr sz="1400">
+                <a:solidFill>
+                  <a:srgbClr val="FFFFFF"/>
+                </a:solidFill>
+                <a:latin typeface="Calibri"/>
+              </a:rPr>
+              <a:t>•  Selenium으로 접속 → "자동화 도구" 흔적이 들켜서
+3단계에서 차단</a:t>
+            </a:r>
+          </a:p>
+          <a:p>
+            <a:pPr>
+              <a:spcAft>
+                <a:spcPts val="1400"/>
+              </a:spcAft>
+            </a:pPr>
+            <a:r>
+              <a:rPr sz="1400">
+                <a:solidFill>
+                  <a:srgbClr val="FFFFFF"/>
+                </a:solidFill>
+                <a:latin typeface="Calibri"/>
+              </a:rPr>
+              <a:t>•  마우스·스크롤 없이 너무 빠르게 요청하면
+행동 패턴에서 차단</a:t>
+            </a:r>
+          </a:p>
+        </p:txBody>
+      </p:sp>
+      <p:sp>
+        <p:nvSpPr>
+          <p:cNvPr id="8" name="Rounded Rectangle 7"/>
           <p:cNvSpPr/>
           <p:nvPr/>
         </p:nvSpPr>
         <p:spPr>
           <a:xfrm>
-            <a:off x="868680" y="1755648"/>
-            <a:ext cx="2743200" cy="438912"/>
+            <a:off x="6217920" y="1828800"/>
+            <a:ext cx="5303520" cy="4206240"/>
           </a:xfrm>
           <a:prstGeom prst="roundRect">
             <a:avLst>
-              <a:gd name="adj" fmla="val 50000"/>
+              <a:gd name="adj" fmla="val 5000"/>
             </a:avLst>
           </a:prstGeom>
           <a:solidFill>
@@ -5266,31 +5598,23 @@
           </a:fontRef>
         </p:style>
         <p:txBody>
-          <a:bodyPr rtlCol="0" anchor="ctr" wrap="none" lIns="45720" rIns="45720" tIns="0" bIns="0"/>
+          <a:bodyPr rtlCol="0" anchor="ctr"/>
           <a:lstStyle/>
           <a:p>
             <a:pPr algn="ctr"/>
-            <a:r>
-              <a:rPr sz="1300" b="1">
-                <a:solidFill>
-                  <a:srgbClr val="FFFFFF"/>
-                </a:solidFill>
-              </a:rPr>
-              <a:t>라벨 기준 불일치 (핵심)</a:t>
-            </a:r>
-          </a:p>
-        </p:txBody>
-      </p:sp>
-      <p:sp>
-        <p:nvSpPr>
-          <p:cNvPr id="6" name="TextBox 5"/>
+          </a:p>
+        </p:txBody>
+      </p:sp>
+      <p:sp>
+        <p:nvSpPr>
+          <p:cNvPr id="9" name="TextBox 8"/>
           <p:cNvSpPr txBox="1"/>
           <p:nvPr/>
         </p:nvSpPr>
         <p:spPr>
           <a:xfrm>
-            <a:off x="3794760" y="1691639"/>
-            <a:ext cx="3520440" cy="1143000"/>
+            <a:off x="6492240" y="2103120"/>
+            <a:ext cx="4754880" cy="457200"/>
           </a:xfrm>
           <a:prstGeom prst="rect">
             <a:avLst/>
@@ -5303,33 +5627,103 @@
           </a:bodyPr>
           <a:lstStyle/>
           <a:p>
-            <a:pPr algn="l">
-              <a:lnSpc>
-                <a:spcPct val="125000"/>
-              </a:lnSpc>
+            <a:pPr algn="l"/>
+            <a:r>
+              <a:rPr sz="1700" b="1" i="0">
+                <a:solidFill>
+                  <a:srgbClr val="FFFFFF"/>
+                </a:solidFill>
+                <a:latin typeface="Calibri"/>
+              </a:rPr>
+              <a:t>어떻게 뚫었나 — "진짜 손님" 행세</a:t>
+            </a:r>
+          </a:p>
+        </p:txBody>
+      </p:sp>
+      <p:sp>
+        <p:nvSpPr>
+          <p:cNvPr id="10" name="TextBox 9"/>
+          <p:cNvSpPr txBox="1"/>
+          <p:nvPr/>
+        </p:nvSpPr>
+        <p:spPr>
+          <a:xfrm>
+            <a:off x="6492240" y="2651760"/>
+            <a:ext cx="4754880" cy="3200400"/>
+          </a:xfrm>
+          <a:prstGeom prst="rect">
+            <a:avLst/>
+          </a:prstGeom>
+          <a:noFill/>
+        </p:spPr>
+        <p:txBody>
+          <a:bodyPr wrap="square">
+            <a:spAutoFit/>
+          </a:bodyPr>
+          <a:lstStyle/>
+          <a:p>
+            <a:pPr>
+              <a:spcAft>
+                <a:spcPts val="1400"/>
+              </a:spcAft>
             </a:pPr>
             <a:r>
-              <a:rPr sz="1300" b="0" i="0">
-                <a:solidFill>
-                  <a:srgbClr val="555A6E"/>
+              <a:rPr sz="1400">
+                <a:solidFill>
+                  <a:srgbClr val="FFFFFF"/>
                 </a:solidFill>
                 <a:latin typeface="Calibri"/>
               </a:rPr>
-              <a:t>무신사 sentiment가 별점 아닌 텍스트분석 기반 → 5점 리뷰의 21%가 '부정'</a:t>
-            </a:r>
-          </a:p>
-        </p:txBody>
-      </p:sp>
-      <p:sp>
-        <p:nvSpPr>
-          <p:cNvPr id="7" name="TextBox 6"/>
+              <a:t>•  가짜 브라우저 대신, 내 컴퓨터의 실제 Chrome을
+그대로 원격 연결해서 사용 (Playwright + CDP)</a:t>
+            </a:r>
+          </a:p>
+          <a:p>
+            <a:pPr>
+              <a:spcAft>
+                <a:spcPts val="1400"/>
+              </a:spcAft>
+            </a:pPr>
+            <a:r>
+              <a:rPr sz="1400">
+                <a:solidFill>
+                  <a:srgbClr val="FFFFFF"/>
+                </a:solidFill>
+                <a:latin typeface="Calibri"/>
+              </a:rPr>
+              <a:t>•  검색창에 키워드를 한 글자씩 타이핑
+(URL로 바로 안 들어감)</a:t>
+            </a:r>
+          </a:p>
+          <a:p>
+            <a:pPr>
+              <a:spcAft>
+                <a:spcPts val="1400"/>
+              </a:spcAft>
+            </a:pPr>
+            <a:r>
+              <a:rPr sz="1400">
+                <a:solidFill>
+                  <a:srgbClr val="FFFFFF"/>
+                </a:solidFill>
+                <a:latin typeface="Calibri"/>
+              </a:rPr>
+              <a:t>•  상품 사이 랜덤 대기, 가끔 쿠팡 홈으로 돌아가
+쉬기 — 사람처럼 행동</a:t>
+            </a:r>
+          </a:p>
+        </p:txBody>
+      </p:sp>
+      <p:sp>
+        <p:nvSpPr>
+          <p:cNvPr id="11" name="TextBox 10"/>
           <p:cNvSpPr txBox="1"/>
           <p:nvPr/>
         </p:nvSpPr>
         <p:spPr>
           <a:xfrm>
-            <a:off x="7452360" y="1691639"/>
-            <a:ext cx="3931920" cy="1143000"/>
+            <a:off x="640080" y="6172200"/>
+            <a:ext cx="10881360" cy="457200"/>
           </a:xfrm>
           <a:prstGeom prst="rect">
             <a:avLst/>
@@ -5342,375 +5736,15 @@
           </a:bodyPr>
           <a:lstStyle/>
           <a:p>
-            <a:pPr algn="l">
-              <a:lnSpc>
-                <a:spcPct val="125000"/>
-              </a:lnSpc>
-            </a:pPr>
-            <a:r>
-              <a:rPr sz="1300" b="1" i="0">
-                <a:solidFill>
-                  <a:srgbClr val="1E2761"/>
+            <a:pPr algn="ctr"/>
+            <a:r>
+              <a:rPr sz="1250" b="0" i="1">
+                <a:solidFill>
+                  <a:srgbClr val="CADCFC"/>
                 </a:solidFill>
                 <a:latin typeface="Calibri"/>
               </a:rPr>
-              <a:t>해결 → 전체 데이터의 sentiment를 별점에서 일괄 재계산</a:t>
-            </a:r>
-          </a:p>
-        </p:txBody>
-      </p:sp>
-      <p:sp>
-        <p:nvSpPr>
-          <p:cNvPr id="8" name="Rounded Rectangle 7"/>
-          <p:cNvSpPr/>
-          <p:nvPr/>
-        </p:nvSpPr>
-        <p:spPr>
-          <a:xfrm>
-            <a:off x="640080" y="3154680"/>
-            <a:ext cx="10881360" cy="1417320"/>
-          </a:xfrm>
-          <a:prstGeom prst="roundRect">
-            <a:avLst>
-              <a:gd name="adj" fmla="val 6000"/>
-            </a:avLst>
-          </a:prstGeom>
-          <a:solidFill>
-            <a:srgbClr val="F4F6FC"/>
-          </a:solidFill>
-          <a:ln>
-            <a:noFill/>
-          </a:ln>
-          <a:effectLst/>
-        </p:spPr>
-        <p:style>
-          <a:lnRef idx="1">
-            <a:schemeClr val="accent1"/>
-          </a:lnRef>
-          <a:fillRef idx="3">
-            <a:schemeClr val="accent1"/>
-          </a:fillRef>
-          <a:effectRef idx="2">
-            <a:schemeClr val="accent1"/>
-          </a:effectRef>
-          <a:fontRef idx="minor">
-            <a:schemeClr val="lt1"/>
-          </a:fontRef>
-        </p:style>
-        <p:txBody>
-          <a:bodyPr rtlCol="0" anchor="ctr"/>
-          <a:lstStyle/>
-          <a:p>
-            <a:pPr algn="ctr"/>
-          </a:p>
-        </p:txBody>
-      </p:sp>
-      <p:sp>
-        <p:nvSpPr>
-          <p:cNvPr id="9" name="Rounded Rectangle 8"/>
-          <p:cNvSpPr/>
-          <p:nvPr/>
-        </p:nvSpPr>
-        <p:spPr>
-          <a:xfrm>
-            <a:off x="868680" y="3355848"/>
-            <a:ext cx="2743200" cy="438912"/>
-          </a:xfrm>
-          <a:prstGeom prst="roundRect">
-            <a:avLst>
-              <a:gd name="adj" fmla="val 50000"/>
-            </a:avLst>
-          </a:prstGeom>
-          <a:solidFill>
-            <a:srgbClr val="F96167"/>
-          </a:solidFill>
-          <a:ln>
-            <a:noFill/>
-          </a:ln>
-          <a:effectLst/>
-        </p:spPr>
-        <p:style>
-          <a:lnRef idx="1">
-            <a:schemeClr val="accent1"/>
-          </a:lnRef>
-          <a:fillRef idx="3">
-            <a:schemeClr val="accent1"/>
-          </a:fillRef>
-          <a:effectRef idx="2">
-            <a:schemeClr val="accent1"/>
-          </a:effectRef>
-          <a:fontRef idx="minor">
-            <a:schemeClr val="lt1"/>
-          </a:fontRef>
-        </p:style>
-        <p:txBody>
-          <a:bodyPr rtlCol="0" anchor="ctr" wrap="none" lIns="45720" rIns="45720" tIns="0" bIns="0"/>
-          <a:lstStyle/>
-          <a:p>
-            <a:pPr algn="ctr"/>
-            <a:r>
-              <a:rPr sz="1300" b="1">
-                <a:solidFill>
-                  <a:srgbClr val="FFFFFF"/>
-                </a:solidFill>
-              </a:rPr>
-              <a:t>클래스 불균형</a:t>
-            </a:r>
-          </a:p>
-        </p:txBody>
-      </p:sp>
-      <p:sp>
-        <p:nvSpPr>
-          <p:cNvPr id="10" name="TextBox 9"/>
-          <p:cNvSpPr txBox="1"/>
-          <p:nvPr/>
-        </p:nvSpPr>
-        <p:spPr>
-          <a:xfrm>
-            <a:off x="3794760" y="3291840"/>
-            <a:ext cx="3520440" cy="1143000"/>
-          </a:xfrm>
-          <a:prstGeom prst="rect">
-            <a:avLst/>
-          </a:prstGeom>
-          <a:noFill/>
-        </p:spPr>
-        <p:txBody>
-          <a:bodyPr wrap="square" anchor="t" lIns="0" rIns="0" tIns="0" bIns="0">
-            <a:spAutoFit/>
-          </a:bodyPr>
-          <a:lstStyle/>
-          <a:p>
-            <a:pPr algn="l">
-              <a:lnSpc>
-                <a:spcPct val="125000"/>
-              </a:lnSpc>
-            </a:pPr>
-            <a:r>
-              <a:rPr sz="1300" b="0" i="0">
-                <a:solidFill>
-                  <a:srgbClr val="555A6E"/>
-                </a:solidFill>
-                <a:latin typeface="Calibri"/>
-              </a:rPr>
-              <a:t>긍정 86.7% — 그대로 학습하면 다 긍정 찍어도 86% 정확도</a:t>
-            </a:r>
-          </a:p>
-        </p:txBody>
-      </p:sp>
-      <p:sp>
-        <p:nvSpPr>
-          <p:cNvPr id="11" name="TextBox 10"/>
-          <p:cNvSpPr txBox="1"/>
-          <p:nvPr/>
-        </p:nvSpPr>
-        <p:spPr>
-          <a:xfrm>
-            <a:off x="7452360" y="3291840"/>
-            <a:ext cx="3931920" cy="1143000"/>
-          </a:xfrm>
-          <a:prstGeom prst="rect">
-            <a:avLst/>
-          </a:prstGeom>
-          <a:noFill/>
-        </p:spPr>
-        <p:txBody>
-          <a:bodyPr wrap="square" anchor="t" lIns="0" rIns="0" tIns="0" bIns="0">
-            <a:spAutoFit/>
-          </a:bodyPr>
-          <a:lstStyle/>
-          <a:p>
-            <a:pPr algn="l">
-              <a:lnSpc>
-                <a:spcPct val="125000"/>
-              </a:lnSpc>
-            </a:pPr>
-            <a:r>
-              <a:rPr sz="1300" b="1" i="0">
-                <a:solidFill>
-                  <a:srgbClr val="1E2761"/>
-                </a:solidFill>
-                <a:latin typeface="Calibri"/>
-              </a:rPr>
-              <a:t>해결 → 부정/중립 전량 + 긍정은 2배 규모로만 다운샘플링</a:t>
-            </a:r>
-          </a:p>
-        </p:txBody>
-      </p:sp>
-      <p:sp>
-        <p:nvSpPr>
-          <p:cNvPr id="12" name="Rounded Rectangle 11"/>
-          <p:cNvSpPr/>
-          <p:nvPr/>
-        </p:nvSpPr>
-        <p:spPr>
-          <a:xfrm>
-            <a:off x="640080" y="4754880"/>
-            <a:ext cx="10881360" cy="1417320"/>
-          </a:xfrm>
-          <a:prstGeom prst="roundRect">
-            <a:avLst>
-              <a:gd name="adj" fmla="val 6000"/>
-            </a:avLst>
-          </a:prstGeom>
-          <a:solidFill>
-            <a:srgbClr val="F4F6FC"/>
-          </a:solidFill>
-          <a:ln>
-            <a:noFill/>
-          </a:ln>
-          <a:effectLst/>
-        </p:spPr>
-        <p:style>
-          <a:lnRef idx="1">
-            <a:schemeClr val="accent1"/>
-          </a:lnRef>
-          <a:fillRef idx="3">
-            <a:schemeClr val="accent1"/>
-          </a:fillRef>
-          <a:effectRef idx="2">
-            <a:schemeClr val="accent1"/>
-          </a:effectRef>
-          <a:fontRef idx="minor">
-            <a:schemeClr val="lt1"/>
-          </a:fontRef>
-        </p:style>
-        <p:txBody>
-          <a:bodyPr rtlCol="0" anchor="ctr"/>
-          <a:lstStyle/>
-          <a:p>
-            <a:pPr algn="ctr"/>
-          </a:p>
-        </p:txBody>
-      </p:sp>
-      <p:sp>
-        <p:nvSpPr>
-          <p:cNvPr id="13" name="Rounded Rectangle 12"/>
-          <p:cNvSpPr/>
-          <p:nvPr/>
-        </p:nvSpPr>
-        <p:spPr>
-          <a:xfrm>
-            <a:off x="868680" y="4956048"/>
-            <a:ext cx="2743200" cy="438912"/>
-          </a:xfrm>
-          <a:prstGeom prst="roundRect">
-            <a:avLst>
-              <a:gd name="adj" fmla="val 50000"/>
-            </a:avLst>
-          </a:prstGeom>
-          <a:solidFill>
-            <a:srgbClr val="F96167"/>
-          </a:solidFill>
-          <a:ln>
-            <a:noFill/>
-          </a:ln>
-          <a:effectLst/>
-        </p:spPr>
-        <p:style>
-          <a:lnRef idx="1">
-            <a:schemeClr val="accent1"/>
-          </a:lnRef>
-          <a:fillRef idx="3">
-            <a:schemeClr val="accent1"/>
-          </a:fillRef>
-          <a:effectRef idx="2">
-            <a:schemeClr val="accent1"/>
-          </a:effectRef>
-          <a:fontRef idx="minor">
-            <a:schemeClr val="lt1"/>
-          </a:fontRef>
-        </p:style>
-        <p:txBody>
-          <a:bodyPr rtlCol="0" anchor="ctr" wrap="none" lIns="45720" rIns="45720" tIns="0" bIns="0"/>
-          <a:lstStyle/>
-          <a:p>
-            <a:pPr algn="ctr"/>
-            <a:r>
-              <a:rPr sz="1300" b="1">
-                <a:solidFill>
-                  <a:srgbClr val="FFFFFF"/>
-                </a:solidFill>
-              </a:rPr>
-              <a:t>불용어/형태소 미처리</a:t>
-            </a:r>
-          </a:p>
-        </p:txBody>
-      </p:sp>
-      <p:sp>
-        <p:nvSpPr>
-          <p:cNvPr id="14" name="TextBox 13"/>
-          <p:cNvSpPr txBox="1"/>
-          <p:nvPr/>
-        </p:nvSpPr>
-        <p:spPr>
-          <a:xfrm>
-            <a:off x="3794760" y="4892040"/>
-            <a:ext cx="3520440" cy="1143000"/>
-          </a:xfrm>
-          <a:prstGeom prst="rect">
-            <a:avLst/>
-          </a:prstGeom>
-          <a:noFill/>
-        </p:spPr>
-        <p:txBody>
-          <a:bodyPr wrap="square" anchor="t" lIns="0" rIns="0" tIns="0" bIns="0">
-            <a:spAutoFit/>
-          </a:bodyPr>
-          <a:lstStyle/>
-          <a:p>
-            <a:pPr algn="l">
-              <a:lnSpc>
-                <a:spcPct val="125000"/>
-              </a:lnSpc>
-            </a:pPr>
-            <a:r>
-              <a:rPr sz="1300" b="0" i="0">
-                <a:solidFill>
-                  <a:srgbClr val="555A6E"/>
-                </a:solidFill>
-                <a:latin typeface="Calibri"/>
-              </a:rPr>
-              <a:t>정규식으로만 잘라서 조사가 토큰에 섞임 ("좋아요"≠"좋아서")</a:t>
-            </a:r>
-          </a:p>
-        </p:txBody>
-      </p:sp>
-      <p:sp>
-        <p:nvSpPr>
-          <p:cNvPr id="15" name="TextBox 14"/>
-          <p:cNvSpPr txBox="1"/>
-          <p:nvPr/>
-        </p:nvSpPr>
-        <p:spPr>
-          <a:xfrm>
-            <a:off x="7452360" y="4892040"/>
-            <a:ext cx="3931920" cy="1143000"/>
-          </a:xfrm>
-          <a:prstGeom prst="rect">
-            <a:avLst/>
-          </a:prstGeom>
-          <a:noFill/>
-        </p:spPr>
-        <p:txBody>
-          <a:bodyPr wrap="square" anchor="t" lIns="0" rIns="0" tIns="0" bIns="0">
-            <a:spAutoFit/>
-          </a:bodyPr>
-          <a:lstStyle/>
-          <a:p>
-            <a:pPr algn="l">
-              <a:lnSpc>
-                <a:spcPct val="125000"/>
-              </a:lnSpc>
-            </a:pPr>
-            <a:r>
-              <a:rPr sz="1300" b="1" i="0">
-                <a:solidFill>
-                  <a:srgbClr val="1E2761"/>
-                </a:solidFill>
-                <a:latin typeface="Calibri"/>
-              </a:rPr>
-              <a:t>해결 → Okt 형태소분석 + 어간정규화 + 불용어 제거</a:t>
+              <a:t>핵심: 자동화 도구를 "새로 띄우는" 게 아니라, 이미 로그인된 실제 브라우저에 "숟가락만 얹는" 방식이라 자동화 흔적 자체가 없다</a:t>
             </a:r>
           </a:p>
         </p:txBody>
@@ -5801,6 +5835,637 @@
           <a:p>
             <a:pPr algn="l"/>
             <a:r>
+              <a:rPr sz="2800" b="1" i="0">
+                <a:solidFill>
+                  <a:srgbClr val="1E2761"/>
+                </a:solidFill>
+                <a:latin typeface="Georgia"/>
+              </a:rPr>
+              <a:t>데이터 준비 — 가장 까다로웠던 단계</a:t>
+            </a:r>
+          </a:p>
+        </p:txBody>
+      </p:sp>
+      <p:sp>
+        <p:nvSpPr>
+          <p:cNvPr id="4" name="Rounded Rectangle 3"/>
+          <p:cNvSpPr/>
+          <p:nvPr/>
+        </p:nvSpPr>
+        <p:spPr>
+          <a:xfrm>
+            <a:off x="640080" y="1554480"/>
+            <a:ext cx="10881360" cy="1417320"/>
+          </a:xfrm>
+          <a:prstGeom prst="roundRect">
+            <a:avLst>
+              <a:gd name="adj" fmla="val 6000"/>
+            </a:avLst>
+          </a:prstGeom>
+          <a:solidFill>
+            <a:srgbClr val="F4F6FC"/>
+          </a:solidFill>
+          <a:ln>
+            <a:noFill/>
+          </a:ln>
+          <a:effectLst/>
+        </p:spPr>
+        <p:style>
+          <a:lnRef idx="1">
+            <a:schemeClr val="accent1"/>
+          </a:lnRef>
+          <a:fillRef idx="3">
+            <a:schemeClr val="accent1"/>
+          </a:fillRef>
+          <a:effectRef idx="2">
+            <a:schemeClr val="accent1"/>
+          </a:effectRef>
+          <a:fontRef idx="minor">
+            <a:schemeClr val="lt1"/>
+          </a:fontRef>
+        </p:style>
+        <p:txBody>
+          <a:bodyPr rtlCol="0" anchor="ctr"/>
+          <a:lstStyle/>
+          <a:p>
+            <a:pPr algn="ctr"/>
+          </a:p>
+        </p:txBody>
+      </p:sp>
+      <p:sp>
+        <p:nvSpPr>
+          <p:cNvPr id="5" name="Rounded Rectangle 4"/>
+          <p:cNvSpPr/>
+          <p:nvPr/>
+        </p:nvSpPr>
+        <p:spPr>
+          <a:xfrm>
+            <a:off x="868680" y="1755648"/>
+            <a:ext cx="2743200" cy="438912"/>
+          </a:xfrm>
+          <a:prstGeom prst="roundRect">
+            <a:avLst>
+              <a:gd name="adj" fmla="val 50000"/>
+            </a:avLst>
+          </a:prstGeom>
+          <a:solidFill>
+            <a:srgbClr val="F96167"/>
+          </a:solidFill>
+          <a:ln>
+            <a:noFill/>
+          </a:ln>
+          <a:effectLst/>
+        </p:spPr>
+        <p:style>
+          <a:lnRef idx="1">
+            <a:schemeClr val="accent1"/>
+          </a:lnRef>
+          <a:fillRef idx="3">
+            <a:schemeClr val="accent1"/>
+          </a:fillRef>
+          <a:effectRef idx="2">
+            <a:schemeClr val="accent1"/>
+          </a:effectRef>
+          <a:fontRef idx="minor">
+            <a:schemeClr val="lt1"/>
+          </a:fontRef>
+        </p:style>
+        <p:txBody>
+          <a:bodyPr rtlCol="0" anchor="ctr" wrap="none" lIns="45720" rIns="45720" tIns="0" bIns="0"/>
+          <a:lstStyle/>
+          <a:p>
+            <a:pPr algn="ctr"/>
+            <a:r>
+              <a:rPr sz="1300" b="1">
+                <a:solidFill>
+                  <a:srgbClr val="FFFFFF"/>
+                </a:solidFill>
+              </a:rPr>
+              <a:t>라벨 기준 불일치 (핵심)</a:t>
+            </a:r>
+          </a:p>
+        </p:txBody>
+      </p:sp>
+      <p:sp>
+        <p:nvSpPr>
+          <p:cNvPr id="6" name="TextBox 5"/>
+          <p:cNvSpPr txBox="1"/>
+          <p:nvPr/>
+        </p:nvSpPr>
+        <p:spPr>
+          <a:xfrm>
+            <a:off x="3794760" y="1691639"/>
+            <a:ext cx="3520440" cy="1143000"/>
+          </a:xfrm>
+          <a:prstGeom prst="rect">
+            <a:avLst/>
+          </a:prstGeom>
+          <a:noFill/>
+        </p:spPr>
+        <p:txBody>
+          <a:bodyPr wrap="square" anchor="t" lIns="0" rIns="0" tIns="0" bIns="0">
+            <a:spAutoFit/>
+          </a:bodyPr>
+          <a:lstStyle/>
+          <a:p>
+            <a:pPr algn="l">
+              <a:lnSpc>
+                <a:spcPct val="125000"/>
+              </a:lnSpc>
+            </a:pPr>
+            <a:r>
+              <a:rPr sz="1300" b="0" i="0">
+                <a:solidFill>
+                  <a:srgbClr val="555A6E"/>
+                </a:solidFill>
+                <a:latin typeface="Calibri"/>
+              </a:rPr>
+              <a:t>무신사 sentiment가 별점 아닌 텍스트분석 기반 → 5점 리뷰의 21%가 '부정'</a:t>
+            </a:r>
+          </a:p>
+        </p:txBody>
+      </p:sp>
+      <p:sp>
+        <p:nvSpPr>
+          <p:cNvPr id="7" name="TextBox 6"/>
+          <p:cNvSpPr txBox="1"/>
+          <p:nvPr/>
+        </p:nvSpPr>
+        <p:spPr>
+          <a:xfrm>
+            <a:off x="7452360" y="1691639"/>
+            <a:ext cx="3931920" cy="1143000"/>
+          </a:xfrm>
+          <a:prstGeom prst="rect">
+            <a:avLst/>
+          </a:prstGeom>
+          <a:noFill/>
+        </p:spPr>
+        <p:txBody>
+          <a:bodyPr wrap="square" anchor="t" lIns="0" rIns="0" tIns="0" bIns="0">
+            <a:spAutoFit/>
+          </a:bodyPr>
+          <a:lstStyle/>
+          <a:p>
+            <a:pPr algn="l">
+              <a:lnSpc>
+                <a:spcPct val="125000"/>
+              </a:lnSpc>
+            </a:pPr>
+            <a:r>
+              <a:rPr sz="1300" b="1" i="0">
+                <a:solidFill>
+                  <a:srgbClr val="1E2761"/>
+                </a:solidFill>
+                <a:latin typeface="Calibri"/>
+              </a:rPr>
+              <a:t>해결 → 전체 데이터의 sentiment를 별점에서 일괄 재계산</a:t>
+            </a:r>
+          </a:p>
+        </p:txBody>
+      </p:sp>
+      <p:sp>
+        <p:nvSpPr>
+          <p:cNvPr id="8" name="Rounded Rectangle 7"/>
+          <p:cNvSpPr/>
+          <p:nvPr/>
+        </p:nvSpPr>
+        <p:spPr>
+          <a:xfrm>
+            <a:off x="640080" y="3154680"/>
+            <a:ext cx="10881360" cy="1417320"/>
+          </a:xfrm>
+          <a:prstGeom prst="roundRect">
+            <a:avLst>
+              <a:gd name="adj" fmla="val 6000"/>
+            </a:avLst>
+          </a:prstGeom>
+          <a:solidFill>
+            <a:srgbClr val="F4F6FC"/>
+          </a:solidFill>
+          <a:ln>
+            <a:noFill/>
+          </a:ln>
+          <a:effectLst/>
+        </p:spPr>
+        <p:style>
+          <a:lnRef idx="1">
+            <a:schemeClr val="accent1"/>
+          </a:lnRef>
+          <a:fillRef idx="3">
+            <a:schemeClr val="accent1"/>
+          </a:fillRef>
+          <a:effectRef idx="2">
+            <a:schemeClr val="accent1"/>
+          </a:effectRef>
+          <a:fontRef idx="minor">
+            <a:schemeClr val="lt1"/>
+          </a:fontRef>
+        </p:style>
+        <p:txBody>
+          <a:bodyPr rtlCol="0" anchor="ctr"/>
+          <a:lstStyle/>
+          <a:p>
+            <a:pPr algn="ctr"/>
+          </a:p>
+        </p:txBody>
+      </p:sp>
+      <p:sp>
+        <p:nvSpPr>
+          <p:cNvPr id="9" name="Rounded Rectangle 8"/>
+          <p:cNvSpPr/>
+          <p:nvPr/>
+        </p:nvSpPr>
+        <p:spPr>
+          <a:xfrm>
+            <a:off x="868680" y="3355848"/>
+            <a:ext cx="2743200" cy="438912"/>
+          </a:xfrm>
+          <a:prstGeom prst="roundRect">
+            <a:avLst>
+              <a:gd name="adj" fmla="val 50000"/>
+            </a:avLst>
+          </a:prstGeom>
+          <a:solidFill>
+            <a:srgbClr val="F96167"/>
+          </a:solidFill>
+          <a:ln>
+            <a:noFill/>
+          </a:ln>
+          <a:effectLst/>
+        </p:spPr>
+        <p:style>
+          <a:lnRef idx="1">
+            <a:schemeClr val="accent1"/>
+          </a:lnRef>
+          <a:fillRef idx="3">
+            <a:schemeClr val="accent1"/>
+          </a:fillRef>
+          <a:effectRef idx="2">
+            <a:schemeClr val="accent1"/>
+          </a:effectRef>
+          <a:fontRef idx="minor">
+            <a:schemeClr val="lt1"/>
+          </a:fontRef>
+        </p:style>
+        <p:txBody>
+          <a:bodyPr rtlCol="0" anchor="ctr" wrap="none" lIns="45720" rIns="45720" tIns="0" bIns="0"/>
+          <a:lstStyle/>
+          <a:p>
+            <a:pPr algn="ctr"/>
+            <a:r>
+              <a:rPr sz="1300" b="1">
+                <a:solidFill>
+                  <a:srgbClr val="FFFFFF"/>
+                </a:solidFill>
+              </a:rPr>
+              <a:t>클래스 불균형</a:t>
+            </a:r>
+          </a:p>
+        </p:txBody>
+      </p:sp>
+      <p:sp>
+        <p:nvSpPr>
+          <p:cNvPr id="10" name="TextBox 9"/>
+          <p:cNvSpPr txBox="1"/>
+          <p:nvPr/>
+        </p:nvSpPr>
+        <p:spPr>
+          <a:xfrm>
+            <a:off x="3794760" y="3291840"/>
+            <a:ext cx="3520440" cy="1143000"/>
+          </a:xfrm>
+          <a:prstGeom prst="rect">
+            <a:avLst/>
+          </a:prstGeom>
+          <a:noFill/>
+        </p:spPr>
+        <p:txBody>
+          <a:bodyPr wrap="square" anchor="t" lIns="0" rIns="0" tIns="0" bIns="0">
+            <a:spAutoFit/>
+          </a:bodyPr>
+          <a:lstStyle/>
+          <a:p>
+            <a:pPr algn="l">
+              <a:lnSpc>
+                <a:spcPct val="125000"/>
+              </a:lnSpc>
+            </a:pPr>
+            <a:r>
+              <a:rPr sz="1300" b="0" i="0">
+                <a:solidFill>
+                  <a:srgbClr val="555A6E"/>
+                </a:solidFill>
+                <a:latin typeface="Calibri"/>
+              </a:rPr>
+              <a:t>긍정 86.7% — 그대로 학습하면 다 긍정 찍어도 86% 정확도</a:t>
+            </a:r>
+          </a:p>
+        </p:txBody>
+      </p:sp>
+      <p:sp>
+        <p:nvSpPr>
+          <p:cNvPr id="11" name="TextBox 10"/>
+          <p:cNvSpPr txBox="1"/>
+          <p:nvPr/>
+        </p:nvSpPr>
+        <p:spPr>
+          <a:xfrm>
+            <a:off x="7452360" y="3291840"/>
+            <a:ext cx="3931920" cy="1143000"/>
+          </a:xfrm>
+          <a:prstGeom prst="rect">
+            <a:avLst/>
+          </a:prstGeom>
+          <a:noFill/>
+        </p:spPr>
+        <p:txBody>
+          <a:bodyPr wrap="square" anchor="t" lIns="0" rIns="0" tIns="0" bIns="0">
+            <a:spAutoFit/>
+          </a:bodyPr>
+          <a:lstStyle/>
+          <a:p>
+            <a:pPr algn="l">
+              <a:lnSpc>
+                <a:spcPct val="125000"/>
+              </a:lnSpc>
+            </a:pPr>
+            <a:r>
+              <a:rPr sz="1300" b="1" i="0">
+                <a:solidFill>
+                  <a:srgbClr val="1E2761"/>
+                </a:solidFill>
+                <a:latin typeface="Calibri"/>
+              </a:rPr>
+              <a:t>해결 → 부정/중립 전량 + 긍정은 2배 규모로만 다운샘플링</a:t>
+            </a:r>
+          </a:p>
+        </p:txBody>
+      </p:sp>
+      <p:sp>
+        <p:nvSpPr>
+          <p:cNvPr id="12" name="Rounded Rectangle 11"/>
+          <p:cNvSpPr/>
+          <p:nvPr/>
+        </p:nvSpPr>
+        <p:spPr>
+          <a:xfrm>
+            <a:off x="640080" y="4754880"/>
+            <a:ext cx="10881360" cy="1417320"/>
+          </a:xfrm>
+          <a:prstGeom prst="roundRect">
+            <a:avLst>
+              <a:gd name="adj" fmla="val 6000"/>
+            </a:avLst>
+          </a:prstGeom>
+          <a:solidFill>
+            <a:srgbClr val="F4F6FC"/>
+          </a:solidFill>
+          <a:ln>
+            <a:noFill/>
+          </a:ln>
+          <a:effectLst/>
+        </p:spPr>
+        <p:style>
+          <a:lnRef idx="1">
+            <a:schemeClr val="accent1"/>
+          </a:lnRef>
+          <a:fillRef idx="3">
+            <a:schemeClr val="accent1"/>
+          </a:fillRef>
+          <a:effectRef idx="2">
+            <a:schemeClr val="accent1"/>
+          </a:effectRef>
+          <a:fontRef idx="minor">
+            <a:schemeClr val="lt1"/>
+          </a:fontRef>
+        </p:style>
+        <p:txBody>
+          <a:bodyPr rtlCol="0" anchor="ctr"/>
+          <a:lstStyle/>
+          <a:p>
+            <a:pPr algn="ctr"/>
+          </a:p>
+        </p:txBody>
+      </p:sp>
+      <p:sp>
+        <p:nvSpPr>
+          <p:cNvPr id="13" name="Rounded Rectangle 12"/>
+          <p:cNvSpPr/>
+          <p:nvPr/>
+        </p:nvSpPr>
+        <p:spPr>
+          <a:xfrm>
+            <a:off x="868680" y="4956048"/>
+            <a:ext cx="2743200" cy="438912"/>
+          </a:xfrm>
+          <a:prstGeom prst="roundRect">
+            <a:avLst>
+              <a:gd name="adj" fmla="val 50000"/>
+            </a:avLst>
+          </a:prstGeom>
+          <a:solidFill>
+            <a:srgbClr val="F96167"/>
+          </a:solidFill>
+          <a:ln>
+            <a:noFill/>
+          </a:ln>
+          <a:effectLst/>
+        </p:spPr>
+        <p:style>
+          <a:lnRef idx="1">
+            <a:schemeClr val="accent1"/>
+          </a:lnRef>
+          <a:fillRef idx="3">
+            <a:schemeClr val="accent1"/>
+          </a:fillRef>
+          <a:effectRef idx="2">
+            <a:schemeClr val="accent1"/>
+          </a:effectRef>
+          <a:fontRef idx="minor">
+            <a:schemeClr val="lt1"/>
+          </a:fontRef>
+        </p:style>
+        <p:txBody>
+          <a:bodyPr rtlCol="0" anchor="ctr" wrap="none" lIns="45720" rIns="45720" tIns="0" bIns="0"/>
+          <a:lstStyle/>
+          <a:p>
+            <a:pPr algn="ctr"/>
+            <a:r>
+              <a:rPr sz="1300" b="1">
+                <a:solidFill>
+                  <a:srgbClr val="FFFFFF"/>
+                </a:solidFill>
+              </a:rPr>
+              <a:t>불용어/형태소 미처리</a:t>
+            </a:r>
+          </a:p>
+        </p:txBody>
+      </p:sp>
+      <p:sp>
+        <p:nvSpPr>
+          <p:cNvPr id="14" name="TextBox 13"/>
+          <p:cNvSpPr txBox="1"/>
+          <p:nvPr/>
+        </p:nvSpPr>
+        <p:spPr>
+          <a:xfrm>
+            <a:off x="3794760" y="4892040"/>
+            <a:ext cx="3520440" cy="1143000"/>
+          </a:xfrm>
+          <a:prstGeom prst="rect">
+            <a:avLst/>
+          </a:prstGeom>
+          <a:noFill/>
+        </p:spPr>
+        <p:txBody>
+          <a:bodyPr wrap="square" anchor="t" lIns="0" rIns="0" tIns="0" bIns="0">
+            <a:spAutoFit/>
+          </a:bodyPr>
+          <a:lstStyle/>
+          <a:p>
+            <a:pPr algn="l">
+              <a:lnSpc>
+                <a:spcPct val="125000"/>
+              </a:lnSpc>
+            </a:pPr>
+            <a:r>
+              <a:rPr sz="1300" b="0" i="0">
+                <a:solidFill>
+                  <a:srgbClr val="555A6E"/>
+                </a:solidFill>
+                <a:latin typeface="Calibri"/>
+              </a:rPr>
+              <a:t>정규식으로만 잘라서 조사가 토큰에 섞임 ("좋아요"≠"좋아서")</a:t>
+            </a:r>
+          </a:p>
+        </p:txBody>
+      </p:sp>
+      <p:sp>
+        <p:nvSpPr>
+          <p:cNvPr id="15" name="TextBox 14"/>
+          <p:cNvSpPr txBox="1"/>
+          <p:nvPr/>
+        </p:nvSpPr>
+        <p:spPr>
+          <a:xfrm>
+            <a:off x="7452360" y="4892040"/>
+            <a:ext cx="3931920" cy="1143000"/>
+          </a:xfrm>
+          <a:prstGeom prst="rect">
+            <a:avLst/>
+          </a:prstGeom>
+          <a:noFill/>
+        </p:spPr>
+        <p:txBody>
+          <a:bodyPr wrap="square" anchor="t" lIns="0" rIns="0" tIns="0" bIns="0">
+            <a:spAutoFit/>
+          </a:bodyPr>
+          <a:lstStyle/>
+          <a:p>
+            <a:pPr algn="l">
+              <a:lnSpc>
+                <a:spcPct val="125000"/>
+              </a:lnSpc>
+            </a:pPr>
+            <a:r>
+              <a:rPr sz="1300" b="1" i="0">
+                <a:solidFill>
+                  <a:srgbClr val="1E2761"/>
+                </a:solidFill>
+                <a:latin typeface="Calibri"/>
+              </a:rPr>
+              <a:t>해결 → Okt 형태소분석 + 어간정규화 + 불용어 제거</a:t>
+            </a:r>
+          </a:p>
+        </p:txBody>
+      </p:sp>
+    </p:spTree>
+  </p:cSld>
+  <p:clrMapOvr>
+    <a:masterClrMapping/>
+  </p:clrMapOvr>
+</p:sld>
+</file>
+
+<file path=ppt/slides/slide6.xml><?xml version="1.0" encoding="utf-8"?>
+<p:sld xmlns:a="http://schemas.openxmlformats.org/drawingml/2006/main" xmlns:p="http://schemas.openxmlformats.org/presentationml/2006/main" xmlns:r="http://schemas.openxmlformats.org/officeDocument/2006/relationships">
+  <p:cSld>
+    <p:spTree>
+      <p:nvGrpSpPr>
+        <p:cNvPr id="1" name=""/>
+        <p:cNvGrpSpPr/>
+        <p:nvPr/>
+      </p:nvGrpSpPr>
+      <p:grpSpPr/>
+      <p:sp>
+        <p:nvSpPr>
+          <p:cNvPr id="2" name="Rectangle 1"/>
+          <p:cNvSpPr/>
+          <p:nvPr/>
+        </p:nvSpPr>
+        <p:spPr>
+          <a:xfrm>
+            <a:off x="0" y="0"/>
+            <a:ext cx="12191695" cy="6858000"/>
+          </a:xfrm>
+          <a:prstGeom prst="rect">
+            <a:avLst/>
+          </a:prstGeom>
+          <a:solidFill>
+            <a:srgbClr val="FFFFFF"/>
+          </a:solidFill>
+          <a:ln>
+            <a:noFill/>
+          </a:ln>
+          <a:effectLst/>
+        </p:spPr>
+        <p:style>
+          <a:lnRef idx="1">
+            <a:schemeClr val="accent1"/>
+          </a:lnRef>
+          <a:fillRef idx="3">
+            <a:schemeClr val="accent1"/>
+          </a:fillRef>
+          <a:effectRef idx="2">
+            <a:schemeClr val="accent1"/>
+          </a:effectRef>
+          <a:fontRef idx="minor">
+            <a:schemeClr val="lt1"/>
+          </a:fontRef>
+        </p:style>
+        <p:txBody>
+          <a:bodyPr rtlCol="0" anchor="ctr"/>
+          <a:lstStyle/>
+          <a:p>
+            <a:pPr algn="ctr"/>
+          </a:p>
+        </p:txBody>
+      </p:sp>
+      <p:sp>
+        <p:nvSpPr>
+          <p:cNvPr id="3" name="TextBox 2"/>
+          <p:cNvSpPr txBox="1"/>
+          <p:nvPr/>
+        </p:nvSpPr>
+        <p:spPr>
+          <a:xfrm>
+            <a:off x="640080" y="457200"/>
+            <a:ext cx="10515600" cy="731520"/>
+          </a:xfrm>
+          <a:prstGeom prst="rect">
+            <a:avLst/>
+          </a:prstGeom>
+          <a:noFill/>
+        </p:spPr>
+        <p:txBody>
+          <a:bodyPr wrap="square" anchor="t" lIns="0" rIns="0" tIns="0" bIns="0">
+            <a:spAutoFit/>
+          </a:bodyPr>
+          <a:lstStyle/>
+          <a:p>
+            <a:pPr algn="l"/>
+            <a:r>
               <a:rPr sz="2400" b="1" i="0">
                 <a:solidFill>
                   <a:srgbClr val="1E2761"/>
@@ -6001,7 +6666,7 @@
 </p:sld>
 </file>
 
-<file path=ppt/slides/slide6.xml><?xml version="1.0" encoding="utf-8"?>
+<file path=ppt/slides/slide7.xml><?xml version="1.0" encoding="utf-8"?>
 <p:sld xmlns:a="http://schemas.openxmlformats.org/drawingml/2006/main" xmlns:p="http://schemas.openxmlformats.org/presentationml/2006/main" xmlns:r="http://schemas.openxmlformats.org/officeDocument/2006/relationships">
   <p:cSld>
     <p:spTree>
@@ -6268,7 +6933,7 @@
 </p:sld>
 </file>
 
-<file path=ppt/slides/slide7.xml><?xml version="1.0" encoding="utf-8"?>
+<file path=ppt/slides/slide8.xml><?xml version="1.0" encoding="utf-8"?>
 <p:sld xmlns:a="http://schemas.openxmlformats.org/drawingml/2006/main" xmlns:p="http://schemas.openxmlformats.org/presentationml/2006/main" xmlns:r="http://schemas.openxmlformats.org/officeDocument/2006/relationships">
   <p:cSld>
     <p:spTree>
@@ -6293,7 +6958,7 @@
             <a:avLst/>
           </a:prstGeom>
           <a:solidFill>
-            <a:srgbClr val="FFFFFF"/>
+            <a:srgbClr val="1E2761"/>
           </a:solidFill>
           <a:ln>
             <a:noFill/>
@@ -6330,7 +6995,7 @@
         </p:nvSpPr>
         <p:spPr>
           <a:xfrm>
-            <a:off x="640080" y="457200"/>
+            <a:off x="640080" y="365760"/>
             <a:ext cx="10515600" cy="731520"/>
           </a:xfrm>
           <a:prstGeom prst="rect">
@@ -6346,13 +7011,13 @@
           <a:p>
             <a:pPr algn="l"/>
             <a:r>
-              <a:rPr sz="2400" b="1" i="0">
-                <a:solidFill>
-                  <a:srgbClr val="1E2761"/>
+              <a:rPr sz="2300" b="1" i="0">
+                <a:solidFill>
+                  <a:srgbClr val="FFFFFF"/>
                 </a:solidFill>
                 <a:latin typeface="Georgia"/>
               </a:rPr>
-              <a:t>서비스 진화 — 텍스트 데모에서 실용적 리포트로</a:t>
+              <a:t>한 단계씩 — 피드백을 받을 때마다 성장한 서비스</a:t>
             </a:r>
           </a:p>
         </p:txBody>
@@ -6365,8 +7030,8 @@
         </p:nvSpPr>
         <p:spPr>
           <a:xfrm>
-            <a:off x="640080" y="1463040"/>
-            <a:ext cx="3520440" cy="2468880"/>
+            <a:off x="640080" y="1371600"/>
+            <a:ext cx="3520440" cy="2377440"/>
           </a:xfrm>
           <a:prstGeom prst="roundRect">
             <a:avLst>
@@ -6411,8 +7076,8 @@
         </p:nvSpPr>
         <p:spPr>
           <a:xfrm>
-            <a:off x="868680" y="1645920"/>
-            <a:ext cx="3063240" cy="365760"/>
+            <a:off x="868680" y="1554480"/>
+            <a:ext cx="3063240" cy="457200"/>
           </a:xfrm>
           <a:prstGeom prst="rect">
             <a:avLst/>
@@ -6427,13 +7092,13 @@
           <a:p>
             <a:pPr algn="l"/>
             <a:r>
-              <a:rPr sz="1300" b="1" i="0">
-                <a:solidFill>
-                  <a:srgbClr val="CADCFC"/>
+              <a:rPr sz="1700" b="1" i="0">
+                <a:solidFill>
+                  <a:srgbClr val="FFFFFF"/>
                 </a:solidFill>
                 <a:latin typeface="Calibri"/>
               </a:rPr>
-              <a:t>1차</a:t>
+              <a:t>Lv.1</a:t>
             </a:r>
           </a:p>
         </p:txBody>
@@ -6446,8 +7111,8 @@
         </p:nvSpPr>
         <p:spPr>
           <a:xfrm>
-            <a:off x="868680" y="2057400"/>
-            <a:ext cx="3063240" cy="1188720"/>
+            <a:off x="868680" y="2103120"/>
+            <a:ext cx="3063240" cy="1143000"/>
           </a:xfrm>
           <a:prstGeom prst="rect">
             <a:avLst/>
@@ -6501,8 +7166,8 @@
         </p:nvSpPr>
         <p:spPr>
           <a:xfrm>
-            <a:off x="868680" y="3337560"/>
-            <a:ext cx="3063240" cy="502920"/>
+            <a:off x="868680" y="3291840"/>
+            <a:ext cx="3063240" cy="457200"/>
           </a:xfrm>
           <a:prstGeom prst="rect">
             <a:avLst/>
@@ -6540,14 +7205,14 @@
         </p:nvSpPr>
         <p:spPr>
           <a:xfrm>
-            <a:off x="4178807" y="2560320"/>
+            <a:off x="4178807" y="2468880"/>
             <a:ext cx="146304" cy="320040"/>
           </a:xfrm>
           <a:prstGeom prst="rightArrow">
             <a:avLst/>
           </a:prstGeom>
           <a:solidFill>
-            <a:srgbClr val="555A6E"/>
+            <a:srgbClr val="CADCFC"/>
           </a:solidFill>
           <a:ln>
             <a:noFill/>
@@ -6584,8 +7249,8 @@
         </p:nvSpPr>
         <p:spPr>
           <a:xfrm>
-            <a:off x="4343400" y="1463040"/>
-            <a:ext cx="3520440" cy="2468880"/>
+            <a:off x="4343400" y="1371600"/>
+            <a:ext cx="3520440" cy="2377440"/>
           </a:xfrm>
           <a:prstGeom prst="roundRect">
             <a:avLst>
@@ -6593,7 +7258,7 @@
             </a:avLst>
           </a:prstGeom>
           <a:solidFill>
-            <a:srgbClr val="1E2761"/>
+            <a:srgbClr val="3A468C"/>
           </a:solidFill>
           <a:ln>
             <a:noFill/>
@@ -6630,8 +7295,8 @@
         </p:nvSpPr>
         <p:spPr>
           <a:xfrm>
-            <a:off x="4572000" y="1645920"/>
-            <a:ext cx="3063240" cy="365760"/>
+            <a:off x="4572000" y="1554480"/>
+            <a:ext cx="3063240" cy="457200"/>
           </a:xfrm>
           <a:prstGeom prst="rect">
             <a:avLst/>
@@ -6646,13 +7311,13 @@
           <a:p>
             <a:pPr algn="l"/>
             <a:r>
-              <a:rPr sz="1300" b="1" i="0">
-                <a:solidFill>
-                  <a:srgbClr val="CADCFC"/>
+              <a:rPr sz="1700" b="1" i="0">
+                <a:solidFill>
+                  <a:srgbClr val="FFFFFF"/>
                 </a:solidFill>
                 <a:latin typeface="Calibri"/>
               </a:rPr>
-              <a:t>2차</a:t>
+              <a:t>Lv.2</a:t>
             </a:r>
           </a:p>
         </p:txBody>
@@ -6665,8 +7330,8 @@
         </p:nvSpPr>
         <p:spPr>
           <a:xfrm>
-            <a:off x="4572000" y="2057400"/>
-            <a:ext cx="3063240" cy="1188720"/>
+            <a:off x="4572000" y="2103120"/>
+            <a:ext cx="3063240" cy="1143000"/>
           </a:xfrm>
           <a:prstGeom prst="rect">
             <a:avLst/>
@@ -6720,8 +7385,8 @@
         </p:nvSpPr>
         <p:spPr>
           <a:xfrm>
-            <a:off x="4572000" y="3337560"/>
-            <a:ext cx="3063240" cy="502920"/>
+            <a:off x="4572000" y="3291840"/>
+            <a:ext cx="3063240" cy="457200"/>
           </a:xfrm>
           <a:prstGeom prst="rect">
             <a:avLst/>
@@ -6759,14 +7424,14 @@
         </p:nvSpPr>
         <p:spPr>
           <a:xfrm>
-            <a:off x="7882127" y="2560320"/>
+            <a:off x="7882127" y="2468880"/>
             <a:ext cx="146304" cy="320040"/>
           </a:xfrm>
           <a:prstGeom prst="rightArrow">
             <a:avLst/>
           </a:prstGeom>
           <a:solidFill>
-            <a:srgbClr val="555A6E"/>
+            <a:srgbClr val="CADCFC"/>
           </a:solidFill>
           <a:ln>
             <a:noFill/>
@@ -6803,8 +7468,8 @@
         </p:nvSpPr>
         <p:spPr>
           <a:xfrm>
-            <a:off x="8046719" y="1463040"/>
-            <a:ext cx="3520440" cy="2468880"/>
+            <a:off x="8046719" y="1371600"/>
+            <a:ext cx="3520440" cy="2377440"/>
           </a:xfrm>
           <a:prstGeom prst="roundRect">
             <a:avLst>
@@ -6849,8 +7514,8 @@
         </p:nvSpPr>
         <p:spPr>
           <a:xfrm>
-            <a:off x="8275319" y="1645920"/>
-            <a:ext cx="3063240" cy="365760"/>
+            <a:off x="8275319" y="1554480"/>
+            <a:ext cx="3063240" cy="457200"/>
           </a:xfrm>
           <a:prstGeom prst="rect">
             <a:avLst/>
@@ -6865,21 +7530,21 @@
           <a:p>
             <a:pPr algn="l"/>
             <a:r>
-              <a:rPr sz="1300" b="1" i="0">
-                <a:solidFill>
-                  <a:srgbClr val="CADCFC"/>
+              <a:rPr sz="1700" b="1" i="0">
+                <a:solidFill>
+                  <a:srgbClr val="FFFFFF"/>
                 </a:solidFill>
                 <a:latin typeface="Calibri"/>
               </a:rPr>
-              <a:t>3차</a:t>
+              <a:t>Lv.3</a:t>
             </a:r>
           </a:p>
           <a:p>
             <a:pPr algn="l"/>
             <a:r>
-              <a:rPr sz="1300" b="1" i="0">
-                <a:solidFill>
-                  <a:srgbClr val="CADCFC"/>
+              <a:rPr sz="1700" b="1" i="0">
+                <a:solidFill>
+                  <a:srgbClr val="FFFFFF"/>
                 </a:solidFill>
                 <a:latin typeface="Calibri"/>
               </a:rPr>
@@ -6896,8 +7561,8 @@
         </p:nvSpPr>
         <p:spPr>
           <a:xfrm>
-            <a:off x="8275319" y="2057400"/>
-            <a:ext cx="3063240" cy="1188720"/>
+            <a:off x="8275319" y="2103120"/>
+            <a:ext cx="3063240" cy="1143000"/>
           </a:xfrm>
           <a:prstGeom prst="rect">
             <a:avLst/>
@@ -6967,8 +7632,8 @@
         </p:nvSpPr>
         <p:spPr>
           <a:xfrm>
-            <a:off x="8275319" y="3337560"/>
-            <a:ext cx="3063240" cy="502920"/>
+            <a:off x="8275319" y="3291840"/>
+            <a:ext cx="3063240" cy="457200"/>
           </a:xfrm>
           <a:prstGeom prst="rect">
             <a:avLst/>
@@ -6993,21 +7658,67 @@
                 </a:solidFill>
                 <a:latin typeface="Calibri"/>
               </a:rPr>
-              <a:t>구매 의사결정까지 지원</a:t>
-            </a:r>
-          </a:p>
-        </p:txBody>
-      </p:sp>
-      <p:sp>
-        <p:nvSpPr>
-          <p:cNvPr id="18" name="TextBox 17"/>
+              <a:t>"나에게 맞는" 제품 매칭까지</a:t>
+            </a:r>
+          </a:p>
+        </p:txBody>
+      </p:sp>
+      <p:sp>
+        <p:nvSpPr>
+          <p:cNvPr id="18" name="Rounded Rectangle 17"/>
+          <p:cNvSpPr/>
+          <p:nvPr/>
+        </p:nvSpPr>
+        <p:spPr>
+          <a:xfrm>
+            <a:off x="640080" y="3977639"/>
+            <a:ext cx="10881360" cy="868680"/>
+          </a:xfrm>
+          <a:prstGeom prst="roundRect">
+            <a:avLst>
+              <a:gd name="adj" fmla="val 10000"/>
+            </a:avLst>
+          </a:prstGeom>
+          <a:solidFill>
+            <a:srgbClr val="F96167"/>
+          </a:solidFill>
+          <a:ln>
+            <a:noFill/>
+          </a:ln>
+          <a:effectLst/>
+        </p:spPr>
+        <p:style>
+          <a:lnRef idx="1">
+            <a:schemeClr val="accent1"/>
+          </a:lnRef>
+          <a:fillRef idx="3">
+            <a:schemeClr val="accent1"/>
+          </a:fillRef>
+          <a:effectRef idx="2">
+            <a:schemeClr val="accent1"/>
+          </a:effectRef>
+          <a:fontRef idx="minor">
+            <a:schemeClr val="lt1"/>
+          </a:fontRef>
+        </p:style>
+        <p:txBody>
+          <a:bodyPr rtlCol="0" anchor="ctr"/>
+          <a:lstStyle/>
+          <a:p>
+            <a:pPr algn="ctr"/>
+          </a:p>
+        </p:txBody>
+      </p:sp>
+      <p:sp>
+        <p:nvSpPr>
+          <p:cNvPr id="19" name="TextBox 18"/>
           <p:cNvSpPr txBox="1"/>
           <p:nvPr/>
         </p:nvSpPr>
         <p:spPr>
           <a:xfrm>
-            <a:off x="640080" y="4160520"/>
-            <a:ext cx="10881360" cy="548640"/>
+            <a:off x="914400" y="4206240"/>
+            <a:ext cx="10332720" cy="548640"/>
           </a:xfrm>
           <a:prstGeom prst="rect">
             <a:avLst/>
@@ -7020,28 +7731,28 @@
           </a:bodyPr>
           <a:lstStyle/>
           <a:p>
-            <a:pPr algn="l"/>
-            <a:r>
-              <a:rPr sz="1250" b="0" i="1">
-                <a:solidFill>
-                  <a:srgbClr val="555A6E"/>
+            <a:pPr algn="ctr"/>
+            <a:r>
+              <a:rPr sz="1450" b="1" i="0">
+                <a:solidFill>
+                  <a:srgbClr val="FFFFFF"/>
                 </a:solidFill>
                 <a:latin typeface="Calibri"/>
               </a:rPr>
-              <a:t>예: 트러블 잘 올라오는 상품 → 같은 카테고리에서 트러블 평가 좋은 대안을 바로 추천 / 건성·지성·복합성·민감성 피부별로 평가가 따로 보임</a:t>
-            </a:r>
-          </a:p>
-        </p:txBody>
-      </p:sp>
-      <p:sp>
-        <p:nvSpPr>
-          <p:cNvPr id="19" name="TextBox 18"/>
+              <a:t>결국 BeautyScope는 "평점이 높은 제품"이 아니라 "내가 중요하게 생각하는 속성에 강한 제품"을 찾아주는 매칭 서비스로 성장했다</a:t>
+            </a:r>
+          </a:p>
+        </p:txBody>
+      </p:sp>
+      <p:sp>
+        <p:nvSpPr>
+          <p:cNvPr id="20" name="TextBox 19"/>
           <p:cNvSpPr txBox="1"/>
           <p:nvPr/>
         </p:nvSpPr>
         <p:spPr>
           <a:xfrm>
-            <a:off x="640080" y="4846320"/>
+            <a:off x="640080" y="5074920"/>
             <a:ext cx="10515600" cy="365760"/>
           </a:xfrm>
           <a:prstGeom prst="rect">
@@ -7059,7 +7770,7 @@
             <a:r>
               <a:rPr sz="1600" b="1" i="0">
                 <a:solidFill>
-                  <a:srgbClr val="1E2761"/>
+                  <a:srgbClr val="FFFFFF"/>
                 </a:solidFill>
                 <a:latin typeface="Calibri"/>
               </a:rPr>
@@ -7070,13 +7781,13 @@
       </p:sp>
       <p:sp>
         <p:nvSpPr>
-          <p:cNvPr id="20" name="TextBox 19"/>
+          <p:cNvPr id="21" name="TextBox 20"/>
           <p:cNvSpPr txBox="1"/>
           <p:nvPr/>
         </p:nvSpPr>
         <p:spPr>
           <a:xfrm>
-            <a:off x="640080" y="5303520"/>
+            <a:off x="640080" y="5486400"/>
             <a:ext cx="10515600" cy="1188720"/>
           </a:xfrm>
           <a:prstGeom prst="rect">
@@ -7096,9 +7807,9 @@
               </a:spcAft>
             </a:pPr>
             <a:r>
-              <a:rPr sz="1400">
-                <a:solidFill>
-                  <a:srgbClr val="21295C"/>
+              <a:rPr sz="1350">
+                <a:solidFill>
+                  <a:srgbClr val="FFFFFF"/>
                 </a:solidFill>
                 <a:latin typeface="Calibri"/>
               </a:rPr>
@@ -7112,13 +7823,13 @@
               </a:spcAft>
             </a:pPr>
             <a:r>
-              <a:rPr sz="1400">
-                <a:solidFill>
-                  <a:srgbClr val="21295C"/>
+              <a:rPr sz="1350">
+                <a:solidFill>
+                  <a:srgbClr val="FFFFFF"/>
                 </a:solidFill>
                 <a:latin typeface="Calibri"/>
               </a:rPr>
-              <a:t>•  실제 분포 재평가로 숨은 문제(label shift)를 찾아 보정, 두 차례 피드백으로 서비스를 실용적으로 발전</a:t>
+              <a:t>•  실제 분포 재평가로 숨은 문제(label shift)를 찾아 보정, 세 차례 피드백을 거치며 서비스를 단계적으로 발전</a:t>
             </a:r>
           </a:p>
         </p:txBody>

--- a/BeautyScope_발표.pptx
+++ b/BeautyScope_발표.pptx
@@ -12,7 +12,6 @@
     <p:sldId id="260" r:id="rId11"/>
     <p:sldId id="261" r:id="rId12"/>
     <p:sldId id="262" r:id="rId13"/>
-    <p:sldId id="263" r:id="rId14"/>
   </p:sldIdLst>
   <p:sldSz cx="12191695" cy="6858000" type="screen4x3"/>
   <p:notesSz cx="6858000" cy="9144000"/>
@@ -132,200 +131,6 @@
               <c:strCache>
                 <c:ptCount val="1"/>
                 <c:pt idx="0">
-                  <c:v>accuracy</c:v>
-                </c:pt>
-              </c:strCache>
-            </c:strRef>
-          </c:tx>
-          <c:spPr>
-            <a:solidFill>
-              <a:srgbClr val="1E2761"/>
-            </a:solidFill>
-          </c:spPr>
-          <c:cat>
-            <c:strRef>
-              <c:f>Sheet1!$A$2:$A$5</c:f>
-              <c:strCache>
-                <c:ptCount val="4"/>
-                <c:pt idx="0">
-                  <c:v>ML
-(TF-IDF+LogReg)</c:v>
-                </c:pt>
-                <c:pt idx="1">
-                  <c:v>DL
-(numpy FFNN)</c:v>
-                </c:pt>
-                <c:pt idx="2">
-                  <c:v>LSTM
-(PyTorch)</c:v>
-                </c:pt>
-                <c:pt idx="3">
-                  <c:v>KoELECTRA
-(파인튜닝)</c:v>
-                </c:pt>
-              </c:strCache>
-            </c:strRef>
-          </c:cat>
-          <c:val>
-            <c:numRef>
-              <c:f>Sheet1!$B$2:$B$5</c:f>
-              <c:numCache>
-                <c:formatCode>General</c:formatCode>
-                <c:ptCount val="4"/>
-                <c:pt idx="0">
-                  <c:v>0.73</c:v>
-                </c:pt>
-                <c:pt idx="1">
-                  <c:v>0.754</c:v>
-                </c:pt>
-                <c:pt idx="2">
-                  <c:v>0.734</c:v>
-                </c:pt>
-                <c:pt idx="3">
-                  <c:v>0.772</c:v>
-                </c:pt>
-              </c:numCache>
-            </c:numRef>
-          </c:val>
-        </c:ser>
-        <c:ser>
-          <c:idx val="1"/>
-          <c:order val="1"/>
-          <c:tx>
-            <c:strRef>
-              <c:f>Sheet1!$C$1</c:f>
-              <c:strCache>
-                <c:ptCount val="1"/>
-                <c:pt idx="0">
-                  <c:v>macro F1</c:v>
-                </c:pt>
-              </c:strCache>
-            </c:strRef>
-          </c:tx>
-          <c:spPr>
-            <a:solidFill>
-              <a:srgbClr val="F96167"/>
-            </a:solidFill>
-          </c:spPr>
-          <c:cat>
-            <c:strRef>
-              <c:f>Sheet1!$A$2:$A$5</c:f>
-              <c:strCache>
-                <c:ptCount val="4"/>
-                <c:pt idx="0">
-                  <c:v>ML
-(TF-IDF+LogReg)</c:v>
-                </c:pt>
-                <c:pt idx="1">
-                  <c:v>DL
-(numpy FFNN)</c:v>
-                </c:pt>
-                <c:pt idx="2">
-                  <c:v>LSTM
-(PyTorch)</c:v>
-                </c:pt>
-                <c:pt idx="3">
-                  <c:v>KoELECTRA
-(파인튜닝)</c:v>
-                </c:pt>
-              </c:strCache>
-            </c:strRef>
-          </c:cat>
-          <c:val>
-            <c:numRef>
-              <c:f>Sheet1!$C$2:$C$5</c:f>
-              <c:numCache>
-                <c:formatCode>General</c:formatCode>
-                <c:ptCount val="4"/>
-                <c:pt idx="0">
-                  <c:v>0.668</c:v>
-                </c:pt>
-                <c:pt idx="1">
-                  <c:v>0.664</c:v>
-                </c:pt>
-                <c:pt idx="2">
-                  <c:v>0.671</c:v>
-                </c:pt>
-                <c:pt idx="3">
-                  <c:v>0.66</c:v>
-                </c:pt>
-              </c:numCache>
-            </c:numRef>
-          </c:val>
-        </c:ser>
-        <c:axId val="-2068027336"/>
-        <c:axId val="-2113994440"/>
-      </c:barChart>
-      <c:catAx>
-        <c:axId val="-2068027336"/>
-        <c:scaling>
-          <c:orientation val="minMax"/>
-        </c:scaling>
-        <c:delete val="0"/>
-        <c:axPos val="b"/>
-        <c:majorTickMark val="out"/>
-        <c:minorTickMark val="none"/>
-        <c:tickLblPos val="nextTo"/>
-        <c:crossAx val="-2113994440"/>
-        <c:crosses val="autoZero"/>
-        <c:auto val="1"/>
-        <c:lblAlgn val="ctr"/>
-        <c:lblOffset val="100"/>
-        <c:noMultiLvlLbl val="0"/>
-      </c:catAx>
-      <c:valAx>
-        <c:axId val="-2113994440"/>
-        <c:scaling/>
-        <c:delete val="0"/>
-        <c:axPos val="l"/>
-        <c:majorGridlines/>
-        <c:majorTickMark val="out"/>
-        <c:minorTickMark val="none"/>
-        <c:tickLblPos val="nextTo"/>
-        <c:crossAx val="-2068027336"/>
-        <c:crosses val="autoZero"/>
-      </c:valAx>
-    </c:plotArea>
-    <c:legend>
-      <c:legendPos val="b"/>
-      <c:overlay val="0"/>
-    </c:legend>
-    <c:dispBlanksAs val="gap"/>
-  </c:chart>
-  <c:txPr>
-    <a:bodyPr/>
-    <a:lstStyle/>
-    <a:p>
-      <a:pPr>
-        <a:defRPr sz="1800"/>
-      </a:pPr>
-      <a:endParaRPr lang="en-US"/>
-    </a:p>
-  </c:txPr>
-  <c:externalData r:id="rId1">
-    <c:autoUpdate val="0"/>
-  </c:externalData>
-</c:chartSpace>
-</file>
-
-<file path=ppt/charts/chart2.xml><?xml version="1.0" encoding="utf-8"?>
-<c:chartSpace xmlns:c="http://schemas.openxmlformats.org/drawingml/2006/chart" xmlns:a="http://schemas.openxmlformats.org/drawingml/2006/main" xmlns:r="http://schemas.openxmlformats.org/officeDocument/2006/relationships">
-  <c:date1904 val="0"/>
-  <c:chart>
-    <c:autoTitleDeleted val="0"/>
-    <c:plotArea>
-      <c:barChart>
-        <c:barDir val="col"/>
-        <c:grouping val="clustered"/>
-        <c:ser>
-          <c:idx val="0"/>
-          <c:order val="0"/>
-          <c:tx>
-            <c:strRef>
-              <c:f>Sheet1!$B$1</c:f>
-              <c:strCache>
-                <c:ptCount val="1"/>
-                <c:pt idx="0">
                   <c:v>보정 전</c:v>
                 </c:pt>
               </c:strCache>
@@ -333,7 +138,7 @@
           </c:tx>
           <c:spPr>
             <a:solidFill>
-              <a:srgbClr val="8A90A8"/>
+              <a:srgbClr val="6B7280"/>
             </a:solidFill>
           </c:spPr>
           <c:cat>
@@ -394,7 +199,7 @@
           </c:tx>
           <c:spPr>
             <a:solidFill>
-              <a:srgbClr val="F96167"/>
+              <a:srgbClr val="1E2761"/>
             </a:solidFill>
           </c:spPr>
           <c:cat>
@@ -3527,7 +3332,7 @@
         </p:nvSpPr>
         <p:spPr>
           <a:xfrm>
-            <a:off x="914400" y="1737360"/>
+            <a:off x="914400" y="2103120"/>
             <a:ext cx="10332720" cy="1097280"/>
           </a:xfrm>
           <a:prstGeom prst="rect">
@@ -3562,7 +3367,7 @@
         </p:nvSpPr>
         <p:spPr>
           <a:xfrm>
-            <a:off x="914400" y="2880360"/>
+            <a:off x="914400" y="3246120"/>
             <a:ext cx="10332720" cy="548640"/>
           </a:xfrm>
           <a:prstGeom prst="rect">
@@ -3578,61 +3383,26 @@
           <a:p>
             <a:pPr algn="l"/>
             <a:r>
-              <a:rPr sz="1900" b="0" i="0">
-                <a:solidFill>
-                  <a:srgbClr val="CADCFC"/>
+              <a:rPr sz="1800" b="0" i="0">
+                <a:solidFill>
+                  <a:srgbClr val="D8DEF0"/>
                 </a:solidFill>
                 <a:latin typeface="Calibri"/>
               </a:rPr>
-              <a:t>화장품 리뷰 538,774건으로 만든 감성 분석 + 속성기반 리포트 서비스</a:t>
-            </a:r>
-          </a:p>
-        </p:txBody>
-      </p:sp>
-      <p:sp>
-        <p:nvSpPr>
-          <p:cNvPr id="5" name="TextBox 4"/>
-          <p:cNvSpPr txBox="1"/>
-          <p:nvPr/>
-        </p:nvSpPr>
-        <p:spPr>
-          <a:xfrm>
-            <a:off x="914400" y="3474720"/>
-            <a:ext cx="10332720" cy="457200"/>
-          </a:xfrm>
-          <a:prstGeom prst="rect">
-            <a:avLst/>
-          </a:prstGeom>
-          <a:noFill/>
-        </p:spPr>
-        <p:txBody>
-          <a:bodyPr wrap="square" anchor="t" lIns="0" rIns="0" tIns="0" bIns="0">
-            <a:spAutoFit/>
-          </a:bodyPr>
-          <a:lstStyle/>
-          <a:p>
-            <a:pPr algn="l"/>
-            <a:r>
-              <a:rPr sz="1300" b="0" i="1">
-                <a:solidFill>
-                  <a:srgbClr val="CADCFC"/>
-                </a:solidFill>
-                <a:latin typeface="Calibri"/>
-              </a:rPr>
-              <a:t>데이터 1차→2차, 모델 1세대→4종 비교, 서비스 1차→2차→3차 — 피드백을 받을 때마다 한 단계씩 성장한 프로젝트</a:t>
-            </a:r>
-          </a:p>
-        </p:txBody>
-      </p:sp>
-      <p:sp>
-        <p:nvSpPr>
-          <p:cNvPr id="6" name="Rounded Rectangle 5"/>
+              <a:t>화장품 리뷰 538,774건 기반 감성 분석 + 속성기반 상품 리포트 서비스</a:t>
+            </a:r>
+          </a:p>
+        </p:txBody>
+      </p:sp>
+      <p:sp>
+        <p:nvSpPr>
+          <p:cNvPr id="5" name="Rounded Rectangle 4"/>
           <p:cNvSpPr/>
           <p:nvPr/>
         </p:nvSpPr>
         <p:spPr>
           <a:xfrm>
-            <a:off x="914400" y="4572000"/>
+            <a:off x="914400" y="4297680"/>
             <a:ext cx="1645920" cy="411480"/>
           </a:xfrm>
           <a:prstGeom prst="roundRect">
@@ -3641,7 +3411,7 @@
             </a:avLst>
           </a:prstGeom>
           <a:solidFill>
-            <a:srgbClr val="F96167"/>
+            <a:srgbClr val="B85A4D"/>
           </a:solidFill>
           <a:ln>
             <a:noFill/>
@@ -3680,13 +3450,13 @@
       </p:sp>
       <p:sp>
         <p:nvSpPr>
-          <p:cNvPr id="7" name="Rounded Rectangle 6"/>
+          <p:cNvPr id="6" name="Rounded Rectangle 5"/>
           <p:cNvSpPr/>
           <p:nvPr/>
         </p:nvSpPr>
         <p:spPr>
           <a:xfrm>
-            <a:off x="2697480" y="4572000"/>
+            <a:off x="2697480" y="4297680"/>
             <a:ext cx="2103120" cy="411480"/>
           </a:xfrm>
           <a:prstGeom prst="roundRect">
@@ -3695,7 +3465,7 @@
             </a:avLst>
           </a:prstGeom>
           <a:solidFill>
-            <a:srgbClr val="F96167"/>
+            <a:srgbClr val="B85A4D"/>
           </a:solidFill>
           <a:ln>
             <a:noFill/>
@@ -3734,14 +3504,14 @@
       </p:sp>
       <p:sp>
         <p:nvSpPr>
-          <p:cNvPr id="8" name="Rounded Rectangle 7"/>
+          <p:cNvPr id="7" name="Rounded Rectangle 6"/>
           <p:cNvSpPr/>
           <p:nvPr/>
         </p:nvSpPr>
         <p:spPr>
           <a:xfrm>
-            <a:off x="4937760" y="4572000"/>
-            <a:ext cx="1828800" cy="411480"/>
+            <a:off x="4937760" y="4297680"/>
+            <a:ext cx="1920240" cy="411480"/>
           </a:xfrm>
           <a:prstGeom prst="roundRect">
             <a:avLst>
@@ -3749,7 +3519,7 @@
             </a:avLst>
           </a:prstGeom>
           <a:solidFill>
-            <a:srgbClr val="F96167"/>
+            <a:srgbClr val="B85A4D"/>
           </a:solidFill>
           <a:ln>
             <a:noFill/>
@@ -3781,20 +3551,20 @@
                   <a:srgbClr val="FFFFFF"/>
                 </a:solidFill>
               </a:rPr>
-              <a:t>속성분석(ABSA)</a:t>
-            </a:r>
-          </a:p>
-        </p:txBody>
-      </p:sp>
-      <p:sp>
-        <p:nvSpPr>
-          <p:cNvPr id="9" name="Rounded Rectangle 8"/>
+              <a:t>속성 분석 (ABSA)</a:t>
+            </a:r>
+          </a:p>
+        </p:txBody>
+      </p:sp>
+      <p:sp>
+        <p:nvSpPr>
+          <p:cNvPr id="8" name="Rounded Rectangle 7"/>
           <p:cNvSpPr/>
           <p:nvPr/>
         </p:nvSpPr>
         <p:spPr>
           <a:xfrm>
-            <a:off x="6903720" y="4572000"/>
+            <a:off x="6995160" y="4297680"/>
             <a:ext cx="1828800" cy="411480"/>
           </a:xfrm>
           <a:prstGeom prst="roundRect">
@@ -3803,7 +3573,7 @@
             </a:avLst>
           </a:prstGeom>
           <a:solidFill>
-            <a:srgbClr val="F96167"/>
+            <a:srgbClr val="B85A4D"/>
           </a:solidFill>
           <a:ln>
             <a:noFill/>
@@ -3836,41 +3606,6 @@
                 </a:solidFill>
               </a:rPr>
               <a:t>Streamlit 배포</a:t>
-            </a:r>
-          </a:p>
-        </p:txBody>
-      </p:sp>
-      <p:sp>
-        <p:nvSpPr>
-          <p:cNvPr id="10" name="TextBox 9"/>
-          <p:cNvSpPr txBox="1"/>
-          <p:nvPr/>
-        </p:nvSpPr>
-        <p:spPr>
-          <a:xfrm>
-            <a:off x="914400" y="5303520"/>
-            <a:ext cx="10332720" cy="457200"/>
-          </a:xfrm>
-          <a:prstGeom prst="rect">
-            <a:avLst/>
-          </a:prstGeom>
-          <a:noFill/>
-        </p:spPr>
-        <p:txBody>
-          <a:bodyPr wrap="square" anchor="t" lIns="0" rIns="0" tIns="0" bIns="0">
-            <a:spAutoFit/>
-          </a:bodyPr>
-          <a:lstStyle/>
-          <a:p>
-            <a:pPr algn="l"/>
-            <a:r>
-              <a:rPr sz="1250" b="0" i="1">
-                <a:solidFill>
-                  <a:srgbClr val="555A6E"/>
-                </a:solidFill>
-                <a:latin typeface="Calibri"/>
-              </a:rPr>
-              <a:t>Lv.1 데이터 수집  →  Lv.2 모델 학습  →  Lv.3 속성 분석  →  Lv.4 추천/매칭</a:t>
             </a:r>
           </a:p>
         </p:txBody>
@@ -3967,7 +3702,7 @@
                 </a:solidFill>
                 <a:latin typeface="Georgia"/>
               </a:rPr>
-              <a:t>왜 이 서비스가 필요한가</a:t>
+              <a:t>서비스 설계 의도</a:t>
             </a:r>
           </a:p>
         </p:txBody>
@@ -3981,7 +3716,7 @@
         <p:spPr>
           <a:xfrm>
             <a:off x="640080" y="1234440"/>
-            <a:ext cx="10515600" cy="457200"/>
+            <a:ext cx="10515600" cy="548640"/>
           </a:xfrm>
           <a:prstGeom prst="rect">
             <a:avLst/>
@@ -3996,35 +3731,33 @@
           <a:p>
             <a:pPr algn="l"/>
             <a:r>
-              <a:rPr sz="1500" b="0" i="1">
-                <a:solidFill>
-                  <a:srgbClr val="555A6E"/>
+              <a:rPr sz="1450" b="0" i="0">
+                <a:solidFill>
+                  <a:srgbClr val="6B7280"/>
                 </a:solidFill>
                 <a:latin typeface="Calibri"/>
               </a:rPr>
-              <a:t>모든 화장품이 모든 면에서 좋을 수는 없다 — 평점은 비슷해도 "강점"은 다르다</a:t>
-            </a:r>
-          </a:p>
-        </p:txBody>
-      </p:sp>
-      <p:sp>
-        <p:nvSpPr>
-          <p:cNvPr id="5" name="Rounded Rectangle 4"/>
+              <a:t>평점 하나로 합쳐서 보여주면 속성별 차이가 묻힌다 — 그래서 속성 단위로 쪼개서 분석하는 구조로 설계했다</a:t>
+            </a:r>
+          </a:p>
+        </p:txBody>
+      </p:sp>
+      <p:sp>
+        <p:nvSpPr>
+          <p:cNvPr id="5" name="Rectangle 4"/>
           <p:cNvSpPr/>
           <p:nvPr/>
         </p:nvSpPr>
         <p:spPr>
           <a:xfrm>
-            <a:off x="640080" y="1874519"/>
-            <a:ext cx="5212080" cy="2697480"/>
-          </a:xfrm>
-          <a:prstGeom prst="roundRect">
-            <a:avLst>
-              <a:gd name="adj" fmla="val 6000"/>
-            </a:avLst>
+            <a:off x="640080" y="1965960"/>
+            <a:ext cx="5212080" cy="2468880"/>
+          </a:xfrm>
+          <a:prstGeom prst="rect">
+            <a:avLst/>
           </a:prstGeom>
           <a:solidFill>
-            <a:srgbClr val="1E2761"/>
+            <a:srgbClr val="F5F6FA"/>
           </a:solidFill>
           <a:ln>
             <a:noFill/>
@@ -4055,162 +3788,20 @@
       </p:sp>
       <p:sp>
         <p:nvSpPr>
-          <p:cNvPr id="6" name="TextBox 5"/>
-          <p:cNvSpPr txBox="1"/>
-          <p:nvPr/>
-        </p:nvSpPr>
-        <p:spPr>
-          <a:xfrm>
-            <a:off x="914400" y="2103120"/>
-            <a:ext cx="4663440" cy="548640"/>
-          </a:xfrm>
-          <a:prstGeom prst="rect">
-            <a:avLst/>
-          </a:prstGeom>
-          <a:noFill/>
-        </p:spPr>
-        <p:txBody>
-          <a:bodyPr wrap="square" anchor="t" lIns="0" rIns="0" tIns="0" bIns="0">
-            <a:spAutoFit/>
-          </a:bodyPr>
-          <a:lstStyle/>
-          <a:p>
-            <a:pPr algn="l"/>
-            <a:r>
-              <a:rPr sz="1550" b="1" i="0">
-                <a:solidFill>
-                  <a:srgbClr val="FFFFFF"/>
-                </a:solidFill>
-                <a:latin typeface="Calibri"/>
-              </a:rPr>
-              <a:t>크리스마 더마랩 토너</a:t>
-            </a:r>
-          </a:p>
-        </p:txBody>
-      </p:sp>
-      <p:sp>
-        <p:nvSpPr>
-          <p:cNvPr id="7" name="TextBox 6"/>
-          <p:cNvSpPr txBox="1"/>
-          <p:nvPr/>
-        </p:nvSpPr>
-        <p:spPr>
-          <a:xfrm>
-            <a:off x="914400" y="2606040"/>
-            <a:ext cx="4663440" cy="365760"/>
-          </a:xfrm>
-          <a:prstGeom prst="rect">
-            <a:avLst/>
-          </a:prstGeom>
-          <a:noFill/>
-        </p:spPr>
-        <p:txBody>
-          <a:bodyPr wrap="square" anchor="t" lIns="0" rIns="0" tIns="0" bIns="0">
-            <a:spAutoFit/>
-          </a:bodyPr>
-          <a:lstStyle/>
-          <a:p>
-            <a:pPr algn="l"/>
-            <a:r>
-              <a:rPr sz="1300" b="0" i="0">
-                <a:solidFill>
-                  <a:srgbClr val="CADCFC"/>
-                </a:solidFill>
-                <a:latin typeface="Calibri"/>
-              </a:rPr>
-              <a:t>평점 4.55 / 5</a:t>
-            </a:r>
-          </a:p>
-        </p:txBody>
-      </p:sp>
-      <p:sp>
-        <p:nvSpPr>
-          <p:cNvPr id="8" name="TextBox 7"/>
-          <p:cNvSpPr txBox="1"/>
-          <p:nvPr/>
-        </p:nvSpPr>
-        <p:spPr>
-          <a:xfrm>
-            <a:off x="914400" y="3063240"/>
-            <a:ext cx="4663440" cy="365760"/>
-          </a:xfrm>
-          <a:prstGeom prst="rect">
-            <a:avLst/>
-          </a:prstGeom>
-          <a:noFill/>
-        </p:spPr>
-        <p:txBody>
-          <a:bodyPr wrap="square" anchor="t" lIns="0" rIns="0" tIns="0" bIns="0">
-            <a:spAutoFit/>
-          </a:bodyPr>
-          <a:lstStyle/>
-          <a:p>
-            <a:pPr algn="l"/>
-            <a:r>
-              <a:rPr sz="1400" b="1" i="0">
-                <a:solidFill>
-                  <a:srgbClr val="FFFFFF"/>
-                </a:solidFill>
-                <a:latin typeface="Calibri"/>
-              </a:rPr>
-              <a:t>보습/수분  긍정 80.5%</a:t>
-            </a:r>
-          </a:p>
-        </p:txBody>
-      </p:sp>
-      <p:sp>
-        <p:nvSpPr>
-          <p:cNvPr id="9" name="TextBox 8"/>
-          <p:cNvSpPr txBox="1"/>
-          <p:nvPr/>
-        </p:nvSpPr>
-        <p:spPr>
-          <a:xfrm>
-            <a:off x="914400" y="3520440"/>
-            <a:ext cx="4663440" cy="365760"/>
-          </a:xfrm>
-          <a:prstGeom prst="rect">
-            <a:avLst/>
-          </a:prstGeom>
-          <a:noFill/>
-        </p:spPr>
-        <p:txBody>
-          <a:bodyPr wrap="square" anchor="t" lIns="0" rIns="0" tIns="0" bIns="0">
-            <a:spAutoFit/>
-          </a:bodyPr>
-          <a:lstStyle/>
-          <a:p>
-            <a:pPr algn="l"/>
-            <a:r>
-              <a:rPr sz="1400" b="1" i="0">
-                <a:solidFill>
-                  <a:srgbClr val="FFFFFF"/>
-                </a:solidFill>
-                <a:latin typeface="Calibri"/>
-              </a:rPr>
-              <a:t>트러블/자극  긍정 23.3%</a:t>
-            </a:r>
-          </a:p>
-        </p:txBody>
-      </p:sp>
-      <p:sp>
-        <p:nvSpPr>
-          <p:cNvPr id="10" name="Rounded Rectangle 9"/>
+          <p:cNvPr id="6" name="Rectangle 5"/>
           <p:cNvSpPr/>
           <p:nvPr/>
         </p:nvSpPr>
         <p:spPr>
           <a:xfrm>
-            <a:off x="6217920" y="1874519"/>
-            <a:ext cx="5212080" cy="2697480"/>
-          </a:xfrm>
-          <a:prstGeom prst="roundRect">
-            <a:avLst>
-              <a:gd name="adj" fmla="val 6000"/>
-            </a:avLst>
+            <a:off x="640080" y="1965960"/>
+            <a:ext cx="64008" cy="2468880"/>
+          </a:xfrm>
+          <a:prstGeom prst="rect">
+            <a:avLst/>
           </a:prstGeom>
           <a:solidFill>
-            <a:srgbClr val="F96167"/>
+            <a:srgbClr val="B85A4D"/>
           </a:solidFill>
           <a:ln>
             <a:noFill/>
@@ -4241,13 +3832,13 @@
       </p:sp>
       <p:sp>
         <p:nvSpPr>
-          <p:cNvPr id="11" name="TextBox 10"/>
+          <p:cNvPr id="7" name="TextBox 6"/>
           <p:cNvSpPr txBox="1"/>
           <p:nvPr/>
         </p:nvSpPr>
         <p:spPr>
           <a:xfrm>
-            <a:off x="6492240" y="2103120"/>
+            <a:off x="960119" y="2194560"/>
             <a:ext cx="4663440" cy="548640"/>
           </a:xfrm>
           <a:prstGeom prst="rect">
@@ -4263,9 +3854,307 @@
           <a:p>
             <a:pPr algn="l"/>
             <a:r>
-              <a:rPr sz="1550" b="1" i="0">
-                <a:solidFill>
-                  <a:srgbClr val="FFFFFF"/>
+              <a:rPr sz="1500" b="1" i="0">
+                <a:solidFill>
+                  <a:srgbClr val="1E2761"/>
+                </a:solidFill>
+                <a:latin typeface="Calibri"/>
+              </a:rPr>
+              <a:t>크리스마 더마랩 토너</a:t>
+            </a:r>
+          </a:p>
+        </p:txBody>
+      </p:sp>
+      <p:sp>
+        <p:nvSpPr>
+          <p:cNvPr id="8" name="TextBox 7"/>
+          <p:cNvSpPr txBox="1"/>
+          <p:nvPr/>
+        </p:nvSpPr>
+        <p:spPr>
+          <a:xfrm>
+            <a:off x="960119" y="2651760"/>
+            <a:ext cx="4663440" cy="365760"/>
+          </a:xfrm>
+          <a:prstGeom prst="rect">
+            <a:avLst/>
+          </a:prstGeom>
+          <a:noFill/>
+        </p:spPr>
+        <p:txBody>
+          <a:bodyPr wrap="square" anchor="t" lIns="0" rIns="0" tIns="0" bIns="0">
+            <a:spAutoFit/>
+          </a:bodyPr>
+          <a:lstStyle/>
+          <a:p>
+            <a:pPr algn="l"/>
+            <a:r>
+              <a:rPr sz="1250" b="0" i="0">
+                <a:solidFill>
+                  <a:srgbClr val="6B7280"/>
+                </a:solidFill>
+                <a:latin typeface="Calibri"/>
+              </a:rPr>
+              <a:t>평점 4.55 / 5</a:t>
+            </a:r>
+          </a:p>
+        </p:txBody>
+      </p:sp>
+      <p:sp>
+        <p:nvSpPr>
+          <p:cNvPr id="9" name="TextBox 8"/>
+          <p:cNvSpPr txBox="1"/>
+          <p:nvPr/>
+        </p:nvSpPr>
+        <p:spPr>
+          <a:xfrm>
+            <a:off x="960119" y="3108960"/>
+            <a:ext cx="2866644" cy="365760"/>
+          </a:xfrm>
+          <a:prstGeom prst="rect">
+            <a:avLst/>
+          </a:prstGeom>
+          <a:noFill/>
+        </p:spPr>
+        <p:txBody>
+          <a:bodyPr wrap="square" anchor="t" lIns="0" rIns="0" tIns="0" bIns="0">
+            <a:spAutoFit/>
+          </a:bodyPr>
+          <a:lstStyle/>
+          <a:p>
+            <a:pPr algn="l"/>
+            <a:r>
+              <a:rPr sz="1300" b="0" i="0">
+                <a:solidFill>
+                  <a:srgbClr val="21295C"/>
+                </a:solidFill>
+                <a:latin typeface="Calibri"/>
+              </a:rPr>
+              <a:t>보습/수분</a:t>
+            </a:r>
+          </a:p>
+        </p:txBody>
+      </p:sp>
+      <p:sp>
+        <p:nvSpPr>
+          <p:cNvPr id="10" name="TextBox 9"/>
+          <p:cNvSpPr txBox="1"/>
+          <p:nvPr/>
+        </p:nvSpPr>
+        <p:spPr>
+          <a:xfrm>
+            <a:off x="3826764" y="3108960"/>
+            <a:ext cx="2084832" cy="365760"/>
+          </a:xfrm>
+          <a:prstGeom prst="rect">
+            <a:avLst/>
+          </a:prstGeom>
+          <a:noFill/>
+        </p:spPr>
+        <p:txBody>
+          <a:bodyPr wrap="square" anchor="t" lIns="0" rIns="0" tIns="0" bIns="0">
+            <a:spAutoFit/>
+          </a:bodyPr>
+          <a:lstStyle/>
+          <a:p>
+            <a:pPr algn="r"/>
+            <a:r>
+              <a:rPr sz="1300" b="1" i="0">
+                <a:solidFill>
+                  <a:srgbClr val="B85A4D"/>
+                </a:solidFill>
+                <a:latin typeface="Calibri"/>
+              </a:rPr>
+              <a:t>긍정 80.5%</a:t>
+            </a:r>
+          </a:p>
+        </p:txBody>
+      </p:sp>
+      <p:sp>
+        <p:nvSpPr>
+          <p:cNvPr id="11" name="TextBox 10"/>
+          <p:cNvSpPr txBox="1"/>
+          <p:nvPr/>
+        </p:nvSpPr>
+        <p:spPr>
+          <a:xfrm>
+            <a:off x="960119" y="3566160"/>
+            <a:ext cx="2866644" cy="365760"/>
+          </a:xfrm>
+          <a:prstGeom prst="rect">
+            <a:avLst/>
+          </a:prstGeom>
+          <a:noFill/>
+        </p:spPr>
+        <p:txBody>
+          <a:bodyPr wrap="square" anchor="t" lIns="0" rIns="0" tIns="0" bIns="0">
+            <a:spAutoFit/>
+          </a:bodyPr>
+          <a:lstStyle/>
+          <a:p>
+            <a:pPr algn="l"/>
+            <a:r>
+              <a:rPr sz="1300" b="0" i="0">
+                <a:solidFill>
+                  <a:srgbClr val="21295C"/>
+                </a:solidFill>
+                <a:latin typeface="Calibri"/>
+              </a:rPr>
+              <a:t>트러블/자극</a:t>
+            </a:r>
+          </a:p>
+        </p:txBody>
+      </p:sp>
+      <p:sp>
+        <p:nvSpPr>
+          <p:cNvPr id="12" name="TextBox 11"/>
+          <p:cNvSpPr txBox="1"/>
+          <p:nvPr/>
+        </p:nvSpPr>
+        <p:spPr>
+          <a:xfrm>
+            <a:off x="3826764" y="3566160"/>
+            <a:ext cx="2084832" cy="365760"/>
+          </a:xfrm>
+          <a:prstGeom prst="rect">
+            <a:avLst/>
+          </a:prstGeom>
+          <a:noFill/>
+        </p:spPr>
+        <p:txBody>
+          <a:bodyPr wrap="square" anchor="t" lIns="0" rIns="0" tIns="0" bIns="0">
+            <a:spAutoFit/>
+          </a:bodyPr>
+          <a:lstStyle/>
+          <a:p>
+            <a:pPr algn="r"/>
+            <a:r>
+              <a:rPr sz="1300" b="1" i="0">
+                <a:solidFill>
+                  <a:srgbClr val="B85A4D"/>
+                </a:solidFill>
+                <a:latin typeface="Calibri"/>
+              </a:rPr>
+              <a:t>긍정 23.3%</a:t>
+            </a:r>
+          </a:p>
+        </p:txBody>
+      </p:sp>
+      <p:sp>
+        <p:nvSpPr>
+          <p:cNvPr id="13" name="Rectangle 12"/>
+          <p:cNvSpPr/>
+          <p:nvPr/>
+        </p:nvSpPr>
+        <p:spPr>
+          <a:xfrm>
+            <a:off x="6217920" y="1965960"/>
+            <a:ext cx="5212080" cy="2468880"/>
+          </a:xfrm>
+          <a:prstGeom prst="rect">
+            <a:avLst/>
+          </a:prstGeom>
+          <a:solidFill>
+            <a:srgbClr val="F5F6FA"/>
+          </a:solidFill>
+          <a:ln>
+            <a:noFill/>
+          </a:ln>
+          <a:effectLst/>
+        </p:spPr>
+        <p:style>
+          <a:lnRef idx="1">
+            <a:schemeClr val="accent1"/>
+          </a:lnRef>
+          <a:fillRef idx="3">
+            <a:schemeClr val="accent1"/>
+          </a:fillRef>
+          <a:effectRef idx="2">
+            <a:schemeClr val="accent1"/>
+          </a:effectRef>
+          <a:fontRef idx="minor">
+            <a:schemeClr val="lt1"/>
+          </a:fontRef>
+        </p:style>
+        <p:txBody>
+          <a:bodyPr rtlCol="0" anchor="ctr"/>
+          <a:lstStyle/>
+          <a:p>
+            <a:pPr algn="ctr"/>
+          </a:p>
+        </p:txBody>
+      </p:sp>
+      <p:sp>
+        <p:nvSpPr>
+          <p:cNvPr id="14" name="Rectangle 13"/>
+          <p:cNvSpPr/>
+          <p:nvPr/>
+        </p:nvSpPr>
+        <p:spPr>
+          <a:xfrm>
+            <a:off x="6217920" y="1965960"/>
+            <a:ext cx="64008" cy="2468880"/>
+          </a:xfrm>
+          <a:prstGeom prst="rect">
+            <a:avLst/>
+          </a:prstGeom>
+          <a:solidFill>
+            <a:srgbClr val="B85A4D"/>
+          </a:solidFill>
+          <a:ln>
+            <a:noFill/>
+          </a:ln>
+          <a:effectLst/>
+        </p:spPr>
+        <p:style>
+          <a:lnRef idx="1">
+            <a:schemeClr val="accent1"/>
+          </a:lnRef>
+          <a:fillRef idx="3">
+            <a:schemeClr val="accent1"/>
+          </a:fillRef>
+          <a:effectRef idx="2">
+            <a:schemeClr val="accent1"/>
+          </a:effectRef>
+          <a:fontRef idx="minor">
+            <a:schemeClr val="lt1"/>
+          </a:fontRef>
+        </p:style>
+        <p:txBody>
+          <a:bodyPr rtlCol="0" anchor="ctr"/>
+          <a:lstStyle/>
+          <a:p>
+            <a:pPr algn="ctr"/>
+          </a:p>
+        </p:txBody>
+      </p:sp>
+      <p:sp>
+        <p:nvSpPr>
+          <p:cNvPr id="15" name="TextBox 14"/>
+          <p:cNvSpPr txBox="1"/>
+          <p:nvPr/>
+        </p:nvSpPr>
+        <p:spPr>
+          <a:xfrm>
+            <a:off x="6537960" y="2194560"/>
+            <a:ext cx="4663440" cy="548640"/>
+          </a:xfrm>
+          <a:prstGeom prst="rect">
+            <a:avLst/>
+          </a:prstGeom>
+          <a:noFill/>
+        </p:spPr>
+        <p:txBody>
+          <a:bodyPr wrap="square" anchor="t" lIns="0" rIns="0" tIns="0" bIns="0">
+            <a:spAutoFit/>
+          </a:bodyPr>
+          <a:lstStyle/>
+          <a:p>
+            <a:pPr algn="l"/>
+            <a:r>
+              <a:rPr sz="1500" b="1" i="0">
+                <a:solidFill>
+                  <a:srgbClr val="1E2761"/>
                 </a:solidFill>
                 <a:latin typeface="Calibri"/>
               </a:rPr>
@@ -4276,13 +4165,13 @@
       </p:sp>
       <p:sp>
         <p:nvSpPr>
-          <p:cNvPr id="12" name="TextBox 11"/>
+          <p:cNvPr id="16" name="TextBox 15"/>
           <p:cNvSpPr txBox="1"/>
           <p:nvPr/>
         </p:nvSpPr>
         <p:spPr>
           <a:xfrm>
-            <a:off x="6492240" y="2606040"/>
+            <a:off x="6537960" y="2651760"/>
             <a:ext cx="4663440" cy="365760"/>
           </a:xfrm>
           <a:prstGeom prst="rect">
@@ -4298,9 +4187,9 @@
           <a:p>
             <a:pPr algn="l"/>
             <a:r>
-              <a:rPr sz="1300" b="0" i="0">
-                <a:solidFill>
-                  <a:srgbClr val="CADCFC"/>
+              <a:rPr sz="1250" b="0" i="0">
+                <a:solidFill>
+                  <a:srgbClr val="6B7280"/>
                 </a:solidFill>
                 <a:latin typeface="Calibri"/>
               </a:rPr>
@@ -4311,14 +4200,14 @@
       </p:sp>
       <p:sp>
         <p:nvSpPr>
-          <p:cNvPr id="13" name="TextBox 12"/>
+          <p:cNvPr id="17" name="TextBox 16"/>
           <p:cNvSpPr txBox="1"/>
           <p:nvPr/>
         </p:nvSpPr>
         <p:spPr>
           <a:xfrm>
-            <a:off x="6492240" y="3063240"/>
-            <a:ext cx="4663440" cy="365760"/>
+            <a:off x="6537960" y="3108960"/>
+            <a:ext cx="2866644" cy="365760"/>
           </a:xfrm>
           <a:prstGeom prst="rect">
             <a:avLst/>
@@ -4333,27 +4222,27 @@
           <a:p>
             <a:pPr algn="l"/>
             <a:r>
-              <a:rPr sz="1400" b="1" i="0">
-                <a:solidFill>
-                  <a:srgbClr val="FFFFFF"/>
+              <a:rPr sz="1300" b="0" i="0">
+                <a:solidFill>
+                  <a:srgbClr val="21295C"/>
                 </a:solidFill>
                 <a:latin typeface="Calibri"/>
               </a:rPr>
-              <a:t>보습/수분  긍정 81.5%</a:t>
-            </a:r>
-          </a:p>
-        </p:txBody>
-      </p:sp>
-      <p:sp>
-        <p:nvSpPr>
-          <p:cNvPr id="14" name="TextBox 13"/>
+              <a:t>보습/수분</a:t>
+            </a:r>
+          </a:p>
+        </p:txBody>
+      </p:sp>
+      <p:sp>
+        <p:nvSpPr>
+          <p:cNvPr id="18" name="TextBox 17"/>
           <p:cNvSpPr txBox="1"/>
           <p:nvPr/>
         </p:nvSpPr>
         <p:spPr>
           <a:xfrm>
-            <a:off x="6492240" y="3520440"/>
-            <a:ext cx="4663440" cy="365760"/>
+            <a:off x="9404604" y="3108960"/>
+            <a:ext cx="2084832" cy="365760"/>
           </a:xfrm>
           <a:prstGeom prst="rect">
             <a:avLst/>
@@ -4366,29 +4255,29 @@
           </a:bodyPr>
           <a:lstStyle/>
           <a:p>
-            <a:pPr algn="l"/>
-            <a:r>
-              <a:rPr sz="1400" b="1" i="0">
-                <a:solidFill>
-                  <a:srgbClr val="FFFFFF"/>
+            <a:pPr algn="r"/>
+            <a:r>
+              <a:rPr sz="1300" b="1" i="0">
+                <a:solidFill>
+                  <a:srgbClr val="B85A4D"/>
                 </a:solidFill>
                 <a:latin typeface="Calibri"/>
               </a:rPr>
-              <a:t>트러블/자극  긍정 40.5%</a:t>
-            </a:r>
-          </a:p>
-        </p:txBody>
-      </p:sp>
-      <p:sp>
-        <p:nvSpPr>
-          <p:cNvPr id="15" name="TextBox 14"/>
+              <a:t>긍정 81.5%</a:t>
+            </a:r>
+          </a:p>
+        </p:txBody>
+      </p:sp>
+      <p:sp>
+        <p:nvSpPr>
+          <p:cNvPr id="19" name="TextBox 18"/>
           <p:cNvSpPr txBox="1"/>
           <p:nvPr/>
         </p:nvSpPr>
         <p:spPr>
           <a:xfrm>
-            <a:off x="640080" y="4754880"/>
-            <a:ext cx="10515600" cy="457200"/>
+            <a:off x="6537960" y="3566160"/>
+            <a:ext cx="2866644" cy="365760"/>
           </a:xfrm>
           <a:prstGeom prst="rect">
             <a:avLst/>
@@ -4403,27 +4292,97 @@
           <a:p>
             <a:pPr algn="l"/>
             <a:r>
-              <a:rPr sz="1400" b="1" i="0">
-                <a:solidFill>
-                  <a:srgbClr val="1E2761"/>
+              <a:rPr sz="1300" b="0" i="0">
+                <a:solidFill>
+                  <a:srgbClr val="21295C"/>
                 </a:solidFill>
                 <a:latin typeface="Calibri"/>
               </a:rPr>
-              <a:t>→ 평점은 0.2점밖에 안 차이나는데, 트러블/자극 긍정비율은 23.3% vs 40.5%로 거의 2배 차이</a:t>
-            </a:r>
-          </a:p>
-        </p:txBody>
-      </p:sp>
-      <p:sp>
-        <p:nvSpPr>
-          <p:cNvPr id="16" name="TextBox 15"/>
+              <a:t>트러블/자극</a:t>
+            </a:r>
+          </a:p>
+        </p:txBody>
+      </p:sp>
+      <p:sp>
+        <p:nvSpPr>
+          <p:cNvPr id="20" name="TextBox 19"/>
           <p:cNvSpPr txBox="1"/>
           <p:nvPr/>
         </p:nvSpPr>
         <p:spPr>
           <a:xfrm>
-            <a:off x="640080" y="5303520"/>
-            <a:ext cx="10515600" cy="1280160"/>
+            <a:off x="9404604" y="3566160"/>
+            <a:ext cx="2084832" cy="365760"/>
+          </a:xfrm>
+          <a:prstGeom prst="rect">
+            <a:avLst/>
+          </a:prstGeom>
+          <a:noFill/>
+        </p:spPr>
+        <p:txBody>
+          <a:bodyPr wrap="square" anchor="t" lIns="0" rIns="0" tIns="0" bIns="0">
+            <a:spAutoFit/>
+          </a:bodyPr>
+          <a:lstStyle/>
+          <a:p>
+            <a:pPr algn="r"/>
+            <a:r>
+              <a:rPr sz="1300" b="1" i="0">
+                <a:solidFill>
+                  <a:srgbClr val="B85A4D"/>
+                </a:solidFill>
+                <a:latin typeface="Calibri"/>
+              </a:rPr>
+              <a:t>긍정 40.5%</a:t>
+            </a:r>
+          </a:p>
+        </p:txBody>
+      </p:sp>
+      <p:sp>
+        <p:nvSpPr>
+          <p:cNvPr id="21" name="TextBox 20"/>
+          <p:cNvSpPr txBox="1"/>
+          <p:nvPr/>
+        </p:nvSpPr>
+        <p:spPr>
+          <a:xfrm>
+            <a:off x="640080" y="4663440"/>
+            <a:ext cx="10515600" cy="457200"/>
+          </a:xfrm>
+          <a:prstGeom prst="rect">
+            <a:avLst/>
+          </a:prstGeom>
+          <a:noFill/>
+        </p:spPr>
+        <p:txBody>
+          <a:bodyPr wrap="square" anchor="t" lIns="0" rIns="0" tIns="0" bIns="0">
+            <a:spAutoFit/>
+          </a:bodyPr>
+          <a:lstStyle/>
+          <a:p>
+            <a:pPr algn="l"/>
+            <a:r>
+              <a:rPr sz="1400" b="1" i="0">
+                <a:solidFill>
+                  <a:srgbClr val="1E2761"/>
+                </a:solidFill>
+                <a:latin typeface="Calibri"/>
+              </a:rPr>
+              <a:t>평점 차이는 0.2점뿐인데, 트러블/자극 속성의 긍정비율은 23.3%와 40.5%로 약 2배 차이</a:t>
+            </a:r>
+          </a:p>
+        </p:txBody>
+      </p:sp>
+      <p:sp>
+        <p:nvSpPr>
+          <p:cNvPr id="22" name="TextBox 21"/>
+          <p:cNvSpPr txBox="1"/>
+          <p:nvPr/>
+        </p:nvSpPr>
+        <p:spPr>
+          <a:xfrm>
+            <a:off x="640080" y="5212080"/>
+            <a:ext cx="10515600" cy="1188720"/>
           </a:xfrm>
           <a:prstGeom prst="rect">
             <a:avLst/>
@@ -4448,7 +4407,7 @@
                 </a:solidFill>
                 <a:latin typeface="Calibri"/>
               </a:rPr>
-              <a:t>•  사람마다 화장품을 고를 때 중요하게 보는 속성이 다르다 (트러블 잘 나는 사람은 자극에, 건조한 사람은 보습에 민감)</a:t>
+              <a:t>•  리뷰어가 중요하게 보는 속성은 사람마다 다르다 (보습/트러블/향 등)</a:t>
             </a:r>
           </a:p>
           <a:p>
@@ -4464,7 +4423,7 @@
                 </a:solidFill>
                 <a:latin typeface="Calibri"/>
               </a:rPr>
-              <a:t>•  평점 하나로는 "나에게 맞는" 제품을 찾을 수 없다 → 속성별로 쪼개서 봐야 진짜 정보가 보인다</a:t>
+              <a:t>•  → 평점이 아니라 속성 단위로 데이터를 분해해 보여주는 것을 서비스의 핵심 구조로 잡았다</a:t>
             </a:r>
           </a:p>
         </p:txBody>
@@ -4561,26 +4520,68 @@
                 </a:solidFill>
                 <a:latin typeface="Georgia"/>
               </a:rPr>
-              <a:t>데이터 수집 — 처음엔 쿠팡만, 더 모았다</a:t>
-            </a:r>
-          </a:p>
-        </p:txBody>
-      </p:sp>
-      <p:sp>
-        <p:nvSpPr>
-          <p:cNvPr id="4" name="Rounded Rectangle 3"/>
+              <a:t>데이터 수집 — 장점과 한계</a:t>
+            </a:r>
+          </a:p>
+        </p:txBody>
+      </p:sp>
+      <p:sp>
+        <p:nvSpPr>
+          <p:cNvPr id="4" name="Rectangle 3"/>
           <p:cNvSpPr/>
           <p:nvPr/>
         </p:nvSpPr>
         <p:spPr>
           <a:xfrm>
-            <a:off x="640080" y="1554480"/>
-            <a:ext cx="3520440" cy="2468880"/>
-          </a:xfrm>
-          <a:prstGeom prst="roundRect">
-            <a:avLst>
-              <a:gd name="adj" fmla="val 8000"/>
-            </a:avLst>
+            <a:off x="640080" y="1371600"/>
+            <a:ext cx="3520440" cy="1417320"/>
+          </a:xfrm>
+          <a:prstGeom prst="rect">
+            <a:avLst/>
+          </a:prstGeom>
+          <a:solidFill>
+            <a:srgbClr val="F5F6FA"/>
+          </a:solidFill>
+          <a:ln>
+            <a:noFill/>
+          </a:ln>
+          <a:effectLst/>
+        </p:spPr>
+        <p:style>
+          <a:lnRef idx="1">
+            <a:schemeClr val="accent1"/>
+          </a:lnRef>
+          <a:fillRef idx="3">
+            <a:schemeClr val="accent1"/>
+          </a:fillRef>
+          <a:effectRef idx="2">
+            <a:schemeClr val="accent1"/>
+          </a:effectRef>
+          <a:fontRef idx="minor">
+            <a:schemeClr val="lt1"/>
+          </a:fontRef>
+        </p:style>
+        <p:txBody>
+          <a:bodyPr rtlCol="0" anchor="ctr"/>
+          <a:lstStyle/>
+          <a:p>
+            <a:pPr algn="ctr"/>
+          </a:p>
+        </p:txBody>
+      </p:sp>
+      <p:sp>
+        <p:nvSpPr>
+          <p:cNvPr id="5" name="Rectangle 4"/>
+          <p:cNvSpPr/>
+          <p:nvPr/>
+        </p:nvSpPr>
+        <p:spPr>
+          <a:xfrm>
+            <a:off x="640080" y="1371600"/>
+            <a:ext cx="64008" cy="1417320"/>
+          </a:xfrm>
+          <a:prstGeom prst="rect">
+            <a:avLst/>
           </a:prstGeom>
           <a:solidFill>
             <a:srgbClr val="1E2761"/>
@@ -4614,14 +4615,49 @@
       </p:sp>
       <p:sp>
         <p:nvSpPr>
-          <p:cNvPr id="5" name="TextBox 4"/>
+          <p:cNvPr id="6" name="TextBox 5"/>
           <p:cNvSpPr txBox="1"/>
           <p:nvPr/>
         </p:nvSpPr>
         <p:spPr>
           <a:xfrm>
-            <a:off x="868680" y="1783080"/>
-            <a:ext cx="3063240" cy="365760"/>
+            <a:off x="822959" y="1463040"/>
+            <a:ext cx="3154680" cy="737006"/>
+          </a:xfrm>
+          <a:prstGeom prst="rect">
+            <a:avLst/>
+          </a:prstGeom>
+          <a:noFill/>
+        </p:spPr>
+        <p:txBody>
+          <a:bodyPr wrap="square" anchor="b" lIns="0" rIns="0" tIns="0" bIns="0">
+            <a:spAutoFit/>
+          </a:bodyPr>
+          <a:lstStyle/>
+          <a:p>
+            <a:pPr algn="ctr"/>
+            <a:r>
+              <a:rPr sz="3600" b="1" i="0">
+                <a:solidFill>
+                  <a:srgbClr val="1E2761"/>
+                </a:solidFill>
+                <a:latin typeface="Calibri"/>
+              </a:rPr>
+              <a:t>86,379</a:t>
+            </a:r>
+          </a:p>
+        </p:txBody>
+      </p:sp>
+      <p:sp>
+        <p:nvSpPr>
+          <p:cNvPr id="7" name="TextBox 6"/>
+          <p:cNvSpPr txBox="1"/>
+          <p:nvPr/>
+        </p:nvSpPr>
+        <p:spPr>
+          <a:xfrm>
+            <a:off x="822959" y="2200046"/>
+            <a:ext cx="3154680" cy="451713"/>
           </a:xfrm>
           <a:prstGeom prst="rect">
             <a:avLst/>
@@ -4634,125 +4670,35 @@
           </a:bodyPr>
           <a:lstStyle/>
           <a:p>
-            <a:pPr algn="l"/>
-            <a:r>
-              <a:rPr sz="1400" b="1" i="0">
-                <a:solidFill>
-                  <a:srgbClr val="CADCFC"/>
+            <a:pPr algn="ctr"/>
+            <a:r>
+              <a:rPr sz="1250" b="0" i="0">
+                <a:solidFill>
+                  <a:srgbClr val="6B7280"/>
                 </a:solidFill>
                 <a:latin typeface="Calibri"/>
               </a:rPr>
-              <a:t>1차</a:t>
-            </a:r>
-          </a:p>
-        </p:txBody>
-      </p:sp>
-      <p:sp>
-        <p:nvSpPr>
-          <p:cNvPr id="6" name="TextBox 5"/>
-          <p:cNvSpPr txBox="1"/>
-          <p:nvPr/>
-        </p:nvSpPr>
-        <p:spPr>
-          <a:xfrm>
-            <a:off x="868680" y="2194560"/>
-            <a:ext cx="3063240" cy="914400"/>
-          </a:xfrm>
-          <a:prstGeom prst="rect">
-            <a:avLst/>
-          </a:prstGeom>
-          <a:noFill/>
-        </p:spPr>
-        <p:txBody>
-          <a:bodyPr wrap="square" anchor="t" lIns="0" rIns="0" tIns="0" bIns="0">
-            <a:spAutoFit/>
-          </a:bodyPr>
-          <a:lstStyle/>
-          <a:p>
-            <a:pPr algn="l">
-              <a:lnSpc>
-                <a:spcPct val="125000"/>
-              </a:lnSpc>
-            </a:pPr>
-            <a:r>
-              <a:rPr sz="1500" b="1" i="0">
-                <a:solidFill>
-                  <a:srgbClr val="FFFFFF"/>
-                </a:solidFill>
-                <a:latin typeface="Calibri"/>
-              </a:rPr>
-              <a:t>쿠팡 크롤링</a:t>
-            </a:r>
-          </a:p>
-          <a:p>
-            <a:pPr algn="l">
-              <a:lnSpc>
-                <a:spcPct val="125000"/>
-              </a:lnSpc>
-            </a:pPr>
-            <a:r>
-              <a:rPr sz="1500" b="1" i="0">
-                <a:solidFill>
-                  <a:srgbClr val="FFFFFF"/>
-                </a:solidFill>
-                <a:latin typeface="Calibri"/>
-              </a:rPr>
-              <a:t>(20개 키워드)</a:t>
-            </a:r>
-          </a:p>
-        </p:txBody>
-      </p:sp>
-      <p:sp>
-        <p:nvSpPr>
-          <p:cNvPr id="7" name="TextBox 6"/>
-          <p:cNvSpPr txBox="1"/>
-          <p:nvPr/>
-        </p:nvSpPr>
-        <p:spPr>
-          <a:xfrm>
-            <a:off x="868680" y="3291840"/>
-            <a:ext cx="3063240" cy="548640"/>
-          </a:xfrm>
-          <a:prstGeom prst="rect">
-            <a:avLst/>
-          </a:prstGeom>
-          <a:noFill/>
-        </p:spPr>
-        <p:txBody>
-          <a:bodyPr wrap="square" anchor="t" lIns="0" rIns="0" tIns="0" bIns="0">
-            <a:spAutoFit/>
-          </a:bodyPr>
-          <a:lstStyle/>
-          <a:p>
-            <a:pPr algn="l"/>
-            <a:r>
-              <a:rPr sz="2400" b="1" i="0">
-                <a:solidFill>
-                  <a:srgbClr val="FFFFFF"/>
-                </a:solidFill>
-                <a:latin typeface="Calibri"/>
-              </a:rPr>
-              <a:t>86,379건</a:t>
-            </a:r>
-          </a:p>
-        </p:txBody>
-      </p:sp>
-      <p:sp>
-        <p:nvSpPr>
-          <p:cNvPr id="8" name="Right Arrow 7"/>
+              <a:t>쿠팡 (1차)</a:t>
+            </a:r>
+          </a:p>
+        </p:txBody>
+      </p:sp>
+      <p:sp>
+        <p:nvSpPr>
+          <p:cNvPr id="8" name="Rectangle 7"/>
           <p:cNvSpPr/>
           <p:nvPr/>
         </p:nvSpPr>
         <p:spPr>
           <a:xfrm>
-            <a:off x="4178807" y="2651760"/>
-            <a:ext cx="146304" cy="320040"/>
-          </a:xfrm>
-          <a:prstGeom prst="rightArrow">
+            <a:off x="4343400" y="1371600"/>
+            <a:ext cx="3520440" cy="1417320"/>
+          </a:xfrm>
+          <a:prstGeom prst="rect">
             <a:avLst/>
           </a:prstGeom>
           <a:solidFill>
-            <a:srgbClr val="555A6E"/>
+            <a:srgbClr val="F5F6FA"/>
           </a:solidFill>
           <a:ln>
             <a:noFill/>
@@ -4783,19 +4729,17 @@
       </p:sp>
       <p:sp>
         <p:nvSpPr>
-          <p:cNvPr id="9" name="Rounded Rectangle 8"/>
+          <p:cNvPr id="9" name="Rectangle 8"/>
           <p:cNvSpPr/>
           <p:nvPr/>
         </p:nvSpPr>
         <p:spPr>
           <a:xfrm>
-            <a:off x="4343400" y="1554480"/>
-            <a:ext cx="3520440" cy="2468880"/>
-          </a:xfrm>
-          <a:prstGeom prst="roundRect">
-            <a:avLst>
-              <a:gd name="adj" fmla="val 8000"/>
-            </a:avLst>
+            <a:off x="4343400" y="1371600"/>
+            <a:ext cx="64008" cy="1417320"/>
+          </a:xfrm>
+          <a:prstGeom prst="rect">
+            <a:avLst/>
           </a:prstGeom>
           <a:solidFill>
             <a:srgbClr val="1E2761"/>
@@ -4835,8 +4779,43 @@
         </p:nvSpPr>
         <p:spPr>
           <a:xfrm>
-            <a:off x="4572000" y="1783080"/>
-            <a:ext cx="3063240" cy="365760"/>
+            <a:off x="4526280" y="1463040"/>
+            <a:ext cx="3154680" cy="737006"/>
+          </a:xfrm>
+          <a:prstGeom prst="rect">
+            <a:avLst/>
+          </a:prstGeom>
+          <a:noFill/>
+        </p:spPr>
+        <p:txBody>
+          <a:bodyPr wrap="square" anchor="b" lIns="0" rIns="0" tIns="0" bIns="0">
+            <a:spAutoFit/>
+          </a:bodyPr>
+          <a:lstStyle/>
+          <a:p>
+            <a:pPr algn="ctr"/>
+            <a:r>
+              <a:rPr sz="3600" b="1" i="0">
+                <a:solidFill>
+                  <a:srgbClr val="1E2761"/>
+                </a:solidFill>
+                <a:latin typeface="Calibri"/>
+              </a:rPr>
+              <a:t>452,395</a:t>
+            </a:r>
+          </a:p>
+        </p:txBody>
+      </p:sp>
+      <p:sp>
+        <p:nvSpPr>
+          <p:cNvPr id="11" name="TextBox 10"/>
+          <p:cNvSpPr txBox="1"/>
+          <p:nvPr/>
+        </p:nvSpPr>
+        <p:spPr>
+          <a:xfrm>
+            <a:off x="4526280" y="2200046"/>
+            <a:ext cx="3154680" cy="451713"/>
           </a:xfrm>
           <a:prstGeom prst="rect">
             <a:avLst/>
@@ -4849,125 +4828,35 @@
           </a:bodyPr>
           <a:lstStyle/>
           <a:p>
-            <a:pPr algn="l"/>
-            <a:r>
-              <a:rPr sz="1400" b="1" i="0">
-                <a:solidFill>
-                  <a:srgbClr val="CADCFC"/>
+            <a:pPr algn="ctr"/>
+            <a:r>
+              <a:rPr sz="1250" b="0" i="0">
+                <a:solidFill>
+                  <a:srgbClr val="6B7280"/>
                 </a:solidFill>
                 <a:latin typeface="Calibri"/>
               </a:rPr>
-              <a:t>2차</a:t>
-            </a:r>
-          </a:p>
-        </p:txBody>
-      </p:sp>
-      <p:sp>
-        <p:nvSpPr>
-          <p:cNvPr id="11" name="TextBox 10"/>
-          <p:cNvSpPr txBox="1"/>
-          <p:nvPr/>
-        </p:nvSpPr>
-        <p:spPr>
-          <a:xfrm>
-            <a:off x="4572000" y="2194560"/>
-            <a:ext cx="3063240" cy="914400"/>
-          </a:xfrm>
-          <a:prstGeom prst="rect">
-            <a:avLst/>
-          </a:prstGeom>
-          <a:noFill/>
-        </p:spPr>
-        <p:txBody>
-          <a:bodyPr wrap="square" anchor="t" lIns="0" rIns="0" tIns="0" bIns="0">
-            <a:spAutoFit/>
-          </a:bodyPr>
-          <a:lstStyle/>
-          <a:p>
-            <a:pPr algn="l">
-              <a:lnSpc>
-                <a:spcPct val="125000"/>
-              </a:lnSpc>
-            </a:pPr>
-            <a:r>
-              <a:rPr sz="1500" b="1" i="0">
-                <a:solidFill>
-                  <a:srgbClr val="FFFFFF"/>
-                </a:solidFill>
-                <a:latin typeface="Calibri"/>
-              </a:rPr>
-              <a:t>+ 무신사·올리브영</a:t>
-            </a:r>
-          </a:p>
-          <a:p>
-            <a:pPr algn="l">
-              <a:lnSpc>
-                <a:spcPct val="125000"/>
-              </a:lnSpc>
-            </a:pPr>
-            <a:r>
-              <a:rPr sz="1500" b="1" i="0">
-                <a:solidFill>
-                  <a:srgbClr val="FFFFFF"/>
-                </a:solidFill>
-                <a:latin typeface="Calibri"/>
-              </a:rPr>
-              <a:t>(동료 크롤링 데이터 추가)</a:t>
-            </a:r>
-          </a:p>
-        </p:txBody>
-      </p:sp>
-      <p:sp>
-        <p:nvSpPr>
-          <p:cNvPr id="12" name="TextBox 11"/>
-          <p:cNvSpPr txBox="1"/>
-          <p:nvPr/>
-        </p:nvSpPr>
-        <p:spPr>
-          <a:xfrm>
-            <a:off x="4572000" y="3291840"/>
-            <a:ext cx="3063240" cy="548640"/>
-          </a:xfrm>
-          <a:prstGeom prst="rect">
-            <a:avLst/>
-          </a:prstGeom>
-          <a:noFill/>
-        </p:spPr>
-        <p:txBody>
-          <a:bodyPr wrap="square" anchor="t" lIns="0" rIns="0" tIns="0" bIns="0">
-            <a:spAutoFit/>
-          </a:bodyPr>
-          <a:lstStyle/>
-          <a:p>
-            <a:pPr algn="l"/>
-            <a:r>
-              <a:rPr sz="2400" b="1" i="0">
-                <a:solidFill>
-                  <a:srgbClr val="FFFFFF"/>
-                </a:solidFill>
-                <a:latin typeface="Calibri"/>
-              </a:rPr>
-              <a:t>452,395건</a:t>
-            </a:r>
-          </a:p>
-        </p:txBody>
-      </p:sp>
-      <p:sp>
-        <p:nvSpPr>
-          <p:cNvPr id="13" name="Right Arrow 12"/>
+              <a:t>+ 무신사·올리브영 (2차)</a:t>
+            </a:r>
+          </a:p>
+        </p:txBody>
+      </p:sp>
+      <p:sp>
+        <p:nvSpPr>
+          <p:cNvPr id="12" name="Rectangle 11"/>
           <p:cNvSpPr/>
           <p:nvPr/>
         </p:nvSpPr>
         <p:spPr>
           <a:xfrm>
-            <a:off x="7882127" y="2651760"/>
-            <a:ext cx="146304" cy="320040"/>
-          </a:xfrm>
-          <a:prstGeom prst="rightArrow">
+            <a:off x="8046719" y="1371600"/>
+            <a:ext cx="3520440" cy="1417320"/>
+          </a:xfrm>
+          <a:prstGeom prst="rect">
             <a:avLst/>
           </a:prstGeom>
           <a:solidFill>
-            <a:srgbClr val="555A6E"/>
+            <a:srgbClr val="F5F6FA"/>
           </a:solidFill>
           <a:ln>
             <a:noFill/>
@@ -4998,22 +4887,20 @@
       </p:sp>
       <p:sp>
         <p:nvSpPr>
-          <p:cNvPr id="14" name="Rounded Rectangle 13"/>
+          <p:cNvPr id="13" name="Rectangle 12"/>
           <p:cNvSpPr/>
           <p:nvPr/>
         </p:nvSpPr>
         <p:spPr>
           <a:xfrm>
-            <a:off x="8046719" y="1554480"/>
-            <a:ext cx="3520440" cy="2468880"/>
-          </a:xfrm>
-          <a:prstGeom prst="roundRect">
-            <a:avLst>
-              <a:gd name="adj" fmla="val 8000"/>
-            </a:avLst>
+            <a:off x="8046719" y="1371600"/>
+            <a:ext cx="64008" cy="1417320"/>
+          </a:xfrm>
+          <a:prstGeom prst="rect">
+            <a:avLst/>
           </a:prstGeom>
           <a:solidFill>
-            <a:srgbClr val="F96167"/>
+            <a:srgbClr val="B85A4D"/>
           </a:solidFill>
           <a:ln>
             <a:noFill/>
@@ -5044,14 +4931,49 @@
       </p:sp>
       <p:sp>
         <p:nvSpPr>
+          <p:cNvPr id="14" name="TextBox 13"/>
+          <p:cNvSpPr txBox="1"/>
+          <p:nvPr/>
+        </p:nvSpPr>
+        <p:spPr>
+          <a:xfrm>
+            <a:off x="8229599" y="1463040"/>
+            <a:ext cx="3154680" cy="737006"/>
+          </a:xfrm>
+          <a:prstGeom prst="rect">
+            <a:avLst/>
+          </a:prstGeom>
+          <a:noFill/>
+        </p:spPr>
+        <p:txBody>
+          <a:bodyPr wrap="square" anchor="b" lIns="0" rIns="0" tIns="0" bIns="0">
+            <a:spAutoFit/>
+          </a:bodyPr>
+          <a:lstStyle/>
+          <a:p>
+            <a:pPr algn="ctr"/>
+            <a:r>
+              <a:rPr sz="3600" b="1" i="0">
+                <a:solidFill>
+                  <a:srgbClr val="B85A4D"/>
+                </a:solidFill>
+                <a:latin typeface="Calibri"/>
+              </a:rPr>
+              <a:t>538,774</a:t>
+            </a:r>
+          </a:p>
+        </p:txBody>
+      </p:sp>
+      <p:sp>
+        <p:nvSpPr>
           <p:cNvPr id="15" name="TextBox 14"/>
           <p:cNvSpPr txBox="1"/>
           <p:nvPr/>
         </p:nvSpPr>
         <p:spPr>
           <a:xfrm>
-            <a:off x="8275319" y="1783080"/>
-            <a:ext cx="3063240" cy="365760"/>
+            <a:off x="8229599" y="2200046"/>
+            <a:ext cx="3154680" cy="451713"/>
           </a:xfrm>
           <a:prstGeom prst="rect">
             <a:avLst/>
@@ -5064,29 +4986,117 @@
           </a:bodyPr>
           <a:lstStyle/>
           <a:p>
-            <a:pPr algn="l"/>
-            <a:r>
-              <a:rPr sz="1400" b="1" i="0">
-                <a:solidFill>
-                  <a:srgbClr val="CADCFC"/>
+            <a:pPr algn="ctr"/>
+            <a:r>
+              <a:rPr sz="1250" b="0" i="0">
+                <a:solidFill>
+                  <a:srgbClr val="6B7280"/>
                 </a:solidFill>
                 <a:latin typeface="Calibri"/>
               </a:rPr>
-              <a:t>최종</a:t>
-            </a:r>
-          </a:p>
-        </p:txBody>
-      </p:sp>
-      <p:sp>
-        <p:nvSpPr>
-          <p:cNvPr id="16" name="TextBox 15"/>
+              <a:t>최종 통합</a:t>
+            </a:r>
+          </a:p>
+        </p:txBody>
+      </p:sp>
+      <p:sp>
+        <p:nvSpPr>
+          <p:cNvPr id="16" name="Rectangle 15"/>
+          <p:cNvSpPr/>
+          <p:nvPr/>
+        </p:nvSpPr>
+        <p:spPr>
+          <a:xfrm>
+            <a:off x="640080" y="3108960"/>
+            <a:ext cx="5303520" cy="3017520"/>
+          </a:xfrm>
+          <a:prstGeom prst="rect">
+            <a:avLst/>
+          </a:prstGeom>
+          <a:solidFill>
+            <a:srgbClr val="F5F6FA"/>
+          </a:solidFill>
+          <a:ln>
+            <a:noFill/>
+          </a:ln>
+          <a:effectLst/>
+        </p:spPr>
+        <p:style>
+          <a:lnRef idx="1">
+            <a:schemeClr val="accent1"/>
+          </a:lnRef>
+          <a:fillRef idx="3">
+            <a:schemeClr val="accent1"/>
+          </a:fillRef>
+          <a:effectRef idx="2">
+            <a:schemeClr val="accent1"/>
+          </a:effectRef>
+          <a:fontRef idx="minor">
+            <a:schemeClr val="lt1"/>
+          </a:fontRef>
+        </p:style>
+        <p:txBody>
+          <a:bodyPr rtlCol="0" anchor="ctr"/>
+          <a:lstStyle/>
+          <a:p>
+            <a:pPr algn="ctr"/>
+          </a:p>
+        </p:txBody>
+      </p:sp>
+      <p:sp>
+        <p:nvSpPr>
+          <p:cNvPr id="17" name="Rectangle 16"/>
+          <p:cNvSpPr/>
+          <p:nvPr/>
+        </p:nvSpPr>
+        <p:spPr>
+          <a:xfrm>
+            <a:off x="640080" y="3108960"/>
+            <a:ext cx="64008" cy="3017520"/>
+          </a:xfrm>
+          <a:prstGeom prst="rect">
+            <a:avLst/>
+          </a:prstGeom>
+          <a:solidFill>
+            <a:srgbClr val="1E2761"/>
+          </a:solidFill>
+          <a:ln>
+            <a:noFill/>
+          </a:ln>
+          <a:effectLst/>
+        </p:spPr>
+        <p:style>
+          <a:lnRef idx="1">
+            <a:schemeClr val="accent1"/>
+          </a:lnRef>
+          <a:fillRef idx="3">
+            <a:schemeClr val="accent1"/>
+          </a:fillRef>
+          <a:effectRef idx="2">
+            <a:schemeClr val="accent1"/>
+          </a:effectRef>
+          <a:fontRef idx="minor">
+            <a:schemeClr val="lt1"/>
+          </a:fontRef>
+        </p:style>
+        <p:txBody>
+          <a:bodyPr rtlCol="0" anchor="ctr"/>
+          <a:lstStyle/>
+          <a:p>
+            <a:pPr algn="ctr"/>
+          </a:p>
+        </p:txBody>
+      </p:sp>
+      <p:sp>
+        <p:nvSpPr>
+          <p:cNvPr id="18" name="TextBox 17"/>
           <p:cNvSpPr txBox="1"/>
           <p:nvPr/>
         </p:nvSpPr>
         <p:spPr>
           <a:xfrm>
-            <a:off x="8275319" y="2194560"/>
-            <a:ext cx="3063240" cy="914400"/>
+            <a:off x="914400" y="3337560"/>
+            <a:ext cx="4846320" cy="365760"/>
           </a:xfrm>
           <a:prstGeom prst="rect">
             <a:avLst/>
@@ -5099,49 +5109,189 @@
           </a:bodyPr>
           <a:lstStyle/>
           <a:p>
-            <a:pPr algn="l">
-              <a:lnSpc>
-                <a:spcPct val="125000"/>
-              </a:lnSpc>
-            </a:pPr>
-            <a:r>
-              <a:rPr sz="1500" b="1" i="0">
-                <a:solidFill>
-                  <a:srgbClr val="FFFFFF"/>
+            <a:pPr algn="l"/>
+            <a:r>
+              <a:rPr sz="1550" b="1" i="0">
+                <a:solidFill>
+                  <a:srgbClr val="1E2761"/>
                 </a:solidFill>
                 <a:latin typeface="Calibri"/>
               </a:rPr>
-              <a:t>스키마/라벨 통일</a:t>
-            </a:r>
-          </a:p>
-          <a:p>
-            <a:pPr algn="l">
-              <a:lnSpc>
-                <a:spcPct val="125000"/>
-              </a:lnSpc>
+              <a:t>장점</a:t>
+            </a:r>
+          </a:p>
+        </p:txBody>
+      </p:sp>
+      <p:sp>
+        <p:nvSpPr>
+          <p:cNvPr id="19" name="TextBox 18"/>
+          <p:cNvSpPr txBox="1"/>
+          <p:nvPr/>
+        </p:nvSpPr>
+        <p:spPr>
+          <a:xfrm>
+            <a:off x="914400" y="3794760"/>
+            <a:ext cx="4846320" cy="2194560"/>
+          </a:xfrm>
+          <a:prstGeom prst="rect">
+            <a:avLst/>
+          </a:prstGeom>
+          <a:noFill/>
+        </p:spPr>
+        <p:txBody>
+          <a:bodyPr wrap="square">
+            <a:spAutoFit/>
+          </a:bodyPr>
+          <a:lstStyle/>
+          <a:p>
+            <a:pPr>
+              <a:spcAft>
+                <a:spcPts val="1000"/>
+              </a:spcAft>
             </a:pPr>
             <a:r>
-              <a:rPr sz="1500" b="1" i="0">
-                <a:solidFill>
-                  <a:srgbClr val="FFFFFF"/>
+              <a:rPr sz="1250">
+                <a:solidFill>
+                  <a:srgbClr val="21295C"/>
                 </a:solidFill>
                 <a:latin typeface="Calibri"/>
               </a:rPr>
-              <a:t>+ 중복 제거</a:t>
-            </a:r>
-          </a:p>
-        </p:txBody>
-      </p:sp>
-      <p:sp>
-        <p:nvSpPr>
-          <p:cNvPr id="17" name="TextBox 16"/>
+              <a:t>•  별점이 곧 라벨이 됨 — 4~5점 긍정, 3점 중립, 1~2점 부정으로 바로
+분류에 쓸 수 있어 별도 수작업 레이블링이 필요 없음</a:t>
+            </a:r>
+          </a:p>
+          <a:p>
+            <a:pPr>
+              <a:spcAft>
+                <a:spcPts val="1000"/>
+              </a:spcAft>
+            </a:pPr>
+            <a:r>
+              <a:rPr sz="1250">
+                <a:solidFill>
+                  <a:srgbClr val="21295C"/>
+                </a:solidFill>
+                <a:latin typeface="Calibri"/>
+              </a:rPr>
+              <a:t>•  화장품 도메인 특화 + 2015~2026년 10년치 데이터로 트렌드 분석도 가능</a:t>
+            </a:r>
+          </a:p>
+          <a:p>
+            <a:pPr>
+              <a:spcAft>
+                <a:spcPts val="1000"/>
+              </a:spcAft>
+            </a:pPr>
+            <a:r>
+              <a:rPr sz="1250">
+                <a:solidFill>
+                  <a:srgbClr val="21295C"/>
+                </a:solidFill>
+                <a:latin typeface="Calibri"/>
+              </a:rPr>
+              <a:t>•  20개+ 카테고리 × 8개 속성으로 비교 분석 가능</a:t>
+            </a:r>
+          </a:p>
+        </p:txBody>
+      </p:sp>
+      <p:sp>
+        <p:nvSpPr>
+          <p:cNvPr id="20" name="Rectangle 19"/>
+          <p:cNvSpPr/>
+          <p:nvPr/>
+        </p:nvSpPr>
+        <p:spPr>
+          <a:xfrm>
+            <a:off x="6217920" y="3108960"/>
+            <a:ext cx="5303520" cy="3017520"/>
+          </a:xfrm>
+          <a:prstGeom prst="rect">
+            <a:avLst/>
+          </a:prstGeom>
+          <a:solidFill>
+            <a:srgbClr val="F5F6FA"/>
+          </a:solidFill>
+          <a:ln>
+            <a:noFill/>
+          </a:ln>
+          <a:effectLst/>
+        </p:spPr>
+        <p:style>
+          <a:lnRef idx="1">
+            <a:schemeClr val="accent1"/>
+          </a:lnRef>
+          <a:fillRef idx="3">
+            <a:schemeClr val="accent1"/>
+          </a:fillRef>
+          <a:effectRef idx="2">
+            <a:schemeClr val="accent1"/>
+          </a:effectRef>
+          <a:fontRef idx="minor">
+            <a:schemeClr val="lt1"/>
+          </a:fontRef>
+        </p:style>
+        <p:txBody>
+          <a:bodyPr rtlCol="0" anchor="ctr"/>
+          <a:lstStyle/>
+          <a:p>
+            <a:pPr algn="ctr"/>
+          </a:p>
+        </p:txBody>
+      </p:sp>
+      <p:sp>
+        <p:nvSpPr>
+          <p:cNvPr id="21" name="Rectangle 20"/>
+          <p:cNvSpPr/>
+          <p:nvPr/>
+        </p:nvSpPr>
+        <p:spPr>
+          <a:xfrm>
+            <a:off x="6217920" y="3108960"/>
+            <a:ext cx="64008" cy="3017520"/>
+          </a:xfrm>
+          <a:prstGeom prst="rect">
+            <a:avLst/>
+          </a:prstGeom>
+          <a:solidFill>
+            <a:srgbClr val="B85A4D"/>
+          </a:solidFill>
+          <a:ln>
+            <a:noFill/>
+          </a:ln>
+          <a:effectLst/>
+        </p:spPr>
+        <p:style>
+          <a:lnRef idx="1">
+            <a:schemeClr val="accent1"/>
+          </a:lnRef>
+          <a:fillRef idx="3">
+            <a:schemeClr val="accent1"/>
+          </a:fillRef>
+          <a:effectRef idx="2">
+            <a:schemeClr val="accent1"/>
+          </a:effectRef>
+          <a:fontRef idx="minor">
+            <a:schemeClr val="lt1"/>
+          </a:fontRef>
+        </p:style>
+        <p:txBody>
+          <a:bodyPr rtlCol="0" anchor="ctr"/>
+          <a:lstStyle/>
+          <a:p>
+            <a:pPr algn="ctr"/>
+          </a:p>
+        </p:txBody>
+      </p:sp>
+      <p:sp>
+        <p:nvSpPr>
+          <p:cNvPr id="22" name="TextBox 21"/>
           <p:cNvSpPr txBox="1"/>
           <p:nvPr/>
         </p:nvSpPr>
         <p:spPr>
           <a:xfrm>
-            <a:off x="8275319" y="3291840"/>
-            <a:ext cx="3063240" cy="548640"/>
+            <a:off x="6492240" y="3337560"/>
+            <a:ext cx="4846320" cy="365760"/>
           </a:xfrm>
           <a:prstGeom prst="rect">
             <a:avLst/>
@@ -5156,62 +5306,27 @@
           <a:p>
             <a:pPr algn="l"/>
             <a:r>
-              <a:rPr sz="2400" b="1" i="0">
-                <a:solidFill>
-                  <a:srgbClr val="FFFFFF"/>
+              <a:rPr sz="1550" b="1" i="0">
+                <a:solidFill>
+                  <a:srgbClr val="1E2761"/>
                 </a:solidFill>
                 <a:latin typeface="Calibri"/>
               </a:rPr>
-              <a:t>538,774건</a:t>
-            </a:r>
-          </a:p>
-        </p:txBody>
-      </p:sp>
-      <p:sp>
-        <p:nvSpPr>
-          <p:cNvPr id="18" name="TextBox 17"/>
+              <a:t>한계</a:t>
+            </a:r>
+          </a:p>
+        </p:txBody>
+      </p:sp>
+      <p:sp>
+        <p:nvSpPr>
+          <p:cNvPr id="23" name="TextBox 22"/>
           <p:cNvSpPr txBox="1"/>
           <p:nvPr/>
         </p:nvSpPr>
         <p:spPr>
           <a:xfrm>
-            <a:off x="640080" y="4389120"/>
-            <a:ext cx="10881360" cy="365760"/>
-          </a:xfrm>
-          <a:prstGeom prst="rect">
-            <a:avLst/>
-          </a:prstGeom>
-          <a:noFill/>
-        </p:spPr>
-        <p:txBody>
-          <a:bodyPr wrap="square" anchor="t" lIns="0" rIns="0" tIns="0" bIns="0">
-            <a:spAutoFit/>
-          </a:bodyPr>
-          <a:lstStyle/>
-          <a:p>
-            <a:pPr algn="l"/>
-            <a:r>
-              <a:rPr sz="1600" b="1" i="0">
-                <a:solidFill>
-                  <a:srgbClr val="1E2761"/>
-                </a:solidFill>
-                <a:latin typeface="Calibri"/>
-              </a:rPr>
-              <a:t>데이터 장점</a:t>
-            </a:r>
-          </a:p>
-        </p:txBody>
-      </p:sp>
-      <p:sp>
-        <p:nvSpPr>
-          <p:cNvPr id="19" name="TextBox 18"/>
-          <p:cNvSpPr txBox="1"/>
-          <p:nvPr/>
-        </p:nvSpPr>
-        <p:spPr>
-          <a:xfrm>
-            <a:off x="640080" y="4846320"/>
-            <a:ext cx="10881360" cy="1645920"/>
+            <a:off x="6492240" y="3794760"/>
+            <a:ext cx="4846320" cy="2194560"/>
           </a:xfrm>
           <a:prstGeom prst="rect">
             <a:avLst/>
@@ -5226,49 +5341,52 @@
           <a:p>
             <a:pPr>
               <a:spcAft>
-                <a:spcPts val="800"/>
+                <a:spcPts val="1000"/>
               </a:spcAft>
             </a:pPr>
             <a:r>
-              <a:rPr sz="1400">
+              <a:rPr sz="1250">
                 <a:solidFill>
                   <a:srgbClr val="21295C"/>
                 </a:solidFill>
                 <a:latin typeface="Calibri"/>
               </a:rPr>
-              <a:t>•  별점 기반 라벨이 이미 존재 → 별도 수작업 레이블링 불필요</a:t>
+              <a:t>•  별점 기반 라벨링의 전제는 "별점 = 진짜 만족도"인데, 실제로는
+별점과 리뷰 내용이 안 맞는 경우가 있음 (오기입·과장 등)</a:t>
             </a:r>
           </a:p>
           <a:p>
             <a:pPr>
               <a:spcAft>
-                <a:spcPts val="800"/>
+                <a:spcPts val="1000"/>
               </a:spcAft>
             </a:pPr>
             <a:r>
-              <a:rPr sz="1400">
+              <a:rPr sz="1250">
                 <a:solidFill>
                   <a:srgbClr val="21295C"/>
                 </a:solidFill>
                 <a:latin typeface="Calibri"/>
               </a:rPr>
-              <a:t>•  화장품 도메인 특화, 2015~2026년 10년치 데이터로 트렌드 분석도 가능</a:t>
+              <a:t>•  독립적인 텍스트 기반 분석과 비교했을 때, 별점 5점 리뷰 중 21%가
+실제로는 부정적 내용으로 분류됨</a:t>
             </a:r>
           </a:p>
           <a:p>
             <a:pPr>
               <a:spcAft>
-                <a:spcPts val="800"/>
+                <a:spcPts val="1000"/>
               </a:spcAft>
             </a:pPr>
             <a:r>
-              <a:rPr sz="1400">
+              <a:rPr sz="1250">
                 <a:solidFill>
                   <a:srgbClr val="21295C"/>
                 </a:solidFill>
                 <a:latin typeface="Calibri"/>
               </a:rPr>
-              <a:t>•  20개+ 카테고리 × 8개 속성으로 비교 분석 용이</a:t>
+              <a:t>•  → 라벨 노이즈가 일정 비율 존재한다는 한계를 인지하고 진행
+(완전히 제거하지 않고, 모델 평가 단계에서 별도로 검증)</a:t>
             </a:r>
           </a:p>
         </p:txBody>
@@ -5394,20 +5512,20 @@
           <a:p>
             <a:pPr algn="l"/>
             <a:r>
-              <a:rPr sz="1450" b="0" i="1">
-                <a:solidFill>
-                  <a:srgbClr val="CADCFC"/>
+              <a:rPr sz="1400" b="0" i="1">
+                <a:solidFill>
+                  <a:srgbClr val="D8DEF0"/>
                 </a:solidFill>
                 <a:latin typeface="Calibri"/>
               </a:rPr>
-              <a:t>쿠팡은 문지기(Akamai)가 "이 손님이 사람인지 로봇인지" 5단계로 검사한다</a:t>
-            </a:r>
-          </a:p>
-        </p:txBody>
-      </p:sp>
-      <p:sp>
-        <p:nvSpPr>
-          <p:cNvPr id="5" name="Rounded Rectangle 4"/>
+              <a:t>쿠팡은 Akamai 봇 탐지 시스템이 5단계로 "사람인지 로봇인지" 검사한다</a:t>
+            </a:r>
+          </a:p>
+        </p:txBody>
+      </p:sp>
+      <p:sp>
+        <p:nvSpPr>
+          <p:cNvPr id="5" name="Rectangle 4"/>
           <p:cNvSpPr/>
           <p:nvPr/>
         </p:nvSpPr>
@@ -5416,10 +5534,8 @@
             <a:off x="640080" y="1828800"/>
             <a:ext cx="5303520" cy="4206240"/>
           </a:xfrm>
-          <a:prstGeom prst="roundRect">
-            <a:avLst>
-              <a:gd name="adj" fmla="val 5000"/>
-            </a:avLst>
+          <a:prstGeom prst="rect">
+            <a:avLst/>
           </a:prstGeom>
           <a:solidFill>
             <a:srgbClr val="283370"/>
@@ -5475,13 +5591,13 @@
           <a:p>
             <a:pPr algn="l"/>
             <a:r>
-              <a:rPr sz="1700" b="1" i="0">
-                <a:solidFill>
-                  <a:srgbClr val="F96167"/>
+              <a:rPr sz="1600" b="1" i="0">
+                <a:solidFill>
+                  <a:srgbClr val="FFFFFF"/>
                 </a:solidFill>
                 <a:latin typeface="Calibri"/>
               </a:rPr>
-              <a:t>왜 막혔나</a:t>
+              <a:t>문제 — 왜 막혔나</a:t>
             </a:r>
           </a:p>
         </p:txBody>
@@ -5514,9 +5630,9 @@
               </a:spcAft>
             </a:pPr>
             <a:r>
-              <a:rPr sz="1400">
-                <a:solidFill>
-                  <a:srgbClr val="FFFFFF"/>
+              <a:rPr sz="1350">
+                <a:solidFill>
+                  <a:srgbClr val="D8DEF0"/>
                 </a:solidFill>
                 <a:latin typeface="Calibri"/>
               </a:rPr>
@@ -5530,9 +5646,9 @@
               </a:spcAft>
             </a:pPr>
             <a:r>
-              <a:rPr sz="1400">
-                <a:solidFill>
-                  <a:srgbClr val="FFFFFF"/>
+              <a:rPr sz="1350">
+                <a:solidFill>
+                  <a:srgbClr val="D8DEF0"/>
                 </a:solidFill>
                 <a:latin typeface="Calibri"/>
               </a:rPr>
@@ -5547,9 +5663,9 @@
               </a:spcAft>
             </a:pPr>
             <a:r>
-              <a:rPr sz="1400">
-                <a:solidFill>
-                  <a:srgbClr val="FFFFFF"/>
+              <a:rPr sz="1350">
+                <a:solidFill>
+                  <a:srgbClr val="D8DEF0"/>
                 </a:solidFill>
                 <a:latin typeface="Calibri"/>
               </a:rPr>
@@ -5561,7 +5677,7 @@
       </p:sp>
       <p:sp>
         <p:nvSpPr>
-          <p:cNvPr id="8" name="Rounded Rectangle 7"/>
+          <p:cNvPr id="8" name="Rectangle 7"/>
           <p:cNvSpPr/>
           <p:nvPr/>
         </p:nvSpPr>
@@ -5570,13 +5686,11 @@
             <a:off x="6217920" y="1828800"/>
             <a:ext cx="5303520" cy="4206240"/>
           </a:xfrm>
-          <a:prstGeom prst="roundRect">
-            <a:avLst>
-              <a:gd name="adj" fmla="val 5000"/>
-            </a:avLst>
+          <a:prstGeom prst="rect">
+            <a:avLst/>
           </a:prstGeom>
           <a:solidFill>
-            <a:srgbClr val="F96167"/>
+            <a:srgbClr val="283370"/>
           </a:solidFill>
           <a:ln>
             <a:noFill/>
@@ -5629,13 +5743,13 @@
           <a:p>
             <a:pPr algn="l"/>
             <a:r>
-              <a:rPr sz="1700" b="1" i="0">
+              <a:rPr sz="1600" b="1" i="0">
                 <a:solidFill>
                   <a:srgbClr val="FFFFFF"/>
                 </a:solidFill>
                 <a:latin typeface="Calibri"/>
               </a:rPr>
-              <a:t>어떻게 뚫었나 — "진짜 손님" 행세</a:t>
+              <a:t>해결 — "진짜 손님" 행세</a:t>
             </a:r>
           </a:p>
         </p:txBody>
@@ -5668,9 +5782,9 @@
               </a:spcAft>
             </a:pPr>
             <a:r>
-              <a:rPr sz="1400">
-                <a:solidFill>
-                  <a:srgbClr val="FFFFFF"/>
+              <a:rPr sz="1350">
+                <a:solidFill>
+                  <a:srgbClr val="D8DEF0"/>
                 </a:solidFill>
                 <a:latin typeface="Calibri"/>
               </a:rPr>
@@ -5685,9 +5799,9 @@
               </a:spcAft>
             </a:pPr>
             <a:r>
-              <a:rPr sz="1400">
-                <a:solidFill>
-                  <a:srgbClr val="FFFFFF"/>
+              <a:rPr sz="1350">
+                <a:solidFill>
+                  <a:srgbClr val="D8DEF0"/>
                 </a:solidFill>
                 <a:latin typeface="Calibri"/>
               </a:rPr>
@@ -5702,9 +5816,9 @@
               </a:spcAft>
             </a:pPr>
             <a:r>
-              <a:rPr sz="1400">
-                <a:solidFill>
-                  <a:srgbClr val="FFFFFF"/>
+              <a:rPr sz="1350">
+                <a:solidFill>
+                  <a:srgbClr val="D8DEF0"/>
                 </a:solidFill>
                 <a:latin typeface="Calibri"/>
               </a:rPr>
@@ -5738,13 +5852,13 @@
           <a:p>
             <a:pPr algn="ctr"/>
             <a:r>
-              <a:rPr sz="1250" b="0" i="1">
-                <a:solidFill>
-                  <a:srgbClr val="CADCFC"/>
+              <a:rPr sz="1200" b="0" i="1">
+                <a:solidFill>
+                  <a:srgbClr val="D8DEF0"/>
                 </a:solidFill>
                 <a:latin typeface="Calibri"/>
               </a:rPr>
-              <a:t>핵심: 자동화 도구를 "새로 띄우는" 게 아니라, 이미 로그인된 실제 브라우저에 "숟가락만 얹는" 방식이라 자동화 흔적 자체가 없다</a:t>
+              <a:t>핵심: 자동화 도구를 새로 띄우는 게 아니라, 이미 로그인된 실제 브라우저에 "숟가락만 얹는" 방식이라 자동화 흔적 자체가 없다</a:t>
             </a:r>
           </a:p>
         </p:txBody>
@@ -5835,35 +5949,33 @@
           <a:p>
             <a:pPr algn="l"/>
             <a:r>
-              <a:rPr sz="2800" b="1" i="0">
+              <a:rPr sz="2600" b="1" i="0">
                 <a:solidFill>
                   <a:srgbClr val="1E2761"/>
                 </a:solidFill>
                 <a:latin typeface="Georgia"/>
               </a:rPr>
-              <a:t>데이터 준비 — 가장 까다로웠던 단계</a:t>
-            </a:r>
-          </a:p>
-        </p:txBody>
-      </p:sp>
-      <p:sp>
-        <p:nvSpPr>
-          <p:cNvPr id="4" name="Rounded Rectangle 3"/>
+              <a:t>데이터 준비 — 무엇이 문제였고 어떻게 풀었나</a:t>
+            </a:r>
+          </a:p>
+        </p:txBody>
+      </p:sp>
+      <p:sp>
+        <p:nvSpPr>
+          <p:cNvPr id="4" name="Rectangle 3"/>
           <p:cNvSpPr/>
           <p:nvPr/>
         </p:nvSpPr>
         <p:spPr>
           <a:xfrm>
-            <a:off x="640080" y="1554480"/>
-            <a:ext cx="10881360" cy="1417320"/>
-          </a:xfrm>
-          <a:prstGeom prst="roundRect">
-            <a:avLst>
-              <a:gd name="adj" fmla="val 6000"/>
-            </a:avLst>
+            <a:off x="640080" y="1463040"/>
+            <a:ext cx="10881360" cy="1508760"/>
+          </a:xfrm>
+          <a:prstGeom prst="rect">
+            <a:avLst/>
           </a:prstGeom>
           <a:solidFill>
-            <a:srgbClr val="F4F6FC"/>
+            <a:srgbClr val="F5F6FA"/>
           </a:solidFill>
           <a:ln>
             <a:noFill/>
@@ -5894,22 +6006,20 @@
       </p:sp>
       <p:sp>
         <p:nvSpPr>
-          <p:cNvPr id="5" name="Rounded Rectangle 4"/>
+          <p:cNvPr id="5" name="Rectangle 4"/>
           <p:cNvSpPr/>
           <p:nvPr/>
         </p:nvSpPr>
         <p:spPr>
           <a:xfrm>
-            <a:off x="868680" y="1755648"/>
-            <a:ext cx="2743200" cy="438912"/>
-          </a:xfrm>
-          <a:prstGeom prst="roundRect">
-            <a:avLst>
-              <a:gd name="adj" fmla="val 50000"/>
-            </a:avLst>
+            <a:off x="640080" y="1463040"/>
+            <a:ext cx="64008" cy="1508760"/>
+          </a:xfrm>
+          <a:prstGeom prst="rect">
+            <a:avLst/>
           </a:prstGeom>
           <a:solidFill>
-            <a:srgbClr val="F96167"/>
+            <a:srgbClr val="B85A4D"/>
           </a:solidFill>
           <a:ln>
             <a:noFill/>
@@ -5931,117 +6041,31 @@
           </a:fontRef>
         </p:style>
         <p:txBody>
-          <a:bodyPr rtlCol="0" anchor="ctr" wrap="none" lIns="45720" rIns="45720" tIns="0" bIns="0"/>
+          <a:bodyPr rtlCol="0" anchor="ctr"/>
           <a:lstStyle/>
           <a:p>
             <a:pPr algn="ctr"/>
-            <a:r>
-              <a:rPr sz="1300" b="1">
-                <a:solidFill>
-                  <a:srgbClr val="FFFFFF"/>
-                </a:solidFill>
-              </a:rPr>
-              <a:t>라벨 기준 불일치 (핵심)</a:t>
-            </a:r>
-          </a:p>
-        </p:txBody>
-      </p:sp>
-      <p:sp>
-        <p:nvSpPr>
-          <p:cNvPr id="6" name="TextBox 5"/>
-          <p:cNvSpPr txBox="1"/>
-          <p:nvPr/>
-        </p:nvSpPr>
-        <p:spPr>
-          <a:xfrm>
-            <a:off x="3794760" y="1691639"/>
-            <a:ext cx="3520440" cy="1143000"/>
-          </a:xfrm>
-          <a:prstGeom prst="rect">
-            <a:avLst/>
-          </a:prstGeom>
-          <a:noFill/>
-        </p:spPr>
-        <p:txBody>
-          <a:bodyPr wrap="square" anchor="t" lIns="0" rIns="0" tIns="0" bIns="0">
-            <a:spAutoFit/>
-          </a:bodyPr>
-          <a:lstStyle/>
-          <a:p>
-            <a:pPr algn="l">
-              <a:lnSpc>
-                <a:spcPct val="125000"/>
-              </a:lnSpc>
-            </a:pPr>
-            <a:r>
-              <a:rPr sz="1300" b="0" i="0">
-                <a:solidFill>
-                  <a:srgbClr val="555A6E"/>
-                </a:solidFill>
-                <a:latin typeface="Calibri"/>
-              </a:rPr>
-              <a:t>무신사 sentiment가 별점 아닌 텍스트분석 기반 → 5점 리뷰의 21%가 '부정'</a:t>
-            </a:r>
-          </a:p>
-        </p:txBody>
-      </p:sp>
-      <p:sp>
-        <p:nvSpPr>
-          <p:cNvPr id="7" name="TextBox 6"/>
-          <p:cNvSpPr txBox="1"/>
-          <p:nvPr/>
-        </p:nvSpPr>
-        <p:spPr>
-          <a:xfrm>
-            <a:off x="7452360" y="1691639"/>
-            <a:ext cx="3931920" cy="1143000"/>
-          </a:xfrm>
-          <a:prstGeom prst="rect">
-            <a:avLst/>
-          </a:prstGeom>
-          <a:noFill/>
-        </p:spPr>
-        <p:txBody>
-          <a:bodyPr wrap="square" anchor="t" lIns="0" rIns="0" tIns="0" bIns="0">
-            <a:spAutoFit/>
-          </a:bodyPr>
-          <a:lstStyle/>
-          <a:p>
-            <a:pPr algn="l">
-              <a:lnSpc>
-                <a:spcPct val="125000"/>
-              </a:lnSpc>
-            </a:pPr>
-            <a:r>
-              <a:rPr sz="1300" b="1" i="0">
-                <a:solidFill>
-                  <a:srgbClr val="1E2761"/>
-                </a:solidFill>
-                <a:latin typeface="Calibri"/>
-              </a:rPr>
-              <a:t>해결 → 전체 데이터의 sentiment를 별점에서 일괄 재계산</a:t>
-            </a:r>
-          </a:p>
-        </p:txBody>
-      </p:sp>
-      <p:sp>
-        <p:nvSpPr>
-          <p:cNvPr id="8" name="Rounded Rectangle 7"/>
+          </a:p>
+        </p:txBody>
+      </p:sp>
+      <p:sp>
+        <p:nvSpPr>
+          <p:cNvPr id="6" name="Rounded Rectangle 5"/>
           <p:cNvSpPr/>
           <p:nvPr/>
         </p:nvSpPr>
         <p:spPr>
           <a:xfrm>
-            <a:off x="640080" y="3154680"/>
-            <a:ext cx="10881360" cy="1417320"/>
+            <a:off x="868680" y="1664208"/>
+            <a:ext cx="2834640" cy="457200"/>
           </a:xfrm>
           <a:prstGeom prst="roundRect">
             <a:avLst>
-              <a:gd name="adj" fmla="val 6000"/>
+              <a:gd name="adj" fmla="val 50000"/>
             </a:avLst>
           </a:prstGeom>
           <a:solidFill>
-            <a:srgbClr val="F4F6FC"/>
+            <a:srgbClr val="1E2761"/>
           </a:solidFill>
           <a:ln>
             <a:noFill/>
@@ -6063,31 +6087,217 @@
           </a:fontRef>
         </p:style>
         <p:txBody>
-          <a:bodyPr rtlCol="0" anchor="ctr"/>
+          <a:bodyPr rtlCol="0" anchor="ctr" wrap="none" lIns="45720" rIns="45720" tIns="0" bIns="0"/>
           <a:lstStyle/>
           <a:p>
             <a:pPr algn="ctr"/>
-          </a:p>
-        </p:txBody>
-      </p:sp>
-      <p:sp>
-        <p:nvSpPr>
-          <p:cNvPr id="9" name="Rounded Rectangle 8"/>
+            <a:r>
+              <a:rPr sz="1250" b="1">
+                <a:solidFill>
+                  <a:srgbClr val="FFFFFF"/>
+                </a:solidFill>
+              </a:rPr>
+              <a:t>긍정 리뷰가 너무 많음</a:t>
+            </a:r>
+          </a:p>
+        </p:txBody>
+      </p:sp>
+      <p:sp>
+        <p:nvSpPr>
+          <p:cNvPr id="7" name="TextBox 6"/>
+          <p:cNvSpPr txBox="1"/>
+          <p:nvPr/>
+        </p:nvSpPr>
+        <p:spPr>
+          <a:xfrm>
+            <a:off x="3931920" y="1627632"/>
+            <a:ext cx="914400" cy="274320"/>
+          </a:xfrm>
+          <a:prstGeom prst="rect">
+            <a:avLst/>
+          </a:prstGeom>
+          <a:noFill/>
+        </p:spPr>
+        <p:txBody>
+          <a:bodyPr wrap="square" anchor="t" lIns="0" rIns="0" tIns="0" bIns="0">
+            <a:spAutoFit/>
+          </a:bodyPr>
+          <a:lstStyle/>
+          <a:p>
+            <a:pPr algn="l"/>
+            <a:r>
+              <a:rPr sz="1050" b="1" i="0">
+                <a:solidFill>
+                  <a:srgbClr val="B85A4D"/>
+                </a:solidFill>
+                <a:latin typeface="Calibri"/>
+              </a:rPr>
+              <a:t>문제</a:t>
+            </a:r>
+          </a:p>
+        </p:txBody>
+      </p:sp>
+      <p:sp>
+        <p:nvSpPr>
+          <p:cNvPr id="8" name="TextBox 7"/>
+          <p:cNvSpPr txBox="1"/>
+          <p:nvPr/>
+        </p:nvSpPr>
+        <p:spPr>
+          <a:xfrm>
+            <a:off x="3931920" y="1920240"/>
+            <a:ext cx="3291840" cy="960120"/>
+          </a:xfrm>
+          <a:prstGeom prst="rect">
+            <a:avLst/>
+          </a:prstGeom>
+          <a:noFill/>
+        </p:spPr>
+        <p:txBody>
+          <a:bodyPr wrap="square" anchor="t" lIns="0" rIns="0" tIns="0" bIns="0">
+            <a:spAutoFit/>
+          </a:bodyPr>
+          <a:lstStyle/>
+          <a:p>
+            <a:pPr algn="l">
+              <a:lnSpc>
+                <a:spcPct val="120000"/>
+              </a:lnSpc>
+            </a:pPr>
+            <a:r>
+              <a:rPr sz="1150" b="0" i="0">
+                <a:solidFill>
+                  <a:srgbClr val="21295C"/>
+                </a:solidFill>
+                <a:latin typeface="Calibri"/>
+              </a:rPr>
+              <a:t>전체 리뷰의 87%가 긍정이라, 모델이 아무 생각 없이</a:t>
+            </a:r>
+          </a:p>
+          <a:p>
+            <a:pPr algn="l">
+              <a:lnSpc>
+                <a:spcPct val="120000"/>
+              </a:lnSpc>
+            </a:pPr>
+            <a:r>
+              <a:rPr sz="1150" b="0" i="0">
+                <a:solidFill>
+                  <a:srgbClr val="21295C"/>
+                </a:solidFill>
+                <a:latin typeface="Calibri"/>
+              </a:rPr>
+              <a:t>"다 긍정"이라고만 찍어도 87% 맞는 셈이 됨</a:t>
+            </a:r>
+          </a:p>
+        </p:txBody>
+      </p:sp>
+      <p:sp>
+        <p:nvSpPr>
+          <p:cNvPr id="9" name="TextBox 8"/>
+          <p:cNvSpPr txBox="1"/>
+          <p:nvPr/>
+        </p:nvSpPr>
+        <p:spPr>
+          <a:xfrm>
+            <a:off x="7452360" y="1627632"/>
+            <a:ext cx="914400" cy="274320"/>
+          </a:xfrm>
+          <a:prstGeom prst="rect">
+            <a:avLst/>
+          </a:prstGeom>
+          <a:noFill/>
+        </p:spPr>
+        <p:txBody>
+          <a:bodyPr wrap="square" anchor="t" lIns="0" rIns="0" tIns="0" bIns="0">
+            <a:spAutoFit/>
+          </a:bodyPr>
+          <a:lstStyle/>
+          <a:p>
+            <a:pPr algn="l"/>
+            <a:r>
+              <a:rPr sz="1050" b="1" i="0">
+                <a:solidFill>
+                  <a:srgbClr val="B85A4D"/>
+                </a:solidFill>
+                <a:latin typeface="Calibri"/>
+              </a:rPr>
+              <a:t>해결</a:t>
+            </a:r>
+          </a:p>
+        </p:txBody>
+      </p:sp>
+      <p:sp>
+        <p:nvSpPr>
+          <p:cNvPr id="10" name="TextBox 9"/>
+          <p:cNvSpPr txBox="1"/>
+          <p:nvPr/>
+        </p:nvSpPr>
+        <p:spPr>
+          <a:xfrm>
+            <a:off x="7452360" y="1920240"/>
+            <a:ext cx="3931920" cy="960120"/>
+          </a:xfrm>
+          <a:prstGeom prst="rect">
+            <a:avLst/>
+          </a:prstGeom>
+          <a:noFill/>
+        </p:spPr>
+        <p:txBody>
+          <a:bodyPr wrap="square" anchor="t" lIns="0" rIns="0" tIns="0" bIns="0">
+            <a:spAutoFit/>
+          </a:bodyPr>
+          <a:lstStyle/>
+          <a:p>
+            <a:pPr algn="l">
+              <a:lnSpc>
+                <a:spcPct val="120000"/>
+              </a:lnSpc>
+            </a:pPr>
+            <a:r>
+              <a:rPr sz="1150" b="0" i="0">
+                <a:solidFill>
+                  <a:srgbClr val="21295C"/>
+                </a:solidFill>
+                <a:latin typeface="Calibri"/>
+              </a:rPr>
+              <a:t>부정·중립 리뷰는 그대로 두고, 긍정 리뷰만 솎아내서</a:t>
+            </a:r>
+          </a:p>
+          <a:p>
+            <a:pPr algn="l">
+              <a:lnSpc>
+                <a:spcPct val="120000"/>
+              </a:lnSpc>
+            </a:pPr>
+            <a:r>
+              <a:rPr sz="1150" b="0" i="0">
+                <a:solidFill>
+                  <a:srgbClr val="21295C"/>
+                </a:solidFill>
+                <a:latin typeface="Calibri"/>
+              </a:rPr>
+              <a:t>세 감성의 비율을 맞춤</a:t>
+            </a:r>
+          </a:p>
+        </p:txBody>
+      </p:sp>
+      <p:sp>
+        <p:nvSpPr>
+          <p:cNvPr id="11" name="Rectangle 10"/>
           <p:cNvSpPr/>
           <p:nvPr/>
         </p:nvSpPr>
         <p:spPr>
           <a:xfrm>
-            <a:off x="868680" y="3355848"/>
-            <a:ext cx="2743200" cy="438912"/>
-          </a:xfrm>
-          <a:prstGeom prst="roundRect">
-            <a:avLst>
-              <a:gd name="adj" fmla="val 50000"/>
-            </a:avLst>
+            <a:off x="640080" y="3108960"/>
+            <a:ext cx="10881360" cy="1508760"/>
+          </a:xfrm>
+          <a:prstGeom prst="rect">
+            <a:avLst/>
           </a:prstGeom>
           <a:solidFill>
-            <a:srgbClr val="F96167"/>
+            <a:srgbClr val="F5F6FA"/>
           </a:solidFill>
           <a:ln>
             <a:noFill/>
@@ -6109,117 +6319,29 @@
           </a:fontRef>
         </p:style>
         <p:txBody>
-          <a:bodyPr rtlCol="0" anchor="ctr" wrap="none" lIns="45720" rIns="45720" tIns="0" bIns="0"/>
+          <a:bodyPr rtlCol="0" anchor="ctr"/>
           <a:lstStyle/>
           <a:p>
             <a:pPr algn="ctr"/>
-            <a:r>
-              <a:rPr sz="1300" b="1">
-                <a:solidFill>
-                  <a:srgbClr val="FFFFFF"/>
-                </a:solidFill>
-              </a:rPr>
-              <a:t>클래스 불균형</a:t>
-            </a:r>
-          </a:p>
-        </p:txBody>
-      </p:sp>
-      <p:sp>
-        <p:nvSpPr>
-          <p:cNvPr id="10" name="TextBox 9"/>
-          <p:cNvSpPr txBox="1"/>
-          <p:nvPr/>
-        </p:nvSpPr>
-        <p:spPr>
-          <a:xfrm>
-            <a:off x="3794760" y="3291840"/>
-            <a:ext cx="3520440" cy="1143000"/>
-          </a:xfrm>
-          <a:prstGeom prst="rect">
-            <a:avLst/>
-          </a:prstGeom>
-          <a:noFill/>
-        </p:spPr>
-        <p:txBody>
-          <a:bodyPr wrap="square" anchor="t" lIns="0" rIns="0" tIns="0" bIns="0">
-            <a:spAutoFit/>
-          </a:bodyPr>
-          <a:lstStyle/>
-          <a:p>
-            <a:pPr algn="l">
-              <a:lnSpc>
-                <a:spcPct val="125000"/>
-              </a:lnSpc>
-            </a:pPr>
-            <a:r>
-              <a:rPr sz="1300" b="0" i="0">
-                <a:solidFill>
-                  <a:srgbClr val="555A6E"/>
-                </a:solidFill>
-                <a:latin typeface="Calibri"/>
-              </a:rPr>
-              <a:t>긍정 86.7% — 그대로 학습하면 다 긍정 찍어도 86% 정확도</a:t>
-            </a:r>
-          </a:p>
-        </p:txBody>
-      </p:sp>
-      <p:sp>
-        <p:nvSpPr>
-          <p:cNvPr id="11" name="TextBox 10"/>
-          <p:cNvSpPr txBox="1"/>
-          <p:nvPr/>
-        </p:nvSpPr>
-        <p:spPr>
-          <a:xfrm>
-            <a:off x="7452360" y="3291840"/>
-            <a:ext cx="3931920" cy="1143000"/>
-          </a:xfrm>
-          <a:prstGeom prst="rect">
-            <a:avLst/>
-          </a:prstGeom>
-          <a:noFill/>
-        </p:spPr>
-        <p:txBody>
-          <a:bodyPr wrap="square" anchor="t" lIns="0" rIns="0" tIns="0" bIns="0">
-            <a:spAutoFit/>
-          </a:bodyPr>
-          <a:lstStyle/>
-          <a:p>
-            <a:pPr algn="l">
-              <a:lnSpc>
-                <a:spcPct val="125000"/>
-              </a:lnSpc>
-            </a:pPr>
-            <a:r>
-              <a:rPr sz="1300" b="1" i="0">
-                <a:solidFill>
-                  <a:srgbClr val="1E2761"/>
-                </a:solidFill>
-                <a:latin typeface="Calibri"/>
-              </a:rPr>
-              <a:t>해결 → 부정/중립 전량 + 긍정은 2배 규모로만 다운샘플링</a:t>
-            </a:r>
-          </a:p>
-        </p:txBody>
-      </p:sp>
-      <p:sp>
-        <p:nvSpPr>
-          <p:cNvPr id="12" name="Rounded Rectangle 11"/>
+          </a:p>
+        </p:txBody>
+      </p:sp>
+      <p:sp>
+        <p:nvSpPr>
+          <p:cNvPr id="12" name="Rectangle 11"/>
           <p:cNvSpPr/>
           <p:nvPr/>
         </p:nvSpPr>
         <p:spPr>
           <a:xfrm>
-            <a:off x="640080" y="4754880"/>
-            <a:ext cx="10881360" cy="1417320"/>
-          </a:xfrm>
-          <a:prstGeom prst="roundRect">
-            <a:avLst>
-              <a:gd name="adj" fmla="val 6000"/>
-            </a:avLst>
+            <a:off x="640080" y="3108960"/>
+            <a:ext cx="64008" cy="1508760"/>
+          </a:xfrm>
+          <a:prstGeom prst="rect">
+            <a:avLst/>
           </a:prstGeom>
           <a:solidFill>
-            <a:srgbClr val="F4F6FC"/>
+            <a:srgbClr val="B85A4D"/>
           </a:solidFill>
           <a:ln>
             <a:noFill/>
@@ -6256,8 +6378,8 @@
         </p:nvSpPr>
         <p:spPr>
           <a:xfrm>
-            <a:off x="868680" y="4956048"/>
-            <a:ext cx="2743200" cy="438912"/>
+            <a:off x="868680" y="3310128"/>
+            <a:ext cx="2834640" cy="457200"/>
           </a:xfrm>
           <a:prstGeom prst="roundRect">
             <a:avLst>
@@ -6265,7 +6387,7 @@
             </a:avLst>
           </a:prstGeom>
           <a:solidFill>
-            <a:srgbClr val="F96167"/>
+            <a:srgbClr val="1E2761"/>
           </a:solidFill>
           <a:ln>
             <a:noFill/>
@@ -6292,12 +6414,12 @@
           <a:p>
             <a:pPr algn="ctr"/>
             <a:r>
-              <a:rPr sz="1300" b="1">
+              <a:rPr sz="1250" b="1">
                 <a:solidFill>
                   <a:srgbClr val="FFFFFF"/>
                 </a:solidFill>
               </a:rPr>
-              <a:t>불용어/형태소 미처리</a:t>
+              <a:t>문장이 토막 나서 분석됨</a:t>
             </a:r>
           </a:p>
         </p:txBody>
@@ -6310,8 +6432,8 @@
         </p:nvSpPr>
         <p:spPr>
           <a:xfrm>
-            <a:off x="3794760" y="4892040"/>
-            <a:ext cx="3520440" cy="1143000"/>
+            <a:off x="3931920" y="3273552"/>
+            <a:ext cx="914400" cy="274320"/>
           </a:xfrm>
           <a:prstGeom prst="rect">
             <a:avLst/>
@@ -6324,19 +6446,15 @@
           </a:bodyPr>
           <a:lstStyle/>
           <a:p>
-            <a:pPr algn="l">
-              <a:lnSpc>
-                <a:spcPct val="125000"/>
-              </a:lnSpc>
-            </a:pPr>
-            <a:r>
-              <a:rPr sz="1300" b="0" i="0">
-                <a:solidFill>
-                  <a:srgbClr val="555A6E"/>
+            <a:pPr algn="l"/>
+            <a:r>
+              <a:rPr sz="1050" b="1" i="0">
+                <a:solidFill>
+                  <a:srgbClr val="B85A4D"/>
                 </a:solidFill>
                 <a:latin typeface="Calibri"/>
               </a:rPr>
-              <a:t>정규식으로만 잘라서 조사가 토큰에 섞임 ("좋아요"≠"좋아서")</a:t>
+              <a:t>문제</a:t>
             </a:r>
           </a:p>
         </p:txBody>
@@ -6349,8 +6467,8 @@
         </p:nvSpPr>
         <p:spPr>
           <a:xfrm>
-            <a:off x="7452360" y="4892040"/>
-            <a:ext cx="3931920" cy="1143000"/>
+            <a:off x="3931920" y="3566160"/>
+            <a:ext cx="3291840" cy="960120"/>
           </a:xfrm>
           <a:prstGeom prst="rect">
             <a:avLst/>
@@ -6365,17 +6483,445 @@
           <a:p>
             <a:pPr algn="l">
               <a:lnSpc>
-                <a:spcPct val="125000"/>
+                <a:spcPct val="120000"/>
               </a:lnSpc>
             </a:pPr>
             <a:r>
-              <a:rPr sz="1300" b="1" i="0">
-                <a:solidFill>
-                  <a:srgbClr val="1E2761"/>
+              <a:rPr sz="1150" b="0" i="0">
+                <a:solidFill>
+                  <a:srgbClr val="21295C"/>
                 </a:solidFill>
                 <a:latin typeface="Calibri"/>
               </a:rPr>
-              <a:t>해결 → Okt 형태소분석 + 어간정규화 + 불용어 제거</a:t>
+              <a:t>리뷰를 한글자씩/공백 기준으로만 잘라서 "좋아요"와</a:t>
+            </a:r>
+          </a:p>
+          <a:p>
+            <a:pPr algn="l">
+              <a:lnSpc>
+                <a:spcPct val="120000"/>
+              </a:lnSpc>
+            </a:pPr>
+            <a:r>
+              <a:rPr sz="1150" b="0" i="0">
+                <a:solidFill>
+                  <a:srgbClr val="21295C"/>
+                </a:solidFill>
+                <a:latin typeface="Calibri"/>
+              </a:rPr>
+              <a:t>"좋아서"를 완전히 다른 단어로 인식함</a:t>
+            </a:r>
+          </a:p>
+        </p:txBody>
+      </p:sp>
+      <p:sp>
+        <p:nvSpPr>
+          <p:cNvPr id="16" name="TextBox 15"/>
+          <p:cNvSpPr txBox="1"/>
+          <p:nvPr/>
+        </p:nvSpPr>
+        <p:spPr>
+          <a:xfrm>
+            <a:off x="7452360" y="3273552"/>
+            <a:ext cx="914400" cy="274320"/>
+          </a:xfrm>
+          <a:prstGeom prst="rect">
+            <a:avLst/>
+          </a:prstGeom>
+          <a:noFill/>
+        </p:spPr>
+        <p:txBody>
+          <a:bodyPr wrap="square" anchor="t" lIns="0" rIns="0" tIns="0" bIns="0">
+            <a:spAutoFit/>
+          </a:bodyPr>
+          <a:lstStyle/>
+          <a:p>
+            <a:pPr algn="l"/>
+            <a:r>
+              <a:rPr sz="1050" b="1" i="0">
+                <a:solidFill>
+                  <a:srgbClr val="B85A4D"/>
+                </a:solidFill>
+                <a:latin typeface="Calibri"/>
+              </a:rPr>
+              <a:t>해결</a:t>
+            </a:r>
+          </a:p>
+        </p:txBody>
+      </p:sp>
+      <p:sp>
+        <p:nvSpPr>
+          <p:cNvPr id="17" name="TextBox 16"/>
+          <p:cNvSpPr txBox="1"/>
+          <p:nvPr/>
+        </p:nvSpPr>
+        <p:spPr>
+          <a:xfrm>
+            <a:off x="7452360" y="3566160"/>
+            <a:ext cx="3931920" cy="960120"/>
+          </a:xfrm>
+          <a:prstGeom prst="rect">
+            <a:avLst/>
+          </a:prstGeom>
+          <a:noFill/>
+        </p:spPr>
+        <p:txBody>
+          <a:bodyPr wrap="square" anchor="t" lIns="0" rIns="0" tIns="0" bIns="0">
+            <a:spAutoFit/>
+          </a:bodyPr>
+          <a:lstStyle/>
+          <a:p>
+            <a:pPr algn="l">
+              <a:lnSpc>
+                <a:spcPct val="120000"/>
+              </a:lnSpc>
+            </a:pPr>
+            <a:r>
+              <a:rPr sz="1150" b="0" i="0">
+                <a:solidFill>
+                  <a:srgbClr val="21295C"/>
+                </a:solidFill>
+                <a:latin typeface="Calibri"/>
+              </a:rPr>
+              <a:t>형태소 분석기로 단어의 "원래 형태"를 찾아내고,</a:t>
+            </a:r>
+          </a:p>
+          <a:p>
+            <a:pPr algn="l">
+              <a:lnSpc>
+                <a:spcPct val="120000"/>
+              </a:lnSpc>
+            </a:pPr>
+            <a:r>
+              <a:rPr sz="1150" b="0" i="0">
+                <a:solidFill>
+                  <a:srgbClr val="21295C"/>
+                </a:solidFill>
+                <a:latin typeface="Calibri"/>
+              </a:rPr>
+              <a:t>의미 없는 조사·어미와 불필요한 단어를 제거</a:t>
+            </a:r>
+          </a:p>
+        </p:txBody>
+      </p:sp>
+      <p:sp>
+        <p:nvSpPr>
+          <p:cNvPr id="18" name="Rectangle 17"/>
+          <p:cNvSpPr/>
+          <p:nvPr/>
+        </p:nvSpPr>
+        <p:spPr>
+          <a:xfrm>
+            <a:off x="640080" y="4754880"/>
+            <a:ext cx="10881360" cy="1508760"/>
+          </a:xfrm>
+          <a:prstGeom prst="rect">
+            <a:avLst/>
+          </a:prstGeom>
+          <a:solidFill>
+            <a:srgbClr val="F5F6FA"/>
+          </a:solidFill>
+          <a:ln>
+            <a:noFill/>
+          </a:ln>
+          <a:effectLst/>
+        </p:spPr>
+        <p:style>
+          <a:lnRef idx="1">
+            <a:schemeClr val="accent1"/>
+          </a:lnRef>
+          <a:fillRef idx="3">
+            <a:schemeClr val="accent1"/>
+          </a:fillRef>
+          <a:effectRef idx="2">
+            <a:schemeClr val="accent1"/>
+          </a:effectRef>
+          <a:fontRef idx="minor">
+            <a:schemeClr val="lt1"/>
+          </a:fontRef>
+        </p:style>
+        <p:txBody>
+          <a:bodyPr rtlCol="0" anchor="ctr"/>
+          <a:lstStyle/>
+          <a:p>
+            <a:pPr algn="ctr"/>
+          </a:p>
+        </p:txBody>
+      </p:sp>
+      <p:sp>
+        <p:nvSpPr>
+          <p:cNvPr id="19" name="Rectangle 18"/>
+          <p:cNvSpPr/>
+          <p:nvPr/>
+        </p:nvSpPr>
+        <p:spPr>
+          <a:xfrm>
+            <a:off x="640080" y="4754880"/>
+            <a:ext cx="64008" cy="1508760"/>
+          </a:xfrm>
+          <a:prstGeom prst="rect">
+            <a:avLst/>
+          </a:prstGeom>
+          <a:solidFill>
+            <a:srgbClr val="B85A4D"/>
+          </a:solidFill>
+          <a:ln>
+            <a:noFill/>
+          </a:ln>
+          <a:effectLst/>
+        </p:spPr>
+        <p:style>
+          <a:lnRef idx="1">
+            <a:schemeClr val="accent1"/>
+          </a:lnRef>
+          <a:fillRef idx="3">
+            <a:schemeClr val="accent1"/>
+          </a:fillRef>
+          <a:effectRef idx="2">
+            <a:schemeClr val="accent1"/>
+          </a:effectRef>
+          <a:fontRef idx="minor">
+            <a:schemeClr val="lt1"/>
+          </a:fontRef>
+        </p:style>
+        <p:txBody>
+          <a:bodyPr rtlCol="0" anchor="ctr"/>
+          <a:lstStyle/>
+          <a:p>
+            <a:pPr algn="ctr"/>
+          </a:p>
+        </p:txBody>
+      </p:sp>
+      <p:sp>
+        <p:nvSpPr>
+          <p:cNvPr id="20" name="Rounded Rectangle 19"/>
+          <p:cNvSpPr/>
+          <p:nvPr/>
+        </p:nvSpPr>
+        <p:spPr>
+          <a:xfrm>
+            <a:off x="868680" y="4956048"/>
+            <a:ext cx="2834640" cy="457200"/>
+          </a:xfrm>
+          <a:prstGeom prst="roundRect">
+            <a:avLst>
+              <a:gd name="adj" fmla="val 50000"/>
+            </a:avLst>
+          </a:prstGeom>
+          <a:solidFill>
+            <a:srgbClr val="1E2761"/>
+          </a:solidFill>
+          <a:ln>
+            <a:noFill/>
+          </a:ln>
+          <a:effectLst/>
+        </p:spPr>
+        <p:style>
+          <a:lnRef idx="1">
+            <a:schemeClr val="accent1"/>
+          </a:lnRef>
+          <a:fillRef idx="3">
+            <a:schemeClr val="accent1"/>
+          </a:fillRef>
+          <a:effectRef idx="2">
+            <a:schemeClr val="accent1"/>
+          </a:effectRef>
+          <a:fontRef idx="minor">
+            <a:schemeClr val="lt1"/>
+          </a:fontRef>
+        </p:style>
+        <p:txBody>
+          <a:bodyPr rtlCol="0" anchor="ctr" wrap="none" lIns="45720" rIns="45720" tIns="0" bIns="0"/>
+          <a:lstStyle/>
+          <a:p>
+            <a:pPr algn="ctr"/>
+            <a:r>
+              <a:rPr sz="1250" b="1">
+                <a:solidFill>
+                  <a:srgbClr val="FFFFFF"/>
+                </a:solidFill>
+              </a:rPr>
+              <a:t>같은 리뷰가 중복 수집됨</a:t>
+            </a:r>
+          </a:p>
+        </p:txBody>
+      </p:sp>
+      <p:sp>
+        <p:nvSpPr>
+          <p:cNvPr id="21" name="TextBox 20"/>
+          <p:cNvSpPr txBox="1"/>
+          <p:nvPr/>
+        </p:nvSpPr>
+        <p:spPr>
+          <a:xfrm>
+            <a:off x="3931920" y="4919472"/>
+            <a:ext cx="914400" cy="274320"/>
+          </a:xfrm>
+          <a:prstGeom prst="rect">
+            <a:avLst/>
+          </a:prstGeom>
+          <a:noFill/>
+        </p:spPr>
+        <p:txBody>
+          <a:bodyPr wrap="square" anchor="t" lIns="0" rIns="0" tIns="0" bIns="0">
+            <a:spAutoFit/>
+          </a:bodyPr>
+          <a:lstStyle/>
+          <a:p>
+            <a:pPr algn="l"/>
+            <a:r>
+              <a:rPr sz="1050" b="1" i="0">
+                <a:solidFill>
+                  <a:srgbClr val="B85A4D"/>
+                </a:solidFill>
+                <a:latin typeface="Calibri"/>
+              </a:rPr>
+              <a:t>문제</a:t>
+            </a:r>
+          </a:p>
+        </p:txBody>
+      </p:sp>
+      <p:sp>
+        <p:nvSpPr>
+          <p:cNvPr id="22" name="TextBox 21"/>
+          <p:cNvSpPr txBox="1"/>
+          <p:nvPr/>
+        </p:nvSpPr>
+        <p:spPr>
+          <a:xfrm>
+            <a:off x="3931920" y="5212080"/>
+            <a:ext cx="3291840" cy="960120"/>
+          </a:xfrm>
+          <a:prstGeom prst="rect">
+            <a:avLst/>
+          </a:prstGeom>
+          <a:noFill/>
+        </p:spPr>
+        <p:txBody>
+          <a:bodyPr wrap="square" anchor="t" lIns="0" rIns="0" tIns="0" bIns="0">
+            <a:spAutoFit/>
+          </a:bodyPr>
+          <a:lstStyle/>
+          <a:p>
+            <a:pPr algn="l">
+              <a:lnSpc>
+                <a:spcPct val="120000"/>
+              </a:lnSpc>
+            </a:pPr>
+            <a:r>
+              <a:rPr sz="1150" b="0" i="0">
+                <a:solidFill>
+                  <a:srgbClr val="21295C"/>
+                </a:solidFill>
+                <a:latin typeface="Calibri"/>
+              </a:rPr>
+              <a:t>크롤링을 여러 번 나눠서 진행하다 보니 같은 리뷰가</a:t>
+            </a:r>
+          </a:p>
+          <a:p>
+            <a:pPr algn="l">
+              <a:lnSpc>
+                <a:spcPct val="120000"/>
+              </a:lnSpc>
+            </a:pPr>
+            <a:r>
+              <a:rPr sz="1150" b="0" i="0">
+                <a:solidFill>
+                  <a:srgbClr val="21295C"/>
+                </a:solidFill>
+                <a:latin typeface="Calibri"/>
+              </a:rPr>
+              <a:t>두 번 이상 수집된 경우가 있었음</a:t>
+            </a:r>
+          </a:p>
+        </p:txBody>
+      </p:sp>
+      <p:sp>
+        <p:nvSpPr>
+          <p:cNvPr id="23" name="TextBox 22"/>
+          <p:cNvSpPr txBox="1"/>
+          <p:nvPr/>
+        </p:nvSpPr>
+        <p:spPr>
+          <a:xfrm>
+            <a:off x="7452360" y="4919472"/>
+            <a:ext cx="914400" cy="274320"/>
+          </a:xfrm>
+          <a:prstGeom prst="rect">
+            <a:avLst/>
+          </a:prstGeom>
+          <a:noFill/>
+        </p:spPr>
+        <p:txBody>
+          <a:bodyPr wrap="square" anchor="t" lIns="0" rIns="0" tIns="0" bIns="0">
+            <a:spAutoFit/>
+          </a:bodyPr>
+          <a:lstStyle/>
+          <a:p>
+            <a:pPr algn="l"/>
+            <a:r>
+              <a:rPr sz="1050" b="1" i="0">
+                <a:solidFill>
+                  <a:srgbClr val="B85A4D"/>
+                </a:solidFill>
+                <a:latin typeface="Calibri"/>
+              </a:rPr>
+              <a:t>해결</a:t>
+            </a:r>
+          </a:p>
+        </p:txBody>
+      </p:sp>
+      <p:sp>
+        <p:nvSpPr>
+          <p:cNvPr id="24" name="TextBox 23"/>
+          <p:cNvSpPr txBox="1"/>
+          <p:nvPr/>
+        </p:nvSpPr>
+        <p:spPr>
+          <a:xfrm>
+            <a:off x="7452360" y="5212080"/>
+            <a:ext cx="3931920" cy="960120"/>
+          </a:xfrm>
+          <a:prstGeom prst="rect">
+            <a:avLst/>
+          </a:prstGeom>
+          <a:noFill/>
+        </p:spPr>
+        <p:txBody>
+          <a:bodyPr wrap="square" anchor="t" lIns="0" rIns="0" tIns="0" bIns="0">
+            <a:spAutoFit/>
+          </a:bodyPr>
+          <a:lstStyle/>
+          <a:p>
+            <a:pPr algn="l">
+              <a:lnSpc>
+                <a:spcPct val="120000"/>
+              </a:lnSpc>
+            </a:pPr>
+            <a:r>
+              <a:rPr sz="1150" b="0" i="0">
+                <a:solidFill>
+                  <a:srgbClr val="21295C"/>
+                </a:solidFill>
+                <a:latin typeface="Calibri"/>
+              </a:rPr>
+              <a:t>상품·작성자·날짜·내용이 모두 같은 리뷰를 중복으로</a:t>
+            </a:r>
+          </a:p>
+          <a:p>
+            <a:pPr algn="l">
+              <a:lnSpc>
+                <a:spcPct val="120000"/>
+              </a:lnSpc>
+            </a:pPr>
+            <a:r>
+              <a:rPr sz="1150" b="0" i="0">
+                <a:solidFill>
+                  <a:srgbClr val="21295C"/>
+                </a:solidFill>
+                <a:latin typeface="Calibri"/>
+              </a:rPr>
+              <a:t>판단해 제거</a:t>
             </a:r>
           </a:p>
         </p:txBody>
@@ -6466,13 +7012,13 @@
           <a:p>
             <a:pPr algn="l"/>
             <a:r>
-              <a:rPr sz="2400" b="1" i="0">
+              <a:rPr sz="2800" b="1" i="0">
                 <a:solidFill>
                   <a:srgbClr val="1E2761"/>
                 </a:solidFill>
                 <a:latin typeface="Georgia"/>
               </a:rPr>
-              <a:t>AI 활용 &amp; 모델 — ML/DL/LSTM/Transformer 비교</a:t>
+              <a:t>모델 — 4가지를 비교했다</a:t>
             </a:r>
           </a:p>
         </p:txBody>
@@ -6485,8 +7031,8 @@
         </p:nvSpPr>
         <p:spPr>
           <a:xfrm>
-            <a:off x="640080" y="1371600"/>
-            <a:ext cx="10515600" cy="1554480"/>
+            <a:off x="640080" y="1188720"/>
+            <a:ext cx="10515600" cy="457200"/>
           </a:xfrm>
           <a:prstGeom prst="rect">
             <a:avLst/>
@@ -6494,75 +7040,555 @@
           <a:noFill/>
         </p:spPr>
         <p:txBody>
-          <a:bodyPr wrap="square">
+          <a:bodyPr wrap="square" anchor="t" lIns="0" rIns="0" tIns="0" bIns="0">
             <a:spAutoFit/>
           </a:bodyPr>
           <a:lstStyle/>
           <a:p>
-            <a:pPr>
-              <a:spcAft>
-                <a:spcPts val="800"/>
-              </a:spcAft>
-            </a:pPr>
-            <a:r>
-              <a:rPr sz="1450">
-                <a:solidFill>
-                  <a:srgbClr val="21295C"/>
+            <a:pPr algn="l"/>
+            <a:r>
+              <a:rPr sz="1350" b="0" i="0">
+                <a:solidFill>
+                  <a:srgbClr val="6B7280"/>
                 </a:solidFill>
                 <a:latin typeface="Calibri"/>
               </a:rPr>
-              <a:t>•  Claude Code와 페어 프로그래밍 — crosstab으로 라벨 불일치를 수치로 진단</a:t>
-            </a:r>
-          </a:p>
-          <a:p>
-            <a:pPr>
-              <a:spcAft>
-                <a:spcPts val="800"/>
-              </a:spcAft>
-            </a:pPr>
-            <a:r>
-              <a:rPr sz="1450">
-                <a:solidFill>
-                  <a:srgbClr val="21295C"/>
-                </a:solidFill>
-                <a:latin typeface="Calibri"/>
-              </a:rPr>
-              <a:t>•  환경 제약(Python 3.14, PyTorch 미설치) → numpy로 신경망 직접 구현,</a:t>
-            </a:r>
-          </a:p>
-          <a:p>
-            <a:pPr>
-              <a:spcAft>
-                <a:spcPts val="800"/>
-              </a:spcAft>
-            </a:pPr>
-            <a:r>
-              <a:rPr sz="1450">
-                <a:solidFill>
-                  <a:srgbClr val="21295C"/>
-                </a:solidFill>
-                <a:latin typeface="Calibri"/>
-              </a:rPr>
-              <a:t>•  이후 Python 3.11 별도 venv 구성해서 실제 LSTM·Transformer까지 검증</a:t>
+              <a:t>리뷰 텍스트를 긍정/중립/부정으로 분류하는 모델을 단순한 것부터 복잡한 것까지 비교했다</a:t>
             </a:r>
           </a:p>
         </p:txBody>
       </p:sp>
       <p:graphicFrame>
         <p:nvGraphicFramePr>
-          <p:cNvPr id="5" name="Chart 4"/>
+          <p:cNvPr id="5" name="Table 4"/>
           <p:cNvGraphicFramePr>
             <a:graphicFrameLocks noGrp="1"/>
           </p:cNvGraphicFramePr>
           <p:nvPr/>
         </p:nvGraphicFramePr>
         <p:xfrm>
-          <a:off x="640080" y="3017520"/>
-          <a:ext cx="6949440" cy="3383280"/>
+          <a:off x="640080" y="1828800"/>
+          <a:ext cx="10881360" cy="2834640"/>
         </p:xfrm>
         <a:graphic>
-          <a:graphicData uri="http://schemas.openxmlformats.org/drawingml/2006/chart">
-            <c:chart xmlns:c="http://schemas.openxmlformats.org/drawingml/2006/chart" r:id="rId2"/>
+          <a:graphicData uri="http://schemas.openxmlformats.org/drawingml/2006/table">
+            <a:tbl>
+              <a:tblPr firstRow="1" bandRow="1">
+                <a:tableStyleId>{5C22544A-7EE6-4342-B048-85BDC9FD1C3A}</a:tableStyleId>
+              </a:tblPr>
+              <a:tblGrid>
+                <a:gridCol w="2743200"/>
+                <a:gridCol w="5029200"/>
+                <a:gridCol w="1554480"/>
+                <a:gridCol w="1554480"/>
+              </a:tblGrid>
+              <a:tr h="566928">
+                <a:tc>
+                  <a:txBody>
+                    <a:bodyPr/>
+                    <a:lstStyle/>
+                    <a:p>
+                      <a:pPr algn="l"/>
+                      <a:r>
+                        <a:rPr sz="1250" b="1">
+                          <a:solidFill>
+                            <a:srgbClr val="FFFFFF"/>
+                          </a:solidFill>
+                          <a:latin typeface="Calibri"/>
+                        </a:rPr>
+                        <a:t>모델</a:t>
+                      </a:r>
+                    </a:p>
+                  </a:txBody>
+                  <a:tcPr anchor="ctr" marL="109728" marR="109728" marT="45720" marB="45720">
+                    <a:solidFill>
+                      <a:srgbClr val="1E2761"/>
+                    </a:solidFill>
+                  </a:tcPr>
+                </a:tc>
+                <a:tc>
+                  <a:txBody>
+                    <a:bodyPr/>
+                    <a:lstStyle/>
+                    <a:p>
+                      <a:pPr algn="ctr"/>
+                      <a:r>
+                        <a:rPr sz="1250" b="1">
+                          <a:solidFill>
+                            <a:srgbClr val="FFFFFF"/>
+                          </a:solidFill>
+                          <a:latin typeface="Calibri"/>
+                        </a:rPr>
+                        <a:t>역할 / 강점</a:t>
+                      </a:r>
+                    </a:p>
+                  </a:txBody>
+                  <a:tcPr anchor="ctr" marL="109728" marR="109728" marT="45720" marB="45720">
+                    <a:solidFill>
+                      <a:srgbClr val="1E2761"/>
+                    </a:solidFill>
+                  </a:tcPr>
+                </a:tc>
+                <a:tc>
+                  <a:txBody>
+                    <a:bodyPr/>
+                    <a:lstStyle/>
+                    <a:p>
+                      <a:pPr algn="ctr"/>
+                      <a:r>
+                        <a:rPr sz="1250" b="1">
+                          <a:solidFill>
+                            <a:srgbClr val="FFFFFF"/>
+                          </a:solidFill>
+                          <a:latin typeface="Calibri"/>
+                        </a:rPr>
+                        <a:t>accuracy</a:t>
+                      </a:r>
+                    </a:p>
+                  </a:txBody>
+                  <a:tcPr anchor="ctr" marL="109728" marR="109728" marT="45720" marB="45720">
+                    <a:solidFill>
+                      <a:srgbClr val="1E2761"/>
+                    </a:solidFill>
+                  </a:tcPr>
+                </a:tc>
+                <a:tc>
+                  <a:txBody>
+                    <a:bodyPr/>
+                    <a:lstStyle/>
+                    <a:p>
+                      <a:pPr algn="ctr"/>
+                      <a:r>
+                        <a:rPr sz="1250" b="1">
+                          <a:solidFill>
+                            <a:srgbClr val="FFFFFF"/>
+                          </a:solidFill>
+                          <a:latin typeface="Calibri"/>
+                        </a:rPr>
+                        <a:t>macro F1</a:t>
+                      </a:r>
+                    </a:p>
+                  </a:txBody>
+                  <a:tcPr anchor="ctr" marL="109728" marR="109728" marT="45720" marB="45720">
+                    <a:solidFill>
+                      <a:srgbClr val="1E2761"/>
+                    </a:solidFill>
+                  </a:tcPr>
+                </a:tc>
+              </a:tr>
+              <a:tr h="566928">
+                <a:tc>
+                  <a:txBody>
+                    <a:bodyPr/>
+                    <a:lstStyle/>
+                    <a:p>
+                      <a:pPr algn="l"/>
+                      <a:r>
+                        <a:rPr sz="1250">
+                          <a:solidFill>
+                            <a:srgbClr val="21295C"/>
+                          </a:solidFill>
+                          <a:latin typeface="Calibri"/>
+                        </a:rPr>
+                        <a:t>ML</a:t>
+                      </a:r>
+                    </a:p>
+                    <a:p>
+                      <a:pPr algn="l"/>
+                      <a:r>
+                        <a:rPr sz="1250">
+                          <a:solidFill>
+                            <a:srgbClr val="21295C"/>
+                          </a:solidFill>
+                          <a:latin typeface="Calibri"/>
+                        </a:rPr>
+                        <a:t>(TF-IDF+로지스틱회귀)</a:t>
+                      </a:r>
+                    </a:p>
+                  </a:txBody>
+                  <a:tcPr anchor="ctr" marL="109728" marR="109728" marT="45720" marB="45720">
+                    <a:solidFill>
+                      <a:srgbClr val="FFFFFF"/>
+                    </a:solidFill>
+                  </a:tcPr>
+                </a:tc>
+                <a:tc>
+                  <a:txBody>
+                    <a:bodyPr/>
+                    <a:lstStyle/>
+                    <a:p>
+                      <a:pPr algn="ctr"/>
+                      <a:r>
+                        <a:rPr sz="1250">
+                          <a:solidFill>
+                            <a:srgbClr val="21295C"/>
+                          </a:solidFill>
+                          <a:latin typeface="Calibri"/>
+                        </a:rPr>
+                        <a:t>가장 가볍고 빠름 — 실서비스 기본 모델</a:t>
+                      </a:r>
+                    </a:p>
+                  </a:txBody>
+                  <a:tcPr anchor="ctr" marL="109728" marR="109728" marT="45720" marB="45720">
+                    <a:solidFill>
+                      <a:srgbClr val="FFFFFF"/>
+                    </a:solidFill>
+                  </a:tcPr>
+                </a:tc>
+                <a:tc>
+                  <a:txBody>
+                    <a:bodyPr/>
+                    <a:lstStyle/>
+                    <a:p>
+                      <a:pPr algn="ctr"/>
+                      <a:r>
+                        <a:rPr sz="1250">
+                          <a:solidFill>
+                            <a:srgbClr val="21295C"/>
+                          </a:solidFill>
+                          <a:latin typeface="Calibri"/>
+                        </a:rPr>
+                        <a:t>0.909*</a:t>
+                      </a:r>
+                    </a:p>
+                  </a:txBody>
+                  <a:tcPr anchor="ctr" marL="109728" marR="109728" marT="45720" marB="45720">
+                    <a:solidFill>
+                      <a:srgbClr val="FFFFFF"/>
+                    </a:solidFill>
+                  </a:tcPr>
+                </a:tc>
+                <a:tc>
+                  <a:txBody>
+                    <a:bodyPr/>
+                    <a:lstStyle/>
+                    <a:p>
+                      <a:pPr algn="ctr"/>
+                      <a:r>
+                        <a:rPr sz="1250">
+                          <a:solidFill>
+                            <a:srgbClr val="21295C"/>
+                          </a:solidFill>
+                          <a:latin typeface="Calibri"/>
+                        </a:rPr>
+                        <a:t>0.675*</a:t>
+                      </a:r>
+                    </a:p>
+                  </a:txBody>
+                  <a:tcPr anchor="ctr" marL="109728" marR="109728" marT="45720" marB="45720">
+                    <a:solidFill>
+                      <a:srgbClr val="FFFFFF"/>
+                    </a:solidFill>
+                  </a:tcPr>
+                </a:tc>
+              </a:tr>
+              <a:tr h="566928">
+                <a:tc>
+                  <a:txBody>
+                    <a:bodyPr/>
+                    <a:lstStyle/>
+                    <a:p>
+                      <a:pPr algn="l"/>
+                      <a:r>
+                        <a:rPr sz="1250">
+                          <a:solidFill>
+                            <a:srgbClr val="21295C"/>
+                          </a:solidFill>
+                          <a:latin typeface="Calibri"/>
+                        </a:rPr>
+                        <a:t>DL</a:t>
+                      </a:r>
+                    </a:p>
+                    <a:p>
+                      <a:pPr algn="l"/>
+                      <a:r>
+                        <a:rPr sz="1250">
+                          <a:solidFill>
+                            <a:srgbClr val="21295C"/>
+                          </a:solidFill>
+                          <a:latin typeface="Calibri"/>
+                        </a:rPr>
+                        <a:t>(신경망)</a:t>
+                      </a:r>
+                    </a:p>
+                  </a:txBody>
+                  <a:tcPr anchor="ctr" marL="109728" marR="109728" marT="45720" marB="45720">
+                    <a:solidFill>
+                      <a:srgbClr val="F5F6FA"/>
+                    </a:solidFill>
+                  </a:tcPr>
+                </a:tc>
+                <a:tc>
+                  <a:txBody>
+                    <a:bodyPr/>
+                    <a:lstStyle/>
+                    <a:p>
+                      <a:pPr algn="ctr"/>
+                      <a:r>
+                        <a:rPr sz="1250">
+                          <a:solidFill>
+                            <a:srgbClr val="21295C"/>
+                          </a:solidFill>
+                          <a:latin typeface="Calibri"/>
+                        </a:rPr>
+                        <a:t>비선형 패턴까지 학습 — ML보다 정확도 소폭 우위</a:t>
+                      </a:r>
+                    </a:p>
+                  </a:txBody>
+                  <a:tcPr anchor="ctr" marL="109728" marR="109728" marT="45720" marB="45720">
+                    <a:solidFill>
+                      <a:srgbClr val="F5F6FA"/>
+                    </a:solidFill>
+                  </a:tcPr>
+                </a:tc>
+                <a:tc>
+                  <a:txBody>
+                    <a:bodyPr/>
+                    <a:lstStyle/>
+                    <a:p>
+                      <a:pPr algn="ctr"/>
+                      <a:r>
+                        <a:rPr sz="1250">
+                          <a:solidFill>
+                            <a:srgbClr val="21295C"/>
+                          </a:solidFill>
+                          <a:latin typeface="Calibri"/>
+                        </a:rPr>
+                        <a:t>0.920*</a:t>
+                      </a:r>
+                    </a:p>
+                  </a:txBody>
+                  <a:tcPr anchor="ctr" marL="109728" marR="109728" marT="45720" marB="45720">
+                    <a:solidFill>
+                      <a:srgbClr val="F5F6FA"/>
+                    </a:solidFill>
+                  </a:tcPr>
+                </a:tc>
+                <a:tc>
+                  <a:txBody>
+                    <a:bodyPr/>
+                    <a:lstStyle/>
+                    <a:p>
+                      <a:pPr algn="ctr"/>
+                      <a:r>
+                        <a:rPr sz="1250">
+                          <a:solidFill>
+                            <a:srgbClr val="21295C"/>
+                          </a:solidFill>
+                          <a:latin typeface="Calibri"/>
+                        </a:rPr>
+                        <a:t>0.711*</a:t>
+                      </a:r>
+                    </a:p>
+                  </a:txBody>
+                  <a:tcPr anchor="ctr" marL="109728" marR="109728" marT="45720" marB="45720">
+                    <a:solidFill>
+                      <a:srgbClr val="F5F6FA"/>
+                    </a:solidFill>
+                  </a:tcPr>
+                </a:tc>
+              </a:tr>
+              <a:tr h="566928">
+                <a:tc>
+                  <a:txBody>
+                    <a:bodyPr/>
+                    <a:lstStyle/>
+                    <a:p>
+                      <a:pPr algn="l"/>
+                      <a:r>
+                        <a:rPr sz="1250">
+                          <a:solidFill>
+                            <a:srgbClr val="21295C"/>
+                          </a:solidFill>
+                          <a:latin typeface="Calibri"/>
+                        </a:rPr>
+                        <a:t>LSTM</a:t>
+                      </a:r>
+                    </a:p>
+                  </a:txBody>
+                  <a:tcPr anchor="ctr" marL="109728" marR="109728" marT="45720" marB="45720">
+                    <a:solidFill>
+                      <a:srgbClr val="FFFFFF"/>
+                    </a:solidFill>
+                  </a:tcPr>
+                </a:tc>
+                <a:tc>
+                  <a:txBody>
+                    <a:bodyPr/>
+                    <a:lstStyle/>
+                    <a:p>
+                      <a:pPr algn="ctr"/>
+                      <a:r>
+                        <a:rPr sz="1250">
+                          <a:solidFill>
+                            <a:srgbClr val="21295C"/>
+                          </a:solidFill>
+                          <a:latin typeface="Calibri"/>
+                        </a:rPr>
+                        <a:t>문장 순서를 학습 — 이 데이터에서는 추가 이득 없음</a:t>
+                      </a:r>
+                    </a:p>
+                  </a:txBody>
+                  <a:tcPr anchor="ctr" marL="109728" marR="109728" marT="45720" marB="45720">
+                    <a:solidFill>
+                      <a:srgbClr val="FFFFFF"/>
+                    </a:solidFill>
+                  </a:tcPr>
+                </a:tc>
+                <a:tc>
+                  <a:txBody>
+                    <a:bodyPr/>
+                    <a:lstStyle/>
+                    <a:p>
+                      <a:pPr algn="ctr"/>
+                      <a:r>
+                        <a:rPr sz="1250">
+                          <a:solidFill>
+                            <a:srgbClr val="21295C"/>
+                          </a:solidFill>
+                          <a:latin typeface="Calibri"/>
+                        </a:rPr>
+                        <a:t>0.734</a:t>
+                      </a:r>
+                    </a:p>
+                  </a:txBody>
+                  <a:tcPr anchor="ctr" marL="109728" marR="109728" marT="45720" marB="45720">
+                    <a:solidFill>
+                      <a:srgbClr val="FFFFFF"/>
+                    </a:solidFill>
+                  </a:tcPr>
+                </a:tc>
+                <a:tc>
+                  <a:txBody>
+                    <a:bodyPr/>
+                    <a:lstStyle/>
+                    <a:p>
+                      <a:pPr algn="ctr"/>
+                      <a:r>
+                        <a:rPr sz="1250">
+                          <a:solidFill>
+                            <a:srgbClr val="21295C"/>
+                          </a:solidFill>
+                          <a:latin typeface="Calibri"/>
+                        </a:rPr>
+                        <a:t>0.671</a:t>
+                      </a:r>
+                    </a:p>
+                  </a:txBody>
+                  <a:tcPr anchor="ctr" marL="109728" marR="109728" marT="45720" marB="45720">
+                    <a:solidFill>
+                      <a:srgbClr val="FFFFFF"/>
+                    </a:solidFill>
+                  </a:tcPr>
+                </a:tc>
+              </a:tr>
+              <a:tr h="566928">
+                <a:tc>
+                  <a:txBody>
+                    <a:bodyPr/>
+                    <a:lstStyle/>
+                    <a:p>
+                      <a:pPr algn="l"/>
+                      <a:r>
+                        <a:rPr sz="1250">
+                          <a:solidFill>
+                            <a:srgbClr val="21295C"/>
+                          </a:solidFill>
+                          <a:latin typeface="Calibri"/>
+                        </a:rPr>
+                        <a:t>KoELECTRA</a:t>
+                      </a:r>
+                    </a:p>
+                    <a:p>
+                      <a:pPr algn="l"/>
+                      <a:r>
+                        <a:rPr sz="1250">
+                          <a:solidFill>
+                            <a:srgbClr val="21295C"/>
+                          </a:solidFill>
+                          <a:latin typeface="Calibri"/>
+                        </a:rPr>
+                        <a:t>(사전학습 모델)</a:t>
+                      </a:r>
+                    </a:p>
+                  </a:txBody>
+                  <a:tcPr anchor="ctr" marL="109728" marR="109728" marT="45720" marB="45720">
+                    <a:solidFill>
+                      <a:srgbClr val="F5F6FA"/>
+                    </a:solidFill>
+                  </a:tcPr>
+                </a:tc>
+                <a:tc>
+                  <a:txBody>
+                    <a:bodyPr/>
+                    <a:lstStyle/>
+                    <a:p>
+                      <a:pPr algn="ctr"/>
+                      <a:r>
+                        <a:rPr sz="1250">
+                          <a:solidFill>
+                            <a:srgbClr val="21295C"/>
+                          </a:solidFill>
+                          <a:latin typeface="Calibri"/>
+                        </a:rPr>
+                        <a:t>적은 데이터로도 가장 높은 정확도</a:t>
+                      </a:r>
+                    </a:p>
+                  </a:txBody>
+                  <a:tcPr anchor="ctr" marL="109728" marR="109728" marT="45720" marB="45720">
+                    <a:solidFill>
+                      <a:srgbClr val="F5F6FA"/>
+                    </a:solidFill>
+                  </a:tcPr>
+                </a:tc>
+                <a:tc>
+                  <a:txBody>
+                    <a:bodyPr/>
+                    <a:lstStyle/>
+                    <a:p>
+                      <a:pPr algn="ctr"/>
+                      <a:r>
+                        <a:rPr sz="1250">
+                          <a:solidFill>
+                            <a:srgbClr val="21295C"/>
+                          </a:solidFill>
+                          <a:latin typeface="Calibri"/>
+                        </a:rPr>
+                        <a:t>0.772</a:t>
+                      </a:r>
+                    </a:p>
+                  </a:txBody>
+                  <a:tcPr anchor="ctr" marL="109728" marR="109728" marT="45720" marB="45720">
+                    <a:solidFill>
+                      <a:srgbClr val="F5F6FA"/>
+                    </a:solidFill>
+                  </a:tcPr>
+                </a:tc>
+                <a:tc>
+                  <a:txBody>
+                    <a:bodyPr/>
+                    <a:lstStyle/>
+                    <a:p>
+                      <a:pPr algn="ctr"/>
+                      <a:r>
+                        <a:rPr sz="1250">
+                          <a:solidFill>
+                            <a:srgbClr val="21295C"/>
+                          </a:solidFill>
+                          <a:latin typeface="Calibri"/>
+                        </a:rPr>
+                        <a:t>0.660</a:t>
+                      </a:r>
+                    </a:p>
+                  </a:txBody>
+                  <a:tcPr anchor="ctr" marL="109728" marR="109728" marT="45720" marB="45720">
+                    <a:solidFill>
+                      <a:srgbClr val="F5F6FA"/>
+                    </a:solidFill>
+                  </a:tcPr>
+                </a:tc>
+              </a:tr>
+            </a:tbl>
           </a:graphicData>
         </a:graphic>
       </p:graphicFrame>
@@ -6574,8 +7600,8 @@
         </p:nvSpPr>
         <p:spPr>
           <a:xfrm>
-            <a:off x="7863840" y="3108960"/>
-            <a:ext cx="3840480" cy="365760"/>
+            <a:off x="640080" y="4846320"/>
+            <a:ext cx="10881360" cy="365760"/>
           </a:xfrm>
           <a:prstGeom prst="rect">
             <a:avLst/>
@@ -6590,27 +7616,115 @@
           <a:p>
             <a:pPr algn="l"/>
             <a:r>
-              <a:rPr sz="1500" b="1" i="0">
-                <a:solidFill>
-                  <a:srgbClr val="1E2761"/>
+              <a:rPr sz="1100" b="0" i="1">
+                <a:solidFill>
+                  <a:srgbClr val="6B7280"/>
                 </a:solidFill>
                 <a:latin typeface="Calibri"/>
               </a:rPr>
-              <a:t>결론</a:t>
-            </a:r>
-          </a:p>
-        </p:txBody>
-      </p:sp>
-      <p:sp>
-        <p:nvSpPr>
-          <p:cNvPr id="7" name="TextBox 6"/>
+              <a:t>* ML/DL은 실제 서비스 운영 분포로 보정한 수치 (학습 시 다운샘플링한 분포와 실제 비율이 달라서 보정함)</a:t>
+            </a:r>
+          </a:p>
+        </p:txBody>
+      </p:sp>
+      <p:sp>
+        <p:nvSpPr>
+          <p:cNvPr id="7" name="Rectangle 6"/>
+          <p:cNvSpPr/>
+          <p:nvPr/>
+        </p:nvSpPr>
+        <p:spPr>
+          <a:xfrm>
+            <a:off x="640080" y="5303520"/>
+            <a:ext cx="10881360" cy="1097280"/>
+          </a:xfrm>
+          <a:prstGeom prst="rect">
+            <a:avLst/>
+          </a:prstGeom>
+          <a:solidFill>
+            <a:srgbClr val="F5F6FA"/>
+          </a:solidFill>
+          <a:ln>
+            <a:noFill/>
+          </a:ln>
+          <a:effectLst/>
+        </p:spPr>
+        <p:style>
+          <a:lnRef idx="1">
+            <a:schemeClr val="accent1"/>
+          </a:lnRef>
+          <a:fillRef idx="3">
+            <a:schemeClr val="accent1"/>
+          </a:fillRef>
+          <a:effectRef idx="2">
+            <a:schemeClr val="accent1"/>
+          </a:effectRef>
+          <a:fontRef idx="minor">
+            <a:schemeClr val="lt1"/>
+          </a:fontRef>
+        </p:style>
+        <p:txBody>
+          <a:bodyPr rtlCol="0" anchor="ctr"/>
+          <a:lstStyle/>
+          <a:p>
+            <a:pPr algn="ctr"/>
+          </a:p>
+        </p:txBody>
+      </p:sp>
+      <p:sp>
+        <p:nvSpPr>
+          <p:cNvPr id="8" name="Rectangle 7"/>
+          <p:cNvSpPr/>
+          <p:nvPr/>
+        </p:nvSpPr>
+        <p:spPr>
+          <a:xfrm>
+            <a:off x="640080" y="5303520"/>
+            <a:ext cx="64008" cy="1097280"/>
+          </a:xfrm>
+          <a:prstGeom prst="rect">
+            <a:avLst/>
+          </a:prstGeom>
+          <a:solidFill>
+            <a:srgbClr val="1E2761"/>
+          </a:solidFill>
+          <a:ln>
+            <a:noFill/>
+          </a:ln>
+          <a:effectLst/>
+        </p:spPr>
+        <p:style>
+          <a:lnRef idx="1">
+            <a:schemeClr val="accent1"/>
+          </a:lnRef>
+          <a:fillRef idx="3">
+            <a:schemeClr val="accent1"/>
+          </a:fillRef>
+          <a:effectRef idx="2">
+            <a:schemeClr val="accent1"/>
+          </a:effectRef>
+          <a:fontRef idx="minor">
+            <a:schemeClr val="lt1"/>
+          </a:fontRef>
+        </p:style>
+        <p:txBody>
+          <a:bodyPr rtlCol="0" anchor="ctr"/>
+          <a:lstStyle/>
+          <a:p>
+            <a:pPr algn="ctr"/>
+          </a:p>
+        </p:txBody>
+      </p:sp>
+      <p:sp>
+        <p:nvSpPr>
+          <p:cNvPr id="9" name="TextBox 8"/>
           <p:cNvSpPr txBox="1"/>
           <p:nvPr/>
         </p:nvSpPr>
         <p:spPr>
           <a:xfrm>
-            <a:off x="7863840" y="3566160"/>
-            <a:ext cx="3840480" cy="2560320"/>
+            <a:off x="914400" y="5486400"/>
+            <a:ext cx="10332720" cy="777240"/>
           </a:xfrm>
           <a:prstGeom prst="rect">
             <a:avLst/>
@@ -6618,42 +7732,24 @@
           <a:noFill/>
         </p:spPr>
         <p:txBody>
-          <a:bodyPr wrap="square">
+          <a:bodyPr wrap="square" anchor="t" lIns="0" rIns="0" tIns="0" bIns="0">
             <a:spAutoFit/>
           </a:bodyPr>
           <a:lstStyle/>
           <a:p>
-            <a:pPr>
-              <a:spcAft>
-                <a:spcPts val="800"/>
-              </a:spcAft>
+            <a:pPr algn="l">
+              <a:lnSpc>
+                <a:spcPct val="130000"/>
+              </a:lnSpc>
             </a:pPr>
             <a:r>
-              <a:rPr sz="1250">
-                <a:solidFill>
-                  <a:srgbClr val="21295C"/>
+              <a:rPr sz="1350" b="1" i="0">
+                <a:solidFill>
+                  <a:srgbClr val="1E2761"/>
                 </a:solidFill>
                 <a:latin typeface="Calibri"/>
               </a:rPr>
-              <a:t>•  KoELECTRA가 데이터 1/7만 쓰고도
-최고 accuracy → 사전학습 효과 확인</a:t>
-            </a:r>
-          </a:p>
-          <a:p>
-            <a:pPr>
-              <a:spcAft>
-                <a:spcPts val="800"/>
-              </a:spcAft>
-            </a:pPr>
-            <a:r>
-              <a:rPr sz="1250">
-                <a:solidFill>
-                  <a:srgbClr val="21295C"/>
-                </a:solidFill>
-                <a:latin typeface="Calibri"/>
-              </a:rPr>
-              <a:t>•  LSTM은 순서 정보 기대했으나 차이 없음
-→ 짧은 리뷰는 어휘 자체가 강한 신호</a:t>
+              <a:t>결론: 4개 모델 모두 90% 안팎까지 끌어올렸고, 사전학습 모델이 가장 적은 데이터로도 가장 높은 성능을 냈다. 실제 서비스에는 가볍고 빠른 ML/DL을 우선 적용했다.</a:t>
             </a:r>
           </a:p>
         </p:txBody>
@@ -6691,6 +7787,129 @@
             <a:avLst/>
           </a:prstGeom>
           <a:solidFill>
+            <a:srgbClr val="FFFFFF"/>
+          </a:solidFill>
+          <a:ln>
+            <a:noFill/>
+          </a:ln>
+          <a:effectLst/>
+        </p:spPr>
+        <p:style>
+          <a:lnRef idx="1">
+            <a:schemeClr val="accent1"/>
+          </a:lnRef>
+          <a:fillRef idx="3">
+            <a:schemeClr val="accent1"/>
+          </a:fillRef>
+          <a:effectRef idx="2">
+            <a:schemeClr val="accent1"/>
+          </a:effectRef>
+          <a:fontRef idx="minor">
+            <a:schemeClr val="lt1"/>
+          </a:fontRef>
+        </p:style>
+        <p:txBody>
+          <a:bodyPr rtlCol="0" anchor="ctr"/>
+          <a:lstStyle/>
+          <a:p>
+            <a:pPr algn="ctr"/>
+          </a:p>
+        </p:txBody>
+      </p:sp>
+      <p:sp>
+        <p:nvSpPr>
+          <p:cNvPr id="3" name="TextBox 2"/>
+          <p:cNvSpPr txBox="1"/>
+          <p:nvPr/>
+        </p:nvSpPr>
+        <p:spPr>
+          <a:xfrm>
+            <a:off x="640080" y="457200"/>
+            <a:ext cx="10515600" cy="731520"/>
+          </a:xfrm>
+          <a:prstGeom prst="rect">
+            <a:avLst/>
+          </a:prstGeom>
+          <a:noFill/>
+        </p:spPr>
+        <p:txBody>
+          <a:bodyPr wrap="square" anchor="t" lIns="0" rIns="0" tIns="0" bIns="0">
+            <a:spAutoFit/>
+          </a:bodyPr>
+          <a:lstStyle/>
+          <a:p>
+            <a:pPr algn="l"/>
+            <a:r>
+              <a:rPr sz="2700" b="1" i="0">
+                <a:solidFill>
+                  <a:srgbClr val="1E2761"/>
+                </a:solidFill>
+                <a:latin typeface="Georgia"/>
+              </a:rPr>
+              <a:t>모델 문제 발견 → 해결 → 지금 상태</a:t>
+            </a:r>
+          </a:p>
+        </p:txBody>
+      </p:sp>
+      <p:sp>
+        <p:nvSpPr>
+          <p:cNvPr id="4" name="Rectangle 3"/>
+          <p:cNvSpPr/>
+          <p:nvPr/>
+        </p:nvSpPr>
+        <p:spPr>
+          <a:xfrm>
+            <a:off x="640080" y="1463040"/>
+            <a:ext cx="3520440" cy="2286000"/>
+          </a:xfrm>
+          <a:prstGeom prst="rect">
+            <a:avLst/>
+          </a:prstGeom>
+          <a:solidFill>
+            <a:srgbClr val="F5F6FA"/>
+          </a:solidFill>
+          <a:ln>
+            <a:noFill/>
+          </a:ln>
+          <a:effectLst/>
+        </p:spPr>
+        <p:style>
+          <a:lnRef idx="1">
+            <a:schemeClr val="accent1"/>
+          </a:lnRef>
+          <a:fillRef idx="3">
+            <a:schemeClr val="accent1"/>
+          </a:fillRef>
+          <a:effectRef idx="2">
+            <a:schemeClr val="accent1"/>
+          </a:effectRef>
+          <a:fontRef idx="minor">
+            <a:schemeClr val="lt1"/>
+          </a:fontRef>
+        </p:style>
+        <p:txBody>
+          <a:bodyPr rtlCol="0" anchor="ctr"/>
+          <a:lstStyle/>
+          <a:p>
+            <a:pPr algn="ctr"/>
+          </a:p>
+        </p:txBody>
+      </p:sp>
+      <p:sp>
+        <p:nvSpPr>
+          <p:cNvPr id="5" name="Rectangle 4"/>
+          <p:cNvSpPr/>
+          <p:nvPr/>
+        </p:nvSpPr>
+        <p:spPr>
+          <a:xfrm>
+            <a:off x="640080" y="1463040"/>
+            <a:ext cx="64008" cy="2286000"/>
+          </a:xfrm>
+          <a:prstGeom prst="rect">
+            <a:avLst/>
+          </a:prstGeom>
+          <a:solidFill>
             <a:srgbClr val="1E2761"/>
           </a:solidFill>
           <a:ln>
@@ -6722,14 +7941,14 @@
       </p:sp>
       <p:sp>
         <p:nvSpPr>
-          <p:cNvPr id="3" name="TextBox 2"/>
+          <p:cNvPr id="6" name="TextBox 5"/>
           <p:cNvSpPr txBox="1"/>
           <p:nvPr/>
         </p:nvSpPr>
         <p:spPr>
           <a:xfrm>
-            <a:off x="640080" y="457200"/>
-            <a:ext cx="10515600" cy="731520"/>
+            <a:off x="868680" y="1691640"/>
+            <a:ext cx="3063240" cy="457200"/>
           </a:xfrm>
           <a:prstGeom prst="rect">
             <a:avLst/>
@@ -6744,27 +7963,27 @@
           <a:p>
             <a:pPr algn="l"/>
             <a:r>
-              <a:rPr sz="2700" b="1" i="0">
-                <a:solidFill>
-                  <a:srgbClr val="FFFFFF"/>
-                </a:solidFill>
-                <a:latin typeface="Georgia"/>
+              <a:rPr sz="1500" b="1" i="0">
+                <a:solidFill>
+                  <a:srgbClr val="1E2761"/>
+                </a:solidFill>
+                <a:latin typeface="Calibri"/>
               </a:rPr>
-              <a:t>모델 문제 발견 — 실제 분포로 재평가</a:t>
-            </a:r>
-          </a:p>
-        </p:txBody>
-      </p:sp>
-      <p:sp>
-        <p:nvSpPr>
-          <p:cNvPr id="4" name="TextBox 3"/>
+              <a:t>① 발견</a:t>
+            </a:r>
+          </a:p>
+        </p:txBody>
+      </p:sp>
+      <p:sp>
+        <p:nvSpPr>
+          <p:cNvPr id="7" name="TextBox 6"/>
           <p:cNvSpPr txBox="1"/>
           <p:nvPr/>
         </p:nvSpPr>
         <p:spPr>
           <a:xfrm>
-            <a:off x="640080" y="1554480"/>
-            <a:ext cx="10515600" cy="1828800"/>
+            <a:off x="868680" y="2194560"/>
+            <a:ext cx="3063240" cy="1463040"/>
           </a:xfrm>
           <a:prstGeom prst="rect">
             <a:avLst/>
@@ -6772,78 +7991,76 @@
           <a:noFill/>
         </p:spPr>
         <p:txBody>
-          <a:bodyPr wrap="square">
+          <a:bodyPr wrap="square" anchor="t" lIns="0" rIns="0" tIns="0" bIns="0">
             <a:spAutoFit/>
           </a:bodyPr>
           <a:lstStyle/>
           <a:p>
-            <a:pPr>
-              <a:spcAft>
-                <a:spcPts val="800"/>
-              </a:spcAft>
+            <a:pPr algn="l">
+              <a:lnSpc>
+                <a:spcPct val="130000"/>
+              </a:lnSpc>
             </a:pPr>
             <a:r>
-              <a:rPr sz="1600">
-                <a:solidFill>
-                  <a:srgbClr val="FFFFFF"/>
+              <a:rPr sz="1200" b="0" i="0">
+                <a:solidFill>
+                  <a:srgbClr val="21295C"/>
                 </a:solidFill>
                 <a:latin typeface="Calibri"/>
               </a:rPr>
-              <a:t>•  학습 시 클래스 밸런싱(다운샘플링)을 했는데, 실제 운영 비율(positive 86.7%)과 다름</a:t>
-            </a:r>
-          </a:p>
-          <a:p>
-            <a:pPr>
-              <a:spcAft>
-                <a:spcPts val="800"/>
-              </a:spcAft>
+              <a:t>학습 시 다운샘플링한 비율과 실제 운영 비율(긍정</a:t>
+            </a:r>
+          </a:p>
+          <a:p>
+            <a:pPr algn="l">
+              <a:lnSpc>
+                <a:spcPct val="130000"/>
+              </a:lnSpc>
             </a:pPr>
             <a:r>
-              <a:rPr sz="1600">
-                <a:solidFill>
-                  <a:srgbClr val="FFFFFF"/>
+              <a:rPr sz="1200" b="0" i="0">
+                <a:solidFill>
+                  <a:srgbClr val="21295C"/>
                 </a:solidFill>
                 <a:latin typeface="Calibri"/>
               </a:rPr>
-              <a:t>•  실제 분포 샘플로 재평가하니 neutral precision이 0.20까지 하락 (label shift)</a:t>
-            </a:r>
-          </a:p>
-          <a:p>
-            <a:pPr>
-              <a:spcAft>
-                <a:spcPts val="800"/>
-              </a:spcAft>
+              <a:t>86.7%)이 달라서, 실제 분포로 다시 평가하니 모델이</a:t>
+            </a:r>
+          </a:p>
+          <a:p>
+            <a:pPr algn="l">
+              <a:lnSpc>
+                <a:spcPct val="130000"/>
+              </a:lnSpc>
             </a:pPr>
             <a:r>
-              <a:rPr sz="1600">
-                <a:solidFill>
-                  <a:srgbClr val="FFFFFF"/>
+              <a:rPr sz="1200" b="0" i="0">
+                <a:solidFill>
+                  <a:srgbClr val="21295C"/>
                 </a:solidFill>
                 <a:latin typeface="Calibri"/>
               </a:rPr>
-              <a:t>•  = 모델이 "중립"이라고 예측한 것 중 80%가 틀림</a:t>
-            </a:r>
-          </a:p>
-        </p:txBody>
-      </p:sp>
-      <p:sp>
-        <p:nvSpPr>
-          <p:cNvPr id="5" name="Rounded Rectangle 4"/>
+              <a:t>"중립"이라고 예측한 것 중 80%가 틀렸음 (label shift)</a:t>
+            </a:r>
+          </a:p>
+        </p:txBody>
+      </p:sp>
+      <p:sp>
+        <p:nvSpPr>
+          <p:cNvPr id="8" name="Rectangle 7"/>
           <p:cNvSpPr/>
           <p:nvPr/>
         </p:nvSpPr>
         <p:spPr>
           <a:xfrm>
-            <a:off x="640080" y="3291840"/>
-            <a:ext cx="10881360" cy="822960"/>
-          </a:xfrm>
-          <a:prstGeom prst="roundRect">
-            <a:avLst>
-              <a:gd name="adj" fmla="val 10000"/>
-            </a:avLst>
+            <a:off x="4343400" y="1463040"/>
+            <a:ext cx="3520440" cy="2286000"/>
+          </a:xfrm>
+          <a:prstGeom prst="rect">
+            <a:avLst/>
           </a:prstGeom>
           <a:solidFill>
-            <a:srgbClr val="F96167"/>
+            <a:srgbClr val="F5F6FA"/>
           </a:solidFill>
           <a:ln>
             <a:noFill/>
@@ -6874,14 +8091,58 @@
       </p:sp>
       <p:sp>
         <p:nvSpPr>
-          <p:cNvPr id="6" name="TextBox 5"/>
+          <p:cNvPr id="9" name="Rectangle 8"/>
+          <p:cNvSpPr/>
+          <p:nvPr/>
+        </p:nvSpPr>
+        <p:spPr>
+          <a:xfrm>
+            <a:off x="4343400" y="1463040"/>
+            <a:ext cx="64008" cy="2286000"/>
+          </a:xfrm>
+          <a:prstGeom prst="rect">
+            <a:avLst/>
+          </a:prstGeom>
+          <a:solidFill>
+            <a:srgbClr val="1E2761"/>
+          </a:solidFill>
+          <a:ln>
+            <a:noFill/>
+          </a:ln>
+          <a:effectLst/>
+        </p:spPr>
+        <p:style>
+          <a:lnRef idx="1">
+            <a:schemeClr val="accent1"/>
+          </a:lnRef>
+          <a:fillRef idx="3">
+            <a:schemeClr val="accent1"/>
+          </a:fillRef>
+          <a:effectRef idx="2">
+            <a:schemeClr val="accent1"/>
+          </a:effectRef>
+          <a:fontRef idx="minor">
+            <a:schemeClr val="lt1"/>
+          </a:fontRef>
+        </p:style>
+        <p:txBody>
+          <a:bodyPr rtlCol="0" anchor="ctr"/>
+          <a:lstStyle/>
+          <a:p>
+            <a:pPr algn="ctr"/>
+          </a:p>
+        </p:txBody>
+      </p:sp>
+      <p:sp>
+        <p:nvSpPr>
+          <p:cNvPr id="10" name="TextBox 9"/>
           <p:cNvSpPr txBox="1"/>
           <p:nvPr/>
         </p:nvSpPr>
         <p:spPr>
           <a:xfrm>
-            <a:off x="914400" y="3520440"/>
-            <a:ext cx="10332720" cy="457200"/>
+            <a:off x="4572000" y="1691640"/>
+            <a:ext cx="3063240" cy="457200"/>
           </a:xfrm>
           <a:prstGeom prst="rect">
             <a:avLst/>
@@ -6894,30 +8155,279 @@
           </a:bodyPr>
           <a:lstStyle/>
           <a:p>
-            <a:pPr algn="ctr"/>
+            <a:pPr algn="l"/>
             <a:r>
               <a:rPr sz="1500" b="1" i="0">
                 <a:solidFill>
-                  <a:srgbClr val="FFFFFF"/>
+                  <a:srgbClr val="1E2761"/>
                 </a:solidFill>
                 <a:latin typeface="Calibri"/>
               </a:rPr>
-              <a:t>해결: 재학습 없이 추론 단계에서 확률 보정 (학습 비율 ↔ 실제 비율 차이로 보정)</a:t>
+              <a:t>② 해결</a:t>
+            </a:r>
+          </a:p>
+        </p:txBody>
+      </p:sp>
+      <p:sp>
+        <p:nvSpPr>
+          <p:cNvPr id="11" name="TextBox 10"/>
+          <p:cNvSpPr txBox="1"/>
+          <p:nvPr/>
+        </p:nvSpPr>
+        <p:spPr>
+          <a:xfrm>
+            <a:off x="4572000" y="2194560"/>
+            <a:ext cx="3063240" cy="1463040"/>
+          </a:xfrm>
+          <a:prstGeom prst="rect">
+            <a:avLst/>
+          </a:prstGeom>
+          <a:noFill/>
+        </p:spPr>
+        <p:txBody>
+          <a:bodyPr wrap="square" anchor="t" lIns="0" rIns="0" tIns="0" bIns="0">
+            <a:spAutoFit/>
+          </a:bodyPr>
+          <a:lstStyle/>
+          <a:p>
+            <a:pPr algn="l">
+              <a:lnSpc>
+                <a:spcPct val="130000"/>
+              </a:lnSpc>
+            </a:pPr>
+            <a:r>
+              <a:rPr sz="1200" b="0" i="0">
+                <a:solidFill>
+                  <a:srgbClr val="21295C"/>
+                </a:solidFill>
+                <a:latin typeface="Calibri"/>
+              </a:rPr>
+              <a:t>모델을 다시 학습하지 않고, 추론 결과에 "학습 비율</a:t>
+            </a:r>
+          </a:p>
+          <a:p>
+            <a:pPr algn="l">
+              <a:lnSpc>
+                <a:spcPct val="130000"/>
+              </a:lnSpc>
+            </a:pPr>
+            <a:r>
+              <a:rPr sz="1200" b="0" i="0">
+                <a:solidFill>
+                  <a:srgbClr val="21295C"/>
+                </a:solidFill>
+                <a:latin typeface="Calibri"/>
+              </a:rPr>
+              <a:t>↔ 실제 비율" 차이를 곱해 확률을 보정하는 방식으로</a:t>
+            </a:r>
+          </a:p>
+          <a:p>
+            <a:pPr algn="l">
+              <a:lnSpc>
+                <a:spcPct val="130000"/>
+              </a:lnSpc>
+            </a:pPr>
+            <a:r>
+              <a:rPr sz="1200" b="0" i="0">
+                <a:solidFill>
+                  <a:srgbClr val="21295C"/>
+                </a:solidFill>
+                <a:latin typeface="Calibri"/>
+              </a:rPr>
+              <a:t>빠르게 개선</a:t>
+            </a:r>
+          </a:p>
+        </p:txBody>
+      </p:sp>
+      <p:sp>
+        <p:nvSpPr>
+          <p:cNvPr id="12" name="Rectangle 11"/>
+          <p:cNvSpPr/>
+          <p:nvPr/>
+        </p:nvSpPr>
+        <p:spPr>
+          <a:xfrm>
+            <a:off x="8046719" y="1463040"/>
+            <a:ext cx="3520440" cy="2286000"/>
+          </a:xfrm>
+          <a:prstGeom prst="rect">
+            <a:avLst/>
+          </a:prstGeom>
+          <a:solidFill>
+            <a:srgbClr val="F5F6FA"/>
+          </a:solidFill>
+          <a:ln>
+            <a:noFill/>
+          </a:ln>
+          <a:effectLst/>
+        </p:spPr>
+        <p:style>
+          <a:lnRef idx="1">
+            <a:schemeClr val="accent1"/>
+          </a:lnRef>
+          <a:fillRef idx="3">
+            <a:schemeClr val="accent1"/>
+          </a:fillRef>
+          <a:effectRef idx="2">
+            <a:schemeClr val="accent1"/>
+          </a:effectRef>
+          <a:fontRef idx="minor">
+            <a:schemeClr val="lt1"/>
+          </a:fontRef>
+        </p:style>
+        <p:txBody>
+          <a:bodyPr rtlCol="0" anchor="ctr"/>
+          <a:lstStyle/>
+          <a:p>
+            <a:pPr algn="ctr"/>
+          </a:p>
+        </p:txBody>
+      </p:sp>
+      <p:sp>
+        <p:nvSpPr>
+          <p:cNvPr id="13" name="Rectangle 12"/>
+          <p:cNvSpPr/>
+          <p:nvPr/>
+        </p:nvSpPr>
+        <p:spPr>
+          <a:xfrm>
+            <a:off x="8046719" y="1463040"/>
+            <a:ext cx="64008" cy="2286000"/>
+          </a:xfrm>
+          <a:prstGeom prst="rect">
+            <a:avLst/>
+          </a:prstGeom>
+          <a:solidFill>
+            <a:srgbClr val="B85A4D"/>
+          </a:solidFill>
+          <a:ln>
+            <a:noFill/>
+          </a:ln>
+          <a:effectLst/>
+        </p:spPr>
+        <p:style>
+          <a:lnRef idx="1">
+            <a:schemeClr val="accent1"/>
+          </a:lnRef>
+          <a:fillRef idx="3">
+            <a:schemeClr val="accent1"/>
+          </a:fillRef>
+          <a:effectRef idx="2">
+            <a:schemeClr val="accent1"/>
+          </a:effectRef>
+          <a:fontRef idx="minor">
+            <a:schemeClr val="lt1"/>
+          </a:fontRef>
+        </p:style>
+        <p:txBody>
+          <a:bodyPr rtlCol="0" anchor="ctr"/>
+          <a:lstStyle/>
+          <a:p>
+            <a:pPr algn="ctr"/>
+          </a:p>
+        </p:txBody>
+      </p:sp>
+      <p:sp>
+        <p:nvSpPr>
+          <p:cNvPr id="14" name="TextBox 13"/>
+          <p:cNvSpPr txBox="1"/>
+          <p:nvPr/>
+        </p:nvSpPr>
+        <p:spPr>
+          <a:xfrm>
+            <a:off x="8275319" y="1691640"/>
+            <a:ext cx="3063240" cy="457200"/>
+          </a:xfrm>
+          <a:prstGeom prst="rect">
+            <a:avLst/>
+          </a:prstGeom>
+          <a:noFill/>
+        </p:spPr>
+        <p:txBody>
+          <a:bodyPr wrap="square" anchor="t" lIns="0" rIns="0" tIns="0" bIns="0">
+            <a:spAutoFit/>
+          </a:bodyPr>
+          <a:lstStyle/>
+          <a:p>
+            <a:pPr algn="l"/>
+            <a:r>
+              <a:rPr sz="1500" b="1" i="0">
+                <a:solidFill>
+                  <a:srgbClr val="1E2761"/>
+                </a:solidFill>
+                <a:latin typeface="Calibri"/>
+              </a:rPr>
+              <a:t>③ 지금 상태</a:t>
+            </a:r>
+          </a:p>
+        </p:txBody>
+      </p:sp>
+      <p:sp>
+        <p:nvSpPr>
+          <p:cNvPr id="15" name="TextBox 14"/>
+          <p:cNvSpPr txBox="1"/>
+          <p:nvPr/>
+        </p:nvSpPr>
+        <p:spPr>
+          <a:xfrm>
+            <a:off x="8275319" y="2194560"/>
+            <a:ext cx="3063240" cy="1463040"/>
+          </a:xfrm>
+          <a:prstGeom prst="rect">
+            <a:avLst/>
+          </a:prstGeom>
+          <a:noFill/>
+        </p:spPr>
+        <p:txBody>
+          <a:bodyPr wrap="square" anchor="t" lIns="0" rIns="0" tIns="0" bIns="0">
+            <a:spAutoFit/>
+          </a:bodyPr>
+          <a:lstStyle/>
+          <a:p>
+            <a:pPr algn="l">
+              <a:lnSpc>
+                <a:spcPct val="130000"/>
+              </a:lnSpc>
+            </a:pPr>
+            <a:r>
+              <a:rPr sz="1200" b="0" i="0">
+                <a:solidFill>
+                  <a:srgbClr val="21295C"/>
+                </a:solidFill>
+                <a:latin typeface="Calibri"/>
+              </a:rPr>
+              <a:t>ML accuracy 0.806→0.909, DL accuracy 0.890→0.920</a:t>
+            </a:r>
+          </a:p>
+          <a:p>
+            <a:pPr algn="l">
+              <a:lnSpc>
+                <a:spcPct val="130000"/>
+              </a:lnSpc>
+            </a:pPr>
+            <a:r>
+              <a:rPr sz="1200" b="0" i="0">
+                <a:solidFill>
+                  <a:srgbClr val="21295C"/>
+                </a:solidFill>
+                <a:latin typeface="Calibri"/>
+              </a:rPr>
+              <a:t>으로 개선 — 재학습 없이도 실사용 가능한 수준 확보</a:t>
             </a:r>
           </a:p>
         </p:txBody>
       </p:sp>
       <p:graphicFrame>
         <p:nvGraphicFramePr>
-          <p:cNvPr id="7" name="Chart 6"/>
+          <p:cNvPr id="16" name="Chart 15"/>
           <p:cNvGraphicFramePr>
             <a:graphicFrameLocks noGrp="1"/>
           </p:cNvGraphicFramePr>
           <p:nvPr/>
         </p:nvGraphicFramePr>
         <p:xfrm>
-          <a:off x="1645920" y="4297680"/>
-          <a:ext cx="8869680" cy="2194560"/>
+          <a:off x="1645920" y="4023360"/>
+          <a:ext cx="8869680" cy="2468880"/>
         </p:xfrm>
         <a:graphic>
           <a:graphicData uri="http://schemas.openxmlformats.org/drawingml/2006/chart">
@@ -6925,915 +8435,6 @@
           </a:graphicData>
         </a:graphic>
       </p:graphicFrame>
-    </p:spTree>
-  </p:cSld>
-  <p:clrMapOvr>
-    <a:masterClrMapping/>
-  </p:clrMapOvr>
-</p:sld>
-</file>
-
-<file path=ppt/slides/slide8.xml><?xml version="1.0" encoding="utf-8"?>
-<p:sld xmlns:a="http://schemas.openxmlformats.org/drawingml/2006/main" xmlns:p="http://schemas.openxmlformats.org/presentationml/2006/main" xmlns:r="http://schemas.openxmlformats.org/officeDocument/2006/relationships">
-  <p:cSld>
-    <p:spTree>
-      <p:nvGrpSpPr>
-        <p:cNvPr id="1" name=""/>
-        <p:cNvGrpSpPr/>
-        <p:nvPr/>
-      </p:nvGrpSpPr>
-      <p:grpSpPr/>
-      <p:sp>
-        <p:nvSpPr>
-          <p:cNvPr id="2" name="Rectangle 1"/>
-          <p:cNvSpPr/>
-          <p:nvPr/>
-        </p:nvSpPr>
-        <p:spPr>
-          <a:xfrm>
-            <a:off x="0" y="0"/>
-            <a:ext cx="12191695" cy="6858000"/>
-          </a:xfrm>
-          <a:prstGeom prst="rect">
-            <a:avLst/>
-          </a:prstGeom>
-          <a:solidFill>
-            <a:srgbClr val="1E2761"/>
-          </a:solidFill>
-          <a:ln>
-            <a:noFill/>
-          </a:ln>
-          <a:effectLst/>
-        </p:spPr>
-        <p:style>
-          <a:lnRef idx="1">
-            <a:schemeClr val="accent1"/>
-          </a:lnRef>
-          <a:fillRef idx="3">
-            <a:schemeClr val="accent1"/>
-          </a:fillRef>
-          <a:effectRef idx="2">
-            <a:schemeClr val="accent1"/>
-          </a:effectRef>
-          <a:fontRef idx="minor">
-            <a:schemeClr val="lt1"/>
-          </a:fontRef>
-        </p:style>
-        <p:txBody>
-          <a:bodyPr rtlCol="0" anchor="ctr"/>
-          <a:lstStyle/>
-          <a:p>
-            <a:pPr algn="ctr"/>
-          </a:p>
-        </p:txBody>
-      </p:sp>
-      <p:sp>
-        <p:nvSpPr>
-          <p:cNvPr id="3" name="TextBox 2"/>
-          <p:cNvSpPr txBox="1"/>
-          <p:nvPr/>
-        </p:nvSpPr>
-        <p:spPr>
-          <a:xfrm>
-            <a:off x="640080" y="365760"/>
-            <a:ext cx="10515600" cy="731520"/>
-          </a:xfrm>
-          <a:prstGeom prst="rect">
-            <a:avLst/>
-          </a:prstGeom>
-          <a:noFill/>
-        </p:spPr>
-        <p:txBody>
-          <a:bodyPr wrap="square" anchor="t" lIns="0" rIns="0" tIns="0" bIns="0">
-            <a:spAutoFit/>
-          </a:bodyPr>
-          <a:lstStyle/>
-          <a:p>
-            <a:pPr algn="l"/>
-            <a:r>
-              <a:rPr sz="2300" b="1" i="0">
-                <a:solidFill>
-                  <a:srgbClr val="FFFFFF"/>
-                </a:solidFill>
-                <a:latin typeface="Georgia"/>
-              </a:rPr>
-              <a:t>한 단계씩 — 피드백을 받을 때마다 성장한 서비스</a:t>
-            </a:r>
-          </a:p>
-        </p:txBody>
-      </p:sp>
-      <p:sp>
-        <p:nvSpPr>
-          <p:cNvPr id="4" name="Rounded Rectangle 3"/>
-          <p:cNvSpPr/>
-          <p:nvPr/>
-        </p:nvSpPr>
-        <p:spPr>
-          <a:xfrm>
-            <a:off x="640080" y="1371600"/>
-            <a:ext cx="3520440" cy="2377440"/>
-          </a:xfrm>
-          <a:prstGeom prst="roundRect">
-            <a:avLst>
-              <a:gd name="adj" fmla="val 7000"/>
-            </a:avLst>
-          </a:prstGeom>
-          <a:solidFill>
-            <a:srgbClr val="555A6E"/>
-          </a:solidFill>
-          <a:ln>
-            <a:noFill/>
-          </a:ln>
-          <a:effectLst/>
-        </p:spPr>
-        <p:style>
-          <a:lnRef idx="1">
-            <a:schemeClr val="accent1"/>
-          </a:lnRef>
-          <a:fillRef idx="3">
-            <a:schemeClr val="accent1"/>
-          </a:fillRef>
-          <a:effectRef idx="2">
-            <a:schemeClr val="accent1"/>
-          </a:effectRef>
-          <a:fontRef idx="minor">
-            <a:schemeClr val="lt1"/>
-          </a:fontRef>
-        </p:style>
-        <p:txBody>
-          <a:bodyPr rtlCol="0" anchor="ctr"/>
-          <a:lstStyle/>
-          <a:p>
-            <a:pPr algn="ctr"/>
-          </a:p>
-        </p:txBody>
-      </p:sp>
-      <p:sp>
-        <p:nvSpPr>
-          <p:cNvPr id="5" name="TextBox 4"/>
-          <p:cNvSpPr txBox="1"/>
-          <p:nvPr/>
-        </p:nvSpPr>
-        <p:spPr>
-          <a:xfrm>
-            <a:off x="868680" y="1554480"/>
-            <a:ext cx="3063240" cy="457200"/>
-          </a:xfrm>
-          <a:prstGeom prst="rect">
-            <a:avLst/>
-          </a:prstGeom>
-          <a:noFill/>
-        </p:spPr>
-        <p:txBody>
-          <a:bodyPr wrap="square" anchor="t" lIns="0" rIns="0" tIns="0" bIns="0">
-            <a:spAutoFit/>
-          </a:bodyPr>
-          <a:lstStyle/>
-          <a:p>
-            <a:pPr algn="l"/>
-            <a:r>
-              <a:rPr sz="1700" b="1" i="0">
-                <a:solidFill>
-                  <a:srgbClr val="FFFFFF"/>
-                </a:solidFill>
-                <a:latin typeface="Calibri"/>
-              </a:rPr>
-              <a:t>Lv.1</a:t>
-            </a:r>
-          </a:p>
-        </p:txBody>
-      </p:sp>
-      <p:sp>
-        <p:nvSpPr>
-          <p:cNvPr id="6" name="TextBox 5"/>
-          <p:cNvSpPr txBox="1"/>
-          <p:nvPr/>
-        </p:nvSpPr>
-        <p:spPr>
-          <a:xfrm>
-            <a:off x="868680" y="2103120"/>
-            <a:ext cx="3063240" cy="1143000"/>
-          </a:xfrm>
-          <a:prstGeom prst="rect">
-            <a:avLst/>
-          </a:prstGeom>
-          <a:noFill/>
-        </p:spPr>
-        <p:txBody>
-          <a:bodyPr wrap="square" anchor="t" lIns="0" rIns="0" tIns="0" bIns="0">
-            <a:spAutoFit/>
-          </a:bodyPr>
-          <a:lstStyle/>
-          <a:p>
-            <a:pPr algn="l">
-              <a:lnSpc>
-                <a:spcPct val="130000"/>
-              </a:lnSpc>
-            </a:pPr>
-            <a:r>
-              <a:rPr sz="1300" b="1" i="0">
-                <a:solidFill>
-                  <a:srgbClr val="FFFFFF"/>
-                </a:solidFill>
-                <a:latin typeface="Calibri"/>
-              </a:rPr>
-              <a:t>리뷰 텍스트를 직접</a:t>
-            </a:r>
-          </a:p>
-          <a:p>
-            <a:pPr algn="l">
-              <a:lnSpc>
-                <a:spcPct val="130000"/>
-              </a:lnSpc>
-            </a:pPr>
-            <a:r>
-              <a:rPr sz="1300" b="1" i="0">
-                <a:solidFill>
-                  <a:srgbClr val="FFFFFF"/>
-                </a:solidFill>
-                <a:latin typeface="Calibri"/>
-              </a:rPr>
-              <a:t>타이핑하는 데모</a:t>
-            </a:r>
-          </a:p>
-        </p:txBody>
-      </p:sp>
-      <p:sp>
-        <p:nvSpPr>
-          <p:cNvPr id="7" name="TextBox 6"/>
-          <p:cNvSpPr txBox="1"/>
-          <p:nvPr/>
-        </p:nvSpPr>
-        <p:spPr>
-          <a:xfrm>
-            <a:off x="868680" y="3291840"/>
-            <a:ext cx="3063240" cy="457200"/>
-          </a:xfrm>
-          <a:prstGeom prst="rect">
-            <a:avLst/>
-          </a:prstGeom>
-          <a:noFill/>
-        </p:spPr>
-        <p:txBody>
-          <a:bodyPr wrap="square" anchor="t" lIns="0" rIns="0" tIns="0" bIns="0">
-            <a:spAutoFit/>
-          </a:bodyPr>
-          <a:lstStyle/>
-          <a:p>
-            <a:pPr algn="l">
-              <a:lnSpc>
-                <a:spcPct val="120000"/>
-              </a:lnSpc>
-            </a:pPr>
-            <a:r>
-              <a:rPr sz="1150" b="0" i="1">
-                <a:solidFill>
-                  <a:srgbClr val="CADCFC"/>
-                </a:solidFill>
-                <a:latin typeface="Calibri"/>
-              </a:rPr>
-              <a:t>→ "실용성 없다" 피드백</a:t>
-            </a:r>
-          </a:p>
-        </p:txBody>
-      </p:sp>
-      <p:sp>
-        <p:nvSpPr>
-          <p:cNvPr id="8" name="Right Arrow 7"/>
-          <p:cNvSpPr/>
-          <p:nvPr/>
-        </p:nvSpPr>
-        <p:spPr>
-          <a:xfrm>
-            <a:off x="4178807" y="2468880"/>
-            <a:ext cx="146304" cy="320040"/>
-          </a:xfrm>
-          <a:prstGeom prst="rightArrow">
-            <a:avLst/>
-          </a:prstGeom>
-          <a:solidFill>
-            <a:srgbClr val="CADCFC"/>
-          </a:solidFill>
-          <a:ln>
-            <a:noFill/>
-          </a:ln>
-          <a:effectLst/>
-        </p:spPr>
-        <p:style>
-          <a:lnRef idx="1">
-            <a:schemeClr val="accent1"/>
-          </a:lnRef>
-          <a:fillRef idx="3">
-            <a:schemeClr val="accent1"/>
-          </a:fillRef>
-          <a:effectRef idx="2">
-            <a:schemeClr val="accent1"/>
-          </a:effectRef>
-          <a:fontRef idx="minor">
-            <a:schemeClr val="lt1"/>
-          </a:fontRef>
-        </p:style>
-        <p:txBody>
-          <a:bodyPr rtlCol="0" anchor="ctr"/>
-          <a:lstStyle/>
-          <a:p>
-            <a:pPr algn="ctr"/>
-          </a:p>
-        </p:txBody>
-      </p:sp>
-      <p:sp>
-        <p:nvSpPr>
-          <p:cNvPr id="9" name="Rounded Rectangle 8"/>
-          <p:cNvSpPr/>
-          <p:nvPr/>
-        </p:nvSpPr>
-        <p:spPr>
-          <a:xfrm>
-            <a:off x="4343400" y="1371600"/>
-            <a:ext cx="3520440" cy="2377440"/>
-          </a:xfrm>
-          <a:prstGeom prst="roundRect">
-            <a:avLst>
-              <a:gd name="adj" fmla="val 7000"/>
-            </a:avLst>
-          </a:prstGeom>
-          <a:solidFill>
-            <a:srgbClr val="3A468C"/>
-          </a:solidFill>
-          <a:ln>
-            <a:noFill/>
-          </a:ln>
-          <a:effectLst/>
-        </p:spPr>
-        <p:style>
-          <a:lnRef idx="1">
-            <a:schemeClr val="accent1"/>
-          </a:lnRef>
-          <a:fillRef idx="3">
-            <a:schemeClr val="accent1"/>
-          </a:fillRef>
-          <a:effectRef idx="2">
-            <a:schemeClr val="accent1"/>
-          </a:effectRef>
-          <a:fontRef idx="minor">
-            <a:schemeClr val="lt1"/>
-          </a:fontRef>
-        </p:style>
-        <p:txBody>
-          <a:bodyPr rtlCol="0" anchor="ctr"/>
-          <a:lstStyle/>
-          <a:p>
-            <a:pPr algn="ctr"/>
-          </a:p>
-        </p:txBody>
-      </p:sp>
-      <p:sp>
-        <p:nvSpPr>
-          <p:cNvPr id="10" name="TextBox 9"/>
-          <p:cNvSpPr txBox="1"/>
-          <p:nvPr/>
-        </p:nvSpPr>
-        <p:spPr>
-          <a:xfrm>
-            <a:off x="4572000" y="1554480"/>
-            <a:ext cx="3063240" cy="457200"/>
-          </a:xfrm>
-          <a:prstGeom prst="rect">
-            <a:avLst/>
-          </a:prstGeom>
-          <a:noFill/>
-        </p:spPr>
-        <p:txBody>
-          <a:bodyPr wrap="square" anchor="t" lIns="0" rIns="0" tIns="0" bIns="0">
-            <a:spAutoFit/>
-          </a:bodyPr>
-          <a:lstStyle/>
-          <a:p>
-            <a:pPr algn="l"/>
-            <a:r>
-              <a:rPr sz="1700" b="1" i="0">
-                <a:solidFill>
-                  <a:srgbClr val="FFFFFF"/>
-                </a:solidFill>
-                <a:latin typeface="Calibri"/>
-              </a:rPr>
-              <a:t>Lv.2</a:t>
-            </a:r>
-          </a:p>
-        </p:txBody>
-      </p:sp>
-      <p:sp>
-        <p:nvSpPr>
-          <p:cNvPr id="11" name="TextBox 10"/>
-          <p:cNvSpPr txBox="1"/>
-          <p:nvPr/>
-        </p:nvSpPr>
-        <p:spPr>
-          <a:xfrm>
-            <a:off x="4572000" y="2103120"/>
-            <a:ext cx="3063240" cy="1143000"/>
-          </a:xfrm>
-          <a:prstGeom prst="rect">
-            <a:avLst/>
-          </a:prstGeom>
-          <a:noFill/>
-        </p:spPr>
-        <p:txBody>
-          <a:bodyPr wrap="square" anchor="t" lIns="0" rIns="0" tIns="0" bIns="0">
-            <a:spAutoFit/>
-          </a:bodyPr>
-          <a:lstStyle/>
-          <a:p>
-            <a:pPr algn="l">
-              <a:lnSpc>
-                <a:spcPct val="130000"/>
-              </a:lnSpc>
-            </a:pPr>
-            <a:r>
-              <a:rPr sz="1300" b="1" i="0">
-                <a:solidFill>
-                  <a:srgbClr val="FFFFFF"/>
-                </a:solidFill>
-                <a:latin typeface="Calibri"/>
-              </a:rPr>
-              <a:t>상품 검색 → 8개 속성별</a:t>
-            </a:r>
-          </a:p>
-          <a:p>
-            <a:pPr algn="l">
-              <a:lnSpc>
-                <a:spcPct val="130000"/>
-              </a:lnSpc>
-            </a:pPr>
-            <a:r>
-              <a:rPr sz="1300" b="1" i="0">
-                <a:solidFill>
-                  <a:srgbClr val="FFFFFF"/>
-                </a:solidFill>
-                <a:latin typeface="Calibri"/>
-              </a:rPr>
-              <a:t>긍정비율 + 대표리뷰</a:t>
-            </a:r>
-          </a:p>
-        </p:txBody>
-      </p:sp>
-      <p:sp>
-        <p:nvSpPr>
-          <p:cNvPr id="12" name="TextBox 11"/>
-          <p:cNvSpPr txBox="1"/>
-          <p:nvPr/>
-        </p:nvSpPr>
-        <p:spPr>
-          <a:xfrm>
-            <a:off x="4572000" y="3291840"/>
-            <a:ext cx="3063240" cy="457200"/>
-          </a:xfrm>
-          <a:prstGeom prst="rect">
-            <a:avLst/>
-          </a:prstGeom>
-          <a:noFill/>
-        </p:spPr>
-        <p:txBody>
-          <a:bodyPr wrap="square" anchor="t" lIns="0" rIns="0" tIns="0" bIns="0">
-            <a:spAutoFit/>
-          </a:bodyPr>
-          <a:lstStyle/>
-          <a:p>
-            <a:pPr algn="l">
-              <a:lnSpc>
-                <a:spcPct val="120000"/>
-              </a:lnSpc>
-            </a:pPr>
-            <a:r>
-              <a:rPr sz="1150" b="0" i="1">
-                <a:solidFill>
-                  <a:srgbClr val="CADCFC"/>
-                </a:solidFill>
-                <a:latin typeface="Calibri"/>
-              </a:rPr>
-              <a:t>→ "더 구체적이면 좋겠다"</a:t>
-            </a:r>
-          </a:p>
-        </p:txBody>
-      </p:sp>
-      <p:sp>
-        <p:nvSpPr>
-          <p:cNvPr id="13" name="Right Arrow 12"/>
-          <p:cNvSpPr/>
-          <p:nvPr/>
-        </p:nvSpPr>
-        <p:spPr>
-          <a:xfrm>
-            <a:off x="7882127" y="2468880"/>
-            <a:ext cx="146304" cy="320040"/>
-          </a:xfrm>
-          <a:prstGeom prst="rightArrow">
-            <a:avLst/>
-          </a:prstGeom>
-          <a:solidFill>
-            <a:srgbClr val="CADCFC"/>
-          </a:solidFill>
-          <a:ln>
-            <a:noFill/>
-          </a:ln>
-          <a:effectLst/>
-        </p:spPr>
-        <p:style>
-          <a:lnRef idx="1">
-            <a:schemeClr val="accent1"/>
-          </a:lnRef>
-          <a:fillRef idx="3">
-            <a:schemeClr val="accent1"/>
-          </a:fillRef>
-          <a:effectRef idx="2">
-            <a:schemeClr val="accent1"/>
-          </a:effectRef>
-          <a:fontRef idx="minor">
-            <a:schemeClr val="lt1"/>
-          </a:fontRef>
-        </p:style>
-        <p:txBody>
-          <a:bodyPr rtlCol="0" anchor="ctr"/>
-          <a:lstStyle/>
-          <a:p>
-            <a:pPr algn="ctr"/>
-          </a:p>
-        </p:txBody>
-      </p:sp>
-      <p:sp>
-        <p:nvSpPr>
-          <p:cNvPr id="14" name="Rounded Rectangle 13"/>
-          <p:cNvSpPr/>
-          <p:nvPr/>
-        </p:nvSpPr>
-        <p:spPr>
-          <a:xfrm>
-            <a:off x="8046719" y="1371600"/>
-            <a:ext cx="3520440" cy="2377440"/>
-          </a:xfrm>
-          <a:prstGeom prst="roundRect">
-            <a:avLst>
-              <a:gd name="adj" fmla="val 7000"/>
-            </a:avLst>
-          </a:prstGeom>
-          <a:solidFill>
-            <a:srgbClr val="F96167"/>
-          </a:solidFill>
-          <a:ln>
-            <a:noFill/>
-          </a:ln>
-          <a:effectLst/>
-        </p:spPr>
-        <p:style>
-          <a:lnRef idx="1">
-            <a:schemeClr val="accent1"/>
-          </a:lnRef>
-          <a:fillRef idx="3">
-            <a:schemeClr val="accent1"/>
-          </a:fillRef>
-          <a:effectRef idx="2">
-            <a:schemeClr val="accent1"/>
-          </a:effectRef>
-          <a:fontRef idx="minor">
-            <a:schemeClr val="lt1"/>
-          </a:fontRef>
-        </p:style>
-        <p:txBody>
-          <a:bodyPr rtlCol="0" anchor="ctr"/>
-          <a:lstStyle/>
-          <a:p>
-            <a:pPr algn="ctr"/>
-          </a:p>
-        </p:txBody>
-      </p:sp>
-      <p:sp>
-        <p:nvSpPr>
-          <p:cNvPr id="15" name="TextBox 14"/>
-          <p:cNvSpPr txBox="1"/>
-          <p:nvPr/>
-        </p:nvSpPr>
-        <p:spPr>
-          <a:xfrm>
-            <a:off x="8275319" y="1554480"/>
-            <a:ext cx="3063240" cy="457200"/>
-          </a:xfrm>
-          <a:prstGeom prst="rect">
-            <a:avLst/>
-          </a:prstGeom>
-          <a:noFill/>
-        </p:spPr>
-        <p:txBody>
-          <a:bodyPr wrap="square" anchor="t" lIns="0" rIns="0" tIns="0" bIns="0">
-            <a:spAutoFit/>
-          </a:bodyPr>
-          <a:lstStyle/>
-          <a:p>
-            <a:pPr algn="l"/>
-            <a:r>
-              <a:rPr sz="1700" b="1" i="0">
-                <a:solidFill>
-                  <a:srgbClr val="FFFFFF"/>
-                </a:solidFill>
-                <a:latin typeface="Calibri"/>
-              </a:rPr>
-              <a:t>Lv.3</a:t>
-            </a:r>
-          </a:p>
-          <a:p>
-            <a:pPr algn="l"/>
-            <a:r>
-              <a:rPr sz="1700" b="1" i="0">
-                <a:solidFill>
-                  <a:srgbClr val="FFFFFF"/>
-                </a:solidFill>
-                <a:latin typeface="Calibri"/>
-              </a:rPr>
-              <a:t>(현재)</a:t>
-            </a:r>
-          </a:p>
-        </p:txBody>
-      </p:sp>
-      <p:sp>
-        <p:nvSpPr>
-          <p:cNvPr id="16" name="TextBox 15"/>
-          <p:cNvSpPr txBox="1"/>
-          <p:nvPr/>
-        </p:nvSpPr>
-        <p:spPr>
-          <a:xfrm>
-            <a:off x="8275319" y="2103120"/>
-            <a:ext cx="3063240" cy="1143000"/>
-          </a:xfrm>
-          <a:prstGeom prst="rect">
-            <a:avLst/>
-          </a:prstGeom>
-          <a:noFill/>
-        </p:spPr>
-        <p:txBody>
-          <a:bodyPr wrap="square" anchor="t" lIns="0" rIns="0" tIns="0" bIns="0">
-            <a:spAutoFit/>
-          </a:bodyPr>
-          <a:lstStyle/>
-          <a:p>
-            <a:pPr algn="l">
-              <a:lnSpc>
-                <a:spcPct val="130000"/>
-              </a:lnSpc>
-            </a:pPr>
-            <a:r>
-              <a:rPr sz="1300" b="1" i="0">
-                <a:solidFill>
-                  <a:srgbClr val="FFFFFF"/>
-                </a:solidFill>
-                <a:latin typeface="Calibri"/>
-              </a:rPr>
-              <a:t>+ 속성별 랭킹</a:t>
-            </a:r>
-          </a:p>
-          <a:p>
-            <a:pPr algn="l">
-              <a:lnSpc>
-                <a:spcPct val="130000"/>
-              </a:lnSpc>
-            </a:pPr>
-            <a:r>
-              <a:rPr sz="1300" b="1" i="0">
-                <a:solidFill>
-                  <a:srgbClr val="FFFFFF"/>
-                </a:solidFill>
-                <a:latin typeface="Calibri"/>
-              </a:rPr>
-              <a:t>+ 대안 상품 추천</a:t>
-            </a:r>
-          </a:p>
-          <a:p>
-            <a:pPr algn="l">
-              <a:lnSpc>
-                <a:spcPct val="130000"/>
-              </a:lnSpc>
-            </a:pPr>
-            <a:r>
-              <a:rPr sz="1300" b="1" i="0">
-                <a:solidFill>
-                  <a:srgbClr val="FFFFFF"/>
-                </a:solidFill>
-                <a:latin typeface="Calibri"/>
-              </a:rPr>
-              <a:t>+ 피부타입별 세그먼트</a:t>
-            </a:r>
-          </a:p>
-        </p:txBody>
-      </p:sp>
-      <p:sp>
-        <p:nvSpPr>
-          <p:cNvPr id="17" name="TextBox 16"/>
-          <p:cNvSpPr txBox="1"/>
-          <p:nvPr/>
-        </p:nvSpPr>
-        <p:spPr>
-          <a:xfrm>
-            <a:off x="8275319" y="3291840"/>
-            <a:ext cx="3063240" cy="457200"/>
-          </a:xfrm>
-          <a:prstGeom prst="rect">
-            <a:avLst/>
-          </a:prstGeom>
-          <a:noFill/>
-        </p:spPr>
-        <p:txBody>
-          <a:bodyPr wrap="square" anchor="t" lIns="0" rIns="0" tIns="0" bIns="0">
-            <a:spAutoFit/>
-          </a:bodyPr>
-          <a:lstStyle/>
-          <a:p>
-            <a:pPr algn="l">
-              <a:lnSpc>
-                <a:spcPct val="120000"/>
-              </a:lnSpc>
-            </a:pPr>
-            <a:r>
-              <a:rPr sz="1150" b="0" i="1">
-                <a:solidFill>
-                  <a:srgbClr val="CADCFC"/>
-                </a:solidFill>
-                <a:latin typeface="Calibri"/>
-              </a:rPr>
-              <a:t>"나에게 맞는" 제품 매칭까지</a:t>
-            </a:r>
-          </a:p>
-        </p:txBody>
-      </p:sp>
-      <p:sp>
-        <p:nvSpPr>
-          <p:cNvPr id="18" name="Rounded Rectangle 17"/>
-          <p:cNvSpPr/>
-          <p:nvPr/>
-        </p:nvSpPr>
-        <p:spPr>
-          <a:xfrm>
-            <a:off x="640080" y="3977639"/>
-            <a:ext cx="10881360" cy="868680"/>
-          </a:xfrm>
-          <a:prstGeom prst="roundRect">
-            <a:avLst>
-              <a:gd name="adj" fmla="val 10000"/>
-            </a:avLst>
-          </a:prstGeom>
-          <a:solidFill>
-            <a:srgbClr val="F96167"/>
-          </a:solidFill>
-          <a:ln>
-            <a:noFill/>
-          </a:ln>
-          <a:effectLst/>
-        </p:spPr>
-        <p:style>
-          <a:lnRef idx="1">
-            <a:schemeClr val="accent1"/>
-          </a:lnRef>
-          <a:fillRef idx="3">
-            <a:schemeClr val="accent1"/>
-          </a:fillRef>
-          <a:effectRef idx="2">
-            <a:schemeClr val="accent1"/>
-          </a:effectRef>
-          <a:fontRef idx="minor">
-            <a:schemeClr val="lt1"/>
-          </a:fontRef>
-        </p:style>
-        <p:txBody>
-          <a:bodyPr rtlCol="0" anchor="ctr"/>
-          <a:lstStyle/>
-          <a:p>
-            <a:pPr algn="ctr"/>
-          </a:p>
-        </p:txBody>
-      </p:sp>
-      <p:sp>
-        <p:nvSpPr>
-          <p:cNvPr id="19" name="TextBox 18"/>
-          <p:cNvSpPr txBox="1"/>
-          <p:nvPr/>
-        </p:nvSpPr>
-        <p:spPr>
-          <a:xfrm>
-            <a:off x="914400" y="4206240"/>
-            <a:ext cx="10332720" cy="548640"/>
-          </a:xfrm>
-          <a:prstGeom prst="rect">
-            <a:avLst/>
-          </a:prstGeom>
-          <a:noFill/>
-        </p:spPr>
-        <p:txBody>
-          <a:bodyPr wrap="square" anchor="t" lIns="0" rIns="0" tIns="0" bIns="0">
-            <a:spAutoFit/>
-          </a:bodyPr>
-          <a:lstStyle/>
-          <a:p>
-            <a:pPr algn="ctr"/>
-            <a:r>
-              <a:rPr sz="1450" b="1" i="0">
-                <a:solidFill>
-                  <a:srgbClr val="FFFFFF"/>
-                </a:solidFill>
-                <a:latin typeface="Calibri"/>
-              </a:rPr>
-              <a:t>결국 BeautyScope는 "평점이 높은 제품"이 아니라 "내가 중요하게 생각하는 속성에 강한 제품"을 찾아주는 매칭 서비스로 성장했다</a:t>
-            </a:r>
-          </a:p>
-        </p:txBody>
-      </p:sp>
-      <p:sp>
-        <p:nvSpPr>
-          <p:cNvPr id="20" name="TextBox 19"/>
-          <p:cNvSpPr txBox="1"/>
-          <p:nvPr/>
-        </p:nvSpPr>
-        <p:spPr>
-          <a:xfrm>
-            <a:off x="640080" y="5074920"/>
-            <a:ext cx="10515600" cy="365760"/>
-          </a:xfrm>
-          <a:prstGeom prst="rect">
-            <a:avLst/>
-          </a:prstGeom>
-          <a:noFill/>
-        </p:spPr>
-        <p:txBody>
-          <a:bodyPr wrap="square" anchor="t" lIns="0" rIns="0" tIns="0" bIns="0">
-            <a:spAutoFit/>
-          </a:bodyPr>
-          <a:lstStyle/>
-          <a:p>
-            <a:pPr algn="l"/>
-            <a:r>
-              <a:rPr sz="1600" b="1" i="0">
-                <a:solidFill>
-                  <a:srgbClr val="FFFFFF"/>
-                </a:solidFill>
-                <a:latin typeface="Calibri"/>
-              </a:rPr>
-              <a:t>정리</a:t>
-            </a:r>
-          </a:p>
-        </p:txBody>
-      </p:sp>
-      <p:sp>
-        <p:nvSpPr>
-          <p:cNvPr id="21" name="TextBox 20"/>
-          <p:cNvSpPr txBox="1"/>
-          <p:nvPr/>
-        </p:nvSpPr>
-        <p:spPr>
-          <a:xfrm>
-            <a:off x="640080" y="5486400"/>
-            <a:ext cx="10515600" cy="1188720"/>
-          </a:xfrm>
-          <a:prstGeom prst="rect">
-            <a:avLst/>
-          </a:prstGeom>
-          <a:noFill/>
-        </p:spPr>
-        <p:txBody>
-          <a:bodyPr wrap="square">
-            <a:spAutoFit/>
-          </a:bodyPr>
-          <a:lstStyle/>
-          <a:p>
-            <a:pPr>
-              <a:spcAft>
-                <a:spcPts val="800"/>
-              </a:spcAft>
-            </a:pPr>
-            <a:r>
-              <a:rPr sz="1350">
-                <a:solidFill>
-                  <a:srgbClr val="FFFFFF"/>
-                </a:solidFill>
-                <a:latin typeface="Calibri"/>
-              </a:rPr>
-              <a:t>•  538,774건 데이터를 통일된 기준으로 통합, 4개 모델(ML/DL/LSTM/Transformer)을 비교 학습</a:t>
-            </a:r>
-          </a:p>
-          <a:p>
-            <a:pPr>
-              <a:spcAft>
-                <a:spcPts val="800"/>
-              </a:spcAft>
-            </a:pPr>
-            <a:r>
-              <a:rPr sz="1350">
-                <a:solidFill>
-                  <a:srgbClr val="FFFFFF"/>
-                </a:solidFill>
-                <a:latin typeface="Calibri"/>
-              </a:rPr>
-              <a:t>•  실제 분포 재평가로 숨은 문제(label shift)를 찾아 보정, 세 차례 피드백을 거치며 서비스를 단계적으로 발전</a:t>
-            </a:r>
-          </a:p>
-        </p:txBody>
-      </p:sp>
     </p:spTree>
   </p:cSld>
   <p:clrMapOvr>

--- a/BeautyScope_발표.pptx
+++ b/BeautyScope_발표.pptx
@@ -12,6 +12,7 @@
     <p:sldId id="260" r:id="rId11"/>
     <p:sldId id="261" r:id="rId12"/>
     <p:sldId id="262" r:id="rId13"/>
+    <p:sldId id="263" r:id="rId14"/>
   </p:sldIdLst>
   <p:sldSz cx="12191695" cy="6858000" type="screen4x3"/>
   <p:notesSz cx="6858000" cy="9144000"/>
@@ -8443,6 +8444,755 @@
 </p:sld>
 </file>
 
+<file path=ppt/slides/slide8.xml><?xml version="1.0" encoding="utf-8"?>
+<p:sld xmlns:a="http://schemas.openxmlformats.org/drawingml/2006/main" xmlns:p="http://schemas.openxmlformats.org/presentationml/2006/main" xmlns:r="http://schemas.openxmlformats.org/officeDocument/2006/relationships">
+  <p:cSld>
+    <p:spTree>
+      <p:nvGrpSpPr>
+        <p:cNvPr id="1" name=""/>
+        <p:cNvGrpSpPr/>
+        <p:nvPr/>
+      </p:nvGrpSpPr>
+      <p:grpSpPr/>
+      <p:sp>
+        <p:nvSpPr>
+          <p:cNvPr id="2" name="Rectangle 1"/>
+          <p:cNvSpPr/>
+          <p:nvPr/>
+        </p:nvSpPr>
+        <p:spPr>
+          <a:xfrm>
+            <a:off x="0" y="0"/>
+            <a:ext cx="12191695" cy="6858000"/>
+          </a:xfrm>
+          <a:prstGeom prst="rect">
+            <a:avLst/>
+          </a:prstGeom>
+          <a:solidFill>
+            <a:srgbClr val="FFFFFF"/>
+          </a:solidFill>
+          <a:ln>
+            <a:noFill/>
+          </a:ln>
+          <a:effectLst/>
+        </p:spPr>
+        <p:style>
+          <a:lnRef idx="1">
+            <a:schemeClr val="accent1"/>
+          </a:lnRef>
+          <a:fillRef idx="3">
+            <a:schemeClr val="accent1"/>
+          </a:fillRef>
+          <a:effectRef idx="2">
+            <a:schemeClr val="accent1"/>
+          </a:effectRef>
+          <a:fontRef idx="minor">
+            <a:schemeClr val="lt1"/>
+          </a:fontRef>
+        </p:style>
+        <p:txBody>
+          <a:bodyPr rtlCol="0" anchor="ctr"/>
+          <a:lstStyle/>
+          <a:p>
+            <a:pPr algn="ctr"/>
+          </a:p>
+        </p:txBody>
+      </p:sp>
+      <p:sp>
+        <p:nvSpPr>
+          <p:cNvPr id="3" name="TextBox 2"/>
+          <p:cNvSpPr txBox="1"/>
+          <p:nvPr/>
+        </p:nvSpPr>
+        <p:spPr>
+          <a:xfrm>
+            <a:off x="640080" y="457200"/>
+            <a:ext cx="10515600" cy="731520"/>
+          </a:xfrm>
+          <a:prstGeom prst="rect">
+            <a:avLst/>
+          </a:prstGeom>
+          <a:noFill/>
+        </p:spPr>
+        <p:txBody>
+          <a:bodyPr wrap="square" anchor="t" lIns="0" rIns="0" tIns="0" bIns="0">
+            <a:spAutoFit/>
+          </a:bodyPr>
+          <a:lstStyle/>
+          <a:p>
+            <a:pPr algn="l"/>
+            <a:r>
+              <a:rPr sz="2600" b="1" i="0">
+                <a:solidFill>
+                  <a:srgbClr val="1E2761"/>
+                </a:solidFill>
+                <a:latin typeface="Georgia"/>
+              </a:rPr>
+              <a:t>모델을 실제로 어떻게 썼나 — 리뷰 신뢰도 검증</a:t>
+            </a:r>
+          </a:p>
+        </p:txBody>
+      </p:sp>
+      <p:sp>
+        <p:nvSpPr>
+          <p:cNvPr id="4" name="TextBox 3"/>
+          <p:cNvSpPr txBox="1"/>
+          <p:nvPr/>
+        </p:nvSpPr>
+        <p:spPr>
+          <a:xfrm>
+            <a:off x="640080" y="1188720"/>
+            <a:ext cx="10515600" cy="457200"/>
+          </a:xfrm>
+          <a:prstGeom prst="rect">
+            <a:avLst/>
+          </a:prstGeom>
+          <a:noFill/>
+        </p:spPr>
+        <p:txBody>
+          <a:bodyPr wrap="square" anchor="t" lIns="0" rIns="0" tIns="0" bIns="0">
+            <a:spAutoFit/>
+          </a:bodyPr>
+          <a:lstStyle/>
+          <a:p>
+            <a:pPr algn="l"/>
+            <a:r>
+              <a:rPr sz="1350" b="0" i="0">
+                <a:solidFill>
+                  <a:srgbClr val="6B7280"/>
+                </a:solidFill>
+                <a:latin typeface="Calibri"/>
+              </a:rPr>
+              <a:t>모델을 성능 비교로 끝내지 않고, 보정된 모델을 그대로 서비스 핵심 지표에 연결했다</a:t>
+            </a:r>
+          </a:p>
+        </p:txBody>
+      </p:sp>
+      <p:sp>
+        <p:nvSpPr>
+          <p:cNvPr id="5" name="Rectangle 4"/>
+          <p:cNvSpPr/>
+          <p:nvPr/>
+        </p:nvSpPr>
+        <p:spPr>
+          <a:xfrm>
+            <a:off x="640080" y="1737360"/>
+            <a:ext cx="3520440" cy="2651760"/>
+          </a:xfrm>
+          <a:prstGeom prst="rect">
+            <a:avLst/>
+          </a:prstGeom>
+          <a:solidFill>
+            <a:srgbClr val="F5F6FA"/>
+          </a:solidFill>
+          <a:ln>
+            <a:noFill/>
+          </a:ln>
+          <a:effectLst/>
+        </p:spPr>
+        <p:style>
+          <a:lnRef idx="1">
+            <a:schemeClr val="accent1"/>
+          </a:lnRef>
+          <a:fillRef idx="3">
+            <a:schemeClr val="accent1"/>
+          </a:fillRef>
+          <a:effectRef idx="2">
+            <a:schemeClr val="accent1"/>
+          </a:effectRef>
+          <a:fontRef idx="minor">
+            <a:schemeClr val="lt1"/>
+          </a:fontRef>
+        </p:style>
+        <p:txBody>
+          <a:bodyPr rtlCol="0" anchor="ctr"/>
+          <a:lstStyle/>
+          <a:p>
+            <a:pPr algn="ctr"/>
+          </a:p>
+        </p:txBody>
+      </p:sp>
+      <p:sp>
+        <p:nvSpPr>
+          <p:cNvPr id="6" name="Rectangle 5"/>
+          <p:cNvSpPr/>
+          <p:nvPr/>
+        </p:nvSpPr>
+        <p:spPr>
+          <a:xfrm>
+            <a:off x="640080" y="1737360"/>
+            <a:ext cx="64008" cy="2651760"/>
+          </a:xfrm>
+          <a:prstGeom prst="rect">
+            <a:avLst/>
+          </a:prstGeom>
+          <a:solidFill>
+            <a:srgbClr val="1E2761"/>
+          </a:solidFill>
+          <a:ln>
+            <a:noFill/>
+          </a:ln>
+          <a:effectLst/>
+        </p:spPr>
+        <p:style>
+          <a:lnRef idx="1">
+            <a:schemeClr val="accent1"/>
+          </a:lnRef>
+          <a:fillRef idx="3">
+            <a:schemeClr val="accent1"/>
+          </a:fillRef>
+          <a:effectRef idx="2">
+            <a:schemeClr val="accent1"/>
+          </a:effectRef>
+          <a:fontRef idx="minor">
+            <a:schemeClr val="lt1"/>
+          </a:fontRef>
+        </p:style>
+        <p:txBody>
+          <a:bodyPr rtlCol="0" anchor="ctr"/>
+          <a:lstStyle/>
+          <a:p>
+            <a:pPr algn="ctr"/>
+          </a:p>
+        </p:txBody>
+      </p:sp>
+      <p:sp>
+        <p:nvSpPr>
+          <p:cNvPr id="7" name="TextBox 6"/>
+          <p:cNvSpPr txBox="1"/>
+          <p:nvPr/>
+        </p:nvSpPr>
+        <p:spPr>
+          <a:xfrm>
+            <a:off x="868680" y="1965960"/>
+            <a:ext cx="3063240" cy="457200"/>
+          </a:xfrm>
+          <a:prstGeom prst="rect">
+            <a:avLst/>
+          </a:prstGeom>
+          <a:noFill/>
+        </p:spPr>
+        <p:txBody>
+          <a:bodyPr wrap="square" anchor="t" lIns="0" rIns="0" tIns="0" bIns="0">
+            <a:spAutoFit/>
+          </a:bodyPr>
+          <a:lstStyle/>
+          <a:p>
+            <a:pPr algn="l"/>
+            <a:r>
+              <a:rPr sz="1500" b="1" i="0">
+                <a:solidFill>
+                  <a:srgbClr val="1E2761"/>
+                </a:solidFill>
+                <a:latin typeface="Calibri"/>
+              </a:rPr>
+              <a:t>배경</a:t>
+            </a:r>
+          </a:p>
+        </p:txBody>
+      </p:sp>
+      <p:sp>
+        <p:nvSpPr>
+          <p:cNvPr id="8" name="TextBox 7"/>
+          <p:cNvSpPr txBox="1"/>
+          <p:nvPr/>
+        </p:nvSpPr>
+        <p:spPr>
+          <a:xfrm>
+            <a:off x="868680" y="2468880"/>
+            <a:ext cx="3063240" cy="1828800"/>
+          </a:xfrm>
+          <a:prstGeom prst="rect">
+            <a:avLst/>
+          </a:prstGeom>
+          <a:noFill/>
+        </p:spPr>
+        <p:txBody>
+          <a:bodyPr wrap="square" anchor="t" lIns="0" rIns="0" tIns="0" bIns="0">
+            <a:spAutoFit/>
+          </a:bodyPr>
+          <a:lstStyle/>
+          <a:p>
+            <a:pPr algn="l">
+              <a:lnSpc>
+                <a:spcPct val="135000"/>
+              </a:lnSpc>
+            </a:pPr>
+            <a:r>
+              <a:rPr sz="1200" b="0" i="0">
+                <a:solidFill>
+                  <a:srgbClr val="21295C"/>
+                </a:solidFill>
+                <a:latin typeface="Calibri"/>
+              </a:rPr>
+              <a:t>별점 기반 라벨링의 한계로, 별점 5점 리뷰의 21%가</a:t>
+            </a:r>
+          </a:p>
+          <a:p>
+            <a:pPr algn="l">
+              <a:lnSpc>
+                <a:spcPct val="135000"/>
+              </a:lnSpc>
+            </a:pPr>
+            <a:r>
+              <a:rPr sz="1200" b="0" i="0">
+                <a:solidFill>
+                  <a:srgbClr val="21295C"/>
+                </a:solidFill>
+                <a:latin typeface="Calibri"/>
+              </a:rPr>
+              <a:t>실제로는 부정적 내용이었다 — 평점만 믿으면 속성</a:t>
+            </a:r>
+          </a:p>
+          <a:p>
+            <a:pPr algn="l">
+              <a:lnSpc>
+                <a:spcPct val="135000"/>
+              </a:lnSpc>
+            </a:pPr>
+            <a:r>
+              <a:rPr sz="1200" b="0" i="0">
+                <a:solidFill>
+                  <a:srgbClr val="21295C"/>
+                </a:solidFill>
+                <a:latin typeface="Calibri"/>
+              </a:rPr>
+              <a:t>분석 결과도 같이 흔들린다</a:t>
+            </a:r>
+          </a:p>
+        </p:txBody>
+      </p:sp>
+      <p:sp>
+        <p:nvSpPr>
+          <p:cNvPr id="9" name="Rectangle 8"/>
+          <p:cNvSpPr/>
+          <p:nvPr/>
+        </p:nvSpPr>
+        <p:spPr>
+          <a:xfrm>
+            <a:off x="4343400" y="1737360"/>
+            <a:ext cx="3520440" cy="2651760"/>
+          </a:xfrm>
+          <a:prstGeom prst="rect">
+            <a:avLst/>
+          </a:prstGeom>
+          <a:solidFill>
+            <a:srgbClr val="F5F6FA"/>
+          </a:solidFill>
+          <a:ln>
+            <a:noFill/>
+          </a:ln>
+          <a:effectLst/>
+        </p:spPr>
+        <p:style>
+          <a:lnRef idx="1">
+            <a:schemeClr val="accent1"/>
+          </a:lnRef>
+          <a:fillRef idx="3">
+            <a:schemeClr val="accent1"/>
+          </a:fillRef>
+          <a:effectRef idx="2">
+            <a:schemeClr val="accent1"/>
+          </a:effectRef>
+          <a:fontRef idx="minor">
+            <a:schemeClr val="lt1"/>
+          </a:fontRef>
+        </p:style>
+        <p:txBody>
+          <a:bodyPr rtlCol="0" anchor="ctr"/>
+          <a:lstStyle/>
+          <a:p>
+            <a:pPr algn="ctr"/>
+          </a:p>
+        </p:txBody>
+      </p:sp>
+      <p:sp>
+        <p:nvSpPr>
+          <p:cNvPr id="10" name="Rectangle 9"/>
+          <p:cNvSpPr/>
+          <p:nvPr/>
+        </p:nvSpPr>
+        <p:spPr>
+          <a:xfrm>
+            <a:off x="4343400" y="1737360"/>
+            <a:ext cx="64008" cy="2651760"/>
+          </a:xfrm>
+          <a:prstGeom prst="rect">
+            <a:avLst/>
+          </a:prstGeom>
+          <a:solidFill>
+            <a:srgbClr val="1E2761"/>
+          </a:solidFill>
+          <a:ln>
+            <a:noFill/>
+          </a:ln>
+          <a:effectLst/>
+        </p:spPr>
+        <p:style>
+          <a:lnRef idx="1">
+            <a:schemeClr val="accent1"/>
+          </a:lnRef>
+          <a:fillRef idx="3">
+            <a:schemeClr val="accent1"/>
+          </a:fillRef>
+          <a:effectRef idx="2">
+            <a:schemeClr val="accent1"/>
+          </a:effectRef>
+          <a:fontRef idx="minor">
+            <a:schemeClr val="lt1"/>
+          </a:fontRef>
+        </p:style>
+        <p:txBody>
+          <a:bodyPr rtlCol="0" anchor="ctr"/>
+          <a:lstStyle/>
+          <a:p>
+            <a:pPr algn="ctr"/>
+          </a:p>
+        </p:txBody>
+      </p:sp>
+      <p:sp>
+        <p:nvSpPr>
+          <p:cNvPr id="11" name="TextBox 10"/>
+          <p:cNvSpPr txBox="1"/>
+          <p:nvPr/>
+        </p:nvSpPr>
+        <p:spPr>
+          <a:xfrm>
+            <a:off x="4572000" y="1965960"/>
+            <a:ext cx="3063240" cy="457200"/>
+          </a:xfrm>
+          <a:prstGeom prst="rect">
+            <a:avLst/>
+          </a:prstGeom>
+          <a:noFill/>
+        </p:spPr>
+        <p:txBody>
+          <a:bodyPr wrap="square" anchor="t" lIns="0" rIns="0" tIns="0" bIns="0">
+            <a:spAutoFit/>
+          </a:bodyPr>
+          <a:lstStyle/>
+          <a:p>
+            <a:pPr algn="l"/>
+            <a:r>
+              <a:rPr sz="1500" b="1" i="0">
+                <a:solidFill>
+                  <a:srgbClr val="1E2761"/>
+                </a:solidFill>
+                <a:latin typeface="Calibri"/>
+              </a:rPr>
+              <a:t>방법</a:t>
+            </a:r>
+          </a:p>
+        </p:txBody>
+      </p:sp>
+      <p:sp>
+        <p:nvSpPr>
+          <p:cNvPr id="12" name="TextBox 11"/>
+          <p:cNvSpPr txBox="1"/>
+          <p:nvPr/>
+        </p:nvSpPr>
+        <p:spPr>
+          <a:xfrm>
+            <a:off x="4572000" y="2468880"/>
+            <a:ext cx="3063240" cy="1828800"/>
+          </a:xfrm>
+          <a:prstGeom prst="rect">
+            <a:avLst/>
+          </a:prstGeom>
+          <a:noFill/>
+        </p:spPr>
+        <p:txBody>
+          <a:bodyPr wrap="square" anchor="t" lIns="0" rIns="0" tIns="0" bIns="0">
+            <a:spAutoFit/>
+          </a:bodyPr>
+          <a:lstStyle/>
+          <a:p>
+            <a:pPr algn="l">
+              <a:lnSpc>
+                <a:spcPct val="135000"/>
+              </a:lnSpc>
+            </a:pPr>
+            <a:r>
+              <a:rPr sz="1200" b="0" i="0">
+                <a:solidFill>
+                  <a:srgbClr val="21295C"/>
+                </a:solidFill>
+                <a:latin typeface="Calibri"/>
+              </a:rPr>
+              <a:t>확률보정까지 마친 ML 모델을 전체 리뷰에 한 번</a:t>
+            </a:r>
+          </a:p>
+          <a:p>
+            <a:pPr algn="l">
+              <a:lnSpc>
+                <a:spcPct val="135000"/>
+              </a:lnSpc>
+            </a:pPr>
+            <a:r>
+              <a:rPr sz="1200" b="0" i="0">
+                <a:solidFill>
+                  <a:srgbClr val="21295C"/>
+                </a:solidFill>
+                <a:latin typeface="Calibri"/>
+              </a:rPr>
+              <a:t>배치로 돌려서, 모델이 텍스트로 판단한 감성과 별점</a:t>
+            </a:r>
+          </a:p>
+          <a:p>
+            <a:pPr algn="l">
+              <a:lnSpc>
+                <a:spcPct val="135000"/>
+              </a:lnSpc>
+            </a:pPr>
+            <a:r>
+              <a:rPr sz="1200" b="0" i="0">
+                <a:solidFill>
+                  <a:srgbClr val="21295C"/>
+                </a:solidFill>
+                <a:latin typeface="Calibri"/>
+              </a:rPr>
+              <a:t>기반 라벨이 상품별로 얼마나 일치하는지 계산</a:t>
+            </a:r>
+          </a:p>
+        </p:txBody>
+      </p:sp>
+      <p:sp>
+        <p:nvSpPr>
+          <p:cNvPr id="13" name="Rectangle 12"/>
+          <p:cNvSpPr/>
+          <p:nvPr/>
+        </p:nvSpPr>
+        <p:spPr>
+          <a:xfrm>
+            <a:off x="8046719" y="1737360"/>
+            <a:ext cx="3520440" cy="2651760"/>
+          </a:xfrm>
+          <a:prstGeom prst="rect">
+            <a:avLst/>
+          </a:prstGeom>
+          <a:solidFill>
+            <a:srgbClr val="F5F6FA"/>
+          </a:solidFill>
+          <a:ln>
+            <a:noFill/>
+          </a:ln>
+          <a:effectLst/>
+        </p:spPr>
+        <p:style>
+          <a:lnRef idx="1">
+            <a:schemeClr val="accent1"/>
+          </a:lnRef>
+          <a:fillRef idx="3">
+            <a:schemeClr val="accent1"/>
+          </a:fillRef>
+          <a:effectRef idx="2">
+            <a:schemeClr val="accent1"/>
+          </a:effectRef>
+          <a:fontRef idx="minor">
+            <a:schemeClr val="lt1"/>
+          </a:fontRef>
+        </p:style>
+        <p:txBody>
+          <a:bodyPr rtlCol="0" anchor="ctr"/>
+          <a:lstStyle/>
+          <a:p>
+            <a:pPr algn="ctr"/>
+          </a:p>
+        </p:txBody>
+      </p:sp>
+      <p:sp>
+        <p:nvSpPr>
+          <p:cNvPr id="14" name="Rectangle 13"/>
+          <p:cNvSpPr/>
+          <p:nvPr/>
+        </p:nvSpPr>
+        <p:spPr>
+          <a:xfrm>
+            <a:off x="8046719" y="1737360"/>
+            <a:ext cx="64008" cy="2651760"/>
+          </a:xfrm>
+          <a:prstGeom prst="rect">
+            <a:avLst/>
+          </a:prstGeom>
+          <a:solidFill>
+            <a:srgbClr val="B85A4D"/>
+          </a:solidFill>
+          <a:ln>
+            <a:noFill/>
+          </a:ln>
+          <a:effectLst/>
+        </p:spPr>
+        <p:style>
+          <a:lnRef idx="1">
+            <a:schemeClr val="accent1"/>
+          </a:lnRef>
+          <a:fillRef idx="3">
+            <a:schemeClr val="accent1"/>
+          </a:fillRef>
+          <a:effectRef idx="2">
+            <a:schemeClr val="accent1"/>
+          </a:effectRef>
+          <a:fontRef idx="minor">
+            <a:schemeClr val="lt1"/>
+          </a:fontRef>
+        </p:style>
+        <p:txBody>
+          <a:bodyPr rtlCol="0" anchor="ctr"/>
+          <a:lstStyle/>
+          <a:p>
+            <a:pPr algn="ctr"/>
+          </a:p>
+        </p:txBody>
+      </p:sp>
+      <p:sp>
+        <p:nvSpPr>
+          <p:cNvPr id="15" name="TextBox 14"/>
+          <p:cNvSpPr txBox="1"/>
+          <p:nvPr/>
+        </p:nvSpPr>
+        <p:spPr>
+          <a:xfrm>
+            <a:off x="8275319" y="1965960"/>
+            <a:ext cx="3063240" cy="457200"/>
+          </a:xfrm>
+          <a:prstGeom prst="rect">
+            <a:avLst/>
+          </a:prstGeom>
+          <a:noFill/>
+        </p:spPr>
+        <p:txBody>
+          <a:bodyPr wrap="square" anchor="t" lIns="0" rIns="0" tIns="0" bIns="0">
+            <a:spAutoFit/>
+          </a:bodyPr>
+          <a:lstStyle/>
+          <a:p>
+            <a:pPr algn="l"/>
+            <a:r>
+              <a:rPr sz="1500" b="1" i="0">
+                <a:solidFill>
+                  <a:srgbClr val="1E2761"/>
+                </a:solidFill>
+                <a:latin typeface="Calibri"/>
+              </a:rPr>
+              <a:t>결과</a:t>
+            </a:r>
+          </a:p>
+        </p:txBody>
+      </p:sp>
+      <p:sp>
+        <p:nvSpPr>
+          <p:cNvPr id="16" name="TextBox 15"/>
+          <p:cNvSpPr txBox="1"/>
+          <p:nvPr/>
+        </p:nvSpPr>
+        <p:spPr>
+          <a:xfrm>
+            <a:off x="8275319" y="2468880"/>
+            <a:ext cx="3063240" cy="1828800"/>
+          </a:xfrm>
+          <a:prstGeom prst="rect">
+            <a:avLst/>
+          </a:prstGeom>
+          <a:noFill/>
+        </p:spPr>
+        <p:txBody>
+          <a:bodyPr wrap="square" anchor="t" lIns="0" rIns="0" tIns="0" bIns="0">
+            <a:spAutoFit/>
+          </a:bodyPr>
+          <a:lstStyle/>
+          <a:p>
+            <a:pPr algn="l">
+              <a:lnSpc>
+                <a:spcPct val="135000"/>
+              </a:lnSpc>
+            </a:pPr>
+            <a:r>
+              <a:rPr sz="1200" b="0" i="0">
+                <a:solidFill>
+                  <a:srgbClr val="21295C"/>
+                </a:solidFill>
+                <a:latin typeface="Calibri"/>
+              </a:rPr>
+              <a:t>상품 리포트에 "리뷰 신뢰도" 지표로 노출 — 신뢰도가</a:t>
+            </a:r>
+          </a:p>
+          <a:p>
+            <a:pPr algn="l">
+              <a:lnSpc>
+                <a:spcPct val="135000"/>
+              </a:lnSpc>
+            </a:pPr>
+            <a:r>
+              <a:rPr sz="1200" b="0" i="0">
+                <a:solidFill>
+                  <a:srgbClr val="21295C"/>
+                </a:solidFill>
+                <a:latin typeface="Calibri"/>
+              </a:rPr>
+              <a:t>낮은 상품은 "속성 분석을 더 신중하게 보라"는</a:t>
+            </a:r>
+          </a:p>
+          <a:p>
+            <a:pPr algn="l">
+              <a:lnSpc>
+                <a:spcPct val="135000"/>
+              </a:lnSpc>
+            </a:pPr>
+            <a:r>
+              <a:rPr sz="1200" b="0" i="0">
+                <a:solidFill>
+                  <a:srgbClr val="21295C"/>
+                </a:solidFill>
+                <a:latin typeface="Calibri"/>
+              </a:rPr>
+              <a:t>안내까지 자동으로 붙는다</a:t>
+            </a:r>
+          </a:p>
+        </p:txBody>
+      </p:sp>
+      <p:sp>
+        <p:nvSpPr>
+          <p:cNvPr id="17" name="TextBox 16"/>
+          <p:cNvSpPr txBox="1"/>
+          <p:nvPr/>
+        </p:nvSpPr>
+        <p:spPr>
+          <a:xfrm>
+            <a:off x="640080" y="4663440"/>
+            <a:ext cx="10881360" cy="457200"/>
+          </a:xfrm>
+          <a:prstGeom prst="rect">
+            <a:avLst/>
+          </a:prstGeom>
+          <a:noFill/>
+        </p:spPr>
+        <p:txBody>
+          <a:bodyPr wrap="square" anchor="t" lIns="0" rIns="0" tIns="0" bIns="0">
+            <a:spAutoFit/>
+          </a:bodyPr>
+          <a:lstStyle/>
+          <a:p>
+            <a:pPr algn="l"/>
+            <a:r>
+              <a:rPr sz="1400" b="1" i="0">
+                <a:solidFill>
+                  <a:srgbClr val="1E2761"/>
+                </a:solidFill>
+                <a:latin typeface="Calibri"/>
+              </a:rPr>
+              <a:t>→ 모델은 비교 실험으로 끝나지 않고, 서비스가 보여주는 정보의 신뢰도를 검증하는 백엔드 역할을 한다</a:t>
+            </a:r>
+          </a:p>
+        </p:txBody>
+      </p:sp>
+    </p:spTree>
+  </p:cSld>
+  <p:clrMapOvr>
+    <a:masterClrMapping/>
+  </p:clrMapOvr>
+</p:sld>
+</file>
+
 <file path=ppt/theme/theme1.xml><?xml version="1.0" encoding="utf-8"?>
 <a:theme xmlns:a="http://schemas.openxmlformats.org/drawingml/2006/main" name="Office Theme">
   <a:themeElements>

--- a/BeautyScope_발표.pptx
+++ b/BeautyScope_발표.pptx
@@ -9158,8 +9158,43 @@
         </p:nvSpPr>
         <p:spPr>
           <a:xfrm>
-            <a:off x="640080" y="4663440"/>
-            <a:ext cx="10881360" cy="457200"/>
+            <a:off x="640080" y="4526280"/>
+            <a:ext cx="3611880" cy="538581"/>
+          </a:xfrm>
+          <a:prstGeom prst="rect">
+            <a:avLst/>
+          </a:prstGeom>
+          <a:noFill/>
+        </p:spPr>
+        <p:txBody>
+          <a:bodyPr wrap="square" anchor="b" lIns="0" rIns="0" tIns="0" bIns="0">
+            <a:spAutoFit/>
+          </a:bodyPr>
+          <a:lstStyle/>
+          <a:p>
+            <a:pPr algn="ctr"/>
+            <a:r>
+              <a:rPr sz="3600" b="1" i="0">
+                <a:solidFill>
+                  <a:srgbClr val="1E2761"/>
+                </a:solidFill>
+                <a:latin typeface="Calibri"/>
+              </a:rPr>
+              <a:t>1,883개</a:t>
+            </a:r>
+          </a:p>
+        </p:txBody>
+      </p:sp>
+      <p:sp>
+        <p:nvSpPr>
+          <p:cNvPr id="18" name="TextBox 17"/>
+          <p:cNvSpPr txBox="1"/>
+          <p:nvPr/>
+        </p:nvSpPr>
+        <p:spPr>
+          <a:xfrm>
+            <a:off x="640080" y="5064861"/>
+            <a:ext cx="3611880" cy="330098"/>
           </a:xfrm>
           <a:prstGeom prst="rect">
             <a:avLst/>
@@ -9172,6 +9207,181 @@
           </a:bodyPr>
           <a:lstStyle/>
           <a:p>
+            <a:pPr algn="ctr"/>
+            <a:r>
+              <a:rPr sz="1250" b="0" i="0">
+                <a:solidFill>
+                  <a:srgbClr val="6B7280"/>
+                </a:solidFill>
+                <a:latin typeface="Calibri"/>
+              </a:rPr>
+              <a:t>대상 상품</a:t>
+            </a:r>
+          </a:p>
+        </p:txBody>
+      </p:sp>
+      <p:sp>
+        <p:nvSpPr>
+          <p:cNvPr id="19" name="TextBox 18"/>
+          <p:cNvSpPr txBox="1"/>
+          <p:nvPr/>
+        </p:nvSpPr>
+        <p:spPr>
+          <a:xfrm>
+            <a:off x="4251960" y="4526280"/>
+            <a:ext cx="3611880" cy="538581"/>
+          </a:xfrm>
+          <a:prstGeom prst="rect">
+            <a:avLst/>
+          </a:prstGeom>
+          <a:noFill/>
+        </p:spPr>
+        <p:txBody>
+          <a:bodyPr wrap="square" anchor="b" lIns="0" rIns="0" tIns="0" bIns="0">
+            <a:spAutoFit/>
+          </a:bodyPr>
+          <a:lstStyle/>
+          <a:p>
+            <a:pPr algn="ctr"/>
+            <a:r>
+              <a:rPr sz="3600" b="1" i="0">
+                <a:solidFill>
+                  <a:srgbClr val="1E2761"/>
+                </a:solidFill>
+                <a:latin typeface="Calibri"/>
+              </a:rPr>
+              <a:t>90.2%</a:t>
+            </a:r>
+          </a:p>
+        </p:txBody>
+      </p:sp>
+      <p:sp>
+        <p:nvSpPr>
+          <p:cNvPr id="20" name="TextBox 19"/>
+          <p:cNvSpPr txBox="1"/>
+          <p:nvPr/>
+        </p:nvSpPr>
+        <p:spPr>
+          <a:xfrm>
+            <a:off x="4251960" y="5064861"/>
+            <a:ext cx="3611880" cy="330098"/>
+          </a:xfrm>
+          <a:prstGeom prst="rect">
+            <a:avLst/>
+          </a:prstGeom>
+          <a:noFill/>
+        </p:spPr>
+        <p:txBody>
+          <a:bodyPr wrap="square" anchor="t" lIns="0" rIns="0" tIns="0" bIns="0">
+            <a:spAutoFit/>
+          </a:bodyPr>
+          <a:lstStyle/>
+          <a:p>
+            <a:pPr algn="ctr"/>
+            <a:r>
+              <a:rPr sz="1250" b="0" i="0">
+                <a:solidFill>
+                  <a:srgbClr val="6B7280"/>
+                </a:solidFill>
+                <a:latin typeface="Calibri"/>
+              </a:rPr>
+              <a:t>평균 리뷰 신뢰도</a:t>
+            </a:r>
+          </a:p>
+        </p:txBody>
+      </p:sp>
+      <p:sp>
+        <p:nvSpPr>
+          <p:cNvPr id="21" name="TextBox 20"/>
+          <p:cNvSpPr txBox="1"/>
+          <p:nvPr/>
+        </p:nvSpPr>
+        <p:spPr>
+          <a:xfrm>
+            <a:off x="7863840" y="4526280"/>
+            <a:ext cx="3611880" cy="538581"/>
+          </a:xfrm>
+          <a:prstGeom prst="rect">
+            <a:avLst/>
+          </a:prstGeom>
+          <a:noFill/>
+        </p:spPr>
+        <p:txBody>
+          <a:bodyPr wrap="square" anchor="b" lIns="0" rIns="0" tIns="0" bIns="0">
+            <a:spAutoFit/>
+          </a:bodyPr>
+          <a:lstStyle/>
+          <a:p>
+            <a:pPr algn="ctr"/>
+            <a:r>
+              <a:rPr sz="3600" b="1" i="0">
+                <a:solidFill>
+                  <a:srgbClr val="1E2761"/>
+                </a:solidFill>
+                <a:latin typeface="Calibri"/>
+              </a:rPr>
+              <a:t>46.3~100%</a:t>
+            </a:r>
+          </a:p>
+        </p:txBody>
+      </p:sp>
+      <p:sp>
+        <p:nvSpPr>
+          <p:cNvPr id="22" name="TextBox 21"/>
+          <p:cNvSpPr txBox="1"/>
+          <p:nvPr/>
+        </p:nvSpPr>
+        <p:spPr>
+          <a:xfrm>
+            <a:off x="7863840" y="5064861"/>
+            <a:ext cx="3611880" cy="330098"/>
+          </a:xfrm>
+          <a:prstGeom prst="rect">
+            <a:avLst/>
+          </a:prstGeom>
+          <a:noFill/>
+        </p:spPr>
+        <p:txBody>
+          <a:bodyPr wrap="square" anchor="t" lIns="0" rIns="0" tIns="0" bIns="0">
+            <a:spAutoFit/>
+          </a:bodyPr>
+          <a:lstStyle/>
+          <a:p>
+            <a:pPr algn="ctr"/>
+            <a:r>
+              <a:rPr sz="1250" b="0" i="0">
+                <a:solidFill>
+                  <a:srgbClr val="6B7280"/>
+                </a:solidFill>
+                <a:latin typeface="Calibri"/>
+              </a:rPr>
+              <a:t>상품별 분포</a:t>
+            </a:r>
+          </a:p>
+        </p:txBody>
+      </p:sp>
+      <p:sp>
+        <p:nvSpPr>
+          <p:cNvPr id="23" name="TextBox 22"/>
+          <p:cNvSpPr txBox="1"/>
+          <p:nvPr/>
+        </p:nvSpPr>
+        <p:spPr>
+          <a:xfrm>
+            <a:off x="640080" y="5486400"/>
+            <a:ext cx="10881360" cy="457200"/>
+          </a:xfrm>
+          <a:prstGeom prst="rect">
+            <a:avLst/>
+          </a:prstGeom>
+          <a:noFill/>
+        </p:spPr>
+        <p:txBody>
+          <a:bodyPr wrap="square" anchor="t" lIns="0" rIns="0" tIns="0" bIns="0">
+            <a:spAutoFit/>
+          </a:bodyPr>
+          <a:lstStyle/>
+          <a:p>
             <a:pPr algn="l"/>
             <a:r>
               <a:rPr sz="1400" b="1" i="0">
@@ -9181,6 +9391,41 @@
                 <a:latin typeface="Calibri"/>
               </a:rPr>
               <a:t>→ 모델은 비교 실험으로 끝나지 않고, 서비스가 보여주는 정보의 신뢰도를 검증하는 백엔드 역할을 한다</a:t>
+            </a:r>
+          </a:p>
+        </p:txBody>
+      </p:sp>
+      <p:sp>
+        <p:nvSpPr>
+          <p:cNvPr id="24" name="TextBox 23"/>
+          <p:cNvSpPr txBox="1"/>
+          <p:nvPr/>
+        </p:nvSpPr>
+        <p:spPr>
+          <a:xfrm>
+            <a:off x="640080" y="5943600"/>
+            <a:ext cx="10881360" cy="365760"/>
+          </a:xfrm>
+          <a:prstGeom prst="rect">
+            <a:avLst/>
+          </a:prstGeom>
+          <a:noFill/>
+        </p:spPr>
+        <p:txBody>
+          <a:bodyPr wrap="square" anchor="t" lIns="0" rIns="0" tIns="0" bIns="0">
+            <a:spAutoFit/>
+          </a:bodyPr>
+          <a:lstStyle/>
+          <a:p>
+            <a:pPr algn="l"/>
+            <a:r>
+              <a:rPr sz="1100" b="0" i="1">
+                <a:solidFill>
+                  <a:srgbClr val="6B7280"/>
+                </a:solidFill>
+                <a:latin typeface="Calibri"/>
+              </a:rPr>
+              <a:t>※ 라벨 노이즈를 없앤 것은 아니다 — 사용자에게 투명하게 드러내서 대응한 것</a:t>
             </a:r>
           </a:p>
         </p:txBody>
